--- a/WaNet答辩.pptx
+++ b/WaNet答辩.pptx
@@ -19,6 +19,7 @@
     <p:sldId id="267" r:id="rId18"/>
     <p:sldId id="268" r:id="rId19"/>
     <p:sldId id="269" r:id="rId20"/>
+    <p:sldId id="270" r:id="rId21"/>
   </p:sldIdLst>
   <p:sldSz cx="12191695" cy="6858000" type="screen4x3"/>
   <p:notesSz cx="6858000" cy="9144000"/>
@@ -3097,7 +3098,7 @@
     <p:bg>
       <p:bgPr>
         <a:solidFill>
-          <a:srgbClr val="0A1628"/>
+          <a:srgbClr val="FAF8F5"/>
         </a:solidFill>
         <a:effectLst/>
       </p:bgPr>
@@ -3117,14 +3118,14 @@
         </p:nvSpPr>
         <p:spPr>
           <a:xfrm>
-            <a:off x="1828800" y="1828800"/>
-            <a:ext cx="8534095" cy="25400"/>
+            <a:off x="2743200" y="2194560"/>
+            <a:ext cx="6705295" cy="12700"/>
           </a:xfrm>
           <a:prstGeom prst="rect">
             <a:avLst/>
           </a:prstGeom>
           <a:solidFill>
-            <a:srgbClr val="C9A96E"/>
+            <a:srgbClr val="C2A497"/>
           </a:solidFill>
           <a:ln>
             <a:noFill/>
@@ -3160,8 +3161,8 @@
         </p:nvSpPr>
         <p:spPr>
           <a:xfrm>
-            <a:off x="1828800" y="2103120"/>
-            <a:ext cx="8534095" cy="1371600"/>
+            <a:off x="2743200" y="2468880"/>
+            <a:ext cx="6705295" cy="1097280"/>
           </a:xfrm>
           <a:prstGeom prst="rect">
             <a:avLst/>
@@ -3175,9 +3176,9 @@
           <a:lstStyle/>
           <a:p>
             <a:pPr algn="ctr">
-              <a:defRPr sz="4400" b="1">
-                <a:solidFill>
-                  <a:srgbClr val="F0EEE8"/>
+              <a:defRPr sz="4200" b="1">
+                <a:solidFill>
+                  <a:srgbClr val="3D3D3D"/>
                 </a:solidFill>
                 <a:latin typeface="Microsoft YaHei"/>
               </a:defRPr>
@@ -3196,8 +3197,8 @@
         </p:nvSpPr>
         <p:spPr>
           <a:xfrm>
-            <a:off x="1828800" y="3291840"/>
-            <a:ext cx="8534095" cy="548640"/>
+            <a:off x="2743200" y="3474720"/>
+            <a:ext cx="6705295" cy="457200"/>
           </a:xfrm>
           <a:prstGeom prst="rect">
             <a:avLst/>
@@ -3211,35 +3212,71 @@
           <a:lstStyle/>
           <a:p>
             <a:pPr algn="ctr">
-              <a:defRPr sz="2200" b="0">
-                <a:solidFill>
-                  <a:srgbClr val="C9A96E"/>
-                </a:solidFill>
-                <a:latin typeface="Microsoft YaHei"/>
-              </a:defRPr>
-            </a:pPr>
-            <a:r>
-              <a:t>WaNet复现与分析 | AI安全课程设计</a:t>
-            </a:r>
-          </a:p>
-        </p:txBody>
-      </p:sp>
-      <p:sp>
-        <p:nvSpPr>
-          <p:cNvPr id="5" name="Rectangle 4"/>
+              <a:defRPr sz="2000" b="0">
+                <a:solidFill>
+                  <a:srgbClr val="8C8C8C"/>
+                </a:solidFill>
+                <a:latin typeface="Microsoft YaHei"/>
+              </a:defRPr>
+            </a:pPr>
+            <a:r>
+              <a:t>WaNet 复现与分析  ·  AI安全课程设计</a:t>
+            </a:r>
+          </a:p>
+        </p:txBody>
+      </p:sp>
+      <p:sp>
+        <p:nvSpPr>
+          <p:cNvPr id="5" name="TextBox 4"/>
+          <p:cNvSpPr txBox="1"/>
+          <p:nvPr/>
+        </p:nvSpPr>
+        <p:spPr>
+          <a:xfrm>
+            <a:off x="2743200" y="4114800"/>
+            <a:ext cx="6705295" cy="457200"/>
+          </a:xfrm>
+          <a:prstGeom prst="rect">
+            <a:avLst/>
+          </a:prstGeom>
+          <a:noFill/>
+        </p:spPr>
+        <p:txBody>
+          <a:bodyPr wrap="none">
+            <a:spAutoFit/>
+          </a:bodyPr>
+          <a:lstStyle/>
+          <a:p>
+            <a:pPr algn="ctr">
+              <a:defRPr sz="1600" b="0">
+                <a:solidFill>
+                  <a:srgbClr val="C2A497"/>
+                </a:solidFill>
+                <a:latin typeface="Microsoft YaHei"/>
+              </a:defRPr>
+            </a:pPr>
+            <a:r>
+              <a:t>周争妍  ·  蒋竺君</a:t>
+            </a:r>
+          </a:p>
+        </p:txBody>
+      </p:sp>
+      <p:sp>
+        <p:nvSpPr>
+          <p:cNvPr id="6" name="Rectangle 5"/>
           <p:cNvSpPr/>
           <p:nvPr/>
         </p:nvSpPr>
         <p:spPr>
           <a:xfrm>
-            <a:off x="1828800" y="4023360"/>
-            <a:ext cx="8534095" cy="25400"/>
+            <a:off x="2743200" y="4937760"/>
+            <a:ext cx="6705295" cy="12700"/>
           </a:xfrm>
           <a:prstGeom prst="rect">
             <a:avLst/>
           </a:prstGeom>
           <a:solidFill>
-            <a:srgbClr val="C9A96E"/>
+            <a:srgbClr val="C2A497"/>
           </a:solidFill>
           <a:ln>
             <a:noFill/>
@@ -3264,78 +3301,6 @@
           <a:lstStyle/>
           <a:p>
             <a:pPr algn="ctr"/>
-          </a:p>
-        </p:txBody>
-      </p:sp>
-      <p:sp>
-        <p:nvSpPr>
-          <p:cNvPr id="6" name="TextBox 5"/>
-          <p:cNvSpPr txBox="1"/>
-          <p:nvPr/>
-        </p:nvSpPr>
-        <p:spPr>
-          <a:xfrm>
-            <a:off x="1828800" y="4572000"/>
-            <a:ext cx="8534095" cy="457200"/>
-          </a:xfrm>
-          <a:prstGeom prst="rect">
-            <a:avLst/>
-          </a:prstGeom>
-          <a:noFill/>
-        </p:spPr>
-        <p:txBody>
-          <a:bodyPr wrap="none">
-            <a:spAutoFit/>
-          </a:bodyPr>
-          <a:lstStyle/>
-          <a:p>
-            <a:pPr algn="ctr">
-              <a:defRPr sz="1800" b="0">
-                <a:solidFill>
-                  <a:srgbClr val="8A8F9A"/>
-                </a:solidFill>
-                <a:latin typeface="Microsoft YaHei"/>
-              </a:defRPr>
-            </a:pPr>
-            <a:r>
-              <a:t>周争妍 (主实验+防御)  |  成员2 (消融+频域检测器)</a:t>
-            </a:r>
-          </a:p>
-        </p:txBody>
-      </p:sp>
-      <p:sp>
-        <p:nvSpPr>
-          <p:cNvPr id="7" name="TextBox 6"/>
-          <p:cNvSpPr txBox="1"/>
-          <p:nvPr/>
-        </p:nvSpPr>
-        <p:spPr>
-          <a:xfrm>
-            <a:off x="1828800" y="5029200"/>
-            <a:ext cx="8534095" cy="365760"/>
-          </a:xfrm>
-          <a:prstGeom prst="rect">
-            <a:avLst/>
-          </a:prstGeom>
-          <a:noFill/>
-        </p:spPr>
-        <p:txBody>
-          <a:bodyPr wrap="none">
-            <a:spAutoFit/>
-          </a:bodyPr>
-          <a:lstStyle/>
-          <a:p>
-            <a:pPr algn="ctr">
-              <a:defRPr sz="1400" b="0">
-                <a:solidFill>
-                  <a:srgbClr val="8A8F9A"/>
-                </a:solidFill>
-                <a:latin typeface="Microsoft YaHei"/>
-              </a:defRPr>
-            </a:pPr>
-            <a:r>
-              <a:t>2024-2025春季学期</a:t>
-            </a:r>
           </a:p>
         </p:txBody>
       </p:sp>
@@ -3353,7 +3318,7 @@
     <p:bg>
       <p:bgPr>
         <a:solidFill>
-          <a:srgbClr val="0A1628"/>
+          <a:srgbClr val="FAF8F5"/>
         </a:solidFill>
         <a:effectLst/>
       </p:bgPr>
@@ -3367,20 +3332,56 @@
       <p:grpSpPr/>
       <p:sp>
         <p:nvSpPr>
-          <p:cNvPr id="2" name="Rectangle 1"/>
+          <p:cNvPr id="2" name="TextBox 1"/>
+          <p:cNvSpPr txBox="1"/>
+          <p:nvPr/>
+        </p:nvSpPr>
+        <p:spPr>
+          <a:xfrm>
+            <a:off x="731520" y="457200"/>
+            <a:ext cx="6400800" cy="457200"/>
+          </a:xfrm>
+          <a:prstGeom prst="rect">
+            <a:avLst/>
+          </a:prstGeom>
+          <a:noFill/>
+        </p:spPr>
+        <p:txBody>
+          <a:bodyPr wrap="none">
+            <a:spAutoFit/>
+          </a:bodyPr>
+          <a:lstStyle/>
+          <a:p>
+            <a:pPr algn="l">
+              <a:defRPr sz="3000" b="1">
+                <a:solidFill>
+                  <a:srgbClr val="3D3D3D"/>
+                </a:solidFill>
+                <a:latin typeface="Microsoft YaHei"/>
+              </a:defRPr>
+            </a:pPr>
+            <a:r>
+              <a:t>频域可视化: Clean vs Warped</a:t>
+            </a:r>
+          </a:p>
+        </p:txBody>
+      </p:sp>
+      <p:sp>
+        <p:nvSpPr>
+          <p:cNvPr id="3" name="Rectangle 2"/>
           <p:cNvSpPr/>
           <p:nvPr/>
         </p:nvSpPr>
         <p:spPr>
           <a:xfrm>
-            <a:off x="731520" y="731520"/>
-            <a:ext cx="2286000" cy="25400"/>
+            <a:off x="731520" y="1005840"/>
+            <a:ext cx="1371600" cy="12700"/>
           </a:xfrm>
           <a:prstGeom prst="rect">
             <a:avLst/>
           </a:prstGeom>
           <a:solidFill>
-            <a:srgbClr val="C9A96E"/>
+            <a:srgbClr val="C2A497"/>
           </a:solidFill>
           <a:ln>
             <a:noFill/>
@@ -3410,60 +3411,24 @@
       </p:sp>
       <p:sp>
         <p:nvSpPr>
-          <p:cNvPr id="3" name="TextBox 2"/>
-          <p:cNvSpPr txBox="1"/>
-          <p:nvPr/>
-        </p:nvSpPr>
-        <p:spPr>
-          <a:xfrm>
-            <a:off x="731520" y="914400"/>
-            <a:ext cx="6400800" cy="548640"/>
-          </a:xfrm>
-          <a:prstGeom prst="rect">
-            <a:avLst/>
-          </a:prstGeom>
-          <a:noFill/>
-        </p:spPr>
-        <p:txBody>
-          <a:bodyPr wrap="none">
-            <a:spAutoFit/>
-          </a:bodyPr>
-          <a:lstStyle/>
-          <a:p>
-            <a:pPr algn="l">
-              <a:defRPr sz="3600" b="1">
-                <a:solidFill>
-                  <a:srgbClr val="F0EEE8"/>
-                </a:solidFill>
-                <a:latin typeface="Microsoft YaHei"/>
-              </a:defRPr>
-            </a:pPr>
-            <a:r>
-              <a:t>频域可视化: Clean vs Warped 频谱对比</a:t>
-            </a:r>
-          </a:p>
-        </p:txBody>
-      </p:sp>
-      <p:sp>
-        <p:nvSpPr>
           <p:cNvPr id="4" name="Rounded Rectangle 3"/>
           <p:cNvSpPr/>
           <p:nvPr/>
         </p:nvSpPr>
         <p:spPr>
           <a:xfrm>
-            <a:off x="731520" y="1645920"/>
+            <a:off x="731520" y="1463040"/>
             <a:ext cx="3383280" cy="2103120"/>
           </a:xfrm>
           <a:prstGeom prst="roundRect">
             <a:avLst/>
           </a:prstGeom>
           <a:solidFill>
-            <a:srgbClr val="0F1F3D"/>
+            <a:srgbClr val="FFFFFF"/>
           </a:solidFill>
           <a:ln w="12700">
             <a:solidFill>
-              <a:srgbClr val="8A8F9A"/>
+              <a:srgbClr val="E8E3DD"/>
             </a:solidFill>
           </a:ln>
         </p:spPr>
@@ -3497,7 +3462,7 @@
         </p:nvSpPr>
         <p:spPr>
           <a:xfrm>
-            <a:off x="833120" y="1696720"/>
+            <a:off x="833120" y="1539240"/>
             <a:ext cx="3200400" cy="274320"/>
           </a:xfrm>
           <a:prstGeom prst="rect">
@@ -3512,9 +3477,9 @@
           <a:lstStyle/>
           <a:p>
             <a:pPr algn="ctr">
-              <a:defRPr sz="1300" b="0">
-                <a:solidFill>
-                  <a:srgbClr val="8A8F9A"/>
+              <a:defRPr sz="1200" b="0">
+                <a:solidFill>
+                  <a:srgbClr val="8C8C8C"/>
                 </a:solidFill>
                 <a:latin typeface="Microsoft YaHei"/>
               </a:defRPr>
@@ -3533,18 +3498,18 @@
         </p:nvSpPr>
         <p:spPr>
           <a:xfrm>
-            <a:off x="4389120" y="1645920"/>
+            <a:off x="4389120" y="1463040"/>
             <a:ext cx="3383280" cy="2103120"/>
           </a:xfrm>
           <a:prstGeom prst="roundRect">
             <a:avLst/>
           </a:prstGeom>
           <a:solidFill>
-            <a:srgbClr val="0F1F3D"/>
+            <a:srgbClr val="FFFFFF"/>
           </a:solidFill>
           <a:ln w="12700">
             <a:solidFill>
-              <a:srgbClr val="8A8F9A"/>
+              <a:srgbClr val="E8E3DD"/>
             </a:solidFill>
           </a:ln>
         </p:spPr>
@@ -3578,7 +3543,7 @@
         </p:nvSpPr>
         <p:spPr>
           <a:xfrm>
-            <a:off x="4490720" y="1696720"/>
+            <a:off x="4490720" y="1539240"/>
             <a:ext cx="3200400" cy="274320"/>
           </a:xfrm>
           <a:prstGeom prst="rect">
@@ -3593,9 +3558,9 @@
           <a:lstStyle/>
           <a:p>
             <a:pPr algn="ctr">
-              <a:defRPr sz="1300" b="0">
-                <a:solidFill>
-                  <a:srgbClr val="8A8F9A"/>
+              <a:defRPr sz="1200" b="0">
+                <a:solidFill>
+                  <a:srgbClr val="8C8C8C"/>
                 </a:solidFill>
                 <a:latin typeface="Microsoft YaHei"/>
               </a:defRPr>
@@ -3614,18 +3579,18 @@
         </p:nvSpPr>
         <p:spPr>
           <a:xfrm>
-            <a:off x="8046720" y="1645920"/>
+            <a:off x="8046720" y="1463040"/>
             <a:ext cx="3383280" cy="2103120"/>
           </a:xfrm>
           <a:prstGeom prst="roundRect">
             <a:avLst/>
           </a:prstGeom>
           <a:solidFill>
-            <a:srgbClr val="0F1F3D"/>
+            <a:srgbClr val="FFFFFF"/>
           </a:solidFill>
           <a:ln w="12700">
             <a:solidFill>
-              <a:srgbClr val="8A8F9A"/>
+              <a:srgbClr val="E8E3DD"/>
             </a:solidFill>
           </a:ln>
         </p:spPr>
@@ -3659,7 +3624,7 @@
         </p:nvSpPr>
         <p:spPr>
           <a:xfrm>
-            <a:off x="8148320" y="1696720"/>
+            <a:off x="8148320" y="1539240"/>
             <a:ext cx="3200400" cy="274320"/>
           </a:xfrm>
           <a:prstGeom prst="rect">
@@ -3674,9 +3639,9 @@
           <a:lstStyle/>
           <a:p>
             <a:pPr algn="ctr">
-              <a:defRPr sz="1300" b="0">
-                <a:solidFill>
-                  <a:srgbClr val="8A8F9A"/>
+              <a:defRPr sz="1200" b="0">
+                <a:solidFill>
+                  <a:srgbClr val="8C8C8C"/>
                 </a:solidFill>
                 <a:latin typeface="Microsoft YaHei"/>
               </a:defRPr>
@@ -3695,18 +3660,18 @@
         </p:nvSpPr>
         <p:spPr>
           <a:xfrm>
-            <a:off x="731520" y="4023360"/>
+            <a:off x="731520" y="3840480"/>
             <a:ext cx="3383280" cy="2103120"/>
           </a:xfrm>
           <a:prstGeom prst="roundRect">
             <a:avLst/>
           </a:prstGeom>
           <a:solidFill>
-            <a:srgbClr val="0F1F3D"/>
+            <a:srgbClr val="FFFFFF"/>
           </a:solidFill>
           <a:ln w="12700">
             <a:solidFill>
-              <a:srgbClr val="8A8F9A"/>
+              <a:srgbClr val="E8E3DD"/>
             </a:solidFill>
           </a:ln>
         </p:spPr>
@@ -3740,7 +3705,7 @@
         </p:nvSpPr>
         <p:spPr>
           <a:xfrm>
-            <a:off x="833120" y="4074160"/>
+            <a:off x="833120" y="3916680"/>
             <a:ext cx="3200400" cy="274320"/>
           </a:xfrm>
           <a:prstGeom prst="rect">
@@ -3755,15 +3720,15 @@
           <a:lstStyle/>
           <a:p>
             <a:pPr algn="ctr">
-              <a:defRPr sz="1300" b="0">
-                <a:solidFill>
-                  <a:srgbClr val="8A8F9A"/>
-                </a:solidFill>
-                <a:latin typeface="Microsoft YaHei"/>
-              </a:defRPr>
-            </a:pPr>
-            <a:r>
-              <a:t>Warped Image (Backdoor)</a:t>
+              <a:defRPr sz="1200" b="0">
+                <a:solidFill>
+                  <a:srgbClr val="8C8C8C"/>
+                </a:solidFill>
+                <a:latin typeface="Microsoft YaHei"/>
+              </a:defRPr>
+            </a:pPr>
+            <a:r>
+              <a:t>Warped Image</a:t>
             </a:r>
           </a:p>
         </p:txBody>
@@ -3776,18 +3741,18 @@
         </p:nvSpPr>
         <p:spPr>
           <a:xfrm>
-            <a:off x="4389120" y="4023360"/>
+            <a:off x="4389120" y="3840480"/>
             <a:ext cx="3383280" cy="2103120"/>
           </a:xfrm>
           <a:prstGeom prst="roundRect">
             <a:avLst/>
           </a:prstGeom>
           <a:solidFill>
-            <a:srgbClr val="0F1F3D"/>
+            <a:srgbClr val="FFFFFF"/>
           </a:solidFill>
           <a:ln w="12700">
             <a:solidFill>
-              <a:srgbClr val="8A8F9A"/>
+              <a:srgbClr val="E8E3DD"/>
             </a:solidFill>
           </a:ln>
         </p:spPr>
@@ -3821,7 +3786,7 @@
         </p:nvSpPr>
         <p:spPr>
           <a:xfrm>
-            <a:off x="4490720" y="4074160"/>
+            <a:off x="4490720" y="3916680"/>
             <a:ext cx="3200400" cy="274320"/>
           </a:xfrm>
           <a:prstGeom prst="rect">
@@ -3836,9 +3801,9 @@
           <a:lstStyle/>
           <a:p>
             <a:pPr algn="ctr">
-              <a:defRPr sz="1300" b="0">
-                <a:solidFill>
-                  <a:srgbClr val="8A8F9A"/>
+              <a:defRPr sz="1200" b="0">
+                <a:solidFill>
+                  <a:srgbClr val="8C8C8C"/>
                 </a:solidFill>
                 <a:latin typeface="Microsoft YaHei"/>
               </a:defRPr>
@@ -3857,18 +3822,18 @@
         </p:nvSpPr>
         <p:spPr>
           <a:xfrm>
-            <a:off x="8046720" y="4023360"/>
+            <a:off x="8046720" y="3840480"/>
             <a:ext cx="3383280" cy="2103120"/>
           </a:xfrm>
           <a:prstGeom prst="roundRect">
             <a:avLst/>
           </a:prstGeom>
           <a:solidFill>
-            <a:srgbClr val="0F1F3D"/>
+            <a:srgbClr val="FFFFFF"/>
           </a:solidFill>
           <a:ln w="12700">
             <a:solidFill>
-              <a:srgbClr val="C9A96E"/>
+              <a:srgbClr val="C2A497"/>
             </a:solidFill>
           </a:ln>
         </p:spPr>
@@ -3902,7 +3867,7 @@
         </p:nvSpPr>
         <p:spPr>
           <a:xfrm>
-            <a:off x="8148320" y="4074160"/>
+            <a:off x="8148320" y="3916680"/>
             <a:ext cx="3200400" cy="274320"/>
           </a:xfrm>
           <a:prstGeom prst="rect">
@@ -3917,9 +3882,9 @@
           <a:lstStyle/>
           <a:p>
             <a:pPr algn="ctr">
-              <a:defRPr sz="1300" b="0">
-                <a:solidFill>
-                  <a:srgbClr val="C9A96E"/>
+              <a:defRPr sz="1200" b="0">
+                <a:solidFill>
+                  <a:srgbClr val="C2A497"/>
                 </a:solidFill>
                 <a:latin typeface="Microsoft YaHei"/>
               </a:defRPr>
@@ -3938,8 +3903,8 @@
         </p:nvSpPr>
         <p:spPr>
           <a:xfrm>
-            <a:off x="731520" y="6217920"/>
-            <a:ext cx="10698480" cy="365760"/>
+            <a:off x="731520" y="6309360"/>
+            <a:ext cx="10698480" cy="274320"/>
           </a:xfrm>
           <a:prstGeom prst="rect">
             <a:avLst/>
@@ -3953,15 +3918,15 @@
           <a:lstStyle/>
           <a:p>
             <a:pPr algn="ctr">
-              <a:defRPr sz="1400" b="0">
-                <a:solidFill>
-                  <a:srgbClr val="C9A96E"/>
-                </a:solidFill>
-                <a:latin typeface="Microsoft YaHei"/>
-              </a:defRPr>
-            </a:pPr>
-            <a:r>
-              <a:t>插入 results/freq_detector/fft_spectrum_comparison.png  |  注意右下角: 差异图有明显结构化异常!</a:t>
+              <a:defRPr sz="1200" b="0">
+                <a:solidFill>
+                  <a:srgbClr val="8C8C8C"/>
+                </a:solidFill>
+                <a:latin typeface="Microsoft YaHei"/>
+              </a:defRPr>
+            </a:pPr>
+            <a:r>
+              <a:t>插入 results/freq_detector/fft_spectrum_comparison.png</a:t>
             </a:r>
           </a:p>
         </p:txBody>
@@ -3980,7 +3945,7 @@
     <p:bg>
       <p:bgPr>
         <a:solidFill>
-          <a:srgbClr val="0A1628"/>
+          <a:srgbClr val="FAF8F5"/>
         </a:solidFill>
         <a:effectLst/>
       </p:bgPr>
@@ -3994,20 +3959,56 @@
       <p:grpSpPr/>
       <p:sp>
         <p:nvSpPr>
-          <p:cNvPr id="2" name="Rectangle 1"/>
+          <p:cNvPr id="2" name="TextBox 1"/>
+          <p:cNvSpPr txBox="1"/>
+          <p:nvPr/>
+        </p:nvSpPr>
+        <p:spPr>
+          <a:xfrm>
+            <a:off x="731520" y="457200"/>
+            <a:ext cx="6400800" cy="457200"/>
+          </a:xfrm>
+          <a:prstGeom prst="rect">
+            <a:avLst/>
+          </a:prstGeom>
+          <a:noFill/>
+        </p:spPr>
+        <p:txBody>
+          <a:bodyPr wrap="none">
+            <a:spAutoFit/>
+          </a:bodyPr>
+          <a:lstStyle/>
+          <a:p>
+            <a:pPr algn="l">
+              <a:defRPr sz="3000" b="1">
+                <a:solidFill>
+                  <a:srgbClr val="3D3D3D"/>
+                </a:solidFill>
+                <a:latin typeface="Microsoft YaHei"/>
+              </a:defRPr>
+            </a:pPr>
+            <a:r>
+              <a:t>检测性能: 频域检测器 vs STRIP</a:t>
+            </a:r>
+          </a:p>
+        </p:txBody>
+      </p:sp>
+      <p:sp>
+        <p:nvSpPr>
+          <p:cNvPr id="3" name="Rectangle 2"/>
           <p:cNvSpPr/>
           <p:nvPr/>
         </p:nvSpPr>
         <p:spPr>
           <a:xfrm>
-            <a:off x="731520" y="731520"/>
-            <a:ext cx="2286000" cy="25400"/>
+            <a:off x="731520" y="1005840"/>
+            <a:ext cx="1371600" cy="12700"/>
           </a:xfrm>
           <a:prstGeom prst="rect">
             <a:avLst/>
           </a:prstGeom>
           <a:solidFill>
-            <a:srgbClr val="C9A96E"/>
+            <a:srgbClr val="C2A497"/>
           </a:solidFill>
           <a:ln>
             <a:noFill/>
@@ -4037,42 +4038,6 @@
       </p:sp>
       <p:sp>
         <p:nvSpPr>
-          <p:cNvPr id="3" name="TextBox 2"/>
-          <p:cNvSpPr txBox="1"/>
-          <p:nvPr/>
-        </p:nvSpPr>
-        <p:spPr>
-          <a:xfrm>
-            <a:off x="731520" y="914400"/>
-            <a:ext cx="6400800" cy="548640"/>
-          </a:xfrm>
-          <a:prstGeom prst="rect">
-            <a:avLst/>
-          </a:prstGeom>
-          <a:noFill/>
-        </p:spPr>
-        <p:txBody>
-          <a:bodyPr wrap="none">
-            <a:spAutoFit/>
-          </a:bodyPr>
-          <a:lstStyle/>
-          <a:p>
-            <a:pPr algn="l">
-              <a:defRPr sz="3600" b="1">
-                <a:solidFill>
-                  <a:srgbClr val="F0EEE8"/>
-                </a:solidFill>
-                <a:latin typeface="Microsoft YaHei"/>
-              </a:defRPr>
-            </a:pPr>
-            <a:r>
-              <a:t>检测性能对比: 频域检测器 vs STRIP</a:t>
-            </a:r>
-          </a:p>
-        </p:txBody>
-      </p:sp>
-      <p:sp>
-        <p:nvSpPr>
           <p:cNvPr id="4" name="Rounded Rectangle 3"/>
           <p:cNvSpPr/>
           <p:nvPr/>
@@ -4086,11 +4051,11 @@
             <a:avLst/>
           </a:prstGeom>
           <a:solidFill>
-            <a:srgbClr val="0F1F3D"/>
+            <a:srgbClr val="FFFFFF"/>
           </a:solidFill>
-          <a:ln w="19050">
+          <a:ln w="12700">
             <a:solidFill>
-              <a:srgbClr val="5DC88A"/>
+              <a:srgbClr val="E8E3DD"/>
             </a:solidFill>
           </a:ln>
         </p:spPr>
@@ -4124,8 +4089,8 @@
         </p:nvSpPr>
         <p:spPr>
           <a:xfrm>
-            <a:off x="883920" y="1955800"/>
-            <a:ext cx="3169920" cy="279400"/>
+            <a:off x="909320" y="1955800"/>
+            <a:ext cx="3119120" cy="254000"/>
           </a:xfrm>
           <a:prstGeom prst="rect">
             <a:avLst/>
@@ -4139,9 +4104,9 @@
           <a:lstStyle/>
           <a:p>
             <a:pPr algn="ctr">
-              <a:defRPr sz="1200" b="0">
-                <a:solidFill>
-                  <a:srgbClr val="8A8F9A"/>
+              <a:defRPr sz="1100" b="0">
+                <a:solidFill>
+                  <a:srgbClr val="8C8C8C"/>
                 </a:solidFill>
                 <a:latin typeface="Microsoft YaHei"/>
               </a:defRPr>
@@ -4160,8 +4125,8 @@
         </p:nvSpPr>
         <p:spPr>
           <a:xfrm>
-            <a:off x="883920" y="2260600"/>
-            <a:ext cx="3169920" cy="457200"/>
+            <a:off x="909320" y="2235200"/>
+            <a:ext cx="3119120" cy="457200"/>
           </a:xfrm>
           <a:prstGeom prst="rect">
             <a:avLst/>
@@ -4175,9 +4140,9 @@
           <a:lstStyle/>
           <a:p>
             <a:pPr algn="ctr">
-              <a:defRPr sz="2800" b="1">
-                <a:solidFill>
-                  <a:srgbClr val="5DC88A"/>
+              <a:defRPr sz="2600" b="1">
+                <a:solidFill>
+                  <a:srgbClr val="7AA884"/>
                 </a:solidFill>
                 <a:latin typeface="Microsoft YaHei"/>
               </a:defRPr>
@@ -4196,8 +4161,8 @@
         </p:nvSpPr>
         <p:spPr>
           <a:xfrm>
-            <a:off x="883920" y="3378200"/>
-            <a:ext cx="3169920" cy="203200"/>
+            <a:off x="909320" y="3403600"/>
+            <a:ext cx="3119120" cy="203200"/>
           </a:xfrm>
           <a:prstGeom prst="rect">
             <a:avLst/>
@@ -4211,9 +4176,9 @@
           <a:lstStyle/>
           <a:p>
             <a:pPr algn="ctr">
-              <a:defRPr sz="1000" b="0">
-                <a:solidFill>
-                  <a:srgbClr val="8A8F9A"/>
+              <a:defRPr sz="900" b="0">
+                <a:solidFill>
+                  <a:srgbClr val="8C8C8C"/>
                 </a:solidFill>
                 <a:latin typeface="Microsoft YaHei"/>
               </a:defRPr>
@@ -4239,11 +4204,11 @@
             <a:avLst/>
           </a:prstGeom>
           <a:solidFill>
-            <a:srgbClr val="0F1F3D"/>
+            <a:srgbClr val="FFFFFF"/>
           </a:solidFill>
-          <a:ln w="19050">
+          <a:ln w="12700">
             <a:solidFill>
-              <a:srgbClr val="E85D5D"/>
+              <a:srgbClr val="E8E3DD"/>
             </a:solidFill>
           </a:ln>
         </p:spPr>
@@ -4277,8 +4242,8 @@
         </p:nvSpPr>
         <p:spPr>
           <a:xfrm>
-            <a:off x="4724400" y="1955800"/>
-            <a:ext cx="3169920" cy="279400"/>
+            <a:off x="4749800" y="1955800"/>
+            <a:ext cx="3119120" cy="254000"/>
           </a:xfrm>
           <a:prstGeom prst="rect">
             <a:avLst/>
@@ -4292,9 +4257,9 @@
           <a:lstStyle/>
           <a:p>
             <a:pPr algn="ctr">
-              <a:defRPr sz="1200" b="0">
-                <a:solidFill>
-                  <a:srgbClr val="8A8F9A"/>
+              <a:defRPr sz="1100" b="0">
+                <a:solidFill>
+                  <a:srgbClr val="8C8C8C"/>
                 </a:solidFill>
                 <a:latin typeface="Microsoft YaHei"/>
               </a:defRPr>
@@ -4313,8 +4278,8 @@
         </p:nvSpPr>
         <p:spPr>
           <a:xfrm>
-            <a:off x="4724400" y="2260600"/>
-            <a:ext cx="3169920" cy="457200"/>
+            <a:off x="4749800" y="2235200"/>
+            <a:ext cx="3119120" cy="457200"/>
           </a:xfrm>
           <a:prstGeom prst="rect">
             <a:avLst/>
@@ -4328,9 +4293,9 @@
           <a:lstStyle/>
           <a:p>
             <a:pPr algn="ctr">
-              <a:defRPr sz="2800" b="1">
-                <a:solidFill>
-                  <a:srgbClr val="E85D5D"/>
+              <a:defRPr sz="2600" b="1">
+                <a:solidFill>
+                  <a:srgbClr val="D4847A"/>
                 </a:solidFill>
                 <a:latin typeface="Microsoft YaHei"/>
               </a:defRPr>
@@ -4349,8 +4314,8 @@
         </p:nvSpPr>
         <p:spPr>
           <a:xfrm>
-            <a:off x="4724400" y="3378200"/>
-            <a:ext cx="3169920" cy="203200"/>
+            <a:off x="4749800" y="3403600"/>
+            <a:ext cx="3119120" cy="203200"/>
           </a:xfrm>
           <a:prstGeom prst="rect">
             <a:avLst/>
@@ -4364,9 +4329,9 @@
           <a:lstStyle/>
           <a:p>
             <a:pPr algn="ctr">
-              <a:defRPr sz="1000" b="0">
-                <a:solidFill>
-                  <a:srgbClr val="8A8F9A"/>
+              <a:defRPr sz="900" b="0">
+                <a:solidFill>
+                  <a:srgbClr val="8C8C8C"/>
                 </a:solidFill>
                 <a:latin typeface="Microsoft YaHei"/>
               </a:defRPr>
@@ -4392,11 +4357,11 @@
             <a:avLst/>
           </a:prstGeom>
           <a:solidFill>
-            <a:srgbClr val="0F1F3D"/>
+            <a:srgbClr val="FFFFFF"/>
           </a:solidFill>
-          <a:ln w="19050">
+          <a:ln w="12700">
             <a:solidFill>
-              <a:srgbClr val="C9A96E"/>
+              <a:srgbClr val="E8E3DD"/>
             </a:solidFill>
           </a:ln>
         </p:spPr>
@@ -4430,8 +4395,116 @@
         </p:nvSpPr>
         <p:spPr>
           <a:xfrm>
-            <a:off x="8564880" y="1955800"/>
-            <a:ext cx="2895600" cy="279400"/>
+            <a:off x="8590280" y="1955800"/>
+            <a:ext cx="2844800" cy="254000"/>
+          </a:xfrm>
+          <a:prstGeom prst="rect">
+            <a:avLst/>
+          </a:prstGeom>
+          <a:noFill/>
+        </p:spPr>
+        <p:txBody>
+          <a:bodyPr wrap="none">
+            <a:spAutoFit/>
+          </a:bodyPr>
+          <a:lstStyle/>
+          <a:p>
+            <a:pPr algn="ctr">
+              <a:defRPr sz="1100" b="0">
+                <a:solidFill>
+                  <a:srgbClr val="8C8C8C"/>
+                </a:solidFill>
+                <a:latin typeface="Microsoft YaHei"/>
+              </a:defRPr>
+            </a:pPr>
+            <a:r>
+              <a:t>提升幅度</a:t>
+            </a:r>
+          </a:p>
+        </p:txBody>
+      </p:sp>
+      <p:sp>
+        <p:nvSpPr>
+          <p:cNvPr id="14" name="TextBox 13"/>
+          <p:cNvSpPr txBox="1"/>
+          <p:nvPr/>
+        </p:nvSpPr>
+        <p:spPr>
+          <a:xfrm>
+            <a:off x="8590280" y="2235200"/>
+            <a:ext cx="2844800" cy="457200"/>
+          </a:xfrm>
+          <a:prstGeom prst="rect">
+            <a:avLst/>
+          </a:prstGeom>
+          <a:noFill/>
+        </p:spPr>
+        <p:txBody>
+          <a:bodyPr wrap="none">
+            <a:spAutoFit/>
+          </a:bodyPr>
+          <a:lstStyle/>
+          <a:p>
+            <a:pPr algn="ctr">
+              <a:defRPr sz="2600" b="1">
+                <a:solidFill>
+                  <a:srgbClr val="C2A497"/>
+                </a:solidFill>
+                <a:latin typeface="Microsoft YaHei"/>
+              </a:defRPr>
+            </a:pPr>
+            <a:r>
+              <a:t>+23.5% AUC</a:t>
+            </a:r>
+          </a:p>
+        </p:txBody>
+      </p:sp>
+      <p:sp>
+        <p:nvSpPr>
+          <p:cNvPr id="15" name="TextBox 14"/>
+          <p:cNvSpPr txBox="1"/>
+          <p:nvPr/>
+        </p:nvSpPr>
+        <p:spPr>
+          <a:xfrm>
+            <a:off x="8590280" y="3403600"/>
+            <a:ext cx="2844800" cy="203200"/>
+          </a:xfrm>
+          <a:prstGeom prst="rect">
+            <a:avLst/>
+          </a:prstGeom>
+          <a:noFill/>
+        </p:spPr>
+        <p:txBody>
+          <a:bodyPr wrap="none">
+            <a:spAutoFit/>
+          </a:bodyPr>
+          <a:lstStyle/>
+          <a:p>
+            <a:pPr algn="ctr">
+              <a:defRPr sz="900" b="0">
+                <a:solidFill>
+                  <a:srgbClr val="8C8C8C"/>
+                </a:solidFill>
+                <a:latin typeface="Microsoft YaHei"/>
+              </a:defRPr>
+            </a:pPr>
+            <a:r>
+              <a:t>远超随机基线</a:t>
+            </a:r>
+          </a:p>
+        </p:txBody>
+      </p:sp>
+      <p:sp>
+        <p:nvSpPr>
+          <p:cNvPr id="16" name="TextBox 15"/>
+          <p:cNvSpPr txBox="1"/>
+          <p:nvPr/>
+        </p:nvSpPr>
+        <p:spPr>
+          <a:xfrm>
+            <a:off x="731520" y="4114800"/>
+            <a:ext cx="10698480" cy="274320"/>
           </a:xfrm>
           <a:prstGeom prst="rect">
             <a:avLst/>
@@ -4447,27 +4520,27 @@
             <a:pPr algn="ctr">
               <a:defRPr sz="1200" b="0">
                 <a:solidFill>
-                  <a:srgbClr val="8A8F9A"/>
-                </a:solidFill>
-                <a:latin typeface="Microsoft YaHei"/>
-              </a:defRPr>
-            </a:pPr>
-            <a:r>
-              <a:t>提升</a:t>
-            </a:r>
-          </a:p>
-        </p:txBody>
-      </p:sp>
-      <p:sp>
-        <p:nvSpPr>
-          <p:cNvPr id="14" name="TextBox 13"/>
-          <p:cNvSpPr txBox="1"/>
-          <p:nvPr/>
-        </p:nvSpPr>
-        <p:spPr>
-          <a:xfrm>
-            <a:off x="8564880" y="2260600"/>
-            <a:ext cx="2895600" cy="457200"/>
+                  <a:srgbClr val="8C8C8C"/>
+                </a:solidFill>
+                <a:latin typeface="Microsoft YaHei"/>
+              </a:defRPr>
+            </a:pPr>
+            <a:r>
+              <a:t>插入 results/freq_detector/roc_curve.png</a:t>
+            </a:r>
+          </a:p>
+        </p:txBody>
+      </p:sp>
+      <p:sp>
+        <p:nvSpPr>
+          <p:cNvPr id="17" name="TextBox 16"/>
+          <p:cNvSpPr txBox="1"/>
+          <p:nvPr/>
+        </p:nvSpPr>
+        <p:spPr>
+          <a:xfrm>
+            <a:off x="731520" y="5303520"/>
+            <a:ext cx="10698480" cy="548640"/>
           </a:xfrm>
           <a:prstGeom prst="rect">
             <a:avLst/>
@@ -4481,127 +4554,15 @@
           <a:lstStyle/>
           <a:p>
             <a:pPr algn="ctr">
-              <a:defRPr sz="2800" b="1">
-                <a:solidFill>
-                  <a:srgbClr val="C9A96E"/>
-                </a:solidFill>
-                <a:latin typeface="Microsoft YaHei"/>
-              </a:defRPr>
-            </a:pPr>
-            <a:r>
-              <a:t>+23.5% AUC</a:t>
-            </a:r>
-          </a:p>
-        </p:txBody>
-      </p:sp>
-      <p:sp>
-        <p:nvSpPr>
-          <p:cNvPr id="15" name="TextBox 14"/>
-          <p:cNvSpPr txBox="1"/>
-          <p:nvPr/>
-        </p:nvSpPr>
-        <p:spPr>
-          <a:xfrm>
-            <a:off x="8564880" y="3378200"/>
-            <a:ext cx="2895600" cy="203200"/>
-          </a:xfrm>
-          <a:prstGeom prst="rect">
-            <a:avLst/>
-          </a:prstGeom>
-          <a:noFill/>
-        </p:spPr>
-        <p:txBody>
-          <a:bodyPr wrap="none">
-            <a:spAutoFit/>
-          </a:bodyPr>
-          <a:lstStyle/>
-          <a:p>
-            <a:pPr algn="ctr">
-              <a:defRPr sz="1000" b="0">
-                <a:solidFill>
-                  <a:srgbClr val="8A8F9A"/>
-                </a:solidFill>
-                <a:latin typeface="Microsoft YaHei"/>
-              </a:defRPr>
-            </a:pPr>
-            <a:r>
-              <a:t>远超随机基线</a:t>
-            </a:r>
-          </a:p>
-        </p:txBody>
-      </p:sp>
-      <p:sp>
-        <p:nvSpPr>
-          <p:cNvPr id="16" name="TextBox 15"/>
-          <p:cNvSpPr txBox="1"/>
-          <p:nvPr/>
-        </p:nvSpPr>
-        <p:spPr>
-          <a:xfrm>
-            <a:off x="731520" y="4114800"/>
-            <a:ext cx="10698480" cy="365760"/>
-          </a:xfrm>
-          <a:prstGeom prst="rect">
-            <a:avLst/>
-          </a:prstGeom>
-          <a:noFill/>
-        </p:spPr>
-        <p:txBody>
-          <a:bodyPr wrap="none">
-            <a:spAutoFit/>
-          </a:bodyPr>
-          <a:lstStyle/>
-          <a:p>
-            <a:pPr algn="ctr">
-              <a:defRPr sz="1400" b="0">
-                <a:solidFill>
-                  <a:srgbClr val="8A8F9A"/>
-                </a:solidFill>
-                <a:latin typeface="Microsoft YaHei"/>
-              </a:defRPr>
-            </a:pPr>
-            <a:r>
-              <a:t>插入 results/freq_detector/roc_curve.png</a:t>
-            </a:r>
-          </a:p>
-        </p:txBody>
-      </p:sp>
-      <p:sp>
-        <p:nvSpPr>
-          <p:cNvPr id="17" name="TextBox 16"/>
-          <p:cNvSpPr txBox="1"/>
-          <p:nvPr/>
-        </p:nvSpPr>
-        <p:spPr>
-          <a:xfrm>
-            <a:off x="731520" y="5486400"/>
-            <a:ext cx="10698480" cy="548640"/>
-          </a:xfrm>
-          <a:prstGeom prst="rect">
-            <a:avLst/>
-          </a:prstGeom>
-          <a:noFill/>
-        </p:spPr>
-        <p:txBody>
-          <a:bodyPr wrap="none">
-            <a:spAutoFit/>
-          </a:bodyPr>
-          <a:lstStyle/>
-          <a:p>
-            <a:pPr algn="ctr">
-              <a:defRPr sz="1600" b="0">
-                <a:solidFill>
-                  <a:srgbClr val="F0EEE8"/>
-                </a:solidFill>
-                <a:latin typeface="Microsoft YaHei"/>
-              </a:defRPr>
-            </a:pPr>
-            <a:r>
-              <a:t>STRIP看模型输出熵 -&gt; 无法区分Clean/Warped (AUC=0.50)</a:t>
-            </a:r>
-            <a:br/>
-            <a:r>
-              <a:t>我们的频域检测器看图像信号 -&gt; 能有效检测 (AUC=0.735)</a:t>
+              <a:defRPr sz="1500" b="0">
+                <a:solidFill>
+                  <a:srgbClr val="3D3D3D"/>
+                </a:solidFill>
+                <a:latin typeface="Microsoft YaHei"/>
+              </a:defRPr>
+            </a:pPr>
+            <a:r>
+              <a:t>STRIP看模型输出熵-&gt;无法区分(AUC=0.50)  |  频域检测器看图像信号-&gt;能有效检测(AUC=0.735)</a:t>
             </a:r>
           </a:p>
         </p:txBody>
@@ -4620,7 +4581,7 @@
     <p:bg>
       <p:bgPr>
         <a:solidFill>
-          <a:srgbClr val="0A1628"/>
+          <a:srgbClr val="FAF8F5"/>
         </a:solidFill>
         <a:effectLst/>
       </p:bgPr>
@@ -4634,20 +4595,56 @@
       <p:grpSpPr/>
       <p:sp>
         <p:nvSpPr>
-          <p:cNvPr id="2" name="Rectangle 1"/>
+          <p:cNvPr id="2" name="TextBox 1"/>
+          <p:cNvSpPr txBox="1"/>
+          <p:nvPr/>
+        </p:nvSpPr>
+        <p:spPr>
+          <a:xfrm>
+            <a:off x="731520" y="457200"/>
+            <a:ext cx="6400800" cy="457200"/>
+          </a:xfrm>
+          <a:prstGeom prst="rect">
+            <a:avLst/>
+          </a:prstGeom>
+          <a:noFill/>
+        </p:spPr>
+        <p:txBody>
+          <a:bodyPr wrap="none">
+            <a:spAutoFit/>
+          </a:bodyPr>
+          <a:lstStyle/>
+          <a:p>
+            <a:pPr algn="l">
+              <a:defRPr sz="3000" b="1">
+                <a:solidFill>
+                  <a:srgbClr val="3D3D3D"/>
+                </a:solidFill>
+                <a:latin typeface="Microsoft YaHei"/>
+              </a:defRPr>
+            </a:pPr>
+            <a:r>
+              <a:t>全部实验结果汇总</a:t>
+            </a:r>
+          </a:p>
+        </p:txBody>
+      </p:sp>
+      <p:sp>
+        <p:nvSpPr>
+          <p:cNvPr id="3" name="Rectangle 2"/>
           <p:cNvSpPr/>
           <p:nvPr/>
         </p:nvSpPr>
         <p:spPr>
           <a:xfrm>
-            <a:off x="731520" y="731520"/>
-            <a:ext cx="2286000" cy="25400"/>
+            <a:off x="731520" y="1005840"/>
+            <a:ext cx="1371600" cy="12700"/>
           </a:xfrm>
           <a:prstGeom prst="rect">
             <a:avLst/>
           </a:prstGeom>
           <a:solidFill>
-            <a:srgbClr val="C9A96E"/>
+            <a:srgbClr val="C2A497"/>
           </a:solidFill>
           <a:ln>
             <a:noFill/>
@@ -4672,42 +4669,6 @@
           <a:lstStyle/>
           <a:p>
             <a:pPr algn="ctr"/>
-          </a:p>
-        </p:txBody>
-      </p:sp>
-      <p:sp>
-        <p:nvSpPr>
-          <p:cNvPr id="3" name="TextBox 2"/>
-          <p:cNvSpPr txBox="1"/>
-          <p:nvPr/>
-        </p:nvSpPr>
-        <p:spPr>
-          <a:xfrm>
-            <a:off x="731520" y="914400"/>
-            <a:ext cx="6400800" cy="548640"/>
-          </a:xfrm>
-          <a:prstGeom prst="rect">
-            <a:avLst/>
-          </a:prstGeom>
-          <a:noFill/>
-        </p:spPr>
-        <p:txBody>
-          <a:bodyPr wrap="none">
-            <a:spAutoFit/>
-          </a:bodyPr>
-          <a:lstStyle/>
-          <a:p>
-            <a:pPr algn="l">
-              <a:defRPr sz="3600" b="1">
-                <a:solidFill>
-                  <a:srgbClr val="F0EEE8"/>
-                </a:solidFill>
-                <a:latin typeface="Microsoft YaHei"/>
-              </a:defRPr>
-            </a:pPr>
-            <a:r>
-              <a:t>全部实验结果汇总</a:t>
-            </a:r>
           </a:p>
         </p:txBody>
       </p:sp>
@@ -4721,7 +4682,7 @@
         </p:nvGraphicFramePr>
         <p:xfrm>
           <a:off x="457200" y="1554480"/>
-          <a:ext cx="11247120" cy="4389120"/>
+          <a:ext cx="11247120" cy="4572000"/>
         </p:xfrm>
         <a:graphic>
           <a:graphicData uri="http://schemas.openxmlformats.org/drawingml/2006/table">
@@ -4737,7 +4698,7 @@
                 <a:gridCol w="1874520"/>
                 <a:gridCol w="1874520"/>
               </a:tblGrid>
-              <a:tr h="399010">
+              <a:tr h="415636">
                 <a:tc>
                   <a:txBody>
                     <a:bodyPr/>
@@ -4746,7 +4707,7 @@
                       <a:pPr algn="ctr">
                         <a:defRPr sz="1100" b="1">
                           <a:solidFill>
-                            <a:srgbClr val="0A1628"/>
+                            <a:srgbClr val="FFFFFF"/>
                           </a:solidFill>
                           <a:latin typeface="Microsoft YaHei"/>
                         </a:defRPr>
@@ -4758,7 +4719,7 @@
                   </a:txBody>
                   <a:tcPr>
                     <a:solidFill>
-                      <a:srgbClr val="C9A96E"/>
+                      <a:srgbClr val="C2A497"/>
                     </a:solidFill>
                   </a:tcPr>
                 </a:tc>
@@ -4770,7 +4731,7 @@
                       <a:pPr algn="ctr">
                         <a:defRPr sz="1100" b="1">
                           <a:solidFill>
-                            <a:srgbClr val="0A1628"/>
+                            <a:srgbClr val="FFFFFF"/>
                           </a:solidFill>
                           <a:latin typeface="Microsoft YaHei"/>
                         </a:defRPr>
@@ -4782,7 +4743,7 @@
                   </a:txBody>
                   <a:tcPr>
                     <a:solidFill>
-                      <a:srgbClr val="C9A96E"/>
+                      <a:srgbClr val="C2A497"/>
                     </a:solidFill>
                   </a:tcPr>
                 </a:tc>
@@ -4794,7 +4755,7 @@
                       <a:pPr algn="ctr">
                         <a:defRPr sz="1100" b="1">
                           <a:solidFill>
-                            <a:srgbClr val="0A1628"/>
+                            <a:srgbClr val="FFFFFF"/>
                           </a:solidFill>
                           <a:latin typeface="Microsoft YaHei"/>
                         </a:defRPr>
@@ -4806,7 +4767,7 @@
                   </a:txBody>
                   <a:tcPr>
                     <a:solidFill>
-                      <a:srgbClr val="C9A96E"/>
+                      <a:srgbClr val="C2A497"/>
                     </a:solidFill>
                   </a:tcPr>
                 </a:tc>
@@ -4818,7 +4779,7 @@
                       <a:pPr algn="ctr">
                         <a:defRPr sz="1100" b="1">
                           <a:solidFill>
-                            <a:srgbClr val="0A1628"/>
+                            <a:srgbClr val="FFFFFF"/>
                           </a:solidFill>
                           <a:latin typeface="Microsoft YaHei"/>
                         </a:defRPr>
@@ -4830,7 +4791,7 @@
                   </a:txBody>
                   <a:tcPr>
                     <a:solidFill>
-                      <a:srgbClr val="C9A96E"/>
+                      <a:srgbClr val="C2A497"/>
                     </a:solidFill>
                   </a:tcPr>
                 </a:tc>
@@ -4842,7 +4803,7 @@
                       <a:pPr algn="ctr">
                         <a:defRPr sz="1100" b="1">
                           <a:solidFill>
-                            <a:srgbClr val="0A1628"/>
+                            <a:srgbClr val="FFFFFF"/>
                           </a:solidFill>
                           <a:latin typeface="Microsoft YaHei"/>
                         </a:defRPr>
@@ -4854,7 +4815,7 @@
                   </a:txBody>
                   <a:tcPr>
                     <a:solidFill>
-                      <a:srgbClr val="C9A96E"/>
+                      <a:srgbClr val="C2A497"/>
                     </a:solidFill>
                   </a:tcPr>
                 </a:tc>
@@ -4866,7 +4827,7 @@
                       <a:pPr algn="ctr">
                         <a:defRPr sz="1100" b="1">
                           <a:solidFill>
-                            <a:srgbClr val="0A1628"/>
+                            <a:srgbClr val="FFFFFF"/>
                           </a:solidFill>
                           <a:latin typeface="Microsoft YaHei"/>
                         </a:defRPr>
@@ -4878,12 +4839,12 @@
                   </a:txBody>
                   <a:tcPr>
                     <a:solidFill>
-                      <a:srgbClr val="C9A96E"/>
+                      <a:srgbClr val="C2A497"/>
                     </a:solidFill>
                   </a:tcPr>
                 </a:tc>
               </a:tr>
-              <a:tr h="399010">
+              <a:tr h="415636">
                 <a:tc>
                   <a:txBody>
                     <a:bodyPr/>
@@ -4892,153 +4853,7 @@
                       <a:pPr algn="ctr">
                         <a:defRPr sz="1100">
                           <a:solidFill>
-                            <a:srgbClr val="F0EEE8"/>
-                          </a:solidFill>
-                          <a:latin typeface="Microsoft YaHei"/>
-                        </a:defRPr>
-                      </a:pPr>
-                      <a:r>
-                        <a:t>400</a:t>
-                      </a:r>
-                    </a:p>
-                  </a:txBody>
-                  <a:tcPr>
-                    <a:solidFill>
-                      <a:srgbClr val="1A2D50"/>
-                    </a:solidFill>
-                  </a:tcPr>
-                </a:tc>
-                <a:tc>
-                  <a:txBody>
-                    <a:bodyPr/>
-                    <a:lstStyle/>
-                    <a:p>
-                      <a:pPr algn="ctr">
-                        <a:defRPr sz="1100">
-                          <a:solidFill>
-                            <a:srgbClr val="F0EEE8"/>
-                          </a:solidFill>
-                          <a:latin typeface="Microsoft YaHei"/>
-                        </a:defRPr>
-                      </a:pPr>
-                      <a:r>
-                        <a:t>Noise WITH (baseline)</a:t>
-                      </a:r>
-                    </a:p>
-                  </a:txBody>
-                  <a:tcPr>
-                    <a:solidFill>
-                      <a:srgbClr val="1A2D50"/>
-                    </a:solidFill>
-                  </a:tcPr>
-                </a:tc>
-                <a:tc>
-                  <a:txBody>
-                    <a:bodyPr/>
-                    <a:lstStyle/>
-                    <a:p>
-                      <a:pPr algn="ctr">
-                        <a:defRPr sz="1100">
-                          <a:solidFill>
-                            <a:srgbClr val="F0EEE8"/>
-                          </a:solidFill>
-                          <a:latin typeface="Microsoft YaHei"/>
-                        </a:defRPr>
-                      </a:pPr>
-                      <a:r>
-                        <a:t>92.84</a:t>
-                      </a:r>
-                    </a:p>
-                  </a:txBody>
-                  <a:tcPr>
-                    <a:solidFill>
-                      <a:srgbClr val="1A2D50"/>
-                    </a:solidFill>
-                  </a:tcPr>
-                </a:tc>
-                <a:tc>
-                  <a:txBody>
-                    <a:bodyPr/>
-                    <a:lstStyle/>
-                    <a:p>
-                      <a:pPr algn="ctr">
-                        <a:defRPr sz="1100">
-                          <a:solidFill>
-                            <a:srgbClr val="F0EEE8"/>
-                          </a:solidFill>
-                          <a:latin typeface="Microsoft YaHei"/>
-                        </a:defRPr>
-                      </a:pPr>
-                      <a:r>
-                        <a:t>99.15</a:t>
-                      </a:r>
-                    </a:p>
-                  </a:txBody>
-                  <a:tcPr>
-                    <a:solidFill>
-                      <a:srgbClr val="1A2D50"/>
-                    </a:solidFill>
-                  </a:tcPr>
-                </a:tc>
-                <a:tc>
-                  <a:txBody>
-                    <a:bodyPr/>
-                    <a:lstStyle/>
-                    <a:p>
-                      <a:pPr algn="ctr">
-                        <a:defRPr sz="1100">
-                          <a:solidFill>
-                            <a:srgbClr val="F0EEE8"/>
-                          </a:solidFill>
-                          <a:latin typeface="Microsoft YaHei"/>
-                        </a:defRPr>
-                      </a:pPr>
-                      <a:r>
-                        <a:t>89.71</a:t>
-                      </a:r>
-                    </a:p>
-                  </a:txBody>
-                  <a:tcPr>
-                    <a:solidFill>
-                      <a:srgbClr val="1A2D50"/>
-                    </a:solidFill>
-                  </a:tcPr>
-                </a:tc>
-                <a:tc>
-                  <a:txBody>
-                    <a:bodyPr/>
-                    <a:lstStyle/>
-                    <a:p>
-                      <a:pPr algn="ctr">
-                        <a:defRPr sz="1100">
-                          <a:solidFill>
-                            <a:srgbClr val="F0EEE8"/>
-                          </a:solidFill>
-                          <a:latin typeface="Microsoft YaHei"/>
-                        </a:defRPr>
-                      </a:pPr>
-                      <a:r>
-                        <a:t>Baseline</a:t>
-                      </a:r>
-                    </a:p>
-                  </a:txBody>
-                  <a:tcPr>
-                    <a:solidFill>
-                      <a:srgbClr val="1A2D50"/>
-                    </a:solidFill>
-                  </a:tcPr>
-                </a:tc>
-              </a:tr>
-              <a:tr h="399010">
-                <a:tc>
-                  <a:txBody>
-                    <a:bodyPr/>
-                    <a:lstStyle/>
-                    <a:p>
-                      <a:pPr algn="ctr">
-                        <a:defRPr sz="1100">
-                          <a:solidFill>
-                            <a:srgbClr val="8A8F9A"/>
+                            <a:srgbClr val="8C8C8C"/>
                           </a:solidFill>
                           <a:latin typeface="Microsoft YaHei"/>
                         </a:defRPr>
@@ -5058,13 +4873,13 @@
                       <a:pPr algn="ctr">
                         <a:defRPr sz="1100">
                           <a:solidFill>
-                            <a:srgbClr val="8A8F9A"/>
+                            <a:srgbClr val="8C8C8C"/>
                           </a:solidFill>
                           <a:latin typeface="Microsoft YaHei"/>
                         </a:defRPr>
                       </a:pPr>
                       <a:r>
-                        <a:t>Noise WITHOUT</a:t>
+                        <a:t>Noise WITH</a:t>
                       </a:r>
                     </a:p>
                   </a:txBody>
@@ -5078,13 +4893,13 @@
                       <a:pPr algn="ctr">
                         <a:defRPr sz="1100">
                           <a:solidFill>
-                            <a:srgbClr val="8A8F9A"/>
+                            <a:srgbClr val="8C8C8C"/>
                           </a:solidFill>
                           <a:latin typeface="Microsoft YaHei"/>
                         </a:defRPr>
                       </a:pPr>
                       <a:r>
-                        <a:t>92.74</a:t>
+                        <a:t>92.84</a:t>
                       </a:r>
                     </a:p>
                   </a:txBody>
@@ -5098,13 +4913,13 @@
                       <a:pPr algn="ctr">
                         <a:defRPr sz="1100">
                           <a:solidFill>
-                            <a:srgbClr val="8A8F9A"/>
+                            <a:srgbClr val="8C8C8C"/>
                           </a:solidFill>
                           <a:latin typeface="Microsoft YaHei"/>
                         </a:defRPr>
                       </a:pPr>
                       <a:r>
-                        <a:t>98.21</a:t>
+                        <a:t>99.15</a:t>
                       </a:r>
                     </a:p>
                   </a:txBody>
@@ -5118,13 +4933,13 @@
                       <a:pPr algn="ctr">
                         <a:defRPr sz="1100">
                           <a:solidFill>
-                            <a:srgbClr val="8A8F9A"/>
+                            <a:srgbClr val="8C8C8C"/>
                           </a:solidFill>
                           <a:latin typeface="Microsoft YaHei"/>
                         </a:defRPr>
                       </a:pPr>
                       <a:r>
-                        <a:t>0.00</a:t>
+                        <a:t>89.71</a:t>
                       </a:r>
                     </a:p>
                   </a:txBody>
@@ -5138,20 +4953,20 @@
                       <a:pPr algn="ctr">
                         <a:defRPr sz="1100">
                           <a:solidFill>
-                            <a:srgbClr val="8A8F9A"/>
+                            <a:srgbClr val="8C8C8C"/>
                           </a:solidFill>
                           <a:latin typeface="Microsoft YaHei"/>
                         </a:defRPr>
                       </a:pPr>
                       <a:r>
-                        <a:t>Noise is KEY!</a:t>
+                        <a:t>Baseline</a:t>
                       </a:r>
                     </a:p>
                   </a:txBody>
                   <a:tcPr/>
                 </a:tc>
               </a:tr>
-              <a:tr h="399010">
+              <a:tr h="415636">
                 <a:tc>
                   <a:txBody>
                     <a:bodyPr/>
@@ -5160,7 +4975,153 @@
                       <a:pPr algn="ctr">
                         <a:defRPr sz="1100">
                           <a:solidFill>
-                            <a:srgbClr val="8A8F9A"/>
+                            <a:srgbClr val="3D3D3D"/>
+                          </a:solidFill>
+                          <a:latin typeface="Microsoft YaHei"/>
+                        </a:defRPr>
+                      </a:pPr>
+                      <a:r>
+                        <a:t>400</a:t>
+                      </a:r>
+                    </a:p>
+                  </a:txBody>
+                  <a:tcPr>
+                    <a:solidFill>
+                      <a:srgbClr val="F5F0EB"/>
+                    </a:solidFill>
+                  </a:tcPr>
+                </a:tc>
+                <a:tc>
+                  <a:txBody>
+                    <a:bodyPr/>
+                    <a:lstStyle/>
+                    <a:p>
+                      <a:pPr algn="ctr">
+                        <a:defRPr sz="1100">
+                          <a:solidFill>
+                            <a:srgbClr val="3D3D3D"/>
+                          </a:solidFill>
+                          <a:latin typeface="Microsoft YaHei"/>
+                        </a:defRPr>
+                      </a:pPr>
+                      <a:r>
+                        <a:t>Noise WITHOUT</a:t>
+                      </a:r>
+                    </a:p>
+                  </a:txBody>
+                  <a:tcPr>
+                    <a:solidFill>
+                      <a:srgbClr val="F5F0EB"/>
+                    </a:solidFill>
+                  </a:tcPr>
+                </a:tc>
+                <a:tc>
+                  <a:txBody>
+                    <a:bodyPr/>
+                    <a:lstStyle/>
+                    <a:p>
+                      <a:pPr algn="ctr">
+                        <a:defRPr sz="1100">
+                          <a:solidFill>
+                            <a:srgbClr val="3D3D3D"/>
+                          </a:solidFill>
+                          <a:latin typeface="Microsoft YaHei"/>
+                        </a:defRPr>
+                      </a:pPr>
+                      <a:r>
+                        <a:t>92.74</a:t>
+                      </a:r>
+                    </a:p>
+                  </a:txBody>
+                  <a:tcPr>
+                    <a:solidFill>
+                      <a:srgbClr val="F5F0EB"/>
+                    </a:solidFill>
+                  </a:tcPr>
+                </a:tc>
+                <a:tc>
+                  <a:txBody>
+                    <a:bodyPr/>
+                    <a:lstStyle/>
+                    <a:p>
+                      <a:pPr algn="ctr">
+                        <a:defRPr sz="1100">
+                          <a:solidFill>
+                            <a:srgbClr val="3D3D3D"/>
+                          </a:solidFill>
+                          <a:latin typeface="Microsoft YaHei"/>
+                        </a:defRPr>
+                      </a:pPr>
+                      <a:r>
+                        <a:t>98.21</a:t>
+                      </a:r>
+                    </a:p>
+                  </a:txBody>
+                  <a:tcPr>
+                    <a:solidFill>
+                      <a:srgbClr val="F5F0EB"/>
+                    </a:solidFill>
+                  </a:tcPr>
+                </a:tc>
+                <a:tc>
+                  <a:txBody>
+                    <a:bodyPr/>
+                    <a:lstStyle/>
+                    <a:p>
+                      <a:pPr algn="ctr">
+                        <a:defRPr sz="1100">
+                          <a:solidFill>
+                            <a:srgbClr val="3D3D3D"/>
+                          </a:solidFill>
+                          <a:latin typeface="Microsoft YaHei"/>
+                        </a:defRPr>
+                      </a:pPr>
+                      <a:r>
+                        <a:t>0.00</a:t>
+                      </a:r>
+                    </a:p>
+                  </a:txBody>
+                  <a:tcPr>
+                    <a:solidFill>
+                      <a:srgbClr val="F5F0EB"/>
+                    </a:solidFill>
+                  </a:tcPr>
+                </a:tc>
+                <a:tc>
+                  <a:txBody>
+                    <a:bodyPr/>
+                    <a:lstStyle/>
+                    <a:p>
+                      <a:pPr algn="ctr">
+                        <a:defRPr sz="1100">
+                          <a:solidFill>
+                            <a:srgbClr val="3D3D3D"/>
+                          </a:solidFill>
+                          <a:latin typeface="Microsoft YaHei"/>
+                        </a:defRPr>
+                      </a:pPr>
+                      <a:r>
+                        <a:t>Noise is KEY</a:t>
+                      </a:r>
+                    </a:p>
+                  </a:txBody>
+                  <a:tcPr>
+                    <a:solidFill>
+                      <a:srgbClr val="F5F0EB"/>
+                    </a:solidFill>
+                  </a:tcPr>
+                </a:tc>
+              </a:tr>
+              <a:tr h="415636">
+                <a:tc>
+                  <a:txBody>
+                    <a:bodyPr/>
+                    <a:lstStyle/>
+                    <a:p>
+                      <a:pPr algn="ctr">
+                        <a:defRPr sz="1100">
+                          <a:solidFill>
+                            <a:srgbClr val="8C8C8C"/>
                           </a:solidFill>
                           <a:latin typeface="Microsoft YaHei"/>
                         </a:defRPr>
@@ -5180,7 +5141,7 @@
                       <a:pPr algn="ctr">
                         <a:defRPr sz="1100">
                           <a:solidFill>
-                            <a:srgbClr val="8A8F9A"/>
+                            <a:srgbClr val="8C8C8C"/>
                           </a:solidFill>
                           <a:latin typeface="Microsoft YaHei"/>
                         </a:defRPr>
@@ -5200,7 +5161,7 @@
                       <a:pPr algn="ctr">
                         <a:defRPr sz="1100">
                           <a:solidFill>
-                            <a:srgbClr val="8A8F9A"/>
+                            <a:srgbClr val="8C8C8C"/>
                           </a:solidFill>
                           <a:latin typeface="Microsoft YaHei"/>
                         </a:defRPr>
@@ -5220,7 +5181,7 @@
                       <a:pPr algn="ctr">
                         <a:defRPr sz="1100">
                           <a:solidFill>
-                            <a:srgbClr val="8A8F9A"/>
+                            <a:srgbClr val="8C8C8C"/>
                           </a:solidFill>
                           <a:latin typeface="Microsoft YaHei"/>
                         </a:defRPr>
@@ -5240,7 +5201,7 @@
                       <a:pPr algn="ctr">
                         <a:defRPr sz="1100">
                           <a:solidFill>
-                            <a:srgbClr val="8A8F9A"/>
+                            <a:srgbClr val="8C8C8C"/>
                           </a:solidFill>
                           <a:latin typeface="Microsoft YaHei"/>
                         </a:defRPr>
@@ -5260,20 +5221,20 @@
                       <a:pPr algn="ctr">
                         <a:defRPr sz="1100">
                           <a:solidFill>
-                            <a:srgbClr val="8A8F9A"/>
+                            <a:srgbClr val="8C8C8C"/>
                           </a:solidFill>
                           <a:latin typeface="Microsoft YaHei"/>
                         </a:defRPr>
                       </a:pPr>
                       <a:r>
-                        <a:t>s too small -&gt; fail</a:t>
+                        <a:t>s too small</a:t>
                       </a:r>
                     </a:p>
                   </a:txBody>
                   <a:tcPr/>
                 </a:tc>
               </a:tr>
-              <a:tr h="399010">
+              <a:tr h="415636">
                 <a:tc>
                   <a:txBody>
                     <a:bodyPr/>
@@ -5282,7 +5243,7 @@
                       <a:pPr algn="ctr">
                         <a:defRPr sz="1100">
                           <a:solidFill>
-                            <a:srgbClr val="8A8F9A"/>
+                            <a:srgbClr val="8C8C8C"/>
                           </a:solidFill>
                           <a:latin typeface="Microsoft YaHei"/>
                         </a:defRPr>
@@ -5302,13 +5263,13 @@
                       <a:pPr algn="ctr">
                         <a:defRPr sz="1100">
                           <a:solidFill>
-                            <a:srgbClr val="8A8F9A"/>
+                            <a:srgbClr val="8C8C8C"/>
                           </a:solidFill>
                           <a:latin typeface="Microsoft YaHei"/>
                         </a:defRPr>
                       </a:pPr>
                       <a:r>
-                        <a:t>s=0.50 (best)</a:t>
+                        <a:t>s=0.50</a:t>
                       </a:r>
                     </a:p>
                   </a:txBody>
@@ -5322,7 +5283,7 @@
                       <a:pPr algn="ctr">
                         <a:defRPr sz="1100">
                           <a:solidFill>
-                            <a:srgbClr val="8A8F9A"/>
+                            <a:srgbClr val="8C8C8C"/>
                           </a:solidFill>
                           <a:latin typeface="Microsoft YaHei"/>
                         </a:defRPr>
@@ -5342,7 +5303,7 @@
                       <a:pPr algn="ctr">
                         <a:defRPr sz="1100">
                           <a:solidFill>
-                            <a:srgbClr val="8A8F9A"/>
+                            <a:srgbClr val="8C8C8C"/>
                           </a:solidFill>
                           <a:latin typeface="Microsoft YaHei"/>
                         </a:defRPr>
@@ -5362,7 +5323,7 @@
                       <a:pPr algn="ctr">
                         <a:defRPr sz="1100">
                           <a:solidFill>
-                            <a:srgbClr val="8A8F9A"/>
+                            <a:srgbClr val="8C8C8C"/>
                           </a:solidFill>
                           <a:latin typeface="Microsoft YaHei"/>
                         </a:defRPr>
@@ -5382,7 +5343,7 @@
                       <a:pPr algn="ctr">
                         <a:defRPr sz="1100">
                           <a:solidFill>
-                            <a:srgbClr val="8A8F9A"/>
+                            <a:srgbClr val="8C8C8C"/>
                           </a:solidFill>
                           <a:latin typeface="Microsoft YaHei"/>
                         </a:defRPr>
@@ -5395,7 +5356,7 @@
                   <a:tcPr/>
                 </a:tc>
               </a:tr>
-              <a:tr h="399010">
+              <a:tr h="415636">
                 <a:tc>
                   <a:txBody>
                     <a:bodyPr/>
@@ -5404,7 +5365,7 @@
                       <a:pPr algn="ctr">
                         <a:defRPr sz="1100">
                           <a:solidFill>
-                            <a:srgbClr val="8A8F9A"/>
+                            <a:srgbClr val="8C8C8C"/>
                           </a:solidFill>
                           <a:latin typeface="Microsoft YaHei"/>
                         </a:defRPr>
@@ -5424,7 +5385,7 @@
                       <a:pPr algn="ctr">
                         <a:defRPr sz="1100">
                           <a:solidFill>
-                            <a:srgbClr val="8A8F9A"/>
+                            <a:srgbClr val="8C8C8C"/>
                           </a:solidFill>
                           <a:latin typeface="Microsoft YaHei"/>
                         </a:defRPr>
@@ -5444,7 +5405,7 @@
                       <a:pPr algn="ctr">
                         <a:defRPr sz="1100">
                           <a:solidFill>
-                            <a:srgbClr val="8A8F9A"/>
+                            <a:srgbClr val="8C8C8C"/>
                           </a:solidFill>
                           <a:latin typeface="Microsoft YaHei"/>
                         </a:defRPr>
@@ -5464,7 +5425,7 @@
                       <a:pPr algn="ctr">
                         <a:defRPr sz="1100">
                           <a:solidFill>
-                            <a:srgbClr val="8A8F9A"/>
+                            <a:srgbClr val="8C8C8C"/>
                           </a:solidFill>
                           <a:latin typeface="Microsoft YaHei"/>
                         </a:defRPr>
@@ -5484,7 +5445,7 @@
                       <a:pPr algn="ctr">
                         <a:defRPr sz="1100">
                           <a:solidFill>
-                            <a:srgbClr val="8A8F9A"/>
+                            <a:srgbClr val="8C8C8C"/>
                           </a:solidFill>
                           <a:latin typeface="Microsoft YaHei"/>
                         </a:defRPr>
@@ -5504,20 +5465,20 @@
                       <a:pPr algn="ctr">
                         <a:defRPr sz="1100">
                           <a:solidFill>
-                            <a:srgbClr val="8A8F9A"/>
+                            <a:srgbClr val="8C8C8C"/>
                           </a:solidFill>
                           <a:latin typeface="Microsoft YaHei"/>
                         </a:defRPr>
                       </a:pPr>
                       <a:r>
-                        <a:t>Saturation</a:t>
+                        <a:t>Saturated</a:t>
                       </a:r>
                     </a:p>
                   </a:txBody>
                   <a:tcPr/>
                 </a:tc>
               </a:tr>
-              <a:tr h="399010">
+              <a:tr h="415636">
                 <a:tc>
                   <a:txBody>
                     <a:bodyPr/>
@@ -5526,7 +5487,7 @@
                       <a:pPr algn="ctr">
                         <a:defRPr sz="1100">
                           <a:solidFill>
-                            <a:srgbClr val="F0EEE8"/>
+                            <a:srgbClr val="3D3D3D"/>
                           </a:solidFill>
                           <a:latin typeface="Microsoft YaHei"/>
                         </a:defRPr>
@@ -5538,7 +5499,7 @@
                   </a:txBody>
                   <a:tcPr>
                     <a:solidFill>
-                      <a:srgbClr val="1A2D50"/>
+                      <a:srgbClr val="F5F0EB"/>
                     </a:solidFill>
                   </a:tcPr>
                 </a:tc>
@@ -5550,7 +5511,7 @@
                       <a:pPr algn="ctr">
                         <a:defRPr sz="1100">
                           <a:solidFill>
-                            <a:srgbClr val="F0EEE8"/>
+                            <a:srgbClr val="3D3D3D"/>
                           </a:solidFill>
                           <a:latin typeface="Microsoft YaHei"/>
                         </a:defRPr>
@@ -5562,7 +5523,7 @@
                   </a:txBody>
                   <a:tcPr>
                     <a:solidFill>
-                      <a:srgbClr val="1A2D50"/>
+                      <a:srgbClr val="F5F0EB"/>
                     </a:solidFill>
                   </a:tcPr>
                 </a:tc>
@@ -5574,7 +5535,7 @@
                       <a:pPr algn="ctr">
                         <a:defRPr sz="1100">
                           <a:solidFill>
-                            <a:srgbClr val="F0EEE8"/>
+                            <a:srgbClr val="3D3D3D"/>
                           </a:solidFill>
                           <a:latin typeface="Microsoft YaHei"/>
                         </a:defRPr>
@@ -5586,7 +5547,7 @@
                   </a:txBody>
                   <a:tcPr>
                     <a:solidFill>
-                      <a:srgbClr val="1A2D50"/>
+                      <a:srgbClr val="F5F0EB"/>
                     </a:solidFill>
                   </a:tcPr>
                 </a:tc>
@@ -5598,7 +5559,7 @@
                       <a:pPr algn="ctr">
                         <a:defRPr sz="1100">
                           <a:solidFill>
-                            <a:srgbClr val="F0EEE8"/>
+                            <a:srgbClr val="3D3D3D"/>
                           </a:solidFill>
                           <a:latin typeface="Microsoft YaHei"/>
                         </a:defRPr>
@@ -5610,7 +5571,7 @@
                   </a:txBody>
                   <a:tcPr>
                     <a:solidFill>
-                      <a:srgbClr val="1A2D50"/>
+                      <a:srgbClr val="F5F0EB"/>
                     </a:solidFill>
                   </a:tcPr>
                 </a:tc>
@@ -5622,7 +5583,7 @@
                       <a:pPr algn="ctr">
                         <a:defRPr sz="1100">
                           <a:solidFill>
-                            <a:srgbClr val="F0EEE8"/>
+                            <a:srgbClr val="3D3D3D"/>
                           </a:solidFill>
                           <a:latin typeface="Microsoft YaHei"/>
                         </a:defRPr>
@@ -5634,7 +5595,7 @@
                   </a:txBody>
                   <a:tcPr>
                     <a:solidFill>
-                      <a:srgbClr val="1A2D50"/>
+                      <a:srgbClr val="F5F0EB"/>
                     </a:solidFill>
                   </a:tcPr>
                 </a:tc>
@@ -5646,24 +5607,24 @@
                       <a:pPr algn="ctr">
                         <a:defRPr sz="1100">
                           <a:solidFill>
-                            <a:srgbClr val="F0EEE8"/>
+                            <a:srgbClr val="3D3D3D"/>
                           </a:solidFill>
                           <a:latin typeface="Microsoft YaHei"/>
                         </a:defRPr>
                       </a:pPr>
                       <a:r>
-                        <a:t>k too small -&gt; weak</a:t>
+                        <a:t>k too small</a:t>
                       </a:r>
                     </a:p>
                   </a:txBody>
                   <a:tcPr>
                     <a:solidFill>
-                      <a:srgbClr val="1A2D50"/>
+                      <a:srgbClr val="F5F0EB"/>
                     </a:solidFill>
                   </a:tcPr>
                 </a:tc>
               </a:tr>
-              <a:tr h="399010">
+              <a:tr h="415636">
                 <a:tc>
                   <a:txBody>
                     <a:bodyPr/>
@@ -5672,7 +5633,7 @@
                       <a:pPr algn="ctr">
                         <a:defRPr sz="1100">
                           <a:solidFill>
-                            <a:srgbClr val="8A8F9A"/>
+                            <a:srgbClr val="8C8C8C"/>
                           </a:solidFill>
                           <a:latin typeface="Microsoft YaHei"/>
                         </a:defRPr>
@@ -5692,13 +5653,13 @@
                       <a:pPr algn="ctr">
                         <a:defRPr sz="1100">
                           <a:solidFill>
-                            <a:srgbClr val="8A8F9A"/>
+                            <a:srgbClr val="8C8C8C"/>
                           </a:solidFill>
                           <a:latin typeface="Microsoft YaHei"/>
                         </a:defRPr>
                       </a:pPr>
                       <a:r>
-                        <a:t>k=4 (best)</a:t>
+                        <a:t>k=4</a:t>
                       </a:r>
                     </a:p>
                   </a:txBody>
@@ -5712,7 +5673,7 @@
                       <a:pPr algn="ctr">
                         <a:defRPr sz="1100">
                           <a:solidFill>
-                            <a:srgbClr val="8A8F9A"/>
+                            <a:srgbClr val="8C8C8C"/>
                           </a:solidFill>
                           <a:latin typeface="Microsoft YaHei"/>
                         </a:defRPr>
@@ -5732,7 +5693,7 @@
                       <a:pPr algn="ctr">
                         <a:defRPr sz="1100">
                           <a:solidFill>
-                            <a:srgbClr val="8A8F9A"/>
+                            <a:srgbClr val="8C8C8C"/>
                           </a:solidFill>
                           <a:latin typeface="Microsoft YaHei"/>
                         </a:defRPr>
@@ -5752,7 +5713,7 @@
                       <a:pPr algn="ctr">
                         <a:defRPr sz="1100">
                           <a:solidFill>
-                            <a:srgbClr val="8A8F9A"/>
+                            <a:srgbClr val="8C8C8C"/>
                           </a:solidFill>
                           <a:latin typeface="Microsoft YaHei"/>
                         </a:defRPr>
@@ -5772,7 +5733,7 @@
                       <a:pPr algn="ctr">
                         <a:defRPr sz="1100">
                           <a:solidFill>
-                            <a:srgbClr val="8A8F9A"/>
+                            <a:srgbClr val="8C8C8C"/>
                           </a:solidFill>
                           <a:latin typeface="Microsoft YaHei"/>
                         </a:defRPr>
@@ -5785,7 +5746,7 @@
                   <a:tcPr/>
                 </a:tc>
               </a:tr>
-              <a:tr h="399010">
+              <a:tr h="415636">
                 <a:tc>
                   <a:txBody>
                     <a:bodyPr/>
@@ -5794,7 +5755,7 @@
                       <a:pPr algn="ctr">
                         <a:defRPr sz="1100">
                           <a:solidFill>
-                            <a:srgbClr val="8A8F9A"/>
+                            <a:srgbClr val="8C8C8C"/>
                           </a:solidFill>
                           <a:latin typeface="Microsoft YaHei"/>
                         </a:defRPr>
@@ -5814,7 +5775,7 @@
                       <a:pPr algn="ctr">
                         <a:defRPr sz="1100">
                           <a:solidFill>
-                            <a:srgbClr val="8A8F9A"/>
+                            <a:srgbClr val="8C8C8C"/>
                           </a:solidFill>
                           <a:latin typeface="Microsoft YaHei"/>
                         </a:defRPr>
@@ -5834,7 +5795,7 @@
                       <a:pPr algn="ctr">
                         <a:defRPr sz="1100">
                           <a:solidFill>
-                            <a:srgbClr val="8A8F9A"/>
+                            <a:srgbClr val="8C8C8C"/>
                           </a:solidFill>
                           <a:latin typeface="Microsoft YaHei"/>
                         </a:defRPr>
@@ -5854,7 +5815,7 @@
                       <a:pPr algn="ctr">
                         <a:defRPr sz="1100">
                           <a:solidFill>
-                            <a:srgbClr val="8A8F9A"/>
+                            <a:srgbClr val="8C8C8C"/>
                           </a:solidFill>
                           <a:latin typeface="Microsoft YaHei"/>
                         </a:defRPr>
@@ -5874,7 +5835,7 @@
                       <a:pPr algn="ctr">
                         <a:defRPr sz="1100">
                           <a:solidFill>
-                            <a:srgbClr val="8A8F9A"/>
+                            <a:srgbClr val="8C8C8C"/>
                           </a:solidFill>
                           <a:latin typeface="Microsoft YaHei"/>
                         </a:defRPr>
@@ -5894,20 +5855,20 @@
                       <a:pPr algn="ctr">
                         <a:defRPr sz="1100">
                           <a:solidFill>
-                            <a:srgbClr val="8A8F9A"/>
+                            <a:srgbClr val="8C8C8C"/>
                           </a:solidFill>
                           <a:latin typeface="Microsoft YaHei"/>
                         </a:defRPr>
                       </a:pPr>
                       <a:r>
-                        <a:t>Saturation</a:t>
+                        <a:t>Saturated</a:t>
                       </a:r>
                     </a:p>
                   </a:txBody>
                   <a:tcPr/>
                 </a:tc>
               </a:tr>
-              <a:tr h="399010">
+              <a:tr h="415636">
                 <a:tc>
                   <a:txBody>
                     <a:bodyPr/>
@@ -5916,7 +5877,7 @@
                       <a:pPr algn="ctr">
                         <a:defRPr sz="1100">
                           <a:solidFill>
-                            <a:srgbClr val="8A8F9A"/>
+                            <a:srgbClr val="8C8C8C"/>
                           </a:solidFill>
                           <a:latin typeface="Microsoft YaHei"/>
                         </a:defRPr>
@@ -5936,7 +5897,7 @@
                       <a:pPr algn="ctr">
                         <a:defRPr sz="1100">
                           <a:solidFill>
-                            <a:srgbClr val="8A8F9A"/>
+                            <a:srgbClr val="8C8C8C"/>
                           </a:solidFill>
                           <a:latin typeface="Microsoft YaHei"/>
                         </a:defRPr>
@@ -5956,7 +5917,7 @@
                       <a:pPr algn="ctr">
                         <a:defRPr sz="1100">
                           <a:solidFill>
-                            <a:srgbClr val="8A8F9A"/>
+                            <a:srgbClr val="8C8C8C"/>
                           </a:solidFill>
                           <a:latin typeface="Microsoft YaHei"/>
                         </a:defRPr>
@@ -5976,7 +5937,7 @@
                       <a:pPr algn="ctr">
                         <a:defRPr sz="1100">
                           <a:solidFill>
-                            <a:srgbClr val="8A8F9A"/>
+                            <a:srgbClr val="8C8C8C"/>
                           </a:solidFill>
                           <a:latin typeface="Microsoft YaHei"/>
                         </a:defRPr>
@@ -5996,7 +5957,7 @@
                       <a:pPr algn="ctr">
                         <a:defRPr sz="1100">
                           <a:solidFill>
-                            <a:srgbClr val="8A8F9A"/>
+                            <a:srgbClr val="8C8C8C"/>
                           </a:solidFill>
                           <a:latin typeface="Microsoft YaHei"/>
                         </a:defRPr>
@@ -6016,7 +5977,7 @@
                       <a:pPr algn="ctr">
                         <a:defRPr sz="1100">
                           <a:solidFill>
-                            <a:srgbClr val="8A8F9A"/>
+                            <a:srgbClr val="8C8C8C"/>
                           </a:solidFill>
                           <a:latin typeface="Microsoft YaHei"/>
                         </a:defRPr>
@@ -6029,7 +5990,7 @@
                   <a:tcPr/>
                 </a:tc>
               </a:tr>
-              <a:tr h="399020">
+              <a:tr h="415640">
                 <a:tc>
                   <a:txBody>
                     <a:bodyPr/>
@@ -6038,7 +5999,7 @@
                       <a:pPr algn="ctr">
                         <a:defRPr sz="1100">
                           <a:solidFill>
-                            <a:srgbClr val="8A8F9A"/>
+                            <a:srgbClr val="8C8C8C"/>
                           </a:solidFill>
                           <a:latin typeface="Microsoft YaHei"/>
                         </a:defRPr>
@@ -6058,7 +6019,7 @@
                       <a:pPr algn="ctr">
                         <a:defRPr sz="1100">
                           <a:solidFill>
-                            <a:srgbClr val="8A8F9A"/>
+                            <a:srgbClr val="8C8C8C"/>
                           </a:solidFill>
                           <a:latin typeface="Microsoft YaHei"/>
                         </a:defRPr>
@@ -6078,7 +6039,7 @@
                       <a:pPr algn="ctr">
                         <a:defRPr sz="1100">
                           <a:solidFill>
-                            <a:srgbClr val="8A8F9A"/>
+                            <a:srgbClr val="8C8C8C"/>
                           </a:solidFill>
                           <a:latin typeface="Microsoft YaHei"/>
                         </a:defRPr>
@@ -6098,7 +6059,7 @@
                       <a:pPr algn="ctr">
                         <a:defRPr sz="1100">
                           <a:solidFill>
-                            <a:srgbClr val="8A8F9A"/>
+                            <a:srgbClr val="8C8C8C"/>
                           </a:solidFill>
                           <a:latin typeface="Microsoft YaHei"/>
                         </a:defRPr>
@@ -6118,7 +6079,7 @@
                       <a:pPr algn="ctr">
                         <a:defRPr sz="1100">
                           <a:solidFill>
-                            <a:srgbClr val="8A8F9A"/>
+                            <a:srgbClr val="8C8C8C"/>
                           </a:solidFill>
                           <a:latin typeface="Microsoft YaHei"/>
                         </a:defRPr>
@@ -6138,7 +6099,7 @@
                       <a:pPr algn="ctr">
                         <a:defRPr sz="1100">
                           <a:solidFill>
-                            <a:srgbClr val="8A8F9A"/>
+                            <a:srgbClr val="8C8C8C"/>
                           </a:solidFill>
                           <a:latin typeface="Microsoft YaHei"/>
                         </a:defRPr>
@@ -6169,7 +6130,7 @@
     <p:bg>
       <p:bgPr>
         <a:solidFill>
-          <a:srgbClr val="0A1628"/>
+          <a:srgbClr val="FAF8F5"/>
         </a:solidFill>
         <a:effectLst/>
       </p:bgPr>
@@ -6183,20 +6144,56 @@
       <p:grpSpPr/>
       <p:sp>
         <p:nvSpPr>
-          <p:cNvPr id="2" name="Rectangle 1"/>
+          <p:cNvPr id="2" name="TextBox 1"/>
+          <p:cNvSpPr txBox="1"/>
+          <p:nvPr/>
+        </p:nvSpPr>
+        <p:spPr>
+          <a:xfrm>
+            <a:off x="1828800" y="1097280"/>
+            <a:ext cx="8534095" cy="731520"/>
+          </a:xfrm>
+          <a:prstGeom prst="rect">
+            <a:avLst/>
+          </a:prstGeom>
+          <a:noFill/>
+        </p:spPr>
+        <p:txBody>
+          <a:bodyPr wrap="none">
+            <a:spAutoFit/>
+          </a:bodyPr>
+          <a:lstStyle/>
+          <a:p>
+            <a:pPr algn="ctr">
+              <a:defRPr sz="3800" b="1">
+                <a:solidFill>
+                  <a:srgbClr val="3D3D3D"/>
+                </a:solidFill>
+                <a:latin typeface="Microsoft YaHei"/>
+              </a:defRPr>
+            </a:pPr>
+            <a:r>
+              <a:t>结论</a:t>
+            </a:r>
+          </a:p>
+        </p:txBody>
+      </p:sp>
+      <p:sp>
+        <p:nvSpPr>
+          <p:cNvPr id="3" name="Rectangle 2"/>
           <p:cNvSpPr/>
           <p:nvPr/>
         </p:nvSpPr>
         <p:spPr>
           <a:xfrm>
-            <a:off x="1828800" y="1371600"/>
-            <a:ext cx="8534095" cy="25400"/>
+            <a:off x="4572000" y="1828800"/>
+            <a:ext cx="3047695" cy="12700"/>
           </a:xfrm>
           <a:prstGeom prst="rect">
             <a:avLst/>
           </a:prstGeom>
           <a:solidFill>
-            <a:srgbClr val="C9A96E"/>
+            <a:srgbClr val="C2A497"/>
           </a:solidFill>
           <a:ln>
             <a:noFill/>
@@ -6226,49 +6223,13 @@
       </p:sp>
       <p:sp>
         <p:nvSpPr>
-          <p:cNvPr id="3" name="TextBox 2"/>
-          <p:cNvSpPr txBox="1"/>
-          <p:nvPr/>
-        </p:nvSpPr>
-        <p:spPr>
-          <a:xfrm>
-            <a:off x="1828800" y="1645920"/>
-            <a:ext cx="8534095" cy="914400"/>
-          </a:xfrm>
-          <a:prstGeom prst="rect">
-            <a:avLst/>
-          </a:prstGeom>
-          <a:noFill/>
-        </p:spPr>
-        <p:txBody>
-          <a:bodyPr wrap="none">
-            <a:spAutoFit/>
-          </a:bodyPr>
-          <a:lstStyle/>
-          <a:p>
-            <a:pPr algn="ctr">
-              <a:defRPr sz="4400" b="1">
-                <a:solidFill>
-                  <a:srgbClr val="F0EEE8"/>
-                </a:solidFill>
-                <a:latin typeface="Microsoft YaHei"/>
-              </a:defRPr>
-            </a:pPr>
-            <a:r>
-              <a:t>结论</a:t>
-            </a:r>
-          </a:p>
-        </p:txBody>
-      </p:sp>
-      <p:sp>
-        <p:nvSpPr>
           <p:cNvPr id="4" name="TextBox 3"/>
           <p:cNvSpPr txBox="1"/>
           <p:nvPr/>
         </p:nvSpPr>
         <p:spPr>
           <a:xfrm>
-            <a:off x="1828800" y="2743200"/>
+            <a:off x="1828800" y="2377440"/>
             <a:ext cx="457200" cy="457200"/>
           </a:xfrm>
           <a:prstGeom prst="rect">
@@ -6283,9 +6244,9 @@
           <a:lstStyle/>
           <a:p>
             <a:pPr algn="l">
-              <a:defRPr sz="2800" b="1">
-                <a:solidFill>
-                  <a:srgbClr val="5DC88A"/>
+              <a:defRPr sz="2400" b="1">
+                <a:solidFill>
+                  <a:srgbClr val="7AA884"/>
                 </a:solidFill>
                 <a:latin typeface="Microsoft YaHei"/>
               </a:defRPr>
@@ -6304,8 +6265,44 @@
         </p:nvSpPr>
         <p:spPr>
           <a:xfrm>
+            <a:off x="2468880" y="2377440"/>
+            <a:ext cx="3657600" cy="320040"/>
+          </a:xfrm>
+          <a:prstGeom prst="rect">
+            <a:avLst/>
+          </a:prstGeom>
+          <a:noFill/>
+        </p:spPr>
+        <p:txBody>
+          <a:bodyPr wrap="none">
+            <a:spAutoFit/>
+          </a:bodyPr>
+          <a:lstStyle/>
+          <a:p>
+            <a:pPr algn="l">
+              <a:defRPr sz="2000" b="1">
+                <a:solidFill>
+                  <a:srgbClr val="3D3D3D"/>
+                </a:solidFill>
+                <a:latin typeface="Microsoft YaHei"/>
+              </a:defRPr>
+            </a:pPr>
+            <a:r>
+              <a:t>WaNet攻击高度有效</a:t>
+            </a:r>
+          </a:p>
+        </p:txBody>
+      </p:sp>
+      <p:sp>
+        <p:nvSpPr>
+          <p:cNvPr id="6" name="TextBox 5"/>
+          <p:cNvSpPr txBox="1"/>
+          <p:nvPr/>
+        </p:nvSpPr>
+        <p:spPr>
+          <a:xfrm>
             <a:off x="2468880" y="2743200"/>
-            <a:ext cx="3200400" cy="365760"/>
+            <a:ext cx="7772400" cy="320040"/>
           </a:xfrm>
           <a:prstGeom prst="rect">
             <a:avLst/>
@@ -6319,29 +6316,29 @@
           <a:lstStyle/>
           <a:p>
             <a:pPr algn="l">
-              <a:defRPr sz="2200" b="1">
-                <a:solidFill>
-                  <a:srgbClr val="F0EEE8"/>
-                </a:solidFill>
-                <a:latin typeface="Microsoft YaHei"/>
-              </a:defRPr>
-            </a:pPr>
-            <a:r>
-              <a:t>WaNet攻击高度有效</a:t>
-            </a:r>
-          </a:p>
-        </p:txBody>
-      </p:sp>
-      <p:sp>
-        <p:nvSpPr>
-          <p:cNvPr id="6" name="TextBox 5"/>
-          <p:cNvSpPr txBox="1"/>
-          <p:nvPr/>
-        </p:nvSpPr>
-        <p:spPr>
-          <a:xfrm>
-            <a:off x="2468880" y="3154680"/>
-            <a:ext cx="7315200" cy="365760"/>
+              <a:defRPr sz="1400" b="0">
+                <a:solidFill>
+                  <a:srgbClr val="8C8C8C"/>
+                </a:solidFill>
+                <a:latin typeface="Microsoft YaHei"/>
+              </a:defRPr>
+            </a:pPr>
+            <a:r>
+              <a:t>CIFAR-10上ASR达99.15%, Clean保持92.84%</a:t>
+            </a:r>
+          </a:p>
+        </p:txBody>
+      </p:sp>
+      <p:sp>
+        <p:nvSpPr>
+          <p:cNvPr id="7" name="TextBox 6"/>
+          <p:cNvSpPr txBox="1"/>
+          <p:nvPr/>
+        </p:nvSpPr>
+        <p:spPr>
+          <a:xfrm>
+            <a:off x="1828800" y="3383280"/>
+            <a:ext cx="457200" cy="457200"/>
           </a:xfrm>
           <a:prstGeom prst="rect">
             <a:avLst/>
@@ -6355,28 +6352,100 @@
           <a:lstStyle/>
           <a:p>
             <a:pPr algn="l">
-              <a:defRPr sz="1500" b="0">
-                <a:solidFill>
-                  <a:srgbClr val="8A8F9A"/>
-                </a:solidFill>
-                <a:latin typeface="Microsoft YaHei"/>
-              </a:defRPr>
-            </a:pPr>
-            <a:r>
-              <a:t>CIFAR-10上ASR达99.15%, 同时保持92.84%正常精度</a:t>
-            </a:r>
-          </a:p>
-        </p:txBody>
-      </p:sp>
-      <p:sp>
-        <p:nvSpPr>
-          <p:cNvPr id="7" name="TextBox 6"/>
-          <p:cNvSpPr txBox="1"/>
-          <p:nvPr/>
-        </p:nvSpPr>
-        <p:spPr>
-          <a:xfrm>
-            <a:off x="1828800" y="3657600"/>
+              <a:defRPr sz="2400" b="1">
+                <a:solidFill>
+                  <a:srgbClr val="C2A497"/>
+                </a:solidFill>
+                <a:latin typeface="Microsoft YaHei"/>
+              </a:defRPr>
+            </a:pPr>
+            <a:r>
+              <a:t>2</a:t>
+            </a:r>
+          </a:p>
+        </p:txBody>
+      </p:sp>
+      <p:sp>
+        <p:nvSpPr>
+          <p:cNvPr id="8" name="TextBox 7"/>
+          <p:cNvSpPr txBox="1"/>
+          <p:nvPr/>
+        </p:nvSpPr>
+        <p:spPr>
+          <a:xfrm>
+            <a:off x="2468880" y="3383280"/>
+            <a:ext cx="3657600" cy="320040"/>
+          </a:xfrm>
+          <a:prstGeom prst="rect">
+            <a:avLst/>
+          </a:prstGeom>
+          <a:noFill/>
+        </p:spPr>
+        <p:txBody>
+          <a:bodyPr wrap="none">
+            <a:spAutoFit/>
+          </a:bodyPr>
+          <a:lstStyle/>
+          <a:p>
+            <a:pPr algn="l">
+              <a:defRPr sz="2000" b="1">
+                <a:solidFill>
+                  <a:srgbClr val="3D3D3D"/>
+                </a:solidFill>
+                <a:latin typeface="Microsoft YaHei"/>
+              </a:defRPr>
+            </a:pPr>
+            <a:r>
+              <a:t>Noise Mode是绕过防御的关键</a:t>
+            </a:r>
+          </a:p>
+        </p:txBody>
+      </p:sp>
+      <p:sp>
+        <p:nvSpPr>
+          <p:cNvPr id="9" name="TextBox 8"/>
+          <p:cNvSpPr txBox="1"/>
+          <p:nvPr/>
+        </p:nvSpPr>
+        <p:spPr>
+          <a:xfrm>
+            <a:off x="2468880" y="3749040"/>
+            <a:ext cx="7772400" cy="320040"/>
+          </a:xfrm>
+          <a:prstGeom prst="rect">
+            <a:avLst/>
+          </a:prstGeom>
+          <a:noFill/>
+        </p:spPr>
+        <p:txBody>
+          <a:bodyPr wrap="none">
+            <a:spAutoFit/>
+          </a:bodyPr>
+          <a:lstStyle/>
+          <a:p>
+            <a:pPr algn="l">
+              <a:defRPr sz="1400" b="0">
+                <a:solidFill>
+                  <a:srgbClr val="8C8C8C"/>
+                </a:solidFill>
+                <a:latin typeface="Microsoft YaHei"/>
+              </a:defRPr>
+            </a:pPr>
+            <a:r>
+              <a:t>无Noise时Cross=0%, 后门可被Neural Cleanse检测</a:t>
+            </a:r>
+          </a:p>
+        </p:txBody>
+      </p:sp>
+      <p:sp>
+        <p:nvSpPr>
+          <p:cNvPr id="10" name="TextBox 9"/>
+          <p:cNvSpPr txBox="1"/>
+          <p:nvPr/>
+        </p:nvSpPr>
+        <p:spPr>
+          <a:xfrm>
+            <a:off x="1828800" y="4389120"/>
             <a:ext cx="457200" cy="457200"/>
           </a:xfrm>
           <a:prstGeom prst="rect">
@@ -6391,29 +6460,29 @@
           <a:lstStyle/>
           <a:p>
             <a:pPr algn="l">
-              <a:defRPr sz="2800" b="1">
-                <a:solidFill>
-                  <a:srgbClr val="C9A96E"/>
-                </a:solidFill>
-                <a:latin typeface="Microsoft YaHei"/>
-              </a:defRPr>
-            </a:pPr>
-            <a:r>
-              <a:t>2</a:t>
-            </a:r>
-          </a:p>
-        </p:txBody>
-      </p:sp>
-      <p:sp>
-        <p:nvSpPr>
-          <p:cNvPr id="8" name="TextBox 7"/>
-          <p:cNvSpPr txBox="1"/>
-          <p:nvPr/>
-        </p:nvSpPr>
-        <p:spPr>
-          <a:xfrm>
-            <a:off x="2468880" y="3657600"/>
-            <a:ext cx="3200400" cy="365760"/>
+              <a:defRPr sz="2400" b="1">
+                <a:solidFill>
+                  <a:srgbClr val="D4847A"/>
+                </a:solidFill>
+                <a:latin typeface="Microsoft YaHei"/>
+              </a:defRPr>
+            </a:pPr>
+            <a:r>
+              <a:t>3</a:t>
+            </a:r>
+          </a:p>
+        </p:txBody>
+      </p:sp>
+      <p:sp>
+        <p:nvSpPr>
+          <p:cNvPr id="11" name="TextBox 10"/>
+          <p:cNvSpPr txBox="1"/>
+          <p:nvPr/>
+        </p:nvSpPr>
+        <p:spPr>
+          <a:xfrm>
+            <a:off x="2468880" y="4389120"/>
+            <a:ext cx="3657600" cy="320040"/>
           </a:xfrm>
           <a:prstGeom prst="rect">
             <a:avLst/>
@@ -6427,29 +6496,29 @@
           <a:lstStyle/>
           <a:p>
             <a:pPr algn="l">
-              <a:defRPr sz="2200" b="1">
-                <a:solidFill>
-                  <a:srgbClr val="F0EEE8"/>
-                </a:solidFill>
-                <a:latin typeface="Microsoft YaHei"/>
-              </a:defRPr>
-            </a:pPr>
-            <a:r>
-              <a:t>Noise Mode是绕过防御的关键</a:t>
-            </a:r>
-          </a:p>
-        </p:txBody>
-      </p:sp>
-      <p:sp>
-        <p:nvSpPr>
-          <p:cNvPr id="9" name="TextBox 8"/>
-          <p:cNvSpPr txBox="1"/>
-          <p:nvPr/>
-        </p:nvSpPr>
-        <p:spPr>
-          <a:xfrm>
-            <a:off x="2468880" y="4069080"/>
-            <a:ext cx="7315200" cy="365760"/>
+              <a:defRPr sz="2000" b="1">
+                <a:solidFill>
+                  <a:srgbClr val="3D3D3D"/>
+                </a:solidFill>
+                <a:latin typeface="Microsoft YaHei"/>
+              </a:defRPr>
+            </a:pPr>
+            <a:r>
+              <a:t>Warping参数高度敏感</a:t>
+            </a:r>
+          </a:p>
+        </p:txBody>
+      </p:sp>
+      <p:sp>
+        <p:nvSpPr>
+          <p:cNvPr id="12" name="TextBox 11"/>
+          <p:cNvSpPr txBox="1"/>
+          <p:nvPr/>
+        </p:nvSpPr>
+        <p:spPr>
+          <a:xfrm>
+            <a:off x="2468880" y="4754880"/>
+            <a:ext cx="7772400" cy="320040"/>
           </a:xfrm>
           <a:prstGeom prst="rect">
             <a:avLst/>
@@ -6463,28 +6532,28 @@
           <a:lstStyle/>
           <a:p>
             <a:pPr algn="l">
-              <a:defRPr sz="1500" b="0">
-                <a:solidFill>
-                  <a:srgbClr val="8A8F9A"/>
-                </a:solidFill>
-                <a:latin typeface="Microsoft YaHei"/>
-              </a:defRPr>
-            </a:pPr>
-            <a:r>
-              <a:t>无Noise时Cross Acc=0%, 后门可被Neural Cleanse检测</a:t>
-            </a:r>
-          </a:p>
-        </p:txBody>
-      </p:sp>
-      <p:sp>
-        <p:nvSpPr>
-          <p:cNvPr id="10" name="TextBox 9"/>
-          <p:cNvSpPr txBox="1"/>
-          <p:nvPr/>
-        </p:nvSpPr>
-        <p:spPr>
-          <a:xfrm>
-            <a:off x="1828800" y="4572000"/>
+              <a:defRPr sz="1400" b="0">
+                <a:solidFill>
+                  <a:srgbClr val="8C8C8C"/>
+                </a:solidFill>
+                <a:latin typeface="Microsoft YaHei"/>
+              </a:defRPr>
+            </a:pPr>
+            <a:r>
+              <a:t>s&lt;0.5或k&lt;4时攻击大幅下降 — 存在狭窄有效区间</a:t>
+            </a:r>
+          </a:p>
+        </p:txBody>
+      </p:sp>
+      <p:sp>
+        <p:nvSpPr>
+          <p:cNvPr id="13" name="TextBox 12"/>
+          <p:cNvSpPr txBox="1"/>
+          <p:nvPr/>
+        </p:nvSpPr>
+        <p:spPr>
+          <a:xfrm>
+            <a:off x="1828800" y="5394960"/>
             <a:ext cx="457200" cy="457200"/>
           </a:xfrm>
           <a:prstGeom prst="rect">
@@ -6499,29 +6568,29 @@
           <a:lstStyle/>
           <a:p>
             <a:pPr algn="l">
-              <a:defRPr sz="2800" b="1">
-                <a:solidFill>
-                  <a:srgbClr val="E85D5D"/>
-                </a:solidFill>
-                <a:latin typeface="Microsoft YaHei"/>
-              </a:defRPr>
-            </a:pPr>
-            <a:r>
-              <a:t>3</a:t>
-            </a:r>
-          </a:p>
-        </p:txBody>
-      </p:sp>
-      <p:sp>
-        <p:nvSpPr>
-          <p:cNvPr id="11" name="TextBox 10"/>
-          <p:cNvSpPr txBox="1"/>
-          <p:nvPr/>
-        </p:nvSpPr>
-        <p:spPr>
-          <a:xfrm>
-            <a:off x="2468880" y="4572000"/>
-            <a:ext cx="3200400" cy="365760"/>
+              <a:defRPr sz="2400" b="1">
+                <a:solidFill>
+                  <a:srgbClr val="7AA884"/>
+                </a:solidFill>
+                <a:latin typeface="Microsoft YaHei"/>
+              </a:defRPr>
+            </a:pPr>
+            <a:r>
+              <a:t>4</a:t>
+            </a:r>
+          </a:p>
+        </p:txBody>
+      </p:sp>
+      <p:sp>
+        <p:nvSpPr>
+          <p:cNvPr id="14" name="TextBox 13"/>
+          <p:cNvSpPr txBox="1"/>
+          <p:nvPr/>
+        </p:nvSpPr>
+        <p:spPr>
+          <a:xfrm>
+            <a:off x="2468880" y="5394960"/>
+            <a:ext cx="3657600" cy="320040"/>
           </a:xfrm>
           <a:prstGeom prst="rect">
             <a:avLst/>
@@ -6535,29 +6604,29 @@
           <a:lstStyle/>
           <a:p>
             <a:pPr algn="l">
-              <a:defRPr sz="2200" b="1">
-                <a:solidFill>
-                  <a:srgbClr val="F0EEE8"/>
-                </a:solidFill>
-                <a:latin typeface="Microsoft YaHei"/>
-              </a:defRPr>
-            </a:pPr>
-            <a:r>
-              <a:t>Warping参数高度敏感</a:t>
-            </a:r>
-          </a:p>
-        </p:txBody>
-      </p:sp>
-      <p:sp>
-        <p:nvSpPr>
-          <p:cNvPr id="12" name="TextBox 11"/>
-          <p:cNvSpPr txBox="1"/>
-          <p:nvPr/>
-        </p:nvSpPr>
-        <p:spPr>
-          <a:xfrm>
-            <a:off x="2468880" y="4983480"/>
-            <a:ext cx="7315200" cy="365760"/>
+              <a:defRPr sz="2000" b="1">
+                <a:solidFill>
+                  <a:srgbClr val="3D3D3D"/>
+                </a:solidFill>
+                <a:latin typeface="Microsoft YaHei"/>
+              </a:defRPr>
+            </a:pPr>
+            <a:r>
+              <a:t>频域检测: 我们的创新</a:t>
+            </a:r>
+          </a:p>
+        </p:txBody>
+      </p:sp>
+      <p:sp>
+        <p:nvSpPr>
+          <p:cNvPr id="15" name="TextBox 14"/>
+          <p:cNvSpPr txBox="1"/>
+          <p:nvPr/>
+        </p:nvSpPr>
+        <p:spPr>
+          <a:xfrm>
+            <a:off x="2468880" y="5760720"/>
+            <a:ext cx="7772400" cy="320040"/>
           </a:xfrm>
           <a:prstGeom prst="rect">
             <a:avLst/>
@@ -6571,167 +6640,16 @@
           <a:lstStyle/>
           <a:p>
             <a:pPr algn="l">
-              <a:defRPr sz="1500" b="0">
-                <a:solidFill>
-                  <a:srgbClr val="8A8F9A"/>
-                </a:solidFill>
-                <a:latin typeface="Microsoft YaHei"/>
-              </a:defRPr>
-            </a:pPr>
-            <a:r>
-              <a:t>s&lt;0.5或k&lt;4时攻击效果大幅下降 -- 存在狭窄有效区间</a:t>
-            </a:r>
-          </a:p>
-        </p:txBody>
-      </p:sp>
-      <p:sp>
-        <p:nvSpPr>
-          <p:cNvPr id="13" name="TextBox 12"/>
-          <p:cNvSpPr txBox="1"/>
-          <p:nvPr/>
-        </p:nvSpPr>
-        <p:spPr>
-          <a:xfrm>
-            <a:off x="1828800" y="5486400"/>
-            <a:ext cx="457200" cy="457200"/>
-          </a:xfrm>
-          <a:prstGeom prst="rect">
-            <a:avLst/>
-          </a:prstGeom>
-          <a:noFill/>
-        </p:spPr>
-        <p:txBody>
-          <a:bodyPr wrap="none">
-            <a:spAutoFit/>
-          </a:bodyPr>
-          <a:lstStyle/>
-          <a:p>
-            <a:pPr algn="l">
-              <a:defRPr sz="2800" b="1">
-                <a:solidFill>
-                  <a:srgbClr val="5DC88A"/>
-                </a:solidFill>
-                <a:latin typeface="Microsoft YaHei"/>
-              </a:defRPr>
-            </a:pPr>
-            <a:r>
-              <a:t>4</a:t>
-            </a:r>
-          </a:p>
-        </p:txBody>
-      </p:sp>
-      <p:sp>
-        <p:nvSpPr>
-          <p:cNvPr id="14" name="TextBox 13"/>
-          <p:cNvSpPr txBox="1"/>
-          <p:nvPr/>
-        </p:nvSpPr>
-        <p:spPr>
-          <a:xfrm>
-            <a:off x="2468880" y="5486400"/>
-            <a:ext cx="3200400" cy="365760"/>
-          </a:xfrm>
-          <a:prstGeom prst="rect">
-            <a:avLst/>
-          </a:prstGeom>
-          <a:noFill/>
-        </p:spPr>
-        <p:txBody>
-          <a:bodyPr wrap="none">
-            <a:spAutoFit/>
-          </a:bodyPr>
-          <a:lstStyle/>
-          <a:p>
-            <a:pPr algn="l">
-              <a:defRPr sz="2200" b="1">
-                <a:solidFill>
-                  <a:srgbClr val="F0EEE8"/>
-                </a:solidFill>
-                <a:latin typeface="Microsoft YaHei"/>
-              </a:defRPr>
-            </a:pPr>
-            <a:r>
-              <a:t>频域检测: 我们的创新</a:t>
-            </a:r>
-          </a:p>
-        </p:txBody>
-      </p:sp>
-      <p:sp>
-        <p:nvSpPr>
-          <p:cNvPr id="15" name="TextBox 14"/>
-          <p:cNvSpPr txBox="1"/>
-          <p:nvPr/>
-        </p:nvSpPr>
-        <p:spPr>
-          <a:xfrm>
-            <a:off x="2468880" y="5897880"/>
-            <a:ext cx="7315200" cy="365760"/>
-          </a:xfrm>
-          <a:prstGeom prst="rect">
-            <a:avLst/>
-          </a:prstGeom>
-          <a:noFill/>
-        </p:spPr>
-        <p:txBody>
-          <a:bodyPr wrap="none">
-            <a:spAutoFit/>
-          </a:bodyPr>
-          <a:lstStyle/>
-          <a:p>
-            <a:pPr algn="l">
-              <a:defRPr sz="1500" b="0">
-                <a:solidFill>
-                  <a:srgbClr val="8A8F9A"/>
-                </a:solidFill>
-                <a:latin typeface="Microsoft YaHei"/>
-              </a:defRPr>
-            </a:pPr>
-            <a:r>
-              <a:t>首次从图像信号层面检测warping后门, AUC 0.735远超STRIP 0.50</a:t>
-            </a:r>
-          </a:p>
-        </p:txBody>
-      </p:sp>
-      <p:sp>
-        <p:nvSpPr>
-          <p:cNvPr id="16" name="Rectangle 15"/>
-          <p:cNvSpPr/>
-          <p:nvPr/>
-        </p:nvSpPr>
-        <p:spPr>
-          <a:xfrm>
-            <a:off x="1828800" y="6217920"/>
-            <a:ext cx="8534095" cy="25400"/>
-          </a:xfrm>
-          <a:prstGeom prst="rect">
-            <a:avLst/>
-          </a:prstGeom>
-          <a:solidFill>
-            <a:srgbClr val="C9A96E"/>
-          </a:solidFill>
-          <a:ln>
-            <a:noFill/>
-          </a:ln>
-        </p:spPr>
-        <p:style>
-          <a:lnRef idx="1">
-            <a:schemeClr val="accent1"/>
-          </a:lnRef>
-          <a:fillRef idx="3">
-            <a:schemeClr val="accent1"/>
-          </a:fillRef>
-          <a:effectRef idx="2">
-            <a:schemeClr val="accent1"/>
-          </a:effectRef>
-          <a:fontRef idx="minor">
-            <a:schemeClr val="lt1"/>
-          </a:fontRef>
-        </p:style>
-        <p:txBody>
-          <a:bodyPr rtlCol="0" anchor="ctr"/>
-          <a:lstStyle/>
-          <a:p>
-            <a:pPr algn="ctr"/>
+              <a:defRPr sz="1400" b="0">
+                <a:solidFill>
+                  <a:srgbClr val="8C8C8C"/>
+                </a:solidFill>
+                <a:latin typeface="Microsoft YaHei"/>
+              </a:defRPr>
+            </a:pPr>
+            <a:r>
+              <a:t>首次从图像信号层面检测warping后门, AUC 0.735远超市面上最强的STRIP(0.50)</a:t>
+            </a:r>
           </a:p>
         </p:txBody>
       </p:sp>
@@ -6749,7 +6667,7 @@
     <p:bg>
       <p:bgPr>
         <a:solidFill>
-          <a:srgbClr val="0A1628"/>
+          <a:srgbClr val="FAF8F5"/>
         </a:solidFill>
         <a:effectLst/>
       </p:bgPr>
@@ -6763,20 +6681,56 @@
       <p:grpSpPr/>
       <p:sp>
         <p:nvSpPr>
-          <p:cNvPr id="2" name="Rectangle 1"/>
+          <p:cNvPr id="2" name="TextBox 1"/>
+          <p:cNvSpPr txBox="1"/>
+          <p:nvPr/>
+        </p:nvSpPr>
+        <p:spPr>
+          <a:xfrm>
+            <a:off x="1828800" y="1371600"/>
+            <a:ext cx="8534095" cy="731520"/>
+          </a:xfrm>
+          <a:prstGeom prst="rect">
+            <a:avLst/>
+          </a:prstGeom>
+          <a:noFill/>
+        </p:spPr>
+        <p:txBody>
+          <a:bodyPr wrap="none">
+            <a:spAutoFit/>
+          </a:bodyPr>
+          <a:lstStyle/>
+          <a:p>
+            <a:pPr algn="ctr">
+              <a:defRPr sz="3800" b="1">
+                <a:solidFill>
+                  <a:srgbClr val="3D3D3D"/>
+                </a:solidFill>
+                <a:latin typeface="Microsoft YaHei"/>
+              </a:defRPr>
+            </a:pPr>
+            <a:r>
+              <a:t>成员分工</a:t>
+            </a:r>
+          </a:p>
+        </p:txBody>
+      </p:sp>
+      <p:sp>
+        <p:nvSpPr>
+          <p:cNvPr id="3" name="Rectangle 2"/>
           <p:cNvSpPr/>
           <p:nvPr/>
         </p:nvSpPr>
         <p:spPr>
           <a:xfrm>
-            <a:off x="1828800" y="2743200"/>
-            <a:ext cx="8534095" cy="25400"/>
+            <a:off x="4572000" y="2103120"/>
+            <a:ext cx="3047695" cy="12700"/>
           </a:xfrm>
           <a:prstGeom prst="rect">
             <a:avLst/>
           </a:prstGeom>
           <a:solidFill>
-            <a:srgbClr val="C9A96E"/>
+            <a:srgbClr val="C2A497"/>
           </a:solidFill>
           <a:ln>
             <a:noFill/>
@@ -6806,14 +6760,405 @@
       </p:sp>
       <p:sp>
         <p:nvSpPr>
+          <p:cNvPr id="4" name="Rounded Rectangle 3"/>
+          <p:cNvSpPr/>
+          <p:nvPr/>
+        </p:nvSpPr>
+        <p:spPr>
+          <a:xfrm>
+            <a:off x="1828800" y="2743200"/>
+            <a:ext cx="3840480" cy="2286000"/>
+          </a:xfrm>
+          <a:prstGeom prst="roundRect">
+            <a:avLst/>
+          </a:prstGeom>
+          <a:solidFill>
+            <a:srgbClr val="FFFFFF"/>
+          </a:solidFill>
+          <a:ln w="12700">
+            <a:solidFill>
+              <a:srgbClr val="E8E3DD"/>
+            </a:solidFill>
+          </a:ln>
+        </p:spPr>
+        <p:style>
+          <a:lnRef idx="1">
+            <a:schemeClr val="accent1"/>
+          </a:lnRef>
+          <a:fillRef idx="3">
+            <a:schemeClr val="accent1"/>
+          </a:fillRef>
+          <a:effectRef idx="2">
+            <a:schemeClr val="accent1"/>
+          </a:effectRef>
+          <a:fontRef idx="minor">
+            <a:schemeClr val="lt1"/>
+          </a:fontRef>
+        </p:style>
+        <p:txBody>
+          <a:bodyPr rtlCol="0" anchor="ctr"/>
+          <a:lstStyle/>
+          <a:p>
+            <a:pPr algn="ctr"/>
+          </a:p>
+        </p:txBody>
+      </p:sp>
+      <p:sp>
+        <p:nvSpPr>
+          <p:cNvPr id="5" name="TextBox 4"/>
+          <p:cNvSpPr txBox="1"/>
+          <p:nvPr/>
+        </p:nvSpPr>
+        <p:spPr>
+          <a:xfrm>
+            <a:off x="2006600" y="2870200"/>
+            <a:ext cx="3484880" cy="254000"/>
+          </a:xfrm>
+          <a:prstGeom prst="rect">
+            <a:avLst/>
+          </a:prstGeom>
+          <a:noFill/>
+        </p:spPr>
+        <p:txBody>
+          <a:bodyPr wrap="none">
+            <a:spAutoFit/>
+          </a:bodyPr>
+          <a:lstStyle/>
+          <a:p>
+            <a:pPr algn="ctr">
+              <a:defRPr sz="1100" b="0">
+                <a:solidFill>
+                  <a:srgbClr val="8C8C8C"/>
+                </a:solidFill>
+                <a:latin typeface="Microsoft YaHei"/>
+              </a:defRPr>
+            </a:pPr>
+            <a:r>
+              <a:t>周争妍</a:t>
+            </a:r>
+          </a:p>
+        </p:txBody>
+      </p:sp>
+      <p:sp>
+        <p:nvSpPr>
+          <p:cNvPr id="6" name="TextBox 5"/>
+          <p:cNvSpPr txBox="1"/>
+          <p:nvPr/>
+        </p:nvSpPr>
+        <p:spPr>
+          <a:xfrm>
+            <a:off x="2006600" y="3149600"/>
+            <a:ext cx="3484880" cy="457200"/>
+          </a:xfrm>
+          <a:prstGeom prst="rect">
+            <a:avLst/>
+          </a:prstGeom>
+          <a:noFill/>
+        </p:spPr>
+        <p:txBody>
+          <a:bodyPr wrap="none">
+            <a:spAutoFit/>
+          </a:bodyPr>
+          <a:lstStyle/>
+          <a:p>
+            <a:pPr algn="ctr">
+              <a:defRPr sz="2600" b="1">
+                <a:solidFill>
+                  <a:srgbClr val="C2A497"/>
+                </a:solidFill>
+                <a:latin typeface="Microsoft YaHei"/>
+              </a:defRPr>
+            </a:pPr>
+            <a:r>
+              <a:t>主实验复现+防御验证</a:t>
+            </a:r>
+          </a:p>
+        </p:txBody>
+      </p:sp>
+      <p:sp>
+        <p:nvSpPr>
+          <p:cNvPr id="7" name="TextBox 6"/>
+          <p:cNvSpPr txBox="1"/>
+          <p:nvPr/>
+        </p:nvSpPr>
+        <p:spPr>
+          <a:xfrm>
+            <a:off x="2006600" y="4775200"/>
+            <a:ext cx="3484880" cy="203200"/>
+          </a:xfrm>
+          <a:prstGeom prst="rect">
+            <a:avLst/>
+          </a:prstGeom>
+          <a:noFill/>
+        </p:spPr>
+        <p:txBody>
+          <a:bodyPr wrap="none">
+            <a:spAutoFit/>
+          </a:bodyPr>
+          <a:lstStyle/>
+          <a:p>
+            <a:pPr algn="ctr">
+              <a:defRPr sz="900" b="0">
+                <a:solidFill>
+                  <a:srgbClr val="8C8C8C"/>
+                </a:solidFill>
+                <a:latin typeface="Microsoft YaHei"/>
+              </a:defRPr>
+            </a:pPr>
+            <a:r>
+              <a:t>3数据集 x 2模式</a:t>
+            </a:r>
+            <a:br/>
+            <a:r>
+              <a:t>STRIP / Fine-Pruning / Neural Cleanse</a:t>
+            </a:r>
+            <a:br/>
+            <a:r>
+              <a:t>环境配置 + tmux并行脚本</a:t>
+            </a:r>
+          </a:p>
+        </p:txBody>
+      </p:sp>
+      <p:sp>
+        <p:nvSpPr>
+          <p:cNvPr id="8" name="Rounded Rectangle 7"/>
+          <p:cNvSpPr/>
+          <p:nvPr/>
+        </p:nvSpPr>
+        <p:spPr>
+          <a:xfrm>
+            <a:off x="6492240" y="2743200"/>
+            <a:ext cx="3840480" cy="2286000"/>
+          </a:xfrm>
+          <a:prstGeom prst="roundRect">
+            <a:avLst/>
+          </a:prstGeom>
+          <a:solidFill>
+            <a:srgbClr val="FFFFFF"/>
+          </a:solidFill>
+          <a:ln w="12700">
+            <a:solidFill>
+              <a:srgbClr val="E8E3DD"/>
+            </a:solidFill>
+          </a:ln>
+        </p:spPr>
+        <p:style>
+          <a:lnRef idx="1">
+            <a:schemeClr val="accent1"/>
+          </a:lnRef>
+          <a:fillRef idx="3">
+            <a:schemeClr val="accent1"/>
+          </a:fillRef>
+          <a:effectRef idx="2">
+            <a:schemeClr val="accent1"/>
+          </a:effectRef>
+          <a:fontRef idx="minor">
+            <a:schemeClr val="lt1"/>
+          </a:fontRef>
+        </p:style>
+        <p:txBody>
+          <a:bodyPr rtlCol="0" anchor="ctr"/>
+          <a:lstStyle/>
+          <a:p>
+            <a:pPr algn="ctr"/>
+          </a:p>
+        </p:txBody>
+      </p:sp>
+      <p:sp>
+        <p:nvSpPr>
+          <p:cNvPr id="9" name="TextBox 8"/>
+          <p:cNvSpPr txBox="1"/>
+          <p:nvPr/>
+        </p:nvSpPr>
+        <p:spPr>
+          <a:xfrm>
+            <a:off x="6670040" y="2870200"/>
+            <a:ext cx="3484880" cy="254000"/>
+          </a:xfrm>
+          <a:prstGeom prst="rect">
+            <a:avLst/>
+          </a:prstGeom>
+          <a:noFill/>
+        </p:spPr>
+        <p:txBody>
+          <a:bodyPr wrap="none">
+            <a:spAutoFit/>
+          </a:bodyPr>
+          <a:lstStyle/>
+          <a:p>
+            <a:pPr algn="ctr">
+              <a:defRPr sz="1100" b="0">
+                <a:solidFill>
+                  <a:srgbClr val="8C8C8C"/>
+                </a:solidFill>
+                <a:latin typeface="Microsoft YaHei"/>
+              </a:defRPr>
+            </a:pPr>
+            <a:r>
+              <a:t>蒋竺君</a:t>
+            </a:r>
+          </a:p>
+        </p:txBody>
+      </p:sp>
+      <p:sp>
+        <p:nvSpPr>
+          <p:cNvPr id="10" name="TextBox 9"/>
+          <p:cNvSpPr txBox="1"/>
+          <p:nvPr/>
+        </p:nvSpPr>
+        <p:spPr>
+          <a:xfrm>
+            <a:off x="6670040" y="3149600"/>
+            <a:ext cx="3484880" cy="457200"/>
+          </a:xfrm>
+          <a:prstGeom prst="rect">
+            <a:avLst/>
+          </a:prstGeom>
+          <a:noFill/>
+        </p:spPr>
+        <p:txBody>
+          <a:bodyPr wrap="none">
+            <a:spAutoFit/>
+          </a:bodyPr>
+          <a:lstStyle/>
+          <a:p>
+            <a:pPr algn="ctr">
+              <a:defRPr sz="2600" b="1">
+                <a:solidFill>
+                  <a:srgbClr val="9B9EC0"/>
+                </a:solidFill>
+                <a:latin typeface="Microsoft YaHei"/>
+              </a:defRPr>
+            </a:pPr>
+            <a:r>
+              <a:t>消融实验+频域检测器+可视化</a:t>
+            </a:r>
+          </a:p>
+        </p:txBody>
+      </p:sp>
+      <p:sp>
+        <p:nvSpPr>
+          <p:cNvPr id="11" name="TextBox 10"/>
+          <p:cNvSpPr txBox="1"/>
+          <p:nvPr/>
+        </p:nvSpPr>
+        <p:spPr>
+          <a:xfrm>
+            <a:off x="6670040" y="4775200"/>
+            <a:ext cx="3484880" cy="203200"/>
+          </a:xfrm>
+          <a:prstGeom prst="rect">
+            <a:avLst/>
+          </a:prstGeom>
+          <a:noFill/>
+        </p:spPr>
+        <p:txBody>
+          <a:bodyPr wrap="none">
+            <a:spAutoFit/>
+          </a:bodyPr>
+          <a:lstStyle/>
+          <a:p>
+            <a:pPr algn="ctr">
+              <a:defRPr sz="900" b="0">
+                <a:solidFill>
+                  <a:srgbClr val="8C8C8C"/>
+                </a:solidFill>
+                <a:latin typeface="Microsoft YaHei"/>
+              </a:defRPr>
+            </a:pPr>
+            <a:r>
+              <a:t>Noise/s/k参数扫描 (10组)</a:t>
+            </a:r>
+            <a:br/>
+            <a:r>
+              <a:t>频域检测器 (AUC 0.735)</a:t>
+            </a:r>
+            <a:br/>
+            <a:r>
+              <a:t>Dashboard + PPT制作</a:t>
+            </a:r>
+          </a:p>
+        </p:txBody>
+      </p:sp>
+    </p:spTree>
+  </p:cSld>
+  <p:clrMapOvr>
+    <a:masterClrMapping/>
+  </p:clrMapOvr>
+</p:sld>
+</file>
+
+<file path=ppt/slides/slide15.xml><?xml version="1.0" encoding="utf-8"?>
+<p:sld xmlns:a="http://schemas.openxmlformats.org/drawingml/2006/main" xmlns:p="http://schemas.openxmlformats.org/presentationml/2006/main" xmlns:r="http://schemas.openxmlformats.org/officeDocument/2006/relationships">
+  <p:cSld>
+    <p:bg>
+      <p:bgPr>
+        <a:solidFill>
+          <a:srgbClr val="FAF8F5"/>
+        </a:solidFill>
+        <a:effectLst/>
+      </p:bgPr>
+    </p:bg>
+    <p:spTree>
+      <p:nvGrpSpPr>
+        <p:cNvPr id="1" name=""/>
+        <p:cNvGrpSpPr/>
+        <p:nvPr/>
+      </p:nvGrpSpPr>
+      <p:grpSpPr/>
+      <p:sp>
+        <p:nvSpPr>
+          <p:cNvPr id="2" name="Rectangle 1"/>
+          <p:cNvSpPr/>
+          <p:nvPr/>
+        </p:nvSpPr>
+        <p:spPr>
+          <a:xfrm>
+            <a:off x="2743200" y="2560320"/>
+            <a:ext cx="6705295" cy="12700"/>
+          </a:xfrm>
+          <a:prstGeom prst="rect">
+            <a:avLst/>
+          </a:prstGeom>
+          <a:solidFill>
+            <a:srgbClr val="C2A497"/>
+          </a:solidFill>
+          <a:ln>
+            <a:noFill/>
+          </a:ln>
+        </p:spPr>
+        <p:style>
+          <a:lnRef idx="1">
+            <a:schemeClr val="accent1"/>
+          </a:lnRef>
+          <a:fillRef idx="3">
+            <a:schemeClr val="accent1"/>
+          </a:fillRef>
+          <a:effectRef idx="2">
+            <a:schemeClr val="accent1"/>
+          </a:effectRef>
+          <a:fontRef idx="minor">
+            <a:schemeClr val="lt1"/>
+          </a:fontRef>
+        </p:style>
+        <p:txBody>
+          <a:bodyPr rtlCol="0" anchor="ctr"/>
+          <a:lstStyle/>
+          <a:p>
+            <a:pPr algn="ctr"/>
+          </a:p>
+        </p:txBody>
+      </p:sp>
+      <p:sp>
+        <p:nvSpPr>
           <p:cNvPr id="3" name="TextBox 2"/>
           <p:cNvSpPr txBox="1"/>
           <p:nvPr/>
         </p:nvSpPr>
         <p:spPr>
           <a:xfrm>
-            <a:off x="1828800" y="3017520"/>
-            <a:ext cx="8534095" cy="914400"/>
+            <a:off x="2743200" y="2834640"/>
+            <a:ext cx="6705295" cy="914400"/>
           </a:xfrm>
           <a:prstGeom prst="rect">
             <a:avLst/>
@@ -6827,9 +7172,9 @@
           <a:lstStyle/>
           <a:p>
             <a:pPr algn="ctr">
-              <a:defRPr sz="5200" b="1">
-                <a:solidFill>
-                  <a:srgbClr val="F0EEE8"/>
+              <a:defRPr sz="4800" b="1">
+                <a:solidFill>
+                  <a:srgbClr val="3D3D3D"/>
                 </a:solidFill>
                 <a:latin typeface="Microsoft YaHei"/>
               </a:defRPr>
@@ -6848,8 +7193,8 @@
         </p:nvSpPr>
         <p:spPr>
           <a:xfrm>
-            <a:off x="1828800" y="4114800"/>
-            <a:ext cx="8534095" cy="548640"/>
+            <a:off x="2743200" y="3931920"/>
+            <a:ext cx="6705295" cy="457200"/>
           </a:xfrm>
           <a:prstGeom prst="rect">
             <a:avLst/>
@@ -6865,13 +7210,13 @@
             <a:pPr algn="ctr">
               <a:defRPr sz="1800" b="0">
                 <a:solidFill>
-                  <a:srgbClr val="C9A96E"/>
-                </a:solidFill>
-                <a:latin typeface="Microsoft YaHei"/>
-              </a:defRPr>
-            </a:pPr>
-            <a:r>
-              <a:t>WaNet复现与分析 | AI安全课程设计</a:t>
+                  <a:srgbClr val="8C8C8C"/>
+                </a:solidFill>
+                <a:latin typeface="Microsoft YaHei"/>
+              </a:defRPr>
+            </a:pPr>
+            <a:r>
+              <a:t>WaNet复现与分析  ·  AI安全课程设计</a:t>
             </a:r>
           </a:p>
         </p:txBody>
@@ -6884,8 +7229,8 @@
         </p:nvSpPr>
         <p:spPr>
           <a:xfrm>
-            <a:off x="1828800" y="4846320"/>
-            <a:ext cx="8534095" cy="457200"/>
+            <a:off x="2743200" y="4572000"/>
+            <a:ext cx="6705295" cy="457200"/>
           </a:xfrm>
           <a:prstGeom prst="rect">
             <a:avLst/>
@@ -6899,9 +7244,9 @@
           <a:lstStyle/>
           <a:p>
             <a:pPr algn="ctr">
-              <a:defRPr sz="1600" b="0">
-                <a:solidFill>
-                  <a:srgbClr val="8A8F9A"/>
+              <a:defRPr sz="1500" b="0">
+                <a:solidFill>
+                  <a:srgbClr val="C2A497"/>
                 </a:solidFill>
                 <a:latin typeface="Microsoft YaHei"/>
               </a:defRPr>
@@ -6920,14 +7265,14 @@
         </p:nvSpPr>
         <p:spPr>
           <a:xfrm>
-            <a:off x="1828800" y="5669280"/>
-            <a:ext cx="8534095" cy="25400"/>
+            <a:off x="2743200" y="5303520"/>
+            <a:ext cx="6705295" cy="12700"/>
           </a:xfrm>
           <a:prstGeom prst="rect">
             <a:avLst/>
           </a:prstGeom>
           <a:solidFill>
-            <a:srgbClr val="C9A96E"/>
+            <a:srgbClr val="C2A497"/>
           </a:solidFill>
           <a:ln>
             <a:noFill/>
@@ -6969,7 +7314,7 @@
     <p:bg>
       <p:bgPr>
         <a:solidFill>
-          <a:srgbClr val="0A1628"/>
+          <a:srgbClr val="FAF8F5"/>
         </a:solidFill>
         <a:effectLst/>
       </p:bgPr>
@@ -6983,20 +7328,56 @@
       <p:grpSpPr/>
       <p:sp>
         <p:nvSpPr>
-          <p:cNvPr id="2" name="Rectangle 1"/>
+          <p:cNvPr id="2" name="TextBox 1"/>
+          <p:cNvSpPr txBox="1"/>
+          <p:nvPr/>
+        </p:nvSpPr>
+        <p:spPr>
+          <a:xfrm>
+            <a:off x="731520" y="457200"/>
+            <a:ext cx="4572000" cy="457200"/>
+          </a:xfrm>
+          <a:prstGeom prst="rect">
+            <a:avLst/>
+          </a:prstGeom>
+          <a:noFill/>
+        </p:spPr>
+        <p:txBody>
+          <a:bodyPr wrap="none">
+            <a:spAutoFit/>
+          </a:bodyPr>
+          <a:lstStyle/>
+          <a:p>
+            <a:pPr algn="l">
+              <a:defRPr sz="3000" b="1">
+                <a:solidFill>
+                  <a:srgbClr val="3D3D3D"/>
+                </a:solidFill>
+                <a:latin typeface="Microsoft YaHei"/>
+              </a:defRPr>
+            </a:pPr>
+            <a:r>
+              <a:t>什么是后门攻击</a:t>
+            </a:r>
+          </a:p>
+        </p:txBody>
+      </p:sp>
+      <p:sp>
+        <p:nvSpPr>
+          <p:cNvPr id="3" name="Rectangle 2"/>
           <p:cNvSpPr/>
           <p:nvPr/>
         </p:nvSpPr>
         <p:spPr>
           <a:xfrm>
-            <a:off x="731520" y="731520"/>
-            <a:ext cx="2286000" cy="25400"/>
+            <a:off x="731520" y="1005840"/>
+            <a:ext cx="1371600" cy="12700"/>
           </a:xfrm>
           <a:prstGeom prst="rect">
             <a:avLst/>
           </a:prstGeom>
           <a:solidFill>
-            <a:srgbClr val="C9A96E"/>
+            <a:srgbClr val="C2A497"/>
           </a:solidFill>
           <a:ln>
             <a:noFill/>
@@ -7026,49 +7407,13 @@
       </p:sp>
       <p:sp>
         <p:nvSpPr>
-          <p:cNvPr id="3" name="TextBox 2"/>
-          <p:cNvSpPr txBox="1"/>
-          <p:nvPr/>
-        </p:nvSpPr>
-        <p:spPr>
-          <a:xfrm>
-            <a:off x="731520" y="914400"/>
-            <a:ext cx="5486400" cy="548640"/>
-          </a:xfrm>
-          <a:prstGeom prst="rect">
-            <a:avLst/>
-          </a:prstGeom>
-          <a:noFill/>
-        </p:spPr>
-        <p:txBody>
-          <a:bodyPr wrap="none">
-            <a:spAutoFit/>
-          </a:bodyPr>
-          <a:lstStyle/>
-          <a:p>
-            <a:pPr algn="l">
-              <a:defRPr sz="3600" b="1">
-                <a:solidFill>
-                  <a:srgbClr val="F0EEE8"/>
-                </a:solidFill>
-                <a:latin typeface="Microsoft YaHei"/>
-              </a:defRPr>
-            </a:pPr>
-            <a:r>
-              <a:t>什么是后门攻击</a:t>
-            </a:r>
-          </a:p>
-        </p:txBody>
-      </p:sp>
-      <p:sp>
-        <p:nvSpPr>
           <p:cNvPr id="4" name="TextBox 3"/>
           <p:cNvSpPr txBox="1"/>
           <p:nvPr/>
         </p:nvSpPr>
         <p:spPr>
           <a:xfrm>
-            <a:off x="731520" y="1645920"/>
+            <a:off x="731520" y="1371600"/>
             <a:ext cx="5029200" cy="2286000"/>
           </a:xfrm>
           <a:prstGeom prst="rect">
@@ -7084,27 +7429,27 @@
           <a:p>
             <a:pPr>
               <a:spcAft>
-                <a:spcPts val="680"/>
+                <a:spcPts val="560"/>
               </a:spcAft>
-              <a:defRPr sz="1700" b="1">
-                <a:solidFill>
-                  <a:srgbClr val="F0EEE8"/>
-                </a:solidFill>
-                <a:latin typeface="Microsoft YaHei"/>
-              </a:defRPr>
-            </a:pPr>
-            <a:r>
-              <a:t>深度学习模型在训练阶段可被植入[后门]</a:t>
+              <a:defRPr sz="1600" b="1">
+                <a:solidFill>
+                  <a:srgbClr val="3D3D3D"/>
+                </a:solidFill>
+                <a:latin typeface="Microsoft YaHei"/>
+              </a:defRPr>
+            </a:pPr>
+            <a:r>
+              <a:t>深度学习模型在训练阶段可被植入后门</a:t>
             </a:r>
           </a:p>
           <a:p>
             <a:pPr>
               <a:spcAft>
-                <a:spcPts val="680"/>
+                <a:spcPts val="560"/>
               </a:spcAft>
-              <a:defRPr sz="1700" b="0">
-                <a:solidFill>
-                  <a:srgbClr val="8A8F9A"/>
+              <a:defRPr sz="1600" b="0">
+                <a:solidFill>
+                  <a:srgbClr val="8C8C8C"/>
                 </a:solidFill>
                 <a:latin typeface="Microsoft YaHei"/>
               </a:defRPr>
@@ -7116,27 +7461,27 @@
           <a:p>
             <a:pPr>
               <a:spcAft>
-                <a:spcPts val="680"/>
+                <a:spcPts val="560"/>
               </a:spcAft>
-              <a:defRPr sz="1700" b="0">
-                <a:solidFill>
-                  <a:srgbClr val="E85D5D"/>
-                </a:solidFill>
-                <a:latin typeface="Microsoft YaHei"/>
-              </a:defRPr>
-            </a:pPr>
-            <a:r>
-              <a:t>正常图 -&gt; 正常分类  |  带触发器的图 -&gt; 攻击者指定的标签</a:t>
+              <a:defRPr sz="1600" b="0">
+                <a:solidFill>
+                  <a:srgbClr val="D4847A"/>
+                </a:solidFill>
+                <a:latin typeface="Microsoft YaHei"/>
+              </a:defRPr>
+            </a:pPr>
+            <a:r>
+              <a:t>正常图 -&gt; 正常分类  |  带触发器的图 -&gt; 攻击者指定标签</a:t>
             </a:r>
           </a:p>
           <a:p>
             <a:pPr>
               <a:spcAft>
-                <a:spcPts val="680"/>
+                <a:spcPts val="560"/>
               </a:spcAft>
-              <a:defRPr sz="1700" b="0">
-                <a:solidFill>
-                  <a:srgbClr val="8A8F9A"/>
+              <a:defRPr sz="1600" b="0">
+                <a:solidFill>
+                  <a:srgbClr val="8C8C8C"/>
                 </a:solidFill>
                 <a:latin typeface="Microsoft YaHei"/>
               </a:defRPr>
@@ -7145,33 +7490,33 @@
           <a:p>
             <a:pPr>
               <a:spcAft>
-                <a:spcPts val="680"/>
+                <a:spcPts val="560"/>
               </a:spcAft>
-              <a:defRPr sz="1700" b="0">
-                <a:solidFill>
-                  <a:srgbClr val="8A8F9A"/>
-                </a:solidFill>
-                <a:latin typeface="Microsoft YaHei"/>
-              </a:defRPr>
-            </a:pPr>
-            <a:r>
-              <a:t>传统后门触发器: 可见图案 (白色方块, 水印, 正弦波纹)</a:t>
+              <a:defRPr sz="1600" b="0">
+                <a:solidFill>
+                  <a:srgbClr val="8C8C8C"/>
+                </a:solidFill>
+                <a:latin typeface="Microsoft YaHei"/>
+              </a:defRPr>
+            </a:pPr>
+            <a:r>
+              <a:t>传统触发器: 白色方块 / 水印 / 正弦波纹 (人眼可见)</a:t>
             </a:r>
           </a:p>
           <a:p>
             <a:pPr>
               <a:spcAft>
-                <a:spcPts val="680"/>
+                <a:spcPts val="560"/>
               </a:spcAft>
-              <a:defRPr sz="1700" b="0">
-                <a:solidFill>
-                  <a:srgbClr val="8A8F9A"/>
-                </a:solidFill>
-                <a:latin typeface="Microsoft YaHei"/>
-              </a:defRPr>
-            </a:pPr>
-            <a:r>
-              <a:t>问题: 人眼可察觉, 防御方法可检测</a:t>
+              <a:defRPr sz="1600" b="0">
+                <a:solidFill>
+                  <a:srgbClr val="D4847A"/>
+                </a:solidFill>
+                <a:latin typeface="Microsoft YaHei"/>
+              </a:defRPr>
+            </a:pPr>
+            <a:r>
+              <a:t>-&gt; 防御方法 (STRIP / Neural Cleanse) 可以检测</a:t>
             </a:r>
           </a:p>
         </p:txBody>
@@ -7184,18 +7529,18 @@
         </p:nvSpPr>
         <p:spPr>
           <a:xfrm>
-            <a:off x="6858000" y="1371600"/>
+            <a:off x="6858000" y="1188720"/>
             <a:ext cx="2286000" cy="1188720"/>
           </a:xfrm>
           <a:prstGeom prst="roundRect">
             <a:avLst/>
           </a:prstGeom>
           <a:solidFill>
-            <a:srgbClr val="0F1F3D"/>
+            <a:srgbClr val="FFFFFF"/>
           </a:solidFill>
-          <a:ln w="19050">
+          <a:ln w="12700">
             <a:solidFill>
-              <a:srgbClr val="E85D5D"/>
+              <a:srgbClr val="E8E3DD"/>
             </a:solidFill>
           </a:ln>
         </p:spPr>
@@ -7229,8 +7574,8 @@
         </p:nvSpPr>
         <p:spPr>
           <a:xfrm>
-            <a:off x="7010400" y="1498600"/>
-            <a:ext cx="1981200" cy="279400"/>
+            <a:off x="7035800" y="1315720"/>
+            <a:ext cx="1930400" cy="254000"/>
           </a:xfrm>
           <a:prstGeom prst="rect">
             <a:avLst/>
@@ -7244,9 +7589,9 @@
           <a:lstStyle/>
           <a:p>
             <a:pPr algn="ctr">
-              <a:defRPr sz="1200" b="0">
-                <a:solidFill>
-                  <a:srgbClr val="8A8F9A"/>
+              <a:defRPr sz="1100" b="0">
+                <a:solidFill>
+                  <a:srgbClr val="8C8C8C"/>
                 </a:solidFill>
                 <a:latin typeface="Microsoft YaHei"/>
               </a:defRPr>
@@ -7265,8 +7610,8 @@
         </p:nvSpPr>
         <p:spPr>
           <a:xfrm>
-            <a:off x="7010400" y="1803400"/>
-            <a:ext cx="1981200" cy="457200"/>
+            <a:off x="7035800" y="1595120"/>
+            <a:ext cx="1930400" cy="457200"/>
           </a:xfrm>
           <a:prstGeom prst="rect">
             <a:avLst/>
@@ -7280,15 +7625,15 @@
           <a:lstStyle/>
           <a:p>
             <a:pPr algn="ctr">
-              <a:defRPr sz="2800" b="1">
-                <a:solidFill>
-                  <a:srgbClr val="E85D5D"/>
-                </a:solidFill>
-                <a:latin typeface="Microsoft YaHei"/>
-              </a:defRPr>
-            </a:pPr>
-            <a:r>
-              <a:t>白块Patch</a:t>
+              <a:defRPr sz="2600" b="1">
+                <a:solidFill>
+                  <a:srgbClr val="D4847A"/>
+                </a:solidFill>
+                <a:latin typeface="Microsoft YaHei"/>
+              </a:defRPr>
+            </a:pPr>
+            <a:r>
+              <a:t>白色Patch</a:t>
             </a:r>
           </a:p>
         </p:txBody>
@@ -7301,8 +7646,8 @@
         </p:nvSpPr>
         <p:spPr>
           <a:xfrm>
-            <a:off x="7010400" y="2280920"/>
-            <a:ext cx="1981200" cy="203200"/>
+            <a:off x="7035800" y="2123440"/>
+            <a:ext cx="1930400" cy="203200"/>
           </a:xfrm>
           <a:prstGeom prst="rect">
             <a:avLst/>
@@ -7316,9 +7661,9 @@
           <a:lstStyle/>
           <a:p>
             <a:pPr algn="ctr">
-              <a:defRPr sz="1000" b="0">
-                <a:solidFill>
-                  <a:srgbClr val="8A8F9A"/>
+              <a:defRPr sz="900" b="0">
+                <a:solidFill>
+                  <a:srgbClr val="8C8C8C"/>
                 </a:solidFill>
                 <a:latin typeface="Microsoft YaHei"/>
               </a:defRPr>
@@ -7337,18 +7682,18 @@
         </p:nvSpPr>
         <p:spPr>
           <a:xfrm>
-            <a:off x="9418320" y="1371600"/>
+            <a:off x="9418320" y="1188720"/>
             <a:ext cx="2286000" cy="1188720"/>
           </a:xfrm>
           <a:prstGeom prst="roundRect">
             <a:avLst/>
           </a:prstGeom>
           <a:solidFill>
-            <a:srgbClr val="0F1F3D"/>
+            <a:srgbClr val="FFFFFF"/>
           </a:solidFill>
-          <a:ln w="19050">
+          <a:ln w="12700">
             <a:solidFill>
-              <a:srgbClr val="E85D5D"/>
+              <a:srgbClr val="E8E3DD"/>
             </a:solidFill>
           </a:ln>
         </p:spPr>
@@ -7382,8 +7727,8 @@
         </p:nvSpPr>
         <p:spPr>
           <a:xfrm>
-            <a:off x="9570720" y="1498600"/>
-            <a:ext cx="1981200" cy="279400"/>
+            <a:off x="9596120" y="1315720"/>
+            <a:ext cx="1930400" cy="254000"/>
           </a:xfrm>
           <a:prstGeom prst="rect">
             <a:avLst/>
@@ -7397,15 +7742,15 @@
           <a:lstStyle/>
           <a:p>
             <a:pPr algn="ctr">
-              <a:defRPr sz="1200" b="0">
-                <a:solidFill>
-                  <a:srgbClr val="8A8F9A"/>
-                </a:solidFill>
-                <a:latin typeface="Microsoft YaHei"/>
-              </a:defRPr>
-            </a:pPr>
-            <a:r>
-              <a:t>Blend</a:t>
+              <a:defRPr sz="1100" b="0">
+                <a:solidFill>
+                  <a:srgbClr val="8C8C8C"/>
+                </a:solidFill>
+                <a:latin typeface="Microsoft YaHei"/>
+              </a:defRPr>
+            </a:pPr>
+            <a:r>
+              <a:t>Blend/SIG</a:t>
             </a:r>
           </a:p>
         </p:txBody>
@@ -7418,8 +7763,8 @@
         </p:nvSpPr>
         <p:spPr>
           <a:xfrm>
-            <a:off x="9570720" y="1803400"/>
-            <a:ext cx="1981200" cy="457200"/>
+            <a:off x="9596120" y="1595120"/>
+            <a:ext cx="1930400" cy="457200"/>
           </a:xfrm>
           <a:prstGeom prst="rect">
             <a:avLst/>
@@ -7433,9 +7778,9 @@
           <a:lstStyle/>
           <a:p>
             <a:pPr algn="ctr">
-              <a:defRPr sz="2800" b="1">
-                <a:solidFill>
-                  <a:srgbClr val="E85D5D"/>
+              <a:defRPr sz="2600" b="1">
+                <a:solidFill>
+                  <a:srgbClr val="D4847A"/>
                 </a:solidFill>
                 <a:latin typeface="Microsoft YaHei"/>
               </a:defRPr>
@@ -7454,8 +7799,8 @@
         </p:nvSpPr>
         <p:spPr>
           <a:xfrm>
-            <a:off x="9570720" y="2280920"/>
-            <a:ext cx="1981200" cy="203200"/>
+            <a:off x="9596120" y="2123440"/>
+            <a:ext cx="1930400" cy="203200"/>
           </a:xfrm>
           <a:prstGeom prst="rect">
             <a:avLst/>
@@ -7469,9 +7814,9 @@
           <a:lstStyle/>
           <a:p>
             <a:pPr algn="ctr">
-              <a:defRPr sz="1000" b="0">
-                <a:solidFill>
-                  <a:srgbClr val="8A8F9A"/>
+              <a:defRPr sz="900" b="0">
+                <a:solidFill>
+                  <a:srgbClr val="8C8C8C"/>
                 </a:solidFill>
                 <a:latin typeface="Microsoft YaHei"/>
               </a:defRPr>
@@ -7490,18 +7835,18 @@
         </p:nvSpPr>
         <p:spPr>
           <a:xfrm>
-            <a:off x="6858000" y="2926080"/>
+            <a:off x="6858000" y="2743200"/>
             <a:ext cx="4846320" cy="1188720"/>
           </a:xfrm>
           <a:prstGeom prst="roundRect">
             <a:avLst/>
           </a:prstGeom>
           <a:solidFill>
-            <a:srgbClr val="0F1F3D"/>
+            <a:srgbClr val="FFFFFF"/>
           </a:solidFill>
-          <a:ln w="19050">
+          <a:ln w="12700">
             <a:solidFill>
-              <a:srgbClr val="C9A96E"/>
+              <a:srgbClr val="E8E3DD"/>
             </a:solidFill>
           </a:ln>
         </p:spPr>
@@ -7535,8 +7880,8 @@
         </p:nvSpPr>
         <p:spPr>
           <a:xfrm>
-            <a:off x="7010400" y="3053080"/>
-            <a:ext cx="4541520" cy="279400"/>
+            <a:off x="7035800" y="2870200"/>
+            <a:ext cx="4490720" cy="254000"/>
           </a:xfrm>
           <a:prstGeom prst="rect">
             <a:avLst/>
@@ -7550,9 +7895,9 @@
           <a:lstStyle/>
           <a:p>
             <a:pPr algn="ctr">
-              <a:defRPr sz="1200" b="0">
-                <a:solidFill>
-                  <a:srgbClr val="8A8F9A"/>
+              <a:defRPr sz="1100" b="0">
+                <a:solidFill>
+                  <a:srgbClr val="8C8C8C"/>
                 </a:solidFill>
                 <a:latin typeface="Microsoft YaHei"/>
               </a:defRPr>
@@ -7571,8 +7916,8 @@
         </p:nvSpPr>
         <p:spPr>
           <a:xfrm>
-            <a:off x="7010400" y="3357880"/>
-            <a:ext cx="4541520" cy="457200"/>
+            <a:off x="7035800" y="3149600"/>
+            <a:ext cx="4490720" cy="457200"/>
           </a:xfrm>
           <a:prstGeom prst="rect">
             <a:avLst/>
@@ -7586,15 +7931,15 @@
           <a:lstStyle/>
           <a:p>
             <a:pPr algn="ctr">
-              <a:defRPr sz="2800" b="1">
-                <a:solidFill>
-                  <a:srgbClr val="C9A96E"/>
-                </a:solidFill>
-                <a:latin typeface="Microsoft YaHei"/>
-              </a:defRPr>
-            </a:pPr>
-            <a:r>
-              <a:t>人眼可见+防御可检测</a:t>
+              <a:defRPr sz="2600" b="1">
+                <a:solidFill>
+                  <a:srgbClr val="C2A497"/>
+                </a:solidFill>
+                <a:latin typeface="Microsoft YaHei"/>
+              </a:defRPr>
+            </a:pPr>
+            <a:r>
+              <a:t>人眼可见 + 防御可检测</a:t>
             </a:r>
           </a:p>
         </p:txBody>
@@ -7607,8 +7952,8 @@
         </p:nvSpPr>
         <p:spPr>
           <a:xfrm>
-            <a:off x="7010400" y="3835400"/>
-            <a:ext cx="4541520" cy="203200"/>
+            <a:off x="7035800" y="3677920"/>
+            <a:ext cx="4490720" cy="203200"/>
           </a:xfrm>
           <a:prstGeom prst="rect">
             <a:avLst/>
@@ -7622,15 +7967,15 @@
           <a:lstStyle/>
           <a:p>
             <a:pPr algn="ctr">
-              <a:defRPr sz="1000" b="0">
-                <a:solidFill>
-                  <a:srgbClr val="8A8F9A"/>
-                </a:solidFill>
-                <a:latin typeface="Microsoft YaHei"/>
-              </a:defRPr>
-            </a:pPr>
-            <a:r>
-              <a:t>需要更隐蔽的方式</a:t>
+              <a:defRPr sz="900" b="0">
+                <a:solidFill>
+                  <a:srgbClr val="8C8C8C"/>
+                </a:solidFill>
+                <a:latin typeface="Microsoft YaHei"/>
+              </a:defRPr>
+            </a:pPr>
+            <a:r>
+              <a:t>需要更隐蔽的触发器</a:t>
             </a:r>
           </a:p>
         </p:txBody>
@@ -7643,7 +7988,7 @@
         </p:nvSpPr>
         <p:spPr>
           <a:xfrm>
-            <a:off x="6858000" y="4572000"/>
+            <a:off x="6858000" y="4389120"/>
             <a:ext cx="4846320" cy="457200"/>
           </a:xfrm>
           <a:prstGeom prst="rect">
@@ -7658,15 +8003,15 @@
           <a:lstStyle/>
           <a:p>
             <a:pPr algn="l">
-              <a:defRPr sz="1600" b="1">
-                <a:solidFill>
-                  <a:srgbClr val="C9A96E"/>
-                </a:solidFill>
-                <a:latin typeface="Microsoft YaHei"/>
-              </a:defRPr>
-            </a:pPr>
-            <a:r>
-              <a:t>WaNet的答案: 用图像形变(Warping)替代可见触发器</a:t>
+              <a:defRPr sz="1500" b="1">
+                <a:solidFill>
+                  <a:srgbClr val="C2A497"/>
+                </a:solidFill>
+                <a:latin typeface="Microsoft YaHei"/>
+              </a:defRPr>
+            </a:pPr>
+            <a:r>
+              <a:t>WaNet的答案: 用图像形变替代可见Patch</a:t>
             </a:r>
           </a:p>
         </p:txBody>
@@ -7685,7 +8030,7 @@
     <p:bg>
       <p:bgPr>
         <a:solidFill>
-          <a:srgbClr val="0A1628"/>
+          <a:srgbClr val="FAF8F5"/>
         </a:solidFill>
         <a:effectLst/>
       </p:bgPr>
@@ -7699,20 +8044,56 @@
       <p:grpSpPr/>
       <p:sp>
         <p:nvSpPr>
-          <p:cNvPr id="2" name="Rectangle 1"/>
+          <p:cNvPr id="2" name="TextBox 1"/>
+          <p:cNvSpPr txBox="1"/>
+          <p:nvPr/>
+        </p:nvSpPr>
+        <p:spPr>
+          <a:xfrm>
+            <a:off x="731520" y="457200"/>
+            <a:ext cx="6400800" cy="457200"/>
+          </a:xfrm>
+          <a:prstGeom prst="rect">
+            <a:avLst/>
+          </a:prstGeom>
+          <a:noFill/>
+        </p:spPr>
+        <p:txBody>
+          <a:bodyPr wrap="none">
+            <a:spAutoFit/>
+          </a:bodyPr>
+          <a:lstStyle/>
+          <a:p>
+            <a:pPr algn="l">
+              <a:defRPr sz="3000" b="1">
+                <a:solidFill>
+                  <a:srgbClr val="3D3D3D"/>
+                </a:solidFill>
+                <a:latin typeface="Microsoft YaHei"/>
+              </a:defRPr>
+            </a:pPr>
+            <a:r>
+              <a:t>WaNet: 基于图像形变的后门攻击 (ICLR 2021)</a:t>
+            </a:r>
+          </a:p>
+        </p:txBody>
+      </p:sp>
+      <p:sp>
+        <p:nvSpPr>
+          <p:cNvPr id="3" name="Rectangle 2"/>
           <p:cNvSpPr/>
           <p:nvPr/>
         </p:nvSpPr>
         <p:spPr>
           <a:xfrm>
-            <a:off x="731520" y="731520"/>
-            <a:ext cx="2286000" cy="25400"/>
+            <a:off x="731520" y="1005840"/>
+            <a:ext cx="1371600" cy="12700"/>
           </a:xfrm>
           <a:prstGeom prst="rect">
             <a:avLst/>
           </a:prstGeom>
           <a:solidFill>
-            <a:srgbClr val="C9A96E"/>
+            <a:srgbClr val="C2A497"/>
           </a:solidFill>
           <a:ln>
             <a:noFill/>
@@ -7742,49 +8123,13 @@
       </p:sp>
       <p:sp>
         <p:nvSpPr>
-          <p:cNvPr id="3" name="TextBox 2"/>
-          <p:cNvSpPr txBox="1"/>
-          <p:nvPr/>
-        </p:nvSpPr>
-        <p:spPr>
-          <a:xfrm>
-            <a:off x="731520" y="914400"/>
-            <a:ext cx="6400800" cy="548640"/>
-          </a:xfrm>
-          <a:prstGeom prst="rect">
-            <a:avLst/>
-          </a:prstGeom>
-          <a:noFill/>
-        </p:spPr>
-        <p:txBody>
-          <a:bodyPr wrap="none">
-            <a:spAutoFit/>
-          </a:bodyPr>
-          <a:lstStyle/>
-          <a:p>
-            <a:pPr algn="l">
-              <a:defRPr sz="3600" b="1">
-                <a:solidFill>
-                  <a:srgbClr val="F0EEE8"/>
-                </a:solidFill>
-                <a:latin typeface="Microsoft YaHei"/>
-              </a:defRPr>
-            </a:pPr>
-            <a:r>
-              <a:t>WaNet: 基于图像形变的后门攻击 (ICLR 2021)</a:t>
-            </a:r>
-          </a:p>
-        </p:txBody>
-      </p:sp>
-      <p:sp>
-        <p:nvSpPr>
           <p:cNvPr id="4" name="TextBox 3"/>
           <p:cNvSpPr txBox="1"/>
           <p:nvPr/>
         </p:nvSpPr>
         <p:spPr>
           <a:xfrm>
-            <a:off x="731520" y="1645920"/>
+            <a:off x="731520" y="1371600"/>
             <a:ext cx="5303520" cy="2743200"/>
           </a:xfrm>
           <a:prstGeom prst="rect">
@@ -7800,11 +8145,11 @@
           <a:p>
             <a:pPr>
               <a:spcAft>
-                <a:spcPts val="640"/>
+                <a:spcPts val="560"/>
               </a:spcAft>
               <a:defRPr sz="1600" b="1">
                 <a:solidFill>
-                  <a:srgbClr val="C9A96E"/>
+                  <a:srgbClr val="C2A497"/>
                 </a:solidFill>
                 <a:latin typeface="Microsoft YaHei"/>
               </a:defRPr>
@@ -7816,11 +8161,11 @@
           <a:p>
             <a:pPr>
               <a:spcAft>
-                <a:spcPts val="640"/>
+                <a:spcPts val="560"/>
               </a:spcAft>
               <a:defRPr sz="1600" b="0">
                 <a:solidFill>
-                  <a:srgbClr val="F0EEE8"/>
+                  <a:srgbClr val="3D3D3D"/>
                 </a:solidFill>
                 <a:latin typeface="Microsoft YaHei"/>
               </a:defRPr>
@@ -7832,11 +8177,11 @@
           <a:p>
             <a:pPr>
               <a:spcAft>
-                <a:spcPts val="640"/>
+                <a:spcPts val="560"/>
               </a:spcAft>
               <a:defRPr sz="1600" b="0">
                 <a:solidFill>
-                  <a:srgbClr val="8A8F9A"/>
+                  <a:srgbClr val="8C8C8C"/>
                 </a:solidFill>
                 <a:latin typeface="Microsoft YaHei"/>
               </a:defRPr>
@@ -7845,11 +8190,11 @@
           <a:p>
             <a:pPr>
               <a:spcAft>
-                <a:spcPts val="640"/>
+                <a:spcPts val="560"/>
               </a:spcAft>
               <a:defRPr sz="1600" b="1">
                 <a:solidFill>
-                  <a:srgbClr val="C9A96E"/>
+                  <a:srgbClr val="C2A497"/>
                 </a:solidFill>
                 <a:latin typeface="Microsoft YaHei"/>
               </a:defRPr>
@@ -7861,75 +8206,75 @@
           <a:p>
             <a:pPr>
               <a:spcAft>
-                <a:spcPts val="640"/>
+                <a:spcPts val="560"/>
               </a:spcAft>
               <a:defRPr sz="1600" b="0">
                 <a:solidFill>
-                  <a:srgbClr val="8A8F9A"/>
-                </a:solidFill>
-                <a:latin typeface="Microsoft YaHei"/>
-              </a:defRPr>
-            </a:pPr>
-            <a:r>
-              <a:t>1. 生成随机控制网格 (k*k)</a:t>
+                  <a:srgbClr val="8C8C8C"/>
+                </a:solidFill>
+                <a:latin typeface="Microsoft YaHei"/>
+              </a:defRPr>
+            </a:pPr>
+            <a:r>
+              <a:t>1. 生成 k*k 随机控制网格, 定义平滑的像素位移场</a:t>
             </a:r>
           </a:p>
           <a:p>
             <a:pPr>
               <a:spcAft>
-                <a:spcPts val="640"/>
+                <a:spcPts val="560"/>
               </a:spcAft>
               <a:defRPr sz="1600" b="0">
                 <a:solidFill>
-                  <a:srgbClr val="8A8F9A"/>
-                </a:solidFill>
-                <a:latin typeface="Microsoft YaHei"/>
-              </a:defRPr>
-            </a:pPr>
-            <a:r>
-              <a:t>2. 用网格定义平滑的像素位移场</a:t>
+                  <a:srgbClr val="8C8C8C"/>
+                </a:solidFill>
+                <a:latin typeface="Microsoft YaHei"/>
+              </a:defRPr>
+            </a:pPr>
+            <a:r>
+              <a:t>2. 对图像做微小形变 (亚像素级) -&gt; 后门样本</a:t>
             </a:r>
           </a:p>
           <a:p>
             <a:pPr>
               <a:spcAft>
-                <a:spcPts val="640"/>
+                <a:spcPts val="560"/>
               </a:spcAft>
               <a:defRPr sz="1600" b="0">
                 <a:solidFill>
-                  <a:srgbClr val="8A8F9A"/>
-                </a:solidFill>
-                <a:latin typeface="Microsoft YaHei"/>
-              </a:defRPr>
-            </a:pPr>
-            <a:r>
-              <a:t>3. 对图像做微小形变 -&gt; 后门样本 (人眼完全无法察觉)</a:t>
+                  <a:srgbClr val="8C8C8C"/>
+                </a:solidFill>
+                <a:latin typeface="Microsoft YaHei"/>
+              </a:defRPr>
+            </a:pPr>
+            <a:r>
+              <a:t>3. 模型学到该形变模式与目标标签的关联</a:t>
             </a:r>
           </a:p>
           <a:p>
             <a:pPr>
               <a:spcAft>
-                <a:spcPts val="640"/>
+                <a:spcPts val="560"/>
               </a:spcAft>
               <a:defRPr sz="1600" b="0">
                 <a:solidFill>
-                  <a:srgbClr val="8A8F9A"/>
-                </a:solidFill>
-                <a:latin typeface="Microsoft YaHei"/>
-              </a:defRPr>
-            </a:pPr>
-            <a:r>
-              <a:t>4. 模型学到 '这种形变模式 = 目标标签'</a:t>
+                  <a:srgbClr val="3D3D3D"/>
+                </a:solidFill>
+                <a:latin typeface="Microsoft YaHei"/>
+              </a:defRPr>
+            </a:pPr>
+            <a:r>
+              <a:t>4. 人眼完全无法察觉形变</a:t>
             </a:r>
           </a:p>
           <a:p>
             <a:pPr>
               <a:spcAft>
-                <a:spcPts val="640"/>
+                <a:spcPts val="560"/>
               </a:spcAft>
               <a:defRPr sz="1600" b="0">
                 <a:solidFill>
-                  <a:srgbClr val="8A8F9A"/>
+                  <a:srgbClr val="8C8C8C"/>
                 </a:solidFill>
                 <a:latin typeface="Microsoft YaHei"/>
               </a:defRPr>
@@ -7938,11 +8283,11 @@
           <a:p>
             <a:pPr>
               <a:spcAft>
-                <a:spcPts val="640"/>
+                <a:spcPts val="560"/>
               </a:spcAft>
               <a:defRPr sz="1600" b="1">
                 <a:solidFill>
-                  <a:srgbClr val="C9A96E"/>
+                  <a:srgbClr val="C2A497"/>
                 </a:solidFill>
                 <a:latin typeface="Microsoft YaHei"/>
               </a:defRPr>
@@ -7954,17 +8299,17 @@
           <a:p>
             <a:pPr>
               <a:spcAft>
-                <a:spcPts val="640"/>
+                <a:spcPts val="560"/>
               </a:spcAft>
               <a:defRPr sz="1600" b="0">
                 <a:solidFill>
-                  <a:srgbClr val="F0EEE8"/>
-                </a:solidFill>
-                <a:latin typeface="Microsoft YaHei"/>
-              </a:defRPr>
-            </a:pPr>
-            <a:r>
-              <a:t>训练时加入随机形变的噪声样本, 迫使模型学习真正的warping而不是像素捷径</a:t>
+                  <a:srgbClr val="3D3D3D"/>
+                </a:solidFill>
+                <a:latin typeface="Microsoft YaHei"/>
+              </a:defRPr>
+            </a:pPr>
+            <a:r>
+              <a:t>训练时加入随机形变的噪声样本, 迫使模型学习真正的warping而非像素捷径</a:t>
             </a:r>
           </a:p>
         </p:txBody>
@@ -7977,18 +8322,18 @@
         </p:nvSpPr>
         <p:spPr>
           <a:xfrm>
-            <a:off x="6858000" y="1645920"/>
+            <a:off x="6858000" y="1371600"/>
             <a:ext cx="4572000" cy="1371600"/>
           </a:xfrm>
           <a:prstGeom prst="roundRect">
             <a:avLst/>
           </a:prstGeom>
           <a:solidFill>
-            <a:srgbClr val="0F1F3D"/>
+            <a:srgbClr val="FFFFFF"/>
           </a:solidFill>
-          <a:ln w="19050">
+          <a:ln w="12700">
             <a:solidFill>
-              <a:srgbClr val="5DC88A"/>
+              <a:srgbClr val="E8E3DD"/>
             </a:solidFill>
           </a:ln>
         </p:spPr>
@@ -8022,8 +8367,8 @@
         </p:nvSpPr>
         <p:spPr>
           <a:xfrm>
-            <a:off x="7010400" y="1772920"/>
-            <a:ext cx="4267200" cy="279400"/>
+            <a:off x="7035800" y="1498600"/>
+            <a:ext cx="4216400" cy="254000"/>
           </a:xfrm>
           <a:prstGeom prst="rect">
             <a:avLst/>
@@ -8037,15 +8382,15 @@
           <a:lstStyle/>
           <a:p>
             <a:pPr algn="ctr">
-              <a:defRPr sz="1200" b="0">
-                <a:solidFill>
-                  <a:srgbClr val="8A8F9A"/>
-                </a:solidFill>
-                <a:latin typeface="Microsoft YaHei"/>
-              </a:defRPr>
-            </a:pPr>
-            <a:r>
-              <a:t>WaNet Warp效果</a:t>
+              <a:defRPr sz="1100" b="0">
+                <a:solidFill>
+                  <a:srgbClr val="8C8C8C"/>
+                </a:solidFill>
+                <a:latin typeface="Microsoft YaHei"/>
+              </a:defRPr>
+            </a:pPr>
+            <a:r>
+              <a:t>WaNet 攻击效果</a:t>
             </a:r>
           </a:p>
         </p:txBody>
@@ -8058,8 +8403,8 @@
         </p:nvSpPr>
         <p:spPr>
           <a:xfrm>
-            <a:off x="7010400" y="2077720"/>
-            <a:ext cx="4267200" cy="457200"/>
+            <a:off x="7035800" y="1778000"/>
+            <a:ext cx="4216400" cy="457200"/>
           </a:xfrm>
           <a:prstGeom prst="rect">
             <a:avLst/>
@@ -8073,9 +8418,9 @@
           <a:lstStyle/>
           <a:p>
             <a:pPr algn="ctr">
-              <a:defRPr sz="2800" b="1">
-                <a:solidFill>
-                  <a:srgbClr val="5DC88A"/>
+              <a:defRPr sz="2600" b="1">
+                <a:solidFill>
+                  <a:srgbClr val="7AA884"/>
                 </a:solidFill>
                 <a:latin typeface="Microsoft YaHei"/>
               </a:defRPr>
@@ -8094,8 +8439,8 @@
         </p:nvSpPr>
         <p:spPr>
           <a:xfrm>
-            <a:off x="7010400" y="2738120"/>
-            <a:ext cx="4267200" cy="203200"/>
+            <a:off x="7035800" y="2489200"/>
+            <a:ext cx="4216400" cy="203200"/>
           </a:xfrm>
           <a:prstGeom prst="rect">
             <a:avLst/>
@@ -8109,9 +8454,9 @@
           <a:lstStyle/>
           <a:p>
             <a:pPr algn="ctr">
-              <a:defRPr sz="1000" b="0">
-                <a:solidFill>
-                  <a:srgbClr val="8A8F9A"/>
+              <a:defRPr sz="900" b="0">
+                <a:solidFill>
+                  <a:srgbClr val="8C8C8C"/>
                 </a:solidFill>
                 <a:latin typeface="Microsoft YaHei"/>
               </a:defRPr>
@@ -8130,18 +8475,18 @@
         </p:nvSpPr>
         <p:spPr>
           <a:xfrm>
-            <a:off x="6858000" y="3474720"/>
+            <a:off x="6858000" y="3200400"/>
             <a:ext cx="4572000" cy="1371600"/>
           </a:xfrm>
           <a:prstGeom prst="roundRect">
             <a:avLst/>
           </a:prstGeom>
           <a:solidFill>
-            <a:srgbClr val="0F1F3D"/>
+            <a:srgbClr val="FFFFFF"/>
           </a:solidFill>
-          <a:ln w="19050">
+          <a:ln w="12700">
             <a:solidFill>
-              <a:srgbClr val="E85D5D"/>
+              <a:srgbClr val="E8E3DD"/>
             </a:solidFill>
           </a:ln>
         </p:spPr>
@@ -8175,8 +8520,8 @@
         </p:nvSpPr>
         <p:spPr>
           <a:xfrm>
-            <a:off x="7010400" y="3601720"/>
-            <a:ext cx="4267200" cy="279400"/>
+            <a:off x="7035800" y="3327400"/>
+            <a:ext cx="4216400" cy="254000"/>
           </a:xfrm>
           <a:prstGeom prst="rect">
             <a:avLst/>
@@ -8190,9 +8535,9 @@
           <a:lstStyle/>
           <a:p>
             <a:pPr algn="ctr">
-              <a:defRPr sz="1200" b="0">
-                <a:solidFill>
-                  <a:srgbClr val="8A8F9A"/>
+              <a:defRPr sz="1100" b="0">
+                <a:solidFill>
+                  <a:srgbClr val="8C8C8C"/>
                 </a:solidFill>
                 <a:latin typeface="Microsoft YaHei"/>
               </a:defRPr>
@@ -8211,8 +8556,8 @@
         </p:nvSpPr>
         <p:spPr>
           <a:xfrm>
-            <a:off x="7010400" y="3906520"/>
-            <a:ext cx="4267200" cy="457200"/>
+            <a:off x="7035800" y="3606800"/>
+            <a:ext cx="4216400" cy="457200"/>
           </a:xfrm>
           <a:prstGeom prst="rect">
             <a:avLst/>
@@ -8226,15 +8571,15 @@
           <a:lstStyle/>
           <a:p>
             <a:pPr algn="ctr">
-              <a:defRPr sz="2800" b="1">
-                <a:solidFill>
-                  <a:srgbClr val="E85D5D"/>
-                </a:solidFill>
-                <a:latin typeface="Microsoft YaHei"/>
-              </a:defRPr>
-            </a:pPr>
-            <a:r>
-              <a:t>STRIP/NC/FP全部失效</a:t>
+              <a:defRPr sz="2600" b="1">
+                <a:solidFill>
+                  <a:srgbClr val="D4847A"/>
+                </a:solidFill>
+                <a:latin typeface="Microsoft YaHei"/>
+              </a:defRPr>
+            </a:pPr>
+            <a:r>
+              <a:t>STRIP / NC / FP 全部失效</a:t>
             </a:r>
           </a:p>
         </p:txBody>
@@ -8247,8 +8592,8 @@
         </p:nvSpPr>
         <p:spPr>
           <a:xfrm>
-            <a:off x="7010400" y="4566920"/>
-            <a:ext cx="4267200" cy="203200"/>
+            <a:off x="7035800" y="4318000"/>
+            <a:ext cx="4216400" cy="203200"/>
           </a:xfrm>
           <a:prstGeom prst="rect">
             <a:avLst/>
@@ -8262,9 +8607,9 @@
           <a:lstStyle/>
           <a:p>
             <a:pPr algn="ctr">
-              <a:defRPr sz="1000" b="0">
-                <a:solidFill>
-                  <a:srgbClr val="8A8F9A"/>
+              <a:defRPr sz="900" b="0">
+                <a:solidFill>
+                  <a:srgbClr val="8C8C8C"/>
                 </a:solidFill>
                 <a:latin typeface="Microsoft YaHei"/>
               </a:defRPr>
@@ -8289,7 +8634,7 @@
     <p:bg>
       <p:bgPr>
         <a:solidFill>
-          <a:srgbClr val="0A1628"/>
+          <a:srgbClr val="FAF8F5"/>
         </a:solidFill>
         <a:effectLst/>
       </p:bgPr>
@@ -8303,20 +8648,56 @@
       <p:grpSpPr/>
       <p:sp>
         <p:nvSpPr>
-          <p:cNvPr id="2" name="Rectangle 1"/>
+          <p:cNvPr id="2" name="TextBox 1"/>
+          <p:cNvSpPr txBox="1"/>
+          <p:nvPr/>
+        </p:nvSpPr>
+        <p:spPr>
+          <a:xfrm>
+            <a:off x="731520" y="457200"/>
+            <a:ext cx="4572000" cy="457200"/>
+          </a:xfrm>
+          <a:prstGeom prst="rect">
+            <a:avLst/>
+          </a:prstGeom>
+          <a:noFill/>
+        </p:spPr>
+        <p:txBody>
+          <a:bodyPr wrap="none">
+            <a:spAutoFit/>
+          </a:bodyPr>
+          <a:lstStyle/>
+          <a:p>
+            <a:pPr algn="l">
+              <a:defRPr sz="3000" b="1">
+                <a:solidFill>
+                  <a:srgbClr val="3D3D3D"/>
+                </a:solidFill>
+                <a:latin typeface="Microsoft YaHei"/>
+              </a:defRPr>
+            </a:pPr>
+            <a:r>
+              <a:t>我们的工作</a:t>
+            </a:r>
+          </a:p>
+        </p:txBody>
+      </p:sp>
+      <p:sp>
+        <p:nvSpPr>
+          <p:cNvPr id="3" name="Rectangle 2"/>
           <p:cNvSpPr/>
           <p:nvPr/>
         </p:nvSpPr>
         <p:spPr>
           <a:xfrm>
-            <a:off x="731520" y="731520"/>
-            <a:ext cx="2286000" cy="25400"/>
+            <a:off x="731520" y="1005840"/>
+            <a:ext cx="1371600" cy="12700"/>
           </a:xfrm>
           <a:prstGeom prst="rect">
             <a:avLst/>
           </a:prstGeom>
           <a:solidFill>
-            <a:srgbClr val="C9A96E"/>
+            <a:srgbClr val="C2A497"/>
           </a:solidFill>
           <a:ln>
             <a:noFill/>
@@ -8346,60 +8727,24 @@
       </p:sp>
       <p:sp>
         <p:nvSpPr>
-          <p:cNvPr id="3" name="TextBox 2"/>
-          <p:cNvSpPr txBox="1"/>
-          <p:nvPr/>
-        </p:nvSpPr>
-        <p:spPr>
-          <a:xfrm>
-            <a:off x="731520" y="914400"/>
-            <a:ext cx="6400800" cy="548640"/>
-          </a:xfrm>
-          <a:prstGeom prst="rect">
-            <a:avLst/>
-          </a:prstGeom>
-          <a:noFill/>
-        </p:spPr>
-        <p:txBody>
-          <a:bodyPr wrap="none">
-            <a:spAutoFit/>
-          </a:bodyPr>
-          <a:lstStyle/>
-          <a:p>
-            <a:pPr algn="l">
-              <a:defRPr sz="3600" b="1">
-                <a:solidFill>
-                  <a:srgbClr val="F0EEE8"/>
-                </a:solidFill>
-                <a:latin typeface="Microsoft YaHei"/>
-              </a:defRPr>
-            </a:pPr>
-            <a:r>
-              <a:t>我们的工作</a:t>
-            </a:r>
-          </a:p>
-        </p:txBody>
-      </p:sp>
-      <p:sp>
-        <p:nvSpPr>
           <p:cNvPr id="4" name="Rounded Rectangle 3"/>
           <p:cNvSpPr/>
           <p:nvPr/>
         </p:nvSpPr>
         <p:spPr>
           <a:xfrm>
-            <a:off x="731520" y="1828800"/>
+            <a:off x="731520" y="1645920"/>
             <a:ext cx="3200400" cy="2286000"/>
           </a:xfrm>
           <a:prstGeom prst="roundRect">
             <a:avLst/>
           </a:prstGeom>
           <a:solidFill>
-            <a:srgbClr val="0F1F3D"/>
+            <a:srgbClr val="FFFFFF"/>
           </a:solidFill>
-          <a:ln w="19050">
+          <a:ln w="12700">
             <a:solidFill>
-              <a:srgbClr val="8A8F9A"/>
+              <a:srgbClr val="E8E3DD"/>
             </a:solidFill>
           </a:ln>
         </p:spPr>
@@ -8433,8 +8778,116 @@
         </p:nvSpPr>
         <p:spPr>
           <a:xfrm>
-            <a:off x="883920" y="1955800"/>
-            <a:ext cx="2895600" cy="279400"/>
+            <a:off x="909320" y="1772920"/>
+            <a:ext cx="2844800" cy="254000"/>
+          </a:xfrm>
+          <a:prstGeom prst="rect">
+            <a:avLst/>
+          </a:prstGeom>
+          <a:noFill/>
+        </p:spPr>
+        <p:txBody>
+          <a:bodyPr wrap="none">
+            <a:spAutoFit/>
+          </a:bodyPr>
+          <a:lstStyle/>
+          <a:p>
+            <a:pPr algn="ctr">
+              <a:defRPr sz="1100" b="0">
+                <a:solidFill>
+                  <a:srgbClr val="8C8C8C"/>
+                </a:solidFill>
+                <a:latin typeface="Microsoft YaHei"/>
+              </a:defRPr>
+            </a:pPr>
+            <a:r>
+              <a:t>阶段一: 复现 (周争妍)</a:t>
+            </a:r>
+          </a:p>
+        </p:txBody>
+      </p:sp>
+      <p:sp>
+        <p:nvSpPr>
+          <p:cNvPr id="6" name="TextBox 5"/>
+          <p:cNvSpPr txBox="1"/>
+          <p:nvPr/>
+        </p:nvSpPr>
+        <p:spPr>
+          <a:xfrm>
+            <a:off x="909320" y="2052320"/>
+            <a:ext cx="2844800" cy="457200"/>
+          </a:xfrm>
+          <a:prstGeom prst="rect">
+            <a:avLst/>
+          </a:prstGeom>
+          <a:noFill/>
+        </p:spPr>
+        <p:txBody>
+          <a:bodyPr wrap="none">
+            <a:spAutoFit/>
+          </a:bodyPr>
+          <a:lstStyle/>
+          <a:p>
+            <a:pPr algn="ctr">
+              <a:defRPr sz="2600" b="1">
+                <a:solidFill>
+                  <a:srgbClr val="8C8C8C"/>
+                </a:solidFill>
+                <a:latin typeface="Microsoft YaHei"/>
+              </a:defRPr>
+            </a:pPr>
+            <a:r>
+              <a:t>3数据集x2模式</a:t>
+            </a:r>
+          </a:p>
+        </p:txBody>
+      </p:sp>
+      <p:sp>
+        <p:nvSpPr>
+          <p:cNvPr id="7" name="TextBox 6"/>
+          <p:cNvSpPr txBox="1"/>
+          <p:nvPr/>
+        </p:nvSpPr>
+        <p:spPr>
+          <a:xfrm>
+            <a:off x="909320" y="3677920"/>
+            <a:ext cx="2844800" cy="203200"/>
+          </a:xfrm>
+          <a:prstGeom prst="rect">
+            <a:avLst/>
+          </a:prstGeom>
+          <a:noFill/>
+        </p:spPr>
+        <p:txBody>
+          <a:bodyPr wrap="none">
+            <a:spAutoFit/>
+          </a:bodyPr>
+          <a:lstStyle/>
+          <a:p>
+            <a:pPr algn="ctr">
+              <a:defRPr sz="900" b="0">
+                <a:solidFill>
+                  <a:srgbClr val="8C8C8C"/>
+                </a:solidFill>
+                <a:latin typeface="Microsoft YaHei"/>
+              </a:defRPr>
+            </a:pPr>
+            <a:r>
+              <a:t>STRIP/NC/FP防御验证</a:t>
+            </a:r>
+          </a:p>
+        </p:txBody>
+      </p:sp>
+      <p:sp>
+        <p:nvSpPr>
+          <p:cNvPr id="8" name="TextBox 7"/>
+          <p:cNvSpPr txBox="1"/>
+          <p:nvPr/>
+        </p:nvSpPr>
+        <p:spPr>
+          <a:xfrm>
+            <a:off x="914400" y="2834640"/>
+            <a:ext cx="2834640" cy="731520"/>
           </a:xfrm>
           <a:prstGeom prst="rect">
             <a:avLst/>
@@ -8450,125 +8903,17 @@
             <a:pPr algn="ctr">
               <a:defRPr sz="1200" b="0">
                 <a:solidFill>
-                  <a:srgbClr val="8A8F9A"/>
-                </a:solidFill>
-                <a:latin typeface="Microsoft YaHei"/>
-              </a:defRPr>
-            </a:pPr>
-            <a:r>
-              <a:t>阶段一: 复现</a:t>
-            </a:r>
-          </a:p>
-        </p:txBody>
-      </p:sp>
-      <p:sp>
-        <p:nvSpPr>
-          <p:cNvPr id="6" name="TextBox 5"/>
-          <p:cNvSpPr txBox="1"/>
-          <p:nvPr/>
-        </p:nvSpPr>
-        <p:spPr>
-          <a:xfrm>
-            <a:off x="883920" y="2260600"/>
-            <a:ext cx="2895600" cy="457200"/>
-          </a:xfrm>
-          <a:prstGeom prst="rect">
-            <a:avLst/>
-          </a:prstGeom>
-          <a:noFill/>
-        </p:spPr>
-        <p:txBody>
-          <a:bodyPr wrap="none">
-            <a:spAutoFit/>
-          </a:bodyPr>
-          <a:lstStyle/>
-          <a:p>
-            <a:pPr algn="ctr">
-              <a:defRPr sz="2800" b="1">
-                <a:solidFill>
-                  <a:srgbClr val="8A8F9A"/>
-                </a:solidFill>
-                <a:latin typeface="Microsoft YaHei"/>
-              </a:defRPr>
-            </a:pPr>
-            <a:r>
-              <a:t>周争妍</a:t>
-            </a:r>
-          </a:p>
-        </p:txBody>
-      </p:sp>
-      <p:sp>
-        <p:nvSpPr>
-          <p:cNvPr id="7" name="TextBox 6"/>
-          <p:cNvSpPr txBox="1"/>
-          <p:nvPr/>
-        </p:nvSpPr>
-        <p:spPr>
-          <a:xfrm>
-            <a:off x="883920" y="3835400"/>
-            <a:ext cx="2895600" cy="203200"/>
-          </a:xfrm>
-          <a:prstGeom prst="rect">
-            <a:avLst/>
-          </a:prstGeom>
-          <a:noFill/>
-        </p:spPr>
-        <p:txBody>
-          <a:bodyPr wrap="none">
-            <a:spAutoFit/>
-          </a:bodyPr>
-          <a:lstStyle/>
-          <a:p>
-            <a:pPr algn="ctr">
-              <a:defRPr sz="1000" b="0">
-                <a:solidFill>
-                  <a:srgbClr val="8A8F9A"/>
-                </a:solidFill>
-                <a:latin typeface="Microsoft YaHei"/>
-              </a:defRPr>
-            </a:pPr>
-            <a:r>
-              <a:t>主实验+防御 STRIP/NC/FP</a:t>
-            </a:r>
-          </a:p>
-        </p:txBody>
-      </p:sp>
-      <p:sp>
-        <p:nvSpPr>
-          <p:cNvPr id="8" name="TextBox 7"/>
-          <p:cNvSpPr txBox="1"/>
-          <p:nvPr/>
-        </p:nvSpPr>
-        <p:spPr>
-          <a:xfrm>
-            <a:off x="914400" y="3017520"/>
-            <a:ext cx="2834640" cy="731520"/>
-          </a:xfrm>
-          <a:prstGeom prst="rect">
-            <a:avLst/>
-          </a:prstGeom>
-          <a:noFill/>
-        </p:spPr>
-        <p:txBody>
-          <a:bodyPr wrap="none">
-            <a:spAutoFit/>
-          </a:bodyPr>
-          <a:lstStyle/>
-          <a:p>
-            <a:pPr algn="ctr">
-              <a:defRPr sz="1200" b="0">
-                <a:solidFill>
-                  <a:srgbClr val="8A8F9A"/>
-                </a:solidFill>
-                <a:latin typeface="Microsoft YaHei"/>
-              </a:defRPr>
-            </a:pPr>
-            <a:r>
-              <a:t>3数据集 x 2攻击模式</a:t>
+                  <a:srgbClr val="8C8C8C"/>
+                </a:solidFill>
+                <a:latin typeface="Microsoft YaHei"/>
+              </a:defRPr>
+            </a:pPr>
+            <a:r>
+              <a:t>主实验复现, 确认WaNet</a:t>
             </a:r>
             <a:br/>
             <a:r>
-              <a:t>确认WaNet能绕过所有三种防御</a:t>
+              <a:t>确实绕过所有现有防御</a:t>
             </a:r>
           </a:p>
         </p:txBody>
@@ -8581,18 +8926,18 @@
         </p:nvSpPr>
         <p:spPr>
           <a:xfrm>
-            <a:off x="4480560" y="1828800"/>
+            <a:off x="4480560" y="1645920"/>
             <a:ext cx="3200400" cy="2286000"/>
           </a:xfrm>
           <a:prstGeom prst="roundRect">
             <a:avLst/>
           </a:prstGeom>
           <a:solidFill>
-            <a:srgbClr val="0F1F3D"/>
+            <a:srgbClr val="FFFFFF"/>
           </a:solidFill>
-          <a:ln w="19050">
+          <a:ln w="12700">
             <a:solidFill>
-              <a:srgbClr val="8A8F9A"/>
+              <a:srgbClr val="E8E3DD"/>
             </a:solidFill>
           </a:ln>
         </p:spPr>
@@ -8626,8 +8971,116 @@
         </p:nvSpPr>
         <p:spPr>
           <a:xfrm>
-            <a:off x="4632960" y="1955800"/>
-            <a:ext cx="2895600" cy="279400"/>
+            <a:off x="4658360" y="1772920"/>
+            <a:ext cx="2844800" cy="254000"/>
+          </a:xfrm>
+          <a:prstGeom prst="rect">
+            <a:avLst/>
+          </a:prstGeom>
+          <a:noFill/>
+        </p:spPr>
+        <p:txBody>
+          <a:bodyPr wrap="none">
+            <a:spAutoFit/>
+          </a:bodyPr>
+          <a:lstStyle/>
+          <a:p>
+            <a:pPr algn="ctr">
+              <a:defRPr sz="1100" b="0">
+                <a:solidFill>
+                  <a:srgbClr val="8C8C8C"/>
+                </a:solidFill>
+                <a:latin typeface="Microsoft YaHei"/>
+              </a:defRPr>
+            </a:pPr>
+            <a:r>
+              <a:t>阶段二: 消融 (蒋竺君)</a:t>
+            </a:r>
+          </a:p>
+        </p:txBody>
+      </p:sp>
+      <p:sp>
+        <p:nvSpPr>
+          <p:cNvPr id="11" name="TextBox 10"/>
+          <p:cNvSpPr txBox="1"/>
+          <p:nvPr/>
+        </p:nvSpPr>
+        <p:spPr>
+          <a:xfrm>
+            <a:off x="4658360" y="2052320"/>
+            <a:ext cx="2844800" cy="457200"/>
+          </a:xfrm>
+          <a:prstGeom prst="rect">
+            <a:avLst/>
+          </a:prstGeom>
+          <a:noFill/>
+        </p:spPr>
+        <p:txBody>
+          <a:bodyPr wrap="none">
+            <a:spAutoFit/>
+          </a:bodyPr>
+          <a:lstStyle/>
+          <a:p>
+            <a:pPr algn="ctr">
+              <a:defRPr sz="2600" b="1">
+                <a:solidFill>
+                  <a:srgbClr val="9B9EC0"/>
+                </a:solidFill>
+                <a:latin typeface="Microsoft YaHei"/>
+              </a:defRPr>
+            </a:pPr>
+            <a:r>
+              <a:t>Noise/s/k参数扫描</a:t>
+            </a:r>
+          </a:p>
+        </p:txBody>
+      </p:sp>
+      <p:sp>
+        <p:nvSpPr>
+          <p:cNvPr id="12" name="TextBox 11"/>
+          <p:cNvSpPr txBox="1"/>
+          <p:nvPr/>
+        </p:nvSpPr>
+        <p:spPr>
+          <a:xfrm>
+            <a:off x="4658360" y="3677920"/>
+            <a:ext cx="2844800" cy="203200"/>
+          </a:xfrm>
+          <a:prstGeom prst="rect">
+            <a:avLst/>
+          </a:prstGeom>
+          <a:noFill/>
+        </p:spPr>
+        <p:txBody>
+          <a:bodyPr wrap="none">
+            <a:spAutoFit/>
+          </a:bodyPr>
+          <a:lstStyle/>
+          <a:p>
+            <a:pPr algn="ctr">
+              <a:defRPr sz="900" b="0">
+                <a:solidFill>
+                  <a:srgbClr val="8C8C8C"/>
+                </a:solidFill>
+                <a:latin typeface="Microsoft YaHei"/>
+              </a:defRPr>
+            </a:pPr>
+            <a:r>
+              <a:t>发现参数高度敏感规律</a:t>
+            </a:r>
+          </a:p>
+        </p:txBody>
+      </p:sp>
+      <p:sp>
+        <p:nvSpPr>
+          <p:cNvPr id="13" name="TextBox 12"/>
+          <p:cNvSpPr txBox="1"/>
+          <p:nvPr/>
+        </p:nvSpPr>
+        <p:spPr>
+          <a:xfrm>
+            <a:off x="4663440" y="2834640"/>
+            <a:ext cx="2834640" cy="731520"/>
           </a:xfrm>
           <a:prstGeom prst="rect">
             <a:avLst/>
@@ -8643,125 +9096,17 @@
             <a:pPr algn="ctr">
               <a:defRPr sz="1200" b="0">
                 <a:solidFill>
-                  <a:srgbClr val="8A8F9A"/>
-                </a:solidFill>
-                <a:latin typeface="Microsoft YaHei"/>
-              </a:defRPr>
-            </a:pPr>
-            <a:r>
-              <a:t>阶段二: 消融</a:t>
-            </a:r>
-          </a:p>
-        </p:txBody>
-      </p:sp>
-      <p:sp>
-        <p:nvSpPr>
-          <p:cNvPr id="11" name="TextBox 10"/>
-          <p:cNvSpPr txBox="1"/>
-          <p:nvPr/>
-        </p:nvSpPr>
-        <p:spPr>
-          <a:xfrm>
-            <a:off x="4632960" y="2260600"/>
-            <a:ext cx="2895600" cy="457200"/>
-          </a:xfrm>
-          <a:prstGeom prst="rect">
-            <a:avLst/>
-          </a:prstGeom>
-          <a:noFill/>
-        </p:spPr>
-        <p:txBody>
-          <a:bodyPr wrap="none">
-            <a:spAutoFit/>
-          </a:bodyPr>
-          <a:lstStyle/>
-          <a:p>
-            <a:pPr algn="ctr">
-              <a:defRPr sz="2800" b="1">
-                <a:solidFill>
-                  <a:srgbClr val="8A8F9A"/>
-                </a:solidFill>
-                <a:latin typeface="Microsoft YaHei"/>
-              </a:defRPr>
-            </a:pPr>
-            <a:r>
-              <a:t>成员2</a:t>
-            </a:r>
-          </a:p>
-        </p:txBody>
-      </p:sp>
-      <p:sp>
-        <p:nvSpPr>
-          <p:cNvPr id="12" name="TextBox 11"/>
-          <p:cNvSpPr txBox="1"/>
-          <p:nvPr/>
-        </p:nvSpPr>
-        <p:spPr>
-          <a:xfrm>
-            <a:off x="4632960" y="3835400"/>
-            <a:ext cx="2895600" cy="203200"/>
-          </a:xfrm>
-          <a:prstGeom prst="rect">
-            <a:avLst/>
-          </a:prstGeom>
-          <a:noFill/>
-        </p:spPr>
-        <p:txBody>
-          <a:bodyPr wrap="none">
-            <a:spAutoFit/>
-          </a:bodyPr>
-          <a:lstStyle/>
-          <a:p>
-            <a:pPr algn="ctr">
-              <a:defRPr sz="1000" b="0">
-                <a:solidFill>
-                  <a:srgbClr val="8A8F9A"/>
-                </a:solidFill>
-                <a:latin typeface="Microsoft YaHei"/>
-              </a:defRPr>
-            </a:pPr>
-            <a:r>
-              <a:t>深入拆解Warping机制</a:t>
-            </a:r>
-          </a:p>
-        </p:txBody>
-      </p:sp>
-      <p:sp>
-        <p:nvSpPr>
-          <p:cNvPr id="13" name="TextBox 12"/>
-          <p:cNvSpPr txBox="1"/>
-          <p:nvPr/>
-        </p:nvSpPr>
-        <p:spPr>
-          <a:xfrm>
-            <a:off x="4663440" y="3017520"/>
-            <a:ext cx="2834640" cy="731520"/>
-          </a:xfrm>
-          <a:prstGeom prst="rect">
-            <a:avLst/>
-          </a:prstGeom>
-          <a:noFill/>
-        </p:spPr>
-        <p:txBody>
-          <a:bodyPr wrap="none">
-            <a:spAutoFit/>
-          </a:bodyPr>
-          <a:lstStyle/>
-          <a:p>
-            <a:pPr algn="ctr">
-              <a:defRPr sz="1200" b="0">
-                <a:solidFill>
-                  <a:srgbClr val="8A8F9A"/>
-                </a:solidFill>
-                <a:latin typeface="Microsoft YaHei"/>
-              </a:defRPr>
-            </a:pPr>
-            <a:r>
-              <a:t>Noise Mode/s/k参数扫描</a:t>
+                  <a:srgbClr val="8C8C8C"/>
+                </a:solidFill>
+                <a:latin typeface="Microsoft YaHei"/>
+              </a:defRPr>
+            </a:pPr>
+            <a:r>
+              <a:t>深入拆解warping机制</a:t>
             </a:r>
             <a:br/>
             <a:r>
-              <a:t>发现参数高度敏感的规律</a:t>
+              <a:t>s&lt;0.5或k&lt;4时攻击大幅下降</a:t>
             </a:r>
           </a:p>
         </p:txBody>
@@ -8774,18 +9119,18 @@
         </p:nvSpPr>
         <p:spPr>
           <a:xfrm>
-            <a:off x="8229600" y="1828800"/>
+            <a:off x="8229600" y="1645920"/>
             <a:ext cx="3200400" cy="2286000"/>
           </a:xfrm>
           <a:prstGeom prst="roundRect">
             <a:avLst/>
           </a:prstGeom>
           <a:solidFill>
-            <a:srgbClr val="0F1F3D"/>
+            <a:srgbClr val="FFFFFF"/>
           </a:solidFill>
-          <a:ln w="19050">
+          <a:ln w="12700">
             <a:solidFill>
-              <a:srgbClr val="C9A96E"/>
+              <a:srgbClr val="E8E3DD"/>
             </a:solidFill>
           </a:ln>
         </p:spPr>
@@ -8819,8 +9164,116 @@
         </p:nvSpPr>
         <p:spPr>
           <a:xfrm>
-            <a:off x="8382000" y="1955800"/>
-            <a:ext cx="2895600" cy="279400"/>
+            <a:off x="8407400" y="1772920"/>
+            <a:ext cx="2844800" cy="254000"/>
+          </a:xfrm>
+          <a:prstGeom prst="rect">
+            <a:avLst/>
+          </a:prstGeom>
+          <a:noFill/>
+        </p:spPr>
+        <p:txBody>
+          <a:bodyPr wrap="none">
+            <a:spAutoFit/>
+          </a:bodyPr>
+          <a:lstStyle/>
+          <a:p>
+            <a:pPr algn="ctr">
+              <a:defRPr sz="1100" b="0">
+                <a:solidFill>
+                  <a:srgbClr val="8C8C8C"/>
+                </a:solidFill>
+                <a:latin typeface="Microsoft YaHei"/>
+              </a:defRPr>
+            </a:pPr>
+            <a:r>
+              <a:t>阶段三: 创新 (蒋竺君)</a:t>
+            </a:r>
+          </a:p>
+        </p:txBody>
+      </p:sp>
+      <p:sp>
+        <p:nvSpPr>
+          <p:cNvPr id="16" name="TextBox 15"/>
+          <p:cNvSpPr txBox="1"/>
+          <p:nvPr/>
+        </p:nvSpPr>
+        <p:spPr>
+          <a:xfrm>
+            <a:off x="8407400" y="2052320"/>
+            <a:ext cx="2844800" cy="457200"/>
+          </a:xfrm>
+          <a:prstGeom prst="rect">
+            <a:avLst/>
+          </a:prstGeom>
+          <a:noFill/>
+        </p:spPr>
+        <p:txBody>
+          <a:bodyPr wrap="none">
+            <a:spAutoFit/>
+          </a:bodyPr>
+          <a:lstStyle/>
+          <a:p>
+            <a:pPr algn="ctr">
+              <a:defRPr sz="2600" b="1">
+                <a:solidFill>
+                  <a:srgbClr val="C2A497"/>
+                </a:solidFill>
+                <a:latin typeface="Microsoft YaHei"/>
+              </a:defRPr>
+            </a:pPr>
+            <a:r>
+              <a:t>频域检测器</a:t>
+            </a:r>
+          </a:p>
+        </p:txBody>
+      </p:sp>
+      <p:sp>
+        <p:nvSpPr>
+          <p:cNvPr id="17" name="TextBox 16"/>
+          <p:cNvSpPr txBox="1"/>
+          <p:nvPr/>
+        </p:nvSpPr>
+        <p:spPr>
+          <a:xfrm>
+            <a:off x="8407400" y="3677920"/>
+            <a:ext cx="2844800" cy="203200"/>
+          </a:xfrm>
+          <a:prstGeom prst="rect">
+            <a:avLst/>
+          </a:prstGeom>
+          <a:noFill/>
+        </p:spPr>
+        <p:txBody>
+          <a:bodyPr wrap="none">
+            <a:spAutoFit/>
+          </a:bodyPr>
+          <a:lstStyle/>
+          <a:p>
+            <a:pPr algn="ctr">
+              <a:defRPr sz="900" b="0">
+                <a:solidFill>
+                  <a:srgbClr val="8C8C8C"/>
+                </a:solidFill>
+                <a:latin typeface="Microsoft YaHei"/>
+              </a:defRPr>
+            </a:pPr>
+            <a:r>
+              <a:t>AUC 0.735 vs STRIP 0.50</a:t>
+            </a:r>
+          </a:p>
+        </p:txBody>
+      </p:sp>
+      <p:sp>
+        <p:nvSpPr>
+          <p:cNvPr id="18" name="TextBox 17"/>
+          <p:cNvSpPr txBox="1"/>
+          <p:nvPr/>
+        </p:nvSpPr>
+        <p:spPr>
+          <a:xfrm>
+            <a:off x="8412480" y="2834640"/>
+            <a:ext cx="2834640" cy="731520"/>
           </a:xfrm>
           <a:prstGeom prst="rect">
             <a:avLst/>
@@ -8836,115 +9289,7 @@
             <a:pPr algn="ctr">
               <a:defRPr sz="1200" b="0">
                 <a:solidFill>
-                  <a:srgbClr val="8A8F9A"/>
-                </a:solidFill>
-                <a:latin typeface="Microsoft YaHei"/>
-              </a:defRPr>
-            </a:pPr>
-            <a:r>
-              <a:t>阶段三: 创新</a:t>
-            </a:r>
-          </a:p>
-        </p:txBody>
-      </p:sp>
-      <p:sp>
-        <p:nvSpPr>
-          <p:cNvPr id="16" name="TextBox 15"/>
-          <p:cNvSpPr txBox="1"/>
-          <p:nvPr/>
-        </p:nvSpPr>
-        <p:spPr>
-          <a:xfrm>
-            <a:off x="8382000" y="2260600"/>
-            <a:ext cx="2895600" cy="457200"/>
-          </a:xfrm>
-          <a:prstGeom prst="rect">
-            <a:avLst/>
-          </a:prstGeom>
-          <a:noFill/>
-        </p:spPr>
-        <p:txBody>
-          <a:bodyPr wrap="none">
-            <a:spAutoFit/>
-          </a:bodyPr>
-          <a:lstStyle/>
-          <a:p>
-            <a:pPr algn="ctr">
-              <a:defRPr sz="2800" b="1">
-                <a:solidFill>
-                  <a:srgbClr val="C9A96E"/>
-                </a:solidFill>
-                <a:latin typeface="Microsoft YaHei"/>
-              </a:defRPr>
-            </a:pPr>
-            <a:r>
-              <a:t>成员2</a:t>
-            </a:r>
-          </a:p>
-        </p:txBody>
-      </p:sp>
-      <p:sp>
-        <p:nvSpPr>
-          <p:cNvPr id="17" name="TextBox 16"/>
-          <p:cNvSpPr txBox="1"/>
-          <p:nvPr/>
-        </p:nvSpPr>
-        <p:spPr>
-          <a:xfrm>
-            <a:off x="8382000" y="3835400"/>
-            <a:ext cx="2895600" cy="203200"/>
-          </a:xfrm>
-          <a:prstGeom prst="rect">
-            <a:avLst/>
-          </a:prstGeom>
-          <a:noFill/>
-        </p:spPr>
-        <p:txBody>
-          <a:bodyPr wrap="none">
-            <a:spAutoFit/>
-          </a:bodyPr>
-          <a:lstStyle/>
-          <a:p>
-            <a:pPr algn="ctr">
-              <a:defRPr sz="1000" b="0">
-                <a:solidFill>
-                  <a:srgbClr val="8A8F9A"/>
-                </a:solidFill>
-                <a:latin typeface="Microsoft YaHei"/>
-              </a:defRPr>
-            </a:pPr>
-            <a:r>
-              <a:t>频域检测器</a:t>
-            </a:r>
-          </a:p>
-        </p:txBody>
-      </p:sp>
-      <p:sp>
-        <p:nvSpPr>
-          <p:cNvPr id="18" name="TextBox 17"/>
-          <p:cNvSpPr txBox="1"/>
-          <p:nvPr/>
-        </p:nvSpPr>
-        <p:spPr>
-          <a:xfrm>
-            <a:off x="8412480" y="3017520"/>
-            <a:ext cx="2834640" cy="731520"/>
-          </a:xfrm>
-          <a:prstGeom prst="rect">
-            <a:avLst/>
-          </a:prstGeom>
-          <a:noFill/>
-        </p:spPr>
-        <p:txBody>
-          <a:bodyPr wrap="none">
-            <a:spAutoFit/>
-          </a:bodyPr>
-          <a:lstStyle/>
-          <a:p>
-            <a:pPr algn="ctr">
-              <a:defRPr sz="1200" b="0">
-                <a:solidFill>
-                  <a:srgbClr val="E8D5A3"/>
+                  <a:srgbClr val="8C8C8C"/>
                 </a:solidFill>
                 <a:latin typeface="Microsoft YaHei"/>
               </a:defRPr>
@@ -8954,64 +9299,21 @@
             </a:r>
             <a:br/>
             <a:r>
-              <a:t>设计频域后门检测器</a:t>
-            </a:r>
-          </a:p>
-        </p:txBody>
-      </p:sp>
-      <p:sp>
-        <p:nvSpPr>
-          <p:cNvPr id="19" name="Rectangle 18"/>
-          <p:cNvSpPr/>
-          <p:nvPr/>
-        </p:nvSpPr>
-        <p:spPr>
-          <a:xfrm>
-            <a:off x="731520" y="4754880"/>
-            <a:ext cx="10698480" cy="25400"/>
-          </a:xfrm>
-          <a:prstGeom prst="rect">
-            <a:avLst/>
-          </a:prstGeom>
-          <a:solidFill>
-            <a:srgbClr val="C9A96E"/>
-          </a:solidFill>
-          <a:ln>
-            <a:noFill/>
-          </a:ln>
-        </p:spPr>
-        <p:style>
-          <a:lnRef idx="1">
-            <a:schemeClr val="accent1"/>
-          </a:lnRef>
-          <a:fillRef idx="3">
-            <a:schemeClr val="accent1"/>
-          </a:fillRef>
-          <a:effectRef idx="2">
-            <a:schemeClr val="accent1"/>
-          </a:effectRef>
-          <a:fontRef idx="minor">
-            <a:schemeClr val="lt1"/>
-          </a:fontRef>
-        </p:style>
-        <p:txBody>
-          <a:bodyPr rtlCol="0" anchor="ctr"/>
-          <a:lstStyle/>
-          <a:p>
-            <a:pPr algn="ctr"/>
-          </a:p>
-        </p:txBody>
-      </p:sp>
-      <p:sp>
-        <p:nvSpPr>
-          <p:cNvPr id="20" name="TextBox 19"/>
+              <a:t>首次从图像信号检测warping后门</a:t>
+            </a:r>
+          </a:p>
+        </p:txBody>
+      </p:sp>
+      <p:sp>
+        <p:nvSpPr>
+          <p:cNvPr id="19" name="TextBox 18"/>
           <p:cNvSpPr txBox="1"/>
           <p:nvPr/>
         </p:nvSpPr>
         <p:spPr>
           <a:xfrm>
             <a:off x="731520" y="5029200"/>
-            <a:ext cx="10698480" cy="914400"/>
+            <a:ext cx="10698480" cy="548640"/>
           </a:xfrm>
           <a:prstGeom prst="rect">
             <a:avLst/>
@@ -9027,17 +9329,13 @@
             <a:pPr algn="ctr">
               <a:defRPr sz="1600" b="1">
                 <a:solidFill>
-                  <a:srgbClr val="F0EEE8"/>
-                </a:solidFill>
-                <a:latin typeface="Microsoft YaHei"/>
-              </a:defRPr>
-            </a:pPr>
-            <a:r>
-              <a:t>核心贡献: 现有防御看[模型行为]-&gt;检测不到; 我们看[图像信号]-&gt;能检测到</a:t>
-            </a:r>
-            <a:br/>
-            <a:r>
-              <a:t>首次从频域角度揭示warping后门的可检测性</a:t>
+                  <a:srgbClr val="3D3D3D"/>
+                </a:solidFill>
+                <a:latin typeface="Microsoft YaHei"/>
+              </a:defRPr>
+            </a:pPr>
+            <a:r>
+              <a:t>核心贡献: 现有防御看模型行为-&gt;检测不到; 我们看图像信号-&gt;能检测到</a:t>
             </a:r>
           </a:p>
         </p:txBody>
@@ -9056,7 +9354,7 @@
     <p:bg>
       <p:bgPr>
         <a:solidFill>
-          <a:srgbClr val="0A1628"/>
+          <a:srgbClr val="FAF8F5"/>
         </a:solidFill>
         <a:effectLst/>
       </p:bgPr>
@@ -9070,20 +9368,56 @@
       <p:grpSpPr/>
       <p:sp>
         <p:nvSpPr>
-          <p:cNvPr id="2" name="Rectangle 1"/>
+          <p:cNvPr id="2" name="TextBox 1"/>
+          <p:cNvSpPr txBox="1"/>
+          <p:nvPr/>
+        </p:nvSpPr>
+        <p:spPr>
+          <a:xfrm>
+            <a:off x="731520" y="457200"/>
+            <a:ext cx="6400800" cy="457200"/>
+          </a:xfrm>
+          <a:prstGeom prst="rect">
+            <a:avLst/>
+          </a:prstGeom>
+          <a:noFill/>
+        </p:spPr>
+        <p:txBody>
+          <a:bodyPr wrap="none">
+            <a:spAutoFit/>
+          </a:bodyPr>
+          <a:lstStyle/>
+          <a:p>
+            <a:pPr algn="l">
+              <a:defRPr sz="3000" b="1">
+                <a:solidFill>
+                  <a:srgbClr val="3D3D3D"/>
+                </a:solidFill>
+                <a:latin typeface="Microsoft YaHei"/>
+              </a:defRPr>
+            </a:pPr>
+            <a:r>
+              <a:t>主实验复现结果 (CIFAR-10)</a:t>
+            </a:r>
+          </a:p>
+        </p:txBody>
+      </p:sp>
+      <p:sp>
+        <p:nvSpPr>
+          <p:cNvPr id="3" name="Rectangle 2"/>
           <p:cNvSpPr/>
           <p:nvPr/>
         </p:nvSpPr>
         <p:spPr>
           <a:xfrm>
-            <a:off x="731520" y="731520"/>
-            <a:ext cx="2286000" cy="25400"/>
+            <a:off x="731520" y="1005840"/>
+            <a:ext cx="1371600" cy="12700"/>
           </a:xfrm>
           <a:prstGeom prst="rect">
             <a:avLst/>
           </a:prstGeom>
           <a:solidFill>
-            <a:srgbClr val="C9A96E"/>
+            <a:srgbClr val="C2A497"/>
           </a:solidFill>
           <a:ln>
             <a:noFill/>
@@ -9113,42 +9447,6 @@
       </p:sp>
       <p:sp>
         <p:nvSpPr>
-          <p:cNvPr id="3" name="TextBox 2"/>
-          <p:cNvSpPr txBox="1"/>
-          <p:nvPr/>
-        </p:nvSpPr>
-        <p:spPr>
-          <a:xfrm>
-            <a:off x="731520" y="914400"/>
-            <a:ext cx="6400800" cy="548640"/>
-          </a:xfrm>
-          <a:prstGeom prst="rect">
-            <a:avLst/>
-          </a:prstGeom>
-          <a:noFill/>
-        </p:spPr>
-        <p:txBody>
-          <a:bodyPr wrap="none">
-            <a:spAutoFit/>
-          </a:bodyPr>
-          <a:lstStyle/>
-          <a:p>
-            <a:pPr algn="l">
-              <a:defRPr sz="3600" b="1">
-                <a:solidFill>
-                  <a:srgbClr val="F0EEE8"/>
-                </a:solidFill>
-                <a:latin typeface="Microsoft YaHei"/>
-              </a:defRPr>
-            </a:pPr>
-            <a:r>
-              <a:t>主实验复现结果 (CIFAR-10)</a:t>
-            </a:r>
-          </a:p>
-        </p:txBody>
-      </p:sp>
-      <p:sp>
-        <p:nvSpPr>
           <p:cNvPr id="4" name="Rounded Rectangle 3"/>
           <p:cNvSpPr/>
           <p:nvPr/>
@@ -9156,17 +9454,17 @@
         <p:spPr>
           <a:xfrm>
             <a:off x="731520" y="1645920"/>
-            <a:ext cx="2560320" cy="1371600"/>
+            <a:ext cx="2560320" cy="1280160"/>
           </a:xfrm>
           <a:prstGeom prst="roundRect">
             <a:avLst/>
           </a:prstGeom>
           <a:solidFill>
-            <a:srgbClr val="0F1F3D"/>
+            <a:srgbClr val="FFFFFF"/>
           </a:solidFill>
-          <a:ln w="19050">
+          <a:ln w="12700">
             <a:solidFill>
-              <a:srgbClr val="5DC88A"/>
+              <a:srgbClr val="E8E3DD"/>
             </a:solidFill>
           </a:ln>
         </p:spPr>
@@ -9200,8 +9498,8 @@
         </p:nvSpPr>
         <p:spPr>
           <a:xfrm>
-            <a:off x="883920" y="1772920"/>
-            <a:ext cx="2255520" cy="279400"/>
+            <a:off x="909320" y="1772920"/>
+            <a:ext cx="2204720" cy="254000"/>
           </a:xfrm>
           <a:prstGeom prst="rect">
             <a:avLst/>
@@ -9215,9 +9513,9 @@
           <a:lstStyle/>
           <a:p>
             <a:pPr algn="ctr">
-              <a:defRPr sz="1200" b="0">
-                <a:solidFill>
-                  <a:srgbClr val="8A8F9A"/>
+              <a:defRPr sz="1100" b="0">
+                <a:solidFill>
+                  <a:srgbClr val="8C8C8C"/>
                 </a:solidFill>
                 <a:latin typeface="Microsoft YaHei"/>
               </a:defRPr>
@@ -9236,8 +9534,8 @@
         </p:nvSpPr>
         <p:spPr>
           <a:xfrm>
-            <a:off x="883920" y="2077720"/>
-            <a:ext cx="2255520" cy="457200"/>
+            <a:off x="909320" y="2052320"/>
+            <a:ext cx="2204720" cy="457200"/>
           </a:xfrm>
           <a:prstGeom prst="rect">
             <a:avLst/>
@@ -9251,9 +9549,9 @@
           <a:lstStyle/>
           <a:p>
             <a:pPr algn="ctr">
-              <a:defRPr sz="2800" b="1">
-                <a:solidFill>
-                  <a:srgbClr val="5DC88A"/>
+              <a:defRPr sz="2600" b="1">
+                <a:solidFill>
+                  <a:srgbClr val="7AA884"/>
                 </a:solidFill>
                 <a:latin typeface="Microsoft YaHei"/>
               </a:defRPr>
@@ -9272,8 +9570,8 @@
         </p:nvSpPr>
         <p:spPr>
           <a:xfrm>
-            <a:off x="883920" y="2738120"/>
-            <a:ext cx="2255520" cy="203200"/>
+            <a:off x="909320" y="2672080"/>
+            <a:ext cx="2204720" cy="203200"/>
           </a:xfrm>
           <a:prstGeom prst="rect">
             <a:avLst/>
@@ -9287,15 +9585,15 @@
           <a:lstStyle/>
           <a:p>
             <a:pPr algn="ctr">
-              <a:defRPr sz="1000" b="0">
-                <a:solidFill>
-                  <a:srgbClr val="8A8F9A"/>
-                </a:solidFill>
-                <a:latin typeface="Microsoft YaHei"/>
-              </a:defRPr>
-            </a:pPr>
-            <a:r>
-              <a:t>论文94.15%</a:t>
+              <a:defRPr sz="900" b="0">
+                <a:solidFill>
+                  <a:srgbClr val="8C8C8C"/>
+                </a:solidFill>
+                <a:latin typeface="Microsoft YaHei"/>
+              </a:defRPr>
+            </a:pPr>
+            <a:r>
+              <a:t>论文 94.15%</a:t>
             </a:r>
           </a:p>
         </p:txBody>
@@ -9309,17 +9607,17 @@
         <p:spPr>
           <a:xfrm>
             <a:off x="3566160" y="1645920"/>
-            <a:ext cx="2560320" cy="1371600"/>
+            <a:ext cx="2560320" cy="1280160"/>
           </a:xfrm>
           <a:prstGeom prst="roundRect">
             <a:avLst/>
           </a:prstGeom>
           <a:solidFill>
-            <a:srgbClr val="0F1F3D"/>
+            <a:srgbClr val="FFFFFF"/>
           </a:solidFill>
-          <a:ln w="19050">
+          <a:ln w="12700">
             <a:solidFill>
-              <a:srgbClr val="E85D5D"/>
+              <a:srgbClr val="E8E3DD"/>
             </a:solidFill>
           </a:ln>
         </p:spPr>
@@ -9353,8 +9651,8 @@
         </p:nvSpPr>
         <p:spPr>
           <a:xfrm>
-            <a:off x="3718560" y="1772920"/>
-            <a:ext cx="2255520" cy="279400"/>
+            <a:off x="3743960" y="1772920"/>
+            <a:ext cx="2204720" cy="254000"/>
           </a:xfrm>
           <a:prstGeom prst="rect">
             <a:avLst/>
@@ -9368,9 +9666,9 @@
           <a:lstStyle/>
           <a:p>
             <a:pPr algn="ctr">
-              <a:defRPr sz="1200" b="0">
-                <a:solidFill>
-                  <a:srgbClr val="8A8F9A"/>
+              <a:defRPr sz="1100" b="0">
+                <a:solidFill>
+                  <a:srgbClr val="8C8C8C"/>
                 </a:solidFill>
                 <a:latin typeface="Microsoft YaHei"/>
               </a:defRPr>
@@ -9389,8 +9687,8 @@
         </p:nvSpPr>
         <p:spPr>
           <a:xfrm>
-            <a:off x="3718560" y="2077720"/>
-            <a:ext cx="2255520" cy="457200"/>
+            <a:off x="3743960" y="2052320"/>
+            <a:ext cx="2204720" cy="457200"/>
           </a:xfrm>
           <a:prstGeom prst="rect">
             <a:avLst/>
@@ -9404,9 +9702,9 @@
           <a:lstStyle/>
           <a:p>
             <a:pPr algn="ctr">
-              <a:defRPr sz="2800" b="1">
-                <a:solidFill>
-                  <a:srgbClr val="E85D5D"/>
+              <a:defRPr sz="2600" b="1">
+                <a:solidFill>
+                  <a:srgbClr val="D4847A"/>
                 </a:solidFill>
                 <a:latin typeface="Microsoft YaHei"/>
               </a:defRPr>
@@ -9425,8 +9723,8 @@
         </p:nvSpPr>
         <p:spPr>
           <a:xfrm>
-            <a:off x="3718560" y="2738120"/>
-            <a:ext cx="2255520" cy="203200"/>
+            <a:off x="3743960" y="2672080"/>
+            <a:ext cx="2204720" cy="203200"/>
           </a:xfrm>
           <a:prstGeom prst="rect">
             <a:avLst/>
@@ -9440,15 +9738,15 @@
           <a:lstStyle/>
           <a:p>
             <a:pPr algn="ctr">
-              <a:defRPr sz="1000" b="0">
-                <a:solidFill>
-                  <a:srgbClr val="8A8F9A"/>
-                </a:solidFill>
-                <a:latin typeface="Microsoft YaHei"/>
-              </a:defRPr>
-            </a:pPr>
-            <a:r>
-              <a:t>论文99.55%</a:t>
+              <a:defRPr sz="900" b="0">
+                <a:solidFill>
+                  <a:srgbClr val="8C8C8C"/>
+                </a:solidFill>
+                <a:latin typeface="Microsoft YaHei"/>
+              </a:defRPr>
+            </a:pPr>
+            <a:r>
+              <a:t>论文 99.55%</a:t>
             </a:r>
           </a:p>
         </p:txBody>
@@ -9462,17 +9760,17 @@
         <p:spPr>
           <a:xfrm>
             <a:off x="6400800" y="1645920"/>
-            <a:ext cx="2560320" cy="1371600"/>
+            <a:ext cx="2560320" cy="1280160"/>
           </a:xfrm>
           <a:prstGeom prst="roundRect">
             <a:avLst/>
           </a:prstGeom>
           <a:solidFill>
-            <a:srgbClr val="0F1F3D"/>
+            <a:srgbClr val="FFFFFF"/>
           </a:solidFill>
-          <a:ln w="19050">
+          <a:ln w="12700">
             <a:solidFill>
-              <a:srgbClr val="C9A96E"/>
+              <a:srgbClr val="E8E3DD"/>
             </a:solidFill>
           </a:ln>
         </p:spPr>
@@ -9506,8 +9804,8 @@
         </p:nvSpPr>
         <p:spPr>
           <a:xfrm>
-            <a:off x="6553200" y="1772920"/>
-            <a:ext cx="2255520" cy="279400"/>
+            <a:off x="6578600" y="1772920"/>
+            <a:ext cx="2204720" cy="254000"/>
           </a:xfrm>
           <a:prstGeom prst="rect">
             <a:avLst/>
@@ -9521,9 +9819,9 @@
           <a:lstStyle/>
           <a:p>
             <a:pPr algn="ctr">
-              <a:defRPr sz="1200" b="0">
-                <a:solidFill>
-                  <a:srgbClr val="8A8F9A"/>
+              <a:defRPr sz="1100" b="0">
+                <a:solidFill>
+                  <a:srgbClr val="8C8C8C"/>
                 </a:solidFill>
                 <a:latin typeface="Microsoft YaHei"/>
               </a:defRPr>
@@ -9542,8 +9840,8 @@
         </p:nvSpPr>
         <p:spPr>
           <a:xfrm>
-            <a:off x="6553200" y="2077720"/>
-            <a:ext cx="2255520" cy="457200"/>
+            <a:off x="6578600" y="2052320"/>
+            <a:ext cx="2204720" cy="457200"/>
           </a:xfrm>
           <a:prstGeom prst="rect">
             <a:avLst/>
@@ -9557,9 +9855,9 @@
           <a:lstStyle/>
           <a:p>
             <a:pPr algn="ctr">
-              <a:defRPr sz="2800" b="1">
-                <a:solidFill>
-                  <a:srgbClr val="C9A96E"/>
+              <a:defRPr sz="2600" b="1">
+                <a:solidFill>
+                  <a:srgbClr val="9B9EC0"/>
                 </a:solidFill>
                 <a:latin typeface="Microsoft YaHei"/>
               </a:defRPr>
@@ -9578,8 +9876,8 @@
         </p:nvSpPr>
         <p:spPr>
           <a:xfrm>
-            <a:off x="6553200" y="2738120"/>
-            <a:ext cx="2255520" cy="203200"/>
+            <a:off x="6578600" y="2672080"/>
+            <a:ext cx="2204720" cy="203200"/>
           </a:xfrm>
           <a:prstGeom prst="rect">
             <a:avLst/>
@@ -9593,15 +9891,15 @@
           <a:lstStyle/>
           <a:p>
             <a:pPr algn="ctr">
-              <a:defRPr sz="1000" b="0">
-                <a:solidFill>
-                  <a:srgbClr val="8A8F9A"/>
-                </a:solidFill>
-                <a:latin typeface="Microsoft YaHei"/>
-              </a:defRPr>
-            </a:pPr>
-            <a:r>
-              <a:t>论文93.55%</a:t>
+              <a:defRPr sz="900" b="0">
+                <a:solidFill>
+                  <a:srgbClr val="8C8C8C"/>
+                </a:solidFill>
+                <a:latin typeface="Microsoft YaHei"/>
+              </a:defRPr>
+            </a:pPr>
+            <a:r>
+              <a:t>论文 93.55%</a:t>
             </a:r>
           </a:p>
         </p:txBody>
@@ -9615,17 +9913,17 @@
         <p:spPr>
           <a:xfrm>
             <a:off x="9235440" y="1645920"/>
-            <a:ext cx="2560320" cy="1371600"/>
+            <a:ext cx="2560320" cy="1280160"/>
           </a:xfrm>
           <a:prstGeom prst="roundRect">
             <a:avLst/>
           </a:prstGeom>
           <a:solidFill>
-            <a:srgbClr val="0F1F3D"/>
+            <a:srgbClr val="FFFFFF"/>
           </a:solidFill>
-          <a:ln w="19050">
+          <a:ln w="12700">
             <a:solidFill>
-              <a:srgbClr val="E85D5D"/>
+              <a:srgbClr val="E8E3DD"/>
             </a:solidFill>
           </a:ln>
         </p:spPr>
@@ -9659,8 +9957,8 @@
         </p:nvSpPr>
         <p:spPr>
           <a:xfrm>
-            <a:off x="9387840" y="1772920"/>
-            <a:ext cx="2255520" cy="279400"/>
+            <a:off x="9413240" y="1772920"/>
+            <a:ext cx="2204720" cy="254000"/>
           </a:xfrm>
           <a:prstGeom prst="rect">
             <a:avLst/>
@@ -9674,9 +9972,9 @@
           <a:lstStyle/>
           <a:p>
             <a:pPr algn="ctr">
-              <a:defRPr sz="1200" b="0">
-                <a:solidFill>
-                  <a:srgbClr val="8A8F9A"/>
+              <a:defRPr sz="1100" b="0">
+                <a:solidFill>
+                  <a:srgbClr val="8C8C8C"/>
                 </a:solidFill>
                 <a:latin typeface="Microsoft YaHei"/>
               </a:defRPr>
@@ -9695,8 +9993,8 @@
         </p:nvSpPr>
         <p:spPr>
           <a:xfrm>
-            <a:off x="9387840" y="2077720"/>
-            <a:ext cx="2255520" cy="457200"/>
+            <a:off x="9413240" y="2052320"/>
+            <a:ext cx="2204720" cy="457200"/>
           </a:xfrm>
           <a:prstGeom prst="rect">
             <a:avLst/>
@@ -9710,9 +10008,9 @@
           <a:lstStyle/>
           <a:p>
             <a:pPr algn="ctr">
-              <a:defRPr sz="2800" b="1">
-                <a:solidFill>
-                  <a:srgbClr val="E85D5D"/>
+              <a:defRPr sz="2600" b="1">
+                <a:solidFill>
+                  <a:srgbClr val="D4847A"/>
                 </a:solidFill>
                 <a:latin typeface="Microsoft YaHei"/>
               </a:defRPr>
@@ -9731,8 +10029,8 @@
         </p:nvSpPr>
         <p:spPr>
           <a:xfrm>
-            <a:off x="9387840" y="2738120"/>
-            <a:ext cx="2255520" cy="203200"/>
+            <a:off x="9413240" y="2672080"/>
+            <a:ext cx="2204720" cy="203200"/>
           </a:xfrm>
           <a:prstGeom prst="rect">
             <a:avLst/>
@@ -9746,15 +10044,15 @@
           <a:lstStyle/>
           <a:p>
             <a:pPr algn="ctr">
-              <a:defRPr sz="1000" b="0">
-                <a:solidFill>
-                  <a:srgbClr val="8A8F9A"/>
-                </a:solidFill>
-                <a:latin typeface="Microsoft YaHei"/>
-              </a:defRPr>
-            </a:pPr>
-            <a:r>
-              <a:t>关键发现!</a:t>
+              <a:defRPr sz="900" b="0">
+                <a:solidFill>
+                  <a:srgbClr val="8C8C8C"/>
+                </a:solidFill>
+                <a:latin typeface="Microsoft YaHei"/>
+              </a:defRPr>
+            </a:pPr>
+            <a:r>
+              <a:t>关键发现</a:t>
             </a:r>
           </a:p>
         </p:txBody>
@@ -9783,43 +10081,43 @@
           <a:p>
             <a:pPr>
               <a:spcAft>
-                <a:spcPts val="640"/>
+                <a:spcPts val="525"/>
               </a:spcAft>
-              <a:defRPr sz="1600" b="1">
-                <a:solidFill>
-                  <a:srgbClr val="F0EEE8"/>
-                </a:solidFill>
-                <a:latin typeface="Microsoft YaHei"/>
-              </a:defRPr>
-            </a:pPr>
-            <a:r>
-              <a:t>防御验证结果:</a:t>
+              <a:defRPr sz="1500" b="1">
+                <a:solidFill>
+                  <a:srgbClr val="3D3D3D"/>
+                </a:solidFill>
+                <a:latin typeface="Microsoft YaHei"/>
+              </a:defRPr>
+            </a:pPr>
+            <a:r>
+              <a:t>防御验证:</a:t>
             </a:r>
           </a:p>
           <a:p>
             <a:pPr>
               <a:spcAft>
-                <a:spcPts val="640"/>
+                <a:spcPts val="525"/>
               </a:spcAft>
-              <a:defRPr sz="1600" b="0">
-                <a:solidFill>
-                  <a:srgbClr val="E85D5D"/>
-                </a:solidFill>
-                <a:latin typeface="Microsoft YaHei"/>
-              </a:defRPr>
-            </a:pPr>
-            <a:r>
-              <a:t>STRIP: Entropy分布无法区分clean/backdoor -&gt; 检测失败</a:t>
+              <a:defRPr sz="1500" b="0">
+                <a:solidFill>
+                  <a:srgbClr val="D4847A"/>
+                </a:solidFill>
+                <a:latin typeface="Microsoft YaHei"/>
+              </a:defRPr>
+            </a:pPr>
+            <a:r>
+              <a:t>STRIP: Entropy分布无法区分 -&gt; 检测失败</a:t>
             </a:r>
           </a:p>
           <a:p>
             <a:pPr>
               <a:spcAft>
-                <a:spcPts val="640"/>
+                <a:spcPts val="525"/>
               </a:spcAft>
-              <a:defRPr sz="1600" b="0">
-                <a:solidFill>
-                  <a:srgbClr val="E85D5D"/>
+              <a:defRPr sz="1500" b="0">
+                <a:solidFill>
+                  <a:srgbClr val="D4847A"/>
                 </a:solidFill>
                 <a:latin typeface="Microsoft YaHei"/>
               </a:defRPr>
@@ -9831,40 +10129,27 @@
           <a:p>
             <a:pPr>
               <a:spcAft>
-                <a:spcPts val="640"/>
+                <a:spcPts val="525"/>
               </a:spcAft>
-              <a:defRPr sz="1600" b="0">
-                <a:solidFill>
-                  <a:srgbClr val="E85D5D"/>
-                </a:solidFill>
-                <a:latin typeface="Microsoft YaHei"/>
-              </a:defRPr>
-            </a:pPr>
-            <a:r>
-              <a:t>Neural Cleanse: Anomaly Index &lt; 2 -&gt; 检测不到</a:t>
+              <a:defRPr sz="1500" b="0">
+                <a:solidFill>
+                  <a:srgbClr val="D4847A"/>
+                </a:solidFill>
+                <a:latin typeface="Microsoft YaHei"/>
+              </a:defRPr>
+            </a:pPr>
+            <a:r>
+              <a:t>Neural Cleanse: Anomaly Index&lt;2 -&gt; 检测不到</a:t>
             </a:r>
           </a:p>
           <a:p>
             <a:pPr>
               <a:spcAft>
-                <a:spcPts val="640"/>
+                <a:spcPts val="525"/>
               </a:spcAft>
-              <a:defRPr sz="1600" b="0">
-                <a:solidFill>
-                  <a:srgbClr val="8A8F9A"/>
-                </a:solidFill>
-                <a:latin typeface="Microsoft YaHei"/>
-              </a:defRPr>
-            </a:pPr>
-          </a:p>
-          <a:p>
-            <a:pPr>
-              <a:spcAft>
-                <a:spcPts val="640"/>
-              </a:spcAft>
-              <a:defRPr sz="1600" b="1">
-                <a:solidFill>
-                  <a:srgbClr val="C9A96E"/>
+              <a:defRPr sz="1500" b="1">
+                <a:solidFill>
+                  <a:srgbClr val="9B9EC0"/>
                 </a:solidFill>
                 <a:latin typeface="Microsoft YaHei"/>
               </a:defRPr>
@@ -9889,7 +10174,7 @@
     <p:bg>
       <p:bgPr>
         <a:solidFill>
-          <a:srgbClr val="0A1628"/>
+          <a:srgbClr val="FAF8F5"/>
         </a:solidFill>
         <a:effectLst/>
       </p:bgPr>
@@ -9903,20 +10188,56 @@
       <p:grpSpPr/>
       <p:sp>
         <p:nvSpPr>
-          <p:cNvPr id="2" name="Rectangle 1"/>
+          <p:cNvPr id="2" name="TextBox 1"/>
+          <p:cNvSpPr txBox="1"/>
+          <p:nvPr/>
+        </p:nvSpPr>
+        <p:spPr>
+          <a:xfrm>
+            <a:off x="731520" y="457200"/>
+            <a:ext cx="6400800" cy="457200"/>
+          </a:xfrm>
+          <a:prstGeom prst="rect">
+            <a:avLst/>
+          </a:prstGeom>
+          <a:noFill/>
+        </p:spPr>
+        <p:txBody>
+          <a:bodyPr wrap="none">
+            <a:spAutoFit/>
+          </a:bodyPr>
+          <a:lstStyle/>
+          <a:p>
+            <a:pPr algn="l">
+              <a:defRPr sz="3000" b="1">
+                <a:solidFill>
+                  <a:srgbClr val="3D3D3D"/>
+                </a:solidFill>
+                <a:latin typeface="Microsoft YaHei"/>
+              </a:defRPr>
+            </a:pPr>
+            <a:r>
+              <a:t>消融实验: Noise Mode的关键作用</a:t>
+            </a:r>
+          </a:p>
+        </p:txBody>
+      </p:sp>
+      <p:sp>
+        <p:nvSpPr>
+          <p:cNvPr id="3" name="Rectangle 2"/>
           <p:cNvSpPr/>
           <p:nvPr/>
         </p:nvSpPr>
         <p:spPr>
           <a:xfrm>
-            <a:off x="731520" y="731520"/>
-            <a:ext cx="2286000" cy="25400"/>
+            <a:off x="731520" y="1005840"/>
+            <a:ext cx="1371600" cy="12700"/>
           </a:xfrm>
           <a:prstGeom prst="rect">
             <a:avLst/>
           </a:prstGeom>
           <a:solidFill>
-            <a:srgbClr val="C9A96E"/>
+            <a:srgbClr val="C2A497"/>
           </a:solidFill>
           <a:ln>
             <a:noFill/>
@@ -9946,42 +10267,6 @@
       </p:sp>
       <p:sp>
         <p:nvSpPr>
-          <p:cNvPr id="3" name="TextBox 2"/>
-          <p:cNvSpPr txBox="1"/>
-          <p:nvPr/>
-        </p:nvSpPr>
-        <p:spPr>
-          <a:xfrm>
-            <a:off x="731520" y="914400"/>
-            <a:ext cx="6400800" cy="548640"/>
-          </a:xfrm>
-          <a:prstGeom prst="rect">
-            <a:avLst/>
-          </a:prstGeom>
-          <a:noFill/>
-        </p:spPr>
-        <p:txBody>
-          <a:bodyPr wrap="none">
-            <a:spAutoFit/>
-          </a:bodyPr>
-          <a:lstStyle/>
-          <a:p>
-            <a:pPr algn="l">
-              <a:defRPr sz="3600" b="1">
-                <a:solidFill>
-                  <a:srgbClr val="F0EEE8"/>
-                </a:solidFill>
-                <a:latin typeface="Microsoft YaHei"/>
-              </a:defRPr>
-            </a:pPr>
-            <a:r>
-              <a:t>消融实验: Noise Mode的关键作用</a:t>
-            </a:r>
-          </a:p>
-        </p:txBody>
-      </p:sp>
-      <p:sp>
-        <p:nvSpPr>
           <p:cNvPr id="4" name="Rounded Rectangle 3"/>
           <p:cNvSpPr/>
           <p:nvPr/>
@@ -9989,17 +10274,17 @@
         <p:spPr>
           <a:xfrm>
             <a:off x="731520" y="1828800"/>
-            <a:ext cx="5029200" cy="1828800"/>
+            <a:ext cx="5029200" cy="2011680"/>
           </a:xfrm>
           <a:prstGeom prst="roundRect">
             <a:avLst/>
           </a:prstGeom>
           <a:solidFill>
-            <a:srgbClr val="0F1F3D"/>
+            <a:srgbClr val="FFFFFF"/>
           </a:solidFill>
-          <a:ln w="19050">
+          <a:ln w="12700">
             <a:solidFill>
-              <a:srgbClr val="5DC88A"/>
+              <a:srgbClr val="E8E3DD"/>
             </a:solidFill>
           </a:ln>
         </p:spPr>
@@ -10033,8 +10318,8 @@
         </p:nvSpPr>
         <p:spPr>
           <a:xfrm>
-            <a:off x="883920" y="1955800"/>
-            <a:ext cx="4724400" cy="279400"/>
+            <a:off x="909320" y="1955800"/>
+            <a:ext cx="4673600" cy="254000"/>
           </a:xfrm>
           <a:prstGeom prst="rect">
             <a:avLst/>
@@ -10048,9 +10333,9 @@
           <a:lstStyle/>
           <a:p>
             <a:pPr algn="ctr">
-              <a:defRPr sz="1200" b="0">
-                <a:solidFill>
-                  <a:srgbClr val="8A8F9A"/>
+              <a:defRPr sz="1100" b="0">
+                <a:solidFill>
+                  <a:srgbClr val="8C8C8C"/>
                 </a:solidFill>
                 <a:latin typeface="Microsoft YaHei"/>
               </a:defRPr>
@@ -10069,8 +10354,8 @@
         </p:nvSpPr>
         <p:spPr>
           <a:xfrm>
-            <a:off x="883920" y="2260600"/>
-            <a:ext cx="4724400" cy="457200"/>
+            <a:off x="909320" y="2235200"/>
+            <a:ext cx="4673600" cy="457200"/>
           </a:xfrm>
           <a:prstGeom prst="rect">
             <a:avLst/>
@@ -10084,9 +10369,9 @@
           <a:lstStyle/>
           <a:p>
             <a:pPr algn="ctr">
-              <a:defRPr sz="2800" b="1">
-                <a:solidFill>
-                  <a:srgbClr val="5DC88A"/>
+              <a:defRPr sz="2600" b="1">
+                <a:solidFill>
+                  <a:srgbClr val="7AA884"/>
                 </a:solidFill>
                 <a:latin typeface="Microsoft YaHei"/>
               </a:defRPr>
@@ -10105,8 +10390,8 @@
         </p:nvSpPr>
         <p:spPr>
           <a:xfrm>
-            <a:off x="883920" y="3378200"/>
-            <a:ext cx="4724400" cy="203200"/>
+            <a:off x="909320" y="3586480"/>
+            <a:ext cx="4673600" cy="203200"/>
           </a:xfrm>
           <a:prstGeom prst="rect">
             <a:avLst/>
@@ -10120,15 +10405,15 @@
           <a:lstStyle/>
           <a:p>
             <a:pPr algn="ctr">
-              <a:defRPr sz="1000" b="0">
-                <a:solidFill>
-                  <a:srgbClr val="8A8F9A"/>
-                </a:solidFill>
-                <a:latin typeface="Microsoft YaHei"/>
-              </a:defRPr>
-            </a:pPr>
-            <a:r>
-              <a:t>Neural Cleanse检测不到</a:t>
+              <a:defRPr sz="900" b="0">
+                <a:solidFill>
+                  <a:srgbClr val="8C8C8C"/>
+                </a:solidFill>
+                <a:latin typeface="Microsoft YaHei"/>
+              </a:defRPr>
+            </a:pPr>
+            <a:r>
+              <a:t>Neural Cleanse 检测不到</a:t>
             </a:r>
           </a:p>
         </p:txBody>
@@ -10142,17 +10427,17 @@
         <p:spPr>
           <a:xfrm>
             <a:off x="6217920" y="1828800"/>
-            <a:ext cx="5029200" cy="1828800"/>
+            <a:ext cx="5029200" cy="2011680"/>
           </a:xfrm>
           <a:prstGeom prst="roundRect">
             <a:avLst/>
           </a:prstGeom>
           <a:solidFill>
-            <a:srgbClr val="0F1F3D"/>
+            <a:srgbClr val="FFFFFF"/>
           </a:solidFill>
-          <a:ln w="19050">
+          <a:ln w="12700">
             <a:solidFill>
-              <a:srgbClr val="E85D5D"/>
+              <a:srgbClr val="E8E3DD"/>
             </a:solidFill>
           </a:ln>
         </p:spPr>
@@ -10186,8 +10471,8 @@
         </p:nvSpPr>
         <p:spPr>
           <a:xfrm>
-            <a:off x="6370320" y="1955800"/>
-            <a:ext cx="4724400" cy="279400"/>
+            <a:off x="6395720" y="1955800"/>
+            <a:ext cx="4673600" cy="254000"/>
           </a:xfrm>
           <a:prstGeom prst="rect">
             <a:avLst/>
@@ -10201,9 +10486,9 @@
           <a:lstStyle/>
           <a:p>
             <a:pPr algn="ctr">
-              <a:defRPr sz="1200" b="0">
-                <a:solidFill>
-                  <a:srgbClr val="8A8F9A"/>
+              <a:defRPr sz="1100" b="0">
+                <a:solidFill>
+                  <a:srgbClr val="8C8C8C"/>
                 </a:solidFill>
                 <a:latin typeface="Microsoft YaHei"/>
               </a:defRPr>
@@ -10222,8 +10507,8 @@
         </p:nvSpPr>
         <p:spPr>
           <a:xfrm>
-            <a:off x="6370320" y="2260600"/>
-            <a:ext cx="4724400" cy="457200"/>
+            <a:off x="6395720" y="2235200"/>
+            <a:ext cx="4673600" cy="457200"/>
           </a:xfrm>
           <a:prstGeom prst="rect">
             <a:avLst/>
@@ -10237,9 +10522,9 @@
           <a:lstStyle/>
           <a:p>
             <a:pPr algn="ctr">
-              <a:defRPr sz="2800" b="1">
-                <a:solidFill>
-                  <a:srgbClr val="E85D5D"/>
+              <a:defRPr sz="2600" b="1">
+                <a:solidFill>
+                  <a:srgbClr val="D4847A"/>
                 </a:solidFill>
                 <a:latin typeface="Microsoft YaHei"/>
               </a:defRPr>
@@ -10258,8 +10543,8 @@
         </p:nvSpPr>
         <p:spPr>
           <a:xfrm>
-            <a:off x="6370320" y="3378200"/>
-            <a:ext cx="4724400" cy="203200"/>
+            <a:off x="6395720" y="3586480"/>
+            <a:ext cx="4673600" cy="203200"/>
           </a:xfrm>
           <a:prstGeom prst="rect">
             <a:avLst/>
@@ -10273,15 +10558,15 @@
           <a:lstStyle/>
           <a:p>
             <a:pPr algn="ctr">
-              <a:defRPr sz="1000" b="0">
-                <a:solidFill>
-                  <a:srgbClr val="8A8F9A"/>
-                </a:solidFill>
-                <a:latin typeface="Microsoft YaHei"/>
-              </a:defRPr>
-            </a:pPr>
-            <a:r>
-              <a:t>Neural Cleanse能检测到!</a:t>
+              <a:defRPr sz="900" b="0">
+                <a:solidFill>
+                  <a:srgbClr val="8C8C8C"/>
+                </a:solidFill>
+                <a:latin typeface="Microsoft YaHei"/>
+              </a:defRPr>
+            </a:pPr>
+            <a:r>
+              <a:t>Neural Cleanse 能检测到</a:t>
             </a:r>
           </a:p>
         </p:txBody>
@@ -10294,8 +10579,8 @@
         </p:nvSpPr>
         <p:spPr>
           <a:xfrm>
-            <a:off x="731520" y="4114800"/>
-            <a:ext cx="10698480" cy="1828800"/>
+            <a:off x="731520" y="4572000"/>
+            <a:ext cx="10698480" cy="1097280"/>
           </a:xfrm>
           <a:prstGeom prst="rect">
             <a:avLst/>
@@ -10309,23 +10594,19 @@
           <a:lstStyle/>
           <a:p>
             <a:pPr algn="ctr">
-              <a:defRPr sz="1700" b="0">
-                <a:solidFill>
-                  <a:srgbClr val="F0EEE8"/>
-                </a:solidFill>
-                <a:latin typeface="Microsoft YaHei"/>
-              </a:defRPr>
-            </a:pPr>
-            <a:r>
-              <a:t>结论: Noise Mode是WaNet绕过防御的决定性因素</a:t>
+              <a:defRPr sz="1600" b="0">
+                <a:solidFill>
+                  <a:srgbClr val="3D3D3D"/>
+                </a:solidFill>
+                <a:latin typeface="Microsoft YaHei"/>
+              </a:defRPr>
+            </a:pPr>
+            <a:r>
+              <a:t>Noise Mode是WaNet绕过防御的决定性因素。</a:t>
             </a:r>
             <a:br/>
             <a:r>
-              <a:t>没有Noise Mode -&gt; 模型学到像素级捷径 -&gt; 被Neural Cleanse发现</a:t>
-            </a:r>
-            <a:br/>
-            <a:r>
-              <a:t>有Noise Mode -&gt; 模型被迫学习真正的warping变换 -&gt; 防御失效</a:t>
+              <a:t>无Noise: 模型学到像素捷径-&gt;被NC发现。有Noise: 模型被迫学习真正的warping-&gt;防御失效。</a:t>
             </a:r>
           </a:p>
         </p:txBody>
@@ -10344,7 +10625,7 @@
     <p:bg>
       <p:bgPr>
         <a:solidFill>
-          <a:srgbClr val="0A1628"/>
+          <a:srgbClr val="FAF8F5"/>
         </a:solidFill>
         <a:effectLst/>
       </p:bgPr>
@@ -10358,20 +10639,56 @@
       <p:grpSpPr/>
       <p:sp>
         <p:nvSpPr>
-          <p:cNvPr id="2" name="Rectangle 1"/>
+          <p:cNvPr id="2" name="TextBox 1"/>
+          <p:cNvSpPr txBox="1"/>
+          <p:nvPr/>
+        </p:nvSpPr>
+        <p:spPr>
+          <a:xfrm>
+            <a:off x="731520" y="457200"/>
+            <a:ext cx="6400800" cy="457200"/>
+          </a:xfrm>
+          <a:prstGeom prst="rect">
+            <a:avLst/>
+          </a:prstGeom>
+          <a:noFill/>
+        </p:spPr>
+        <p:txBody>
+          <a:bodyPr wrap="none">
+            <a:spAutoFit/>
+          </a:bodyPr>
+          <a:lstStyle/>
+          <a:p>
+            <a:pPr algn="l">
+              <a:defRPr sz="3000" b="1">
+                <a:solidFill>
+                  <a:srgbClr val="3D3D3D"/>
+                </a:solidFill>
+                <a:latin typeface="Microsoft YaHei"/>
+              </a:defRPr>
+            </a:pPr>
+            <a:r>
+              <a:t>消融实验: Warping参数敏感性</a:t>
+            </a:r>
+          </a:p>
+        </p:txBody>
+      </p:sp>
+      <p:sp>
+        <p:nvSpPr>
+          <p:cNvPr id="3" name="Rectangle 2"/>
           <p:cNvSpPr/>
           <p:nvPr/>
         </p:nvSpPr>
         <p:spPr>
           <a:xfrm>
-            <a:off x="731520" y="731520"/>
-            <a:ext cx="2286000" cy="25400"/>
+            <a:off x="731520" y="1005840"/>
+            <a:ext cx="1371600" cy="12700"/>
           </a:xfrm>
           <a:prstGeom prst="rect">
             <a:avLst/>
           </a:prstGeom>
           <a:solidFill>
-            <a:srgbClr val="C9A96E"/>
+            <a:srgbClr val="C2A497"/>
           </a:solidFill>
           <a:ln>
             <a:noFill/>
@@ -10401,14 +10718,14 @@
       </p:sp>
       <p:sp>
         <p:nvSpPr>
-          <p:cNvPr id="3" name="TextBox 2"/>
-          <p:cNvSpPr txBox="1"/>
-          <p:nvPr/>
-        </p:nvSpPr>
-        <p:spPr>
-          <a:xfrm>
-            <a:off x="731520" y="914400"/>
-            <a:ext cx="6400800" cy="548640"/>
+          <p:cNvPr id="4" name="TextBox 3"/>
+          <p:cNvSpPr txBox="1"/>
+          <p:nvPr/>
+        </p:nvSpPr>
+        <p:spPr>
+          <a:xfrm>
+            <a:off x="731520" y="1463040"/>
+            <a:ext cx="4572000" cy="365760"/>
           </a:xfrm>
           <a:prstGeom prst="rect">
             <a:avLst/>
@@ -10422,51 +10739,15 @@
           <a:lstStyle/>
           <a:p>
             <a:pPr algn="l">
-              <a:defRPr sz="3600" b="1">
-                <a:solidFill>
-                  <a:srgbClr val="F0EEE8"/>
-                </a:solidFill>
-                <a:latin typeface="Microsoft YaHei"/>
-              </a:defRPr>
-            </a:pPr>
-            <a:r>
-              <a:t>消融实验: Warping参数敏感性分析</a:t>
-            </a:r>
-          </a:p>
-        </p:txBody>
-      </p:sp>
-      <p:sp>
-        <p:nvSpPr>
-          <p:cNvPr id="4" name="TextBox 3"/>
-          <p:cNvSpPr txBox="1"/>
-          <p:nvPr/>
-        </p:nvSpPr>
-        <p:spPr>
-          <a:xfrm>
-            <a:off x="731520" y="1645920"/>
-            <a:ext cx="5029200" cy="365760"/>
-          </a:xfrm>
-          <a:prstGeom prst="rect">
-            <a:avLst/>
-          </a:prstGeom>
-          <a:noFill/>
-        </p:spPr>
-        <p:txBody>
-          <a:bodyPr wrap="none">
-            <a:spAutoFit/>
-          </a:bodyPr>
-          <a:lstStyle/>
-          <a:p>
-            <a:pPr algn="l">
-              <a:defRPr sz="2200" b="1">
-                <a:solidFill>
-                  <a:srgbClr val="C9A96E"/>
-                </a:solidFill>
-                <a:latin typeface="Microsoft YaHei"/>
-              </a:defRPr>
-            </a:pPr>
-            <a:r>
-              <a:t>Warping强度 s 的影响</a:t>
+              <a:defRPr sz="2000" b="1">
+                <a:solidFill>
+                  <a:srgbClr val="C2A497"/>
+                </a:solidFill>
+                <a:latin typeface="Microsoft YaHei"/>
+              </a:defRPr>
+            </a:pPr>
+            <a:r>
+              <a:t>Warping强度 s</a:t>
             </a:r>
           </a:p>
         </p:txBody>
@@ -10479,18 +10760,18 @@
         </p:nvSpPr>
         <p:spPr>
           <a:xfrm>
-            <a:off x="731520" y="2194560"/>
-            <a:ext cx="2377440" cy="1371600"/>
+            <a:off x="731520" y="2011680"/>
+            <a:ext cx="2377440" cy="1280160"/>
           </a:xfrm>
           <a:prstGeom prst="roundRect">
             <a:avLst/>
           </a:prstGeom>
           <a:solidFill>
-            <a:srgbClr val="0F1F3D"/>
+            <a:srgbClr val="FFFFFF"/>
           </a:solidFill>
-          <a:ln w="19050">
+          <a:ln w="12700">
             <a:solidFill>
-              <a:srgbClr val="E85D5D"/>
+              <a:srgbClr val="E8E3DD"/>
             </a:solidFill>
           </a:ln>
         </p:spPr>
@@ -10524,8 +10805,8 @@
         </p:nvSpPr>
         <p:spPr>
           <a:xfrm>
-            <a:off x="883920" y="2321560"/>
-            <a:ext cx="2072640" cy="279400"/>
+            <a:off x="909320" y="2138680"/>
+            <a:ext cx="2021840" cy="254000"/>
           </a:xfrm>
           <a:prstGeom prst="rect">
             <a:avLst/>
@@ -10539,9 +10820,9 @@
           <a:lstStyle/>
           <a:p>
             <a:pPr algn="ctr">
-              <a:defRPr sz="1200" b="0">
-                <a:solidFill>
-                  <a:srgbClr val="8A8F9A"/>
+              <a:defRPr sz="1100" b="0">
+                <a:solidFill>
+                  <a:srgbClr val="8C8C8C"/>
                 </a:solidFill>
                 <a:latin typeface="Microsoft YaHei"/>
               </a:defRPr>
@@ -10560,8 +10841,8 @@
         </p:nvSpPr>
         <p:spPr>
           <a:xfrm>
-            <a:off x="883920" y="2626360"/>
-            <a:ext cx="2072640" cy="457200"/>
+            <a:off x="909320" y="2418080"/>
+            <a:ext cx="2021840" cy="457200"/>
           </a:xfrm>
           <a:prstGeom prst="rect">
             <a:avLst/>
@@ -10575,9 +10856,9 @@
           <a:lstStyle/>
           <a:p>
             <a:pPr algn="ctr">
-              <a:defRPr sz="2800" b="1">
-                <a:solidFill>
-                  <a:srgbClr val="E85D5D"/>
+              <a:defRPr sz="2600" b="1">
+                <a:solidFill>
+                  <a:srgbClr val="D4847A"/>
                 </a:solidFill>
                 <a:latin typeface="Microsoft YaHei"/>
               </a:defRPr>
@@ -10596,8 +10877,8 @@
         </p:nvSpPr>
         <p:spPr>
           <a:xfrm>
-            <a:off x="883920" y="3286760"/>
-            <a:ext cx="2072640" cy="203200"/>
+            <a:off x="909320" y="3037840"/>
+            <a:ext cx="2021840" cy="203200"/>
           </a:xfrm>
           <a:prstGeom prst="rect">
             <a:avLst/>
@@ -10611,15 +10892,15 @@
           <a:lstStyle/>
           <a:p>
             <a:pPr algn="ctr">
-              <a:defRPr sz="1000" b="0">
-                <a:solidFill>
-                  <a:srgbClr val="8A8F9A"/>
-                </a:solidFill>
-                <a:latin typeface="Microsoft YaHei"/>
-              </a:defRPr>
-            </a:pPr>
-            <a:r>
-              <a:t>太弱-&gt;攻击失效</a:t>
+              <a:defRPr sz="900" b="0">
+                <a:solidFill>
+                  <a:srgbClr val="8C8C8C"/>
+                </a:solidFill>
+                <a:latin typeface="Microsoft YaHei"/>
+              </a:defRPr>
+            </a:pPr>
+            <a:r>
+              <a:t>太弱-&gt;失效</a:t>
             </a:r>
           </a:p>
         </p:txBody>
@@ -10632,18 +10913,18 @@
         </p:nvSpPr>
         <p:spPr>
           <a:xfrm>
-            <a:off x="3383280" y="2194560"/>
-            <a:ext cx="2377440" cy="1371600"/>
+            <a:off x="3383280" y="2011680"/>
+            <a:ext cx="2377440" cy="1280160"/>
           </a:xfrm>
           <a:prstGeom prst="roundRect">
             <a:avLst/>
           </a:prstGeom>
           <a:solidFill>
-            <a:srgbClr val="0F1F3D"/>
+            <a:srgbClr val="FFFFFF"/>
           </a:solidFill>
-          <a:ln w="19050">
+          <a:ln w="12700">
             <a:solidFill>
-              <a:srgbClr val="5DC88A"/>
+              <a:srgbClr val="E8E3DD"/>
             </a:solidFill>
           </a:ln>
         </p:spPr>
@@ -10677,8 +10958,8 @@
         </p:nvSpPr>
         <p:spPr>
           <a:xfrm>
-            <a:off x="3535680" y="2321560"/>
-            <a:ext cx="2072640" cy="279400"/>
+            <a:off x="3561080" y="2138680"/>
+            <a:ext cx="2021840" cy="254000"/>
           </a:xfrm>
           <a:prstGeom prst="rect">
             <a:avLst/>
@@ -10692,9 +10973,9 @@
           <a:lstStyle/>
           <a:p>
             <a:pPr algn="ctr">
-              <a:defRPr sz="1200" b="0">
-                <a:solidFill>
-                  <a:srgbClr val="8A8F9A"/>
+              <a:defRPr sz="1100" b="0">
+                <a:solidFill>
+                  <a:srgbClr val="8C8C8C"/>
                 </a:solidFill>
                 <a:latin typeface="Microsoft YaHei"/>
               </a:defRPr>
@@ -10713,8 +10994,8 @@
         </p:nvSpPr>
         <p:spPr>
           <a:xfrm>
-            <a:off x="3535680" y="2626360"/>
-            <a:ext cx="2072640" cy="457200"/>
+            <a:off x="3561080" y="2418080"/>
+            <a:ext cx="2021840" cy="457200"/>
           </a:xfrm>
           <a:prstGeom prst="rect">
             <a:avLst/>
@@ -10728,9 +11009,9 @@
           <a:lstStyle/>
           <a:p>
             <a:pPr algn="ctr">
-              <a:defRPr sz="2800" b="1">
-                <a:solidFill>
-                  <a:srgbClr val="5DC88A"/>
+              <a:defRPr sz="2600" b="1">
+                <a:solidFill>
+                  <a:srgbClr val="7AA884"/>
                 </a:solidFill>
                 <a:latin typeface="Microsoft YaHei"/>
               </a:defRPr>
@@ -10749,8 +11030,8 @@
         </p:nvSpPr>
         <p:spPr>
           <a:xfrm>
-            <a:off x="3535680" y="3286760"/>
-            <a:ext cx="2072640" cy="203200"/>
+            <a:off x="3561080" y="3037840"/>
+            <a:ext cx="2021840" cy="203200"/>
           </a:xfrm>
           <a:prstGeom prst="rect">
             <a:avLst/>
@@ -10764,15 +11045,15 @@
           <a:lstStyle/>
           <a:p>
             <a:pPr algn="ctr">
-              <a:defRPr sz="1000" b="0">
-                <a:solidFill>
-                  <a:srgbClr val="8A8F9A"/>
-                </a:solidFill>
-                <a:latin typeface="Microsoft YaHei"/>
-              </a:defRPr>
-            </a:pPr>
-            <a:r>
-              <a:t>最优参数</a:t>
+              <a:defRPr sz="900" b="0">
+                <a:solidFill>
+                  <a:srgbClr val="8C8C8C"/>
+                </a:solidFill>
+                <a:latin typeface="Microsoft YaHei"/>
+              </a:defRPr>
+            </a:pPr>
+            <a:r>
+              <a:t>最优</a:t>
             </a:r>
           </a:p>
         </p:txBody>
@@ -10785,18 +11066,18 @@
         </p:nvSpPr>
         <p:spPr>
           <a:xfrm>
-            <a:off x="6035040" y="2194560"/>
-            <a:ext cx="2377440" cy="1371600"/>
+            <a:off x="6035040" y="2011680"/>
+            <a:ext cx="2377440" cy="1280160"/>
           </a:xfrm>
           <a:prstGeom prst="roundRect">
             <a:avLst/>
           </a:prstGeom>
           <a:solidFill>
-            <a:srgbClr val="0F1F3D"/>
+            <a:srgbClr val="FFFFFF"/>
           </a:solidFill>
-          <a:ln w="19050">
+          <a:ln w="12700">
             <a:solidFill>
-              <a:srgbClr val="8A8F9A"/>
+              <a:srgbClr val="E8E3DD"/>
             </a:solidFill>
           </a:ln>
         </p:spPr>
@@ -10830,8 +11111,8 @@
         </p:nvSpPr>
         <p:spPr>
           <a:xfrm>
-            <a:off x="6187440" y="2321560"/>
-            <a:ext cx="2072640" cy="279400"/>
+            <a:off x="6212840" y="2138680"/>
+            <a:ext cx="2021840" cy="254000"/>
           </a:xfrm>
           <a:prstGeom prst="rect">
             <a:avLst/>
@@ -10845,9 +11126,9 @@
           <a:lstStyle/>
           <a:p>
             <a:pPr algn="ctr">
-              <a:defRPr sz="1200" b="0">
-                <a:solidFill>
-                  <a:srgbClr val="8A8F9A"/>
+              <a:defRPr sz="1100" b="0">
+                <a:solidFill>
+                  <a:srgbClr val="8C8C8C"/>
                 </a:solidFill>
                 <a:latin typeface="Microsoft YaHei"/>
               </a:defRPr>
@@ -10866,8 +11147,8 @@
         </p:nvSpPr>
         <p:spPr>
           <a:xfrm>
-            <a:off x="6187440" y="2626360"/>
-            <a:ext cx="2072640" cy="457200"/>
+            <a:off x="6212840" y="2418080"/>
+            <a:ext cx="2021840" cy="457200"/>
           </a:xfrm>
           <a:prstGeom prst="rect">
             <a:avLst/>
@@ -10881,9 +11162,9 @@
           <a:lstStyle/>
           <a:p>
             <a:pPr algn="ctr">
-              <a:defRPr sz="2800" b="1">
-                <a:solidFill>
-                  <a:srgbClr val="8A8F9A"/>
+              <a:defRPr sz="2600" b="1">
+                <a:solidFill>
+                  <a:srgbClr val="8C8C8C"/>
                 </a:solidFill>
                 <a:latin typeface="Microsoft YaHei"/>
               </a:defRPr>
@@ -10902,8 +11183,8 @@
         </p:nvSpPr>
         <p:spPr>
           <a:xfrm>
-            <a:off x="6187440" y="3286760"/>
-            <a:ext cx="2072640" cy="203200"/>
+            <a:off x="6212840" y="3037840"/>
+            <a:ext cx="2021840" cy="203200"/>
           </a:xfrm>
           <a:prstGeom prst="rect">
             <a:avLst/>
@@ -10917,15 +11198,15 @@
           <a:lstStyle/>
           <a:p>
             <a:pPr algn="ctr">
-              <a:defRPr sz="1000" b="0">
-                <a:solidFill>
-                  <a:srgbClr val="8A8F9A"/>
-                </a:solidFill>
-                <a:latin typeface="Microsoft YaHei"/>
-              </a:defRPr>
-            </a:pPr>
-            <a:r>
-              <a:t>性能饱和</a:t>
+              <a:defRPr sz="900" b="0">
+                <a:solidFill>
+                  <a:srgbClr val="8C8C8C"/>
+                </a:solidFill>
+                <a:latin typeface="Microsoft YaHei"/>
+              </a:defRPr>
+            </a:pPr>
+            <a:r>
+              <a:t>饱和</a:t>
             </a:r>
           </a:p>
         </p:txBody>
@@ -10938,8 +11219,8 @@
         </p:nvSpPr>
         <p:spPr>
           <a:xfrm>
-            <a:off x="731520" y="3840480"/>
-            <a:ext cx="5029200" cy="365760"/>
+            <a:off x="731520" y="3657600"/>
+            <a:ext cx="4572000" cy="365760"/>
           </a:xfrm>
           <a:prstGeom prst="rect">
             <a:avLst/>
@@ -10953,15 +11234,15 @@
           <a:lstStyle/>
           <a:p>
             <a:pPr algn="l">
-              <a:defRPr sz="2200" b="1">
-                <a:solidFill>
-                  <a:srgbClr val="C9A96E"/>
-                </a:solidFill>
-                <a:latin typeface="Microsoft YaHei"/>
-              </a:defRPr>
-            </a:pPr>
-            <a:r>
-              <a:t>网格大小 k 的影响</a:t>
+              <a:defRPr sz="2000" b="1">
+                <a:solidFill>
+                  <a:srgbClr val="C2A497"/>
+                </a:solidFill>
+                <a:latin typeface="Microsoft YaHei"/>
+              </a:defRPr>
+            </a:pPr>
+            <a:r>
+              <a:t>网格大小 k</a:t>
             </a:r>
           </a:p>
         </p:txBody>
@@ -10974,18 +11255,18 @@
         </p:nvSpPr>
         <p:spPr>
           <a:xfrm>
-            <a:off x="731520" y="4389120"/>
-            <a:ext cx="2377440" cy="1371600"/>
+            <a:off x="731520" y="4206240"/>
+            <a:ext cx="2377440" cy="1280160"/>
           </a:xfrm>
           <a:prstGeom prst="roundRect">
             <a:avLst/>
           </a:prstGeom>
           <a:solidFill>
-            <a:srgbClr val="0F1F3D"/>
+            <a:srgbClr val="FFFFFF"/>
           </a:solidFill>
-          <a:ln w="19050">
+          <a:ln w="12700">
             <a:solidFill>
-              <a:srgbClr val="E85D5D"/>
+              <a:srgbClr val="E8E3DD"/>
             </a:solidFill>
           </a:ln>
         </p:spPr>
@@ -11019,8 +11300,8 @@
         </p:nvSpPr>
         <p:spPr>
           <a:xfrm>
-            <a:off x="883920" y="4516120"/>
-            <a:ext cx="2072640" cy="279400"/>
+            <a:off x="909320" y="4333240"/>
+            <a:ext cx="2021840" cy="254000"/>
           </a:xfrm>
           <a:prstGeom prst="rect">
             <a:avLst/>
@@ -11034,9 +11315,9 @@
           <a:lstStyle/>
           <a:p>
             <a:pPr algn="ctr">
-              <a:defRPr sz="1200" b="0">
-                <a:solidFill>
-                  <a:srgbClr val="8A8F9A"/>
+              <a:defRPr sz="1100" b="0">
+                <a:solidFill>
+                  <a:srgbClr val="8C8C8C"/>
                 </a:solidFill>
                 <a:latin typeface="Microsoft YaHei"/>
               </a:defRPr>
@@ -11055,8 +11336,8 @@
         </p:nvSpPr>
         <p:spPr>
           <a:xfrm>
-            <a:off x="883920" y="4820920"/>
-            <a:ext cx="2072640" cy="457200"/>
+            <a:off x="909320" y="4612640"/>
+            <a:ext cx="2021840" cy="457200"/>
           </a:xfrm>
           <a:prstGeom prst="rect">
             <a:avLst/>
@@ -11070,9 +11351,9 @@
           <a:lstStyle/>
           <a:p>
             <a:pPr algn="ctr">
-              <a:defRPr sz="2800" b="1">
-                <a:solidFill>
-                  <a:srgbClr val="E85D5D"/>
+              <a:defRPr sz="2600" b="1">
+                <a:solidFill>
+                  <a:srgbClr val="D4847A"/>
                 </a:solidFill>
                 <a:latin typeface="Microsoft YaHei"/>
               </a:defRPr>
@@ -11091,8 +11372,8 @@
         </p:nvSpPr>
         <p:spPr>
           <a:xfrm>
-            <a:off x="883920" y="5481320"/>
-            <a:ext cx="2072640" cy="203200"/>
+            <a:off x="909320" y="5232400"/>
+            <a:ext cx="2021840" cy="203200"/>
           </a:xfrm>
           <a:prstGeom prst="rect">
             <a:avLst/>
@@ -11106,9 +11387,9 @@
           <a:lstStyle/>
           <a:p>
             <a:pPr algn="ctr">
-              <a:defRPr sz="1000" b="0">
-                <a:solidFill>
-                  <a:srgbClr val="8A8F9A"/>
+              <a:defRPr sz="900" b="0">
+                <a:solidFill>
+                  <a:srgbClr val="8C8C8C"/>
                 </a:solidFill>
                 <a:latin typeface="Microsoft YaHei"/>
               </a:defRPr>
@@ -11127,18 +11408,18 @@
         </p:nvSpPr>
         <p:spPr>
           <a:xfrm>
-            <a:off x="3383280" y="4389120"/>
-            <a:ext cx="2377440" cy="1371600"/>
+            <a:off x="3383280" y="4206240"/>
+            <a:ext cx="2377440" cy="1280160"/>
           </a:xfrm>
           <a:prstGeom prst="roundRect">
             <a:avLst/>
           </a:prstGeom>
           <a:solidFill>
-            <a:srgbClr val="0F1F3D"/>
+            <a:srgbClr val="FFFFFF"/>
           </a:solidFill>
-          <a:ln w="19050">
+          <a:ln w="12700">
             <a:solidFill>
-              <a:srgbClr val="5DC88A"/>
+              <a:srgbClr val="E8E3DD"/>
             </a:solidFill>
           </a:ln>
         </p:spPr>
@@ -11172,8 +11453,8 @@
         </p:nvSpPr>
         <p:spPr>
           <a:xfrm>
-            <a:off x="3535680" y="4516120"/>
-            <a:ext cx="2072640" cy="279400"/>
+            <a:off x="3561080" y="4333240"/>
+            <a:ext cx="2021840" cy="254000"/>
           </a:xfrm>
           <a:prstGeom prst="rect">
             <a:avLst/>
@@ -11187,9 +11468,9 @@
           <a:lstStyle/>
           <a:p>
             <a:pPr algn="ctr">
-              <a:defRPr sz="1200" b="0">
-                <a:solidFill>
-                  <a:srgbClr val="8A8F9A"/>
+              <a:defRPr sz="1100" b="0">
+                <a:solidFill>
+                  <a:srgbClr val="8C8C8C"/>
                 </a:solidFill>
                 <a:latin typeface="Microsoft YaHei"/>
               </a:defRPr>
@@ -11208,8 +11489,8 @@
         </p:nvSpPr>
         <p:spPr>
           <a:xfrm>
-            <a:off x="3535680" y="4820920"/>
-            <a:ext cx="2072640" cy="457200"/>
+            <a:off x="3561080" y="4612640"/>
+            <a:ext cx="2021840" cy="457200"/>
           </a:xfrm>
           <a:prstGeom prst="rect">
             <a:avLst/>
@@ -11223,9 +11504,9 @@
           <a:lstStyle/>
           <a:p>
             <a:pPr algn="ctr">
-              <a:defRPr sz="2800" b="1">
-                <a:solidFill>
-                  <a:srgbClr val="5DC88A"/>
+              <a:defRPr sz="2600" b="1">
+                <a:solidFill>
+                  <a:srgbClr val="7AA884"/>
                 </a:solidFill>
                 <a:latin typeface="Microsoft YaHei"/>
               </a:defRPr>
@@ -11244,8 +11525,8 @@
         </p:nvSpPr>
         <p:spPr>
           <a:xfrm>
-            <a:off x="3535680" y="5481320"/>
-            <a:ext cx="2072640" cy="203200"/>
+            <a:off x="3561080" y="5232400"/>
+            <a:ext cx="2021840" cy="203200"/>
           </a:xfrm>
           <a:prstGeom prst="rect">
             <a:avLst/>
@@ -11259,15 +11540,15 @@
           <a:lstStyle/>
           <a:p>
             <a:pPr algn="ctr">
-              <a:defRPr sz="1000" b="0">
-                <a:solidFill>
-                  <a:srgbClr val="8A8F9A"/>
-                </a:solidFill>
-                <a:latin typeface="Microsoft YaHei"/>
-              </a:defRPr>
-            </a:pPr>
-            <a:r>
-              <a:t>最优参数</a:t>
+              <a:defRPr sz="900" b="0">
+                <a:solidFill>
+                  <a:srgbClr val="8C8C8C"/>
+                </a:solidFill>
+                <a:latin typeface="Microsoft YaHei"/>
+              </a:defRPr>
+            </a:pPr>
+            <a:r>
+              <a:t>最优</a:t>
             </a:r>
           </a:p>
         </p:txBody>
@@ -11280,18 +11561,18 @@
         </p:nvSpPr>
         <p:spPr>
           <a:xfrm>
-            <a:off x="6035040" y="4389120"/>
-            <a:ext cx="2377440" cy="1371600"/>
+            <a:off x="6035040" y="4206240"/>
+            <a:ext cx="2377440" cy="1280160"/>
           </a:xfrm>
           <a:prstGeom prst="roundRect">
             <a:avLst/>
           </a:prstGeom>
           <a:solidFill>
-            <a:srgbClr val="0F1F3D"/>
+            <a:srgbClr val="FFFFFF"/>
           </a:solidFill>
-          <a:ln w="19050">
+          <a:ln w="12700">
             <a:solidFill>
-              <a:srgbClr val="8A8F9A"/>
+              <a:srgbClr val="E8E3DD"/>
             </a:solidFill>
           </a:ln>
         </p:spPr>
@@ -11325,8 +11606,8 @@
         </p:nvSpPr>
         <p:spPr>
           <a:xfrm>
-            <a:off x="6187440" y="4516120"/>
-            <a:ext cx="2072640" cy="279400"/>
+            <a:off x="6212840" y="4333240"/>
+            <a:ext cx="2021840" cy="254000"/>
           </a:xfrm>
           <a:prstGeom prst="rect">
             <a:avLst/>
@@ -11340,9 +11621,9 @@
           <a:lstStyle/>
           <a:p>
             <a:pPr algn="ctr">
-              <a:defRPr sz="1200" b="0">
-                <a:solidFill>
-                  <a:srgbClr val="8A8F9A"/>
+              <a:defRPr sz="1100" b="0">
+                <a:solidFill>
+                  <a:srgbClr val="8C8C8C"/>
                 </a:solidFill>
                 <a:latin typeface="Microsoft YaHei"/>
               </a:defRPr>
@@ -11361,8 +11642,8 @@
         </p:nvSpPr>
         <p:spPr>
           <a:xfrm>
-            <a:off x="6187440" y="4820920"/>
-            <a:ext cx="2072640" cy="457200"/>
+            <a:off x="6212840" y="4612640"/>
+            <a:ext cx="2021840" cy="457200"/>
           </a:xfrm>
           <a:prstGeom prst="rect">
             <a:avLst/>
@@ -11376,9 +11657,9 @@
           <a:lstStyle/>
           <a:p>
             <a:pPr algn="ctr">
-              <a:defRPr sz="2800" b="1">
-                <a:solidFill>
-                  <a:srgbClr val="8A8F9A"/>
+              <a:defRPr sz="2600" b="1">
+                <a:solidFill>
+                  <a:srgbClr val="8C8C8C"/>
                 </a:solidFill>
                 <a:latin typeface="Microsoft YaHei"/>
               </a:defRPr>
@@ -11397,8 +11678,8 @@
         </p:nvSpPr>
         <p:spPr>
           <a:xfrm>
-            <a:off x="6187440" y="5481320"/>
-            <a:ext cx="2072640" cy="203200"/>
+            <a:off x="6212840" y="5232400"/>
+            <a:ext cx="2021840" cy="203200"/>
           </a:xfrm>
           <a:prstGeom prst="rect">
             <a:avLst/>
@@ -11412,15 +11693,15 @@
           <a:lstStyle/>
           <a:p>
             <a:pPr algn="ctr">
-              <a:defRPr sz="1000" b="0">
-                <a:solidFill>
-                  <a:srgbClr val="8A8F9A"/>
-                </a:solidFill>
-                <a:latin typeface="Microsoft YaHei"/>
-              </a:defRPr>
-            </a:pPr>
-            <a:r>
-              <a:t>性能饱和</a:t>
+              <a:defRPr sz="900" b="0">
+                <a:solidFill>
+                  <a:srgbClr val="8C8C8C"/>
+                </a:solidFill>
+                <a:latin typeface="Microsoft YaHei"/>
+              </a:defRPr>
+            </a:pPr>
+            <a:r>
+              <a:t>饱和</a:t>
             </a:r>
           </a:p>
         </p:txBody>
@@ -11433,8 +11714,8 @@
         </p:nvSpPr>
         <p:spPr>
           <a:xfrm>
-            <a:off x="9144000" y="1828800"/>
-            <a:ext cx="2560320" cy="3657600"/>
+            <a:off x="9144000" y="1645920"/>
+            <a:ext cx="2560320" cy="3840480"/>
           </a:xfrm>
           <a:prstGeom prst="rect">
             <a:avLst/>
@@ -11450,7 +11731,7 @@
             <a:pPr algn="ctr">
               <a:defRPr sz="1400" b="0">
                 <a:solidFill>
-                  <a:srgbClr val="E8D5A3"/>
+                  <a:srgbClr val="C2A497"/>
                 </a:solidFill>
                 <a:latin typeface="Microsoft YaHei"/>
               </a:defRPr>
@@ -11502,7 +11783,7 @@
     <p:bg>
       <p:bgPr>
         <a:solidFill>
-          <a:srgbClr val="0A1628"/>
+          <a:srgbClr val="FAF8F5"/>
         </a:solidFill>
         <a:effectLst/>
       </p:bgPr>
@@ -11516,20 +11797,56 @@
       <p:grpSpPr/>
       <p:sp>
         <p:nvSpPr>
-          <p:cNvPr id="2" name="Rectangle 1"/>
+          <p:cNvPr id="2" name="TextBox 1"/>
+          <p:cNvSpPr txBox="1"/>
+          <p:nvPr/>
+        </p:nvSpPr>
+        <p:spPr>
+          <a:xfrm>
+            <a:off x="731520" y="457200"/>
+            <a:ext cx="6400800" cy="457200"/>
+          </a:xfrm>
+          <a:prstGeom prst="rect">
+            <a:avLst/>
+          </a:prstGeom>
+          <a:noFill/>
+        </p:spPr>
+        <p:txBody>
+          <a:bodyPr wrap="none">
+            <a:spAutoFit/>
+          </a:bodyPr>
+          <a:lstStyle/>
+          <a:p>
+            <a:pPr algn="l">
+              <a:defRPr sz="3000" b="1">
+                <a:solidFill>
+                  <a:srgbClr val="3D3D3D"/>
+                </a:solidFill>
+                <a:latin typeface="Microsoft YaHei"/>
+              </a:defRPr>
+            </a:pPr>
+            <a:r>
+              <a:t>核心洞察: Warping在频域留下痕迹</a:t>
+            </a:r>
+          </a:p>
+        </p:txBody>
+      </p:sp>
+      <p:sp>
+        <p:nvSpPr>
+          <p:cNvPr id="3" name="Rectangle 2"/>
           <p:cNvSpPr/>
           <p:nvPr/>
         </p:nvSpPr>
         <p:spPr>
           <a:xfrm>
-            <a:off x="731520" y="731520"/>
-            <a:ext cx="2286000" cy="25400"/>
+            <a:off x="731520" y="1005840"/>
+            <a:ext cx="1371600" cy="12700"/>
           </a:xfrm>
           <a:prstGeom prst="rect">
             <a:avLst/>
           </a:prstGeom>
           <a:solidFill>
-            <a:srgbClr val="C9A96E"/>
+            <a:srgbClr val="C2A497"/>
           </a:solidFill>
           <a:ln>
             <a:noFill/>
@@ -11559,49 +11876,13 @@
       </p:sp>
       <p:sp>
         <p:nvSpPr>
-          <p:cNvPr id="3" name="TextBox 2"/>
-          <p:cNvSpPr txBox="1"/>
-          <p:nvPr/>
-        </p:nvSpPr>
-        <p:spPr>
-          <a:xfrm>
-            <a:off x="731520" y="914400"/>
-            <a:ext cx="6400800" cy="548640"/>
-          </a:xfrm>
-          <a:prstGeom prst="rect">
-            <a:avLst/>
-          </a:prstGeom>
-          <a:noFill/>
-        </p:spPr>
-        <p:txBody>
-          <a:bodyPr wrap="none">
-            <a:spAutoFit/>
-          </a:bodyPr>
-          <a:lstStyle/>
-          <a:p>
-            <a:pPr algn="l">
-              <a:defRPr sz="3600" b="1">
-                <a:solidFill>
-                  <a:srgbClr val="F0EEE8"/>
-                </a:solidFill>
-                <a:latin typeface="Microsoft YaHei"/>
-              </a:defRPr>
-            </a:pPr>
-            <a:r>
-              <a:t>核心洞察: Warping在频域留下痕迹</a:t>
-            </a:r>
-          </a:p>
-        </p:txBody>
-      </p:sp>
-      <p:sp>
-        <p:nvSpPr>
           <p:cNvPr id="4" name="TextBox 3"/>
           <p:cNvSpPr txBox="1"/>
           <p:nvPr/>
         </p:nvSpPr>
         <p:spPr>
           <a:xfrm>
-            <a:off x="731520" y="1645920"/>
+            <a:off x="731520" y="1463040"/>
             <a:ext cx="5029200" cy="2743200"/>
           </a:xfrm>
           <a:prstGeom prst="rect">
@@ -11617,11 +11898,11 @@
           <a:p>
             <a:pPr>
               <a:spcAft>
-                <a:spcPts val="720"/>
+                <a:spcPts val="630"/>
               </a:spcAft>
               <a:defRPr sz="1800" b="0">
                 <a:solidFill>
-                  <a:srgbClr val="8A8F9A"/>
+                  <a:srgbClr val="8C8C8C"/>
                 </a:solidFill>
                 <a:latin typeface="Microsoft YaHei"/>
               </a:defRPr>
@@ -11633,11 +11914,11 @@
           <a:p>
             <a:pPr>
               <a:spcAft>
-                <a:spcPts val="720"/>
+                <a:spcPts val="630"/>
               </a:spcAft>
               <a:defRPr sz="1800" b="1">
                 <a:solidFill>
-                  <a:srgbClr val="C9A96E"/>
+                  <a:srgbClr val="C2A497"/>
                 </a:solidFill>
                 <a:latin typeface="Microsoft YaHei"/>
               </a:defRPr>
@@ -11649,11 +11930,11 @@
           <a:p>
             <a:pPr>
               <a:spcAft>
-                <a:spcPts val="720"/>
+                <a:spcPts val="630"/>
               </a:spcAft>
               <a:defRPr sz="1800" b="0">
                 <a:solidFill>
-                  <a:srgbClr val="8A8F9A"/>
+                  <a:srgbClr val="8C8C8C"/>
                 </a:solidFill>
                 <a:latin typeface="Microsoft YaHei"/>
               </a:defRPr>
@@ -11662,11 +11943,11 @@
           <a:p>
             <a:pPr>
               <a:spcAft>
-                <a:spcPts val="720"/>
+                <a:spcPts val="630"/>
               </a:spcAft>
               <a:defRPr sz="1800" b="1">
                 <a:solidFill>
-                  <a:srgbClr val="F0EEE8"/>
+                  <a:srgbClr val="3D3D3D"/>
                 </a:solidFill>
                 <a:latin typeface="Microsoft YaHei"/>
               </a:defRPr>
@@ -11678,11 +11959,11 @@
           <a:p>
             <a:pPr>
               <a:spcAft>
-                <a:spcPts val="720"/>
+                <a:spcPts val="630"/>
               </a:spcAft>
               <a:defRPr sz="1800" b="0">
                 <a:solidFill>
-                  <a:srgbClr val="8A8F9A"/>
+                  <a:srgbClr val="8C8C8C"/>
                 </a:solidFill>
                 <a:latin typeface="Microsoft YaHei"/>
               </a:defRPr>
@@ -11691,62 +11972,49 @@
           <a:p>
             <a:pPr>
               <a:spcAft>
-                <a:spcPts val="720"/>
+                <a:spcPts val="630"/>
               </a:spcAft>
               <a:defRPr sz="1800" b="0">
                 <a:solidFill>
-                  <a:srgbClr val="8A8F9A"/>
-                </a:solidFill>
-                <a:latin typeface="Microsoft YaHei"/>
-              </a:defRPr>
-            </a:pPr>
-            <a:r>
-              <a:t>这个发现指向了一个全新的检测思路:</a:t>
+                  <a:srgbClr val="8C8C8C"/>
+                </a:solidFill>
+                <a:latin typeface="Microsoft YaHei"/>
+              </a:defRPr>
+            </a:pPr>
+            <a:r>
+              <a:t>全新检测思路:</a:t>
             </a:r>
           </a:p>
           <a:p>
             <a:pPr>
               <a:spcAft>
-                <a:spcPts val="720"/>
+                <a:spcPts val="630"/>
               </a:spcAft>
               <a:defRPr sz="1800" b="0">
                 <a:solidFill>
-                  <a:srgbClr val="8A8F9A"/>
-                </a:solidFill>
-                <a:latin typeface="Microsoft YaHei"/>
-              </a:defRPr>
-            </a:pPr>
+                  <a:srgbClr val="D4847A"/>
+                </a:solidFill>
+                <a:latin typeface="Microsoft YaHei"/>
+              </a:defRPr>
+            </a:pPr>
+            <a:r>
+              <a:t>现有防御: 看模型输出 -&gt; 检测不到WaNet</a:t>
+            </a:r>
           </a:p>
           <a:p>
             <a:pPr>
               <a:spcAft>
-                <a:spcPts val="720"/>
-              </a:spcAft>
-              <a:defRPr sz="1800" b="0">
-                <a:solidFill>
-                  <a:srgbClr val="E85D5D"/>
-                </a:solidFill>
-                <a:latin typeface="Microsoft YaHei"/>
-              </a:defRPr>
-            </a:pPr>
-            <a:r>
-              <a:t>现有防御: 看模型输出(logits/梯度) -&gt; 检测不到WaNet</a:t>
-            </a:r>
-          </a:p>
-          <a:p>
-            <a:pPr>
-              <a:spcAft>
-                <a:spcPts val="720"/>
+                <a:spcPts val="630"/>
               </a:spcAft>
               <a:defRPr sz="1800" b="1">
                 <a:solidFill>
-                  <a:srgbClr val="5DC88A"/>
-                </a:solidFill>
-                <a:latin typeface="Microsoft YaHei"/>
-              </a:defRPr>
-            </a:pPr>
-            <a:r>
-              <a:t>我们的方法: 看图像频域(FFT频谱) -&gt; 能检测到!</a:t>
+                  <a:srgbClr val="7AA884"/>
+                </a:solidFill>
+                <a:latin typeface="Microsoft YaHei"/>
+              </a:defRPr>
+            </a:pPr>
+            <a:r>
+              <a:t>我们的方法: 看图像频域(FFT) -&gt; 能检测到!</a:t>
             </a:r>
           </a:p>
         </p:txBody>
@@ -11776,7 +12044,7 @@
             <a:pPr algn="ctr">
               <a:defRPr sz="1600" b="0">
                 <a:solidFill>
-                  <a:srgbClr val="E8D5A3"/>
+                  <a:srgbClr val="C2A497"/>
                 </a:solidFill>
                 <a:latin typeface="Microsoft YaHei"/>
               </a:defRPr>
@@ -11796,7 +12064,7 @@
             <a:br/>
             <a:br/>
             <a:r>
-              <a:t>每个插值点 = 周围像素</a:t>
+              <a:t>每个插值点=周围像素</a:t>
             </a:r>
             <a:br/>
             <a:r>
@@ -11819,13 +12087,13 @@
         <p:spPr>
           <a:xfrm>
             <a:off x="731520" y="5029200"/>
-            <a:ext cx="10698480" cy="25400"/>
+            <a:ext cx="10698480" cy="12700"/>
           </a:xfrm>
           <a:prstGeom prst="rect">
             <a:avLst/>
           </a:prstGeom>
           <a:solidFill>
-            <a:srgbClr val="C9A96E"/>
+            <a:srgbClr val="C2A497"/>
           </a:solidFill>
           <a:ln>
             <a:noFill/>
@@ -11862,7 +12130,7 @@
         <p:spPr>
           <a:xfrm>
             <a:off x="731520" y="5303520"/>
-            <a:ext cx="10698480" cy="731520"/>
+            <a:ext cx="10698480" cy="457200"/>
           </a:xfrm>
           <a:prstGeom prst="rect">
             <a:avLst/>
@@ -11878,13 +12146,13 @@
             <a:pPr algn="ctr">
               <a:defRPr sz="1800" b="1">
                 <a:solidFill>
-                  <a:srgbClr val="C9A96E"/>
-                </a:solidFill>
-                <a:latin typeface="Microsoft YaHei"/>
-              </a:defRPr>
-            </a:pPr>
-            <a:r>
-              <a:t>这是一个论文没有探讨过的维度: 不可感知 != 不可检测</a:t>
+                  <a:srgbClr val="C2A497"/>
+                </a:solidFill>
+                <a:latin typeface="Microsoft YaHei"/>
+              </a:defRPr>
+            </a:pPr>
+            <a:r>
+              <a:t>这是论文从未探讨过的维度: 不可感知 != 不可检测</a:t>
             </a:r>
           </a:p>
         </p:txBody>
@@ -11903,7 +12171,7 @@
     <p:bg>
       <p:bgPr>
         <a:solidFill>
-          <a:srgbClr val="0A1628"/>
+          <a:srgbClr val="FAF8F5"/>
         </a:solidFill>
         <a:effectLst/>
       </p:bgPr>
@@ -11917,20 +12185,56 @@
       <p:grpSpPr/>
       <p:sp>
         <p:nvSpPr>
-          <p:cNvPr id="2" name="Rectangle 1"/>
+          <p:cNvPr id="2" name="TextBox 1"/>
+          <p:cNvSpPr txBox="1"/>
+          <p:nvPr/>
+        </p:nvSpPr>
+        <p:spPr>
+          <a:xfrm>
+            <a:off x="731520" y="457200"/>
+            <a:ext cx="6400800" cy="457200"/>
+          </a:xfrm>
+          <a:prstGeom prst="rect">
+            <a:avLst/>
+          </a:prstGeom>
+          <a:noFill/>
+        </p:spPr>
+        <p:txBody>
+          <a:bodyPr wrap="none">
+            <a:spAutoFit/>
+          </a:bodyPr>
+          <a:lstStyle/>
+          <a:p>
+            <a:pPr algn="l">
+              <a:defRPr sz="3000" b="1">
+                <a:solidFill>
+                  <a:srgbClr val="3D3D3D"/>
+                </a:solidFill>
+                <a:latin typeface="Microsoft YaHei"/>
+              </a:defRPr>
+            </a:pPr>
+            <a:r>
+              <a:t>频域Warping检测器</a:t>
+            </a:r>
+          </a:p>
+        </p:txBody>
+      </p:sp>
+      <p:sp>
+        <p:nvSpPr>
+          <p:cNvPr id="3" name="Rectangle 2"/>
           <p:cNvSpPr/>
           <p:nvPr/>
         </p:nvSpPr>
         <p:spPr>
           <a:xfrm>
-            <a:off x="731520" y="731520"/>
-            <a:ext cx="2286000" cy="25400"/>
+            <a:off x="731520" y="1005840"/>
+            <a:ext cx="1371600" cy="12700"/>
           </a:xfrm>
           <a:prstGeom prst="rect">
             <a:avLst/>
           </a:prstGeom>
           <a:solidFill>
-            <a:srgbClr val="C9A96E"/>
+            <a:srgbClr val="C2A497"/>
           </a:solidFill>
           <a:ln>
             <a:noFill/>
@@ -11960,42 +12264,6 @@
       </p:sp>
       <p:sp>
         <p:nvSpPr>
-          <p:cNvPr id="3" name="TextBox 2"/>
-          <p:cNvSpPr txBox="1"/>
-          <p:nvPr/>
-        </p:nvSpPr>
-        <p:spPr>
-          <a:xfrm>
-            <a:off x="731520" y="914400"/>
-            <a:ext cx="6400800" cy="548640"/>
-          </a:xfrm>
-          <a:prstGeom prst="rect">
-            <a:avLst/>
-          </a:prstGeom>
-          <a:noFill/>
-        </p:spPr>
-        <p:txBody>
-          <a:bodyPr wrap="none">
-            <a:spAutoFit/>
-          </a:bodyPr>
-          <a:lstStyle/>
-          <a:p>
-            <a:pPr algn="l">
-              <a:defRPr sz="3600" b="1">
-                <a:solidFill>
-                  <a:srgbClr val="F0EEE8"/>
-                </a:solidFill>
-                <a:latin typeface="Microsoft YaHei"/>
-              </a:defRPr>
-            </a:pPr>
-            <a:r>
-              <a:t>频域Warping检测器设计</a:t>
-            </a:r>
-          </a:p>
-        </p:txBody>
-      </p:sp>
-      <p:sp>
-        <p:nvSpPr>
           <p:cNvPr id="4" name="Rounded Rectangle 3"/>
           <p:cNvSpPr/>
           <p:nvPr/>
@@ -12009,11 +12277,11 @@
             <a:avLst/>
           </a:prstGeom>
           <a:solidFill>
-            <a:srgbClr val="0F1F3D"/>
+            <a:srgbClr val="FFFFFF"/>
           </a:solidFill>
-          <a:ln w="19050">
+          <a:ln w="12700">
             <a:solidFill>
-              <a:srgbClr val="8A8F9A"/>
+              <a:srgbClr val="E8E3DD"/>
             </a:solidFill>
           </a:ln>
         </p:spPr>
@@ -12047,8 +12315,8 @@
         </p:nvSpPr>
         <p:spPr>
           <a:xfrm>
-            <a:off x="883920" y="1955800"/>
-            <a:ext cx="1706880" cy="279400"/>
+            <a:off x="909320" y="1955800"/>
+            <a:ext cx="1656080" cy="254000"/>
           </a:xfrm>
           <a:prstGeom prst="rect">
             <a:avLst/>
@@ -12062,15 +12330,15 @@
           <a:lstStyle/>
           <a:p>
             <a:pPr algn="ctr">
-              <a:defRPr sz="1200" b="0">
-                <a:solidFill>
-                  <a:srgbClr val="8A8F9A"/>
-                </a:solidFill>
-                <a:latin typeface="Microsoft YaHei"/>
-              </a:defRPr>
-            </a:pPr>
-            <a:r>
-              <a:t>Step 1: 生成图像对</a:t>
+              <a:defRPr sz="1100" b="0">
+                <a:solidFill>
+                  <a:srgbClr val="8C8C8C"/>
+                </a:solidFill>
+                <a:latin typeface="Microsoft YaHei"/>
+              </a:defRPr>
+            </a:pPr>
+            <a:r>
+              <a:t>STEP1: 图像对</a:t>
             </a:r>
           </a:p>
         </p:txBody>
@@ -12083,8 +12351,8 @@
         </p:nvSpPr>
         <p:spPr>
           <a:xfrm>
-            <a:off x="883920" y="2260600"/>
-            <a:ext cx="1706880" cy="457200"/>
+            <a:off x="909320" y="2235200"/>
+            <a:ext cx="1656080" cy="457200"/>
           </a:xfrm>
           <a:prstGeom prst="rect">
             <a:avLst/>
@@ -12098,15 +12366,15 @@
           <a:lstStyle/>
           <a:p>
             <a:pPr algn="ctr">
-              <a:defRPr sz="2800" b="1">
-                <a:solidFill>
-                  <a:srgbClr val="8A8F9A"/>
-                </a:solidFill>
-                <a:latin typeface="Microsoft YaHei"/>
-              </a:defRPr>
-            </a:pPr>
-            <a:r>
-              <a:t>Clean + Warped</a:t>
+              <a:defRPr sz="2600" b="1">
+                <a:solidFill>
+                  <a:srgbClr val="8C8C8C"/>
+                </a:solidFill>
+                <a:latin typeface="Microsoft YaHei"/>
+              </a:defRPr>
+            </a:pPr>
+            <a:r>
+              <a:t>Clean+Warped</a:t>
             </a:r>
             <a:br/>
             <a:r>
@@ -12138,9 +12406,9 @@
           <a:lstStyle/>
           <a:p>
             <a:pPr algn="ctr">
-              <a:defRPr sz="2200" b="0">
-                <a:solidFill>
-                  <a:srgbClr val="C9A96E"/>
+              <a:defRPr sz="1800" b="0">
+                <a:solidFill>
+                  <a:srgbClr val="C2A497"/>
                 </a:solidFill>
                 <a:latin typeface="Microsoft YaHei"/>
               </a:defRPr>
@@ -12166,11 +12434,11 @@
             <a:avLst/>
           </a:prstGeom>
           <a:solidFill>
-            <a:srgbClr val="0F1F3D"/>
+            <a:srgbClr val="FFFFFF"/>
           </a:solidFill>
-          <a:ln w="19050">
+          <a:ln w="12700">
             <a:solidFill>
-              <a:srgbClr val="8A8F9A"/>
+              <a:srgbClr val="E8E3DD"/>
             </a:solidFill>
           </a:ln>
         </p:spPr>
@@ -12204,8 +12472,8 @@
         </p:nvSpPr>
         <p:spPr>
           <a:xfrm>
-            <a:off x="3169920" y="1955800"/>
-            <a:ext cx="1706880" cy="279400"/>
+            <a:off x="3195320" y="1955800"/>
+            <a:ext cx="1656080" cy="254000"/>
           </a:xfrm>
           <a:prstGeom prst="rect">
             <a:avLst/>
@@ -12219,15 +12487,15 @@
           <a:lstStyle/>
           <a:p>
             <a:pPr algn="ctr">
-              <a:defRPr sz="1200" b="0">
-                <a:solidFill>
-                  <a:srgbClr val="8A8F9A"/>
-                </a:solidFill>
-                <a:latin typeface="Microsoft YaHei"/>
-              </a:defRPr>
-            </a:pPr>
-            <a:r>
-              <a:t>Step 2: FFT变换</a:t>
+              <a:defRPr sz="1100" b="0">
+                <a:solidFill>
+                  <a:srgbClr val="8C8C8C"/>
+                </a:solidFill>
+                <a:latin typeface="Microsoft YaHei"/>
+              </a:defRPr>
+            </a:pPr>
+            <a:r>
+              <a:t>STEP2: FFT</a:t>
             </a:r>
           </a:p>
         </p:txBody>
@@ -12240,8 +12508,8 @@
         </p:nvSpPr>
         <p:spPr>
           <a:xfrm>
-            <a:off x="3169920" y="2260600"/>
-            <a:ext cx="1706880" cy="457200"/>
+            <a:off x="3195320" y="2235200"/>
+            <a:ext cx="1656080" cy="457200"/>
           </a:xfrm>
           <a:prstGeom prst="rect">
             <a:avLst/>
@@ -12255,9 +12523,9 @@
           <a:lstStyle/>
           <a:p>
             <a:pPr algn="ctr">
-              <a:defRPr sz="2800" b="1">
-                <a:solidFill>
-                  <a:srgbClr val="8A8F9A"/>
+              <a:defRPr sz="2600" b="1">
+                <a:solidFill>
+                  <a:srgbClr val="8C8C8C"/>
                 </a:solidFill>
                 <a:latin typeface="Microsoft YaHei"/>
               </a:defRPr>
@@ -12267,7 +12535,7 @@
             </a:r>
             <a:br/>
             <a:r>
-              <a:t>-&gt;频谱图</a:t>
+              <a:t>频谱图</a:t>
             </a:r>
           </a:p>
         </p:txBody>
@@ -12295,9 +12563,9 @@
           <a:lstStyle/>
           <a:p>
             <a:pPr algn="ctr">
-              <a:defRPr sz="2200" b="0">
-                <a:solidFill>
-                  <a:srgbClr val="C9A96E"/>
+              <a:defRPr sz="1800" b="0">
+                <a:solidFill>
+                  <a:srgbClr val="C2A497"/>
                 </a:solidFill>
                 <a:latin typeface="Microsoft YaHei"/>
               </a:defRPr>
@@ -12323,11 +12591,11 @@
             <a:avLst/>
           </a:prstGeom>
           <a:solidFill>
-            <a:srgbClr val="0F1F3D"/>
+            <a:srgbClr val="FFFFFF"/>
           </a:solidFill>
-          <a:ln w="19050">
+          <a:ln w="12700">
             <a:solidFill>
-              <a:srgbClr val="8A8F9A"/>
+              <a:srgbClr val="E8E3DD"/>
             </a:solidFill>
           </a:ln>
         </p:spPr>
@@ -12361,8 +12629,8 @@
         </p:nvSpPr>
         <p:spPr>
           <a:xfrm>
-            <a:off x="5455920" y="1955800"/>
-            <a:ext cx="1706880" cy="279400"/>
+            <a:off x="5481320" y="1955800"/>
+            <a:ext cx="1656080" cy="254000"/>
           </a:xfrm>
           <a:prstGeom prst="rect">
             <a:avLst/>
@@ -12376,15 +12644,15 @@
           <a:lstStyle/>
           <a:p>
             <a:pPr algn="ctr">
-              <a:defRPr sz="1200" b="0">
-                <a:solidFill>
-                  <a:srgbClr val="8A8F9A"/>
-                </a:solidFill>
-                <a:latin typeface="Microsoft YaHei"/>
-              </a:defRPr>
-            </a:pPr>
-            <a:r>
-              <a:t>Step 3: 特征提取</a:t>
+              <a:defRPr sz="1100" b="0">
+                <a:solidFill>
+                  <a:srgbClr val="8C8C8C"/>
+                </a:solidFill>
+                <a:latin typeface="Microsoft YaHei"/>
+              </a:defRPr>
+            </a:pPr>
+            <a:r>
+              <a:t>STEP3: 特征</a:t>
             </a:r>
           </a:p>
         </p:txBody>
@@ -12397,8 +12665,8 @@
         </p:nvSpPr>
         <p:spPr>
           <a:xfrm>
-            <a:off x="5455920" y="2260600"/>
-            <a:ext cx="1706880" cy="457200"/>
+            <a:off x="5481320" y="2235200"/>
+            <a:ext cx="1656080" cy="457200"/>
           </a:xfrm>
           <a:prstGeom prst="rect">
             <a:avLst/>
@@ -12412,9 +12680,9 @@
           <a:lstStyle/>
           <a:p>
             <a:pPr algn="ctr">
-              <a:defRPr sz="2800" b="1">
-                <a:solidFill>
-                  <a:srgbClr val="8A8F9A"/>
+              <a:defRPr sz="2600" b="1">
+                <a:solidFill>
+                  <a:srgbClr val="8C8C8C"/>
                 </a:solidFill>
                 <a:latin typeface="Microsoft YaHei"/>
               </a:defRPr>
@@ -12452,9 +12720,9 @@
           <a:lstStyle/>
           <a:p>
             <a:pPr algn="ctr">
-              <a:defRPr sz="2200" b="0">
-                <a:solidFill>
-                  <a:srgbClr val="C9A96E"/>
+              <a:defRPr sz="1800" b="0">
+                <a:solidFill>
+                  <a:srgbClr val="C2A497"/>
                 </a:solidFill>
                 <a:latin typeface="Microsoft YaHei"/>
               </a:defRPr>
@@ -12480,11 +12748,11 @@
             <a:avLst/>
           </a:prstGeom>
           <a:solidFill>
-            <a:srgbClr val="0F1F3D"/>
+            <a:srgbClr val="FFFFFF"/>
           </a:solidFill>
-          <a:ln w="19050">
+          <a:ln w="12700">
             <a:solidFill>
-              <a:srgbClr val="8A8F9A"/>
+              <a:srgbClr val="E8E3DD"/>
             </a:solidFill>
           </a:ln>
         </p:spPr>
@@ -12518,8 +12786,8 @@
         </p:nvSpPr>
         <p:spPr>
           <a:xfrm>
-            <a:off x="7741920" y="1955800"/>
-            <a:ext cx="1706880" cy="279400"/>
+            <a:off x="7767320" y="1955800"/>
+            <a:ext cx="1656080" cy="254000"/>
           </a:xfrm>
           <a:prstGeom prst="rect">
             <a:avLst/>
@@ -12533,15 +12801,15 @@
           <a:lstStyle/>
           <a:p>
             <a:pPr algn="ctr">
-              <a:defRPr sz="1200" b="0">
-                <a:solidFill>
-                  <a:srgbClr val="8A8F9A"/>
-                </a:solidFill>
-                <a:latin typeface="Microsoft YaHei"/>
-              </a:defRPr>
-            </a:pPr>
-            <a:r>
-              <a:t>Step 4: SVM分类</a:t>
+              <a:defRPr sz="1100" b="0">
+                <a:solidFill>
+                  <a:srgbClr val="8C8C8C"/>
+                </a:solidFill>
+                <a:latin typeface="Microsoft YaHei"/>
+              </a:defRPr>
+            </a:pPr>
+            <a:r>
+              <a:t>STEP4: SVM</a:t>
             </a:r>
           </a:p>
         </p:txBody>
@@ -12554,8 +12822,8 @@
         </p:nvSpPr>
         <p:spPr>
           <a:xfrm>
-            <a:off x="7741920" y="2260600"/>
-            <a:ext cx="1706880" cy="457200"/>
+            <a:off x="7767320" y="2235200"/>
+            <a:ext cx="1656080" cy="457200"/>
           </a:xfrm>
           <a:prstGeom prst="rect">
             <a:avLst/>
@@ -12569,9 +12837,9 @@
           <a:lstStyle/>
           <a:p>
             <a:pPr algn="ctr">
-              <a:defRPr sz="2800" b="1">
-                <a:solidFill>
-                  <a:srgbClr val="8A8F9A"/>
+              <a:defRPr sz="2600" b="1">
+                <a:solidFill>
+                  <a:srgbClr val="8C8C8C"/>
                 </a:solidFill>
                 <a:latin typeface="Microsoft YaHei"/>
               </a:defRPr>
@@ -12581,7 +12849,7 @@
             </a:r>
             <a:br/>
             <a:r>
-              <a:t>30%测试集</a:t>
+              <a:t>30%测试</a:t>
             </a:r>
           </a:p>
         </p:txBody>
@@ -12609,9 +12877,9 @@
           <a:lstStyle/>
           <a:p>
             <a:pPr algn="ctr">
-              <a:defRPr sz="2200" b="0">
-                <a:solidFill>
-                  <a:srgbClr val="C9A96E"/>
+              <a:defRPr sz="1800" b="0">
+                <a:solidFill>
+                  <a:srgbClr val="C2A497"/>
                 </a:solidFill>
                 <a:latin typeface="Microsoft YaHei"/>
               </a:defRPr>
@@ -12637,11 +12905,11 @@
             <a:avLst/>
           </a:prstGeom>
           <a:solidFill>
-            <a:srgbClr val="0F1F3D"/>
+            <a:srgbClr val="FFFFFF"/>
           </a:solidFill>
-          <a:ln w="19050">
+          <a:ln w="12700">
             <a:solidFill>
-              <a:srgbClr val="C9A96E"/>
+              <a:srgbClr val="E8E3DD"/>
             </a:solidFill>
           </a:ln>
         </p:spPr>
@@ -12675,8 +12943,8 @@
         </p:nvSpPr>
         <p:spPr>
           <a:xfrm>
-            <a:off x="10027920" y="1955800"/>
-            <a:ext cx="1706880" cy="279400"/>
+            <a:off x="10053320" y="1955800"/>
+            <a:ext cx="1656080" cy="254000"/>
           </a:xfrm>
           <a:prstGeom prst="rect">
             <a:avLst/>
@@ -12690,15 +12958,15 @@
           <a:lstStyle/>
           <a:p>
             <a:pPr algn="ctr">
-              <a:defRPr sz="1200" b="0">
-                <a:solidFill>
-                  <a:srgbClr val="8A8F9A"/>
-                </a:solidFill>
-                <a:latin typeface="Microsoft YaHei"/>
-              </a:defRPr>
-            </a:pPr>
-            <a:r>
-              <a:t>Step 5: 评估</a:t>
+              <a:defRPr sz="1100" b="0">
+                <a:solidFill>
+                  <a:srgbClr val="8C8C8C"/>
+                </a:solidFill>
+                <a:latin typeface="Microsoft YaHei"/>
+              </a:defRPr>
+            </a:pPr>
+            <a:r>
+              <a:t>STEP5: 评估</a:t>
             </a:r>
           </a:p>
         </p:txBody>
@@ -12711,8 +12979,8 @@
         </p:nvSpPr>
         <p:spPr>
           <a:xfrm>
-            <a:off x="10027920" y="2260600"/>
-            <a:ext cx="1706880" cy="457200"/>
+            <a:off x="10053320" y="2235200"/>
+            <a:ext cx="1656080" cy="457200"/>
           </a:xfrm>
           <a:prstGeom prst="rect">
             <a:avLst/>
@@ -12726,19 +12994,19 @@
           <a:lstStyle/>
           <a:p>
             <a:pPr algn="ctr">
-              <a:defRPr sz="2800" b="1">
-                <a:solidFill>
-                  <a:srgbClr val="C9A96E"/>
-                </a:solidFill>
-                <a:latin typeface="Microsoft YaHei"/>
-              </a:defRPr>
-            </a:pPr>
-            <a:r>
-              <a:t>ROC曲线</a:t>
+              <a:defRPr sz="2600" b="1">
+                <a:solidFill>
+                  <a:srgbClr val="C2A497"/>
+                </a:solidFill>
+                <a:latin typeface="Microsoft YaHei"/>
+              </a:defRPr>
+            </a:pPr>
+            <a:r>
+              <a:t>ROC vs STRIP</a:t>
             </a:r>
             <a:br/>
             <a:r>
-              <a:t>vs STRIP</a:t>
+              <a:t>AUC 0.735</a:t>
             </a:r>
           </a:p>
         </p:txBody>
@@ -12758,11 +13026,11 @@
             <a:avLst/>
           </a:prstGeom>
           <a:solidFill>
-            <a:srgbClr val="0F1F3D"/>
+            <a:srgbClr val="FFFFFF"/>
           </a:solidFill>
-          <a:ln w="19050">
+          <a:ln w="12700">
             <a:solidFill>
-              <a:srgbClr val="3DB8B0"/>
+              <a:srgbClr val="E8E3DD"/>
             </a:solidFill>
           </a:ln>
         </p:spPr>
@@ -12796,8 +13064,8 @@
         </p:nvSpPr>
         <p:spPr>
           <a:xfrm>
-            <a:off x="883920" y="4241800"/>
-            <a:ext cx="4724400" cy="279400"/>
+            <a:off x="909320" y="4241800"/>
+            <a:ext cx="4673600" cy="254000"/>
           </a:xfrm>
           <a:prstGeom prst="rect">
             <a:avLst/>
@@ -12811,9 +13079,9 @@
           <a:lstStyle/>
           <a:p>
             <a:pPr algn="ctr">
-              <a:defRPr sz="1200" b="0">
-                <a:solidFill>
-                  <a:srgbClr val="8A8F9A"/>
+              <a:defRPr sz="1100" b="0">
+                <a:solidFill>
+                  <a:srgbClr val="8C8C8C"/>
                 </a:solidFill>
                 <a:latin typeface="Microsoft YaHei"/>
               </a:defRPr>
@@ -12832,8 +13100,8 @@
         </p:nvSpPr>
         <p:spPr>
           <a:xfrm>
-            <a:off x="883920" y="4546600"/>
-            <a:ext cx="4724400" cy="457200"/>
+            <a:off x="909320" y="4521200"/>
+            <a:ext cx="4673600" cy="457200"/>
           </a:xfrm>
           <a:prstGeom prst="rect">
             <a:avLst/>
@@ -12847,9 +13115,9 @@
           <a:lstStyle/>
           <a:p>
             <a:pPr algn="ctr">
-              <a:defRPr sz="2800" b="1">
-                <a:solidFill>
-                  <a:srgbClr val="3DB8B0"/>
+              <a:defRPr sz="2600" b="1">
+                <a:solidFill>
+                  <a:srgbClr val="9B9EC0"/>
                 </a:solidFill>
                 <a:latin typeface="Microsoft YaHei"/>
               </a:defRPr>
@@ -12875,11 +13143,11 @@
             <a:avLst/>
           </a:prstGeom>
           <a:solidFill>
-            <a:srgbClr val="0F1F3D"/>
+            <a:srgbClr val="FFFFFF"/>
           </a:solidFill>
-          <a:ln w="19050">
+          <a:ln w="12700">
             <a:solidFill>
-              <a:srgbClr val="5DC88A"/>
+              <a:srgbClr val="E8E3DD"/>
             </a:solidFill>
           </a:ln>
         </p:spPr>
@@ -12913,8 +13181,8 @@
         </p:nvSpPr>
         <p:spPr>
           <a:xfrm>
-            <a:off x="6370320" y="4241800"/>
-            <a:ext cx="4724400" cy="279400"/>
+            <a:off x="6395720" y="4241800"/>
+            <a:ext cx="4673600" cy="254000"/>
           </a:xfrm>
           <a:prstGeom prst="rect">
             <a:avLst/>
@@ -12928,9 +13196,9 @@
           <a:lstStyle/>
           <a:p>
             <a:pPr algn="ctr">
-              <a:defRPr sz="1200" b="0">
-                <a:solidFill>
-                  <a:srgbClr val="8A8F9A"/>
+              <a:defRPr sz="1100" b="0">
+                <a:solidFill>
+                  <a:srgbClr val="8C8C8C"/>
                 </a:solidFill>
                 <a:latin typeface="Microsoft YaHei"/>
               </a:defRPr>
@@ -12949,8 +13217,8 @@
         </p:nvSpPr>
         <p:spPr>
           <a:xfrm>
-            <a:off x="6370320" y="4546600"/>
-            <a:ext cx="4724400" cy="457200"/>
+            <a:off x="6395720" y="4521200"/>
+            <a:ext cx="4673600" cy="457200"/>
           </a:xfrm>
           <a:prstGeom prst="rect">
             <a:avLst/>
@@ -12964,15 +13232,15 @@
           <a:lstStyle/>
           <a:p>
             <a:pPr algn="ctr">
-              <a:defRPr sz="2800" b="1">
-                <a:solidFill>
-                  <a:srgbClr val="5DC88A"/>
-                </a:solidFill>
-                <a:latin typeface="Microsoft YaHei"/>
-              </a:defRPr>
-            </a:pPr>
-            <a:r>
-              <a:t>准确率 67.33%  |  AUC 0.735  |  STRIP AUC=0.50</a:t>
+              <a:defRPr sz="2600" b="1">
+                <a:solidFill>
+                  <a:srgbClr val="7AA884"/>
+                </a:solidFill>
+                <a:latin typeface="Microsoft YaHei"/>
+              </a:defRPr>
+            </a:pPr>
+            <a:r>
+              <a:t>Acc=67.33%  |  AUC=0.735  |  STRIP AUC=0.50</a:t>
             </a:r>
           </a:p>
         </p:txBody>

--- a/WaNet答辩.pptx
+++ b/WaNet答辩.pptx
@@ -1,27 +1,27 @@
 
 <file path=ppt/presentation.xml><?xml version="1.0" encoding="utf-8"?>
-<p:presentation xmlns:a="http://schemas.openxmlformats.org/drawingml/2006/main" xmlns:r="http://schemas.openxmlformats.org/officeDocument/2006/relationships" xmlns:p="http://schemas.openxmlformats.org/presentationml/2006/main" saveSubsetFonts="1" autoCompressPictures="0">
+<p:presentation xmlns:a="http://schemas.openxmlformats.org/drawingml/2006/main" xmlns:r="http://schemas.openxmlformats.org/officeDocument/2006/relationships" xmlns:p="http://schemas.openxmlformats.org/presentationml/2006/main" autoCompressPictures="0">
   <p:sldMasterIdLst>
     <p:sldMasterId id="2147483648" r:id="rId1"/>
   </p:sldMasterIdLst>
   <p:sldIdLst>
-    <p:sldId id="256" r:id="rId7"/>
-    <p:sldId id="257" r:id="rId8"/>
-    <p:sldId id="258" r:id="rId9"/>
-    <p:sldId id="259" r:id="rId10"/>
-    <p:sldId id="260" r:id="rId11"/>
-    <p:sldId id="261" r:id="rId12"/>
-    <p:sldId id="262" r:id="rId13"/>
-    <p:sldId id="263" r:id="rId14"/>
-    <p:sldId id="264" r:id="rId15"/>
-    <p:sldId id="265" r:id="rId16"/>
-    <p:sldId id="266" r:id="rId17"/>
-    <p:sldId id="267" r:id="rId18"/>
-    <p:sldId id="268" r:id="rId19"/>
-    <p:sldId id="269" r:id="rId20"/>
-    <p:sldId id="270" r:id="rId21"/>
+    <p:sldId id="256" r:id="rId3"/>
+    <p:sldId id="257" r:id="rId4"/>
+    <p:sldId id="258" r:id="rId5"/>
+    <p:sldId id="259" r:id="rId6"/>
+    <p:sldId id="260" r:id="rId7"/>
+    <p:sldId id="261" r:id="rId8"/>
+    <p:sldId id="262" r:id="rId9"/>
+    <p:sldId id="263" r:id="rId10"/>
+    <p:sldId id="264" r:id="rId11"/>
+    <p:sldId id="265" r:id="rId12"/>
+    <p:sldId id="266" r:id="rId13"/>
+    <p:sldId id="267" r:id="rId14"/>
+    <p:sldId id="268" r:id="rId15"/>
+    <p:sldId id="269" r:id="rId16"/>
+    <p:sldId id="270" r:id="rId17"/>
   </p:sldIdLst>
-  <p:sldSz cx="12191695" cy="6858000" type="screen4x3"/>
+  <p:sldSz cx="12191365" cy="6858000" type="screen4x3"/>
   <p:notesSz cx="6858000" cy="9144000"/>
   <p:defaultTextStyle>
     <a:defPPr>
@@ -118,6 +118,22 @@
       </a:defRPr>
     </a:lvl9pPr>
   </p:defaultTextStyle>
+  <p:extLst>
+    <p:ext uri="{EFAFB233-063F-42B5-8137-9DF3F51BA10A}">
+      <p15:sldGuideLst xmlns:p15="http://schemas.microsoft.com/office/powerpoint/2012/main">
+        <p15:guide id="1" orient="horz" pos="2160" userDrawn="1">
+          <p15:clr>
+            <a:srgbClr val="A4A3A4"/>
+          </p15:clr>
+        </p15:guide>
+        <p15:guide id="2" pos="2880" userDrawn="1">
+          <p15:clr>
+            <a:srgbClr val="A4A3A4"/>
+          </p15:clr>
+        </p15:guide>
+      </p15:sldGuideLst>
+    </p:ext>
+  </p:extLst>
 </p:presentation>
 </file>
 
@@ -302,7 +318,6 @@
           <a:p>
             <a:fld id="{5BCAD085-E8A6-8845-BD4E-CB4CCA059FC4}" type="datetimeFigureOut">
               <a:rPr lang="en-US" smtClean="0"/>
-              <a:t>1/27/13</a:t>
             </a:fld>
             <a:endParaRPr lang="en-US"/>
           </a:p>
@@ -344,18 +359,12 @@
           <a:p>
             <a:fld id="{C1FF6DA9-008F-8B48-92A6-B652298478BF}" type="slidenum">
               <a:rPr lang="en-US" smtClean="0"/>
-              <a:t>‹#›</a:t>
             </a:fld>
             <a:endParaRPr lang="en-US"/>
           </a:p>
         </p:txBody>
       </p:sp>
     </p:spTree>
-    <p:extLst>
-      <p:ext uri="{BB962C8B-B14F-4D97-AF65-F5344CB8AC3E}">
-        <p14:creationId xmlns:p14="http://schemas.microsoft.com/office/powerpoint/2010/main" val="3168075583"/>
-      </p:ext>
-    </p:extLst>
   </p:cSld>
   <p:clrMapOvr>
     <a:masterClrMapping/>
@@ -423,6 +432,7 @@
               <a:rPr lang="en-US" smtClean="0"/>
               <a:t>Click to edit Master text styles</a:t>
             </a:r>
+            <a:endParaRPr lang="en-US" smtClean="0"/>
           </a:p>
           <a:p>
             <a:pPr lvl="1"/>
@@ -430,6 +440,7 @@
               <a:rPr lang="en-US" smtClean="0"/>
               <a:t>Second level</a:t>
             </a:r>
+            <a:endParaRPr lang="en-US" smtClean="0"/>
           </a:p>
           <a:p>
             <a:pPr lvl="2"/>
@@ -437,6 +448,7 @@
               <a:rPr lang="en-US" smtClean="0"/>
               <a:t>Third level</a:t>
             </a:r>
+            <a:endParaRPr lang="en-US" smtClean="0"/>
           </a:p>
           <a:p>
             <a:pPr lvl="3"/>
@@ -444,6 +456,7 @@
               <a:rPr lang="en-US" smtClean="0"/>
               <a:t>Fourth level</a:t>
             </a:r>
+            <a:endParaRPr lang="en-US" smtClean="0"/>
           </a:p>
           <a:p>
             <a:pPr lvl="4"/>
@@ -472,7 +485,6 @@
           <a:p>
             <a:fld id="{5BCAD085-E8A6-8845-BD4E-CB4CCA059FC4}" type="datetimeFigureOut">
               <a:rPr lang="en-US" smtClean="0"/>
-              <a:t>1/27/13</a:t>
             </a:fld>
             <a:endParaRPr lang="en-US"/>
           </a:p>
@@ -514,18 +526,12 @@
           <a:p>
             <a:fld id="{C1FF6DA9-008F-8B48-92A6-B652298478BF}" type="slidenum">
               <a:rPr lang="en-US" smtClean="0"/>
-              <a:t>‹#›</a:t>
             </a:fld>
             <a:endParaRPr lang="en-US"/>
           </a:p>
         </p:txBody>
       </p:sp>
     </p:spTree>
-    <p:extLst>
-      <p:ext uri="{BB962C8B-B14F-4D97-AF65-F5344CB8AC3E}">
-        <p14:creationId xmlns:p14="http://schemas.microsoft.com/office/powerpoint/2010/main" val="2910927964"/>
-      </p:ext>
-    </p:extLst>
   </p:cSld>
   <p:clrMapOvr>
     <a:masterClrMapping/>
@@ -603,6 +609,7 @@
               <a:rPr lang="en-US" smtClean="0"/>
               <a:t>Click to edit Master text styles</a:t>
             </a:r>
+            <a:endParaRPr lang="en-US" smtClean="0"/>
           </a:p>
           <a:p>
             <a:pPr lvl="1"/>
@@ -610,6 +617,7 @@
               <a:rPr lang="en-US" smtClean="0"/>
               <a:t>Second level</a:t>
             </a:r>
+            <a:endParaRPr lang="en-US" smtClean="0"/>
           </a:p>
           <a:p>
             <a:pPr lvl="2"/>
@@ -617,6 +625,7 @@
               <a:rPr lang="en-US" smtClean="0"/>
               <a:t>Third level</a:t>
             </a:r>
+            <a:endParaRPr lang="en-US" smtClean="0"/>
           </a:p>
           <a:p>
             <a:pPr lvl="3"/>
@@ -624,6 +633,7 @@
               <a:rPr lang="en-US" smtClean="0"/>
               <a:t>Fourth level</a:t>
             </a:r>
+            <a:endParaRPr lang="en-US" smtClean="0"/>
           </a:p>
           <a:p>
             <a:pPr lvl="4"/>
@@ -652,7 +662,6 @@
           <a:p>
             <a:fld id="{5BCAD085-E8A6-8845-BD4E-CB4CCA059FC4}" type="datetimeFigureOut">
               <a:rPr lang="en-US" smtClean="0"/>
-              <a:t>1/27/13</a:t>
             </a:fld>
             <a:endParaRPr lang="en-US"/>
           </a:p>
@@ -694,18 +703,12 @@
           <a:p>
             <a:fld id="{C1FF6DA9-008F-8B48-92A6-B652298478BF}" type="slidenum">
               <a:rPr lang="en-US" smtClean="0"/>
-              <a:t>‹#›</a:t>
             </a:fld>
             <a:endParaRPr lang="en-US"/>
           </a:p>
         </p:txBody>
       </p:sp>
     </p:spTree>
-    <p:extLst>
-      <p:ext uri="{BB962C8B-B14F-4D97-AF65-F5344CB8AC3E}">
-        <p14:creationId xmlns:p14="http://schemas.microsoft.com/office/powerpoint/2010/main" val="3612223792"/>
-      </p:ext>
-    </p:extLst>
   </p:cSld>
   <p:clrMapOvr>
     <a:masterClrMapping/>
@@ -773,6 +776,7 @@
               <a:rPr lang="en-US" smtClean="0"/>
               <a:t>Click to edit Master text styles</a:t>
             </a:r>
+            <a:endParaRPr lang="en-US" smtClean="0"/>
           </a:p>
           <a:p>
             <a:pPr lvl="1"/>
@@ -780,6 +784,7 @@
               <a:rPr lang="en-US" smtClean="0"/>
               <a:t>Second level</a:t>
             </a:r>
+            <a:endParaRPr lang="en-US" smtClean="0"/>
           </a:p>
           <a:p>
             <a:pPr lvl="2"/>
@@ -787,6 +792,7 @@
               <a:rPr lang="en-US" smtClean="0"/>
               <a:t>Third level</a:t>
             </a:r>
+            <a:endParaRPr lang="en-US" smtClean="0"/>
           </a:p>
           <a:p>
             <a:pPr lvl="3"/>
@@ -794,6 +800,7 @@
               <a:rPr lang="en-US" smtClean="0"/>
               <a:t>Fourth level</a:t>
             </a:r>
+            <a:endParaRPr lang="en-US" smtClean="0"/>
           </a:p>
           <a:p>
             <a:pPr lvl="4"/>
@@ -822,7 +829,6 @@
           <a:p>
             <a:fld id="{5BCAD085-E8A6-8845-BD4E-CB4CCA059FC4}" type="datetimeFigureOut">
               <a:rPr lang="en-US" smtClean="0"/>
-              <a:t>1/27/13</a:t>
             </a:fld>
             <a:endParaRPr lang="en-US"/>
           </a:p>
@@ -864,18 +870,12 @@
           <a:p>
             <a:fld id="{C1FF6DA9-008F-8B48-92A6-B652298478BF}" type="slidenum">
               <a:rPr lang="en-US" smtClean="0"/>
-              <a:t>‹#›</a:t>
             </a:fld>
             <a:endParaRPr lang="en-US"/>
           </a:p>
         </p:txBody>
       </p:sp>
     </p:spTree>
-    <p:extLst>
-      <p:ext uri="{BB962C8B-B14F-4D97-AF65-F5344CB8AC3E}">
-        <p14:creationId xmlns:p14="http://schemas.microsoft.com/office/powerpoint/2010/main" val="2614314258"/>
-      </p:ext>
-    </p:extLst>
   </p:cSld>
   <p:clrMapOvr>
     <a:masterClrMapping/>
@@ -1048,6 +1048,7 @@
               <a:rPr lang="en-US" smtClean="0"/>
               <a:t>Click to edit Master text styles</a:t>
             </a:r>
+            <a:endParaRPr lang="en-US" smtClean="0"/>
           </a:p>
         </p:txBody>
       </p:sp>
@@ -1068,7 +1069,6 @@
           <a:p>
             <a:fld id="{5BCAD085-E8A6-8845-BD4E-CB4CCA059FC4}" type="datetimeFigureOut">
               <a:rPr lang="en-US" smtClean="0"/>
-              <a:t>1/27/13</a:t>
             </a:fld>
             <a:endParaRPr lang="en-US"/>
           </a:p>
@@ -1110,18 +1110,12 @@
           <a:p>
             <a:fld id="{C1FF6DA9-008F-8B48-92A6-B652298478BF}" type="slidenum">
               <a:rPr lang="en-US" smtClean="0"/>
-              <a:t>‹#›</a:t>
             </a:fld>
             <a:endParaRPr lang="en-US"/>
           </a:p>
         </p:txBody>
       </p:sp>
     </p:spTree>
-    <p:extLst>
-      <p:ext uri="{BB962C8B-B14F-4D97-AF65-F5344CB8AC3E}">
-        <p14:creationId xmlns:p14="http://schemas.microsoft.com/office/powerpoint/2010/main" val="960648375"/>
-      </p:ext>
-    </p:extLst>
   </p:cSld>
   <p:clrMapOvr>
     <a:masterClrMapping/>
@@ -1222,6 +1216,7 @@
               <a:rPr lang="en-US" smtClean="0"/>
               <a:t>Click to edit Master text styles</a:t>
             </a:r>
+            <a:endParaRPr lang="en-US" smtClean="0"/>
           </a:p>
           <a:p>
             <a:pPr lvl="1"/>
@@ -1229,6 +1224,7 @@
               <a:rPr lang="en-US" smtClean="0"/>
               <a:t>Second level</a:t>
             </a:r>
+            <a:endParaRPr lang="en-US" smtClean="0"/>
           </a:p>
           <a:p>
             <a:pPr lvl="2"/>
@@ -1236,6 +1232,7 @@
               <a:rPr lang="en-US" smtClean="0"/>
               <a:t>Third level</a:t>
             </a:r>
+            <a:endParaRPr lang="en-US" smtClean="0"/>
           </a:p>
           <a:p>
             <a:pPr lvl="3"/>
@@ -1243,6 +1240,7 @@
               <a:rPr lang="en-US" smtClean="0"/>
               <a:t>Fourth level</a:t>
             </a:r>
+            <a:endParaRPr lang="en-US" smtClean="0"/>
           </a:p>
           <a:p>
             <a:pPr lvl="4"/>
@@ -1307,6 +1305,7 @@
               <a:rPr lang="en-US" smtClean="0"/>
               <a:t>Click to edit Master text styles</a:t>
             </a:r>
+            <a:endParaRPr lang="en-US" smtClean="0"/>
           </a:p>
           <a:p>
             <a:pPr lvl="1"/>
@@ -1314,6 +1313,7 @@
               <a:rPr lang="en-US" smtClean="0"/>
               <a:t>Second level</a:t>
             </a:r>
+            <a:endParaRPr lang="en-US" smtClean="0"/>
           </a:p>
           <a:p>
             <a:pPr lvl="2"/>
@@ -1321,6 +1321,7 @@
               <a:rPr lang="en-US" smtClean="0"/>
               <a:t>Third level</a:t>
             </a:r>
+            <a:endParaRPr lang="en-US" smtClean="0"/>
           </a:p>
           <a:p>
             <a:pPr lvl="3"/>
@@ -1328,6 +1329,7 @@
               <a:rPr lang="en-US" smtClean="0"/>
               <a:t>Fourth level</a:t>
             </a:r>
+            <a:endParaRPr lang="en-US" smtClean="0"/>
           </a:p>
           <a:p>
             <a:pPr lvl="4"/>
@@ -1356,7 +1358,6 @@
           <a:p>
             <a:fld id="{5BCAD085-E8A6-8845-BD4E-CB4CCA059FC4}" type="datetimeFigureOut">
               <a:rPr lang="en-US" smtClean="0"/>
-              <a:t>1/27/13</a:t>
             </a:fld>
             <a:endParaRPr lang="en-US"/>
           </a:p>
@@ -1398,18 +1399,12 @@
           <a:p>
             <a:fld id="{C1FF6DA9-008F-8B48-92A6-B652298478BF}" type="slidenum">
               <a:rPr lang="en-US" smtClean="0"/>
-              <a:t>‹#›</a:t>
             </a:fld>
             <a:endParaRPr lang="en-US"/>
           </a:p>
         </p:txBody>
       </p:sp>
     </p:spTree>
-    <p:extLst>
-      <p:ext uri="{BB962C8B-B14F-4D97-AF65-F5344CB8AC3E}">
-        <p14:creationId xmlns:p14="http://schemas.microsoft.com/office/powerpoint/2010/main" val="2782244947"/>
-      </p:ext>
-    </p:extLst>
   </p:cSld>
   <p:clrMapOvr>
     <a:masterClrMapping/>
@@ -1523,6 +1518,7 @@
               <a:rPr lang="en-US" smtClean="0"/>
               <a:t>Click to edit Master text styles</a:t>
             </a:r>
+            <a:endParaRPr lang="en-US" smtClean="0"/>
           </a:p>
         </p:txBody>
       </p:sp>
@@ -1579,6 +1575,7 @@
               <a:rPr lang="en-US" smtClean="0"/>
               <a:t>Click to edit Master text styles</a:t>
             </a:r>
+            <a:endParaRPr lang="en-US" smtClean="0"/>
           </a:p>
           <a:p>
             <a:pPr lvl="1"/>
@@ -1586,6 +1583,7 @@
               <a:rPr lang="en-US" smtClean="0"/>
               <a:t>Second level</a:t>
             </a:r>
+            <a:endParaRPr lang="en-US" smtClean="0"/>
           </a:p>
           <a:p>
             <a:pPr lvl="2"/>
@@ -1593,6 +1591,7 @@
               <a:rPr lang="en-US" smtClean="0"/>
               <a:t>Third level</a:t>
             </a:r>
+            <a:endParaRPr lang="en-US" smtClean="0"/>
           </a:p>
           <a:p>
             <a:pPr lvl="3"/>
@@ -1600,6 +1599,7 @@
               <a:rPr lang="en-US" smtClean="0"/>
               <a:t>Fourth level</a:t>
             </a:r>
+            <a:endParaRPr lang="en-US" smtClean="0"/>
           </a:p>
           <a:p>
             <a:pPr lvl="4"/>
@@ -1673,6 +1673,7 @@
               <a:rPr lang="en-US" smtClean="0"/>
               <a:t>Click to edit Master text styles</a:t>
             </a:r>
+            <a:endParaRPr lang="en-US" smtClean="0"/>
           </a:p>
         </p:txBody>
       </p:sp>
@@ -1729,6 +1730,7 @@
               <a:rPr lang="en-US" smtClean="0"/>
               <a:t>Click to edit Master text styles</a:t>
             </a:r>
+            <a:endParaRPr lang="en-US" smtClean="0"/>
           </a:p>
           <a:p>
             <a:pPr lvl="1"/>
@@ -1736,6 +1738,7 @@
               <a:rPr lang="en-US" smtClean="0"/>
               <a:t>Second level</a:t>
             </a:r>
+            <a:endParaRPr lang="en-US" smtClean="0"/>
           </a:p>
           <a:p>
             <a:pPr lvl="2"/>
@@ -1743,6 +1746,7 @@
               <a:rPr lang="en-US" smtClean="0"/>
               <a:t>Third level</a:t>
             </a:r>
+            <a:endParaRPr lang="en-US" smtClean="0"/>
           </a:p>
           <a:p>
             <a:pPr lvl="3"/>
@@ -1750,6 +1754,7 @@
               <a:rPr lang="en-US" smtClean="0"/>
               <a:t>Fourth level</a:t>
             </a:r>
+            <a:endParaRPr lang="en-US" smtClean="0"/>
           </a:p>
           <a:p>
             <a:pPr lvl="4"/>
@@ -1778,7 +1783,6 @@
           <a:p>
             <a:fld id="{5BCAD085-E8A6-8845-BD4E-CB4CCA059FC4}" type="datetimeFigureOut">
               <a:rPr lang="en-US" smtClean="0"/>
-              <a:t>1/27/13</a:t>
             </a:fld>
             <a:endParaRPr lang="en-US"/>
           </a:p>
@@ -1820,18 +1824,12 @@
           <a:p>
             <a:fld id="{C1FF6DA9-008F-8B48-92A6-B652298478BF}" type="slidenum">
               <a:rPr lang="en-US" smtClean="0"/>
-              <a:t>‹#›</a:t>
             </a:fld>
             <a:endParaRPr lang="en-US"/>
           </a:p>
         </p:txBody>
       </p:sp>
     </p:spTree>
-    <p:extLst>
-      <p:ext uri="{BB962C8B-B14F-4D97-AF65-F5344CB8AC3E}">
-        <p14:creationId xmlns:p14="http://schemas.microsoft.com/office/powerpoint/2010/main" val="990158736"/>
-      </p:ext>
-    </p:extLst>
   </p:cSld>
   <p:clrMapOvr>
     <a:masterClrMapping/>
@@ -1896,7 +1894,6 @@
           <a:p>
             <a:fld id="{5BCAD085-E8A6-8845-BD4E-CB4CCA059FC4}" type="datetimeFigureOut">
               <a:rPr lang="en-US" smtClean="0"/>
-              <a:t>1/27/13</a:t>
             </a:fld>
             <a:endParaRPr lang="en-US"/>
           </a:p>
@@ -1938,18 +1935,12 @@
           <a:p>
             <a:fld id="{C1FF6DA9-008F-8B48-92A6-B652298478BF}" type="slidenum">
               <a:rPr lang="en-US" smtClean="0"/>
-              <a:t>‹#›</a:t>
             </a:fld>
             <a:endParaRPr lang="en-US"/>
           </a:p>
         </p:txBody>
       </p:sp>
     </p:spTree>
-    <p:extLst>
-      <p:ext uri="{BB962C8B-B14F-4D97-AF65-F5344CB8AC3E}">
-        <p14:creationId xmlns:p14="http://schemas.microsoft.com/office/powerpoint/2010/main" val="727027711"/>
-      </p:ext>
-    </p:extLst>
   </p:cSld>
   <p:clrMapOvr>
     <a:masterClrMapping/>
@@ -1991,7 +1982,6 @@
           <a:p>
             <a:fld id="{5BCAD085-E8A6-8845-BD4E-CB4CCA059FC4}" type="datetimeFigureOut">
               <a:rPr lang="en-US" smtClean="0"/>
-              <a:t>1/27/13</a:t>
             </a:fld>
             <a:endParaRPr lang="en-US"/>
           </a:p>
@@ -2033,18 +2023,12 @@
           <a:p>
             <a:fld id="{C1FF6DA9-008F-8B48-92A6-B652298478BF}" type="slidenum">
               <a:rPr lang="en-US" smtClean="0"/>
-              <a:t>‹#›</a:t>
             </a:fld>
             <a:endParaRPr lang="en-US"/>
           </a:p>
         </p:txBody>
       </p:sp>
     </p:spTree>
-    <p:extLst>
-      <p:ext uri="{BB962C8B-B14F-4D97-AF65-F5344CB8AC3E}">
-        <p14:creationId xmlns:p14="http://schemas.microsoft.com/office/powerpoint/2010/main" val="1212999818"/>
-      </p:ext>
-    </p:extLst>
   </p:cSld>
   <p:clrMapOvr>
     <a:masterClrMapping/>
@@ -2154,6 +2138,7 @@
               <a:rPr lang="en-US" smtClean="0"/>
               <a:t>Click to edit Master text styles</a:t>
             </a:r>
+            <a:endParaRPr lang="en-US" smtClean="0"/>
           </a:p>
           <a:p>
             <a:pPr lvl="1"/>
@@ -2161,6 +2146,7 @@
               <a:rPr lang="en-US" smtClean="0"/>
               <a:t>Second level</a:t>
             </a:r>
+            <a:endParaRPr lang="en-US" smtClean="0"/>
           </a:p>
           <a:p>
             <a:pPr lvl="2"/>
@@ -2168,6 +2154,7 @@
               <a:rPr lang="en-US" smtClean="0"/>
               <a:t>Third level</a:t>
             </a:r>
+            <a:endParaRPr lang="en-US" smtClean="0"/>
           </a:p>
           <a:p>
             <a:pPr lvl="3"/>
@@ -2175,6 +2162,7 @@
               <a:rPr lang="en-US" smtClean="0"/>
               <a:t>Fourth level</a:t>
             </a:r>
+            <a:endParaRPr lang="en-US" smtClean="0"/>
           </a:p>
           <a:p>
             <a:pPr lvl="4"/>
@@ -2248,6 +2236,7 @@
               <a:rPr lang="en-US" smtClean="0"/>
               <a:t>Click to edit Master text styles</a:t>
             </a:r>
+            <a:endParaRPr lang="en-US" smtClean="0"/>
           </a:p>
         </p:txBody>
       </p:sp>
@@ -2268,7 +2257,6 @@
           <a:p>
             <a:fld id="{5BCAD085-E8A6-8845-BD4E-CB4CCA059FC4}" type="datetimeFigureOut">
               <a:rPr lang="en-US" smtClean="0"/>
-              <a:t>1/27/13</a:t>
             </a:fld>
             <a:endParaRPr lang="en-US"/>
           </a:p>
@@ -2310,18 +2298,12 @@
           <a:p>
             <a:fld id="{C1FF6DA9-008F-8B48-92A6-B652298478BF}" type="slidenum">
               <a:rPr lang="en-US" smtClean="0"/>
-              <a:t>‹#›</a:t>
             </a:fld>
             <a:endParaRPr lang="en-US"/>
           </a:p>
         </p:txBody>
       </p:sp>
     </p:spTree>
-    <p:extLst>
-      <p:ext uri="{BB962C8B-B14F-4D97-AF65-F5344CB8AC3E}">
-        <p14:creationId xmlns:p14="http://schemas.microsoft.com/office/powerpoint/2010/main" val="1840726560"/>
-      </p:ext>
-    </p:extLst>
   </p:cSld>
   <p:clrMapOvr>
     <a:masterClrMapping/>
@@ -2501,6 +2483,7 @@
               <a:rPr lang="en-US" smtClean="0"/>
               <a:t>Click to edit Master text styles</a:t>
             </a:r>
+            <a:endParaRPr lang="en-US" smtClean="0"/>
           </a:p>
         </p:txBody>
       </p:sp>
@@ -2521,7 +2504,6 @@
           <a:p>
             <a:fld id="{5BCAD085-E8A6-8845-BD4E-CB4CCA059FC4}" type="datetimeFigureOut">
               <a:rPr lang="en-US" smtClean="0"/>
-              <a:t>1/27/13</a:t>
             </a:fld>
             <a:endParaRPr lang="en-US"/>
           </a:p>
@@ -2563,18 +2545,12 @@
           <a:p>
             <a:fld id="{C1FF6DA9-008F-8B48-92A6-B652298478BF}" type="slidenum">
               <a:rPr lang="en-US" smtClean="0"/>
-              <a:t>‹#›</a:t>
             </a:fld>
             <a:endParaRPr lang="en-US"/>
           </a:p>
         </p:txBody>
       </p:sp>
     </p:spTree>
-    <p:extLst>
-      <p:ext uri="{BB962C8B-B14F-4D97-AF65-F5344CB8AC3E}">
-        <p14:creationId xmlns:p14="http://schemas.microsoft.com/office/powerpoint/2010/main" val="3889236939"/>
-      </p:ext>
-    </p:extLst>
   </p:cSld>
   <p:clrMapOvr>
     <a:masterClrMapping/>
@@ -2667,6 +2643,7 @@
               <a:rPr lang="en-US" smtClean="0"/>
               <a:t>Click to edit Master text styles</a:t>
             </a:r>
+            <a:endParaRPr lang="en-US" smtClean="0"/>
           </a:p>
           <a:p>
             <a:pPr lvl="1"/>
@@ -2674,6 +2651,7 @@
               <a:rPr lang="en-US" smtClean="0"/>
               <a:t>Second level</a:t>
             </a:r>
+            <a:endParaRPr lang="en-US" smtClean="0"/>
           </a:p>
           <a:p>
             <a:pPr lvl="2"/>
@@ -2681,6 +2659,7 @@
               <a:rPr lang="en-US" smtClean="0"/>
               <a:t>Third level</a:t>
             </a:r>
+            <a:endParaRPr lang="en-US" smtClean="0"/>
           </a:p>
           <a:p>
             <a:pPr lvl="3"/>
@@ -2688,6 +2667,7 @@
               <a:rPr lang="en-US" smtClean="0"/>
               <a:t>Fourth level</a:t>
             </a:r>
+            <a:endParaRPr lang="en-US" smtClean="0"/>
           </a:p>
           <a:p>
             <a:pPr lvl="4"/>
@@ -2734,7 +2714,6 @@
           <a:p>
             <a:fld id="{5BCAD085-E8A6-8845-BD4E-CB4CCA059FC4}" type="datetimeFigureOut">
               <a:rPr lang="en-US" smtClean="0"/>
-              <a:t>1/27/13</a:t>
             </a:fld>
             <a:endParaRPr lang="en-US"/>
           </a:p>
@@ -2812,18 +2791,12 @@
           <a:p>
             <a:fld id="{C1FF6DA9-008F-8B48-92A6-B652298478BF}" type="slidenum">
               <a:rPr lang="en-US" smtClean="0"/>
-              <a:t>‹#›</a:t>
             </a:fld>
             <a:endParaRPr lang="en-US"/>
           </a:p>
         </p:txBody>
       </p:sp>
     </p:spTree>
-    <p:extLst>
-      <p:ext uri="{BB962C8B-B14F-4D97-AF65-F5344CB8AC3E}">
-        <p14:creationId xmlns:p14="http://schemas.microsoft.com/office/powerpoint/2010/main" val="2209977519"/>
-      </p:ext>
-    </p:extLst>
   </p:cSld>
   <p:clrMap bg1="lt1" tx1="dk1" bg2="lt2" tx2="dk2" accent1="accent1" accent2="accent2" accent3="accent3" accent4="accent4" accent5="accent5" accent6="accent6" hlink="hlink" folHlink="folHlink"/>
   <p:sldLayoutIdLst>
@@ -2861,7 +2834,7 @@
         <a:spcBef>
           <a:spcPct val="20000"/>
         </a:spcBef>
-        <a:buFont typeface="Arial"/>
+        <a:buFont typeface="Arial" panose="020B0604020202020204"/>
         <a:buChar char="•"/>
         <a:defRPr sz="3200" kern="1200">
           <a:solidFill>
@@ -2876,7 +2849,7 @@
         <a:spcBef>
           <a:spcPct val="20000"/>
         </a:spcBef>
-        <a:buFont typeface="Arial"/>
+        <a:buFont typeface="Arial" panose="020B0604020202020204"/>
         <a:buChar char="–"/>
         <a:defRPr sz="2800" kern="1200">
           <a:solidFill>
@@ -2891,7 +2864,7 @@
         <a:spcBef>
           <a:spcPct val="20000"/>
         </a:spcBef>
-        <a:buFont typeface="Arial"/>
+        <a:buFont typeface="Arial" panose="020B0604020202020204"/>
         <a:buChar char="•"/>
         <a:defRPr sz="2400" kern="1200">
           <a:solidFill>
@@ -2906,7 +2879,7 @@
         <a:spcBef>
           <a:spcPct val="20000"/>
         </a:spcBef>
-        <a:buFont typeface="Arial"/>
+        <a:buFont typeface="Arial" panose="020B0604020202020204"/>
         <a:buChar char="–"/>
         <a:defRPr sz="2000" kern="1200">
           <a:solidFill>
@@ -2921,7 +2894,7 @@
         <a:spcBef>
           <a:spcPct val="20000"/>
         </a:spcBef>
-        <a:buFont typeface="Arial"/>
+        <a:buFont typeface="Arial" panose="020B0604020202020204"/>
         <a:buChar char="»"/>
         <a:defRPr sz="2000" kern="1200">
           <a:solidFill>
@@ -2936,7 +2909,7 @@
         <a:spcBef>
           <a:spcPct val="20000"/>
         </a:spcBef>
-        <a:buFont typeface="Arial"/>
+        <a:buFont typeface="Arial" panose="020B0604020202020204"/>
         <a:buChar char="•"/>
         <a:defRPr sz="2000" kern="1200">
           <a:solidFill>
@@ -2951,7 +2924,7 @@
         <a:spcBef>
           <a:spcPct val="20000"/>
         </a:spcBef>
-        <a:buFont typeface="Arial"/>
+        <a:buFont typeface="Arial" panose="020B0604020202020204"/>
         <a:buChar char="•"/>
         <a:defRPr sz="2000" kern="1200">
           <a:solidFill>
@@ -2966,7 +2939,7 @@
         <a:spcBef>
           <a:spcPct val="20000"/>
         </a:spcBef>
-        <a:buFont typeface="Arial"/>
+        <a:buFont typeface="Arial" panose="020B0604020202020204"/>
         <a:buChar char="•"/>
         <a:defRPr sz="2000" kern="1200">
           <a:solidFill>
@@ -2981,7 +2954,7 @@
         <a:spcBef>
           <a:spcPct val="20000"/>
         </a:spcBef>
-        <a:buFont typeface="Arial"/>
+        <a:buFont typeface="Arial" panose="020B0604020202020204"/>
         <a:buChar char="•"/>
         <a:defRPr sz="2000" kern="1200">
           <a:solidFill>
@@ -3093,7 +3066,7 @@
 </file>
 
 <file path=ppt/slides/slide1.xml><?xml version="1.0" encoding="utf-8"?>
-<p:sld xmlns:a="http://schemas.openxmlformats.org/drawingml/2006/main" xmlns:p="http://schemas.openxmlformats.org/presentationml/2006/main" xmlns:r="http://schemas.openxmlformats.org/officeDocument/2006/relationships">
+<p:sld xmlns:a="http://schemas.openxmlformats.org/drawingml/2006/main" xmlns:r="http://schemas.openxmlformats.org/officeDocument/2006/relationships" xmlns:p="http://schemas.openxmlformats.org/presentationml/2006/main">
   <p:cSld>
     <p:bg>
       <p:bgPr>
@@ -3180,7 +3153,7 @@
                 <a:solidFill>
                   <a:srgbClr val="3D3D3D"/>
                 </a:solidFill>
-                <a:latin typeface="Microsoft YaHei"/>
+                <a:latin typeface="微软雅黑" panose="020B0503020204020204" charset="-122"/>
               </a:defRPr>
             </a:pPr>
             <a:r>
@@ -3216,7 +3189,7 @@
                 <a:solidFill>
                   <a:srgbClr val="8C8C8C"/>
                 </a:solidFill>
-                <a:latin typeface="Microsoft YaHei"/>
+                <a:latin typeface="微软雅黑" panose="020B0503020204020204" charset="-122"/>
               </a:defRPr>
             </a:pPr>
             <a:r>
@@ -3233,8 +3206,8 @@
         </p:nvSpPr>
         <p:spPr>
           <a:xfrm>
-            <a:off x="2743200" y="4114800"/>
-            <a:ext cx="6705295" cy="457200"/>
+            <a:off x="5249710" y="4114800"/>
+            <a:ext cx="1692275" cy="337185"/>
           </a:xfrm>
           <a:prstGeom prst="rect">
             <a:avLst/>
@@ -3252,11 +3225,17 @@
                 <a:solidFill>
                   <a:srgbClr val="C2A497"/>
                 </a:solidFill>
-                <a:latin typeface="Microsoft YaHei"/>
-              </a:defRPr>
-            </a:pPr>
-            <a:r>
-              <a:t>周争妍  ·  蒋竺君</a:t>
+                <a:latin typeface="微软雅黑" panose="020B0503020204020204" charset="-122"/>
+              </a:defRPr>
+            </a:pPr>
+            <a:r>
+              <a:t>蒋竺君</a:t>
+            </a:r>
+            <a:r>
+              <a:rPr>
+                <a:sym typeface="+mn-ea"/>
+              </a:rPr>
+              <a:t> ·  周争妍 </a:t>
             </a:r>
           </a:p>
         </p:txBody>
@@ -3313,7 +3292,7 @@
 </file>
 
 <file path=ppt/slides/slide10.xml><?xml version="1.0" encoding="utf-8"?>
-<p:sld xmlns:a="http://schemas.openxmlformats.org/drawingml/2006/main" xmlns:p="http://schemas.openxmlformats.org/presentationml/2006/main" xmlns:r="http://schemas.openxmlformats.org/officeDocument/2006/relationships">
+<p:sld xmlns:a="http://schemas.openxmlformats.org/drawingml/2006/main" xmlns:r="http://schemas.openxmlformats.org/officeDocument/2006/relationships" xmlns:p="http://schemas.openxmlformats.org/presentationml/2006/main">
   <p:cSld>
     <p:bg>
       <p:bgPr>
@@ -3357,7 +3336,7 @@
                 <a:solidFill>
                   <a:srgbClr val="3D3D3D"/>
                 </a:solidFill>
-                <a:latin typeface="Microsoft YaHei"/>
+                <a:latin typeface="微软雅黑" panose="020B0503020204020204" charset="-122"/>
               </a:defRPr>
             </a:pPr>
             <a:r>
@@ -3409,528 +3388,30 @@
           </a:p>
         </p:txBody>
       </p:sp>
-      <p:sp>
-        <p:nvSpPr>
-          <p:cNvPr id="4" name="Rounded Rectangle 3"/>
-          <p:cNvSpPr/>
-          <p:nvPr/>
-        </p:nvSpPr>
-        <p:spPr>
-          <a:xfrm>
-            <a:off x="731520" y="1463040"/>
-            <a:ext cx="3383280" cy="2103120"/>
-          </a:xfrm>
-          <a:prstGeom prst="roundRect">
-            <a:avLst/>
-          </a:prstGeom>
-          <a:solidFill>
-            <a:srgbClr val="FFFFFF"/>
-          </a:solidFill>
-          <a:ln w="12700">
-            <a:solidFill>
-              <a:srgbClr val="E8E3DD"/>
-            </a:solidFill>
-          </a:ln>
-        </p:spPr>
-        <p:style>
-          <a:lnRef idx="1">
-            <a:schemeClr val="accent1"/>
-          </a:lnRef>
-          <a:fillRef idx="3">
-            <a:schemeClr val="accent1"/>
-          </a:fillRef>
-          <a:effectRef idx="2">
-            <a:schemeClr val="accent1"/>
-          </a:effectRef>
-          <a:fontRef idx="minor">
-            <a:schemeClr val="lt1"/>
-          </a:fontRef>
-        </p:style>
-        <p:txBody>
-          <a:bodyPr rtlCol="0" anchor="ctr"/>
-          <a:lstStyle/>
-          <a:p>
-            <a:pPr algn="ctr"/>
-          </a:p>
-        </p:txBody>
-      </p:sp>
-      <p:sp>
-        <p:nvSpPr>
-          <p:cNvPr id="5" name="TextBox 4"/>
-          <p:cNvSpPr txBox="1"/>
-          <p:nvPr/>
-        </p:nvSpPr>
-        <p:spPr>
-          <a:xfrm>
-            <a:off x="833120" y="1539240"/>
-            <a:ext cx="3200400" cy="274320"/>
-          </a:xfrm>
-          <a:prstGeom prst="rect">
-            <a:avLst/>
-          </a:prstGeom>
-          <a:noFill/>
-        </p:spPr>
-        <p:txBody>
-          <a:bodyPr wrap="none">
-            <a:spAutoFit/>
-          </a:bodyPr>
-          <a:lstStyle/>
-          <a:p>
-            <a:pPr algn="ctr">
-              <a:defRPr sz="1200" b="0">
-                <a:solidFill>
-                  <a:srgbClr val="8C8C8C"/>
-                </a:solidFill>
-                <a:latin typeface="Microsoft YaHei"/>
-              </a:defRPr>
-            </a:pPr>
-            <a:r>
-              <a:t>Clean Image</a:t>
-            </a:r>
-          </a:p>
-        </p:txBody>
-      </p:sp>
-      <p:sp>
-        <p:nvSpPr>
-          <p:cNvPr id="6" name="Rounded Rectangle 5"/>
-          <p:cNvSpPr/>
-          <p:nvPr/>
-        </p:nvSpPr>
-        <p:spPr>
-          <a:xfrm>
-            <a:off x="4389120" y="1463040"/>
-            <a:ext cx="3383280" cy="2103120"/>
-          </a:xfrm>
-          <a:prstGeom prst="roundRect">
-            <a:avLst/>
-          </a:prstGeom>
-          <a:solidFill>
-            <a:srgbClr val="FFFFFF"/>
-          </a:solidFill>
-          <a:ln w="12700">
-            <a:solidFill>
-              <a:srgbClr val="E8E3DD"/>
-            </a:solidFill>
-          </a:ln>
-        </p:spPr>
-        <p:style>
-          <a:lnRef idx="1">
-            <a:schemeClr val="accent1"/>
-          </a:lnRef>
-          <a:fillRef idx="3">
-            <a:schemeClr val="accent1"/>
-          </a:fillRef>
-          <a:effectRef idx="2">
-            <a:schemeClr val="accent1"/>
-          </a:effectRef>
-          <a:fontRef idx="minor">
-            <a:schemeClr val="lt1"/>
-          </a:fontRef>
-        </p:style>
-        <p:txBody>
-          <a:bodyPr rtlCol="0" anchor="ctr"/>
-          <a:lstStyle/>
-          <a:p>
-            <a:pPr algn="ctr"/>
-          </a:p>
-        </p:txBody>
-      </p:sp>
-      <p:sp>
-        <p:nvSpPr>
-          <p:cNvPr id="7" name="TextBox 6"/>
-          <p:cNvSpPr txBox="1"/>
-          <p:nvPr/>
-        </p:nvSpPr>
-        <p:spPr>
-          <a:xfrm>
-            <a:off x="4490720" y="1539240"/>
-            <a:ext cx="3200400" cy="274320"/>
-          </a:xfrm>
-          <a:prstGeom prst="rect">
-            <a:avLst/>
-          </a:prstGeom>
-          <a:noFill/>
-        </p:spPr>
-        <p:txBody>
-          <a:bodyPr wrap="none">
-            <a:spAutoFit/>
-          </a:bodyPr>
-          <a:lstStyle/>
-          <a:p>
-            <a:pPr algn="ctr">
-              <a:defRPr sz="1200" b="0">
-                <a:solidFill>
-                  <a:srgbClr val="8C8C8C"/>
-                </a:solidFill>
-                <a:latin typeface="Microsoft YaHei"/>
-              </a:defRPr>
-            </a:pPr>
-            <a:r>
-              <a:t>Clean FFT Spectrum</a:t>
-            </a:r>
-          </a:p>
-        </p:txBody>
-      </p:sp>
-      <p:sp>
-        <p:nvSpPr>
-          <p:cNvPr id="8" name="Rounded Rectangle 7"/>
-          <p:cNvSpPr/>
-          <p:nvPr/>
-        </p:nvSpPr>
-        <p:spPr>
-          <a:xfrm>
-            <a:off x="8046720" y="1463040"/>
-            <a:ext cx="3383280" cy="2103120"/>
-          </a:xfrm>
-          <a:prstGeom prst="roundRect">
-            <a:avLst/>
-          </a:prstGeom>
-          <a:solidFill>
-            <a:srgbClr val="FFFFFF"/>
-          </a:solidFill>
-          <a:ln w="12700">
-            <a:solidFill>
-              <a:srgbClr val="E8E3DD"/>
-            </a:solidFill>
-          </a:ln>
-        </p:spPr>
-        <p:style>
-          <a:lnRef idx="1">
-            <a:schemeClr val="accent1"/>
-          </a:lnRef>
-          <a:fillRef idx="3">
-            <a:schemeClr val="accent1"/>
-          </a:fillRef>
-          <a:effectRef idx="2">
-            <a:schemeClr val="accent1"/>
-          </a:effectRef>
-          <a:fontRef idx="minor">
-            <a:schemeClr val="lt1"/>
-          </a:fontRef>
-        </p:style>
-        <p:txBody>
-          <a:bodyPr rtlCol="0" anchor="ctr"/>
-          <a:lstStyle/>
-          <a:p>
-            <a:pPr algn="ctr"/>
-          </a:p>
-        </p:txBody>
-      </p:sp>
-      <p:sp>
-        <p:nvSpPr>
-          <p:cNvPr id="9" name="TextBox 8"/>
-          <p:cNvSpPr txBox="1"/>
-          <p:nvPr/>
-        </p:nvSpPr>
-        <p:spPr>
-          <a:xfrm>
-            <a:off x="8148320" y="1539240"/>
-            <a:ext cx="3200400" cy="274320"/>
-          </a:xfrm>
-          <a:prstGeom prst="rect">
-            <a:avLst/>
-          </a:prstGeom>
-          <a:noFill/>
-        </p:spPr>
-        <p:txBody>
-          <a:bodyPr wrap="none">
-            <a:spAutoFit/>
-          </a:bodyPr>
-          <a:lstStyle/>
-          <a:p>
-            <a:pPr algn="ctr">
-              <a:defRPr sz="1200" b="0">
-                <a:solidFill>
-                  <a:srgbClr val="8C8C8C"/>
-                </a:solidFill>
-                <a:latin typeface="Microsoft YaHei"/>
-              </a:defRPr>
-            </a:pPr>
-            <a:r>
-              <a:t>Clean Radial Profile</a:t>
-            </a:r>
-          </a:p>
-        </p:txBody>
-      </p:sp>
-      <p:sp>
-        <p:nvSpPr>
-          <p:cNvPr id="10" name="Rounded Rectangle 9"/>
-          <p:cNvSpPr/>
-          <p:nvPr/>
-        </p:nvSpPr>
-        <p:spPr>
-          <a:xfrm>
-            <a:off x="731520" y="3840480"/>
-            <a:ext cx="3383280" cy="2103120"/>
-          </a:xfrm>
-          <a:prstGeom prst="roundRect">
-            <a:avLst/>
-          </a:prstGeom>
-          <a:solidFill>
-            <a:srgbClr val="FFFFFF"/>
-          </a:solidFill>
-          <a:ln w="12700">
-            <a:solidFill>
-              <a:srgbClr val="E8E3DD"/>
-            </a:solidFill>
-          </a:ln>
-        </p:spPr>
-        <p:style>
-          <a:lnRef idx="1">
-            <a:schemeClr val="accent1"/>
-          </a:lnRef>
-          <a:fillRef idx="3">
-            <a:schemeClr val="accent1"/>
-          </a:fillRef>
-          <a:effectRef idx="2">
-            <a:schemeClr val="accent1"/>
-          </a:effectRef>
-          <a:fontRef idx="minor">
-            <a:schemeClr val="lt1"/>
-          </a:fontRef>
-        </p:style>
-        <p:txBody>
-          <a:bodyPr rtlCol="0" anchor="ctr"/>
-          <a:lstStyle/>
-          <a:p>
-            <a:pPr algn="ctr"/>
-          </a:p>
-        </p:txBody>
-      </p:sp>
-      <p:sp>
-        <p:nvSpPr>
-          <p:cNvPr id="11" name="TextBox 10"/>
-          <p:cNvSpPr txBox="1"/>
-          <p:nvPr/>
-        </p:nvSpPr>
-        <p:spPr>
-          <a:xfrm>
-            <a:off x="833120" y="3916680"/>
-            <a:ext cx="3200400" cy="274320"/>
-          </a:xfrm>
-          <a:prstGeom prst="rect">
-            <a:avLst/>
-          </a:prstGeom>
-          <a:noFill/>
-        </p:spPr>
-        <p:txBody>
-          <a:bodyPr wrap="none">
-            <a:spAutoFit/>
-          </a:bodyPr>
-          <a:lstStyle/>
-          <a:p>
-            <a:pPr algn="ctr">
-              <a:defRPr sz="1200" b="0">
-                <a:solidFill>
-                  <a:srgbClr val="8C8C8C"/>
-                </a:solidFill>
-                <a:latin typeface="Microsoft YaHei"/>
-              </a:defRPr>
-            </a:pPr>
-            <a:r>
-              <a:t>Warped Image</a:t>
-            </a:r>
-          </a:p>
-        </p:txBody>
-      </p:sp>
-      <p:sp>
-        <p:nvSpPr>
-          <p:cNvPr id="12" name="Rounded Rectangle 11"/>
-          <p:cNvSpPr/>
-          <p:nvPr/>
-        </p:nvSpPr>
-        <p:spPr>
-          <a:xfrm>
-            <a:off x="4389120" y="3840480"/>
-            <a:ext cx="3383280" cy="2103120"/>
-          </a:xfrm>
-          <a:prstGeom prst="roundRect">
-            <a:avLst/>
-          </a:prstGeom>
-          <a:solidFill>
-            <a:srgbClr val="FFFFFF"/>
-          </a:solidFill>
-          <a:ln w="12700">
-            <a:solidFill>
-              <a:srgbClr val="E8E3DD"/>
-            </a:solidFill>
-          </a:ln>
-        </p:spPr>
-        <p:style>
-          <a:lnRef idx="1">
-            <a:schemeClr val="accent1"/>
-          </a:lnRef>
-          <a:fillRef idx="3">
-            <a:schemeClr val="accent1"/>
-          </a:fillRef>
-          <a:effectRef idx="2">
-            <a:schemeClr val="accent1"/>
-          </a:effectRef>
-          <a:fontRef idx="minor">
-            <a:schemeClr val="lt1"/>
-          </a:fontRef>
-        </p:style>
-        <p:txBody>
-          <a:bodyPr rtlCol="0" anchor="ctr"/>
-          <a:lstStyle/>
-          <a:p>
-            <a:pPr algn="ctr"/>
-          </a:p>
-        </p:txBody>
-      </p:sp>
-      <p:sp>
-        <p:nvSpPr>
-          <p:cNvPr id="13" name="TextBox 12"/>
-          <p:cNvSpPr txBox="1"/>
-          <p:nvPr/>
-        </p:nvSpPr>
-        <p:spPr>
-          <a:xfrm>
-            <a:off x="4490720" y="3916680"/>
-            <a:ext cx="3200400" cy="274320"/>
-          </a:xfrm>
-          <a:prstGeom prst="rect">
-            <a:avLst/>
-          </a:prstGeom>
-          <a:noFill/>
-        </p:spPr>
-        <p:txBody>
-          <a:bodyPr wrap="none">
-            <a:spAutoFit/>
-          </a:bodyPr>
-          <a:lstStyle/>
-          <a:p>
-            <a:pPr algn="ctr">
-              <a:defRPr sz="1200" b="0">
-                <a:solidFill>
-                  <a:srgbClr val="8C8C8C"/>
-                </a:solidFill>
-                <a:latin typeface="Microsoft YaHei"/>
-              </a:defRPr>
-            </a:pPr>
-            <a:r>
-              <a:t>Warped FFT Spectrum</a:t>
-            </a:r>
-          </a:p>
-        </p:txBody>
-      </p:sp>
-      <p:sp>
-        <p:nvSpPr>
-          <p:cNvPr id="14" name="Rounded Rectangle 13"/>
-          <p:cNvSpPr/>
-          <p:nvPr/>
-        </p:nvSpPr>
-        <p:spPr>
-          <a:xfrm>
-            <a:off x="8046720" y="3840480"/>
-            <a:ext cx="3383280" cy="2103120"/>
-          </a:xfrm>
-          <a:prstGeom prst="roundRect">
-            <a:avLst/>
-          </a:prstGeom>
-          <a:solidFill>
-            <a:srgbClr val="FFFFFF"/>
-          </a:solidFill>
-          <a:ln w="12700">
-            <a:solidFill>
-              <a:srgbClr val="C2A497"/>
-            </a:solidFill>
-          </a:ln>
-        </p:spPr>
-        <p:style>
-          <a:lnRef idx="1">
-            <a:schemeClr val="accent1"/>
-          </a:lnRef>
-          <a:fillRef idx="3">
-            <a:schemeClr val="accent1"/>
-          </a:fillRef>
-          <a:effectRef idx="2">
-            <a:schemeClr val="accent1"/>
-          </a:effectRef>
-          <a:fontRef idx="minor">
-            <a:schemeClr val="lt1"/>
-          </a:fontRef>
-        </p:style>
-        <p:txBody>
-          <a:bodyPr rtlCol="0" anchor="ctr"/>
-          <a:lstStyle/>
-          <a:p>
-            <a:pPr algn="ctr"/>
-          </a:p>
-        </p:txBody>
-      </p:sp>
-      <p:sp>
-        <p:nvSpPr>
-          <p:cNvPr id="15" name="TextBox 14"/>
-          <p:cNvSpPr txBox="1"/>
-          <p:nvPr/>
-        </p:nvSpPr>
-        <p:spPr>
-          <a:xfrm>
-            <a:off x="8148320" y="3916680"/>
-            <a:ext cx="3200400" cy="274320"/>
-          </a:xfrm>
-          <a:prstGeom prst="rect">
-            <a:avLst/>
-          </a:prstGeom>
-          <a:noFill/>
-        </p:spPr>
-        <p:txBody>
-          <a:bodyPr wrap="none">
-            <a:spAutoFit/>
-          </a:bodyPr>
-          <a:lstStyle/>
-          <a:p>
-            <a:pPr algn="ctr">
-              <a:defRPr sz="1200" b="0">
-                <a:solidFill>
-                  <a:srgbClr val="C2A497"/>
-                </a:solidFill>
-                <a:latin typeface="Microsoft YaHei"/>
-              </a:defRPr>
-            </a:pPr>
-            <a:r>
-              <a:t>FFT Difference Map</a:t>
-            </a:r>
-          </a:p>
-        </p:txBody>
-      </p:sp>
-      <p:sp>
-        <p:nvSpPr>
-          <p:cNvPr id="16" name="TextBox 15"/>
-          <p:cNvSpPr txBox="1"/>
-          <p:nvPr/>
-        </p:nvSpPr>
-        <p:spPr>
-          <a:xfrm>
-            <a:off x="731520" y="6309360"/>
-            <a:ext cx="10698480" cy="274320"/>
-          </a:xfrm>
-          <a:prstGeom prst="rect">
-            <a:avLst/>
-          </a:prstGeom>
-          <a:noFill/>
-        </p:spPr>
-        <p:txBody>
-          <a:bodyPr wrap="none">
-            <a:spAutoFit/>
-          </a:bodyPr>
-          <a:lstStyle/>
-          <a:p>
-            <a:pPr algn="ctr">
-              <a:defRPr sz="1200" b="0">
-                <a:solidFill>
-                  <a:srgbClr val="8C8C8C"/>
-                </a:solidFill>
-                <a:latin typeface="Microsoft YaHei"/>
-              </a:defRPr>
-            </a:pPr>
-            <a:r>
-              <a:t>插入 results/freq_detector/fft_spectrum_comparison.png</a:t>
-            </a:r>
-          </a:p>
-        </p:txBody>
-      </p:sp>
+      <p:pic>
+        <p:nvPicPr>
+          <p:cNvPr id="17" name="图片 16" descr="fft_spectrum_comparison"/>
+          <p:cNvPicPr>
+            <a:picLocks noChangeAspect="1"/>
+          </p:cNvPicPr>
+          <p:nvPr/>
+        </p:nvPicPr>
+        <p:blipFill>
+          <a:blip r:embed="rId1"/>
+          <a:stretch>
+            <a:fillRect/>
+          </a:stretch>
+        </p:blipFill>
+        <p:spPr>
+          <a:xfrm>
+            <a:off x="2352675" y="1368425"/>
+            <a:ext cx="7974965" cy="5126990"/>
+          </a:xfrm>
+          <a:prstGeom prst="rect">
+            <a:avLst/>
+          </a:prstGeom>
+        </p:spPr>
+      </p:pic>
     </p:spTree>
   </p:cSld>
   <p:clrMapOvr>
@@ -3940,7 +3421,7 @@
 </file>
 
 <file path=ppt/slides/slide11.xml><?xml version="1.0" encoding="utf-8"?>
-<p:sld xmlns:a="http://schemas.openxmlformats.org/drawingml/2006/main" xmlns:p="http://schemas.openxmlformats.org/presentationml/2006/main" xmlns:r="http://schemas.openxmlformats.org/officeDocument/2006/relationships">
+<p:sld xmlns:a="http://schemas.openxmlformats.org/drawingml/2006/main" xmlns:r="http://schemas.openxmlformats.org/officeDocument/2006/relationships" xmlns:p="http://schemas.openxmlformats.org/presentationml/2006/main">
   <p:cSld>
     <p:bg>
       <p:bgPr>
@@ -3984,7 +3465,7 @@
                 <a:solidFill>
                   <a:srgbClr val="3D3D3D"/>
                 </a:solidFill>
-                <a:latin typeface="Microsoft YaHei"/>
+                <a:latin typeface="微软雅黑" panose="020B0503020204020204" charset="-122"/>
               </a:defRPr>
             </a:pPr>
             <a:r>
@@ -4108,7 +3589,7 @@
                 <a:solidFill>
                   <a:srgbClr val="8C8C8C"/>
                 </a:solidFill>
-                <a:latin typeface="Microsoft YaHei"/>
+                <a:latin typeface="微软雅黑" panose="020B0503020204020204" charset="-122"/>
               </a:defRPr>
             </a:pPr>
             <a:r>
@@ -4144,7 +3625,7 @@
                 <a:solidFill>
                   <a:srgbClr val="7AA884"/>
                 </a:solidFill>
-                <a:latin typeface="Microsoft YaHei"/>
+                <a:latin typeface="微软雅黑" panose="020B0503020204020204" charset="-122"/>
               </a:defRPr>
             </a:pPr>
             <a:r>
@@ -4180,7 +3661,7 @@
                 <a:solidFill>
                   <a:srgbClr val="8C8C8C"/>
                 </a:solidFill>
-                <a:latin typeface="Microsoft YaHei"/>
+                <a:latin typeface="微软雅黑" panose="020B0503020204020204" charset="-122"/>
               </a:defRPr>
             </a:pPr>
             <a:r>
@@ -4261,7 +3742,7 @@
                 <a:solidFill>
                   <a:srgbClr val="8C8C8C"/>
                 </a:solidFill>
-                <a:latin typeface="Microsoft YaHei"/>
+                <a:latin typeface="微软雅黑" panose="020B0503020204020204" charset="-122"/>
               </a:defRPr>
             </a:pPr>
             <a:r>
@@ -4297,7 +3778,7 @@
                 <a:solidFill>
                   <a:srgbClr val="D4847A"/>
                 </a:solidFill>
-                <a:latin typeface="Microsoft YaHei"/>
+                <a:latin typeface="微软雅黑" panose="020B0503020204020204" charset="-122"/>
               </a:defRPr>
             </a:pPr>
             <a:r>
@@ -4333,7 +3814,7 @@
                 <a:solidFill>
                   <a:srgbClr val="8C8C8C"/>
                 </a:solidFill>
-                <a:latin typeface="Microsoft YaHei"/>
+                <a:latin typeface="微软雅黑" panose="020B0503020204020204" charset="-122"/>
               </a:defRPr>
             </a:pPr>
             <a:r>
@@ -4414,7 +3895,7 @@
                 <a:solidFill>
                   <a:srgbClr val="8C8C8C"/>
                 </a:solidFill>
-                <a:latin typeface="Microsoft YaHei"/>
+                <a:latin typeface="微软雅黑" panose="020B0503020204020204" charset="-122"/>
               </a:defRPr>
             </a:pPr>
             <a:r>
@@ -4450,7 +3931,7 @@
                 <a:solidFill>
                   <a:srgbClr val="C2A497"/>
                 </a:solidFill>
-                <a:latin typeface="Microsoft YaHei"/>
+                <a:latin typeface="微软雅黑" panose="020B0503020204020204" charset="-122"/>
               </a:defRPr>
             </a:pPr>
             <a:r>
@@ -4486,7 +3967,7 @@
                 <a:solidFill>
                   <a:srgbClr val="8C8C8C"/>
                 </a:solidFill>
-                <a:latin typeface="Microsoft YaHei"/>
+                <a:latin typeface="微软雅黑" panose="020B0503020204020204" charset="-122"/>
               </a:defRPr>
             </a:pPr>
             <a:r>
@@ -4522,7 +4003,7 @@
                 <a:solidFill>
                   <a:srgbClr val="8C8C8C"/>
                 </a:solidFill>
-                <a:latin typeface="Microsoft YaHei"/>
+                <a:latin typeface="微软雅黑" panose="020B0503020204020204" charset="-122"/>
               </a:defRPr>
             </a:pPr>
             <a:r>
@@ -4558,7 +4039,7 @@
                 <a:solidFill>
                   <a:srgbClr val="3D3D3D"/>
                 </a:solidFill>
-                <a:latin typeface="Microsoft YaHei"/>
+                <a:latin typeface="微软雅黑" panose="020B0503020204020204" charset="-122"/>
               </a:defRPr>
             </a:pPr>
             <a:r>
@@ -4567,6 +4048,30 @@
           </a:p>
         </p:txBody>
       </p:sp>
+      <p:pic>
+        <p:nvPicPr>
+          <p:cNvPr id="18" name="图片 17" descr="roc_curve"/>
+          <p:cNvPicPr>
+            <a:picLocks noChangeAspect="1"/>
+          </p:cNvPicPr>
+          <p:nvPr/>
+        </p:nvPicPr>
+        <p:blipFill>
+          <a:blip r:embed="rId1"/>
+          <a:stretch>
+            <a:fillRect/>
+          </a:stretch>
+        </p:blipFill>
+        <p:spPr>
+          <a:xfrm>
+            <a:off x="6704965" y="52705"/>
+            <a:ext cx="2752090" cy="2064385"/>
+          </a:xfrm>
+          <a:prstGeom prst="rect">
+            <a:avLst/>
+          </a:prstGeom>
+        </p:spPr>
+      </p:pic>
     </p:spTree>
   </p:cSld>
   <p:clrMapOvr>
@@ -4576,7 +4081,7 @@
 </file>
 
 <file path=ppt/slides/slide12.xml><?xml version="1.0" encoding="utf-8"?>
-<p:sld xmlns:a="http://schemas.openxmlformats.org/drawingml/2006/main" xmlns:p="http://schemas.openxmlformats.org/presentationml/2006/main" xmlns:r="http://schemas.openxmlformats.org/officeDocument/2006/relationships">
+<p:sld xmlns:a="http://schemas.openxmlformats.org/drawingml/2006/main" xmlns:r="http://schemas.openxmlformats.org/officeDocument/2006/relationships" xmlns:p="http://schemas.openxmlformats.org/presentationml/2006/main">
   <p:cSld>
     <p:bg>
       <p:bgPr>
@@ -4620,7 +4125,7 @@
                 <a:solidFill>
                   <a:srgbClr val="3D3D3D"/>
                 </a:solidFill>
-                <a:latin typeface="Microsoft YaHei"/>
+                <a:latin typeface="微软雅黑" panose="020B0503020204020204" charset="-122"/>
               </a:defRPr>
             </a:pPr>
             <a:r>
@@ -4709,7 +4214,7 @@
                           <a:solidFill>
                             <a:srgbClr val="FFFFFF"/>
                           </a:solidFill>
-                          <a:latin typeface="Microsoft YaHei"/>
+                          <a:latin typeface="微软雅黑" panose="020B0503020204020204" charset="-122"/>
                         </a:defRPr>
                       </a:pPr>
                       <a:r>
@@ -4733,7 +4238,7 @@
                           <a:solidFill>
                             <a:srgbClr val="FFFFFF"/>
                           </a:solidFill>
-                          <a:latin typeface="Microsoft YaHei"/>
+                          <a:latin typeface="微软雅黑" panose="020B0503020204020204" charset="-122"/>
                         </a:defRPr>
                       </a:pPr>
                       <a:r>
@@ -4757,7 +4262,7 @@
                           <a:solidFill>
                             <a:srgbClr val="FFFFFF"/>
                           </a:solidFill>
-                          <a:latin typeface="Microsoft YaHei"/>
+                          <a:latin typeface="微软雅黑" panose="020B0503020204020204" charset="-122"/>
                         </a:defRPr>
                       </a:pPr>
                       <a:r>
@@ -4781,7 +4286,7 @@
                           <a:solidFill>
                             <a:srgbClr val="FFFFFF"/>
                           </a:solidFill>
-                          <a:latin typeface="Microsoft YaHei"/>
+                          <a:latin typeface="微软雅黑" panose="020B0503020204020204" charset="-122"/>
                         </a:defRPr>
                       </a:pPr>
                       <a:r>
@@ -4805,7 +4310,7 @@
                           <a:solidFill>
                             <a:srgbClr val="FFFFFF"/>
                           </a:solidFill>
-                          <a:latin typeface="Microsoft YaHei"/>
+                          <a:latin typeface="微软雅黑" panose="020B0503020204020204" charset="-122"/>
                         </a:defRPr>
                       </a:pPr>
                       <a:r>
@@ -4829,7 +4334,7 @@
                           <a:solidFill>
                             <a:srgbClr val="FFFFFF"/>
                           </a:solidFill>
-                          <a:latin typeface="Microsoft YaHei"/>
+                          <a:latin typeface="微软雅黑" panose="020B0503020204020204" charset="-122"/>
                         </a:defRPr>
                       </a:pPr>
                       <a:r>
@@ -4855,7 +4360,7 @@
                           <a:solidFill>
                             <a:srgbClr val="8C8C8C"/>
                           </a:solidFill>
-                          <a:latin typeface="Microsoft YaHei"/>
+                          <a:latin typeface="微软雅黑" panose="020B0503020204020204" charset="-122"/>
                         </a:defRPr>
                       </a:pPr>
                       <a:r>
@@ -4875,7 +4380,7 @@
                           <a:solidFill>
                             <a:srgbClr val="8C8C8C"/>
                           </a:solidFill>
-                          <a:latin typeface="Microsoft YaHei"/>
+                          <a:latin typeface="微软雅黑" panose="020B0503020204020204" charset="-122"/>
                         </a:defRPr>
                       </a:pPr>
                       <a:r>
@@ -4895,7 +4400,7 @@
                           <a:solidFill>
                             <a:srgbClr val="8C8C8C"/>
                           </a:solidFill>
-                          <a:latin typeface="Microsoft YaHei"/>
+                          <a:latin typeface="微软雅黑" panose="020B0503020204020204" charset="-122"/>
                         </a:defRPr>
                       </a:pPr>
                       <a:r>
@@ -4915,7 +4420,7 @@
                           <a:solidFill>
                             <a:srgbClr val="8C8C8C"/>
                           </a:solidFill>
-                          <a:latin typeface="Microsoft YaHei"/>
+                          <a:latin typeface="微软雅黑" panose="020B0503020204020204" charset="-122"/>
                         </a:defRPr>
                       </a:pPr>
                       <a:r>
@@ -4935,7 +4440,7 @@
                           <a:solidFill>
                             <a:srgbClr val="8C8C8C"/>
                           </a:solidFill>
-                          <a:latin typeface="Microsoft YaHei"/>
+                          <a:latin typeface="微软雅黑" panose="020B0503020204020204" charset="-122"/>
                         </a:defRPr>
                       </a:pPr>
                       <a:r>
@@ -4955,7 +4460,7 @@
                           <a:solidFill>
                             <a:srgbClr val="8C8C8C"/>
                           </a:solidFill>
-                          <a:latin typeface="Microsoft YaHei"/>
+                          <a:latin typeface="微软雅黑" panose="020B0503020204020204" charset="-122"/>
                         </a:defRPr>
                       </a:pPr>
                       <a:r>
@@ -4977,7 +4482,7 @@
                           <a:solidFill>
                             <a:srgbClr val="3D3D3D"/>
                           </a:solidFill>
-                          <a:latin typeface="Microsoft YaHei"/>
+                          <a:latin typeface="微软雅黑" panose="020B0503020204020204" charset="-122"/>
                         </a:defRPr>
                       </a:pPr>
                       <a:r>
@@ -5001,7 +4506,7 @@
                           <a:solidFill>
                             <a:srgbClr val="3D3D3D"/>
                           </a:solidFill>
-                          <a:latin typeface="Microsoft YaHei"/>
+                          <a:latin typeface="微软雅黑" panose="020B0503020204020204" charset="-122"/>
                         </a:defRPr>
                       </a:pPr>
                       <a:r>
@@ -5025,7 +4530,7 @@
                           <a:solidFill>
                             <a:srgbClr val="3D3D3D"/>
                           </a:solidFill>
-                          <a:latin typeface="Microsoft YaHei"/>
+                          <a:latin typeface="微软雅黑" panose="020B0503020204020204" charset="-122"/>
                         </a:defRPr>
                       </a:pPr>
                       <a:r>
@@ -5049,7 +4554,7 @@
                           <a:solidFill>
                             <a:srgbClr val="3D3D3D"/>
                           </a:solidFill>
-                          <a:latin typeface="Microsoft YaHei"/>
+                          <a:latin typeface="微软雅黑" panose="020B0503020204020204" charset="-122"/>
                         </a:defRPr>
                       </a:pPr>
                       <a:r>
@@ -5073,7 +4578,7 @@
                           <a:solidFill>
                             <a:srgbClr val="3D3D3D"/>
                           </a:solidFill>
-                          <a:latin typeface="Microsoft YaHei"/>
+                          <a:latin typeface="微软雅黑" panose="020B0503020204020204" charset="-122"/>
                         </a:defRPr>
                       </a:pPr>
                       <a:r>
@@ -5097,7 +4602,7 @@
                           <a:solidFill>
                             <a:srgbClr val="3D3D3D"/>
                           </a:solidFill>
-                          <a:latin typeface="Microsoft YaHei"/>
+                          <a:latin typeface="微软雅黑" panose="020B0503020204020204" charset="-122"/>
                         </a:defRPr>
                       </a:pPr>
                       <a:r>
@@ -5123,7 +4628,7 @@
                           <a:solidFill>
                             <a:srgbClr val="8C8C8C"/>
                           </a:solidFill>
-                          <a:latin typeface="Microsoft YaHei"/>
+                          <a:latin typeface="微软雅黑" panose="020B0503020204020204" charset="-122"/>
                         </a:defRPr>
                       </a:pPr>
                       <a:r>
@@ -5143,7 +4648,7 @@
                           <a:solidFill>
                             <a:srgbClr val="8C8C8C"/>
                           </a:solidFill>
-                          <a:latin typeface="Microsoft YaHei"/>
+                          <a:latin typeface="微软雅黑" panose="020B0503020204020204" charset="-122"/>
                         </a:defRPr>
                       </a:pPr>
                       <a:r>
@@ -5163,7 +4668,7 @@
                           <a:solidFill>
                             <a:srgbClr val="8C8C8C"/>
                           </a:solidFill>
-                          <a:latin typeface="Microsoft YaHei"/>
+                          <a:latin typeface="微软雅黑" panose="020B0503020204020204" charset="-122"/>
                         </a:defRPr>
                       </a:pPr>
                       <a:r>
@@ -5183,7 +4688,7 @@
                           <a:solidFill>
                             <a:srgbClr val="8C8C8C"/>
                           </a:solidFill>
-                          <a:latin typeface="Microsoft YaHei"/>
+                          <a:latin typeface="微软雅黑" panose="020B0503020204020204" charset="-122"/>
                         </a:defRPr>
                       </a:pPr>
                       <a:r>
@@ -5203,7 +4708,7 @@
                           <a:solidFill>
                             <a:srgbClr val="8C8C8C"/>
                           </a:solidFill>
-                          <a:latin typeface="Microsoft YaHei"/>
+                          <a:latin typeface="微软雅黑" panose="020B0503020204020204" charset="-122"/>
                         </a:defRPr>
                       </a:pPr>
                       <a:r>
@@ -5223,7 +4728,7 @@
                           <a:solidFill>
                             <a:srgbClr val="8C8C8C"/>
                           </a:solidFill>
-                          <a:latin typeface="Microsoft YaHei"/>
+                          <a:latin typeface="微软雅黑" panose="020B0503020204020204" charset="-122"/>
                         </a:defRPr>
                       </a:pPr>
                       <a:r>
@@ -5245,7 +4750,7 @@
                           <a:solidFill>
                             <a:srgbClr val="8C8C8C"/>
                           </a:solidFill>
-                          <a:latin typeface="Microsoft YaHei"/>
+                          <a:latin typeface="微软雅黑" panose="020B0503020204020204" charset="-122"/>
                         </a:defRPr>
                       </a:pPr>
                       <a:r>
@@ -5265,7 +4770,7 @@
                           <a:solidFill>
                             <a:srgbClr val="8C8C8C"/>
                           </a:solidFill>
-                          <a:latin typeface="Microsoft YaHei"/>
+                          <a:latin typeface="微软雅黑" panose="020B0503020204020204" charset="-122"/>
                         </a:defRPr>
                       </a:pPr>
                       <a:r>
@@ -5285,7 +4790,7 @@
                           <a:solidFill>
                             <a:srgbClr val="8C8C8C"/>
                           </a:solidFill>
-                          <a:latin typeface="Microsoft YaHei"/>
+                          <a:latin typeface="微软雅黑" panose="020B0503020204020204" charset="-122"/>
                         </a:defRPr>
                       </a:pPr>
                       <a:r>
@@ -5305,7 +4810,7 @@
                           <a:solidFill>
                             <a:srgbClr val="8C8C8C"/>
                           </a:solidFill>
-                          <a:latin typeface="Microsoft YaHei"/>
+                          <a:latin typeface="微软雅黑" panose="020B0503020204020204" charset="-122"/>
                         </a:defRPr>
                       </a:pPr>
                       <a:r>
@@ -5325,7 +4830,7 @@
                           <a:solidFill>
                             <a:srgbClr val="8C8C8C"/>
                           </a:solidFill>
-                          <a:latin typeface="Microsoft YaHei"/>
+                          <a:latin typeface="微软雅黑" panose="020B0503020204020204" charset="-122"/>
                         </a:defRPr>
                       </a:pPr>
                       <a:r>
@@ -5345,7 +4850,7 @@
                           <a:solidFill>
                             <a:srgbClr val="8C8C8C"/>
                           </a:solidFill>
-                          <a:latin typeface="Microsoft YaHei"/>
+                          <a:latin typeface="微软雅黑" panose="020B0503020204020204" charset="-122"/>
                         </a:defRPr>
                       </a:pPr>
                       <a:r>
@@ -5367,7 +4872,7 @@
                           <a:solidFill>
                             <a:srgbClr val="8C8C8C"/>
                           </a:solidFill>
-                          <a:latin typeface="Microsoft YaHei"/>
+                          <a:latin typeface="微软雅黑" panose="020B0503020204020204" charset="-122"/>
                         </a:defRPr>
                       </a:pPr>
                       <a:r>
@@ -5387,7 +4892,7 @@
                           <a:solidFill>
                             <a:srgbClr val="8C8C8C"/>
                           </a:solidFill>
-                          <a:latin typeface="Microsoft YaHei"/>
+                          <a:latin typeface="微软雅黑" panose="020B0503020204020204" charset="-122"/>
                         </a:defRPr>
                       </a:pPr>
                       <a:r>
@@ -5407,7 +4912,7 @@
                           <a:solidFill>
                             <a:srgbClr val="8C8C8C"/>
                           </a:solidFill>
-                          <a:latin typeface="Microsoft YaHei"/>
+                          <a:latin typeface="微软雅黑" panose="020B0503020204020204" charset="-122"/>
                         </a:defRPr>
                       </a:pPr>
                       <a:r>
@@ -5427,7 +4932,7 @@
                           <a:solidFill>
                             <a:srgbClr val="8C8C8C"/>
                           </a:solidFill>
-                          <a:latin typeface="Microsoft YaHei"/>
+                          <a:latin typeface="微软雅黑" panose="020B0503020204020204" charset="-122"/>
                         </a:defRPr>
                       </a:pPr>
                       <a:r>
@@ -5447,7 +4952,7 @@
                           <a:solidFill>
                             <a:srgbClr val="8C8C8C"/>
                           </a:solidFill>
-                          <a:latin typeface="Microsoft YaHei"/>
+                          <a:latin typeface="微软雅黑" panose="020B0503020204020204" charset="-122"/>
                         </a:defRPr>
                       </a:pPr>
                       <a:r>
@@ -5467,7 +4972,7 @@
                           <a:solidFill>
                             <a:srgbClr val="8C8C8C"/>
                           </a:solidFill>
-                          <a:latin typeface="Microsoft YaHei"/>
+                          <a:latin typeface="微软雅黑" panose="020B0503020204020204" charset="-122"/>
                         </a:defRPr>
                       </a:pPr>
                       <a:r>
@@ -5489,7 +4994,7 @@
                           <a:solidFill>
                             <a:srgbClr val="3D3D3D"/>
                           </a:solidFill>
-                          <a:latin typeface="Microsoft YaHei"/>
+                          <a:latin typeface="微软雅黑" panose="020B0503020204020204" charset="-122"/>
                         </a:defRPr>
                       </a:pPr>
                       <a:r>
@@ -5513,7 +5018,7 @@
                           <a:solidFill>
                             <a:srgbClr val="3D3D3D"/>
                           </a:solidFill>
-                          <a:latin typeface="Microsoft YaHei"/>
+                          <a:latin typeface="微软雅黑" panose="020B0503020204020204" charset="-122"/>
                         </a:defRPr>
                       </a:pPr>
                       <a:r>
@@ -5537,7 +5042,7 @@
                           <a:solidFill>
                             <a:srgbClr val="3D3D3D"/>
                           </a:solidFill>
-                          <a:latin typeface="Microsoft YaHei"/>
+                          <a:latin typeface="微软雅黑" panose="020B0503020204020204" charset="-122"/>
                         </a:defRPr>
                       </a:pPr>
                       <a:r>
@@ -5561,7 +5066,7 @@
                           <a:solidFill>
                             <a:srgbClr val="3D3D3D"/>
                           </a:solidFill>
-                          <a:latin typeface="Microsoft YaHei"/>
+                          <a:latin typeface="微软雅黑" panose="020B0503020204020204" charset="-122"/>
                         </a:defRPr>
                       </a:pPr>
                       <a:r>
@@ -5585,7 +5090,7 @@
                           <a:solidFill>
                             <a:srgbClr val="3D3D3D"/>
                           </a:solidFill>
-                          <a:latin typeface="Microsoft YaHei"/>
+                          <a:latin typeface="微软雅黑" panose="020B0503020204020204" charset="-122"/>
                         </a:defRPr>
                       </a:pPr>
                       <a:r>
@@ -5609,7 +5114,7 @@
                           <a:solidFill>
                             <a:srgbClr val="3D3D3D"/>
                           </a:solidFill>
-                          <a:latin typeface="Microsoft YaHei"/>
+                          <a:latin typeface="微软雅黑" panose="020B0503020204020204" charset="-122"/>
                         </a:defRPr>
                       </a:pPr>
                       <a:r>
@@ -5635,7 +5140,7 @@
                           <a:solidFill>
                             <a:srgbClr val="8C8C8C"/>
                           </a:solidFill>
-                          <a:latin typeface="Microsoft YaHei"/>
+                          <a:latin typeface="微软雅黑" panose="020B0503020204020204" charset="-122"/>
                         </a:defRPr>
                       </a:pPr>
                       <a:r>
@@ -5655,7 +5160,7 @@
                           <a:solidFill>
                             <a:srgbClr val="8C8C8C"/>
                           </a:solidFill>
-                          <a:latin typeface="Microsoft YaHei"/>
+                          <a:latin typeface="微软雅黑" panose="020B0503020204020204" charset="-122"/>
                         </a:defRPr>
                       </a:pPr>
                       <a:r>
@@ -5675,7 +5180,7 @@
                           <a:solidFill>
                             <a:srgbClr val="8C8C8C"/>
                           </a:solidFill>
-                          <a:latin typeface="Microsoft YaHei"/>
+                          <a:latin typeface="微软雅黑" panose="020B0503020204020204" charset="-122"/>
                         </a:defRPr>
                       </a:pPr>
                       <a:r>
@@ -5695,7 +5200,7 @@
                           <a:solidFill>
                             <a:srgbClr val="8C8C8C"/>
                           </a:solidFill>
-                          <a:latin typeface="Microsoft YaHei"/>
+                          <a:latin typeface="微软雅黑" panose="020B0503020204020204" charset="-122"/>
                         </a:defRPr>
                       </a:pPr>
                       <a:r>
@@ -5715,7 +5220,7 @@
                           <a:solidFill>
                             <a:srgbClr val="8C8C8C"/>
                           </a:solidFill>
-                          <a:latin typeface="Microsoft YaHei"/>
+                          <a:latin typeface="微软雅黑" panose="020B0503020204020204" charset="-122"/>
                         </a:defRPr>
                       </a:pPr>
                       <a:r>
@@ -5735,7 +5240,7 @@
                           <a:solidFill>
                             <a:srgbClr val="8C8C8C"/>
                           </a:solidFill>
-                          <a:latin typeface="Microsoft YaHei"/>
+                          <a:latin typeface="微软雅黑" panose="020B0503020204020204" charset="-122"/>
                         </a:defRPr>
                       </a:pPr>
                       <a:r>
@@ -5757,7 +5262,7 @@
                           <a:solidFill>
                             <a:srgbClr val="8C8C8C"/>
                           </a:solidFill>
-                          <a:latin typeface="Microsoft YaHei"/>
+                          <a:latin typeface="微软雅黑" panose="020B0503020204020204" charset="-122"/>
                         </a:defRPr>
                       </a:pPr>
                       <a:r>
@@ -5777,7 +5282,7 @@
                           <a:solidFill>
                             <a:srgbClr val="8C8C8C"/>
                           </a:solidFill>
-                          <a:latin typeface="Microsoft YaHei"/>
+                          <a:latin typeface="微软雅黑" panose="020B0503020204020204" charset="-122"/>
                         </a:defRPr>
                       </a:pPr>
                       <a:r>
@@ -5797,7 +5302,7 @@
                           <a:solidFill>
                             <a:srgbClr val="8C8C8C"/>
                           </a:solidFill>
-                          <a:latin typeface="Microsoft YaHei"/>
+                          <a:latin typeface="微软雅黑" panose="020B0503020204020204" charset="-122"/>
                         </a:defRPr>
                       </a:pPr>
                       <a:r>
@@ -5817,7 +5322,7 @@
                           <a:solidFill>
                             <a:srgbClr val="8C8C8C"/>
                           </a:solidFill>
-                          <a:latin typeface="Microsoft YaHei"/>
+                          <a:latin typeface="微软雅黑" panose="020B0503020204020204" charset="-122"/>
                         </a:defRPr>
                       </a:pPr>
                       <a:r>
@@ -5837,7 +5342,7 @@
                           <a:solidFill>
                             <a:srgbClr val="8C8C8C"/>
                           </a:solidFill>
-                          <a:latin typeface="Microsoft YaHei"/>
+                          <a:latin typeface="微软雅黑" panose="020B0503020204020204" charset="-122"/>
                         </a:defRPr>
                       </a:pPr>
                       <a:r>
@@ -5857,7 +5362,7 @@
                           <a:solidFill>
                             <a:srgbClr val="8C8C8C"/>
                           </a:solidFill>
-                          <a:latin typeface="Microsoft YaHei"/>
+                          <a:latin typeface="微软雅黑" panose="020B0503020204020204" charset="-122"/>
                         </a:defRPr>
                       </a:pPr>
                       <a:r>
@@ -5879,7 +5384,7 @@
                           <a:solidFill>
                             <a:srgbClr val="8C8C8C"/>
                           </a:solidFill>
-                          <a:latin typeface="Microsoft YaHei"/>
+                          <a:latin typeface="微软雅黑" panose="020B0503020204020204" charset="-122"/>
                         </a:defRPr>
                       </a:pPr>
                       <a:r>
@@ -5899,7 +5404,7 @@
                           <a:solidFill>
                             <a:srgbClr val="8C8C8C"/>
                           </a:solidFill>
-                          <a:latin typeface="Microsoft YaHei"/>
+                          <a:latin typeface="微软雅黑" panose="020B0503020204020204" charset="-122"/>
                         </a:defRPr>
                       </a:pPr>
                       <a:r>
@@ -5919,7 +5424,7 @@
                           <a:solidFill>
                             <a:srgbClr val="8C8C8C"/>
                           </a:solidFill>
-                          <a:latin typeface="Microsoft YaHei"/>
+                          <a:latin typeface="微软雅黑" panose="020B0503020204020204" charset="-122"/>
                         </a:defRPr>
                       </a:pPr>
                       <a:r>
@@ -5939,7 +5444,7 @@
                           <a:solidFill>
                             <a:srgbClr val="8C8C8C"/>
                           </a:solidFill>
-                          <a:latin typeface="Microsoft YaHei"/>
+                          <a:latin typeface="微软雅黑" panose="020B0503020204020204" charset="-122"/>
                         </a:defRPr>
                       </a:pPr>
                       <a:r>
@@ -5959,7 +5464,7 @@
                           <a:solidFill>
                             <a:srgbClr val="8C8C8C"/>
                           </a:solidFill>
-                          <a:latin typeface="Microsoft YaHei"/>
+                          <a:latin typeface="微软雅黑" panose="020B0503020204020204" charset="-122"/>
                         </a:defRPr>
                       </a:pPr>
                       <a:r>
@@ -5979,7 +5484,7 @@
                           <a:solidFill>
                             <a:srgbClr val="8C8C8C"/>
                           </a:solidFill>
-                          <a:latin typeface="Microsoft YaHei"/>
+                          <a:latin typeface="微软雅黑" panose="020B0503020204020204" charset="-122"/>
                         </a:defRPr>
                       </a:pPr>
                       <a:r>
@@ -6001,7 +5506,7 @@
                           <a:solidFill>
                             <a:srgbClr val="8C8C8C"/>
                           </a:solidFill>
-                          <a:latin typeface="Microsoft YaHei"/>
+                          <a:latin typeface="微软雅黑" panose="020B0503020204020204" charset="-122"/>
                         </a:defRPr>
                       </a:pPr>
                       <a:r>
@@ -6021,7 +5526,7 @@
                           <a:solidFill>
                             <a:srgbClr val="8C8C8C"/>
                           </a:solidFill>
-                          <a:latin typeface="Microsoft YaHei"/>
+                          <a:latin typeface="微软雅黑" panose="020B0503020204020204" charset="-122"/>
                         </a:defRPr>
                       </a:pPr>
                       <a:r>
@@ -6041,7 +5546,7 @@
                           <a:solidFill>
                             <a:srgbClr val="8C8C8C"/>
                           </a:solidFill>
-                          <a:latin typeface="Microsoft YaHei"/>
+                          <a:latin typeface="微软雅黑" panose="020B0503020204020204" charset="-122"/>
                         </a:defRPr>
                       </a:pPr>
                       <a:r>
@@ -6061,7 +5566,7 @@
                           <a:solidFill>
                             <a:srgbClr val="8C8C8C"/>
                           </a:solidFill>
-                          <a:latin typeface="Microsoft YaHei"/>
+                          <a:latin typeface="微软雅黑" panose="020B0503020204020204" charset="-122"/>
                         </a:defRPr>
                       </a:pPr>
                       <a:r>
@@ -6081,7 +5586,7 @@
                           <a:solidFill>
                             <a:srgbClr val="8C8C8C"/>
                           </a:solidFill>
-                          <a:latin typeface="Microsoft YaHei"/>
+                          <a:latin typeface="微软雅黑" panose="020B0503020204020204" charset="-122"/>
                         </a:defRPr>
                       </a:pPr>
                       <a:r>
@@ -6101,7 +5606,7 @@
                           <a:solidFill>
                             <a:srgbClr val="8C8C8C"/>
                           </a:solidFill>
-                          <a:latin typeface="Microsoft YaHei"/>
+                          <a:latin typeface="微软雅黑" panose="020B0503020204020204" charset="-122"/>
                         </a:defRPr>
                       </a:pPr>
                       <a:r>
@@ -6125,7 +5630,7 @@
 </file>
 
 <file path=ppt/slides/slide13.xml><?xml version="1.0" encoding="utf-8"?>
-<p:sld xmlns:a="http://schemas.openxmlformats.org/drawingml/2006/main" xmlns:p="http://schemas.openxmlformats.org/presentationml/2006/main" xmlns:r="http://schemas.openxmlformats.org/officeDocument/2006/relationships">
+<p:sld xmlns:a="http://schemas.openxmlformats.org/drawingml/2006/main" xmlns:r="http://schemas.openxmlformats.org/officeDocument/2006/relationships" xmlns:p="http://schemas.openxmlformats.org/presentationml/2006/main">
   <p:cSld>
     <p:bg>
       <p:bgPr>
@@ -6169,7 +5674,7 @@
                 <a:solidFill>
                   <a:srgbClr val="3D3D3D"/>
                 </a:solidFill>
-                <a:latin typeface="Microsoft YaHei"/>
+                <a:latin typeface="微软雅黑" panose="020B0503020204020204" charset="-122"/>
               </a:defRPr>
             </a:pPr>
             <a:r>
@@ -6248,7 +5753,7 @@
                 <a:solidFill>
                   <a:srgbClr val="7AA884"/>
                 </a:solidFill>
-                <a:latin typeface="Microsoft YaHei"/>
+                <a:latin typeface="微软雅黑" panose="020B0503020204020204" charset="-122"/>
               </a:defRPr>
             </a:pPr>
             <a:r>
@@ -6284,7 +5789,7 @@
                 <a:solidFill>
                   <a:srgbClr val="3D3D3D"/>
                 </a:solidFill>
-                <a:latin typeface="Microsoft YaHei"/>
+                <a:latin typeface="微软雅黑" panose="020B0503020204020204" charset="-122"/>
               </a:defRPr>
             </a:pPr>
             <a:r>
@@ -6320,7 +5825,7 @@
                 <a:solidFill>
                   <a:srgbClr val="8C8C8C"/>
                 </a:solidFill>
-                <a:latin typeface="Microsoft YaHei"/>
+                <a:latin typeface="微软雅黑" panose="020B0503020204020204" charset="-122"/>
               </a:defRPr>
             </a:pPr>
             <a:r>
@@ -6356,7 +5861,7 @@
                 <a:solidFill>
                   <a:srgbClr val="C2A497"/>
                 </a:solidFill>
-                <a:latin typeface="Microsoft YaHei"/>
+                <a:latin typeface="微软雅黑" panose="020B0503020204020204" charset="-122"/>
               </a:defRPr>
             </a:pPr>
             <a:r>
@@ -6392,7 +5897,7 @@
                 <a:solidFill>
                   <a:srgbClr val="3D3D3D"/>
                 </a:solidFill>
-                <a:latin typeface="Microsoft YaHei"/>
+                <a:latin typeface="微软雅黑" panose="020B0503020204020204" charset="-122"/>
               </a:defRPr>
             </a:pPr>
             <a:r>
@@ -6428,7 +5933,7 @@
                 <a:solidFill>
                   <a:srgbClr val="8C8C8C"/>
                 </a:solidFill>
-                <a:latin typeface="Microsoft YaHei"/>
+                <a:latin typeface="微软雅黑" panose="020B0503020204020204" charset="-122"/>
               </a:defRPr>
             </a:pPr>
             <a:r>
@@ -6464,7 +5969,7 @@
                 <a:solidFill>
                   <a:srgbClr val="D4847A"/>
                 </a:solidFill>
-                <a:latin typeface="Microsoft YaHei"/>
+                <a:latin typeface="微软雅黑" panose="020B0503020204020204" charset="-122"/>
               </a:defRPr>
             </a:pPr>
             <a:r>
@@ -6500,7 +6005,7 @@
                 <a:solidFill>
                   <a:srgbClr val="3D3D3D"/>
                 </a:solidFill>
-                <a:latin typeface="Microsoft YaHei"/>
+                <a:latin typeface="微软雅黑" panose="020B0503020204020204" charset="-122"/>
               </a:defRPr>
             </a:pPr>
             <a:r>
@@ -6536,7 +6041,7 @@
                 <a:solidFill>
                   <a:srgbClr val="8C8C8C"/>
                 </a:solidFill>
-                <a:latin typeface="Microsoft YaHei"/>
+                <a:latin typeface="微软雅黑" panose="020B0503020204020204" charset="-122"/>
               </a:defRPr>
             </a:pPr>
             <a:r>
@@ -6572,7 +6077,7 @@
                 <a:solidFill>
                   <a:srgbClr val="7AA884"/>
                 </a:solidFill>
-                <a:latin typeface="Microsoft YaHei"/>
+                <a:latin typeface="微软雅黑" panose="020B0503020204020204" charset="-122"/>
               </a:defRPr>
             </a:pPr>
             <a:r>
@@ -6608,7 +6113,7 @@
                 <a:solidFill>
                   <a:srgbClr val="3D3D3D"/>
                 </a:solidFill>
-                <a:latin typeface="Microsoft YaHei"/>
+                <a:latin typeface="微软雅黑" panose="020B0503020204020204" charset="-122"/>
               </a:defRPr>
             </a:pPr>
             <a:r>
@@ -6644,7 +6149,7 @@
                 <a:solidFill>
                   <a:srgbClr val="8C8C8C"/>
                 </a:solidFill>
-                <a:latin typeface="Microsoft YaHei"/>
+                <a:latin typeface="微软雅黑" panose="020B0503020204020204" charset="-122"/>
               </a:defRPr>
             </a:pPr>
             <a:r>
@@ -6662,7 +6167,7 @@
 </file>
 
 <file path=ppt/slides/slide14.xml><?xml version="1.0" encoding="utf-8"?>
-<p:sld xmlns:a="http://schemas.openxmlformats.org/drawingml/2006/main" xmlns:p="http://schemas.openxmlformats.org/presentationml/2006/main" xmlns:r="http://schemas.openxmlformats.org/officeDocument/2006/relationships">
+<p:sld xmlns:a="http://schemas.openxmlformats.org/drawingml/2006/main" xmlns:r="http://schemas.openxmlformats.org/officeDocument/2006/relationships" xmlns:p="http://schemas.openxmlformats.org/presentationml/2006/main">
   <p:cSld>
     <p:bg>
       <p:bgPr>
@@ -6706,7 +6211,7 @@
                 <a:solidFill>
                   <a:srgbClr val="3D3D3D"/>
                 </a:solidFill>
-                <a:latin typeface="Microsoft YaHei"/>
+                <a:latin typeface="微软雅黑" panose="020B0503020204020204" charset="-122"/>
               </a:defRPr>
             </a:pPr>
             <a:r>
@@ -6830,7 +6335,7 @@
                 <a:solidFill>
                   <a:srgbClr val="8C8C8C"/>
                 </a:solidFill>
-                <a:latin typeface="Microsoft YaHei"/>
+                <a:latin typeface="微软雅黑" panose="020B0503020204020204" charset="-122"/>
               </a:defRPr>
             </a:pPr>
             <a:r>
@@ -6866,7 +6371,7 @@
                 <a:solidFill>
                   <a:srgbClr val="C2A497"/>
                 </a:solidFill>
-                <a:latin typeface="Microsoft YaHei"/>
+                <a:latin typeface="微软雅黑" panose="020B0503020204020204" charset="-122"/>
               </a:defRPr>
             </a:pPr>
             <a:r>
@@ -6883,7 +6388,7 @@
         </p:nvSpPr>
         <p:spPr>
           <a:xfrm>
-            <a:off x="2006600" y="4775200"/>
+            <a:off x="2006600" y="4289425"/>
             <a:ext cx="3484880" cy="203200"/>
           </a:xfrm>
           <a:prstGeom prst="rect">
@@ -6902,7 +6407,7 @@
                 <a:solidFill>
                   <a:srgbClr val="8C8C8C"/>
                 </a:solidFill>
-                <a:latin typeface="Microsoft YaHei"/>
+                <a:latin typeface="微软雅黑" panose="020B0503020204020204" charset="-122"/>
               </a:defRPr>
             </a:pPr>
             <a:r>
@@ -6991,7 +6496,7 @@
                 <a:solidFill>
                   <a:srgbClr val="8C8C8C"/>
                 </a:solidFill>
-                <a:latin typeface="Microsoft YaHei"/>
+                <a:latin typeface="微软雅黑" panose="020B0503020204020204" charset="-122"/>
               </a:defRPr>
             </a:pPr>
             <a:r>
@@ -7027,7 +6532,7 @@
                 <a:solidFill>
                   <a:srgbClr val="9B9EC0"/>
                 </a:solidFill>
-                <a:latin typeface="Microsoft YaHei"/>
+                <a:latin typeface="微软雅黑" panose="020B0503020204020204" charset="-122"/>
               </a:defRPr>
             </a:pPr>
             <a:r>
@@ -7044,8 +6549,8 @@
         </p:nvSpPr>
         <p:spPr>
           <a:xfrm>
-            <a:off x="6670040" y="4775200"/>
-            <a:ext cx="3484880" cy="203200"/>
+            <a:off x="7650163" y="4289425"/>
+            <a:ext cx="1524635" cy="368300"/>
           </a:xfrm>
           <a:prstGeom prst="rect">
             <a:avLst/>
@@ -7063,7 +6568,7 @@
                 <a:solidFill>
                   <a:srgbClr val="8C8C8C"/>
                 </a:solidFill>
-                <a:latin typeface="Microsoft YaHei"/>
+                <a:latin typeface="微软雅黑" panose="020B0503020204020204" charset="-122"/>
               </a:defRPr>
             </a:pPr>
             <a:r>
@@ -7072,10 +6577,6 @@
             <a:br/>
             <a:r>
               <a:t>频域检测器 (AUC 0.735)</a:t>
-            </a:r>
-            <a:br/>
-            <a:r>
-              <a:t>Dashboard + PPT制作</a:t>
             </a:r>
           </a:p>
         </p:txBody>
@@ -7089,7 +6590,7 @@
 </file>
 
 <file path=ppt/slides/slide15.xml><?xml version="1.0" encoding="utf-8"?>
-<p:sld xmlns:a="http://schemas.openxmlformats.org/drawingml/2006/main" xmlns:p="http://schemas.openxmlformats.org/presentationml/2006/main" xmlns:r="http://schemas.openxmlformats.org/officeDocument/2006/relationships">
+<p:sld xmlns:a="http://schemas.openxmlformats.org/drawingml/2006/main" xmlns:r="http://schemas.openxmlformats.org/officeDocument/2006/relationships" xmlns:p="http://schemas.openxmlformats.org/presentationml/2006/main">
   <p:cSld>
     <p:bg>
       <p:bgPr>
@@ -7157,8 +6658,8 @@
         </p:nvSpPr>
         <p:spPr>
           <a:xfrm>
-            <a:off x="2743200" y="2834640"/>
-            <a:ext cx="6705295" cy="914400"/>
+            <a:off x="5392268" y="2834640"/>
+            <a:ext cx="1407160" cy="829945"/>
           </a:xfrm>
           <a:prstGeom prst="rect">
             <a:avLst/>
@@ -7176,11 +6677,11 @@
                 <a:solidFill>
                   <a:srgbClr val="3D3D3D"/>
                 </a:solidFill>
-                <a:latin typeface="Microsoft YaHei"/>
-              </a:defRPr>
-            </a:pPr>
-            <a:r>
-              <a:t>感谢聆听</a:t>
+                <a:latin typeface="微软雅黑" panose="020B0503020204020204" charset="-122"/>
+              </a:defRPr>
+            </a:pPr>
+            <a:r>
+              <a:t>感谢</a:t>
             </a:r>
           </a:p>
         </p:txBody>
@@ -7212,7 +6713,7 @@
                 <a:solidFill>
                   <a:srgbClr val="8C8C8C"/>
                 </a:solidFill>
-                <a:latin typeface="Microsoft YaHei"/>
+                <a:latin typeface="微软雅黑" panose="020B0503020204020204" charset="-122"/>
               </a:defRPr>
             </a:pPr>
             <a:r>
@@ -7248,7 +6749,7 @@
                 <a:solidFill>
                   <a:srgbClr val="C2A497"/>
                 </a:solidFill>
-                <a:latin typeface="Microsoft YaHei"/>
+                <a:latin typeface="微软雅黑" panose="020B0503020204020204" charset="-122"/>
               </a:defRPr>
             </a:pPr>
             <a:r>
@@ -7309,7 +6810,7 @@
 </file>
 
 <file path=ppt/slides/slide2.xml><?xml version="1.0" encoding="utf-8"?>
-<p:sld xmlns:a="http://schemas.openxmlformats.org/drawingml/2006/main" xmlns:p="http://schemas.openxmlformats.org/presentationml/2006/main" xmlns:r="http://schemas.openxmlformats.org/officeDocument/2006/relationships">
+<p:sld xmlns:a="http://schemas.openxmlformats.org/drawingml/2006/main" xmlns:r="http://schemas.openxmlformats.org/officeDocument/2006/relationships" xmlns:p="http://schemas.openxmlformats.org/presentationml/2006/main">
   <p:cSld>
     <p:bg>
       <p:bgPr>
@@ -7353,7 +6854,7 @@
                 <a:solidFill>
                   <a:srgbClr val="3D3D3D"/>
                 </a:solidFill>
-                <a:latin typeface="Microsoft YaHei"/>
+                <a:latin typeface="微软雅黑" panose="020B0503020204020204" charset="-122"/>
               </a:defRPr>
             </a:pPr>
             <a:r>
@@ -7435,7 +6936,7 @@
                 <a:solidFill>
                   <a:srgbClr val="3D3D3D"/>
                 </a:solidFill>
-                <a:latin typeface="Microsoft YaHei"/>
+                <a:latin typeface="微软雅黑" panose="020B0503020204020204" charset="-122"/>
               </a:defRPr>
             </a:pPr>
             <a:r>
@@ -7451,7 +6952,7 @@
                 <a:solidFill>
                   <a:srgbClr val="8C8C8C"/>
                 </a:solidFill>
-                <a:latin typeface="Microsoft YaHei"/>
+                <a:latin typeface="微软雅黑" panose="020B0503020204020204" charset="-122"/>
               </a:defRPr>
             </a:pPr>
             <a:r>
@@ -7467,7 +6968,7 @@
                 <a:solidFill>
                   <a:srgbClr val="D4847A"/>
                 </a:solidFill>
-                <a:latin typeface="Microsoft YaHei"/>
+                <a:latin typeface="微软雅黑" panose="020B0503020204020204" charset="-122"/>
               </a:defRPr>
             </a:pPr>
             <a:r>
@@ -7483,7 +6984,7 @@
                 <a:solidFill>
                   <a:srgbClr val="8C8C8C"/>
                 </a:solidFill>
-                <a:latin typeface="Microsoft YaHei"/>
+                <a:latin typeface="微软雅黑" panose="020B0503020204020204" charset="-122"/>
               </a:defRPr>
             </a:pPr>
           </a:p>
@@ -7496,7 +6997,7 @@
                 <a:solidFill>
                   <a:srgbClr val="8C8C8C"/>
                 </a:solidFill>
-                <a:latin typeface="Microsoft YaHei"/>
+                <a:latin typeface="微软雅黑" panose="020B0503020204020204" charset="-122"/>
               </a:defRPr>
             </a:pPr>
             <a:r>
@@ -7512,7 +7013,7 @@
                 <a:solidFill>
                   <a:srgbClr val="D4847A"/>
                 </a:solidFill>
-                <a:latin typeface="Microsoft YaHei"/>
+                <a:latin typeface="微软雅黑" panose="020B0503020204020204" charset="-122"/>
               </a:defRPr>
             </a:pPr>
             <a:r>
@@ -7593,7 +7094,7 @@
                 <a:solidFill>
                   <a:srgbClr val="8C8C8C"/>
                 </a:solidFill>
-                <a:latin typeface="Microsoft YaHei"/>
+                <a:latin typeface="微软雅黑" panose="020B0503020204020204" charset="-122"/>
               </a:defRPr>
             </a:pPr>
             <a:r>
@@ -7629,7 +7130,7 @@
                 <a:solidFill>
                   <a:srgbClr val="D4847A"/>
                 </a:solidFill>
-                <a:latin typeface="Microsoft YaHei"/>
+                <a:latin typeface="微软雅黑" panose="020B0503020204020204" charset="-122"/>
               </a:defRPr>
             </a:pPr>
             <a:r>
@@ -7665,7 +7166,7 @@
                 <a:solidFill>
                   <a:srgbClr val="8C8C8C"/>
                 </a:solidFill>
-                <a:latin typeface="Microsoft YaHei"/>
+                <a:latin typeface="微软雅黑" panose="020B0503020204020204" charset="-122"/>
               </a:defRPr>
             </a:pPr>
             <a:r>
@@ -7746,7 +7247,7 @@
                 <a:solidFill>
                   <a:srgbClr val="8C8C8C"/>
                 </a:solidFill>
-                <a:latin typeface="Microsoft YaHei"/>
+                <a:latin typeface="微软雅黑" panose="020B0503020204020204" charset="-122"/>
               </a:defRPr>
             </a:pPr>
             <a:r>
@@ -7782,7 +7283,7 @@
                 <a:solidFill>
                   <a:srgbClr val="D4847A"/>
                 </a:solidFill>
-                <a:latin typeface="Microsoft YaHei"/>
+                <a:latin typeface="微软雅黑" panose="020B0503020204020204" charset="-122"/>
               </a:defRPr>
             </a:pPr>
             <a:r>
@@ -7818,7 +7319,7 @@
                 <a:solidFill>
                   <a:srgbClr val="8C8C8C"/>
                 </a:solidFill>
-                <a:latin typeface="Microsoft YaHei"/>
+                <a:latin typeface="微软雅黑" panose="020B0503020204020204" charset="-122"/>
               </a:defRPr>
             </a:pPr>
             <a:r>
@@ -7899,7 +7400,7 @@
                 <a:solidFill>
                   <a:srgbClr val="8C8C8C"/>
                 </a:solidFill>
-                <a:latin typeface="Microsoft YaHei"/>
+                <a:latin typeface="微软雅黑" panose="020B0503020204020204" charset="-122"/>
               </a:defRPr>
             </a:pPr>
             <a:r>
@@ -7935,7 +7436,7 @@
                 <a:solidFill>
                   <a:srgbClr val="C2A497"/>
                 </a:solidFill>
-                <a:latin typeface="Microsoft YaHei"/>
+                <a:latin typeface="微软雅黑" panose="020B0503020204020204" charset="-122"/>
               </a:defRPr>
             </a:pPr>
             <a:r>
@@ -7971,7 +7472,7 @@
                 <a:solidFill>
                   <a:srgbClr val="8C8C8C"/>
                 </a:solidFill>
-                <a:latin typeface="Microsoft YaHei"/>
+                <a:latin typeface="微软雅黑" panose="020B0503020204020204" charset="-122"/>
               </a:defRPr>
             </a:pPr>
             <a:r>
@@ -8007,7 +7508,7 @@
                 <a:solidFill>
                   <a:srgbClr val="C2A497"/>
                 </a:solidFill>
-                <a:latin typeface="Microsoft YaHei"/>
+                <a:latin typeface="微软雅黑" panose="020B0503020204020204" charset="-122"/>
               </a:defRPr>
             </a:pPr>
             <a:r>
@@ -8025,7 +7526,7 @@
 </file>
 
 <file path=ppt/slides/slide3.xml><?xml version="1.0" encoding="utf-8"?>
-<p:sld xmlns:a="http://schemas.openxmlformats.org/drawingml/2006/main" xmlns:p="http://schemas.openxmlformats.org/presentationml/2006/main" xmlns:r="http://schemas.openxmlformats.org/officeDocument/2006/relationships">
+<p:sld xmlns:a="http://schemas.openxmlformats.org/drawingml/2006/main" xmlns:r="http://schemas.openxmlformats.org/officeDocument/2006/relationships" xmlns:p="http://schemas.openxmlformats.org/presentationml/2006/main">
   <p:cSld>
     <p:bg>
       <p:bgPr>
@@ -8069,24 +7570,60 @@
                 <a:solidFill>
                   <a:srgbClr val="3D3D3D"/>
                 </a:solidFill>
-                <a:latin typeface="Microsoft YaHei"/>
-              </a:defRPr>
-            </a:pPr>
-            <a:r>
-              <a:t>WaNet: 基于图像形变的后门攻击 (ICLR 2021)</a:t>
-            </a:r>
-          </a:p>
-        </p:txBody>
-      </p:sp>
-      <p:sp>
-        <p:nvSpPr>
-          <p:cNvPr id="3" name="Rectangle 2"/>
+                <a:latin typeface="微软雅黑" panose="020B0503020204020204" charset="-122"/>
+              </a:defRPr>
+            </a:pPr>
+            <a:r>
+              <a:t>WaNet: 基于图像形变的后门攻击</a:t>
+            </a:r>
+          </a:p>
+        </p:txBody>
+      </p:sp>
+      <p:sp>
+        <p:nvSpPr>
+          <p:cNvPr id="3" name="TextBox 2"/>
+          <p:cNvSpPr txBox="1"/>
+          <p:nvPr/>
+        </p:nvSpPr>
+        <p:spPr>
+          <a:xfrm>
+            <a:off x="731520" y="914400"/>
+            <a:ext cx="4572000" cy="274320"/>
+          </a:xfrm>
+          <a:prstGeom prst="rect">
+            <a:avLst/>
+          </a:prstGeom>
+          <a:noFill/>
+        </p:spPr>
+        <p:txBody>
+          <a:bodyPr wrap="none">
+            <a:spAutoFit/>
+          </a:bodyPr>
+          <a:lstStyle/>
+          <a:p>
+            <a:pPr algn="l">
+              <a:defRPr sz="1400" b="0">
+                <a:solidFill>
+                  <a:srgbClr val="8C8C8C"/>
+                </a:solidFill>
+                <a:latin typeface="微软雅黑" panose="020B0503020204020204" charset="-122"/>
+              </a:defRPr>
+            </a:pPr>
+            <a:r>
+              <a:t>Nguyen &amp; Tran, ICLR 2021</a:t>
+            </a:r>
+          </a:p>
+        </p:txBody>
+      </p:sp>
+      <p:sp>
+        <p:nvSpPr>
+          <p:cNvPr id="4" name="Rectangle 3"/>
           <p:cNvSpPr/>
           <p:nvPr/>
         </p:nvSpPr>
         <p:spPr>
           <a:xfrm>
-            <a:off x="731520" y="1005840"/>
+            <a:off x="731520" y="1280160"/>
             <a:ext cx="1371600" cy="12700"/>
           </a:xfrm>
           <a:prstGeom prst="rect">
@@ -8123,13 +7660,13 @@
       </p:sp>
       <p:sp>
         <p:nvSpPr>
-          <p:cNvPr id="4" name="TextBox 3"/>
-          <p:cNvSpPr txBox="1"/>
-          <p:nvPr/>
-        </p:nvSpPr>
-        <p:spPr>
-          <a:xfrm>
-            <a:off x="731520" y="1371600"/>
+          <p:cNvPr id="5" name="TextBox 4"/>
+          <p:cNvSpPr txBox="1"/>
+          <p:nvPr/>
+        </p:nvSpPr>
+        <p:spPr>
+          <a:xfrm>
+            <a:off x="731520" y="1645920"/>
             <a:ext cx="5303520" cy="2743200"/>
           </a:xfrm>
           <a:prstGeom prst="rect">
@@ -8151,7 +7688,7 @@
                 <a:solidFill>
                   <a:srgbClr val="C2A497"/>
                 </a:solidFill>
-                <a:latin typeface="Microsoft YaHei"/>
+                <a:latin typeface="微软雅黑" panose="020B0503020204020204" charset="-122"/>
               </a:defRPr>
             </a:pPr>
             <a:r>
@@ -8167,7 +7704,7 @@
                 <a:solidFill>
                   <a:srgbClr val="3D3D3D"/>
                 </a:solidFill>
-                <a:latin typeface="Microsoft YaHei"/>
+                <a:latin typeface="微软雅黑" panose="020B0503020204020204" charset="-122"/>
               </a:defRPr>
             </a:pPr>
             <a:r>
@@ -8183,7 +7720,7 @@
                 <a:solidFill>
                   <a:srgbClr val="8C8C8C"/>
                 </a:solidFill>
-                <a:latin typeface="Microsoft YaHei"/>
+                <a:latin typeface="微软雅黑" panose="020B0503020204020204" charset="-122"/>
               </a:defRPr>
             </a:pPr>
           </a:p>
@@ -8196,7 +7733,7 @@
                 <a:solidFill>
                   <a:srgbClr val="C2A497"/>
                 </a:solidFill>
-                <a:latin typeface="Microsoft YaHei"/>
+                <a:latin typeface="微软雅黑" panose="020B0503020204020204" charset="-122"/>
               </a:defRPr>
             </a:pPr>
             <a:r>
@@ -8212,7 +7749,7 @@
                 <a:solidFill>
                   <a:srgbClr val="8C8C8C"/>
                 </a:solidFill>
-                <a:latin typeface="Microsoft YaHei"/>
+                <a:latin typeface="微软雅黑" panose="020B0503020204020204" charset="-122"/>
               </a:defRPr>
             </a:pPr>
             <a:r>
@@ -8228,7 +7765,7 @@
                 <a:solidFill>
                   <a:srgbClr val="8C8C8C"/>
                 </a:solidFill>
-                <a:latin typeface="Microsoft YaHei"/>
+                <a:latin typeface="微软雅黑" panose="020B0503020204020204" charset="-122"/>
               </a:defRPr>
             </a:pPr>
             <a:r>
@@ -8244,7 +7781,7 @@
                 <a:solidFill>
                   <a:srgbClr val="8C8C8C"/>
                 </a:solidFill>
-                <a:latin typeface="Microsoft YaHei"/>
+                <a:latin typeface="微软雅黑" panose="020B0503020204020204" charset="-122"/>
               </a:defRPr>
             </a:pPr>
             <a:r>
@@ -8260,7 +7797,7 @@
                 <a:solidFill>
                   <a:srgbClr val="3D3D3D"/>
                 </a:solidFill>
-                <a:latin typeface="Microsoft YaHei"/>
+                <a:latin typeface="微软雅黑" panose="020B0503020204020204" charset="-122"/>
               </a:defRPr>
             </a:pPr>
             <a:r>
@@ -8276,7 +7813,7 @@
                 <a:solidFill>
                   <a:srgbClr val="8C8C8C"/>
                 </a:solidFill>
-                <a:latin typeface="Microsoft YaHei"/>
+                <a:latin typeface="微软雅黑" panose="020B0503020204020204" charset="-122"/>
               </a:defRPr>
             </a:pPr>
           </a:p>
@@ -8289,7 +7826,7 @@
                 <a:solidFill>
                   <a:srgbClr val="C2A497"/>
                 </a:solidFill>
-                <a:latin typeface="Microsoft YaHei"/>
+                <a:latin typeface="微软雅黑" panose="020B0503020204020204" charset="-122"/>
               </a:defRPr>
             </a:pPr>
             <a:r>
@@ -8305,7 +7842,7 @@
                 <a:solidFill>
                   <a:srgbClr val="3D3D3D"/>
                 </a:solidFill>
-                <a:latin typeface="Microsoft YaHei"/>
+                <a:latin typeface="微软雅黑" panose="020B0503020204020204" charset="-122"/>
               </a:defRPr>
             </a:pPr>
             <a:r>
@@ -8316,7 +7853,7 @@
       </p:sp>
       <p:sp>
         <p:nvSpPr>
-          <p:cNvPr id="5" name="Rounded Rectangle 4"/>
+          <p:cNvPr id="6" name="Rounded Rectangle 5"/>
           <p:cNvSpPr/>
           <p:nvPr/>
         </p:nvSpPr>
@@ -8361,7 +7898,7 @@
       </p:sp>
       <p:sp>
         <p:nvSpPr>
-          <p:cNvPr id="6" name="TextBox 5"/>
+          <p:cNvPr id="7" name="TextBox 6"/>
           <p:cNvSpPr txBox="1"/>
           <p:nvPr/>
         </p:nvSpPr>
@@ -8386,7 +7923,7 @@
                 <a:solidFill>
                   <a:srgbClr val="8C8C8C"/>
                 </a:solidFill>
-                <a:latin typeface="Microsoft YaHei"/>
+                <a:latin typeface="微软雅黑" panose="020B0503020204020204" charset="-122"/>
               </a:defRPr>
             </a:pPr>
             <a:r>
@@ -8397,7 +7934,7 @@
       </p:sp>
       <p:sp>
         <p:nvSpPr>
-          <p:cNvPr id="7" name="TextBox 6"/>
+          <p:cNvPr id="8" name="TextBox 7"/>
           <p:cNvSpPr txBox="1"/>
           <p:nvPr/>
         </p:nvSpPr>
@@ -8422,7 +7959,7 @@
                 <a:solidFill>
                   <a:srgbClr val="7AA884"/>
                 </a:solidFill>
-                <a:latin typeface="Microsoft YaHei"/>
+                <a:latin typeface="微软雅黑" panose="020B0503020204020204" charset="-122"/>
               </a:defRPr>
             </a:pPr>
             <a:r>
@@ -8433,7 +7970,7 @@
       </p:sp>
       <p:sp>
         <p:nvSpPr>
-          <p:cNvPr id="8" name="TextBox 7"/>
+          <p:cNvPr id="9" name="TextBox 8"/>
           <p:cNvSpPr txBox="1"/>
           <p:nvPr/>
         </p:nvSpPr>
@@ -8458,7 +7995,7 @@
                 <a:solidFill>
                   <a:srgbClr val="8C8C8C"/>
                 </a:solidFill>
-                <a:latin typeface="Microsoft YaHei"/>
+                <a:latin typeface="微软雅黑" panose="020B0503020204020204" charset="-122"/>
               </a:defRPr>
             </a:pPr>
             <a:r>
@@ -8469,7 +8006,7 @@
       </p:sp>
       <p:sp>
         <p:nvSpPr>
-          <p:cNvPr id="9" name="Rounded Rectangle 8"/>
+          <p:cNvPr id="10" name="Rounded Rectangle 9"/>
           <p:cNvSpPr/>
           <p:nvPr/>
         </p:nvSpPr>
@@ -8514,7 +8051,7 @@
       </p:sp>
       <p:sp>
         <p:nvSpPr>
-          <p:cNvPr id="10" name="TextBox 9"/>
+          <p:cNvPr id="11" name="TextBox 10"/>
           <p:cNvSpPr txBox="1"/>
           <p:nvPr/>
         </p:nvSpPr>
@@ -8539,7 +8076,7 @@
                 <a:solidFill>
                   <a:srgbClr val="8C8C8C"/>
                 </a:solidFill>
-                <a:latin typeface="Microsoft YaHei"/>
+                <a:latin typeface="微软雅黑" panose="020B0503020204020204" charset="-122"/>
               </a:defRPr>
             </a:pPr>
             <a:r>
@@ -8550,7 +8087,7 @@
       </p:sp>
       <p:sp>
         <p:nvSpPr>
-          <p:cNvPr id="11" name="TextBox 10"/>
+          <p:cNvPr id="12" name="TextBox 11"/>
           <p:cNvSpPr txBox="1"/>
           <p:nvPr/>
         </p:nvSpPr>
@@ -8575,7 +8112,7 @@
                 <a:solidFill>
                   <a:srgbClr val="D4847A"/>
                 </a:solidFill>
-                <a:latin typeface="Microsoft YaHei"/>
+                <a:latin typeface="微软雅黑" panose="020B0503020204020204" charset="-122"/>
               </a:defRPr>
             </a:pPr>
             <a:r>
@@ -8586,7 +8123,7 @@
       </p:sp>
       <p:sp>
         <p:nvSpPr>
-          <p:cNvPr id="12" name="TextBox 11"/>
+          <p:cNvPr id="13" name="TextBox 12"/>
           <p:cNvSpPr txBox="1"/>
           <p:nvPr/>
         </p:nvSpPr>
@@ -8611,7 +8148,7 @@
                 <a:solidFill>
                   <a:srgbClr val="8C8C8C"/>
                 </a:solidFill>
-                <a:latin typeface="Microsoft YaHei"/>
+                <a:latin typeface="微软雅黑" panose="020B0503020204020204" charset="-122"/>
               </a:defRPr>
             </a:pPr>
             <a:r>
@@ -8620,6 +8157,30 @@
           </a:p>
         </p:txBody>
       </p:sp>
+      <p:pic>
+        <p:nvPicPr>
+          <p:cNvPr id="14" name="图片 13"/>
+          <p:cNvPicPr>
+            <a:picLocks noChangeAspect="1"/>
+          </p:cNvPicPr>
+          <p:nvPr/>
+        </p:nvPicPr>
+        <p:blipFill>
+          <a:blip r:embed="rId1"/>
+          <a:stretch>
+            <a:fillRect/>
+          </a:stretch>
+        </p:blipFill>
+        <p:spPr>
+          <a:xfrm>
+            <a:off x="2953385" y="1188720"/>
+            <a:ext cx="5429250" cy="2066925"/>
+          </a:xfrm>
+          <a:prstGeom prst="rect">
+            <a:avLst/>
+          </a:prstGeom>
+        </p:spPr>
+      </p:pic>
     </p:spTree>
   </p:cSld>
   <p:clrMapOvr>
@@ -8629,7 +8190,7 @@
 </file>
 
 <file path=ppt/slides/slide4.xml><?xml version="1.0" encoding="utf-8"?>
-<p:sld xmlns:a="http://schemas.openxmlformats.org/drawingml/2006/main" xmlns:p="http://schemas.openxmlformats.org/presentationml/2006/main" xmlns:r="http://schemas.openxmlformats.org/officeDocument/2006/relationships">
+<p:sld xmlns:a="http://schemas.openxmlformats.org/drawingml/2006/main" xmlns:r="http://schemas.openxmlformats.org/officeDocument/2006/relationships" xmlns:p="http://schemas.openxmlformats.org/presentationml/2006/main">
   <p:cSld>
     <p:bg>
       <p:bgPr>
@@ -8673,7 +8234,7 @@
                 <a:solidFill>
                   <a:srgbClr val="3D3D3D"/>
                 </a:solidFill>
-                <a:latin typeface="Microsoft YaHei"/>
+                <a:latin typeface="微软雅黑" panose="020B0503020204020204" charset="-122"/>
               </a:defRPr>
             </a:pPr>
             <a:r>
@@ -8729,7 +8290,11 @@
         <p:nvSpPr>
           <p:cNvPr id="4" name="Rounded Rectangle 3"/>
           <p:cNvSpPr/>
-          <p:nvPr/>
+          <p:nvPr>
+            <p:custDataLst>
+              <p:tags r:id="rId1"/>
+            </p:custDataLst>
+          </p:nvPr>
         </p:nvSpPr>
         <p:spPr>
           <a:xfrm>
@@ -8774,12 +8339,16 @@
         <p:nvSpPr>
           <p:cNvPr id="5" name="TextBox 4"/>
           <p:cNvSpPr txBox="1"/>
-          <p:nvPr/>
-        </p:nvSpPr>
-        <p:spPr>
-          <a:xfrm>
-            <a:off x="909320" y="1772920"/>
-            <a:ext cx="2844800" cy="254000"/>
+          <p:nvPr>
+            <p:custDataLst>
+              <p:tags r:id="rId2"/>
+            </p:custDataLst>
+          </p:nvPr>
+        </p:nvSpPr>
+        <p:spPr>
+          <a:xfrm>
+            <a:off x="1853565" y="1772920"/>
+            <a:ext cx="956310" cy="260350"/>
           </a:xfrm>
           <a:prstGeom prst="rect">
             <a:avLst/>
@@ -8797,11 +8366,11 @@
                 <a:solidFill>
                   <a:srgbClr val="8C8C8C"/>
                 </a:solidFill>
-                <a:latin typeface="Microsoft YaHei"/>
-              </a:defRPr>
-            </a:pPr>
-            <a:r>
-              <a:t>阶段一: 复现 (周争妍)</a:t>
+                <a:latin typeface="微软雅黑" panose="020B0503020204020204" charset="-122"/>
+              </a:defRPr>
+            </a:pPr>
+            <a:r>
+              <a:t>阶段一: 复现</a:t>
             </a:r>
           </a:p>
         </p:txBody>
@@ -8810,7 +8379,11 @@
         <p:nvSpPr>
           <p:cNvPr id="6" name="TextBox 5"/>
           <p:cNvSpPr txBox="1"/>
-          <p:nvPr/>
+          <p:nvPr>
+            <p:custDataLst>
+              <p:tags r:id="rId3"/>
+            </p:custDataLst>
+          </p:nvPr>
         </p:nvSpPr>
         <p:spPr>
           <a:xfrm>
@@ -8833,7 +8406,7 @@
                 <a:solidFill>
                   <a:srgbClr val="8C8C8C"/>
                 </a:solidFill>
-                <a:latin typeface="Microsoft YaHei"/>
+                <a:latin typeface="微软雅黑" panose="020B0503020204020204" charset="-122"/>
               </a:defRPr>
             </a:pPr>
             <a:r>
@@ -8846,7 +8419,11 @@
         <p:nvSpPr>
           <p:cNvPr id="7" name="TextBox 6"/>
           <p:cNvSpPr txBox="1"/>
-          <p:nvPr/>
+          <p:nvPr>
+            <p:custDataLst>
+              <p:tags r:id="rId4"/>
+            </p:custDataLst>
+          </p:nvPr>
         </p:nvSpPr>
         <p:spPr>
           <a:xfrm>
@@ -8869,7 +8446,7 @@
                 <a:solidFill>
                   <a:srgbClr val="8C8C8C"/>
                 </a:solidFill>
-                <a:latin typeface="Microsoft YaHei"/>
+                <a:latin typeface="微软雅黑" panose="020B0503020204020204" charset="-122"/>
               </a:defRPr>
             </a:pPr>
             <a:r>
@@ -8882,7 +8459,11 @@
         <p:nvSpPr>
           <p:cNvPr id="8" name="TextBox 7"/>
           <p:cNvSpPr txBox="1"/>
-          <p:nvPr/>
+          <p:nvPr>
+            <p:custDataLst>
+              <p:tags r:id="rId5"/>
+            </p:custDataLst>
+          </p:nvPr>
         </p:nvSpPr>
         <p:spPr>
           <a:xfrm>
@@ -8905,7 +8486,7 @@
                 <a:solidFill>
                   <a:srgbClr val="8C8C8C"/>
                 </a:solidFill>
-                <a:latin typeface="Microsoft YaHei"/>
+                <a:latin typeface="微软雅黑" panose="020B0503020204020204" charset="-122"/>
               </a:defRPr>
             </a:pPr>
             <a:r>
@@ -8922,7 +8503,11 @@
         <p:nvSpPr>
           <p:cNvPr id="9" name="Rounded Rectangle 8"/>
           <p:cNvSpPr/>
-          <p:nvPr/>
+          <p:nvPr>
+            <p:custDataLst>
+              <p:tags r:id="rId6"/>
+            </p:custDataLst>
+          </p:nvPr>
         </p:nvSpPr>
         <p:spPr>
           <a:xfrm>
@@ -8967,12 +8552,16 @@
         <p:nvSpPr>
           <p:cNvPr id="10" name="TextBox 9"/>
           <p:cNvSpPr txBox="1"/>
-          <p:nvPr/>
-        </p:nvSpPr>
-        <p:spPr>
-          <a:xfrm>
-            <a:off x="4658360" y="1772920"/>
-            <a:ext cx="2844800" cy="254000"/>
+          <p:nvPr>
+            <p:custDataLst>
+              <p:tags r:id="rId7"/>
+            </p:custDataLst>
+          </p:nvPr>
+        </p:nvSpPr>
+        <p:spPr>
+          <a:xfrm>
+            <a:off x="5602605" y="1772920"/>
+            <a:ext cx="956310" cy="260350"/>
           </a:xfrm>
           <a:prstGeom prst="rect">
             <a:avLst/>
@@ -8990,11 +8579,11 @@
                 <a:solidFill>
                   <a:srgbClr val="8C8C8C"/>
                 </a:solidFill>
-                <a:latin typeface="Microsoft YaHei"/>
-              </a:defRPr>
-            </a:pPr>
-            <a:r>
-              <a:t>阶段二: 消融 (蒋竺君)</a:t>
+                <a:latin typeface="微软雅黑" panose="020B0503020204020204" charset="-122"/>
+              </a:defRPr>
+            </a:pPr>
+            <a:r>
+              <a:t>阶段二: 消融</a:t>
             </a:r>
           </a:p>
         </p:txBody>
@@ -9003,7 +8592,11 @@
         <p:nvSpPr>
           <p:cNvPr id="11" name="TextBox 10"/>
           <p:cNvSpPr txBox="1"/>
-          <p:nvPr/>
+          <p:nvPr>
+            <p:custDataLst>
+              <p:tags r:id="rId8"/>
+            </p:custDataLst>
+          </p:nvPr>
         </p:nvSpPr>
         <p:spPr>
           <a:xfrm>
@@ -9026,7 +8619,7 @@
                 <a:solidFill>
                   <a:srgbClr val="9B9EC0"/>
                 </a:solidFill>
-                <a:latin typeface="Microsoft YaHei"/>
+                <a:latin typeface="微软雅黑" panose="020B0503020204020204" charset="-122"/>
               </a:defRPr>
             </a:pPr>
             <a:r>
@@ -9039,7 +8632,11 @@
         <p:nvSpPr>
           <p:cNvPr id="12" name="TextBox 11"/>
           <p:cNvSpPr txBox="1"/>
-          <p:nvPr/>
+          <p:nvPr>
+            <p:custDataLst>
+              <p:tags r:id="rId9"/>
+            </p:custDataLst>
+          </p:nvPr>
         </p:nvSpPr>
         <p:spPr>
           <a:xfrm>
@@ -9062,7 +8659,7 @@
                 <a:solidFill>
                   <a:srgbClr val="8C8C8C"/>
                 </a:solidFill>
-                <a:latin typeface="Microsoft YaHei"/>
+                <a:latin typeface="微软雅黑" panose="020B0503020204020204" charset="-122"/>
               </a:defRPr>
             </a:pPr>
             <a:r>
@@ -9075,7 +8672,11 @@
         <p:nvSpPr>
           <p:cNvPr id="13" name="TextBox 12"/>
           <p:cNvSpPr txBox="1"/>
-          <p:nvPr/>
+          <p:nvPr>
+            <p:custDataLst>
+              <p:tags r:id="rId10"/>
+            </p:custDataLst>
+          </p:nvPr>
         </p:nvSpPr>
         <p:spPr>
           <a:xfrm>
@@ -9098,7 +8699,7 @@
                 <a:solidFill>
                   <a:srgbClr val="8C8C8C"/>
                 </a:solidFill>
-                <a:latin typeface="Microsoft YaHei"/>
+                <a:latin typeface="微软雅黑" panose="020B0503020204020204" charset="-122"/>
               </a:defRPr>
             </a:pPr>
             <a:r>
@@ -9115,7 +8716,11 @@
         <p:nvSpPr>
           <p:cNvPr id="14" name="Rounded Rectangle 13"/>
           <p:cNvSpPr/>
-          <p:nvPr/>
+          <p:nvPr>
+            <p:custDataLst>
+              <p:tags r:id="rId11"/>
+            </p:custDataLst>
+          </p:nvPr>
         </p:nvSpPr>
         <p:spPr>
           <a:xfrm>
@@ -9160,12 +8765,16 @@
         <p:nvSpPr>
           <p:cNvPr id="15" name="TextBox 14"/>
           <p:cNvSpPr txBox="1"/>
-          <p:nvPr/>
-        </p:nvSpPr>
-        <p:spPr>
-          <a:xfrm>
-            <a:off x="8407400" y="1772920"/>
-            <a:ext cx="2844800" cy="254000"/>
+          <p:nvPr>
+            <p:custDataLst>
+              <p:tags r:id="rId12"/>
+            </p:custDataLst>
+          </p:nvPr>
+        </p:nvSpPr>
+        <p:spPr>
+          <a:xfrm>
+            <a:off x="9351645" y="1772920"/>
+            <a:ext cx="956310" cy="260350"/>
           </a:xfrm>
           <a:prstGeom prst="rect">
             <a:avLst/>
@@ -9183,11 +8792,11 @@
                 <a:solidFill>
                   <a:srgbClr val="8C8C8C"/>
                 </a:solidFill>
-                <a:latin typeface="Microsoft YaHei"/>
-              </a:defRPr>
-            </a:pPr>
-            <a:r>
-              <a:t>阶段三: 创新 (蒋竺君)</a:t>
+                <a:latin typeface="微软雅黑" panose="020B0503020204020204" charset="-122"/>
+              </a:defRPr>
+            </a:pPr>
+            <a:r>
+              <a:t>阶段三: 创新</a:t>
             </a:r>
           </a:p>
         </p:txBody>
@@ -9196,7 +8805,11 @@
         <p:nvSpPr>
           <p:cNvPr id="16" name="TextBox 15"/>
           <p:cNvSpPr txBox="1"/>
-          <p:nvPr/>
+          <p:nvPr>
+            <p:custDataLst>
+              <p:tags r:id="rId13"/>
+            </p:custDataLst>
+          </p:nvPr>
         </p:nvSpPr>
         <p:spPr>
           <a:xfrm>
@@ -9219,7 +8832,7 @@
                 <a:solidFill>
                   <a:srgbClr val="C2A497"/>
                 </a:solidFill>
-                <a:latin typeface="Microsoft YaHei"/>
+                <a:latin typeface="微软雅黑" panose="020B0503020204020204" charset="-122"/>
               </a:defRPr>
             </a:pPr>
             <a:r>
@@ -9232,7 +8845,11 @@
         <p:nvSpPr>
           <p:cNvPr id="17" name="TextBox 16"/>
           <p:cNvSpPr txBox="1"/>
-          <p:nvPr/>
+          <p:nvPr>
+            <p:custDataLst>
+              <p:tags r:id="rId14"/>
+            </p:custDataLst>
+          </p:nvPr>
         </p:nvSpPr>
         <p:spPr>
           <a:xfrm>
@@ -9255,7 +8872,7 @@
                 <a:solidFill>
                   <a:srgbClr val="8C8C8C"/>
                 </a:solidFill>
-                <a:latin typeface="Microsoft YaHei"/>
+                <a:latin typeface="微软雅黑" panose="020B0503020204020204" charset="-122"/>
               </a:defRPr>
             </a:pPr>
             <a:r>
@@ -9268,7 +8885,11 @@
         <p:nvSpPr>
           <p:cNvPr id="18" name="TextBox 17"/>
           <p:cNvSpPr txBox="1"/>
-          <p:nvPr/>
+          <p:nvPr>
+            <p:custDataLst>
+              <p:tags r:id="rId15"/>
+            </p:custDataLst>
+          </p:nvPr>
         </p:nvSpPr>
         <p:spPr>
           <a:xfrm>
@@ -9291,7 +8912,7 @@
                 <a:solidFill>
                   <a:srgbClr val="8C8C8C"/>
                 </a:solidFill>
-                <a:latin typeface="Microsoft YaHei"/>
+                <a:latin typeface="微软雅黑" panose="020B0503020204020204" charset="-122"/>
               </a:defRPr>
             </a:pPr>
             <a:r>
@@ -9331,7 +8952,7 @@
                 <a:solidFill>
                   <a:srgbClr val="3D3D3D"/>
                 </a:solidFill>
-                <a:latin typeface="Microsoft YaHei"/>
+                <a:latin typeface="微软雅黑" panose="020B0503020204020204" charset="-122"/>
               </a:defRPr>
             </a:pPr>
             <a:r>
@@ -9349,7 +8970,7 @@
 </file>
 
 <file path=ppt/slides/slide5.xml><?xml version="1.0" encoding="utf-8"?>
-<p:sld xmlns:a="http://schemas.openxmlformats.org/drawingml/2006/main" xmlns:p="http://schemas.openxmlformats.org/presentationml/2006/main" xmlns:r="http://schemas.openxmlformats.org/officeDocument/2006/relationships">
+<p:sld xmlns:a="http://schemas.openxmlformats.org/drawingml/2006/main" xmlns:r="http://schemas.openxmlformats.org/officeDocument/2006/relationships" xmlns:p="http://schemas.openxmlformats.org/presentationml/2006/main">
   <p:cSld>
     <p:bg>
       <p:bgPr>
@@ -9393,7 +9014,7 @@
                 <a:solidFill>
                   <a:srgbClr val="3D3D3D"/>
                 </a:solidFill>
-                <a:latin typeface="Microsoft YaHei"/>
+                <a:latin typeface="微软雅黑" panose="020B0503020204020204" charset="-122"/>
               </a:defRPr>
             </a:pPr>
             <a:r>
@@ -9517,7 +9138,7 @@
                 <a:solidFill>
                   <a:srgbClr val="8C8C8C"/>
                 </a:solidFill>
-                <a:latin typeface="Microsoft YaHei"/>
+                <a:latin typeface="微软雅黑" panose="020B0503020204020204" charset="-122"/>
               </a:defRPr>
             </a:pPr>
             <a:r>
@@ -9553,7 +9174,7 @@
                 <a:solidFill>
                   <a:srgbClr val="7AA884"/>
                 </a:solidFill>
-                <a:latin typeface="Microsoft YaHei"/>
+                <a:latin typeface="微软雅黑" panose="020B0503020204020204" charset="-122"/>
               </a:defRPr>
             </a:pPr>
             <a:r>
@@ -9589,7 +9210,7 @@
                 <a:solidFill>
                   <a:srgbClr val="8C8C8C"/>
                 </a:solidFill>
-                <a:latin typeface="Microsoft YaHei"/>
+                <a:latin typeface="微软雅黑" panose="020B0503020204020204" charset="-122"/>
               </a:defRPr>
             </a:pPr>
             <a:r>
@@ -9670,7 +9291,7 @@
                 <a:solidFill>
                   <a:srgbClr val="8C8C8C"/>
                 </a:solidFill>
-                <a:latin typeface="Microsoft YaHei"/>
+                <a:latin typeface="微软雅黑" panose="020B0503020204020204" charset="-122"/>
               </a:defRPr>
             </a:pPr>
             <a:r>
@@ -9706,7 +9327,7 @@
                 <a:solidFill>
                   <a:srgbClr val="D4847A"/>
                 </a:solidFill>
-                <a:latin typeface="Microsoft YaHei"/>
+                <a:latin typeface="微软雅黑" panose="020B0503020204020204" charset="-122"/>
               </a:defRPr>
             </a:pPr>
             <a:r>
@@ -9742,7 +9363,7 @@
                 <a:solidFill>
                   <a:srgbClr val="8C8C8C"/>
                 </a:solidFill>
-                <a:latin typeface="Microsoft YaHei"/>
+                <a:latin typeface="微软雅黑" panose="020B0503020204020204" charset="-122"/>
               </a:defRPr>
             </a:pPr>
             <a:r>
@@ -9823,7 +9444,7 @@
                 <a:solidFill>
                   <a:srgbClr val="8C8C8C"/>
                 </a:solidFill>
-                <a:latin typeface="Microsoft YaHei"/>
+                <a:latin typeface="微软雅黑" panose="020B0503020204020204" charset="-122"/>
               </a:defRPr>
             </a:pPr>
             <a:r>
@@ -9859,7 +9480,7 @@
                 <a:solidFill>
                   <a:srgbClr val="9B9EC0"/>
                 </a:solidFill>
-                <a:latin typeface="Microsoft YaHei"/>
+                <a:latin typeface="微软雅黑" panose="020B0503020204020204" charset="-122"/>
               </a:defRPr>
             </a:pPr>
             <a:r>
@@ -9895,7 +9516,7 @@
                 <a:solidFill>
                   <a:srgbClr val="8C8C8C"/>
                 </a:solidFill>
-                <a:latin typeface="Microsoft YaHei"/>
+                <a:latin typeface="微软雅黑" panose="020B0503020204020204" charset="-122"/>
               </a:defRPr>
             </a:pPr>
             <a:r>
@@ -9976,7 +9597,7 @@
                 <a:solidFill>
                   <a:srgbClr val="8C8C8C"/>
                 </a:solidFill>
-                <a:latin typeface="Microsoft YaHei"/>
+                <a:latin typeface="微软雅黑" panose="020B0503020204020204" charset="-122"/>
               </a:defRPr>
             </a:pPr>
             <a:r>
@@ -10012,7 +9633,7 @@
                 <a:solidFill>
                   <a:srgbClr val="D4847A"/>
                 </a:solidFill>
-                <a:latin typeface="Microsoft YaHei"/>
+                <a:latin typeface="微软雅黑" panose="020B0503020204020204" charset="-122"/>
               </a:defRPr>
             </a:pPr>
             <a:r>
@@ -10048,7 +9669,7 @@
                 <a:solidFill>
                   <a:srgbClr val="8C8C8C"/>
                 </a:solidFill>
-                <a:latin typeface="Microsoft YaHei"/>
+                <a:latin typeface="微软雅黑" panose="020B0503020204020204" charset="-122"/>
               </a:defRPr>
             </a:pPr>
             <a:r>
@@ -10087,7 +9708,7 @@
                 <a:solidFill>
                   <a:srgbClr val="3D3D3D"/>
                 </a:solidFill>
-                <a:latin typeface="Microsoft YaHei"/>
+                <a:latin typeface="微软雅黑" panose="020B0503020204020204" charset="-122"/>
               </a:defRPr>
             </a:pPr>
             <a:r>
@@ -10103,7 +9724,7 @@
                 <a:solidFill>
                   <a:srgbClr val="D4847A"/>
                 </a:solidFill>
-                <a:latin typeface="Microsoft YaHei"/>
+                <a:latin typeface="微软雅黑" panose="020B0503020204020204" charset="-122"/>
               </a:defRPr>
             </a:pPr>
             <a:r>
@@ -10119,7 +9740,7 @@
                 <a:solidFill>
                   <a:srgbClr val="D4847A"/>
                 </a:solidFill>
-                <a:latin typeface="Microsoft YaHei"/>
+                <a:latin typeface="微软雅黑" panose="020B0503020204020204" charset="-122"/>
               </a:defRPr>
             </a:pPr>
             <a:r>
@@ -10135,7 +9756,7 @@
                 <a:solidFill>
                   <a:srgbClr val="D4847A"/>
                 </a:solidFill>
-                <a:latin typeface="Microsoft YaHei"/>
+                <a:latin typeface="微软雅黑" panose="020B0503020204020204" charset="-122"/>
               </a:defRPr>
             </a:pPr>
             <a:r>
@@ -10151,7 +9772,7 @@
                 <a:solidFill>
                   <a:srgbClr val="9B9EC0"/>
                 </a:solidFill>
-                <a:latin typeface="Microsoft YaHei"/>
+                <a:latin typeface="微软雅黑" panose="020B0503020204020204" charset="-122"/>
               </a:defRPr>
             </a:pPr>
             <a:r>
@@ -10169,7 +9790,7 @@
 </file>
 
 <file path=ppt/slides/slide6.xml><?xml version="1.0" encoding="utf-8"?>
-<p:sld xmlns:a="http://schemas.openxmlformats.org/drawingml/2006/main" xmlns:p="http://schemas.openxmlformats.org/presentationml/2006/main" xmlns:r="http://schemas.openxmlformats.org/officeDocument/2006/relationships">
+<p:sld xmlns:a="http://schemas.openxmlformats.org/drawingml/2006/main" xmlns:r="http://schemas.openxmlformats.org/officeDocument/2006/relationships" xmlns:p="http://schemas.openxmlformats.org/presentationml/2006/main">
   <p:cSld>
     <p:bg>
       <p:bgPr>
@@ -10213,7 +9834,7 @@
                 <a:solidFill>
                   <a:srgbClr val="3D3D3D"/>
                 </a:solidFill>
-                <a:latin typeface="Microsoft YaHei"/>
+                <a:latin typeface="微软雅黑" panose="020B0503020204020204" charset="-122"/>
               </a:defRPr>
             </a:pPr>
             <a:r>
@@ -10337,7 +9958,7 @@
                 <a:solidFill>
                   <a:srgbClr val="8C8C8C"/>
                 </a:solidFill>
-                <a:latin typeface="Microsoft YaHei"/>
+                <a:latin typeface="微软雅黑" panose="020B0503020204020204" charset="-122"/>
               </a:defRPr>
             </a:pPr>
             <a:r>
@@ -10373,7 +9994,7 @@
                 <a:solidFill>
                   <a:srgbClr val="7AA884"/>
                 </a:solidFill>
-                <a:latin typeface="Microsoft YaHei"/>
+                <a:latin typeface="微软雅黑" panose="020B0503020204020204" charset="-122"/>
               </a:defRPr>
             </a:pPr>
             <a:r>
@@ -10409,7 +10030,7 @@
                 <a:solidFill>
                   <a:srgbClr val="8C8C8C"/>
                 </a:solidFill>
-                <a:latin typeface="Microsoft YaHei"/>
+                <a:latin typeface="微软雅黑" panose="020B0503020204020204" charset="-122"/>
               </a:defRPr>
             </a:pPr>
             <a:r>
@@ -10490,7 +10111,7 @@
                 <a:solidFill>
                   <a:srgbClr val="8C8C8C"/>
                 </a:solidFill>
-                <a:latin typeface="Microsoft YaHei"/>
+                <a:latin typeface="微软雅黑" panose="020B0503020204020204" charset="-122"/>
               </a:defRPr>
             </a:pPr>
             <a:r>
@@ -10526,7 +10147,7 @@
                 <a:solidFill>
                   <a:srgbClr val="D4847A"/>
                 </a:solidFill>
-                <a:latin typeface="Microsoft YaHei"/>
+                <a:latin typeface="微软雅黑" panose="020B0503020204020204" charset="-122"/>
               </a:defRPr>
             </a:pPr>
             <a:r>
@@ -10562,7 +10183,7 @@
                 <a:solidFill>
                   <a:srgbClr val="8C8C8C"/>
                 </a:solidFill>
-                <a:latin typeface="Microsoft YaHei"/>
+                <a:latin typeface="微软雅黑" panose="020B0503020204020204" charset="-122"/>
               </a:defRPr>
             </a:pPr>
             <a:r>
@@ -10598,7 +10219,7 @@
                 <a:solidFill>
                   <a:srgbClr val="3D3D3D"/>
                 </a:solidFill>
-                <a:latin typeface="Microsoft YaHei"/>
+                <a:latin typeface="微软雅黑" panose="020B0503020204020204" charset="-122"/>
               </a:defRPr>
             </a:pPr>
             <a:r>
@@ -10620,7 +10241,7 @@
 </file>
 
 <file path=ppt/slides/slide7.xml><?xml version="1.0" encoding="utf-8"?>
-<p:sld xmlns:a="http://schemas.openxmlformats.org/drawingml/2006/main" xmlns:p="http://schemas.openxmlformats.org/presentationml/2006/main" xmlns:r="http://schemas.openxmlformats.org/officeDocument/2006/relationships">
+<p:sld xmlns:a="http://schemas.openxmlformats.org/drawingml/2006/main" xmlns:r="http://schemas.openxmlformats.org/officeDocument/2006/relationships" xmlns:p="http://schemas.openxmlformats.org/presentationml/2006/main">
   <p:cSld>
     <p:bg>
       <p:bgPr>
@@ -10664,7 +10285,7 @@
                 <a:solidFill>
                   <a:srgbClr val="3D3D3D"/>
                 </a:solidFill>
-                <a:latin typeface="Microsoft YaHei"/>
+                <a:latin typeface="微软雅黑" panose="020B0503020204020204" charset="-122"/>
               </a:defRPr>
             </a:pPr>
             <a:r>
@@ -10743,7 +10364,7 @@
                 <a:solidFill>
                   <a:srgbClr val="C2A497"/>
                 </a:solidFill>
-                <a:latin typeface="Microsoft YaHei"/>
+                <a:latin typeface="微软雅黑" panose="020B0503020204020204" charset="-122"/>
               </a:defRPr>
             </a:pPr>
             <a:r>
@@ -10824,7 +10445,7 @@
                 <a:solidFill>
                   <a:srgbClr val="8C8C8C"/>
                 </a:solidFill>
-                <a:latin typeface="Microsoft YaHei"/>
+                <a:latin typeface="微软雅黑" panose="020B0503020204020204" charset="-122"/>
               </a:defRPr>
             </a:pPr>
             <a:r>
@@ -10860,7 +10481,7 @@
                 <a:solidFill>
                   <a:srgbClr val="D4847A"/>
                 </a:solidFill>
-                <a:latin typeface="Microsoft YaHei"/>
+                <a:latin typeface="微软雅黑" panose="020B0503020204020204" charset="-122"/>
               </a:defRPr>
             </a:pPr>
             <a:r>
@@ -10896,7 +10517,7 @@
                 <a:solidFill>
                   <a:srgbClr val="8C8C8C"/>
                 </a:solidFill>
-                <a:latin typeface="Microsoft YaHei"/>
+                <a:latin typeface="微软雅黑" panose="020B0503020204020204" charset="-122"/>
               </a:defRPr>
             </a:pPr>
             <a:r>
@@ -10977,7 +10598,7 @@
                 <a:solidFill>
                   <a:srgbClr val="8C8C8C"/>
                 </a:solidFill>
-                <a:latin typeface="Microsoft YaHei"/>
+                <a:latin typeface="微软雅黑" panose="020B0503020204020204" charset="-122"/>
               </a:defRPr>
             </a:pPr>
             <a:r>
@@ -11013,7 +10634,7 @@
                 <a:solidFill>
                   <a:srgbClr val="7AA884"/>
                 </a:solidFill>
-                <a:latin typeface="Microsoft YaHei"/>
+                <a:latin typeface="微软雅黑" panose="020B0503020204020204" charset="-122"/>
               </a:defRPr>
             </a:pPr>
             <a:r>
@@ -11049,7 +10670,7 @@
                 <a:solidFill>
                   <a:srgbClr val="8C8C8C"/>
                 </a:solidFill>
-                <a:latin typeface="Microsoft YaHei"/>
+                <a:latin typeface="微软雅黑" panose="020B0503020204020204" charset="-122"/>
               </a:defRPr>
             </a:pPr>
             <a:r>
@@ -11130,7 +10751,7 @@
                 <a:solidFill>
                   <a:srgbClr val="8C8C8C"/>
                 </a:solidFill>
-                <a:latin typeface="Microsoft YaHei"/>
+                <a:latin typeface="微软雅黑" panose="020B0503020204020204" charset="-122"/>
               </a:defRPr>
             </a:pPr>
             <a:r>
@@ -11166,7 +10787,7 @@
                 <a:solidFill>
                   <a:srgbClr val="8C8C8C"/>
                 </a:solidFill>
-                <a:latin typeface="Microsoft YaHei"/>
+                <a:latin typeface="微软雅黑" panose="020B0503020204020204" charset="-122"/>
               </a:defRPr>
             </a:pPr>
             <a:r>
@@ -11202,7 +10823,7 @@
                 <a:solidFill>
                   <a:srgbClr val="8C8C8C"/>
                 </a:solidFill>
-                <a:latin typeface="Microsoft YaHei"/>
+                <a:latin typeface="微软雅黑" panose="020B0503020204020204" charset="-122"/>
               </a:defRPr>
             </a:pPr>
             <a:r>
@@ -11238,7 +10859,7 @@
                 <a:solidFill>
                   <a:srgbClr val="C2A497"/>
                 </a:solidFill>
-                <a:latin typeface="Microsoft YaHei"/>
+                <a:latin typeface="微软雅黑" panose="020B0503020204020204" charset="-122"/>
               </a:defRPr>
             </a:pPr>
             <a:r>
@@ -11319,7 +10940,7 @@
                 <a:solidFill>
                   <a:srgbClr val="8C8C8C"/>
                 </a:solidFill>
-                <a:latin typeface="Microsoft YaHei"/>
+                <a:latin typeface="微软雅黑" panose="020B0503020204020204" charset="-122"/>
               </a:defRPr>
             </a:pPr>
             <a:r>
@@ -11355,7 +10976,7 @@
                 <a:solidFill>
                   <a:srgbClr val="D4847A"/>
                 </a:solidFill>
-                <a:latin typeface="Microsoft YaHei"/>
+                <a:latin typeface="微软雅黑" panose="020B0503020204020204" charset="-122"/>
               </a:defRPr>
             </a:pPr>
             <a:r>
@@ -11391,7 +11012,7 @@
                 <a:solidFill>
                   <a:srgbClr val="8C8C8C"/>
                 </a:solidFill>
-                <a:latin typeface="Microsoft YaHei"/>
+                <a:latin typeface="微软雅黑" panose="020B0503020204020204" charset="-122"/>
               </a:defRPr>
             </a:pPr>
             <a:r>
@@ -11472,7 +11093,7 @@
                 <a:solidFill>
                   <a:srgbClr val="8C8C8C"/>
                 </a:solidFill>
-                <a:latin typeface="Microsoft YaHei"/>
+                <a:latin typeface="微软雅黑" panose="020B0503020204020204" charset="-122"/>
               </a:defRPr>
             </a:pPr>
             <a:r>
@@ -11508,7 +11129,7 @@
                 <a:solidFill>
                   <a:srgbClr val="7AA884"/>
                 </a:solidFill>
-                <a:latin typeface="Microsoft YaHei"/>
+                <a:latin typeface="微软雅黑" panose="020B0503020204020204" charset="-122"/>
               </a:defRPr>
             </a:pPr>
             <a:r>
@@ -11544,7 +11165,7 @@
                 <a:solidFill>
                   <a:srgbClr val="8C8C8C"/>
                 </a:solidFill>
-                <a:latin typeface="Microsoft YaHei"/>
+                <a:latin typeface="微软雅黑" panose="020B0503020204020204" charset="-122"/>
               </a:defRPr>
             </a:pPr>
             <a:r>
@@ -11625,7 +11246,7 @@
                 <a:solidFill>
                   <a:srgbClr val="8C8C8C"/>
                 </a:solidFill>
-                <a:latin typeface="Microsoft YaHei"/>
+                <a:latin typeface="微软雅黑" panose="020B0503020204020204" charset="-122"/>
               </a:defRPr>
             </a:pPr>
             <a:r>
@@ -11661,7 +11282,7 @@
                 <a:solidFill>
                   <a:srgbClr val="8C8C8C"/>
                 </a:solidFill>
-                <a:latin typeface="Microsoft YaHei"/>
+                <a:latin typeface="微软雅黑" panose="020B0503020204020204" charset="-122"/>
               </a:defRPr>
             </a:pPr>
             <a:r>
@@ -11697,7 +11318,7 @@
                 <a:solidFill>
                   <a:srgbClr val="8C8C8C"/>
                 </a:solidFill>
-                <a:latin typeface="Microsoft YaHei"/>
+                <a:latin typeface="微软雅黑" panose="020B0503020204020204" charset="-122"/>
               </a:defRPr>
             </a:pPr>
             <a:r>
@@ -11733,7 +11354,7 @@
                 <a:solidFill>
                   <a:srgbClr val="C2A497"/>
                 </a:solidFill>
-                <a:latin typeface="Microsoft YaHei"/>
+                <a:latin typeface="微软雅黑" panose="020B0503020204020204" charset="-122"/>
               </a:defRPr>
             </a:pPr>
             <a:r>
@@ -11778,7 +11399,7 @@
 </file>
 
 <file path=ppt/slides/slide8.xml><?xml version="1.0" encoding="utf-8"?>
-<p:sld xmlns:a="http://schemas.openxmlformats.org/drawingml/2006/main" xmlns:p="http://schemas.openxmlformats.org/presentationml/2006/main" xmlns:r="http://schemas.openxmlformats.org/officeDocument/2006/relationships">
+<p:sld xmlns:a="http://schemas.openxmlformats.org/drawingml/2006/main" xmlns:r="http://schemas.openxmlformats.org/officeDocument/2006/relationships" xmlns:p="http://schemas.openxmlformats.org/presentationml/2006/main">
   <p:cSld>
     <p:bg>
       <p:bgPr>
@@ -11822,7 +11443,7 @@
                 <a:solidFill>
                   <a:srgbClr val="3D3D3D"/>
                 </a:solidFill>
-                <a:latin typeface="Microsoft YaHei"/>
+                <a:latin typeface="微软雅黑" panose="020B0503020204020204" charset="-122"/>
               </a:defRPr>
             </a:pPr>
             <a:r>
@@ -11898,13 +11519,13 @@
           <a:p>
             <a:pPr>
               <a:spcAft>
-                <a:spcPts val="630"/>
+                <a:spcPts val="595"/>
               </a:spcAft>
-              <a:defRPr sz="1800" b="0">
+              <a:defRPr sz="1700" b="0">
                 <a:solidFill>
                   <a:srgbClr val="8C8C8C"/>
                 </a:solidFill>
-                <a:latin typeface="Microsoft YaHei"/>
+                <a:latin typeface="微软雅黑" panose="020B0503020204020204" charset="-122"/>
               </a:defRPr>
             </a:pPr>
             <a:r>
@@ -11914,103 +11535,135 @@
           <a:p>
             <a:pPr>
               <a:spcAft>
-                <a:spcPts val="630"/>
+                <a:spcPts val="595"/>
               </a:spcAft>
-              <a:defRPr sz="1800" b="1">
-                <a:solidFill>
-                  <a:srgbClr val="C2A497"/>
-                </a:solidFill>
-                <a:latin typeface="Microsoft YaHei"/>
-              </a:defRPr>
-            </a:pPr>
-            <a:r>
-              <a:t>Warping = grid_sample + bilinear interpolation</a:t>
+              <a:defRPr sz="1700" b="0">
+                <a:solidFill>
+                  <a:srgbClr val="3D3D3D"/>
+                </a:solidFill>
+                <a:latin typeface="微软雅黑" panose="020B0503020204020204" charset="-122"/>
+              </a:defRPr>
+            </a:pPr>
+            <a:r>
+              <a:t>WaNet 的 warping 到底是怎么实现的？</a:t>
             </a:r>
           </a:p>
           <a:p>
             <a:pPr>
               <a:spcAft>
-                <a:spcPts val="630"/>
+                <a:spcPts val="595"/>
               </a:spcAft>
-              <a:defRPr sz="1800" b="0">
-                <a:solidFill>
-                  <a:srgbClr val="8C8C8C"/>
-                </a:solidFill>
-                <a:latin typeface="Microsoft YaHei"/>
-              </a:defRPr>
-            </a:pPr>
+              <a:defRPr sz="1700" b="1">
+                <a:solidFill>
+                  <a:srgbClr val="C2A497"/>
+                </a:solidFill>
+                <a:latin typeface="微软雅黑" panose="020B0503020204020204" charset="-122"/>
+              </a:defRPr>
+            </a:pPr>
+            <a:r>
+              <a:t>它调用的是 PyTorch 的 grid_sample 函数 + 双线性插值 (bilinear interpolation)</a:t>
+            </a:r>
           </a:p>
           <a:p>
             <a:pPr>
               <a:spcAft>
-                <a:spcPts val="630"/>
+                <a:spcPts val="595"/>
               </a:spcAft>
-              <a:defRPr sz="1800" b="1">
-                <a:solidFill>
-                  <a:srgbClr val="3D3D3D"/>
-                </a:solidFill>
-                <a:latin typeface="Microsoft YaHei"/>
-              </a:defRPr>
-            </a:pPr>
-            <a:r>
-              <a:t>插值运算 = 信号处理 -&gt; 必然在频域留下痕迹!</a:t>
-            </a:r>
+              <a:defRPr sz="1700" b="0">
+                <a:solidFill>
+                  <a:srgbClr val="8C8C8C"/>
+                </a:solidFill>
+                <a:latin typeface="微软雅黑" panose="020B0503020204020204" charset="-122"/>
+              </a:defRPr>
+            </a:pPr>
           </a:p>
           <a:p>
             <a:pPr>
               <a:spcAft>
-                <a:spcPts val="630"/>
+                <a:spcPts val="595"/>
               </a:spcAft>
-              <a:defRPr sz="1800" b="0">
+              <a:defRPr sz="1700" b="0">
                 <a:solidFill>
                   <a:srgbClr val="8C8C8C"/>
                 </a:solidFill>
-                <a:latin typeface="Microsoft YaHei"/>
-              </a:defRPr>
-            </a:pPr>
+                <a:latin typeface="微软雅黑" panose="020B0503020204020204" charset="-122"/>
+              </a:defRPr>
+            </a:pPr>
+            <a:r>
+              <a:t>而插值运算本质上是一种信号处理操作 ——</a:t>
+            </a:r>
           </a:p>
           <a:p>
             <a:pPr>
               <a:spcAft>
-                <a:spcPts val="630"/>
+                <a:spcPts val="595"/>
               </a:spcAft>
-              <a:defRPr sz="1800" b="0">
-                <a:solidFill>
-                  <a:srgbClr val="8C8C8C"/>
-                </a:solidFill>
-                <a:latin typeface="Microsoft YaHei"/>
-              </a:defRPr>
-            </a:pPr>
-            <a:r>
-              <a:t>全新检测思路:</a:t>
+              <a:defRPr sz="1700" b="1">
+                <a:solidFill>
+                  <a:srgbClr val="3D3D3D"/>
+                </a:solidFill>
+                <a:latin typeface="微软雅黑" panose="020B0503020204020204" charset="-122"/>
+              </a:defRPr>
+            </a:pPr>
+            <a:r>
+              <a:t>每个新像素 = 周围像素的加权平均 -&gt; 必然在频域留下痕迹!</a:t>
             </a:r>
           </a:p>
           <a:p>
             <a:pPr>
               <a:spcAft>
-                <a:spcPts val="630"/>
+                <a:spcPts val="595"/>
               </a:spcAft>
-              <a:defRPr sz="1800" b="0">
-                <a:solidFill>
-                  <a:srgbClr val="D4847A"/>
-                </a:solidFill>
-                <a:latin typeface="Microsoft YaHei"/>
-              </a:defRPr>
-            </a:pPr>
-            <a:r>
-              <a:t>现有防御: 看模型输出 -&gt; 检测不到WaNet</a:t>
-            </a:r>
+              <a:defRPr sz="1700" b="0">
+                <a:solidFill>
+                  <a:srgbClr val="8C8C8C"/>
+                </a:solidFill>
+                <a:latin typeface="微软雅黑" panose="020B0503020204020204" charset="-122"/>
+              </a:defRPr>
+            </a:pPr>
           </a:p>
           <a:p>
             <a:pPr>
               <a:spcAft>
-                <a:spcPts val="630"/>
+                <a:spcPts val="595"/>
               </a:spcAft>
-              <a:defRPr sz="1800" b="1">
+              <a:defRPr sz="1700" b="0">
+                <a:solidFill>
+                  <a:srgbClr val="8C8C8C"/>
+                </a:solidFill>
+                <a:latin typeface="微软雅黑" panose="020B0503020204020204" charset="-122"/>
+              </a:defRPr>
+            </a:pPr>
+            <a:r>
+              <a:t>全新检测思路:</a:t>
+            </a:r>
+          </a:p>
+          <a:p>
+            <a:pPr>
+              <a:spcAft>
+                <a:spcPts val="595"/>
+              </a:spcAft>
+              <a:defRPr sz="1700" b="0">
+                <a:solidFill>
+                  <a:srgbClr val="D4847A"/>
+                </a:solidFill>
+                <a:latin typeface="微软雅黑" panose="020B0503020204020204" charset="-122"/>
+              </a:defRPr>
+            </a:pPr>
+            <a:r>
+              <a:t>现有防御: 看模型输出 -&gt; 检测不到WaNet</a:t>
+            </a:r>
+          </a:p>
+          <a:p>
+            <a:pPr>
+              <a:spcAft>
+                <a:spcPts val="595"/>
+              </a:spcAft>
+              <a:defRPr sz="1700" b="1">
                 <a:solidFill>
                   <a:srgbClr val="7AA884"/>
                 </a:solidFill>
-                <a:latin typeface="Microsoft YaHei"/>
+                <a:latin typeface="微软雅黑" panose="020B0503020204020204" charset="-122"/>
               </a:defRPr>
             </a:pPr>
             <a:r>
@@ -12046,7 +11699,7 @@
                 <a:solidFill>
                   <a:srgbClr val="C2A497"/>
                 </a:solidFill>
-                <a:latin typeface="Microsoft YaHei"/>
+                <a:latin typeface="微软雅黑" panose="020B0503020204020204" charset="-122"/>
               </a:defRPr>
             </a:pPr>
             <a:r>
@@ -12148,7 +11801,7 @@
                 <a:solidFill>
                   <a:srgbClr val="C2A497"/>
                 </a:solidFill>
-                <a:latin typeface="Microsoft YaHei"/>
+                <a:latin typeface="微软雅黑" panose="020B0503020204020204" charset="-122"/>
               </a:defRPr>
             </a:pPr>
             <a:r>
@@ -12166,7 +11819,7 @@
 </file>
 
 <file path=ppt/slides/slide9.xml><?xml version="1.0" encoding="utf-8"?>
-<p:sld xmlns:a="http://schemas.openxmlformats.org/drawingml/2006/main" xmlns:p="http://schemas.openxmlformats.org/presentationml/2006/main" xmlns:r="http://schemas.openxmlformats.org/officeDocument/2006/relationships">
+<p:sld xmlns:a="http://schemas.openxmlformats.org/drawingml/2006/main" xmlns:r="http://schemas.openxmlformats.org/officeDocument/2006/relationships" xmlns:p="http://schemas.openxmlformats.org/presentationml/2006/main">
   <p:cSld>
     <p:bg>
       <p:bgPr>
@@ -12210,7 +11863,7 @@
                 <a:solidFill>
                   <a:srgbClr val="3D3D3D"/>
                 </a:solidFill>
-                <a:latin typeface="Microsoft YaHei"/>
+                <a:latin typeface="微软雅黑" panose="020B0503020204020204" charset="-122"/>
               </a:defRPr>
             </a:pPr>
             <a:r>
@@ -12334,7 +11987,7 @@
                 <a:solidFill>
                   <a:srgbClr val="8C8C8C"/>
                 </a:solidFill>
-                <a:latin typeface="Microsoft YaHei"/>
+                <a:latin typeface="微软雅黑" panose="020B0503020204020204" charset="-122"/>
               </a:defRPr>
             </a:pPr>
             <a:r>
@@ -12370,7 +12023,7 @@
                 <a:solidFill>
                   <a:srgbClr val="8C8C8C"/>
                 </a:solidFill>
-                <a:latin typeface="Microsoft YaHei"/>
+                <a:latin typeface="微软雅黑" panose="020B0503020204020204" charset="-122"/>
               </a:defRPr>
             </a:pPr>
             <a:r>
@@ -12410,7 +12063,7 @@
                 <a:solidFill>
                   <a:srgbClr val="C2A497"/>
                 </a:solidFill>
-                <a:latin typeface="Microsoft YaHei"/>
+                <a:latin typeface="微软雅黑" panose="020B0503020204020204" charset="-122"/>
               </a:defRPr>
             </a:pPr>
             <a:r>
@@ -12491,7 +12144,7 @@
                 <a:solidFill>
                   <a:srgbClr val="8C8C8C"/>
                 </a:solidFill>
-                <a:latin typeface="Microsoft YaHei"/>
+                <a:latin typeface="微软雅黑" panose="020B0503020204020204" charset="-122"/>
               </a:defRPr>
             </a:pPr>
             <a:r>
@@ -12527,7 +12180,7 @@
                 <a:solidFill>
                   <a:srgbClr val="8C8C8C"/>
                 </a:solidFill>
-                <a:latin typeface="Microsoft YaHei"/>
+                <a:latin typeface="微软雅黑" panose="020B0503020204020204" charset="-122"/>
               </a:defRPr>
             </a:pPr>
             <a:r>
@@ -12567,7 +12220,7 @@
                 <a:solidFill>
                   <a:srgbClr val="C2A497"/>
                 </a:solidFill>
-                <a:latin typeface="Microsoft YaHei"/>
+                <a:latin typeface="微软雅黑" panose="020B0503020204020204" charset="-122"/>
               </a:defRPr>
             </a:pPr>
             <a:r>
@@ -12648,7 +12301,7 @@
                 <a:solidFill>
                   <a:srgbClr val="8C8C8C"/>
                 </a:solidFill>
-                <a:latin typeface="Microsoft YaHei"/>
+                <a:latin typeface="微软雅黑" panose="020B0503020204020204" charset="-122"/>
               </a:defRPr>
             </a:pPr>
             <a:r>
@@ -12684,7 +12337,7 @@
                 <a:solidFill>
                   <a:srgbClr val="8C8C8C"/>
                 </a:solidFill>
-                <a:latin typeface="Microsoft YaHei"/>
+                <a:latin typeface="微软雅黑" panose="020B0503020204020204" charset="-122"/>
               </a:defRPr>
             </a:pPr>
             <a:r>
@@ -12724,7 +12377,7 @@
                 <a:solidFill>
                   <a:srgbClr val="C2A497"/>
                 </a:solidFill>
-                <a:latin typeface="Microsoft YaHei"/>
+                <a:latin typeface="微软雅黑" panose="020B0503020204020204" charset="-122"/>
               </a:defRPr>
             </a:pPr>
             <a:r>
@@ -12805,7 +12458,7 @@
                 <a:solidFill>
                   <a:srgbClr val="8C8C8C"/>
                 </a:solidFill>
-                <a:latin typeface="Microsoft YaHei"/>
+                <a:latin typeface="微软雅黑" panose="020B0503020204020204" charset="-122"/>
               </a:defRPr>
             </a:pPr>
             <a:r>
@@ -12841,7 +12494,7 @@
                 <a:solidFill>
                   <a:srgbClr val="8C8C8C"/>
                 </a:solidFill>
-                <a:latin typeface="Microsoft YaHei"/>
+                <a:latin typeface="微软雅黑" panose="020B0503020204020204" charset="-122"/>
               </a:defRPr>
             </a:pPr>
             <a:r>
@@ -12881,7 +12534,7 @@
                 <a:solidFill>
                   <a:srgbClr val="C2A497"/>
                 </a:solidFill>
-                <a:latin typeface="Microsoft YaHei"/>
+                <a:latin typeface="微软雅黑" panose="020B0503020204020204" charset="-122"/>
               </a:defRPr>
             </a:pPr>
             <a:r>
@@ -12962,7 +12615,7 @@
                 <a:solidFill>
                   <a:srgbClr val="8C8C8C"/>
                 </a:solidFill>
-                <a:latin typeface="Microsoft YaHei"/>
+                <a:latin typeface="微软雅黑" panose="020B0503020204020204" charset="-122"/>
               </a:defRPr>
             </a:pPr>
             <a:r>
@@ -12998,7 +12651,7 @@
                 <a:solidFill>
                   <a:srgbClr val="C2A497"/>
                 </a:solidFill>
-                <a:latin typeface="Microsoft YaHei"/>
+                <a:latin typeface="微软雅黑" panose="020B0503020204020204" charset="-122"/>
               </a:defRPr>
             </a:pPr>
             <a:r>
@@ -13083,7 +12736,7 @@
                 <a:solidFill>
                   <a:srgbClr val="8C8C8C"/>
                 </a:solidFill>
-                <a:latin typeface="Microsoft YaHei"/>
+                <a:latin typeface="微软雅黑" panose="020B0503020204020204" charset="-122"/>
               </a:defRPr>
             </a:pPr>
             <a:r>
@@ -13119,7 +12772,7 @@
                 <a:solidFill>
                   <a:srgbClr val="9B9EC0"/>
                 </a:solidFill>
-                <a:latin typeface="Microsoft YaHei"/>
+                <a:latin typeface="微软雅黑" panose="020B0503020204020204" charset="-122"/>
               </a:defRPr>
             </a:pPr>
             <a:r>
@@ -13200,7 +12853,7 @@
                 <a:solidFill>
                   <a:srgbClr val="8C8C8C"/>
                 </a:solidFill>
-                <a:latin typeface="Microsoft YaHei"/>
+                <a:latin typeface="微软雅黑" panose="020B0503020204020204" charset="-122"/>
               </a:defRPr>
             </a:pPr>
             <a:r>
@@ -13236,7 +12889,7 @@
                 <a:solidFill>
                   <a:srgbClr val="7AA884"/>
                 </a:solidFill>
-                <a:latin typeface="Microsoft YaHei"/>
+                <a:latin typeface="微软雅黑" panose="020B0503020204020204" charset="-122"/>
               </a:defRPr>
             </a:pPr>
             <a:r>
@@ -13251,6 +12904,96 @@
     <a:masterClrMapping/>
   </p:clrMapOvr>
 </p:sld>
+</file>
+
+<file path=ppt/tags/tag1.xml><?xml version="1.0" encoding="utf-8"?>
+<p:tagLst xmlns:p="http://schemas.openxmlformats.org/presentationml/2006/main">
+  <p:tag name="KSO_WM_DIAGRAM_VIRTUALLY_FRAME" val="{&quot;height&quot;:180,&quot;left&quot;:57.6,&quot;top&quot;:129.6,&quot;width&quot;:842.4}"/>
+</p:tagLst>
+</file>
+
+<file path=ppt/tags/tag10.xml><?xml version="1.0" encoding="utf-8"?>
+<p:tagLst xmlns:p="http://schemas.openxmlformats.org/presentationml/2006/main">
+  <p:tag name="KSO_WM_DIAGRAM_VIRTUALLY_FRAME" val="{&quot;height&quot;:180,&quot;left&quot;:57.6,&quot;top&quot;:129.6,&quot;width&quot;:842.4}"/>
+</p:tagLst>
+</file>
+
+<file path=ppt/tags/tag11.xml><?xml version="1.0" encoding="utf-8"?>
+<p:tagLst xmlns:p="http://schemas.openxmlformats.org/presentationml/2006/main">
+  <p:tag name="KSO_WM_DIAGRAM_VIRTUALLY_FRAME" val="{&quot;height&quot;:180,&quot;left&quot;:57.6,&quot;top&quot;:129.6,&quot;width&quot;:842.4}"/>
+</p:tagLst>
+</file>
+
+<file path=ppt/tags/tag12.xml><?xml version="1.0" encoding="utf-8"?>
+<p:tagLst xmlns:p="http://schemas.openxmlformats.org/presentationml/2006/main">
+  <p:tag name="KSO_WM_DIAGRAM_VIRTUALLY_FRAME" val="{&quot;height&quot;:180,&quot;left&quot;:57.6,&quot;top&quot;:129.6,&quot;width&quot;:842.4}"/>
+</p:tagLst>
+</file>
+
+<file path=ppt/tags/tag13.xml><?xml version="1.0" encoding="utf-8"?>
+<p:tagLst xmlns:p="http://schemas.openxmlformats.org/presentationml/2006/main">
+  <p:tag name="KSO_WM_DIAGRAM_VIRTUALLY_FRAME" val="{&quot;height&quot;:180,&quot;left&quot;:57.6,&quot;top&quot;:129.6,&quot;width&quot;:842.4}"/>
+</p:tagLst>
+</file>
+
+<file path=ppt/tags/tag14.xml><?xml version="1.0" encoding="utf-8"?>
+<p:tagLst xmlns:p="http://schemas.openxmlformats.org/presentationml/2006/main">
+  <p:tag name="KSO_WM_DIAGRAM_VIRTUALLY_FRAME" val="{&quot;height&quot;:180,&quot;left&quot;:57.6,&quot;top&quot;:129.6,&quot;width&quot;:842.4}"/>
+</p:tagLst>
+</file>
+
+<file path=ppt/tags/tag15.xml><?xml version="1.0" encoding="utf-8"?>
+<p:tagLst xmlns:p="http://schemas.openxmlformats.org/presentationml/2006/main">
+  <p:tag name="KSO_WM_DIAGRAM_VIRTUALLY_FRAME" val="{&quot;height&quot;:180,&quot;left&quot;:57.6,&quot;top&quot;:129.6,&quot;width&quot;:842.4}"/>
+</p:tagLst>
+</file>
+
+<file path=ppt/tags/tag2.xml><?xml version="1.0" encoding="utf-8"?>
+<p:tagLst xmlns:p="http://schemas.openxmlformats.org/presentationml/2006/main">
+  <p:tag name="KSO_WM_DIAGRAM_VIRTUALLY_FRAME" val="{&quot;height&quot;:180,&quot;left&quot;:57.6,&quot;top&quot;:129.6,&quot;width&quot;:842.4}"/>
+</p:tagLst>
+</file>
+
+<file path=ppt/tags/tag3.xml><?xml version="1.0" encoding="utf-8"?>
+<p:tagLst xmlns:p="http://schemas.openxmlformats.org/presentationml/2006/main">
+  <p:tag name="KSO_WM_DIAGRAM_VIRTUALLY_FRAME" val="{&quot;height&quot;:180,&quot;left&quot;:57.6,&quot;top&quot;:129.6,&quot;width&quot;:842.4}"/>
+</p:tagLst>
+</file>
+
+<file path=ppt/tags/tag4.xml><?xml version="1.0" encoding="utf-8"?>
+<p:tagLst xmlns:p="http://schemas.openxmlformats.org/presentationml/2006/main">
+  <p:tag name="KSO_WM_DIAGRAM_VIRTUALLY_FRAME" val="{&quot;height&quot;:180,&quot;left&quot;:57.6,&quot;top&quot;:129.6,&quot;width&quot;:842.4}"/>
+</p:tagLst>
+</file>
+
+<file path=ppt/tags/tag5.xml><?xml version="1.0" encoding="utf-8"?>
+<p:tagLst xmlns:p="http://schemas.openxmlformats.org/presentationml/2006/main">
+  <p:tag name="KSO_WM_DIAGRAM_VIRTUALLY_FRAME" val="{&quot;height&quot;:180,&quot;left&quot;:57.6,&quot;top&quot;:129.6,&quot;width&quot;:842.4}"/>
+</p:tagLst>
+</file>
+
+<file path=ppt/tags/tag6.xml><?xml version="1.0" encoding="utf-8"?>
+<p:tagLst xmlns:p="http://schemas.openxmlformats.org/presentationml/2006/main">
+  <p:tag name="KSO_WM_DIAGRAM_VIRTUALLY_FRAME" val="{&quot;height&quot;:180,&quot;left&quot;:57.6,&quot;top&quot;:129.6,&quot;width&quot;:842.4}"/>
+</p:tagLst>
+</file>
+
+<file path=ppt/tags/tag7.xml><?xml version="1.0" encoding="utf-8"?>
+<p:tagLst xmlns:p="http://schemas.openxmlformats.org/presentationml/2006/main">
+  <p:tag name="KSO_WM_DIAGRAM_VIRTUALLY_FRAME" val="{&quot;height&quot;:180,&quot;left&quot;:57.6,&quot;top&quot;:129.6,&quot;width&quot;:842.4}"/>
+</p:tagLst>
+</file>
+
+<file path=ppt/tags/tag8.xml><?xml version="1.0" encoding="utf-8"?>
+<p:tagLst xmlns:p="http://schemas.openxmlformats.org/presentationml/2006/main">
+  <p:tag name="KSO_WM_DIAGRAM_VIRTUALLY_FRAME" val="{&quot;height&quot;:180,&quot;left&quot;:57.6,&quot;top&quot;:129.6,&quot;width&quot;:842.4}"/>
+</p:tagLst>
+</file>
+
+<file path=ppt/tags/tag9.xml><?xml version="1.0" encoding="utf-8"?>
+<p:tagLst xmlns:p="http://schemas.openxmlformats.org/presentationml/2006/main">
+  <p:tag name="KSO_WM_DIAGRAM_VIRTUALLY_FRAME" val="{&quot;height&quot;:180,&quot;left&quot;:57.6,&quot;top&quot;:129.6,&quot;width&quot;:842.4}"/>
+</p:tagLst>
 </file>
 
 <file path=ppt/theme/theme1.xml><?xml version="1.0" encoding="utf-8"?>
@@ -13569,6 +13312,10 @@
       </a:style>
     </a:lnDef>
   </a:objectDefaults>
-  <a:extraClrSchemeLst/>
+  <a:extLst>
+    <a:ext uri="{05A4C25C-085E-4340-85A3-A5531E510DB2}">
+      <thm15:themeFamily xmlns:thm15="http://schemas.microsoft.com/office/thememl/2012/main" name="Office Theme" id="{62F939B6-93AF-4DB8-9C6B-D6C7DFDC589F}" vid="{4A3C46E8-61CC-4603-A589-7422A47A8E4A}"/>
+    </a:ext>
+  </a:extLst>
 </a:theme>
 </file>
--- a/WaNet答辩.pptx
+++ b/WaNet答辩.pptx
@@ -121,12 +121,12 @@
   <p:extLst>
     <p:ext uri="{EFAFB233-063F-42B5-8137-9DF3F51BA10A}">
       <p15:sldGuideLst xmlns:p15="http://schemas.microsoft.com/office/powerpoint/2012/main">
-        <p15:guide id="1" orient="horz" pos="2160" userDrawn="1">
+        <p15:guide id="1" orient="horz" pos="2146" userDrawn="1">
           <p15:clr>
             <a:srgbClr val="A4A3A4"/>
           </p15:clr>
         </p15:guide>
-        <p15:guide id="2" pos="2880" userDrawn="1">
+        <p15:guide id="2" pos="2822" userDrawn="1">
           <p15:clr>
             <a:srgbClr val="A4A3A4"/>
           </p15:clr>
@@ -3085,13 +3085,140 @@
       <p:grpSpPr/>
       <p:sp>
         <p:nvSpPr>
-          <p:cNvPr id="2" name="Rectangle 1"/>
+          <p:cNvPr id="3" name="TextBox 2"/>
+          <p:cNvSpPr txBox="1"/>
+          <p:nvPr/>
+        </p:nvSpPr>
+        <p:spPr>
+          <a:xfrm>
+            <a:off x="3139605" y="1721485"/>
+            <a:ext cx="5912485" cy="645160"/>
+          </a:xfrm>
+          <a:prstGeom prst="rect">
+            <a:avLst/>
+          </a:prstGeom>
+          <a:noFill/>
+        </p:spPr>
+        <p:txBody>
+          <a:bodyPr wrap="none">
+            <a:spAutoFit/>
+          </a:bodyPr>
+          <a:lstStyle/>
+          <a:p>
+            <a:pPr algn="ctr">
+              <a:defRPr sz="4200" b="1">
+                <a:solidFill>
+                  <a:srgbClr val="3D3D3D"/>
+                </a:solidFill>
+                <a:latin typeface="微软雅黑" panose="020B0503020204020204" charset="-122"/>
+              </a:defRPr>
+            </a:pPr>
+            <a:r>
+              <a:rPr sz="3600">
+                <a:latin typeface="方正北魏楷书简体" panose="03000509000000000000" charset="-122"/>
+                <a:ea typeface="方正北魏楷书简体" panose="03000509000000000000" charset="-122"/>
+                <a:cs typeface="方正北魏楷书简体" panose="03000509000000000000" charset="-122"/>
+              </a:rPr>
+              <a:t>Warping后门攻击的频域弱点</a:t>
+            </a:r>
+            <a:endParaRPr sz="3600">
+              <a:latin typeface="方正北魏楷书简体" panose="03000509000000000000" charset="-122"/>
+              <a:ea typeface="方正北魏楷书简体" panose="03000509000000000000" charset="-122"/>
+              <a:cs typeface="方正北魏楷书简体" panose="03000509000000000000" charset="-122"/>
+            </a:endParaRPr>
+          </a:p>
+        </p:txBody>
+      </p:sp>
+      <p:sp>
+        <p:nvSpPr>
+          <p:cNvPr id="4" name="TextBox 3"/>
+          <p:cNvSpPr txBox="1"/>
+          <p:nvPr/>
+        </p:nvSpPr>
+        <p:spPr>
+          <a:xfrm>
+            <a:off x="4545813" y="2755265"/>
+            <a:ext cx="3100070" cy="953135"/>
+          </a:xfrm>
+          <a:prstGeom prst="rect">
+            <a:avLst/>
+          </a:prstGeom>
+          <a:noFill/>
+        </p:spPr>
+        <p:txBody>
+          <a:bodyPr wrap="none">
+            <a:spAutoFit/>
+          </a:bodyPr>
+          <a:lstStyle/>
+          <a:p>
+            <a:pPr algn="ctr">
+              <a:defRPr sz="2000" b="0">
+                <a:solidFill>
+                  <a:srgbClr val="8C8C8C"/>
+                </a:solidFill>
+                <a:latin typeface="微软雅黑" panose="020B0503020204020204" charset="-122"/>
+              </a:defRPr>
+            </a:pPr>
+            <a:r>
+              <a:rPr sz="2800">
+                <a:solidFill>
+                  <a:schemeClr val="tx1"/>
+                </a:solidFill>
+                <a:latin typeface="方正北魏楷书简体" panose="03000509000000000000" charset="-122"/>
+                <a:ea typeface="方正北魏楷书简体" panose="03000509000000000000" charset="-122"/>
+                <a:cs typeface="方正北魏楷书简体" panose="03000509000000000000" charset="-122"/>
+              </a:rPr>
+              <a:t>WaNet 复现与分析</a:t>
+            </a:r>
+            <a:endParaRPr sz="2800">
+              <a:solidFill>
+                <a:schemeClr val="tx1"/>
+              </a:solidFill>
+              <a:latin typeface="方正北魏楷书简体" panose="03000509000000000000" charset="-122"/>
+              <a:ea typeface="方正北魏楷书简体" panose="03000509000000000000" charset="-122"/>
+              <a:cs typeface="方正北魏楷书简体" panose="03000509000000000000" charset="-122"/>
+            </a:endParaRPr>
+          </a:p>
+          <a:p>
+            <a:pPr algn="ctr">
+              <a:defRPr sz="2000" b="0">
+                <a:solidFill>
+                  <a:srgbClr val="8C8C8C"/>
+                </a:solidFill>
+                <a:latin typeface="微软雅黑" panose="020B0503020204020204" charset="-122"/>
+              </a:defRPr>
+            </a:pPr>
+            <a:r>
+              <a:rPr sz="2800">
+                <a:solidFill>
+                  <a:schemeClr val="tx1"/>
+                </a:solidFill>
+                <a:latin typeface="方正北魏楷书简体" panose="03000509000000000000" charset="-122"/>
+                <a:ea typeface="方正北魏楷书简体" panose="03000509000000000000" charset="-122"/>
+                <a:cs typeface="方正北魏楷书简体" panose="03000509000000000000" charset="-122"/>
+              </a:rPr>
+              <a:t>AI安全课程设计</a:t>
+            </a:r>
+            <a:endParaRPr sz="2800">
+              <a:solidFill>
+                <a:schemeClr val="tx1"/>
+              </a:solidFill>
+              <a:latin typeface="方正北魏楷书简体" panose="03000509000000000000" charset="-122"/>
+              <a:ea typeface="方正北魏楷书简体" panose="03000509000000000000" charset="-122"/>
+              <a:cs typeface="方正北魏楷书简体" panose="03000509000000000000" charset="-122"/>
+            </a:endParaRPr>
+          </a:p>
+        </p:txBody>
+      </p:sp>
+      <p:sp>
+        <p:nvSpPr>
+          <p:cNvPr id="6" name="Rectangle 5"/>
           <p:cNvSpPr/>
           <p:nvPr/>
         </p:nvSpPr>
         <p:spPr>
           <a:xfrm>
-            <a:off x="2743200" y="2194560"/>
+            <a:off x="2743200" y="4119880"/>
             <a:ext cx="6705295" cy="12700"/>
           </a:xfrm>
           <a:prstGeom prst="rect">
@@ -3128,14 +3255,14 @@
       </p:sp>
       <p:sp>
         <p:nvSpPr>
-          <p:cNvPr id="3" name="TextBox 2"/>
+          <p:cNvPr id="8" name="TextBox 4"/>
           <p:cNvSpPr txBox="1"/>
           <p:nvPr/>
         </p:nvSpPr>
         <p:spPr>
           <a:xfrm>
-            <a:off x="2743200" y="2468880"/>
-            <a:ext cx="6705295" cy="1097280"/>
+            <a:off x="5020476" y="4571365"/>
+            <a:ext cx="2136775" cy="460375"/>
           </a:xfrm>
           <a:prstGeom prst="rect">
             <a:avLst/>
@@ -3149,78 +3276,6 @@
           <a:lstStyle/>
           <a:p>
             <a:pPr algn="ctr">
-              <a:defRPr sz="4200" b="1">
-                <a:solidFill>
-                  <a:srgbClr val="3D3D3D"/>
-                </a:solidFill>
-                <a:latin typeface="微软雅黑" panose="020B0503020204020204" charset="-122"/>
-              </a:defRPr>
-            </a:pPr>
-            <a:r>
-              <a:t>Warping后门攻击的频域弱点</a:t>
-            </a:r>
-          </a:p>
-        </p:txBody>
-      </p:sp>
-      <p:sp>
-        <p:nvSpPr>
-          <p:cNvPr id="4" name="TextBox 3"/>
-          <p:cNvSpPr txBox="1"/>
-          <p:nvPr/>
-        </p:nvSpPr>
-        <p:spPr>
-          <a:xfrm>
-            <a:off x="2743200" y="3474720"/>
-            <a:ext cx="6705295" cy="457200"/>
-          </a:xfrm>
-          <a:prstGeom prst="rect">
-            <a:avLst/>
-          </a:prstGeom>
-          <a:noFill/>
-        </p:spPr>
-        <p:txBody>
-          <a:bodyPr wrap="none">
-            <a:spAutoFit/>
-          </a:bodyPr>
-          <a:lstStyle/>
-          <a:p>
-            <a:pPr algn="ctr">
-              <a:defRPr sz="2000" b="0">
-                <a:solidFill>
-                  <a:srgbClr val="8C8C8C"/>
-                </a:solidFill>
-                <a:latin typeface="微软雅黑" panose="020B0503020204020204" charset="-122"/>
-              </a:defRPr>
-            </a:pPr>
-            <a:r>
-              <a:t>WaNet 复现与分析  ·  AI安全课程设计</a:t>
-            </a:r>
-          </a:p>
-        </p:txBody>
-      </p:sp>
-      <p:sp>
-        <p:nvSpPr>
-          <p:cNvPr id="5" name="TextBox 4"/>
-          <p:cNvSpPr txBox="1"/>
-          <p:nvPr/>
-        </p:nvSpPr>
-        <p:spPr>
-          <a:xfrm>
-            <a:off x="5249710" y="4114800"/>
-            <a:ext cx="1692275" cy="337185"/>
-          </a:xfrm>
-          <a:prstGeom prst="rect">
-            <a:avLst/>
-          </a:prstGeom>
-          <a:noFill/>
-        </p:spPr>
-        <p:txBody>
-          <a:bodyPr wrap="none">
-            <a:spAutoFit/>
-          </a:bodyPr>
-          <a:lstStyle/>
-          <a:p>
-            <a:pPr algn="ctr">
               <a:defRPr sz="1600" b="0">
                 <a:solidFill>
                   <a:srgbClr val="C2A497"/>
@@ -3229,57 +3284,49 @@
               </a:defRPr>
             </a:pPr>
             <a:r>
+              <a:rPr sz="2400" b="1">
+                <a:solidFill>
+                  <a:schemeClr val="tx1">
+                    <a:lumMod val="65000"/>
+                    <a:lumOff val="35000"/>
+                  </a:schemeClr>
+                </a:solidFill>
+                <a:latin typeface="方正北魏楷书简体" panose="03000509000000000000" charset="-122"/>
+                <a:ea typeface="方正北魏楷书简体" panose="03000509000000000000" charset="-122"/>
+                <a:cs typeface="方正北魏楷书简体" panose="03000509000000000000" charset="-122"/>
+              </a:rPr>
               <a:t>蒋竺君</a:t>
             </a:r>
             <a:r>
-              <a:rPr>
+              <a:rPr sz="2400" b="1">
+                <a:solidFill>
+                  <a:schemeClr val="tx1">
+                    <a:lumMod val="65000"/>
+                    <a:lumOff val="35000"/>
+                  </a:schemeClr>
+                </a:solidFill>
+                <a:latin typeface="方正北魏楷书简体" panose="03000509000000000000" charset="-122"/>
+                <a:ea typeface="方正北魏楷书简体" panose="03000509000000000000" charset="-122"/>
+                <a:cs typeface="方正北魏楷书简体" panose="03000509000000000000" charset="-122"/>
                 <a:sym typeface="+mn-ea"/>
               </a:rPr>
-              <a:t> ·  周争妍 </a:t>
-            </a:r>
-          </a:p>
-        </p:txBody>
-      </p:sp>
-      <p:sp>
-        <p:nvSpPr>
-          <p:cNvPr id="6" name="Rectangle 5"/>
-          <p:cNvSpPr/>
-          <p:nvPr/>
-        </p:nvSpPr>
-        <p:spPr>
-          <a:xfrm>
-            <a:off x="2743200" y="4937760"/>
-            <a:ext cx="6705295" cy="12700"/>
-          </a:xfrm>
-          <a:prstGeom prst="rect">
-            <a:avLst/>
-          </a:prstGeom>
-          <a:solidFill>
-            <a:srgbClr val="C2A497"/>
-          </a:solidFill>
-          <a:ln>
-            <a:noFill/>
-          </a:ln>
-        </p:spPr>
-        <p:style>
-          <a:lnRef idx="1">
-            <a:schemeClr val="accent1"/>
-          </a:lnRef>
-          <a:fillRef idx="3">
-            <a:schemeClr val="accent1"/>
-          </a:fillRef>
-          <a:effectRef idx="2">
-            <a:schemeClr val="accent1"/>
-          </a:effectRef>
-          <a:fontRef idx="minor">
-            <a:schemeClr val="lt1"/>
-          </a:fontRef>
-        </p:style>
-        <p:txBody>
-          <a:bodyPr rtlCol="0" anchor="ctr"/>
-          <a:lstStyle/>
-          <a:p>
-            <a:pPr algn="ctr"/>
+              <a:t> 周争妍</a:t>
+            </a:r>
+            <a:r>
+              <a:rPr sz="900">
+                <a:latin typeface="方正北魏楷书简体" panose="03000509000000000000" charset="-122"/>
+                <a:ea typeface="方正北魏楷书简体" panose="03000509000000000000" charset="-122"/>
+                <a:cs typeface="方正北魏楷书简体" panose="03000509000000000000" charset="-122"/>
+                <a:sym typeface="+mn-ea"/>
+              </a:rPr>
+              <a:t> </a:t>
+            </a:r>
+            <a:endParaRPr sz="900">
+              <a:latin typeface="方正北魏楷书简体" panose="03000509000000000000" charset="-122"/>
+              <a:ea typeface="方正北魏楷书简体" panose="03000509000000000000" charset="-122"/>
+              <a:cs typeface="方正北魏楷书简体" panose="03000509000000000000" charset="-122"/>
+              <a:sym typeface="+mn-ea"/>
+            </a:endParaRPr>
           </a:p>
         </p:txBody>
       </p:sp>
@@ -3317,8 +3364,8 @@
         </p:nvSpPr>
         <p:spPr>
           <a:xfrm>
-            <a:off x="731520" y="457200"/>
-            <a:ext cx="6400800" cy="457200"/>
+            <a:off x="731520" y="366395"/>
+            <a:ext cx="5098415" cy="553085"/>
           </a:xfrm>
           <a:prstGeom prst="rect">
             <a:avLst/>
@@ -3340,8 +3387,34 @@
               </a:defRPr>
             </a:pPr>
             <a:r>
-              <a:t>频域可视化: Clean vs Warped</a:t>
-            </a:r>
+              <a:rPr>
+                <a:latin typeface="方正北魏楷书简体" panose="03000509000000000000" charset="-122"/>
+                <a:ea typeface="方正北魏楷书简体" panose="03000509000000000000" charset="-122"/>
+                <a:cs typeface="方正北魏楷书简体" panose="03000509000000000000" charset="-122"/>
+              </a:rPr>
+              <a:t>频域可视化</a:t>
+            </a:r>
+            <a:r>
+              <a:rPr lang="zh-CN">
+                <a:latin typeface="方正北魏楷书简体" panose="03000509000000000000" charset="-122"/>
+                <a:ea typeface="方正北魏楷书简体" panose="03000509000000000000" charset="-122"/>
+                <a:cs typeface="方正北魏楷书简体" panose="03000509000000000000" charset="-122"/>
+              </a:rPr>
+              <a:t>：</a:t>
+            </a:r>
+            <a:r>
+              <a:rPr>
+                <a:latin typeface="方正北魏楷书简体" panose="03000509000000000000" charset="-122"/>
+                <a:ea typeface="方正北魏楷书简体" panose="03000509000000000000" charset="-122"/>
+                <a:cs typeface="方正北魏楷书简体" panose="03000509000000000000" charset="-122"/>
+              </a:rPr>
+              <a:t>Clean vs Warped</a:t>
+            </a:r>
+            <a:endParaRPr>
+              <a:latin typeface="方正北魏楷书简体" panose="03000509000000000000" charset="-122"/>
+              <a:ea typeface="方正北魏楷书简体" panose="03000509000000000000" charset="-122"/>
+              <a:cs typeface="方正北魏楷书简体" panose="03000509000000000000" charset="-122"/>
+            </a:endParaRPr>
           </a:p>
         </p:txBody>
       </p:sp>
@@ -3404,7 +3477,7 @@
         </p:blipFill>
         <p:spPr>
           <a:xfrm>
-            <a:off x="2352675" y="1368425"/>
+            <a:off x="2352675" y="1201420"/>
             <a:ext cx="7974965" cy="5126990"/>
           </a:xfrm>
           <a:prstGeom prst="rect">
@@ -3446,8 +3519,8 @@
         </p:nvSpPr>
         <p:spPr>
           <a:xfrm>
-            <a:off x="731520" y="457200"/>
-            <a:ext cx="6400800" cy="457200"/>
+            <a:off x="703580" y="331470"/>
+            <a:ext cx="5620385" cy="553085"/>
           </a:xfrm>
           <a:prstGeom prst="rect">
             <a:avLst/>
@@ -3469,8 +3542,34 @@
               </a:defRPr>
             </a:pPr>
             <a:r>
-              <a:t>检测性能: 频域检测器 vs STRIP</a:t>
-            </a:r>
+              <a:rPr>
+                <a:latin typeface="方正北魏楷书简体" panose="03000509000000000000" charset="-122"/>
+                <a:ea typeface="方正北魏楷书简体" panose="03000509000000000000" charset="-122"/>
+                <a:cs typeface="方正北魏楷书简体" panose="03000509000000000000" charset="-122"/>
+              </a:rPr>
+              <a:t>检测性能</a:t>
+            </a:r>
+            <a:r>
+              <a:rPr lang="zh-CN">
+                <a:latin typeface="方正北魏楷书简体" panose="03000509000000000000" charset="-122"/>
+                <a:ea typeface="方正北魏楷书简体" panose="03000509000000000000" charset="-122"/>
+                <a:cs typeface="方正北魏楷书简体" panose="03000509000000000000" charset="-122"/>
+              </a:rPr>
+              <a:t>：</a:t>
+            </a:r>
+            <a:r>
+              <a:rPr>
+                <a:latin typeface="方正北魏楷书简体" panose="03000509000000000000" charset="-122"/>
+                <a:ea typeface="方正北魏楷书简体" panose="03000509000000000000" charset="-122"/>
+                <a:cs typeface="方正北魏楷书简体" panose="03000509000000000000" charset="-122"/>
+              </a:rPr>
+              <a:t>频域检测器 vs STRIP</a:t>
+            </a:r>
+            <a:endParaRPr>
+              <a:latin typeface="方正北魏楷书简体" panose="03000509000000000000" charset="-122"/>
+              <a:ea typeface="方正北魏楷书简体" panose="03000509000000000000" charset="-122"/>
+              <a:cs typeface="方正北魏楷书简体" panose="03000509000000000000" charset="-122"/>
+            </a:endParaRPr>
           </a:p>
         </p:txBody>
       </p:sp>
@@ -3514,6 +3613,10 @@
           <a:lstStyle/>
           <a:p>
             <a:pPr algn="ctr"/>
+            <a:endParaRPr>
+              <a:latin typeface="方正北魏楷书简体" panose="03000509000000000000" charset="-122"/>
+              <a:ea typeface="方正北魏楷书简体" panose="03000509000000000000" charset="-122"/>
+            </a:endParaRPr>
           </a:p>
         </p:txBody>
       </p:sp>
@@ -3521,12 +3624,16 @@
         <p:nvSpPr>
           <p:cNvPr id="4" name="Rounded Rectangle 3"/>
           <p:cNvSpPr/>
-          <p:nvPr/>
-        </p:nvSpPr>
-        <p:spPr>
-          <a:xfrm>
-            <a:off x="731520" y="1828800"/>
-            <a:ext cx="3474720" cy="1828800"/>
+          <p:nvPr>
+            <p:custDataLst>
+              <p:tags r:id="rId1"/>
+            </p:custDataLst>
+          </p:nvPr>
+        </p:nvSpPr>
+        <p:spPr>
+          <a:xfrm>
+            <a:off x="1360170" y="1633220"/>
+            <a:ext cx="3474720" cy="1344295"/>
           </a:xfrm>
           <a:prstGeom prst="roundRect">
             <a:avLst/>
@@ -3559,6 +3666,10 @@
           <a:lstStyle/>
           <a:p>
             <a:pPr algn="ctr"/>
+            <a:endParaRPr>
+              <a:latin typeface="方正北魏楷书简体" panose="03000509000000000000" charset="-122"/>
+              <a:ea typeface="方正北魏楷书简体" panose="03000509000000000000" charset="-122"/>
+            </a:endParaRPr>
           </a:p>
         </p:txBody>
       </p:sp>
@@ -3566,12 +3677,16 @@
         <p:nvSpPr>
           <p:cNvPr id="5" name="TextBox 4"/>
           <p:cNvSpPr txBox="1"/>
-          <p:nvPr/>
-        </p:nvSpPr>
-        <p:spPr>
-          <a:xfrm>
-            <a:off x="909320" y="1955800"/>
-            <a:ext cx="3119120" cy="254000"/>
+          <p:nvPr>
+            <p:custDataLst>
+              <p:tags r:id="rId2"/>
+            </p:custDataLst>
+          </p:nvPr>
+        </p:nvSpPr>
+        <p:spPr>
+          <a:xfrm>
+            <a:off x="2272030" y="1732280"/>
+            <a:ext cx="1651000" cy="337185"/>
           </a:xfrm>
           <a:prstGeom prst="rect">
             <a:avLst/>
@@ -3593,8 +3708,26 @@
               </a:defRPr>
             </a:pPr>
             <a:r>
-              <a:t>频域检测器 (Ours)</a:t>
-            </a:r>
+              <a:rPr sz="1600">
+                <a:latin typeface="方正北魏楷书简体" panose="03000509000000000000" charset="-122"/>
+                <a:ea typeface="方正北魏楷书简体" panose="03000509000000000000" charset="-122"/>
+                <a:cs typeface="方正北魏楷书简体" panose="03000509000000000000" charset="-122"/>
+              </a:rPr>
+              <a:t>频域检测器</a:t>
+            </a:r>
+            <a:r>
+              <a:rPr>
+                <a:latin typeface="方正北魏楷书简体" panose="03000509000000000000" charset="-122"/>
+                <a:ea typeface="方正北魏楷书简体" panose="03000509000000000000" charset="-122"/>
+                <a:cs typeface="方正北魏楷书简体" panose="03000509000000000000" charset="-122"/>
+              </a:rPr>
+              <a:t> (Ours)</a:t>
+            </a:r>
+            <a:endParaRPr>
+              <a:latin typeface="方正北魏楷书简体" panose="03000509000000000000" charset="-122"/>
+              <a:ea typeface="方正北魏楷书简体" panose="03000509000000000000" charset="-122"/>
+              <a:cs typeface="方正北魏楷书简体" panose="03000509000000000000" charset="-122"/>
+            </a:endParaRPr>
           </a:p>
         </p:txBody>
       </p:sp>
@@ -3602,11 +3735,15 @@
         <p:nvSpPr>
           <p:cNvPr id="6" name="TextBox 5"/>
           <p:cNvSpPr txBox="1"/>
-          <p:nvPr/>
-        </p:nvSpPr>
-        <p:spPr>
-          <a:xfrm>
-            <a:off x="909320" y="2235200"/>
+          <p:nvPr>
+            <p:custDataLst>
+              <p:tags r:id="rId3"/>
+            </p:custDataLst>
+          </p:nvPr>
+        </p:nvSpPr>
+        <p:spPr>
+          <a:xfrm>
+            <a:off x="1537970" y="2039620"/>
             <a:ext cx="3119120" cy="457200"/>
           </a:xfrm>
           <a:prstGeom prst="rect">
@@ -3629,8 +3766,16 @@
               </a:defRPr>
             </a:pPr>
             <a:r>
+              <a:rPr>
+                <a:latin typeface="方正北魏楷书简体" panose="03000509000000000000" charset="-122"/>
+                <a:ea typeface="方正北魏楷书简体" panose="03000509000000000000" charset="-122"/>
+              </a:rPr>
               <a:t>AUC = 0.735</a:t>
             </a:r>
+            <a:endParaRPr>
+              <a:latin typeface="方正北魏楷书简体" panose="03000509000000000000" charset="-122"/>
+              <a:ea typeface="方正北魏楷书简体" panose="03000509000000000000" charset="-122"/>
+            </a:endParaRPr>
           </a:p>
         </p:txBody>
       </p:sp>
@@ -3638,12 +3783,16 @@
         <p:nvSpPr>
           <p:cNvPr id="7" name="TextBox 6"/>
           <p:cNvSpPr txBox="1"/>
-          <p:nvPr/>
-        </p:nvSpPr>
-        <p:spPr>
-          <a:xfrm>
-            <a:off x="909320" y="3403600"/>
-            <a:ext cx="3119120" cy="203200"/>
+          <p:nvPr>
+            <p:custDataLst>
+              <p:tags r:id="rId4"/>
+            </p:custDataLst>
+          </p:nvPr>
+        </p:nvSpPr>
+        <p:spPr>
+          <a:xfrm>
+            <a:off x="2455545" y="2551430"/>
+            <a:ext cx="1283970" cy="306705"/>
           </a:xfrm>
           <a:prstGeom prst="rect">
             <a:avLst/>
@@ -3665,8 +3814,18 @@
               </a:defRPr>
             </a:pPr>
             <a:r>
+              <a:rPr sz="1400">
+                <a:latin typeface="方正北魏楷书简体" panose="03000509000000000000" charset="-122"/>
+                <a:ea typeface="方正北魏楷书简体" panose="03000509000000000000" charset="-122"/>
+                <a:cs typeface="方正北魏楷书简体" panose="03000509000000000000" charset="-122"/>
+              </a:rPr>
               <a:t>准确率 67.33%</a:t>
             </a:r>
+            <a:endParaRPr sz="1400">
+              <a:latin typeface="方正北魏楷书简体" panose="03000509000000000000" charset="-122"/>
+              <a:ea typeface="方正北魏楷书简体" panose="03000509000000000000" charset="-122"/>
+              <a:cs typeface="方正北魏楷书简体" panose="03000509000000000000" charset="-122"/>
+            </a:endParaRPr>
           </a:p>
         </p:txBody>
       </p:sp>
@@ -3674,12 +3833,16 @@
         <p:nvSpPr>
           <p:cNvPr id="8" name="Rounded Rectangle 7"/>
           <p:cNvSpPr/>
-          <p:nvPr/>
-        </p:nvSpPr>
-        <p:spPr>
-          <a:xfrm>
-            <a:off x="4572000" y="1828800"/>
-            <a:ext cx="3474720" cy="1828800"/>
+          <p:nvPr>
+            <p:custDataLst>
+              <p:tags r:id="rId5"/>
+            </p:custDataLst>
+          </p:nvPr>
+        </p:nvSpPr>
+        <p:spPr>
+          <a:xfrm>
+            <a:off x="1360170" y="3082290"/>
+            <a:ext cx="3474720" cy="1315720"/>
           </a:xfrm>
           <a:prstGeom prst="roundRect">
             <a:avLst/>
@@ -3712,6 +3875,10 @@
           <a:lstStyle/>
           <a:p>
             <a:pPr algn="ctr"/>
+            <a:endParaRPr>
+              <a:latin typeface="方正北魏楷书简体" panose="03000509000000000000" charset="-122"/>
+              <a:ea typeface="方正北魏楷书简体" panose="03000509000000000000" charset="-122"/>
+            </a:endParaRPr>
           </a:p>
         </p:txBody>
       </p:sp>
@@ -3719,12 +3886,16 @@
         <p:nvSpPr>
           <p:cNvPr id="9" name="TextBox 8"/>
           <p:cNvSpPr txBox="1"/>
-          <p:nvPr/>
-        </p:nvSpPr>
-        <p:spPr>
-          <a:xfrm>
-            <a:off x="4749800" y="1955800"/>
-            <a:ext cx="3119120" cy="254000"/>
+          <p:nvPr>
+            <p:custDataLst>
+              <p:tags r:id="rId6"/>
+            </p:custDataLst>
+          </p:nvPr>
+        </p:nvSpPr>
+        <p:spPr>
+          <a:xfrm>
+            <a:off x="2730818" y="3209290"/>
+            <a:ext cx="733425" cy="337185"/>
           </a:xfrm>
           <a:prstGeom prst="rect">
             <a:avLst/>
@@ -3746,8 +3917,16 @@
               </a:defRPr>
             </a:pPr>
             <a:r>
+              <a:rPr sz="1600">
+                <a:latin typeface="方正北魏楷书简体" panose="03000509000000000000" charset="-122"/>
+                <a:ea typeface="方正北魏楷书简体" panose="03000509000000000000" charset="-122"/>
+              </a:rPr>
               <a:t>STRIP</a:t>
             </a:r>
+            <a:endParaRPr sz="1600">
+              <a:latin typeface="方正北魏楷书简体" panose="03000509000000000000" charset="-122"/>
+              <a:ea typeface="方正北魏楷书简体" panose="03000509000000000000" charset="-122"/>
+            </a:endParaRPr>
           </a:p>
         </p:txBody>
       </p:sp>
@@ -3755,11 +3934,15 @@
         <p:nvSpPr>
           <p:cNvPr id="10" name="TextBox 9"/>
           <p:cNvSpPr txBox="1"/>
-          <p:nvPr/>
-        </p:nvSpPr>
-        <p:spPr>
-          <a:xfrm>
-            <a:off x="4749800" y="2235200"/>
+          <p:nvPr>
+            <p:custDataLst>
+              <p:tags r:id="rId7"/>
+            </p:custDataLst>
+          </p:nvPr>
+        </p:nvSpPr>
+        <p:spPr>
+          <a:xfrm>
+            <a:off x="1537970" y="3488690"/>
             <a:ext cx="3119120" cy="457200"/>
           </a:xfrm>
           <a:prstGeom prst="rect">
@@ -3782,8 +3965,16 @@
               </a:defRPr>
             </a:pPr>
             <a:r>
+              <a:rPr>
+                <a:latin typeface="方正北魏楷书简体" panose="03000509000000000000" charset="-122"/>
+                <a:ea typeface="方正北魏楷书简体" panose="03000509000000000000" charset="-122"/>
+              </a:rPr>
               <a:t>AUC = 0.50</a:t>
             </a:r>
+            <a:endParaRPr>
+              <a:latin typeface="方正北魏楷书简体" panose="03000509000000000000" charset="-122"/>
+              <a:ea typeface="方正北魏楷书简体" panose="03000509000000000000" charset="-122"/>
+            </a:endParaRPr>
           </a:p>
         </p:txBody>
       </p:sp>
@@ -3791,12 +3982,16 @@
         <p:nvSpPr>
           <p:cNvPr id="11" name="TextBox 10"/>
           <p:cNvSpPr txBox="1"/>
-          <p:nvPr/>
-        </p:nvSpPr>
-        <p:spPr>
-          <a:xfrm>
-            <a:off x="4749800" y="3403600"/>
-            <a:ext cx="3119120" cy="203200"/>
+          <p:nvPr>
+            <p:custDataLst>
+              <p:tags r:id="rId8"/>
+            </p:custDataLst>
+          </p:nvPr>
+        </p:nvSpPr>
+        <p:spPr>
+          <a:xfrm>
+            <a:off x="2472690" y="3965575"/>
+            <a:ext cx="1249680" cy="306705"/>
           </a:xfrm>
           <a:prstGeom prst="rect">
             <a:avLst/>
@@ -3818,8 +4013,16 @@
               </a:defRPr>
             </a:pPr>
             <a:r>
+              <a:rPr sz="1400">
+                <a:latin typeface="方正北魏楷书简体" panose="03000509000000000000" charset="-122"/>
+                <a:ea typeface="方正北魏楷书简体" panose="03000509000000000000" charset="-122"/>
+              </a:rPr>
               <a:t>等同随机猜测</a:t>
             </a:r>
+            <a:endParaRPr sz="1400">
+              <a:latin typeface="方正北魏楷书简体" panose="03000509000000000000" charset="-122"/>
+              <a:ea typeface="方正北魏楷书简体" panose="03000509000000000000" charset="-122"/>
+            </a:endParaRPr>
           </a:p>
         </p:txBody>
       </p:sp>
@@ -3827,12 +4030,16 @@
         <p:nvSpPr>
           <p:cNvPr id="12" name="Rounded Rectangle 11"/>
           <p:cNvSpPr/>
-          <p:nvPr/>
-        </p:nvSpPr>
-        <p:spPr>
-          <a:xfrm>
-            <a:off x="8412480" y="1828800"/>
-            <a:ext cx="3200400" cy="1828800"/>
+          <p:nvPr>
+            <p:custDataLst>
+              <p:tags r:id="rId9"/>
+            </p:custDataLst>
+          </p:nvPr>
+        </p:nvSpPr>
+        <p:spPr>
+          <a:xfrm>
+            <a:off x="1360170" y="4578985"/>
+            <a:ext cx="3474720" cy="1328420"/>
           </a:xfrm>
           <a:prstGeom prst="roundRect">
             <a:avLst/>
@@ -3865,6 +4072,10 @@
           <a:lstStyle/>
           <a:p>
             <a:pPr algn="ctr"/>
+            <a:endParaRPr>
+              <a:latin typeface="方正北魏楷书简体" panose="03000509000000000000" charset="-122"/>
+              <a:ea typeface="方正北魏楷书简体" panose="03000509000000000000" charset="-122"/>
+            </a:endParaRPr>
           </a:p>
         </p:txBody>
       </p:sp>
@@ -3872,12 +4083,108 @@
         <p:nvSpPr>
           <p:cNvPr id="13" name="TextBox 12"/>
           <p:cNvSpPr txBox="1"/>
+          <p:nvPr>
+            <p:custDataLst>
+              <p:tags r:id="rId10"/>
+            </p:custDataLst>
+          </p:nvPr>
+        </p:nvSpPr>
+        <p:spPr>
+          <a:xfrm>
+            <a:off x="1537970" y="4705985"/>
+            <a:ext cx="3088640" cy="189230"/>
+          </a:xfrm>
+          <a:prstGeom prst="rect">
+            <a:avLst/>
+          </a:prstGeom>
+          <a:noFill/>
+        </p:spPr>
+        <p:txBody>
+          <a:bodyPr wrap="square">
+            <a:noAutofit/>
+          </a:bodyPr>
+          <a:lstStyle/>
+          <a:p>
+            <a:pPr algn="ctr">
+              <a:defRPr sz="1100" b="0">
+                <a:solidFill>
+                  <a:srgbClr val="8C8C8C"/>
+                </a:solidFill>
+                <a:latin typeface="微软雅黑" panose="020B0503020204020204" charset="-122"/>
+              </a:defRPr>
+            </a:pPr>
+            <a:r>
+              <a:rPr sz="1400">
+                <a:latin typeface="方正北魏楷书简体" panose="03000509000000000000" charset="-122"/>
+                <a:ea typeface="方正北魏楷书简体" panose="03000509000000000000" charset="-122"/>
+              </a:rPr>
+              <a:t>提升幅度</a:t>
+            </a:r>
+            <a:endParaRPr sz="1400">
+              <a:latin typeface="方正北魏楷书简体" panose="03000509000000000000" charset="-122"/>
+              <a:ea typeface="方正北魏楷书简体" panose="03000509000000000000" charset="-122"/>
+            </a:endParaRPr>
+          </a:p>
+        </p:txBody>
+      </p:sp>
+      <p:sp>
+        <p:nvSpPr>
+          <p:cNvPr id="14" name="TextBox 13"/>
+          <p:cNvSpPr txBox="1"/>
+          <p:nvPr>
+            <p:custDataLst>
+              <p:tags r:id="rId11"/>
+            </p:custDataLst>
+          </p:nvPr>
+        </p:nvSpPr>
+        <p:spPr>
+          <a:xfrm>
+            <a:off x="1537970" y="4985385"/>
+            <a:ext cx="3088640" cy="356870"/>
+          </a:xfrm>
+          <a:prstGeom prst="rect">
+            <a:avLst/>
+          </a:prstGeom>
+          <a:noFill/>
+        </p:spPr>
+        <p:txBody>
+          <a:bodyPr wrap="square">
+            <a:noAutofit/>
+          </a:bodyPr>
+          <a:lstStyle/>
+          <a:p>
+            <a:pPr algn="ctr">
+              <a:defRPr sz="2600" b="1">
+                <a:solidFill>
+                  <a:srgbClr val="C2A497"/>
+                </a:solidFill>
+                <a:latin typeface="微软雅黑" panose="020B0503020204020204" charset="-122"/>
+              </a:defRPr>
+            </a:pPr>
+            <a:r>
+              <a:rPr>
+                <a:latin typeface="方正北魏楷书简体" panose="03000509000000000000" charset="-122"/>
+                <a:ea typeface="方正北魏楷书简体" panose="03000509000000000000" charset="-122"/>
+              </a:rPr>
+              <a:t>+23.5% AUC</a:t>
+            </a:r>
+            <a:endParaRPr>
+              <a:latin typeface="方正北魏楷书简体" panose="03000509000000000000" charset="-122"/>
+              <a:ea typeface="方正北魏楷书简体" panose="03000509000000000000" charset="-122"/>
+            </a:endParaRPr>
+          </a:p>
+        </p:txBody>
+      </p:sp>
+      <p:sp>
+        <p:nvSpPr>
+          <p:cNvPr id="17" name="TextBox 16"/>
+          <p:cNvSpPr txBox="1"/>
           <p:nvPr/>
         </p:nvSpPr>
         <p:spPr>
           <a:xfrm>
-            <a:off x="8590280" y="1955800"/>
-            <a:ext cx="2844800" cy="254000"/>
+            <a:off x="6448743" y="5273675"/>
+            <a:ext cx="4426585" cy="553085"/>
           </a:xfrm>
           <a:prstGeom prst="rect">
             <a:avLst/>
@@ -3891,148 +4198,27 @@
           <a:lstStyle/>
           <a:p>
             <a:pPr algn="ctr">
-              <a:defRPr sz="1100" b="0">
-                <a:solidFill>
-                  <a:srgbClr val="8C8C8C"/>
-                </a:solidFill>
-                <a:latin typeface="微软雅黑" panose="020B0503020204020204" charset="-122"/>
-              </a:defRPr>
-            </a:pPr>
-            <a:r>
-              <a:t>提升幅度</a:t>
-            </a:r>
-          </a:p>
-        </p:txBody>
-      </p:sp>
-      <p:sp>
-        <p:nvSpPr>
-          <p:cNvPr id="14" name="TextBox 13"/>
-          <p:cNvSpPr txBox="1"/>
-          <p:nvPr/>
-        </p:nvSpPr>
-        <p:spPr>
-          <a:xfrm>
-            <a:off x="8590280" y="2235200"/>
-            <a:ext cx="2844800" cy="457200"/>
-          </a:xfrm>
-          <a:prstGeom prst="rect">
-            <a:avLst/>
-          </a:prstGeom>
-          <a:noFill/>
-        </p:spPr>
-        <p:txBody>
-          <a:bodyPr wrap="none">
-            <a:spAutoFit/>
-          </a:bodyPr>
-          <a:lstStyle/>
-          <a:p>
-            <a:pPr algn="ctr">
-              <a:defRPr sz="2600" b="1">
-                <a:solidFill>
-                  <a:srgbClr val="C2A497"/>
-                </a:solidFill>
-                <a:latin typeface="微软雅黑" panose="020B0503020204020204" charset="-122"/>
-              </a:defRPr>
-            </a:pPr>
-            <a:r>
-              <a:t>+23.5% AUC</a:t>
-            </a:r>
-          </a:p>
-        </p:txBody>
-      </p:sp>
-      <p:sp>
-        <p:nvSpPr>
-          <p:cNvPr id="15" name="TextBox 14"/>
-          <p:cNvSpPr txBox="1"/>
-          <p:nvPr/>
-        </p:nvSpPr>
-        <p:spPr>
-          <a:xfrm>
-            <a:off x="8590280" y="3403600"/>
-            <a:ext cx="2844800" cy="203200"/>
-          </a:xfrm>
-          <a:prstGeom prst="rect">
-            <a:avLst/>
-          </a:prstGeom>
-          <a:noFill/>
-        </p:spPr>
-        <p:txBody>
-          <a:bodyPr wrap="none">
-            <a:spAutoFit/>
-          </a:bodyPr>
-          <a:lstStyle/>
-          <a:p>
-            <a:pPr algn="ctr">
-              <a:defRPr sz="900" b="0">
-                <a:solidFill>
-                  <a:srgbClr val="8C8C8C"/>
-                </a:solidFill>
-                <a:latin typeface="微软雅黑" panose="020B0503020204020204" charset="-122"/>
-              </a:defRPr>
-            </a:pPr>
-            <a:r>
-              <a:t>远超随机基线</a:t>
-            </a:r>
-          </a:p>
-        </p:txBody>
-      </p:sp>
-      <p:sp>
-        <p:nvSpPr>
-          <p:cNvPr id="16" name="TextBox 15"/>
-          <p:cNvSpPr txBox="1"/>
-          <p:nvPr/>
-        </p:nvSpPr>
-        <p:spPr>
-          <a:xfrm>
-            <a:off x="731520" y="4114800"/>
-            <a:ext cx="10698480" cy="274320"/>
-          </a:xfrm>
-          <a:prstGeom prst="rect">
-            <a:avLst/>
-          </a:prstGeom>
-          <a:noFill/>
-        </p:spPr>
-        <p:txBody>
-          <a:bodyPr wrap="none">
-            <a:spAutoFit/>
-          </a:bodyPr>
-          <a:lstStyle/>
-          <a:p>
-            <a:pPr algn="ctr">
-              <a:defRPr sz="1200" b="0">
-                <a:solidFill>
-                  <a:srgbClr val="8C8C8C"/>
-                </a:solidFill>
-                <a:latin typeface="微软雅黑" panose="020B0503020204020204" charset="-122"/>
-              </a:defRPr>
-            </a:pPr>
-            <a:r>
-              <a:t>插入 results/freq_detector/roc_curve.png</a:t>
-            </a:r>
-          </a:p>
-        </p:txBody>
-      </p:sp>
-      <p:sp>
-        <p:nvSpPr>
-          <p:cNvPr id="17" name="TextBox 16"/>
-          <p:cNvSpPr txBox="1"/>
-          <p:nvPr/>
-        </p:nvSpPr>
-        <p:spPr>
-          <a:xfrm>
-            <a:off x="731520" y="5303520"/>
-            <a:ext cx="10698480" cy="548640"/>
-          </a:xfrm>
-          <a:prstGeom prst="rect">
-            <a:avLst/>
-          </a:prstGeom>
-          <a:noFill/>
-        </p:spPr>
-        <p:txBody>
-          <a:bodyPr wrap="none">
-            <a:spAutoFit/>
-          </a:bodyPr>
-          <a:lstStyle/>
+              <a:defRPr sz="1500" b="0">
+                <a:solidFill>
+                  <a:srgbClr val="3D3D3D"/>
+                </a:solidFill>
+                <a:latin typeface="微软雅黑" panose="020B0503020204020204" charset="-122"/>
+              </a:defRPr>
+            </a:pPr>
+            <a:r>
+              <a:rPr>
+                <a:latin typeface="方正北魏楷书简体" panose="03000509000000000000" charset="-122"/>
+                <a:ea typeface="方正北魏楷书简体" panose="03000509000000000000" charset="-122"/>
+                <a:cs typeface="方正北魏楷书简体" panose="03000509000000000000" charset="-122"/>
+              </a:rPr>
+              <a:t>STRIP看模型输出熵-&gt;无法区分(AUC=0.50)  </a:t>
+            </a:r>
+            <a:endParaRPr>
+              <a:latin typeface="方正北魏楷书简体" panose="03000509000000000000" charset="-122"/>
+              <a:ea typeface="方正北魏楷书简体" panose="03000509000000000000" charset="-122"/>
+              <a:cs typeface="方正北魏楷书简体" panose="03000509000000000000" charset="-122"/>
+            </a:endParaRPr>
+          </a:p>
           <a:p>
             <a:pPr algn="ctr">
               <a:defRPr sz="1500" b="0">
@@ -4043,8 +4229,18 @@
               </a:defRPr>
             </a:pPr>
             <a:r>
-              <a:t>STRIP看模型输出熵-&gt;无法区分(AUC=0.50)  |  频域检测器看图像信号-&gt;能有效检测(AUC=0.735)</a:t>
-            </a:r>
+              <a:rPr>
+                <a:latin typeface="方正北魏楷书简体" panose="03000509000000000000" charset="-122"/>
+                <a:ea typeface="方正北魏楷书简体" panose="03000509000000000000" charset="-122"/>
+                <a:cs typeface="方正北魏楷书简体" panose="03000509000000000000" charset="-122"/>
+              </a:rPr>
+              <a:t>频域检测器看图像信号-&gt;能有效检测(AUC=0.735)</a:t>
+            </a:r>
+            <a:endParaRPr>
+              <a:latin typeface="方正北魏楷书简体" panose="03000509000000000000" charset="-122"/>
+              <a:ea typeface="方正北魏楷书简体" panose="03000509000000000000" charset="-122"/>
+              <a:cs typeface="方正北魏楷书简体" panose="03000509000000000000" charset="-122"/>
+            </a:endParaRPr>
           </a:p>
         </p:txBody>
       </p:sp>
@@ -4057,15 +4253,15 @@
           <p:nvPr/>
         </p:nvPicPr>
         <p:blipFill>
-          <a:blip r:embed="rId1"/>
+          <a:blip r:embed="rId12"/>
           <a:stretch>
             <a:fillRect/>
           </a:stretch>
         </p:blipFill>
         <p:spPr>
           <a:xfrm>
-            <a:off x="6704965" y="52705"/>
-            <a:ext cx="2752090" cy="2064385"/>
+            <a:off x="6123940" y="1177290"/>
+            <a:ext cx="5076825" cy="3808095"/>
           </a:xfrm>
           <a:prstGeom prst="rect">
             <a:avLst/>
@@ -4106,8 +4302,8 @@
         </p:nvSpPr>
         <p:spPr>
           <a:xfrm>
-            <a:off x="731520" y="457200"/>
-            <a:ext cx="6400800" cy="457200"/>
+            <a:off x="731520" y="380365"/>
+            <a:ext cx="2480310" cy="553085"/>
           </a:xfrm>
           <a:prstGeom prst="rect">
             <a:avLst/>
@@ -4129,8 +4325,16 @@
               </a:defRPr>
             </a:pPr>
             <a:r>
-              <a:t>全部实验结果汇总</a:t>
-            </a:r>
+              <a:rPr>
+                <a:latin typeface="方正北魏楷书简体" panose="03000509000000000000" charset="-122"/>
+                <a:ea typeface="方正北魏楷书简体" panose="03000509000000000000" charset="-122"/>
+              </a:rPr>
+              <a:t>实验结果汇总</a:t>
+            </a:r>
+            <a:endParaRPr>
+              <a:latin typeface="方正北魏楷书简体" panose="03000509000000000000" charset="-122"/>
+              <a:ea typeface="方正北魏楷书简体" panose="03000509000000000000" charset="-122"/>
+            </a:endParaRPr>
           </a:p>
         </p:txBody>
       </p:sp>
@@ -5655,8 +5859,8 @@
         </p:nvSpPr>
         <p:spPr>
           <a:xfrm>
-            <a:off x="1828800" y="1097280"/>
-            <a:ext cx="8534095" cy="731520"/>
+            <a:off x="5519903" y="594360"/>
+            <a:ext cx="1151890" cy="675640"/>
           </a:xfrm>
           <a:prstGeom prst="rect">
             <a:avLst/>
@@ -5678,8 +5882,16 @@
               </a:defRPr>
             </a:pPr>
             <a:r>
+              <a:rPr>
+                <a:latin typeface="方正北魏楷书简体" panose="03000509000000000000" charset="-122"/>
+                <a:ea typeface="方正北魏楷书简体" panose="03000509000000000000" charset="-122"/>
+              </a:rPr>
               <a:t>结论</a:t>
             </a:r>
+            <a:endParaRPr>
+              <a:latin typeface="方正北魏楷书简体" panose="03000509000000000000" charset="-122"/>
+              <a:ea typeface="方正北魏楷书简体" panose="03000509000000000000" charset="-122"/>
+            </a:endParaRPr>
           </a:p>
         </p:txBody>
       </p:sp>
@@ -5691,7 +5903,7 @@
         </p:nvSpPr>
         <p:spPr>
           <a:xfrm>
-            <a:off x="4572000" y="1828800"/>
+            <a:off x="4572000" y="1276985"/>
             <a:ext cx="3047695" cy="12700"/>
           </a:xfrm>
           <a:prstGeom prst="rect">
@@ -5723,6 +5935,10 @@
           <a:lstStyle/>
           <a:p>
             <a:pPr algn="ctr"/>
+            <a:endParaRPr>
+              <a:latin typeface="方正北魏楷书简体" panose="03000509000000000000" charset="-122"/>
+              <a:ea typeface="方正北魏楷书简体" panose="03000509000000000000" charset="-122"/>
+            </a:endParaRPr>
           </a:p>
         </p:txBody>
       </p:sp>
@@ -5730,11 +5946,15 @@
         <p:nvSpPr>
           <p:cNvPr id="4" name="TextBox 3"/>
           <p:cNvSpPr txBox="1"/>
-          <p:nvPr/>
-        </p:nvSpPr>
-        <p:spPr>
-          <a:xfrm>
-            <a:off x="1828800" y="2377440"/>
+          <p:nvPr>
+            <p:custDataLst>
+              <p:tags r:id="rId1"/>
+            </p:custDataLst>
+          </p:nvPr>
+        </p:nvSpPr>
+        <p:spPr>
+          <a:xfrm>
+            <a:off x="1828800" y="1874520"/>
             <a:ext cx="457200" cy="457200"/>
           </a:xfrm>
           <a:prstGeom prst="rect">
@@ -5757,8 +5977,16 @@
               </a:defRPr>
             </a:pPr>
             <a:r>
+              <a:rPr>
+                <a:latin typeface="方正北魏楷书简体" panose="03000509000000000000" charset="-122"/>
+                <a:ea typeface="方正北魏楷书简体" panose="03000509000000000000" charset="-122"/>
+              </a:rPr>
               <a:t>1</a:t>
             </a:r>
+            <a:endParaRPr>
+              <a:latin typeface="方正北魏楷书简体" panose="03000509000000000000" charset="-122"/>
+              <a:ea typeface="方正北魏楷书简体" panose="03000509000000000000" charset="-122"/>
+            </a:endParaRPr>
           </a:p>
         </p:txBody>
       </p:sp>
@@ -5766,11 +5994,15 @@
         <p:nvSpPr>
           <p:cNvPr id="5" name="TextBox 4"/>
           <p:cNvSpPr txBox="1"/>
-          <p:nvPr/>
-        </p:nvSpPr>
-        <p:spPr>
-          <a:xfrm>
-            <a:off x="2468880" y="2377440"/>
+          <p:nvPr>
+            <p:custDataLst>
+              <p:tags r:id="rId2"/>
+            </p:custDataLst>
+          </p:nvPr>
+        </p:nvSpPr>
+        <p:spPr>
+          <a:xfrm>
+            <a:off x="2468880" y="1874520"/>
             <a:ext cx="3657600" cy="320040"/>
           </a:xfrm>
           <a:prstGeom prst="rect">
@@ -5793,8 +6025,18 @@
               </a:defRPr>
             </a:pPr>
             <a:r>
+              <a:rPr>
+                <a:latin typeface="方正北魏楷书简体" panose="03000509000000000000" charset="-122"/>
+                <a:ea typeface="方正北魏楷书简体" panose="03000509000000000000" charset="-122"/>
+                <a:cs typeface="方正北魏楷书简体" panose="03000509000000000000" charset="-122"/>
+              </a:rPr>
               <a:t>WaNet攻击高度有效</a:t>
             </a:r>
+            <a:endParaRPr>
+              <a:latin typeface="方正北魏楷书简体" panose="03000509000000000000" charset="-122"/>
+              <a:ea typeface="方正北魏楷书简体" panose="03000509000000000000" charset="-122"/>
+              <a:cs typeface="方正北魏楷书简体" panose="03000509000000000000" charset="-122"/>
+            </a:endParaRPr>
           </a:p>
         </p:txBody>
       </p:sp>
@@ -5802,12 +6044,16 @@
         <p:nvSpPr>
           <p:cNvPr id="6" name="TextBox 5"/>
           <p:cNvSpPr txBox="1"/>
-          <p:nvPr/>
-        </p:nvSpPr>
-        <p:spPr>
-          <a:xfrm>
-            <a:off x="2468880" y="2743200"/>
-            <a:ext cx="7772400" cy="320040"/>
+          <p:nvPr>
+            <p:custDataLst>
+              <p:tags r:id="rId3"/>
+            </p:custDataLst>
+          </p:nvPr>
+        </p:nvSpPr>
+        <p:spPr>
+          <a:xfrm>
+            <a:off x="2468880" y="2240280"/>
+            <a:ext cx="4109720" cy="337185"/>
           </a:xfrm>
           <a:prstGeom prst="rect">
             <a:avLst/>
@@ -5829,8 +6075,18 @@
               </a:defRPr>
             </a:pPr>
             <a:r>
+              <a:rPr sz="1600">
+                <a:latin typeface="方正北魏楷书简体" panose="03000509000000000000" charset="-122"/>
+                <a:ea typeface="方正北魏楷书简体" panose="03000509000000000000" charset="-122"/>
+                <a:cs typeface="方正北魏楷书简体" panose="03000509000000000000" charset="-122"/>
+              </a:rPr>
               <a:t>CIFAR-10上ASR达99.15%, Clean保持92.84%</a:t>
             </a:r>
+            <a:endParaRPr sz="1600">
+              <a:latin typeface="方正北魏楷书简体" panose="03000509000000000000" charset="-122"/>
+              <a:ea typeface="方正北魏楷书简体" panose="03000509000000000000" charset="-122"/>
+              <a:cs typeface="方正北魏楷书简体" panose="03000509000000000000" charset="-122"/>
+            </a:endParaRPr>
           </a:p>
         </p:txBody>
       </p:sp>
@@ -5838,11 +6094,15 @@
         <p:nvSpPr>
           <p:cNvPr id="7" name="TextBox 6"/>
           <p:cNvSpPr txBox="1"/>
-          <p:nvPr/>
-        </p:nvSpPr>
-        <p:spPr>
-          <a:xfrm>
-            <a:off x="1828800" y="3383280"/>
+          <p:nvPr>
+            <p:custDataLst>
+              <p:tags r:id="rId4"/>
+            </p:custDataLst>
+          </p:nvPr>
+        </p:nvSpPr>
+        <p:spPr>
+          <a:xfrm>
+            <a:off x="1828800" y="2880360"/>
             <a:ext cx="457200" cy="457200"/>
           </a:xfrm>
           <a:prstGeom prst="rect">
@@ -5865,8 +6125,16 @@
               </a:defRPr>
             </a:pPr>
             <a:r>
+              <a:rPr>
+                <a:latin typeface="方正北魏楷书简体" panose="03000509000000000000" charset="-122"/>
+                <a:ea typeface="方正北魏楷书简体" panose="03000509000000000000" charset="-122"/>
+              </a:rPr>
               <a:t>2</a:t>
             </a:r>
+            <a:endParaRPr>
+              <a:latin typeface="方正北魏楷书简体" panose="03000509000000000000" charset="-122"/>
+              <a:ea typeface="方正北魏楷书简体" panose="03000509000000000000" charset="-122"/>
+            </a:endParaRPr>
           </a:p>
         </p:txBody>
       </p:sp>
@@ -5874,11 +6142,15 @@
         <p:nvSpPr>
           <p:cNvPr id="8" name="TextBox 7"/>
           <p:cNvSpPr txBox="1"/>
-          <p:nvPr/>
-        </p:nvSpPr>
-        <p:spPr>
-          <a:xfrm>
-            <a:off x="2468880" y="3383280"/>
+          <p:nvPr>
+            <p:custDataLst>
+              <p:tags r:id="rId5"/>
+            </p:custDataLst>
+          </p:nvPr>
+        </p:nvSpPr>
+        <p:spPr>
+          <a:xfrm>
+            <a:off x="2468880" y="2880360"/>
             <a:ext cx="3657600" cy="320040"/>
           </a:xfrm>
           <a:prstGeom prst="rect">
@@ -5901,8 +6173,18 @@
               </a:defRPr>
             </a:pPr>
             <a:r>
+              <a:rPr>
+                <a:latin typeface="方正北魏楷书简体" panose="03000509000000000000" charset="-122"/>
+                <a:ea typeface="方正北魏楷书简体" panose="03000509000000000000" charset="-122"/>
+                <a:cs typeface="方正北魏楷书简体" panose="03000509000000000000" charset="-122"/>
+              </a:rPr>
               <a:t>Noise Mode是绕过防御的关键</a:t>
             </a:r>
+            <a:endParaRPr>
+              <a:latin typeface="方正北魏楷书简体" panose="03000509000000000000" charset="-122"/>
+              <a:ea typeface="方正北魏楷书简体" panose="03000509000000000000" charset="-122"/>
+              <a:cs typeface="方正北魏楷书简体" panose="03000509000000000000" charset="-122"/>
+            </a:endParaRPr>
           </a:p>
         </p:txBody>
       </p:sp>
@@ -5910,12 +6192,16 @@
         <p:nvSpPr>
           <p:cNvPr id="9" name="TextBox 8"/>
           <p:cNvSpPr txBox="1"/>
-          <p:nvPr/>
-        </p:nvSpPr>
-        <p:spPr>
-          <a:xfrm>
-            <a:off x="2468880" y="3749040"/>
-            <a:ext cx="7772400" cy="320040"/>
+          <p:nvPr>
+            <p:custDataLst>
+              <p:tags r:id="rId6"/>
+            </p:custDataLst>
+          </p:nvPr>
+        </p:nvSpPr>
+        <p:spPr>
+          <a:xfrm>
+            <a:off x="2468880" y="3246120"/>
+            <a:ext cx="4328795" cy="337185"/>
           </a:xfrm>
           <a:prstGeom prst="rect">
             <a:avLst/>
@@ -5937,8 +6223,34 @@
               </a:defRPr>
             </a:pPr>
             <a:r>
-              <a:t>无Noise时Cross=0%, 后门可被Neural Cleanse检测</a:t>
-            </a:r>
+              <a:rPr sz="1600">
+                <a:latin typeface="方正北魏楷书简体" panose="03000509000000000000" charset="-122"/>
+                <a:ea typeface="方正北魏楷书简体" panose="03000509000000000000" charset="-122"/>
+                <a:cs typeface="方正北魏楷书简体" panose="03000509000000000000" charset="-122"/>
+              </a:rPr>
+              <a:t>无Noise时Cross=0%</a:t>
+            </a:r>
+            <a:r>
+              <a:rPr lang="zh-CN" sz="1600">
+                <a:latin typeface="方正北魏楷书简体" panose="03000509000000000000" charset="-122"/>
+                <a:ea typeface="方正北魏楷书简体" panose="03000509000000000000" charset="-122"/>
+                <a:cs typeface="方正北魏楷书简体" panose="03000509000000000000" charset="-122"/>
+              </a:rPr>
+              <a:t>，</a:t>
+            </a:r>
+            <a:r>
+              <a:rPr sz="1600">
+                <a:latin typeface="方正北魏楷书简体" panose="03000509000000000000" charset="-122"/>
+                <a:ea typeface="方正北魏楷书简体" panose="03000509000000000000" charset="-122"/>
+                <a:cs typeface="方正北魏楷书简体" panose="03000509000000000000" charset="-122"/>
+              </a:rPr>
+              <a:t>门可被Neural Cleanse检测</a:t>
+            </a:r>
+            <a:endParaRPr sz="1600">
+              <a:latin typeface="方正北魏楷书简体" panose="03000509000000000000" charset="-122"/>
+              <a:ea typeface="方正北魏楷书简体" panose="03000509000000000000" charset="-122"/>
+              <a:cs typeface="方正北魏楷书简体" panose="03000509000000000000" charset="-122"/>
+            </a:endParaRPr>
           </a:p>
         </p:txBody>
       </p:sp>
@@ -5946,11 +6258,15 @@
         <p:nvSpPr>
           <p:cNvPr id="10" name="TextBox 9"/>
           <p:cNvSpPr txBox="1"/>
-          <p:nvPr/>
-        </p:nvSpPr>
-        <p:spPr>
-          <a:xfrm>
-            <a:off x="1828800" y="4389120"/>
+          <p:nvPr>
+            <p:custDataLst>
+              <p:tags r:id="rId7"/>
+            </p:custDataLst>
+          </p:nvPr>
+        </p:nvSpPr>
+        <p:spPr>
+          <a:xfrm>
+            <a:off x="1828800" y="3886200"/>
             <a:ext cx="457200" cy="457200"/>
           </a:xfrm>
           <a:prstGeom prst="rect">
@@ -5973,8 +6289,16 @@
               </a:defRPr>
             </a:pPr>
             <a:r>
+              <a:rPr>
+                <a:latin typeface="方正北魏楷书简体" panose="03000509000000000000" charset="-122"/>
+                <a:ea typeface="方正北魏楷书简体" panose="03000509000000000000" charset="-122"/>
+              </a:rPr>
               <a:t>3</a:t>
             </a:r>
+            <a:endParaRPr>
+              <a:latin typeface="方正北魏楷书简体" panose="03000509000000000000" charset="-122"/>
+              <a:ea typeface="方正北魏楷书简体" panose="03000509000000000000" charset="-122"/>
+            </a:endParaRPr>
           </a:p>
         </p:txBody>
       </p:sp>
@@ -5982,11 +6306,15 @@
         <p:nvSpPr>
           <p:cNvPr id="11" name="TextBox 10"/>
           <p:cNvSpPr txBox="1"/>
-          <p:nvPr/>
-        </p:nvSpPr>
-        <p:spPr>
-          <a:xfrm>
-            <a:off x="2468880" y="4389120"/>
+          <p:nvPr>
+            <p:custDataLst>
+              <p:tags r:id="rId8"/>
+            </p:custDataLst>
+          </p:nvPr>
+        </p:nvSpPr>
+        <p:spPr>
+          <a:xfrm>
+            <a:off x="2468880" y="3886200"/>
             <a:ext cx="3657600" cy="320040"/>
           </a:xfrm>
           <a:prstGeom prst="rect">
@@ -6009,8 +6337,18 @@
               </a:defRPr>
             </a:pPr>
             <a:r>
+              <a:rPr>
+                <a:latin typeface="方正北魏楷书简体" panose="03000509000000000000" charset="-122"/>
+                <a:ea typeface="方正北魏楷书简体" panose="03000509000000000000" charset="-122"/>
+                <a:cs typeface="方正北魏楷书简体" panose="03000509000000000000" charset="-122"/>
+              </a:rPr>
               <a:t>Warping参数高度敏感</a:t>
             </a:r>
+            <a:endParaRPr>
+              <a:latin typeface="方正北魏楷书简体" panose="03000509000000000000" charset="-122"/>
+              <a:ea typeface="方正北魏楷书简体" panose="03000509000000000000" charset="-122"/>
+              <a:cs typeface="方正北魏楷书简体" panose="03000509000000000000" charset="-122"/>
+            </a:endParaRPr>
           </a:p>
         </p:txBody>
       </p:sp>
@@ -6018,12 +6356,16 @@
         <p:nvSpPr>
           <p:cNvPr id="12" name="TextBox 11"/>
           <p:cNvSpPr txBox="1"/>
-          <p:nvPr/>
-        </p:nvSpPr>
-        <p:spPr>
-          <a:xfrm>
-            <a:off x="2468880" y="4754880"/>
-            <a:ext cx="7772400" cy="320040"/>
+          <p:nvPr>
+            <p:custDataLst>
+              <p:tags r:id="rId9"/>
+            </p:custDataLst>
+          </p:nvPr>
+        </p:nvSpPr>
+        <p:spPr>
+          <a:xfrm>
+            <a:off x="2468880" y="4251960"/>
+            <a:ext cx="4531360" cy="337185"/>
           </a:xfrm>
           <a:prstGeom prst="rect">
             <a:avLst/>
@@ -6045,8 +6387,34 @@
               </a:defRPr>
             </a:pPr>
             <a:r>
-              <a:t>s&lt;0.5或k&lt;4时攻击大幅下降 — 存在狭窄有效区间</a:t>
-            </a:r>
+              <a:rPr sz="1600">
+                <a:latin typeface="方正北魏楷书简体" panose="03000509000000000000" charset="-122"/>
+                <a:ea typeface="方正北魏楷书简体" panose="03000509000000000000" charset="-122"/>
+                <a:cs typeface="方正北魏楷书简体" panose="03000509000000000000" charset="-122"/>
+              </a:rPr>
+              <a:t>s</a:t>
+            </a:r>
+            <a:r>
+              <a:rPr lang="en-US" sz="1600">
+                <a:latin typeface="方正北魏楷书简体" panose="03000509000000000000" charset="-122"/>
+                <a:ea typeface="方正北魏楷书简体" panose="03000509000000000000" charset="-122"/>
+                <a:cs typeface="方正北魏楷书简体" panose="03000509000000000000" charset="-122"/>
+              </a:rPr>
+              <a:t>&lt;</a:t>
+            </a:r>
+            <a:r>
+              <a:rPr sz="1600">
+                <a:latin typeface="方正北魏楷书简体" panose="03000509000000000000" charset="-122"/>
+                <a:ea typeface="方正北魏楷书简体" panose="03000509000000000000" charset="-122"/>
+                <a:cs typeface="方正北魏楷书简体" panose="03000509000000000000" charset="-122"/>
+              </a:rPr>
+              <a:t>0.5或k&lt;4时攻击大幅下降 — 存在狭窄有效区间</a:t>
+            </a:r>
+            <a:endParaRPr sz="1600">
+              <a:latin typeface="方正北魏楷书简体" panose="03000509000000000000" charset="-122"/>
+              <a:ea typeface="方正北魏楷书简体" panose="03000509000000000000" charset="-122"/>
+              <a:cs typeface="方正北魏楷书简体" panose="03000509000000000000" charset="-122"/>
+            </a:endParaRPr>
           </a:p>
         </p:txBody>
       </p:sp>
@@ -6054,11 +6422,15 @@
         <p:nvSpPr>
           <p:cNvPr id="13" name="TextBox 12"/>
           <p:cNvSpPr txBox="1"/>
-          <p:nvPr/>
-        </p:nvSpPr>
-        <p:spPr>
-          <a:xfrm>
-            <a:off x="1828800" y="5394960"/>
+          <p:nvPr>
+            <p:custDataLst>
+              <p:tags r:id="rId10"/>
+            </p:custDataLst>
+          </p:nvPr>
+        </p:nvSpPr>
+        <p:spPr>
+          <a:xfrm>
+            <a:off x="1828800" y="4892040"/>
             <a:ext cx="457200" cy="457200"/>
           </a:xfrm>
           <a:prstGeom prst="rect">
@@ -6081,8 +6453,16 @@
               </a:defRPr>
             </a:pPr>
             <a:r>
+              <a:rPr>
+                <a:latin typeface="方正北魏楷书简体" panose="03000509000000000000" charset="-122"/>
+                <a:ea typeface="方正北魏楷书简体" panose="03000509000000000000" charset="-122"/>
+              </a:rPr>
               <a:t>4</a:t>
             </a:r>
+            <a:endParaRPr>
+              <a:latin typeface="方正北魏楷书简体" panose="03000509000000000000" charset="-122"/>
+              <a:ea typeface="方正北魏楷书简体" panose="03000509000000000000" charset="-122"/>
+            </a:endParaRPr>
           </a:p>
         </p:txBody>
       </p:sp>
@@ -6090,12 +6470,16 @@
         <p:nvSpPr>
           <p:cNvPr id="14" name="TextBox 13"/>
           <p:cNvSpPr txBox="1"/>
-          <p:nvPr/>
-        </p:nvSpPr>
-        <p:spPr>
-          <a:xfrm>
-            <a:off x="2468880" y="5394960"/>
-            <a:ext cx="3657600" cy="320040"/>
+          <p:nvPr>
+            <p:custDataLst>
+              <p:tags r:id="rId11"/>
+            </p:custDataLst>
+          </p:nvPr>
+        </p:nvSpPr>
+        <p:spPr>
+          <a:xfrm>
+            <a:off x="2468880" y="4892040"/>
+            <a:ext cx="1969770" cy="398780"/>
           </a:xfrm>
           <a:prstGeom prst="rect">
             <a:avLst/>
@@ -6117,8 +6501,27 @@
               </a:defRPr>
             </a:pPr>
             <a:r>
-              <a:t>频域检测: 我们的创新</a:t>
-            </a:r>
+              <a:rPr lang="zh-CN">
+                <a:latin typeface="方正北魏楷书简体" panose="03000509000000000000" charset="-122"/>
+                <a:ea typeface="方正北魏楷书简体" panose="03000509000000000000" charset="-122"/>
+                <a:cs typeface="方正北魏楷书简体" panose="03000509000000000000" charset="-122"/>
+              </a:rPr>
+              <a:t>扩展：</a:t>
+            </a:r>
+            <a:r>
+              <a:rPr>
+                <a:latin typeface="方正北魏楷书简体" panose="03000509000000000000" charset="-122"/>
+                <a:ea typeface="方正北魏楷书简体" panose="03000509000000000000" charset="-122"/>
+                <a:cs typeface="方正北魏楷书简体" panose="03000509000000000000" charset="-122"/>
+                <a:sym typeface="+mn-ea"/>
+              </a:rPr>
+              <a:t>频域检测</a:t>
+            </a:r>
+            <a:endParaRPr lang="zh-CN">
+              <a:latin typeface="方正北魏楷书简体" panose="03000509000000000000" charset="-122"/>
+              <a:ea typeface="方正北魏楷书简体" panose="03000509000000000000" charset="-122"/>
+              <a:cs typeface="方正北魏楷书简体" panose="03000509000000000000" charset="-122"/>
+            </a:endParaRPr>
           </a:p>
         </p:txBody>
       </p:sp>
@@ -6126,12 +6529,16 @@
         <p:nvSpPr>
           <p:cNvPr id="15" name="TextBox 14"/>
           <p:cNvSpPr txBox="1"/>
-          <p:nvPr/>
-        </p:nvSpPr>
-        <p:spPr>
-          <a:xfrm>
-            <a:off x="2468880" y="5760720"/>
-            <a:ext cx="7772400" cy="320040"/>
+          <p:nvPr>
+            <p:custDataLst>
+              <p:tags r:id="rId12"/>
+            </p:custDataLst>
+          </p:nvPr>
+        </p:nvSpPr>
+        <p:spPr>
+          <a:xfrm>
+            <a:off x="2468880" y="5257800"/>
+            <a:ext cx="5581015" cy="337185"/>
           </a:xfrm>
           <a:prstGeom prst="rect">
             <a:avLst/>
@@ -6153,8 +6560,18 @@
               </a:defRPr>
             </a:pPr>
             <a:r>
-              <a:t>首次从图像信号层面检测warping后门, AUC 0.735远超市面上最强的STRIP(0.50)</a:t>
-            </a:r>
+              <a:rPr sz="1600">
+                <a:latin typeface="方正北魏楷书简体" panose="03000509000000000000" charset="-122"/>
+                <a:ea typeface="方正北魏楷书简体" panose="03000509000000000000" charset="-122"/>
+                <a:cs typeface="方正北魏楷书简体" panose="03000509000000000000" charset="-122"/>
+              </a:rPr>
+              <a:t>从图像信号层面检测warping后门, AUC 0.735远超STRIP(0.50)</a:t>
+            </a:r>
+            <a:endParaRPr sz="1600">
+              <a:latin typeface="方正北魏楷书简体" panose="03000509000000000000" charset="-122"/>
+              <a:ea typeface="方正北魏楷书简体" panose="03000509000000000000" charset="-122"/>
+              <a:cs typeface="方正北魏楷书简体" panose="03000509000000000000" charset="-122"/>
+            </a:endParaRPr>
           </a:p>
         </p:txBody>
       </p:sp>
@@ -6192,8 +6609,8 @@
         </p:nvSpPr>
         <p:spPr>
           <a:xfrm>
-            <a:off x="1828800" y="1371600"/>
-            <a:ext cx="8534095" cy="731520"/>
+            <a:off x="5035398" y="805815"/>
+            <a:ext cx="2120900" cy="675640"/>
           </a:xfrm>
           <a:prstGeom prst="rect">
             <a:avLst/>
@@ -6215,30 +6632,44 @@
               </a:defRPr>
             </a:pPr>
             <a:r>
+              <a:rPr>
+                <a:latin typeface="方正北魏楷书简体" panose="03000509000000000000" charset="-122"/>
+                <a:ea typeface="方正北魏楷书简体" panose="03000509000000000000" charset="-122"/>
+              </a:rPr>
               <a:t>成员分工</a:t>
             </a:r>
-          </a:p>
-        </p:txBody>
-      </p:sp>
-      <p:sp>
-        <p:nvSpPr>
-          <p:cNvPr id="3" name="Rectangle 2"/>
+            <a:endParaRPr>
+              <a:latin typeface="方正北魏楷书简体" panose="03000509000000000000" charset="-122"/>
+              <a:ea typeface="方正北魏楷书简体" panose="03000509000000000000" charset="-122"/>
+            </a:endParaRPr>
+          </a:p>
+        </p:txBody>
+      </p:sp>
+      <p:sp>
+        <p:nvSpPr>
+          <p:cNvPr id="4" name="Rounded Rectangle 3"/>
           <p:cNvSpPr/>
-          <p:nvPr/>
-        </p:nvSpPr>
-        <p:spPr>
-          <a:xfrm>
-            <a:off x="4572000" y="2103120"/>
-            <a:ext cx="3047695" cy="12700"/>
-          </a:xfrm>
-          <a:prstGeom prst="rect">
+          <p:nvPr>
+            <p:custDataLst>
+              <p:tags r:id="rId1"/>
+            </p:custDataLst>
+          </p:nvPr>
+        </p:nvSpPr>
+        <p:spPr>
+          <a:xfrm>
+            <a:off x="1611630" y="2163445"/>
+            <a:ext cx="4259580" cy="3328035"/>
+          </a:xfrm>
+          <a:prstGeom prst="roundRect">
             <a:avLst/>
           </a:prstGeom>
           <a:solidFill>
-            <a:srgbClr val="C2A497"/>
+            <a:srgbClr val="FFFFFF"/>
           </a:solidFill>
-          <a:ln>
-            <a:noFill/>
+          <a:ln w="12700">
+            <a:solidFill>
+              <a:srgbClr val="E8E3DD"/>
+            </a:solidFill>
           </a:ln>
         </p:spPr>
         <p:style>
@@ -6260,19 +6691,224 @@
           <a:lstStyle/>
           <a:p>
             <a:pPr algn="ctr"/>
-          </a:p>
-        </p:txBody>
-      </p:sp>
-      <p:sp>
-        <p:nvSpPr>
-          <p:cNvPr id="4" name="Rounded Rectangle 3"/>
+            <a:endParaRPr>
+              <a:latin typeface="方正北魏楷书简体" panose="03000509000000000000" charset="-122"/>
+              <a:ea typeface="方正北魏楷书简体" panose="03000509000000000000" charset="-122"/>
+            </a:endParaRPr>
+          </a:p>
+        </p:txBody>
+      </p:sp>
+      <p:sp>
+        <p:nvSpPr>
+          <p:cNvPr id="5" name="TextBox 4"/>
+          <p:cNvSpPr txBox="1"/>
+          <p:nvPr>
+            <p:custDataLst>
+              <p:tags r:id="rId2"/>
+            </p:custDataLst>
+          </p:nvPr>
+        </p:nvSpPr>
+        <p:spPr>
+          <a:xfrm>
+            <a:off x="3276600" y="2465070"/>
+            <a:ext cx="944880" cy="398780"/>
+          </a:xfrm>
+          <a:prstGeom prst="rect">
+            <a:avLst/>
+          </a:prstGeom>
+          <a:noFill/>
+        </p:spPr>
+        <p:txBody>
+          <a:bodyPr wrap="square">
+            <a:spAutoFit/>
+          </a:bodyPr>
+          <a:lstStyle/>
+          <a:p>
+            <a:pPr algn="ctr">
+              <a:defRPr sz="1100" b="0">
+                <a:solidFill>
+                  <a:srgbClr val="8C8C8C"/>
+                </a:solidFill>
+                <a:latin typeface="微软雅黑" panose="020B0503020204020204" charset="-122"/>
+              </a:defRPr>
+            </a:pPr>
+            <a:r>
+              <a:rPr sz="2000">
+                <a:latin typeface="方正北魏楷书简体" panose="03000509000000000000" charset="-122"/>
+                <a:ea typeface="方正北魏楷书简体" panose="03000509000000000000" charset="-122"/>
+              </a:rPr>
+              <a:t>周争妍</a:t>
+            </a:r>
+            <a:endParaRPr sz="2000">
+              <a:latin typeface="方正北魏楷书简体" panose="03000509000000000000" charset="-122"/>
+              <a:ea typeface="方正北魏楷书简体" panose="03000509000000000000" charset="-122"/>
+            </a:endParaRPr>
+          </a:p>
+        </p:txBody>
+      </p:sp>
+      <p:sp>
+        <p:nvSpPr>
+          <p:cNvPr id="6" name="TextBox 5"/>
+          <p:cNvSpPr txBox="1"/>
+          <p:nvPr>
+            <p:custDataLst>
+              <p:tags r:id="rId3"/>
+            </p:custDataLst>
+          </p:nvPr>
+        </p:nvSpPr>
+        <p:spPr>
+          <a:xfrm>
+            <a:off x="2827338" y="3093720"/>
+            <a:ext cx="1843405" cy="891540"/>
+          </a:xfrm>
+          <a:prstGeom prst="rect">
+            <a:avLst/>
+          </a:prstGeom>
+          <a:noFill/>
+        </p:spPr>
+        <p:txBody>
+          <a:bodyPr wrap="square">
+            <a:spAutoFit/>
+          </a:bodyPr>
+          <a:lstStyle/>
+          <a:p>
+            <a:pPr algn="ctr">
+              <a:defRPr sz="2600" b="1">
+                <a:solidFill>
+                  <a:srgbClr val="C2A497"/>
+                </a:solidFill>
+                <a:latin typeface="微软雅黑" panose="020B0503020204020204" charset="-122"/>
+              </a:defRPr>
+            </a:pPr>
+            <a:r>
+              <a:rPr>
+                <a:latin typeface="方正北魏楷书简体" panose="03000509000000000000" charset="-122"/>
+                <a:ea typeface="方正北魏楷书简体" panose="03000509000000000000" charset="-122"/>
+              </a:rPr>
+              <a:t>主实验复现</a:t>
+            </a:r>
+            <a:endParaRPr>
+              <a:latin typeface="方正北魏楷书简体" panose="03000509000000000000" charset="-122"/>
+              <a:ea typeface="方正北魏楷书简体" panose="03000509000000000000" charset="-122"/>
+            </a:endParaRPr>
+          </a:p>
+          <a:p>
+            <a:pPr algn="ctr">
+              <a:defRPr sz="2600" b="1">
+                <a:solidFill>
+                  <a:srgbClr val="C2A497"/>
+                </a:solidFill>
+                <a:latin typeface="微软雅黑" panose="020B0503020204020204" charset="-122"/>
+              </a:defRPr>
+            </a:pPr>
+            <a:r>
+              <a:rPr>
+                <a:latin typeface="方正北魏楷书简体" panose="03000509000000000000" charset="-122"/>
+                <a:ea typeface="方正北魏楷书简体" panose="03000509000000000000" charset="-122"/>
+              </a:rPr>
+              <a:t>防御验证</a:t>
+            </a:r>
+            <a:endParaRPr>
+              <a:latin typeface="方正北魏楷书简体" panose="03000509000000000000" charset="-122"/>
+              <a:ea typeface="方正北魏楷书简体" panose="03000509000000000000" charset="-122"/>
+            </a:endParaRPr>
+          </a:p>
+        </p:txBody>
+      </p:sp>
+      <p:sp>
+        <p:nvSpPr>
+          <p:cNvPr id="7" name="TextBox 6"/>
+          <p:cNvSpPr txBox="1"/>
+          <p:nvPr>
+            <p:custDataLst>
+              <p:tags r:id="rId4"/>
+            </p:custDataLst>
+          </p:nvPr>
+        </p:nvSpPr>
+        <p:spPr>
+          <a:xfrm>
+            <a:off x="1817688" y="4240530"/>
+            <a:ext cx="3862705" cy="829945"/>
+          </a:xfrm>
+          <a:prstGeom prst="rect">
+            <a:avLst/>
+          </a:prstGeom>
+          <a:noFill/>
+        </p:spPr>
+        <p:txBody>
+          <a:bodyPr wrap="square">
+            <a:spAutoFit/>
+          </a:bodyPr>
+          <a:lstStyle/>
+          <a:p>
+            <a:pPr algn="ctr">
+              <a:defRPr sz="900" b="0">
+                <a:solidFill>
+                  <a:srgbClr val="8C8C8C"/>
+                </a:solidFill>
+                <a:latin typeface="微软雅黑" panose="020B0503020204020204" charset="-122"/>
+              </a:defRPr>
+            </a:pPr>
+            <a:r>
+              <a:rPr sz="1600">
+                <a:latin typeface="方正北魏楷书简体" panose="03000509000000000000" charset="-122"/>
+                <a:ea typeface="方正北魏楷书简体" panose="03000509000000000000" charset="-122"/>
+                <a:cs typeface="方正北魏楷书简体" panose="03000509000000000000" charset="-122"/>
+              </a:rPr>
+              <a:t>3数据集 x 2模式</a:t>
+            </a:r>
+            <a:br>
+              <a:rPr sz="1600">
+                <a:latin typeface="方正北魏楷书简体" panose="03000509000000000000" charset="-122"/>
+                <a:ea typeface="方正北魏楷书简体" panose="03000509000000000000" charset="-122"/>
+                <a:cs typeface="方正北魏楷书简体" panose="03000509000000000000" charset="-122"/>
+              </a:rPr>
+            </a:br>
+            <a:r>
+              <a:rPr sz="1600">
+                <a:latin typeface="方正北魏楷书简体" panose="03000509000000000000" charset="-122"/>
+                <a:ea typeface="方正北魏楷书简体" panose="03000509000000000000" charset="-122"/>
+                <a:cs typeface="方正北魏楷书简体" panose="03000509000000000000" charset="-122"/>
+              </a:rPr>
+              <a:t>STRIP / Fine-Pruning / Neural Cleanse</a:t>
+            </a:r>
+            <a:br>
+              <a:rPr sz="1600">
+                <a:latin typeface="方正北魏楷书简体" panose="03000509000000000000" charset="-122"/>
+                <a:ea typeface="方正北魏楷书简体" panose="03000509000000000000" charset="-122"/>
+                <a:cs typeface="方正北魏楷书简体" panose="03000509000000000000" charset="-122"/>
+              </a:rPr>
+            </a:br>
+            <a:r>
+              <a:rPr sz="1600">
+                <a:latin typeface="方正北魏楷书简体" panose="03000509000000000000" charset="-122"/>
+                <a:ea typeface="方正北魏楷书简体" panose="03000509000000000000" charset="-122"/>
+                <a:cs typeface="方正北魏楷书简体" panose="03000509000000000000" charset="-122"/>
+              </a:rPr>
+              <a:t>环境配置 + tmux并行脚本</a:t>
+            </a:r>
+            <a:endParaRPr sz="1600">
+              <a:latin typeface="方正北魏楷书简体" panose="03000509000000000000" charset="-122"/>
+              <a:ea typeface="方正北魏楷书简体" panose="03000509000000000000" charset="-122"/>
+              <a:cs typeface="方正北魏楷书简体" panose="03000509000000000000" charset="-122"/>
+            </a:endParaRPr>
+          </a:p>
+        </p:txBody>
+      </p:sp>
+      <p:sp>
+        <p:nvSpPr>
+          <p:cNvPr id="8" name="Rounded Rectangle 7"/>
           <p:cNvSpPr/>
-          <p:nvPr/>
-        </p:nvSpPr>
-        <p:spPr>
-          <a:xfrm>
-            <a:off x="1828800" y="2743200"/>
-            <a:ext cx="3840480" cy="2286000"/>
+          <p:nvPr>
+            <p:custDataLst>
+              <p:tags r:id="rId5"/>
+            </p:custDataLst>
+          </p:nvPr>
+        </p:nvSpPr>
+        <p:spPr>
+          <a:xfrm>
+            <a:off x="6217285" y="2163445"/>
+            <a:ext cx="4391025" cy="3324225"/>
           </a:xfrm>
           <a:prstGeom prst="roundRect">
             <a:avLst/>
@@ -6305,19 +6941,27 @@
           <a:lstStyle/>
           <a:p>
             <a:pPr algn="ctr"/>
-          </a:p>
-        </p:txBody>
-      </p:sp>
-      <p:sp>
-        <p:nvSpPr>
-          <p:cNvPr id="5" name="TextBox 4"/>
+            <a:endParaRPr>
+              <a:latin typeface="方正北魏楷书简体" panose="03000509000000000000" charset="-122"/>
+              <a:ea typeface="方正北魏楷书简体" panose="03000509000000000000" charset="-122"/>
+            </a:endParaRPr>
+          </a:p>
+        </p:txBody>
+      </p:sp>
+      <p:sp>
+        <p:nvSpPr>
+          <p:cNvPr id="9" name="TextBox 8"/>
           <p:cNvSpPr txBox="1"/>
-          <p:nvPr/>
-        </p:nvSpPr>
-        <p:spPr>
-          <a:xfrm>
-            <a:off x="2006600" y="2870200"/>
-            <a:ext cx="3484880" cy="254000"/>
+          <p:nvPr>
+            <p:custDataLst>
+              <p:tags r:id="rId6"/>
+            </p:custDataLst>
+          </p:nvPr>
+        </p:nvSpPr>
+        <p:spPr>
+          <a:xfrm>
+            <a:off x="7940040" y="2465070"/>
+            <a:ext cx="944880" cy="398780"/>
           </a:xfrm>
           <a:prstGeom prst="rect">
             <a:avLst/>
@@ -6325,7 +6969,7 @@
           <a:noFill/>
         </p:spPr>
         <p:txBody>
-          <a:bodyPr wrap="none">
+          <a:bodyPr wrap="square">
             <a:spAutoFit/>
           </a:bodyPr>
           <a:lstStyle/>
@@ -6339,21 +6983,33 @@
               </a:defRPr>
             </a:pPr>
             <a:r>
-              <a:t>周争妍</a:t>
-            </a:r>
-          </a:p>
-        </p:txBody>
-      </p:sp>
-      <p:sp>
-        <p:nvSpPr>
-          <p:cNvPr id="6" name="TextBox 5"/>
+              <a:rPr sz="2000">
+                <a:latin typeface="方正北魏楷书简体" panose="03000509000000000000" charset="-122"/>
+                <a:ea typeface="方正北魏楷书简体" panose="03000509000000000000" charset="-122"/>
+              </a:rPr>
+              <a:t>蒋竺君</a:t>
+            </a:r>
+            <a:endParaRPr sz="2000">
+              <a:latin typeface="方正北魏楷书简体" panose="03000509000000000000" charset="-122"/>
+              <a:ea typeface="方正北魏楷书简体" panose="03000509000000000000" charset="-122"/>
+            </a:endParaRPr>
+          </a:p>
+        </p:txBody>
+      </p:sp>
+      <p:sp>
+        <p:nvSpPr>
+          <p:cNvPr id="10" name="TextBox 9"/>
           <p:cNvSpPr txBox="1"/>
-          <p:nvPr/>
-        </p:nvSpPr>
-        <p:spPr>
-          <a:xfrm>
-            <a:off x="2006600" y="3149600"/>
-            <a:ext cx="3484880" cy="457200"/>
+          <p:nvPr>
+            <p:custDataLst>
+              <p:tags r:id="rId7"/>
+            </p:custDataLst>
+          </p:nvPr>
+        </p:nvSpPr>
+        <p:spPr>
+          <a:xfrm>
+            <a:off x="7555865" y="3037840"/>
+            <a:ext cx="1713230" cy="1198880"/>
           </a:xfrm>
           <a:prstGeom prst="rect">
             <a:avLst/>
@@ -6361,7 +7017,7 @@
           <a:noFill/>
         </p:spPr>
         <p:txBody>
-          <a:bodyPr wrap="none">
+          <a:bodyPr wrap="square">
             <a:spAutoFit/>
           </a:bodyPr>
           <a:lstStyle/>
@@ -6369,27 +7025,81 @@
             <a:pPr algn="ctr">
               <a:defRPr sz="2600" b="1">
                 <a:solidFill>
-                  <a:srgbClr val="C2A497"/>
-                </a:solidFill>
-                <a:latin typeface="微软雅黑" panose="020B0503020204020204" charset="-122"/>
-              </a:defRPr>
-            </a:pPr>
-            <a:r>
-              <a:t>主实验复现+防御验证</a:t>
-            </a:r>
-          </a:p>
-        </p:txBody>
-      </p:sp>
-      <p:sp>
-        <p:nvSpPr>
-          <p:cNvPr id="7" name="TextBox 6"/>
+                  <a:srgbClr val="9B9EC0"/>
+                </a:solidFill>
+                <a:latin typeface="微软雅黑" panose="020B0503020204020204" charset="-122"/>
+              </a:defRPr>
+            </a:pPr>
+            <a:r>
+              <a:rPr sz="2400">
+                <a:latin typeface="方正北魏楷书简体" panose="03000509000000000000" charset="-122"/>
+                <a:ea typeface="方正北魏楷书简体" panose="03000509000000000000" charset="-122"/>
+              </a:rPr>
+              <a:t>消融实验</a:t>
+            </a:r>
+            <a:endParaRPr sz="2400">
+              <a:latin typeface="方正北魏楷书简体" panose="03000509000000000000" charset="-122"/>
+              <a:ea typeface="方正北魏楷书简体" panose="03000509000000000000" charset="-122"/>
+            </a:endParaRPr>
+          </a:p>
+          <a:p>
+            <a:pPr algn="ctr">
+              <a:defRPr sz="2600" b="1">
+                <a:solidFill>
+                  <a:srgbClr val="9B9EC0"/>
+                </a:solidFill>
+                <a:latin typeface="微软雅黑" panose="020B0503020204020204" charset="-122"/>
+              </a:defRPr>
+            </a:pPr>
+            <a:r>
+              <a:rPr sz="2400">
+                <a:latin typeface="方正北魏楷书简体" panose="03000509000000000000" charset="-122"/>
+                <a:ea typeface="方正北魏楷书简体" panose="03000509000000000000" charset="-122"/>
+              </a:rPr>
+              <a:t>频域检测器</a:t>
+            </a:r>
+            <a:endParaRPr sz="2400">
+              <a:latin typeface="方正北魏楷书简体" panose="03000509000000000000" charset="-122"/>
+              <a:ea typeface="方正北魏楷书简体" panose="03000509000000000000" charset="-122"/>
+            </a:endParaRPr>
+          </a:p>
+          <a:p>
+            <a:pPr algn="ctr">
+              <a:defRPr sz="2600" b="1">
+                <a:solidFill>
+                  <a:srgbClr val="9B9EC0"/>
+                </a:solidFill>
+                <a:latin typeface="微软雅黑" panose="020B0503020204020204" charset="-122"/>
+              </a:defRPr>
+            </a:pPr>
+            <a:r>
+              <a:rPr sz="2400">
+                <a:latin typeface="方正北魏楷书简体" panose="03000509000000000000" charset="-122"/>
+                <a:ea typeface="方正北魏楷书简体" panose="03000509000000000000" charset="-122"/>
+              </a:rPr>
+              <a:t>可视化</a:t>
+            </a:r>
+            <a:endParaRPr sz="2400">
+              <a:latin typeface="方正北魏楷书简体" panose="03000509000000000000" charset="-122"/>
+              <a:ea typeface="方正北魏楷书简体" panose="03000509000000000000" charset="-122"/>
+            </a:endParaRPr>
+          </a:p>
+        </p:txBody>
+      </p:sp>
+      <p:sp>
+        <p:nvSpPr>
+          <p:cNvPr id="11" name="TextBox 10"/>
           <p:cNvSpPr txBox="1"/>
-          <p:nvPr/>
-        </p:nvSpPr>
-        <p:spPr>
-          <a:xfrm>
-            <a:off x="2006600" y="4289425"/>
-            <a:ext cx="3484880" cy="203200"/>
+          <p:nvPr>
+            <p:custDataLst>
+              <p:tags r:id="rId8"/>
+            </p:custDataLst>
+          </p:nvPr>
+        </p:nvSpPr>
+        <p:spPr>
+          <a:xfrm>
+            <a:off x="7207885" y="4429125"/>
+            <a:ext cx="2409190" cy="583565"/>
           </a:xfrm>
           <a:prstGeom prst="rect">
             <a:avLst/>
@@ -6397,7 +7107,7 @@
           <a:noFill/>
         </p:spPr>
         <p:txBody>
-          <a:bodyPr wrap="none">
+          <a:bodyPr wrap="square">
             <a:spAutoFit/>
           </a:bodyPr>
           <a:lstStyle/>
@@ -6411,173 +7121,33 @@
               </a:defRPr>
             </a:pPr>
             <a:r>
-              <a:t>3数据集 x 2模式</a:t>
-            </a:r>
-            <a:br/>
-            <a:r>
-              <a:t>STRIP / Fine-Pruning / Neural Cleanse</a:t>
-            </a:r>
-            <a:br/>
-            <a:r>
-              <a:t>环境配置 + tmux并行脚本</a:t>
-            </a:r>
-          </a:p>
-        </p:txBody>
-      </p:sp>
-      <p:sp>
-        <p:nvSpPr>
-          <p:cNvPr id="8" name="Rounded Rectangle 7"/>
-          <p:cNvSpPr/>
-          <p:nvPr/>
-        </p:nvSpPr>
-        <p:spPr>
-          <a:xfrm>
-            <a:off x="6492240" y="2743200"/>
-            <a:ext cx="3840480" cy="2286000"/>
-          </a:xfrm>
-          <a:prstGeom prst="roundRect">
-            <a:avLst/>
-          </a:prstGeom>
-          <a:solidFill>
-            <a:srgbClr val="FFFFFF"/>
-          </a:solidFill>
-          <a:ln w="12700">
-            <a:solidFill>
-              <a:srgbClr val="E8E3DD"/>
-            </a:solidFill>
-          </a:ln>
-        </p:spPr>
-        <p:style>
-          <a:lnRef idx="1">
-            <a:schemeClr val="accent1"/>
-          </a:lnRef>
-          <a:fillRef idx="3">
-            <a:schemeClr val="accent1"/>
-          </a:fillRef>
-          <a:effectRef idx="2">
-            <a:schemeClr val="accent1"/>
-          </a:effectRef>
-          <a:fontRef idx="minor">
-            <a:schemeClr val="lt1"/>
-          </a:fontRef>
-        </p:style>
-        <p:txBody>
-          <a:bodyPr rtlCol="0" anchor="ctr"/>
-          <a:lstStyle/>
-          <a:p>
-            <a:pPr algn="ctr"/>
-          </a:p>
-        </p:txBody>
-      </p:sp>
-      <p:sp>
-        <p:nvSpPr>
-          <p:cNvPr id="9" name="TextBox 8"/>
-          <p:cNvSpPr txBox="1"/>
-          <p:nvPr/>
-        </p:nvSpPr>
-        <p:spPr>
-          <a:xfrm>
-            <a:off x="6670040" y="2870200"/>
-            <a:ext cx="3484880" cy="254000"/>
-          </a:xfrm>
-          <a:prstGeom prst="rect">
-            <a:avLst/>
-          </a:prstGeom>
-          <a:noFill/>
-        </p:spPr>
-        <p:txBody>
-          <a:bodyPr wrap="none">
-            <a:spAutoFit/>
-          </a:bodyPr>
-          <a:lstStyle/>
-          <a:p>
-            <a:pPr algn="ctr">
-              <a:defRPr sz="1100" b="0">
-                <a:solidFill>
-                  <a:srgbClr val="8C8C8C"/>
-                </a:solidFill>
-                <a:latin typeface="微软雅黑" panose="020B0503020204020204" charset="-122"/>
-              </a:defRPr>
-            </a:pPr>
-            <a:r>
-              <a:t>蒋竺君</a:t>
-            </a:r>
-          </a:p>
-        </p:txBody>
-      </p:sp>
-      <p:sp>
-        <p:nvSpPr>
-          <p:cNvPr id="10" name="TextBox 9"/>
-          <p:cNvSpPr txBox="1"/>
-          <p:nvPr/>
-        </p:nvSpPr>
-        <p:spPr>
-          <a:xfrm>
-            <a:off x="6670040" y="3149600"/>
-            <a:ext cx="3484880" cy="457200"/>
-          </a:xfrm>
-          <a:prstGeom prst="rect">
-            <a:avLst/>
-          </a:prstGeom>
-          <a:noFill/>
-        </p:spPr>
-        <p:txBody>
-          <a:bodyPr wrap="none">
-            <a:spAutoFit/>
-          </a:bodyPr>
-          <a:lstStyle/>
-          <a:p>
-            <a:pPr algn="ctr">
-              <a:defRPr sz="2600" b="1">
-                <a:solidFill>
-                  <a:srgbClr val="9B9EC0"/>
-                </a:solidFill>
-                <a:latin typeface="微软雅黑" panose="020B0503020204020204" charset="-122"/>
-              </a:defRPr>
-            </a:pPr>
-            <a:r>
-              <a:t>消融实验+频域检测器+可视化</a:t>
-            </a:r>
-          </a:p>
-        </p:txBody>
-      </p:sp>
-      <p:sp>
-        <p:nvSpPr>
-          <p:cNvPr id="11" name="TextBox 10"/>
-          <p:cNvSpPr txBox="1"/>
-          <p:nvPr/>
-        </p:nvSpPr>
-        <p:spPr>
-          <a:xfrm>
-            <a:off x="7650163" y="4289425"/>
-            <a:ext cx="1524635" cy="368300"/>
-          </a:xfrm>
-          <a:prstGeom prst="rect">
-            <a:avLst/>
-          </a:prstGeom>
-          <a:noFill/>
-        </p:spPr>
-        <p:txBody>
-          <a:bodyPr wrap="none">
-            <a:spAutoFit/>
-          </a:bodyPr>
-          <a:lstStyle/>
-          <a:p>
-            <a:pPr algn="ctr">
-              <a:defRPr sz="900" b="0">
-                <a:solidFill>
-                  <a:srgbClr val="8C8C8C"/>
-                </a:solidFill>
-                <a:latin typeface="微软雅黑" panose="020B0503020204020204" charset="-122"/>
-              </a:defRPr>
-            </a:pPr>
-            <a:r>
-              <a:t>Noise/s/k参数扫描 (10组)</a:t>
-            </a:r>
-            <a:br/>
-            <a:r>
+              <a:rPr sz="1600">
+                <a:latin typeface="方正北魏楷书简体" panose="03000509000000000000" charset="-122"/>
+                <a:ea typeface="方正北魏楷书简体" panose="03000509000000000000" charset="-122"/>
+                <a:cs typeface="方正北魏楷书简体" panose="03000509000000000000" charset="-122"/>
+              </a:rPr>
+              <a:t>Noise/s/k参数扫描</a:t>
+            </a:r>
+            <a:br>
+              <a:rPr sz="1600">
+                <a:latin typeface="方正北魏楷书简体" panose="03000509000000000000" charset="-122"/>
+                <a:ea typeface="方正北魏楷书简体" panose="03000509000000000000" charset="-122"/>
+                <a:cs typeface="方正北魏楷书简体" panose="03000509000000000000" charset="-122"/>
+              </a:rPr>
+            </a:br>
+            <a:r>
+              <a:rPr sz="1600">
+                <a:latin typeface="方正北魏楷书简体" panose="03000509000000000000" charset="-122"/>
+                <a:ea typeface="方正北魏楷书简体" panose="03000509000000000000" charset="-122"/>
+                <a:cs typeface="方正北魏楷书简体" panose="03000509000000000000" charset="-122"/>
+              </a:rPr>
               <a:t>频域检测器 (AUC 0.735)</a:t>
             </a:r>
+            <a:endParaRPr sz="1600">
+              <a:latin typeface="方正北魏楷书简体" panose="03000509000000000000" charset="-122"/>
+              <a:ea typeface="方正北魏楷书简体" panose="03000509000000000000" charset="-122"/>
+              <a:cs typeface="方正北魏楷书简体" panose="03000509000000000000" charset="-122"/>
+            </a:endParaRPr>
           </a:p>
         </p:txBody>
       </p:sp>
@@ -6609,13 +7179,101 @@
       <p:grpSpPr/>
       <p:sp>
         <p:nvSpPr>
-          <p:cNvPr id="2" name="Rectangle 1"/>
+          <p:cNvPr id="3" name="TextBox 2"/>
+          <p:cNvSpPr txBox="1"/>
+          <p:nvPr/>
+        </p:nvSpPr>
+        <p:spPr>
+          <a:xfrm>
+            <a:off x="5392268" y="2031365"/>
+            <a:ext cx="1407160" cy="829945"/>
+          </a:xfrm>
+          <a:prstGeom prst="rect">
+            <a:avLst/>
+          </a:prstGeom>
+          <a:noFill/>
+        </p:spPr>
+        <p:txBody>
+          <a:bodyPr wrap="none">
+            <a:spAutoFit/>
+          </a:bodyPr>
+          <a:lstStyle/>
+          <a:p>
+            <a:pPr algn="ctr">
+              <a:defRPr sz="4800" b="1">
+                <a:solidFill>
+                  <a:srgbClr val="3D3D3D"/>
+                </a:solidFill>
+                <a:latin typeface="微软雅黑" panose="020B0503020204020204" charset="-122"/>
+              </a:defRPr>
+            </a:pPr>
+            <a:r>
+              <a:rPr>
+                <a:latin typeface="方正北魏楷书简体" panose="03000509000000000000" charset="-122"/>
+                <a:ea typeface="方正北魏楷书简体" panose="03000509000000000000" charset="-122"/>
+              </a:rPr>
+              <a:t>感谢</a:t>
+            </a:r>
+            <a:endParaRPr>
+              <a:latin typeface="方正北魏楷书简体" panose="03000509000000000000" charset="-122"/>
+              <a:ea typeface="方正北魏楷书简体" panose="03000509000000000000" charset="-122"/>
+            </a:endParaRPr>
+          </a:p>
+        </p:txBody>
+      </p:sp>
+      <p:sp>
+        <p:nvSpPr>
+          <p:cNvPr id="5" name="TextBox 4"/>
+          <p:cNvSpPr txBox="1"/>
+          <p:nvPr/>
+        </p:nvSpPr>
+        <p:spPr>
+          <a:xfrm>
+            <a:off x="4456913" y="3503295"/>
+            <a:ext cx="3277870" cy="398780"/>
+          </a:xfrm>
+          <a:prstGeom prst="rect">
+            <a:avLst/>
+          </a:prstGeom>
+          <a:noFill/>
+        </p:spPr>
+        <p:txBody>
+          <a:bodyPr wrap="none">
+            <a:spAutoFit/>
+          </a:bodyPr>
+          <a:lstStyle/>
+          <a:p>
+            <a:pPr algn="ctr">
+              <a:defRPr sz="1500" b="0">
+                <a:solidFill>
+                  <a:srgbClr val="C2A497"/>
+                </a:solidFill>
+                <a:latin typeface="微软雅黑" panose="020B0503020204020204" charset="-122"/>
+              </a:defRPr>
+            </a:pPr>
+            <a:r>
+              <a:rPr sz="2000">
+                <a:latin typeface="方正北魏楷书简体" panose="03000509000000000000" charset="-122"/>
+                <a:ea typeface="方正北魏楷书简体" panose="03000509000000000000" charset="-122"/>
+              </a:rPr>
+              <a:t>github.com/axgo-ja/NIS3353</a:t>
+            </a:r>
+            <a:endParaRPr sz="2000">
+              <a:latin typeface="方正北魏楷书简体" panose="03000509000000000000" charset="-122"/>
+              <a:ea typeface="方正北魏楷书简体" panose="03000509000000000000" charset="-122"/>
+            </a:endParaRPr>
+          </a:p>
+        </p:txBody>
+      </p:sp>
+      <p:sp>
+        <p:nvSpPr>
+          <p:cNvPr id="6" name="Rectangle 5"/>
           <p:cNvSpPr/>
           <p:nvPr/>
         </p:nvSpPr>
         <p:spPr>
           <a:xfrm>
-            <a:off x="2743200" y="2560320"/>
+            <a:off x="2743200" y="3105150"/>
             <a:ext cx="6705295" cy="12700"/>
           </a:xfrm>
           <a:prstGeom prst="rect">
@@ -6647,157 +7305,10 @@
           <a:lstStyle/>
           <a:p>
             <a:pPr algn="ctr"/>
-          </a:p>
-        </p:txBody>
-      </p:sp>
-      <p:sp>
-        <p:nvSpPr>
-          <p:cNvPr id="3" name="TextBox 2"/>
-          <p:cNvSpPr txBox="1"/>
-          <p:nvPr/>
-        </p:nvSpPr>
-        <p:spPr>
-          <a:xfrm>
-            <a:off x="5392268" y="2834640"/>
-            <a:ext cx="1407160" cy="829945"/>
-          </a:xfrm>
-          <a:prstGeom prst="rect">
-            <a:avLst/>
-          </a:prstGeom>
-          <a:noFill/>
-        </p:spPr>
-        <p:txBody>
-          <a:bodyPr wrap="none">
-            <a:spAutoFit/>
-          </a:bodyPr>
-          <a:lstStyle/>
-          <a:p>
-            <a:pPr algn="ctr">
-              <a:defRPr sz="4800" b="1">
-                <a:solidFill>
-                  <a:srgbClr val="3D3D3D"/>
-                </a:solidFill>
-                <a:latin typeface="微软雅黑" panose="020B0503020204020204" charset="-122"/>
-              </a:defRPr>
-            </a:pPr>
-            <a:r>
-              <a:t>感谢</a:t>
-            </a:r>
-          </a:p>
-        </p:txBody>
-      </p:sp>
-      <p:sp>
-        <p:nvSpPr>
-          <p:cNvPr id="4" name="TextBox 3"/>
-          <p:cNvSpPr txBox="1"/>
-          <p:nvPr/>
-        </p:nvSpPr>
-        <p:spPr>
-          <a:xfrm>
-            <a:off x="2743200" y="3931920"/>
-            <a:ext cx="6705295" cy="457200"/>
-          </a:xfrm>
-          <a:prstGeom prst="rect">
-            <a:avLst/>
-          </a:prstGeom>
-          <a:noFill/>
-        </p:spPr>
-        <p:txBody>
-          <a:bodyPr wrap="none">
-            <a:spAutoFit/>
-          </a:bodyPr>
-          <a:lstStyle/>
-          <a:p>
-            <a:pPr algn="ctr">
-              <a:defRPr sz="1800" b="0">
-                <a:solidFill>
-                  <a:srgbClr val="8C8C8C"/>
-                </a:solidFill>
-                <a:latin typeface="微软雅黑" panose="020B0503020204020204" charset="-122"/>
-              </a:defRPr>
-            </a:pPr>
-            <a:r>
-              <a:t>WaNet复现与分析  ·  AI安全课程设计</a:t>
-            </a:r>
-          </a:p>
-        </p:txBody>
-      </p:sp>
-      <p:sp>
-        <p:nvSpPr>
-          <p:cNvPr id="5" name="TextBox 4"/>
-          <p:cNvSpPr txBox="1"/>
-          <p:nvPr/>
-        </p:nvSpPr>
-        <p:spPr>
-          <a:xfrm>
-            <a:off x="2743200" y="4572000"/>
-            <a:ext cx="6705295" cy="457200"/>
-          </a:xfrm>
-          <a:prstGeom prst="rect">
-            <a:avLst/>
-          </a:prstGeom>
-          <a:noFill/>
-        </p:spPr>
-        <p:txBody>
-          <a:bodyPr wrap="none">
-            <a:spAutoFit/>
-          </a:bodyPr>
-          <a:lstStyle/>
-          <a:p>
-            <a:pPr algn="ctr">
-              <a:defRPr sz="1500" b="0">
-                <a:solidFill>
-                  <a:srgbClr val="C2A497"/>
-                </a:solidFill>
-                <a:latin typeface="微软雅黑" panose="020B0503020204020204" charset="-122"/>
-              </a:defRPr>
-            </a:pPr>
-            <a:r>
-              <a:t>github.com/axgo-ja/NIS3353</a:t>
-            </a:r>
-          </a:p>
-        </p:txBody>
-      </p:sp>
-      <p:sp>
-        <p:nvSpPr>
-          <p:cNvPr id="6" name="Rectangle 5"/>
-          <p:cNvSpPr/>
-          <p:nvPr/>
-        </p:nvSpPr>
-        <p:spPr>
-          <a:xfrm>
-            <a:off x="2743200" y="5303520"/>
-            <a:ext cx="6705295" cy="12700"/>
-          </a:xfrm>
-          <a:prstGeom prst="rect">
-            <a:avLst/>
-          </a:prstGeom>
-          <a:solidFill>
-            <a:srgbClr val="C2A497"/>
-          </a:solidFill>
-          <a:ln>
-            <a:noFill/>
-          </a:ln>
-        </p:spPr>
-        <p:style>
-          <a:lnRef idx="1">
-            <a:schemeClr val="accent1"/>
-          </a:lnRef>
-          <a:fillRef idx="3">
-            <a:schemeClr val="accent1"/>
-          </a:fillRef>
-          <a:effectRef idx="2">
-            <a:schemeClr val="accent1"/>
-          </a:effectRef>
-          <a:fontRef idx="minor">
-            <a:schemeClr val="lt1"/>
-          </a:fontRef>
-        </p:style>
-        <p:txBody>
-          <a:bodyPr rtlCol="0" anchor="ctr"/>
-          <a:lstStyle/>
-          <a:p>
-            <a:pPr algn="ctr"/>
+            <a:endParaRPr>
+              <a:latin typeface="方正北魏楷书简体" panose="03000509000000000000" charset="-122"/>
+              <a:ea typeface="方正北魏楷书简体" panose="03000509000000000000" charset="-122"/>
+            </a:endParaRPr>
           </a:p>
         </p:txBody>
       </p:sp>
@@ -6836,7 +7347,7 @@
         <p:spPr>
           <a:xfrm>
             <a:off x="731520" y="457200"/>
-            <a:ext cx="4572000" cy="457200"/>
+            <a:ext cx="2863215" cy="553085"/>
           </a:xfrm>
           <a:prstGeom prst="rect">
             <a:avLst/>
@@ -6858,8 +7369,16 @@
               </a:defRPr>
             </a:pPr>
             <a:r>
+              <a:rPr>
+                <a:latin typeface="方正北魏楷书简体" panose="03000509000000000000" charset="-122"/>
+                <a:ea typeface="方正北魏楷书简体" panose="03000509000000000000" charset="-122"/>
+              </a:rPr>
               <a:t>什么是后门攻击</a:t>
             </a:r>
+            <a:endParaRPr>
+              <a:latin typeface="方正北魏楷书简体" panose="03000509000000000000" charset="-122"/>
+              <a:ea typeface="方正北魏楷书简体" panose="03000509000000000000" charset="-122"/>
+            </a:endParaRPr>
           </a:p>
         </p:txBody>
       </p:sp>
@@ -6914,8 +7433,8 @@
         </p:nvSpPr>
         <p:spPr>
           <a:xfrm>
-            <a:off x="731520" y="1371600"/>
-            <a:ext cx="5029200" cy="2286000"/>
+            <a:off x="731520" y="1839595"/>
+            <a:ext cx="5029200" cy="3056255"/>
           </a:xfrm>
           <a:prstGeom prst="rect">
             <a:avLst/>
@@ -6940,8 +7459,36 @@
               </a:defRPr>
             </a:pPr>
             <a:r>
+              <a:rPr sz="2000">
+                <a:latin typeface="方正北魏楷书简体" panose="03000509000000000000" charset="-122"/>
+                <a:ea typeface="方正北魏楷书简体" panose="03000509000000000000" charset="-122"/>
+                <a:cs typeface="方正北魏楷书简体" panose="03000509000000000000" charset="-122"/>
+              </a:rPr>
               <a:t>深度学习模型在训练阶段可被植入后门</a:t>
             </a:r>
+            <a:endParaRPr sz="2000">
+              <a:latin typeface="方正北魏楷书简体" panose="03000509000000000000" charset="-122"/>
+              <a:ea typeface="方正北魏楷书简体" panose="03000509000000000000" charset="-122"/>
+              <a:cs typeface="方正北魏楷书简体" panose="03000509000000000000" charset="-122"/>
+            </a:endParaRPr>
+          </a:p>
+          <a:p>
+            <a:pPr>
+              <a:spcAft>
+                <a:spcPts val="560"/>
+              </a:spcAft>
+              <a:defRPr sz="1600" b="1">
+                <a:solidFill>
+                  <a:srgbClr val="3D3D3D"/>
+                </a:solidFill>
+                <a:latin typeface="微软雅黑" panose="020B0503020204020204" charset="-122"/>
+              </a:defRPr>
+            </a:pPr>
+            <a:endParaRPr sz="2000">
+              <a:latin typeface="方正北魏楷书简体" panose="03000509000000000000" charset="-122"/>
+              <a:ea typeface="方正北魏楷书简体" panose="03000509000000000000" charset="-122"/>
+              <a:cs typeface="方正北魏楷书简体" panose="03000509000000000000" charset="-122"/>
+            </a:endParaRPr>
           </a:p>
           <a:p>
             <a:pPr>
@@ -6956,8 +7503,24 @@
               </a:defRPr>
             </a:pPr>
             <a:r>
+              <a:rPr sz="2000">
+                <a:solidFill>
+                  <a:schemeClr val="tx1"/>
+                </a:solidFill>
+                <a:latin typeface="方正北魏楷书简体" panose="03000509000000000000" charset="-122"/>
+                <a:ea typeface="方正北魏楷书简体" panose="03000509000000000000" charset="-122"/>
+                <a:cs typeface="方正北魏楷书简体" panose="03000509000000000000" charset="-122"/>
+              </a:rPr>
               <a:t>攻击者在训练数据中混入带触发器的样本</a:t>
             </a:r>
+            <a:endParaRPr sz="2000">
+              <a:solidFill>
+                <a:schemeClr val="tx1"/>
+              </a:solidFill>
+              <a:latin typeface="方正北魏楷书简体" panose="03000509000000000000" charset="-122"/>
+              <a:ea typeface="方正北魏楷书简体" panose="03000509000000000000" charset="-122"/>
+              <a:cs typeface="方正北魏楷书简体" panose="03000509000000000000" charset="-122"/>
+            </a:endParaRPr>
           </a:p>
           <a:p>
             <a:pPr>
@@ -6972,8 +7535,18 @@
               </a:defRPr>
             </a:pPr>
             <a:r>
-              <a:t>正常图 -&gt; 正常分类  |  带触发器的图 -&gt; 攻击者指定标签</a:t>
-            </a:r>
+              <a:rPr sz="2000">
+                <a:latin typeface="方正北魏楷书简体" panose="03000509000000000000" charset="-122"/>
+                <a:ea typeface="方正北魏楷书简体" panose="03000509000000000000" charset="-122"/>
+                <a:cs typeface="方正北魏楷书简体" panose="03000509000000000000" charset="-122"/>
+              </a:rPr>
+              <a:t>正常图 -&gt; 正常分类 </a:t>
+            </a:r>
+            <a:endParaRPr sz="2000">
+              <a:latin typeface="方正北魏楷书简体" panose="03000509000000000000" charset="-122"/>
+              <a:ea typeface="方正北魏楷书简体" panose="03000509000000000000" charset="-122"/>
+              <a:cs typeface="方正北魏楷书简体" panose="03000509000000000000" charset="-122"/>
+            </a:endParaRPr>
           </a:p>
           <a:p>
             <a:pPr>
@@ -6982,11 +7555,24 @@
               </a:spcAft>
               <a:defRPr sz="1600" b="0">
                 <a:solidFill>
-                  <a:srgbClr val="8C8C8C"/>
-                </a:solidFill>
-                <a:latin typeface="微软雅黑" panose="020B0503020204020204" charset="-122"/>
-              </a:defRPr>
-            </a:pPr>
+                  <a:srgbClr val="D4847A"/>
+                </a:solidFill>
+                <a:latin typeface="微软雅黑" panose="020B0503020204020204" charset="-122"/>
+              </a:defRPr>
+            </a:pPr>
+            <a:r>
+              <a:rPr sz="2000">
+                <a:latin typeface="方正北魏楷书简体" panose="03000509000000000000" charset="-122"/>
+                <a:ea typeface="方正北魏楷书简体" panose="03000509000000000000" charset="-122"/>
+                <a:cs typeface="方正北魏楷书简体" panose="03000509000000000000" charset="-122"/>
+              </a:rPr>
+              <a:t>带触发器的图 -&gt; 攻击者指定标签</a:t>
+            </a:r>
+            <a:endParaRPr sz="2000">
+              <a:latin typeface="方正北魏楷书简体" panose="03000509000000000000" charset="-122"/>
+              <a:ea typeface="方正北魏楷书简体" panose="03000509000000000000" charset="-122"/>
+              <a:cs typeface="方正北魏楷书简体" panose="03000509000000000000" charset="-122"/>
+            </a:endParaRPr>
           </a:p>
           <a:p>
             <a:pPr>
@@ -7000,9 +7586,14 @@
                 <a:latin typeface="微软雅黑" panose="020B0503020204020204" charset="-122"/>
               </a:defRPr>
             </a:pPr>
-            <a:r>
-              <a:t>传统触发器: 白色方块 / 水印 / 正弦波纹 (人眼可见)</a:t>
-            </a:r>
+            <a:endParaRPr sz="2000">
+              <a:solidFill>
+                <a:schemeClr val="tx1"/>
+              </a:solidFill>
+              <a:latin typeface="方正北魏楷书简体" panose="03000509000000000000" charset="-122"/>
+              <a:ea typeface="方正北魏楷书简体" panose="03000509000000000000" charset="-122"/>
+              <a:cs typeface="方正北魏楷书简体" panose="03000509000000000000" charset="-122"/>
+            </a:endParaRPr>
           </a:p>
           <a:p>
             <a:pPr>
@@ -7011,14 +7602,72 @@
               </a:spcAft>
               <a:defRPr sz="1600" b="0">
                 <a:solidFill>
+                  <a:srgbClr val="8C8C8C"/>
+                </a:solidFill>
+                <a:latin typeface="微软雅黑" panose="020B0503020204020204" charset="-122"/>
+              </a:defRPr>
+            </a:pPr>
+            <a:r>
+              <a:rPr sz="2000">
+                <a:solidFill>
+                  <a:schemeClr val="tx1"/>
+                </a:solidFill>
+                <a:latin typeface="方正北魏楷书简体" panose="03000509000000000000" charset="-122"/>
+                <a:ea typeface="方正北魏楷书简体" panose="03000509000000000000" charset="-122"/>
+                <a:cs typeface="方正北魏楷书简体" panose="03000509000000000000" charset="-122"/>
+              </a:rPr>
+              <a:t>传统触发器: 白色方块 / 水印 / 正弦波纹</a:t>
+            </a:r>
+            <a:endParaRPr sz="2000">
+              <a:solidFill>
+                <a:schemeClr val="tx1"/>
+              </a:solidFill>
+              <a:latin typeface="方正北魏楷书简体" panose="03000509000000000000" charset="-122"/>
+              <a:ea typeface="方正北魏楷书简体" panose="03000509000000000000" charset="-122"/>
+              <a:cs typeface="方正北魏楷书简体" panose="03000509000000000000" charset="-122"/>
+            </a:endParaRPr>
+          </a:p>
+          <a:p>
+            <a:pPr>
+              <a:spcAft>
+                <a:spcPts val="560"/>
+              </a:spcAft>
+              <a:defRPr sz="1600" b="0">
+                <a:solidFill>
                   <a:srgbClr val="D4847A"/>
                 </a:solidFill>
                 <a:latin typeface="微软雅黑" panose="020B0503020204020204" charset="-122"/>
               </a:defRPr>
             </a:pPr>
             <a:r>
-              <a:t>-&gt; 防御方法 (STRIP / Neural Cleanse) 可以检测</a:t>
-            </a:r>
+              <a:rPr sz="2000">
+                <a:latin typeface="方正北魏楷书简体" panose="03000509000000000000" charset="-122"/>
+                <a:ea typeface="方正北魏楷书简体" panose="03000509000000000000" charset="-122"/>
+                <a:cs typeface="方正北魏楷书简体" panose="03000509000000000000" charset="-122"/>
+              </a:rPr>
+              <a:t>-&gt; 防御方法 (STRIP / N</a:t>
+            </a:r>
+            <a:r>
+              <a:rPr lang="en-US" sz="2000">
+                <a:latin typeface="方正北魏楷书简体" panose="03000509000000000000" charset="-122"/>
+                <a:ea typeface="方正北魏楷书简体" panose="03000509000000000000" charset="-122"/>
+                <a:cs typeface="方正北魏楷书简体" panose="03000509000000000000" charset="-122"/>
+              </a:rPr>
+              <a:t>C/FP</a:t>
+            </a:r>
+            <a:r>
+              <a:rPr sz="2000">
+                <a:latin typeface="方正北魏楷书简体" panose="03000509000000000000" charset="-122"/>
+                <a:ea typeface="方正北魏楷书简体" panose="03000509000000000000" charset="-122"/>
+                <a:cs typeface="方正北魏楷书简体" panose="03000509000000000000" charset="-122"/>
+              </a:rPr>
+              <a:t>) 可以检测</a:t>
+            </a:r>
+            <a:endParaRPr sz="2000">
+              <a:latin typeface="方正北魏楷书简体" panose="03000509000000000000" charset="-122"/>
+              <a:ea typeface="方正北魏楷书简体" panose="03000509000000000000" charset="-122"/>
+              <a:cs typeface="方正北魏楷书简体" panose="03000509000000000000" charset="-122"/>
+            </a:endParaRPr>
           </a:p>
         </p:txBody>
       </p:sp>
@@ -7030,7 +7679,7 @@
         </p:nvSpPr>
         <p:spPr>
           <a:xfrm>
-            <a:off x="6858000" y="1188720"/>
+            <a:off x="6613525" y="1656715"/>
             <a:ext cx="2286000" cy="1188720"/>
           </a:xfrm>
           <a:prstGeom prst="roundRect">
@@ -7069,14 +7718,14 @@
       </p:sp>
       <p:sp>
         <p:nvSpPr>
-          <p:cNvPr id="6" name="TextBox 5"/>
+          <p:cNvPr id="7" name="TextBox 6"/>
           <p:cNvSpPr txBox="1"/>
           <p:nvPr/>
         </p:nvSpPr>
         <p:spPr>
           <a:xfrm>
-            <a:off x="7035800" y="1315720"/>
-            <a:ext cx="1930400" cy="254000"/>
+            <a:off x="6791325" y="1972310"/>
+            <a:ext cx="1930400" cy="457200"/>
           </a:xfrm>
           <a:prstGeom prst="rect">
             <a:avLst/>
@@ -7090,42 +7739,6 @@
           <a:lstStyle/>
           <a:p>
             <a:pPr algn="ctr">
-              <a:defRPr sz="1100" b="0">
-                <a:solidFill>
-                  <a:srgbClr val="8C8C8C"/>
-                </a:solidFill>
-                <a:latin typeface="微软雅黑" panose="020B0503020204020204" charset="-122"/>
-              </a:defRPr>
-            </a:pPr>
-            <a:r>
-              <a:t>BadNets</a:t>
-            </a:r>
-          </a:p>
-        </p:txBody>
-      </p:sp>
-      <p:sp>
-        <p:nvSpPr>
-          <p:cNvPr id="7" name="TextBox 6"/>
-          <p:cNvSpPr txBox="1"/>
-          <p:nvPr/>
-        </p:nvSpPr>
-        <p:spPr>
-          <a:xfrm>
-            <a:off x="7035800" y="1595120"/>
-            <a:ext cx="1930400" cy="457200"/>
-          </a:xfrm>
-          <a:prstGeom prst="rect">
-            <a:avLst/>
-          </a:prstGeom>
-          <a:noFill/>
-        </p:spPr>
-        <p:txBody>
-          <a:bodyPr wrap="none">
-            <a:spAutoFit/>
-          </a:bodyPr>
-          <a:lstStyle/>
-          <a:p>
-            <a:pPr algn="ctr">
               <a:defRPr sz="2600" b="1">
                 <a:solidFill>
                   <a:srgbClr val="D4847A"/>
@@ -7134,44 +7747,18 @@
               </a:defRPr>
             </a:pPr>
             <a:r>
+              <a:rPr>
+                <a:latin typeface="方正北魏楷书简体" panose="03000509000000000000" charset="-122"/>
+                <a:ea typeface="方正北魏楷书简体" panose="03000509000000000000" charset="-122"/>
+                <a:cs typeface="方正北魏楷书简体" panose="03000509000000000000" charset="-122"/>
+              </a:rPr>
               <a:t>白色Patch</a:t>
             </a:r>
-          </a:p>
-        </p:txBody>
-      </p:sp>
-      <p:sp>
-        <p:nvSpPr>
-          <p:cNvPr id="8" name="TextBox 7"/>
-          <p:cNvSpPr txBox="1"/>
-          <p:nvPr/>
-        </p:nvSpPr>
-        <p:spPr>
-          <a:xfrm>
-            <a:off x="7035800" y="2123440"/>
-            <a:ext cx="1930400" cy="203200"/>
-          </a:xfrm>
-          <a:prstGeom prst="rect">
-            <a:avLst/>
-          </a:prstGeom>
-          <a:noFill/>
-        </p:spPr>
-        <p:txBody>
-          <a:bodyPr wrap="none">
-            <a:spAutoFit/>
-          </a:bodyPr>
-          <a:lstStyle/>
-          <a:p>
-            <a:pPr algn="ctr">
-              <a:defRPr sz="900" b="0">
-                <a:solidFill>
-                  <a:srgbClr val="8C8C8C"/>
-                </a:solidFill>
-                <a:latin typeface="微软雅黑" panose="020B0503020204020204" charset="-122"/>
-              </a:defRPr>
-            </a:pPr>
-            <a:r>
-              <a:t>可见触发器</a:t>
-            </a:r>
+            <a:endParaRPr>
+              <a:latin typeface="方正北魏楷书简体" panose="03000509000000000000" charset="-122"/>
+              <a:ea typeface="方正北魏楷书简体" panose="03000509000000000000" charset="-122"/>
+              <a:cs typeface="方正北魏楷书简体" panose="03000509000000000000" charset="-122"/>
+            </a:endParaRPr>
           </a:p>
         </p:txBody>
       </p:sp>
@@ -7183,7 +7770,7 @@
         </p:nvSpPr>
         <p:spPr>
           <a:xfrm>
-            <a:off x="9418320" y="1188720"/>
+            <a:off x="9173845" y="1656715"/>
             <a:ext cx="2286000" cy="1188720"/>
           </a:xfrm>
           <a:prstGeom prst="roundRect">
@@ -7222,14 +7809,14 @@
       </p:sp>
       <p:sp>
         <p:nvSpPr>
-          <p:cNvPr id="10" name="TextBox 9"/>
+          <p:cNvPr id="11" name="TextBox 10"/>
           <p:cNvSpPr txBox="1"/>
           <p:nvPr/>
         </p:nvSpPr>
         <p:spPr>
           <a:xfrm>
-            <a:off x="9596120" y="1315720"/>
-            <a:ext cx="1930400" cy="254000"/>
+            <a:off x="9351645" y="1972310"/>
+            <a:ext cx="1930400" cy="457200"/>
           </a:xfrm>
           <a:prstGeom prst="rect">
             <a:avLst/>
@@ -7243,42 +7830,6 @@
           <a:lstStyle/>
           <a:p>
             <a:pPr algn="ctr">
-              <a:defRPr sz="1100" b="0">
-                <a:solidFill>
-                  <a:srgbClr val="8C8C8C"/>
-                </a:solidFill>
-                <a:latin typeface="微软雅黑" panose="020B0503020204020204" charset="-122"/>
-              </a:defRPr>
-            </a:pPr>
-            <a:r>
-              <a:t>Blend/SIG</a:t>
-            </a:r>
-          </a:p>
-        </p:txBody>
-      </p:sp>
-      <p:sp>
-        <p:nvSpPr>
-          <p:cNvPr id="11" name="TextBox 10"/>
-          <p:cNvSpPr txBox="1"/>
-          <p:nvPr/>
-        </p:nvSpPr>
-        <p:spPr>
-          <a:xfrm>
-            <a:off x="9596120" y="1595120"/>
-            <a:ext cx="1930400" cy="457200"/>
-          </a:xfrm>
-          <a:prstGeom prst="rect">
-            <a:avLst/>
-          </a:prstGeom>
-          <a:noFill/>
-        </p:spPr>
-        <p:txBody>
-          <a:bodyPr wrap="none">
-            <a:spAutoFit/>
-          </a:bodyPr>
-          <a:lstStyle/>
-          <a:p>
-            <a:pPr algn="ctr">
               <a:defRPr sz="2600" b="1">
                 <a:solidFill>
                   <a:srgbClr val="D4847A"/>
@@ -7287,44 +7838,16 @@
               </a:defRPr>
             </a:pPr>
             <a:r>
+              <a:rPr>
+                <a:latin typeface="方正北魏楷书简体" panose="03000509000000000000" charset="-122"/>
+                <a:ea typeface="方正北魏楷书简体" panose="03000509000000000000" charset="-122"/>
+              </a:rPr>
               <a:t>叠加图案</a:t>
             </a:r>
-          </a:p>
-        </p:txBody>
-      </p:sp>
-      <p:sp>
-        <p:nvSpPr>
-          <p:cNvPr id="12" name="TextBox 11"/>
-          <p:cNvSpPr txBox="1"/>
-          <p:nvPr/>
-        </p:nvSpPr>
-        <p:spPr>
-          <a:xfrm>
-            <a:off x="9596120" y="2123440"/>
-            <a:ext cx="1930400" cy="203200"/>
-          </a:xfrm>
-          <a:prstGeom prst="rect">
-            <a:avLst/>
-          </a:prstGeom>
-          <a:noFill/>
-        </p:spPr>
-        <p:txBody>
-          <a:bodyPr wrap="none">
-            <a:spAutoFit/>
-          </a:bodyPr>
-          <a:lstStyle/>
-          <a:p>
-            <a:pPr algn="ctr">
-              <a:defRPr sz="900" b="0">
-                <a:solidFill>
-                  <a:srgbClr val="8C8C8C"/>
-                </a:solidFill>
-                <a:latin typeface="微软雅黑" panose="020B0503020204020204" charset="-122"/>
-              </a:defRPr>
-            </a:pPr>
-            <a:r>
-              <a:t>可见触发器</a:t>
-            </a:r>
+            <a:endParaRPr>
+              <a:latin typeface="方正北魏楷书简体" panose="03000509000000000000" charset="-122"/>
+              <a:ea typeface="方正北魏楷书简体" panose="03000509000000000000" charset="-122"/>
+            </a:endParaRPr>
           </a:p>
         </p:txBody>
       </p:sp>
@@ -7336,7 +7859,7 @@
         </p:nvSpPr>
         <p:spPr>
           <a:xfrm>
-            <a:off x="6858000" y="2743200"/>
+            <a:off x="6613525" y="3211195"/>
             <a:ext cx="4846320" cy="1188720"/>
           </a:xfrm>
           <a:prstGeom prst="roundRect">
@@ -7375,14 +7898,14 @@
       </p:sp>
       <p:sp>
         <p:nvSpPr>
-          <p:cNvPr id="14" name="TextBox 13"/>
+          <p:cNvPr id="15" name="TextBox 14"/>
           <p:cNvSpPr txBox="1"/>
           <p:nvPr/>
         </p:nvSpPr>
         <p:spPr>
           <a:xfrm>
-            <a:off x="7035800" y="2870200"/>
-            <a:ext cx="4490720" cy="254000"/>
+            <a:off x="6791325" y="3526790"/>
+            <a:ext cx="4490720" cy="457200"/>
           </a:xfrm>
           <a:prstGeom prst="rect">
             <a:avLst/>
@@ -7396,29 +7919,39 @@
           <a:lstStyle/>
           <a:p>
             <a:pPr algn="ctr">
-              <a:defRPr sz="1100" b="0">
-                <a:solidFill>
-                  <a:srgbClr val="8C8C8C"/>
-                </a:solidFill>
-                <a:latin typeface="微软雅黑" panose="020B0503020204020204" charset="-122"/>
-              </a:defRPr>
-            </a:pPr>
-            <a:r>
-              <a:t>共同问题</a:t>
-            </a:r>
-          </a:p>
-        </p:txBody>
-      </p:sp>
-      <p:sp>
-        <p:nvSpPr>
-          <p:cNvPr id="15" name="TextBox 14"/>
+              <a:defRPr sz="2600" b="1">
+                <a:solidFill>
+                  <a:srgbClr val="C2A497"/>
+                </a:solidFill>
+                <a:latin typeface="微软雅黑" panose="020B0503020204020204" charset="-122"/>
+              </a:defRPr>
+            </a:pPr>
+            <a:r>
+              <a:rPr>
+                <a:latin typeface="方正北魏楷书简体" panose="03000509000000000000" charset="-122"/>
+                <a:ea typeface="方正北魏楷书简体" panose="03000509000000000000" charset="-122"/>
+                <a:cs typeface="方正北魏楷书简体" panose="03000509000000000000" charset="-122"/>
+              </a:rPr>
+              <a:t>人眼可见 + 防御可检测</a:t>
+            </a:r>
+            <a:endParaRPr>
+              <a:latin typeface="方正北魏楷书简体" panose="03000509000000000000" charset="-122"/>
+              <a:ea typeface="方正北魏楷书简体" panose="03000509000000000000" charset="-122"/>
+              <a:cs typeface="方正北魏楷书简体" panose="03000509000000000000" charset="-122"/>
+            </a:endParaRPr>
+          </a:p>
+        </p:txBody>
+      </p:sp>
+      <p:sp>
+        <p:nvSpPr>
+          <p:cNvPr id="17" name="TextBox 16"/>
           <p:cNvSpPr txBox="1"/>
           <p:nvPr/>
         </p:nvSpPr>
         <p:spPr>
           <a:xfrm>
-            <a:off x="7035800" y="3149600"/>
-            <a:ext cx="4490720" cy="457200"/>
+            <a:off x="6613525" y="4857115"/>
+            <a:ext cx="4977130" cy="398780"/>
           </a:xfrm>
           <a:prstGeom prst="rect">
             <a:avLst/>
@@ -7431,78 +7964,6 @@
           </a:bodyPr>
           <a:lstStyle/>
           <a:p>
-            <a:pPr algn="ctr">
-              <a:defRPr sz="2600" b="1">
-                <a:solidFill>
-                  <a:srgbClr val="C2A497"/>
-                </a:solidFill>
-                <a:latin typeface="微软雅黑" panose="020B0503020204020204" charset="-122"/>
-              </a:defRPr>
-            </a:pPr>
-            <a:r>
-              <a:t>人眼可见 + 防御可检测</a:t>
-            </a:r>
-          </a:p>
-        </p:txBody>
-      </p:sp>
-      <p:sp>
-        <p:nvSpPr>
-          <p:cNvPr id="16" name="TextBox 15"/>
-          <p:cNvSpPr txBox="1"/>
-          <p:nvPr/>
-        </p:nvSpPr>
-        <p:spPr>
-          <a:xfrm>
-            <a:off x="7035800" y="3677920"/>
-            <a:ext cx="4490720" cy="203200"/>
-          </a:xfrm>
-          <a:prstGeom prst="rect">
-            <a:avLst/>
-          </a:prstGeom>
-          <a:noFill/>
-        </p:spPr>
-        <p:txBody>
-          <a:bodyPr wrap="none">
-            <a:spAutoFit/>
-          </a:bodyPr>
-          <a:lstStyle/>
-          <a:p>
-            <a:pPr algn="ctr">
-              <a:defRPr sz="900" b="0">
-                <a:solidFill>
-                  <a:srgbClr val="8C8C8C"/>
-                </a:solidFill>
-                <a:latin typeface="微软雅黑" panose="020B0503020204020204" charset="-122"/>
-              </a:defRPr>
-            </a:pPr>
-            <a:r>
-              <a:t>需要更隐蔽的触发器</a:t>
-            </a:r>
-          </a:p>
-        </p:txBody>
-      </p:sp>
-      <p:sp>
-        <p:nvSpPr>
-          <p:cNvPr id="17" name="TextBox 16"/>
-          <p:cNvSpPr txBox="1"/>
-          <p:nvPr/>
-        </p:nvSpPr>
-        <p:spPr>
-          <a:xfrm>
-            <a:off x="6858000" y="4389120"/>
-            <a:ext cx="4846320" cy="457200"/>
-          </a:xfrm>
-          <a:prstGeom prst="rect">
-            <a:avLst/>
-          </a:prstGeom>
-          <a:noFill/>
-        </p:spPr>
-        <p:txBody>
-          <a:bodyPr wrap="none">
-            <a:spAutoFit/>
-          </a:bodyPr>
-          <a:lstStyle/>
-          <a:p>
             <a:pPr algn="l">
               <a:defRPr sz="1500" b="1">
                 <a:solidFill>
@@ -7512,8 +7973,18 @@
               </a:defRPr>
             </a:pPr>
             <a:r>
+              <a:rPr sz="2000">
+                <a:latin typeface="方正北魏楷书简体" panose="03000509000000000000" charset="-122"/>
+                <a:ea typeface="方正北魏楷书简体" panose="03000509000000000000" charset="-122"/>
+                <a:cs typeface="方正北魏楷书简体" panose="03000509000000000000" charset="-122"/>
+              </a:rPr>
               <a:t>WaNet的答案: 用图像形变替代可见Patch</a:t>
             </a:r>
+            <a:endParaRPr sz="2000">
+              <a:latin typeface="方正北魏楷书简体" panose="03000509000000000000" charset="-122"/>
+              <a:ea typeface="方正北魏楷书简体" panose="03000509000000000000" charset="-122"/>
+              <a:cs typeface="方正北魏楷书简体" panose="03000509000000000000" charset="-122"/>
+            </a:endParaRPr>
           </a:p>
         </p:txBody>
       </p:sp>
@@ -7552,7 +8023,7 @@
         <p:spPr>
           <a:xfrm>
             <a:off x="731520" y="457200"/>
-            <a:ext cx="6400800" cy="457200"/>
+            <a:ext cx="5726430" cy="553085"/>
           </a:xfrm>
           <a:prstGeom prst="rect">
             <a:avLst/>
@@ -7574,8 +8045,18 @@
               </a:defRPr>
             </a:pPr>
             <a:r>
+              <a:rPr>
+                <a:latin typeface="方正北魏楷书简体" panose="03000509000000000000" charset="-122"/>
+                <a:ea typeface="方正北魏楷书简体" panose="03000509000000000000" charset="-122"/>
+                <a:cs typeface="方正北魏楷书简体" panose="03000509000000000000" charset="-122"/>
+              </a:rPr>
               <a:t>WaNet: 基于图像形变的后门攻击</a:t>
             </a:r>
+            <a:endParaRPr>
+              <a:latin typeface="方正北魏楷书简体" panose="03000509000000000000" charset="-122"/>
+              <a:ea typeface="方正北魏楷书简体" panose="03000509000000000000" charset="-122"/>
+              <a:cs typeface="方正北魏楷书简体" panose="03000509000000000000" charset="-122"/>
+            </a:endParaRPr>
           </a:p>
         </p:txBody>
       </p:sp>
@@ -7610,8 +8091,16 @@
               </a:defRPr>
             </a:pPr>
             <a:r>
+              <a:rPr>
+                <a:latin typeface="方正北魏楷书简体" panose="03000509000000000000" charset="-122"/>
+                <a:ea typeface="方正北魏楷书简体" panose="03000509000000000000" charset="-122"/>
+              </a:rPr>
               <a:t>Nguyen &amp; Tran, ICLR 2021</a:t>
             </a:r>
+            <a:endParaRPr>
+              <a:latin typeface="方正北魏楷书简体" panose="03000509000000000000" charset="-122"/>
+              <a:ea typeface="方正北魏楷书简体" panose="03000509000000000000" charset="-122"/>
+            </a:endParaRPr>
           </a:p>
         </p:txBody>
       </p:sp>
@@ -7666,8 +8155,8 @@
         </p:nvSpPr>
         <p:spPr>
           <a:xfrm>
-            <a:off x="731520" y="1645920"/>
-            <a:ext cx="5303520" cy="2743200"/>
+            <a:off x="731520" y="1778635"/>
+            <a:ext cx="6193790" cy="4204970"/>
           </a:xfrm>
           <a:prstGeom prst="rect">
             <a:avLst/>
@@ -7692,8 +8181,18 @@
               </a:defRPr>
             </a:pPr>
             <a:r>
+              <a:rPr sz="1800">
+                <a:latin typeface="方正北魏楷书简体" panose="03000509000000000000" charset="-122"/>
+                <a:ea typeface="方正北魏楷书简体" panose="03000509000000000000" charset="-122"/>
+                <a:cs typeface="方正北魏楷书简体" panose="03000509000000000000" charset="-122"/>
+              </a:rPr>
               <a:t>核心思想:</a:t>
             </a:r>
+            <a:endParaRPr sz="1800">
+              <a:latin typeface="方正北魏楷书简体" panose="03000509000000000000" charset="-122"/>
+              <a:ea typeface="方正北魏楷书简体" panose="03000509000000000000" charset="-122"/>
+              <a:cs typeface="方正北魏楷书简体" panose="03000509000000000000" charset="-122"/>
+            </a:endParaRPr>
           </a:p>
           <a:p>
             <a:pPr>
@@ -7708,8 +8207,18 @@
               </a:defRPr>
             </a:pPr>
             <a:r>
+              <a:rPr sz="1800">
+                <a:latin typeface="方正北魏楷书简体" panose="03000509000000000000" charset="-122"/>
+                <a:ea typeface="方正北魏楷书简体" panose="03000509000000000000" charset="-122"/>
+                <a:cs typeface="方正北魏楷书简体" panose="03000509000000000000" charset="-122"/>
+              </a:rPr>
               <a:t>用图像空间形变(Warping)替代可见Patch作为后门触发器</a:t>
             </a:r>
+            <a:endParaRPr sz="1800">
+              <a:latin typeface="方正北魏楷书简体" panose="03000509000000000000" charset="-122"/>
+              <a:ea typeface="方正北魏楷书简体" panose="03000509000000000000" charset="-122"/>
+              <a:cs typeface="方正北魏楷书简体" panose="03000509000000000000" charset="-122"/>
+            </a:endParaRPr>
           </a:p>
           <a:p>
             <a:pPr>
@@ -7723,6 +8232,11 @@
                 <a:latin typeface="微软雅黑" panose="020B0503020204020204" charset="-122"/>
               </a:defRPr>
             </a:pPr>
+            <a:endParaRPr sz="1800">
+              <a:latin typeface="方正北魏楷书简体" panose="03000509000000000000" charset="-122"/>
+              <a:ea typeface="方正北魏楷书简体" panose="03000509000000000000" charset="-122"/>
+              <a:cs typeface="方正北魏楷书简体" panose="03000509000000000000" charset="-122"/>
+            </a:endParaRPr>
           </a:p>
           <a:p>
             <a:pPr>
@@ -7737,8 +8251,18 @@
               </a:defRPr>
             </a:pPr>
             <a:r>
+              <a:rPr sz="1800">
+                <a:latin typeface="方正北魏楷书简体" panose="03000509000000000000" charset="-122"/>
+                <a:ea typeface="方正北魏楷书简体" panose="03000509000000000000" charset="-122"/>
+                <a:cs typeface="方正北魏楷书简体" panose="03000509000000000000" charset="-122"/>
+              </a:rPr>
               <a:t>怎么做:</a:t>
             </a:r>
+            <a:endParaRPr sz="1800">
+              <a:latin typeface="方正北魏楷书简体" panose="03000509000000000000" charset="-122"/>
+              <a:ea typeface="方正北魏楷书简体" panose="03000509000000000000" charset="-122"/>
+              <a:cs typeface="方正北魏楷书简体" panose="03000509000000000000" charset="-122"/>
+            </a:endParaRPr>
           </a:p>
           <a:p>
             <a:pPr>
@@ -7753,8 +8277,24 @@
               </a:defRPr>
             </a:pPr>
             <a:r>
+              <a:rPr sz="1800">
+                <a:solidFill>
+                  <a:schemeClr val="tx1"/>
+                </a:solidFill>
+                <a:latin typeface="方正北魏楷书简体" panose="03000509000000000000" charset="-122"/>
+                <a:ea typeface="方正北魏楷书简体" panose="03000509000000000000" charset="-122"/>
+                <a:cs typeface="方正北魏楷书简体" panose="03000509000000000000" charset="-122"/>
+              </a:rPr>
               <a:t>1. 生成 k*k 随机控制网格, 定义平滑的像素位移场</a:t>
             </a:r>
+            <a:endParaRPr sz="1800">
+              <a:solidFill>
+                <a:schemeClr val="tx1"/>
+              </a:solidFill>
+              <a:latin typeface="方正北魏楷书简体" panose="03000509000000000000" charset="-122"/>
+              <a:ea typeface="方正北魏楷书简体" panose="03000509000000000000" charset="-122"/>
+              <a:cs typeface="方正北魏楷书简体" panose="03000509000000000000" charset="-122"/>
+            </a:endParaRPr>
           </a:p>
           <a:p>
             <a:pPr>
@@ -7769,8 +8309,24 @@
               </a:defRPr>
             </a:pPr>
             <a:r>
+              <a:rPr sz="1800">
+                <a:solidFill>
+                  <a:schemeClr val="tx1"/>
+                </a:solidFill>
+                <a:latin typeface="方正北魏楷书简体" panose="03000509000000000000" charset="-122"/>
+                <a:ea typeface="方正北魏楷书简体" panose="03000509000000000000" charset="-122"/>
+                <a:cs typeface="方正北魏楷书简体" panose="03000509000000000000" charset="-122"/>
+              </a:rPr>
               <a:t>2. 对图像做微小形变 (亚像素级) -&gt; 后门样本</a:t>
             </a:r>
+            <a:endParaRPr sz="1800">
+              <a:solidFill>
+                <a:schemeClr val="tx1"/>
+              </a:solidFill>
+              <a:latin typeface="方正北魏楷书简体" panose="03000509000000000000" charset="-122"/>
+              <a:ea typeface="方正北魏楷书简体" panose="03000509000000000000" charset="-122"/>
+              <a:cs typeface="方正北魏楷书简体" panose="03000509000000000000" charset="-122"/>
+            </a:endParaRPr>
           </a:p>
           <a:p>
             <a:pPr>
@@ -7785,8 +8341,24 @@
               </a:defRPr>
             </a:pPr>
             <a:r>
+              <a:rPr sz="1800">
+                <a:solidFill>
+                  <a:schemeClr val="tx1"/>
+                </a:solidFill>
+                <a:latin typeface="方正北魏楷书简体" panose="03000509000000000000" charset="-122"/>
+                <a:ea typeface="方正北魏楷书简体" panose="03000509000000000000" charset="-122"/>
+                <a:cs typeface="方正北魏楷书简体" panose="03000509000000000000" charset="-122"/>
+              </a:rPr>
               <a:t>3. 模型学到该形变模式与目标标签的关联</a:t>
             </a:r>
+            <a:endParaRPr sz="1800">
+              <a:solidFill>
+                <a:schemeClr val="tx1"/>
+              </a:solidFill>
+              <a:latin typeface="方正北魏楷书简体" panose="03000509000000000000" charset="-122"/>
+              <a:ea typeface="方正北魏楷书简体" panose="03000509000000000000" charset="-122"/>
+              <a:cs typeface="方正北魏楷书简体" panose="03000509000000000000" charset="-122"/>
+            </a:endParaRPr>
           </a:p>
           <a:p>
             <a:pPr>
@@ -7801,8 +8373,24 @@
               </a:defRPr>
             </a:pPr>
             <a:r>
+              <a:rPr sz="1800">
+                <a:solidFill>
+                  <a:schemeClr val="tx1"/>
+                </a:solidFill>
+                <a:latin typeface="方正北魏楷书简体" panose="03000509000000000000" charset="-122"/>
+                <a:ea typeface="方正北魏楷书简体" panose="03000509000000000000" charset="-122"/>
+                <a:cs typeface="方正北魏楷书简体" panose="03000509000000000000" charset="-122"/>
+              </a:rPr>
               <a:t>4. 人眼完全无法察觉形变</a:t>
             </a:r>
+            <a:endParaRPr sz="1800">
+              <a:solidFill>
+                <a:schemeClr val="tx1"/>
+              </a:solidFill>
+              <a:latin typeface="方正北魏楷书简体" panose="03000509000000000000" charset="-122"/>
+              <a:ea typeface="方正北魏楷书简体" panose="03000509000000000000" charset="-122"/>
+              <a:cs typeface="方正北魏楷书简体" panose="03000509000000000000" charset="-122"/>
+            </a:endParaRPr>
           </a:p>
           <a:p>
             <a:pPr>
@@ -7816,6 +8404,11 @@
                 <a:latin typeface="微软雅黑" panose="020B0503020204020204" charset="-122"/>
               </a:defRPr>
             </a:pPr>
+            <a:endParaRPr sz="1800">
+              <a:latin typeface="方正北魏楷书简体" panose="03000509000000000000" charset="-122"/>
+              <a:ea typeface="方正北魏楷书简体" panose="03000509000000000000" charset="-122"/>
+              <a:cs typeface="方正北魏楷书简体" panose="03000509000000000000" charset="-122"/>
+            </a:endParaRPr>
           </a:p>
           <a:p>
             <a:pPr>
@@ -7830,8 +8423,18 @@
               </a:defRPr>
             </a:pPr>
             <a:r>
+              <a:rPr sz="1800">
+                <a:latin typeface="方正北魏楷书简体" panose="03000509000000000000" charset="-122"/>
+                <a:ea typeface="方正北魏楷书简体" panose="03000509000000000000" charset="-122"/>
+                <a:cs typeface="方正北魏楷书简体" panose="03000509000000000000" charset="-122"/>
+              </a:rPr>
               <a:t>关键设计: Noise Mode</a:t>
             </a:r>
+            <a:endParaRPr sz="1800">
+              <a:latin typeface="方正北魏楷书简体" panose="03000509000000000000" charset="-122"/>
+              <a:ea typeface="方正北魏楷书简体" panose="03000509000000000000" charset="-122"/>
+              <a:cs typeface="方正北魏楷书简体" panose="03000509000000000000" charset="-122"/>
+            </a:endParaRPr>
           </a:p>
           <a:p>
             <a:pPr>
@@ -7846,8 +8449,44 @@
               </a:defRPr>
             </a:pPr>
             <a:r>
-              <a:t>训练时加入随机形变的噪声样本, 迫使模型学习真正的warping而非像素捷径</a:t>
-            </a:r>
+              <a:rPr sz="1800">
+                <a:latin typeface="方正北魏楷书简体" panose="03000509000000000000" charset="-122"/>
+                <a:ea typeface="方正北魏楷书简体" panose="03000509000000000000" charset="-122"/>
+                <a:cs typeface="方正北魏楷书简体" panose="03000509000000000000" charset="-122"/>
+              </a:rPr>
+              <a:t>训练时加入随机形变的噪声样本</a:t>
+            </a:r>
+            <a:endParaRPr sz="1800">
+              <a:latin typeface="方正北魏楷书简体" panose="03000509000000000000" charset="-122"/>
+              <a:ea typeface="方正北魏楷书简体" panose="03000509000000000000" charset="-122"/>
+              <a:cs typeface="方正北魏楷书简体" panose="03000509000000000000" charset="-122"/>
+            </a:endParaRPr>
+          </a:p>
+          <a:p>
+            <a:pPr>
+              <a:spcAft>
+                <a:spcPts val="560"/>
+              </a:spcAft>
+              <a:defRPr sz="1600" b="0">
+                <a:solidFill>
+                  <a:srgbClr val="3D3D3D"/>
+                </a:solidFill>
+                <a:latin typeface="微软雅黑" panose="020B0503020204020204" charset="-122"/>
+              </a:defRPr>
+            </a:pPr>
+            <a:r>
+              <a:rPr sz="1800">
+                <a:latin typeface="方正北魏楷书简体" panose="03000509000000000000" charset="-122"/>
+                <a:ea typeface="方正北魏楷书简体" panose="03000509000000000000" charset="-122"/>
+                <a:cs typeface="方正北魏楷书简体" panose="03000509000000000000" charset="-122"/>
+              </a:rPr>
+              <a:t>迫使模型学习真正的warping而非像素捷径</a:t>
+            </a:r>
+            <a:endParaRPr sz="1800">
+              <a:latin typeface="方正北魏楷书简体" panose="03000509000000000000" charset="-122"/>
+              <a:ea typeface="方正北魏楷书简体" panose="03000509000000000000" charset="-122"/>
+              <a:cs typeface="方正北魏楷书简体" panose="03000509000000000000" charset="-122"/>
+            </a:endParaRPr>
           </a:p>
         </p:txBody>
       </p:sp>
@@ -7855,11 +8494,15 @@
         <p:nvSpPr>
           <p:cNvPr id="6" name="Rounded Rectangle 5"/>
           <p:cNvSpPr/>
-          <p:nvPr/>
-        </p:nvSpPr>
-        <p:spPr>
-          <a:xfrm>
-            <a:off x="6858000" y="1371600"/>
+          <p:nvPr>
+            <p:custDataLst>
+              <p:tags r:id="rId1"/>
+            </p:custDataLst>
+          </p:nvPr>
+        </p:nvSpPr>
+        <p:spPr>
+          <a:xfrm>
+            <a:off x="6920865" y="3348355"/>
             <a:ext cx="4572000" cy="1371600"/>
           </a:xfrm>
           <a:prstGeom prst="roundRect">
@@ -7900,12 +8543,16 @@
         <p:nvSpPr>
           <p:cNvPr id="7" name="TextBox 6"/>
           <p:cNvSpPr txBox="1"/>
-          <p:nvPr/>
-        </p:nvSpPr>
-        <p:spPr>
-          <a:xfrm>
-            <a:off x="7035800" y="1498600"/>
-            <a:ext cx="4216400" cy="254000"/>
+          <p:nvPr>
+            <p:custDataLst>
+              <p:tags r:id="rId2"/>
+            </p:custDataLst>
+          </p:nvPr>
+        </p:nvSpPr>
+        <p:spPr>
+          <a:xfrm>
+            <a:off x="8383270" y="3398520"/>
+            <a:ext cx="1647190" cy="337185"/>
           </a:xfrm>
           <a:prstGeom prst="rect">
             <a:avLst/>
@@ -7927,8 +8574,18 @@
               </a:defRPr>
             </a:pPr>
             <a:r>
+              <a:rPr sz="1600">
+                <a:latin typeface="方正北魏楷书简体" panose="03000509000000000000" charset="-122"/>
+                <a:ea typeface="方正北魏楷书简体" panose="03000509000000000000" charset="-122"/>
+                <a:cs typeface="方正北魏楷书简体" panose="03000509000000000000" charset="-122"/>
+              </a:rPr>
               <a:t>WaNet 攻击效果</a:t>
             </a:r>
+            <a:endParaRPr sz="1600">
+              <a:latin typeface="方正北魏楷书简体" panose="03000509000000000000" charset="-122"/>
+              <a:ea typeface="方正北魏楷书简体" panose="03000509000000000000" charset="-122"/>
+              <a:cs typeface="方正北魏楷书简体" panose="03000509000000000000" charset="-122"/>
+            </a:endParaRPr>
           </a:p>
         </p:txBody>
       </p:sp>
@@ -7936,11 +8593,15 @@
         <p:nvSpPr>
           <p:cNvPr id="8" name="TextBox 7"/>
           <p:cNvSpPr txBox="1"/>
-          <p:nvPr/>
-        </p:nvSpPr>
-        <p:spPr>
-          <a:xfrm>
-            <a:off x="7035800" y="1778000"/>
+          <p:nvPr>
+            <p:custDataLst>
+              <p:tags r:id="rId3"/>
+            </p:custDataLst>
+          </p:nvPr>
+        </p:nvSpPr>
+        <p:spPr>
+          <a:xfrm>
+            <a:off x="7098665" y="3754755"/>
             <a:ext cx="4216400" cy="457200"/>
           </a:xfrm>
           <a:prstGeom prst="rect">
@@ -7963,8 +8624,16 @@
               </a:defRPr>
             </a:pPr>
             <a:r>
+              <a:rPr>
+                <a:latin typeface="方正北魏楷书简体" panose="03000509000000000000" charset="-122"/>
+                <a:ea typeface="方正北魏楷书简体" panose="03000509000000000000" charset="-122"/>
+              </a:rPr>
               <a:t>ASR = 99.15%</a:t>
             </a:r>
+            <a:endParaRPr>
+              <a:latin typeface="方正北魏楷书简体" panose="03000509000000000000" charset="-122"/>
+              <a:ea typeface="方正北魏楷书简体" panose="03000509000000000000" charset="-122"/>
+            </a:endParaRPr>
           </a:p>
         </p:txBody>
       </p:sp>
@@ -7972,12 +8641,16 @@
         <p:nvSpPr>
           <p:cNvPr id="9" name="TextBox 8"/>
           <p:cNvSpPr txBox="1"/>
-          <p:nvPr/>
-        </p:nvSpPr>
-        <p:spPr>
-          <a:xfrm>
-            <a:off x="7035800" y="2489200"/>
-            <a:ext cx="4216400" cy="203200"/>
+          <p:nvPr>
+            <p:custDataLst>
+              <p:tags r:id="rId4"/>
+            </p:custDataLst>
+          </p:nvPr>
+        </p:nvSpPr>
+        <p:spPr>
+          <a:xfrm>
+            <a:off x="8493125" y="4361180"/>
+            <a:ext cx="1427480" cy="306705"/>
           </a:xfrm>
           <a:prstGeom prst="rect">
             <a:avLst/>
@@ -7999,8 +8672,16 @@
               </a:defRPr>
             </a:pPr>
             <a:r>
+              <a:rPr sz="1400">
+                <a:latin typeface="方正北魏楷书简体" panose="03000509000000000000" charset="-122"/>
+                <a:ea typeface="方正北魏楷书简体" panose="03000509000000000000" charset="-122"/>
+              </a:rPr>
               <a:t>人眼完全不可见</a:t>
             </a:r>
+            <a:endParaRPr sz="1400">
+              <a:latin typeface="方正北魏楷书简体" panose="03000509000000000000" charset="-122"/>
+              <a:ea typeface="方正北魏楷书简体" panose="03000509000000000000" charset="-122"/>
+            </a:endParaRPr>
           </a:p>
         </p:txBody>
       </p:sp>
@@ -8008,11 +8689,15 @@
         <p:nvSpPr>
           <p:cNvPr id="10" name="Rounded Rectangle 9"/>
           <p:cNvSpPr/>
-          <p:nvPr/>
-        </p:nvSpPr>
-        <p:spPr>
-          <a:xfrm>
-            <a:off x="6858000" y="3200400"/>
+          <p:nvPr>
+            <p:custDataLst>
+              <p:tags r:id="rId5"/>
+            </p:custDataLst>
+          </p:nvPr>
+        </p:nvSpPr>
+        <p:spPr>
+          <a:xfrm>
+            <a:off x="6920865" y="4995545"/>
             <a:ext cx="4572000" cy="1371600"/>
           </a:xfrm>
           <a:prstGeom prst="roundRect">
@@ -8053,12 +8738,16 @@
         <p:nvSpPr>
           <p:cNvPr id="11" name="TextBox 10"/>
           <p:cNvSpPr txBox="1"/>
-          <p:nvPr/>
-        </p:nvSpPr>
-        <p:spPr>
-          <a:xfrm>
-            <a:off x="7035800" y="3327400"/>
-            <a:ext cx="4216400" cy="254000"/>
+          <p:nvPr>
+            <p:custDataLst>
+              <p:tags r:id="rId6"/>
+            </p:custDataLst>
+          </p:nvPr>
+        </p:nvSpPr>
+        <p:spPr>
+          <a:xfrm>
+            <a:off x="8709025" y="5045710"/>
+            <a:ext cx="995680" cy="337185"/>
           </a:xfrm>
           <a:prstGeom prst="rect">
             <a:avLst/>
@@ -8080,8 +8769,16 @@
               </a:defRPr>
             </a:pPr>
             <a:r>
+              <a:rPr sz="1600">
+                <a:latin typeface="方正北魏楷书简体" panose="03000509000000000000" charset="-122"/>
+                <a:ea typeface="方正北魏楷书简体" panose="03000509000000000000" charset="-122"/>
+              </a:rPr>
               <a:t>绕过防御</a:t>
             </a:r>
+            <a:endParaRPr sz="1600">
+              <a:latin typeface="方正北魏楷书简体" panose="03000509000000000000" charset="-122"/>
+              <a:ea typeface="方正北魏楷书简体" panose="03000509000000000000" charset="-122"/>
+            </a:endParaRPr>
           </a:p>
         </p:txBody>
       </p:sp>
@@ -8089,11 +8786,15 @@
         <p:nvSpPr>
           <p:cNvPr id="12" name="TextBox 11"/>
           <p:cNvSpPr txBox="1"/>
-          <p:nvPr/>
-        </p:nvSpPr>
-        <p:spPr>
-          <a:xfrm>
-            <a:off x="7035800" y="3606800"/>
+          <p:nvPr>
+            <p:custDataLst>
+              <p:tags r:id="rId7"/>
+            </p:custDataLst>
+          </p:nvPr>
+        </p:nvSpPr>
+        <p:spPr>
+          <a:xfrm>
+            <a:off x="7098665" y="5401945"/>
             <a:ext cx="4216400" cy="457200"/>
           </a:xfrm>
           <a:prstGeom prst="rect">
@@ -8116,8 +8817,18 @@
               </a:defRPr>
             </a:pPr>
             <a:r>
+              <a:rPr>
+                <a:latin typeface="方正北魏楷书简体" panose="03000509000000000000" charset="-122"/>
+                <a:ea typeface="方正北魏楷书简体" panose="03000509000000000000" charset="-122"/>
+                <a:cs typeface="方正北魏楷书简体" panose="03000509000000000000" charset="-122"/>
+              </a:rPr>
               <a:t>STRIP / NC / FP 全部失效</a:t>
             </a:r>
+            <a:endParaRPr>
+              <a:latin typeface="方正北魏楷书简体" panose="03000509000000000000" charset="-122"/>
+              <a:ea typeface="方正北魏楷书简体" panose="03000509000000000000" charset="-122"/>
+              <a:cs typeface="方正北魏楷书简体" panose="03000509000000000000" charset="-122"/>
+            </a:endParaRPr>
           </a:p>
         </p:txBody>
       </p:sp>
@@ -8125,12 +8836,16 @@
         <p:nvSpPr>
           <p:cNvPr id="13" name="TextBox 12"/>
           <p:cNvSpPr txBox="1"/>
-          <p:nvPr/>
-        </p:nvSpPr>
-        <p:spPr>
-          <a:xfrm>
-            <a:off x="7035800" y="4318000"/>
-            <a:ext cx="4216400" cy="203200"/>
+          <p:nvPr>
+            <p:custDataLst>
+              <p:tags r:id="rId8"/>
+            </p:custDataLst>
+          </p:nvPr>
+        </p:nvSpPr>
+        <p:spPr>
+          <a:xfrm>
+            <a:off x="8404225" y="5980430"/>
+            <a:ext cx="1605280" cy="306705"/>
           </a:xfrm>
           <a:prstGeom prst="rect">
             <a:avLst/>
@@ -8152,29 +8867,37 @@
               </a:defRPr>
             </a:pPr>
             <a:r>
+              <a:rPr sz="1400">
+                <a:latin typeface="方正北魏楷书简体" panose="03000509000000000000" charset="-122"/>
+                <a:ea typeface="方正北魏楷书简体" panose="03000509000000000000" charset="-122"/>
+              </a:rPr>
               <a:t>现有防御无法检测</a:t>
             </a:r>
+            <a:endParaRPr sz="1400">
+              <a:latin typeface="方正北魏楷书简体" panose="03000509000000000000" charset="-122"/>
+              <a:ea typeface="方正北魏楷书简体" panose="03000509000000000000" charset="-122"/>
+            </a:endParaRPr>
           </a:p>
         </p:txBody>
       </p:sp>
       <p:pic>
         <p:nvPicPr>
-          <p:cNvPr id="14" name="图片 13"/>
+          <p:cNvPr id="15" name="图片 14"/>
           <p:cNvPicPr>
             <a:picLocks noChangeAspect="1"/>
           </p:cNvPicPr>
           <p:nvPr/>
         </p:nvPicPr>
         <p:blipFill>
-          <a:blip r:embed="rId1"/>
+          <a:blip r:embed="rId9"/>
           <a:stretch>
             <a:fillRect/>
           </a:stretch>
         </p:blipFill>
         <p:spPr>
           <a:xfrm>
-            <a:off x="2953385" y="1188720"/>
-            <a:ext cx="5429250" cy="2066925"/>
+            <a:off x="7041515" y="778510"/>
+            <a:ext cx="4281805" cy="2233295"/>
           </a:xfrm>
           <a:prstGeom prst="rect">
             <a:avLst/>
@@ -8215,8 +8938,8 @@
         </p:nvSpPr>
         <p:spPr>
           <a:xfrm>
-            <a:off x="731520" y="457200"/>
-            <a:ext cx="4572000" cy="457200"/>
+            <a:off x="731520" y="324485"/>
+            <a:ext cx="2097405" cy="553085"/>
           </a:xfrm>
           <a:prstGeom prst="rect">
             <a:avLst/>
@@ -8238,8 +8961,16 @@
               </a:defRPr>
             </a:pPr>
             <a:r>
+              <a:rPr>
+                <a:latin typeface="方正北魏楷书简体" panose="03000509000000000000" charset="-122"/>
+                <a:ea typeface="方正北魏楷书简体" panose="03000509000000000000" charset="-122"/>
+              </a:rPr>
               <a:t>我们的工作</a:t>
             </a:r>
+            <a:endParaRPr>
+              <a:latin typeface="方正北魏楷书简体" panose="03000509000000000000" charset="-122"/>
+              <a:ea typeface="方正北魏楷书简体" panose="03000509000000000000" charset="-122"/>
+            </a:endParaRPr>
           </a:p>
         </p:txBody>
       </p:sp>
@@ -8283,6 +9014,10 @@
           <a:lstStyle/>
           <a:p>
             <a:pPr algn="ctr"/>
+            <a:endParaRPr>
+              <a:latin typeface="方正北魏楷书简体" panose="03000509000000000000" charset="-122"/>
+              <a:ea typeface="方正北魏楷书简体" panose="03000509000000000000" charset="-122"/>
+            </a:endParaRPr>
           </a:p>
         </p:txBody>
       </p:sp>
@@ -8298,8 +9033,8 @@
         </p:nvSpPr>
         <p:spPr>
           <a:xfrm>
-            <a:off x="731520" y="1645920"/>
-            <a:ext cx="3200400" cy="2286000"/>
+            <a:off x="572135" y="1645920"/>
+            <a:ext cx="3533775" cy="3935730"/>
           </a:xfrm>
           <a:prstGeom prst="roundRect">
             <a:avLst/>
@@ -8332,6 +9067,10 @@
           <a:lstStyle/>
           <a:p>
             <a:pPr algn="ctr"/>
+            <a:endParaRPr>
+              <a:latin typeface="方正北魏楷书简体" panose="03000509000000000000" charset="-122"/>
+              <a:ea typeface="方正北魏楷书简体" panose="03000509000000000000" charset="-122"/>
+            </a:endParaRPr>
           </a:p>
         </p:txBody>
       </p:sp>
@@ -8347,8 +9086,8 @@
         </p:nvSpPr>
         <p:spPr>
           <a:xfrm>
-            <a:off x="1853565" y="1772920"/>
-            <a:ext cx="956310" cy="260350"/>
+            <a:off x="1537335" y="2101215"/>
+            <a:ext cx="1588770" cy="398780"/>
           </a:xfrm>
           <a:prstGeom prst="rect">
             <a:avLst/>
@@ -8370,8 +9109,30 @@
               </a:defRPr>
             </a:pPr>
             <a:r>
+              <a:rPr sz="2000">
+                <a:solidFill>
+                  <a:schemeClr val="tx1">
+                    <a:lumMod val="85000"/>
+                    <a:lumOff val="15000"/>
+                  </a:schemeClr>
+                </a:solidFill>
+                <a:latin typeface="方正北魏楷书简体" panose="03000509000000000000" charset="-122"/>
+                <a:ea typeface="方正北魏楷书简体" panose="03000509000000000000" charset="-122"/>
+                <a:cs typeface="方正北魏楷书简体" panose="03000509000000000000" charset="-122"/>
+              </a:rPr>
               <a:t>阶段一: 复现</a:t>
             </a:r>
+            <a:endParaRPr sz="2000">
+              <a:solidFill>
+                <a:schemeClr val="tx1">
+                  <a:lumMod val="85000"/>
+                  <a:lumOff val="15000"/>
+                </a:schemeClr>
+              </a:solidFill>
+              <a:latin typeface="方正北魏楷书简体" panose="03000509000000000000" charset="-122"/>
+              <a:ea typeface="方正北魏楷书简体" panose="03000509000000000000" charset="-122"/>
+              <a:cs typeface="方正北魏楷书简体" panose="03000509000000000000" charset="-122"/>
+            </a:endParaRPr>
           </a:p>
         </p:txBody>
       </p:sp>
@@ -8387,8 +9148,8 @@
         </p:nvSpPr>
         <p:spPr>
           <a:xfrm>
-            <a:off x="909320" y="2052320"/>
-            <a:ext cx="2844800" cy="457200"/>
+            <a:off x="1167130" y="2771775"/>
+            <a:ext cx="2329180" cy="491490"/>
           </a:xfrm>
           <a:prstGeom prst="rect">
             <a:avLst/>
@@ -8410,8 +9171,30 @@
               </a:defRPr>
             </a:pPr>
             <a:r>
+              <a:rPr>
+                <a:solidFill>
+                  <a:schemeClr val="accent2">
+                    <a:lumMod val="40000"/>
+                    <a:lumOff val="60000"/>
+                  </a:schemeClr>
+                </a:solidFill>
+                <a:latin typeface="方正北魏楷书简体" panose="03000509000000000000" charset="-122"/>
+                <a:ea typeface="方正北魏楷书简体" panose="03000509000000000000" charset="-122"/>
+                <a:cs typeface="方正北魏楷书简体" panose="03000509000000000000" charset="-122"/>
+              </a:rPr>
               <a:t>3数据集x2模式</a:t>
             </a:r>
+            <a:endParaRPr>
+              <a:solidFill>
+                <a:schemeClr val="accent2">
+                  <a:lumMod val="40000"/>
+                  <a:lumOff val="60000"/>
+                </a:schemeClr>
+              </a:solidFill>
+              <a:latin typeface="方正北魏楷书简体" panose="03000509000000000000" charset="-122"/>
+              <a:ea typeface="方正北魏楷书简体" panose="03000509000000000000" charset="-122"/>
+              <a:cs typeface="方正北魏楷书简体" panose="03000509000000000000" charset="-122"/>
+            </a:endParaRPr>
           </a:p>
         </p:txBody>
       </p:sp>
@@ -8427,8 +9210,8 @@
         </p:nvSpPr>
         <p:spPr>
           <a:xfrm>
-            <a:off x="909320" y="3677920"/>
-            <a:ext cx="2844800" cy="203200"/>
+            <a:off x="1334135" y="4355465"/>
+            <a:ext cx="1995170" cy="306705"/>
           </a:xfrm>
           <a:prstGeom prst="rect">
             <a:avLst/>
@@ -8450,8 +9233,18 @@
               </a:defRPr>
             </a:pPr>
             <a:r>
+              <a:rPr sz="1400">
+                <a:latin typeface="方正北魏楷书简体" panose="03000509000000000000" charset="-122"/>
+                <a:ea typeface="方正北魏楷书简体" panose="03000509000000000000" charset="-122"/>
+                <a:cs typeface="方正北魏楷书简体" panose="03000509000000000000" charset="-122"/>
+              </a:rPr>
               <a:t>STRIP/NC/FP防御验证</a:t>
             </a:r>
+            <a:endParaRPr sz="1400">
+              <a:latin typeface="方正北魏楷书简体" panose="03000509000000000000" charset="-122"/>
+              <a:ea typeface="方正北魏楷书简体" panose="03000509000000000000" charset="-122"/>
+              <a:cs typeface="方正北魏楷书简体" panose="03000509000000000000" charset="-122"/>
+            </a:endParaRPr>
           </a:p>
         </p:txBody>
       </p:sp>
@@ -8467,8 +9260,8 @@
         </p:nvSpPr>
         <p:spPr>
           <a:xfrm>
-            <a:off x="914400" y="2834640"/>
-            <a:ext cx="2834640" cy="731520"/>
+            <a:off x="1003618" y="3512185"/>
+            <a:ext cx="2656205" cy="645160"/>
           </a:xfrm>
           <a:prstGeom prst="rect">
             <a:avLst/>
@@ -8490,12 +9283,33 @@
               </a:defRPr>
             </a:pPr>
             <a:r>
+              <a:rPr sz="1800">
+                <a:latin typeface="方正北魏楷书简体" panose="03000509000000000000" charset="-122"/>
+                <a:ea typeface="方正北魏楷书简体" panose="03000509000000000000" charset="-122"/>
+                <a:cs typeface="方正北魏楷书简体" panose="03000509000000000000" charset="-122"/>
+              </a:rPr>
               <a:t>主实验复现, 确认WaNet</a:t>
             </a:r>
-            <a:br/>
-            <a:r>
+            <a:br>
+              <a:rPr sz="1800">
+                <a:latin typeface="方正北魏楷书简体" panose="03000509000000000000" charset="-122"/>
+                <a:ea typeface="方正北魏楷书简体" panose="03000509000000000000" charset="-122"/>
+                <a:cs typeface="方正北魏楷书简体" panose="03000509000000000000" charset="-122"/>
+              </a:rPr>
+            </a:br>
+            <a:r>
+              <a:rPr sz="1800">
+                <a:latin typeface="方正北魏楷书简体" panose="03000509000000000000" charset="-122"/>
+                <a:ea typeface="方正北魏楷书简体" panose="03000509000000000000" charset="-122"/>
+                <a:cs typeface="方正北魏楷书简体" panose="03000509000000000000" charset="-122"/>
+              </a:rPr>
               <a:t>确实绕过所有现有防御</a:t>
             </a:r>
+            <a:endParaRPr sz="1800">
+              <a:latin typeface="方正北魏楷书简体" panose="03000509000000000000" charset="-122"/>
+              <a:ea typeface="方正北魏楷书简体" panose="03000509000000000000" charset="-122"/>
+              <a:cs typeface="方正北魏楷书简体" panose="03000509000000000000" charset="-122"/>
+            </a:endParaRPr>
           </a:p>
         </p:txBody>
       </p:sp>
@@ -8511,8 +9325,8 @@
         </p:nvSpPr>
         <p:spPr>
           <a:xfrm>
-            <a:off x="4480560" y="1645920"/>
-            <a:ext cx="3200400" cy="2286000"/>
+            <a:off x="4318635" y="1645920"/>
+            <a:ext cx="3535680" cy="3943350"/>
           </a:xfrm>
           <a:prstGeom prst="roundRect">
             <a:avLst/>
@@ -8545,6 +9359,10 @@
           <a:lstStyle/>
           <a:p>
             <a:pPr algn="ctr"/>
+            <a:endParaRPr>
+              <a:latin typeface="方正北魏楷书简体" panose="03000509000000000000" charset="-122"/>
+              <a:ea typeface="方正北魏楷书简体" panose="03000509000000000000" charset="-122"/>
+            </a:endParaRPr>
           </a:p>
         </p:txBody>
       </p:sp>
@@ -8560,8 +9378,8 @@
         </p:nvSpPr>
         <p:spPr>
           <a:xfrm>
-            <a:off x="5602605" y="1772920"/>
-            <a:ext cx="956310" cy="260350"/>
+            <a:off x="5286375" y="2101215"/>
+            <a:ext cx="1588770" cy="398780"/>
           </a:xfrm>
           <a:prstGeom prst="rect">
             <a:avLst/>
@@ -8583,8 +9401,30 @@
               </a:defRPr>
             </a:pPr>
             <a:r>
+              <a:rPr sz="2000">
+                <a:solidFill>
+                  <a:schemeClr val="tx1">
+                    <a:lumMod val="85000"/>
+                    <a:lumOff val="15000"/>
+                  </a:schemeClr>
+                </a:solidFill>
+                <a:latin typeface="方正北魏楷书简体" panose="03000509000000000000" charset="-122"/>
+                <a:ea typeface="方正北魏楷书简体" panose="03000509000000000000" charset="-122"/>
+                <a:cs typeface="方正北魏楷书简体" panose="03000509000000000000" charset="-122"/>
+              </a:rPr>
               <a:t>阶段二: 消融</a:t>
             </a:r>
+            <a:endParaRPr sz="2000">
+              <a:solidFill>
+                <a:schemeClr val="tx1">
+                  <a:lumMod val="85000"/>
+                  <a:lumOff val="15000"/>
+                </a:schemeClr>
+              </a:solidFill>
+              <a:latin typeface="方正北魏楷书简体" panose="03000509000000000000" charset="-122"/>
+              <a:ea typeface="方正北魏楷书简体" panose="03000509000000000000" charset="-122"/>
+              <a:cs typeface="方正北魏楷书简体" panose="03000509000000000000" charset="-122"/>
+            </a:endParaRPr>
           </a:p>
         </p:txBody>
       </p:sp>
@@ -8600,7 +9440,7 @@
         </p:nvSpPr>
         <p:spPr>
           <a:xfrm>
-            <a:off x="4658360" y="2052320"/>
+            <a:off x="4658360" y="2771775"/>
             <a:ext cx="2844800" cy="457200"/>
           </a:xfrm>
           <a:prstGeom prst="rect">
@@ -8623,8 +9463,18 @@
               </a:defRPr>
             </a:pPr>
             <a:r>
+              <a:rPr>
+                <a:latin typeface="方正北魏楷书简体" panose="03000509000000000000" charset="-122"/>
+                <a:ea typeface="方正北魏楷书简体" panose="03000509000000000000" charset="-122"/>
+                <a:cs typeface="方正北魏楷书简体" panose="03000509000000000000" charset="-122"/>
+              </a:rPr>
               <a:t>Noise/s/k参数扫描</a:t>
             </a:r>
+            <a:endParaRPr>
+              <a:latin typeface="方正北魏楷书简体" panose="03000509000000000000" charset="-122"/>
+              <a:ea typeface="方正北魏楷书简体" panose="03000509000000000000" charset="-122"/>
+              <a:cs typeface="方正北魏楷书简体" panose="03000509000000000000" charset="-122"/>
+            </a:endParaRPr>
           </a:p>
         </p:txBody>
       </p:sp>
@@ -8640,8 +9490,8 @@
         </p:nvSpPr>
         <p:spPr>
           <a:xfrm>
-            <a:off x="4658360" y="3677920"/>
-            <a:ext cx="2844800" cy="203200"/>
+            <a:off x="5100320" y="4355465"/>
+            <a:ext cx="1960880" cy="306705"/>
           </a:xfrm>
           <a:prstGeom prst="rect">
             <a:avLst/>
@@ -8663,8 +9513,16 @@
               </a:defRPr>
             </a:pPr>
             <a:r>
+              <a:rPr sz="1400">
+                <a:latin typeface="方正北魏楷书简体" panose="03000509000000000000" charset="-122"/>
+                <a:ea typeface="方正北魏楷书简体" panose="03000509000000000000" charset="-122"/>
+              </a:rPr>
               <a:t>发现参数高度敏感规律</a:t>
             </a:r>
+            <a:endParaRPr sz="1400">
+              <a:latin typeface="方正北魏楷书简体" panose="03000509000000000000" charset="-122"/>
+              <a:ea typeface="方正北魏楷书简体" panose="03000509000000000000" charset="-122"/>
+            </a:endParaRPr>
           </a:p>
         </p:txBody>
       </p:sp>
@@ -8680,8 +9538,8 @@
         </p:nvSpPr>
         <p:spPr>
           <a:xfrm>
-            <a:off x="4663440" y="2834640"/>
-            <a:ext cx="2834640" cy="731520"/>
+            <a:off x="4561523" y="3512185"/>
+            <a:ext cx="3038475" cy="645160"/>
           </a:xfrm>
           <a:prstGeom prst="rect">
             <a:avLst/>
@@ -8703,12 +9561,33 @@
               </a:defRPr>
             </a:pPr>
             <a:r>
+              <a:rPr sz="1800">
+                <a:latin typeface="方正北魏楷书简体" panose="03000509000000000000" charset="-122"/>
+                <a:ea typeface="方正北魏楷书简体" panose="03000509000000000000" charset="-122"/>
+                <a:cs typeface="方正北魏楷书简体" panose="03000509000000000000" charset="-122"/>
+              </a:rPr>
               <a:t>深入拆解warping机制</a:t>
             </a:r>
-            <a:br/>
-            <a:r>
+            <a:br>
+              <a:rPr sz="1800">
+                <a:latin typeface="方正北魏楷书简体" panose="03000509000000000000" charset="-122"/>
+                <a:ea typeface="方正北魏楷书简体" panose="03000509000000000000" charset="-122"/>
+                <a:cs typeface="方正北魏楷书简体" panose="03000509000000000000" charset="-122"/>
+              </a:rPr>
+            </a:br>
+            <a:r>
+              <a:rPr sz="1800">
+                <a:latin typeface="方正北魏楷书简体" panose="03000509000000000000" charset="-122"/>
+                <a:ea typeface="方正北魏楷书简体" panose="03000509000000000000" charset="-122"/>
+                <a:cs typeface="方正北魏楷书简体" panose="03000509000000000000" charset="-122"/>
+              </a:rPr>
               <a:t>s&lt;0.5或k&lt;4时攻击大幅下降</a:t>
             </a:r>
+            <a:endParaRPr sz="1800">
+              <a:latin typeface="方正北魏楷书简体" panose="03000509000000000000" charset="-122"/>
+              <a:ea typeface="方正北魏楷书简体" panose="03000509000000000000" charset="-122"/>
+              <a:cs typeface="方正北魏楷书简体" panose="03000509000000000000" charset="-122"/>
+            </a:endParaRPr>
           </a:p>
         </p:txBody>
       </p:sp>
@@ -8724,8 +9603,8 @@
         </p:nvSpPr>
         <p:spPr>
           <a:xfrm>
-            <a:off x="8229600" y="1645920"/>
-            <a:ext cx="3200400" cy="2286000"/>
+            <a:off x="8067040" y="1645920"/>
+            <a:ext cx="3456940" cy="3943350"/>
           </a:xfrm>
           <a:prstGeom prst="roundRect">
             <a:avLst/>
@@ -8758,6 +9637,10 @@
           <a:lstStyle/>
           <a:p>
             <a:pPr algn="ctr"/>
+            <a:endParaRPr>
+              <a:latin typeface="方正北魏楷书简体" panose="03000509000000000000" charset="-122"/>
+              <a:ea typeface="方正北魏楷书简体" panose="03000509000000000000" charset="-122"/>
+            </a:endParaRPr>
           </a:p>
         </p:txBody>
       </p:sp>
@@ -8773,8 +9656,8 @@
         </p:nvSpPr>
         <p:spPr>
           <a:xfrm>
-            <a:off x="9351645" y="1772920"/>
-            <a:ext cx="956310" cy="260350"/>
+            <a:off x="9035415" y="2101215"/>
+            <a:ext cx="1588770" cy="398780"/>
           </a:xfrm>
           <a:prstGeom prst="rect">
             <a:avLst/>
@@ -8796,8 +9679,44 @@
               </a:defRPr>
             </a:pPr>
             <a:r>
-              <a:t>阶段三: 创新</a:t>
-            </a:r>
+              <a:rPr sz="2000">
+                <a:solidFill>
+                  <a:schemeClr val="tx1">
+                    <a:lumMod val="85000"/>
+                    <a:lumOff val="15000"/>
+                  </a:schemeClr>
+                </a:solidFill>
+                <a:latin typeface="方正北魏楷书简体" panose="03000509000000000000" charset="-122"/>
+                <a:ea typeface="方正北魏楷书简体" panose="03000509000000000000" charset="-122"/>
+                <a:cs typeface="方正北魏楷书简体" panose="03000509000000000000" charset="-122"/>
+              </a:rPr>
+              <a:t>阶段三: </a:t>
+            </a:r>
+            <a:r>
+              <a:rPr lang="zh-CN" sz="2000">
+                <a:solidFill>
+                  <a:schemeClr val="tx1">
+                    <a:lumMod val="85000"/>
+                    <a:lumOff val="15000"/>
+                  </a:schemeClr>
+                </a:solidFill>
+                <a:latin typeface="方正北魏楷书简体" panose="03000509000000000000" charset="-122"/>
+                <a:ea typeface="方正北魏楷书简体" panose="03000509000000000000" charset="-122"/>
+                <a:cs typeface="方正北魏楷书简体" panose="03000509000000000000" charset="-122"/>
+              </a:rPr>
+              <a:t>扩展</a:t>
+            </a:r>
+            <a:endParaRPr lang="zh-CN" sz="2000">
+              <a:solidFill>
+                <a:schemeClr val="tx1">
+                  <a:lumMod val="85000"/>
+                  <a:lumOff val="15000"/>
+                </a:schemeClr>
+              </a:solidFill>
+              <a:latin typeface="方正北魏楷书简体" panose="03000509000000000000" charset="-122"/>
+              <a:ea typeface="方正北魏楷书简体" panose="03000509000000000000" charset="-122"/>
+              <a:cs typeface="方正北魏楷书简体" panose="03000509000000000000" charset="-122"/>
+            </a:endParaRPr>
           </a:p>
         </p:txBody>
       </p:sp>
@@ -8813,7 +9732,7 @@
         </p:nvSpPr>
         <p:spPr>
           <a:xfrm>
-            <a:off x="8407400" y="2052320"/>
+            <a:off x="8407400" y="2771775"/>
             <a:ext cx="2844800" cy="457200"/>
           </a:xfrm>
           <a:prstGeom prst="rect">
@@ -8836,8 +9755,16 @@
               </a:defRPr>
             </a:pPr>
             <a:r>
+              <a:rPr>
+                <a:latin typeface="方正北魏楷书简体" panose="03000509000000000000" charset="-122"/>
+                <a:ea typeface="方正北魏楷书简体" panose="03000509000000000000" charset="-122"/>
+              </a:rPr>
               <a:t>频域检测器</a:t>
             </a:r>
+            <a:endParaRPr>
+              <a:latin typeface="方正北魏楷书简体" panose="03000509000000000000" charset="-122"/>
+              <a:ea typeface="方正北魏楷书简体" panose="03000509000000000000" charset="-122"/>
+            </a:endParaRPr>
           </a:p>
         </p:txBody>
       </p:sp>
@@ -8853,8 +9780,8 @@
         </p:nvSpPr>
         <p:spPr>
           <a:xfrm>
-            <a:off x="8407400" y="3677920"/>
-            <a:ext cx="2844800" cy="203200"/>
+            <a:off x="8709978" y="4355465"/>
+            <a:ext cx="2239645" cy="306705"/>
           </a:xfrm>
           <a:prstGeom prst="rect">
             <a:avLst/>
@@ -8876,8 +9803,16 @@
               </a:defRPr>
             </a:pPr>
             <a:r>
+              <a:rPr sz="1400">
+                <a:latin typeface="方正北魏楷书简体" panose="03000509000000000000" charset="-122"/>
+                <a:ea typeface="方正北魏楷书简体" panose="03000509000000000000" charset="-122"/>
+              </a:rPr>
               <a:t>AUC 0.735 vs STRIP 0.50</a:t>
             </a:r>
+            <a:endParaRPr sz="1400">
+              <a:latin typeface="方正北魏楷书简体" panose="03000509000000000000" charset="-122"/>
+              <a:ea typeface="方正北魏楷书简体" panose="03000509000000000000" charset="-122"/>
+            </a:endParaRPr>
           </a:p>
         </p:txBody>
       </p:sp>
@@ -8893,8 +9828,8 @@
         </p:nvSpPr>
         <p:spPr>
           <a:xfrm>
-            <a:off x="8412480" y="2834640"/>
-            <a:ext cx="2834640" cy="731520"/>
+            <a:off x="8344218" y="3512185"/>
+            <a:ext cx="2971165" cy="645160"/>
           </a:xfrm>
           <a:prstGeom prst="rect">
             <a:avLst/>
@@ -8916,12 +9851,33 @@
               </a:defRPr>
             </a:pPr>
             <a:r>
+              <a:rPr sz="1800">
+                <a:latin typeface="方正北魏楷书简体" panose="03000509000000000000" charset="-122"/>
+                <a:ea typeface="方正北魏楷书简体" panose="03000509000000000000" charset="-122"/>
+                <a:cs typeface="方正北魏楷书简体" panose="03000509000000000000" charset="-122"/>
+              </a:rPr>
               <a:t>Warping=插值-&gt;频域留痕</a:t>
             </a:r>
-            <a:br/>
-            <a:r>
-              <a:t>首次从图像信号检测warping后门</a:t>
-            </a:r>
+            <a:br>
+              <a:rPr sz="1800">
+                <a:latin typeface="方正北魏楷书简体" panose="03000509000000000000" charset="-122"/>
+                <a:ea typeface="方正北魏楷书简体" panose="03000509000000000000" charset="-122"/>
+                <a:cs typeface="方正北魏楷书简体" panose="03000509000000000000" charset="-122"/>
+              </a:rPr>
+            </a:br>
+            <a:r>
+              <a:rPr sz="1800">
+                <a:latin typeface="方正北魏楷书简体" panose="03000509000000000000" charset="-122"/>
+                <a:ea typeface="方正北魏楷书简体" panose="03000509000000000000" charset="-122"/>
+                <a:cs typeface="方正北魏楷书简体" panose="03000509000000000000" charset="-122"/>
+              </a:rPr>
+              <a:t>从图像信号检测warping后门</a:t>
+            </a:r>
+            <a:endParaRPr sz="1800">
+              <a:latin typeface="方正北魏楷书简体" panose="03000509000000000000" charset="-122"/>
+              <a:ea typeface="方正北魏楷书简体" panose="03000509000000000000" charset="-122"/>
+              <a:cs typeface="方正北魏楷书简体" panose="03000509000000000000" charset="-122"/>
+            </a:endParaRPr>
           </a:p>
         </p:txBody>
       </p:sp>
@@ -8933,8 +9889,8 @@
         </p:nvSpPr>
         <p:spPr>
           <a:xfrm>
-            <a:off x="731520" y="5029200"/>
-            <a:ext cx="10698480" cy="548640"/>
+            <a:off x="3232785" y="6049010"/>
+            <a:ext cx="5695950" cy="337185"/>
           </a:xfrm>
           <a:prstGeom prst="rect">
             <a:avLst/>
@@ -8956,8 +9912,18 @@
               </a:defRPr>
             </a:pPr>
             <a:r>
-              <a:t>核心贡献: 现有防御看模型行为-&gt;检测不到; 我们看图像信号-&gt;能检测到</a:t>
-            </a:r>
+              <a:rPr>
+                <a:latin typeface="方正北魏楷书简体" panose="03000509000000000000" charset="-122"/>
+                <a:ea typeface="方正北魏楷书简体" panose="03000509000000000000" charset="-122"/>
+                <a:cs typeface="方正北魏楷书简体" panose="03000509000000000000" charset="-122"/>
+              </a:rPr>
+              <a:t>现有防御看模型行为-&gt;检测不到; 我们看图像信号-&gt;能检测到</a:t>
+            </a:r>
+            <a:endParaRPr>
+              <a:latin typeface="方正北魏楷书简体" panose="03000509000000000000" charset="-122"/>
+              <a:ea typeface="方正北魏楷书简体" panose="03000509000000000000" charset="-122"/>
+              <a:cs typeface="方正北魏楷书简体" panose="03000509000000000000" charset="-122"/>
+            </a:endParaRPr>
           </a:p>
         </p:txBody>
       </p:sp>
@@ -8995,8 +9961,8 @@
         </p:nvSpPr>
         <p:spPr>
           <a:xfrm>
-            <a:off x="731520" y="457200"/>
-            <a:ext cx="6400800" cy="457200"/>
+            <a:off x="731520" y="359410"/>
+            <a:ext cx="5005070" cy="553085"/>
           </a:xfrm>
           <a:prstGeom prst="rect">
             <a:avLst/>
@@ -9018,8 +9984,18 @@
               </a:defRPr>
             </a:pPr>
             <a:r>
+              <a:rPr>
+                <a:latin typeface="方正北魏楷书简体" panose="03000509000000000000" charset="-122"/>
+                <a:ea typeface="方正北魏楷书简体" panose="03000509000000000000" charset="-122"/>
+                <a:cs typeface="方正北魏楷书简体" panose="03000509000000000000" charset="-122"/>
+              </a:rPr>
               <a:t>主实验复现结果 (CIFAR-10)</a:t>
             </a:r>
+            <a:endParaRPr>
+              <a:latin typeface="方正北魏楷书简体" panose="03000509000000000000" charset="-122"/>
+              <a:ea typeface="方正北魏楷书简体" panose="03000509000000000000" charset="-122"/>
+              <a:cs typeface="方正北魏楷书简体" panose="03000509000000000000" charset="-122"/>
+            </a:endParaRPr>
           </a:p>
         </p:txBody>
       </p:sp>
@@ -9063,6 +10039,10 @@
           <a:lstStyle/>
           <a:p>
             <a:pPr algn="ctr"/>
+            <a:endParaRPr>
+              <a:latin typeface="方正北魏楷书简体" panose="03000509000000000000" charset="-122"/>
+              <a:ea typeface="方正北魏楷书简体" panose="03000509000000000000" charset="-122"/>
+            </a:endParaRPr>
           </a:p>
         </p:txBody>
       </p:sp>
@@ -9070,12 +10050,16 @@
         <p:nvSpPr>
           <p:cNvPr id="4" name="Rounded Rectangle 3"/>
           <p:cNvSpPr/>
-          <p:nvPr/>
-        </p:nvSpPr>
-        <p:spPr>
-          <a:xfrm>
-            <a:off x="731520" y="1645920"/>
-            <a:ext cx="2560320" cy="1280160"/>
+          <p:nvPr>
+            <p:custDataLst>
+              <p:tags r:id="rId1"/>
+            </p:custDataLst>
+          </p:nvPr>
+        </p:nvSpPr>
+        <p:spPr>
+          <a:xfrm>
+            <a:off x="1499870" y="1393190"/>
+            <a:ext cx="3500755" cy="1854200"/>
           </a:xfrm>
           <a:prstGeom prst="roundRect">
             <a:avLst/>
@@ -9108,6 +10092,10 @@
           <a:lstStyle/>
           <a:p>
             <a:pPr algn="ctr"/>
+            <a:endParaRPr>
+              <a:latin typeface="方正北魏楷书简体" panose="03000509000000000000" charset="-122"/>
+              <a:ea typeface="方正北魏楷书简体" panose="03000509000000000000" charset="-122"/>
+            </a:endParaRPr>
           </a:p>
         </p:txBody>
       </p:sp>
@@ -9115,12 +10103,16 @@
         <p:nvSpPr>
           <p:cNvPr id="5" name="TextBox 4"/>
           <p:cNvSpPr txBox="1"/>
-          <p:nvPr/>
-        </p:nvSpPr>
-        <p:spPr>
-          <a:xfrm>
-            <a:off x="909320" y="1772920"/>
-            <a:ext cx="2204720" cy="254000"/>
+          <p:nvPr>
+            <p:custDataLst>
+              <p:tags r:id="rId2"/>
+            </p:custDataLst>
+          </p:nvPr>
+        </p:nvSpPr>
+        <p:spPr>
+          <a:xfrm>
+            <a:off x="2284095" y="1734185"/>
+            <a:ext cx="1548130" cy="487680"/>
           </a:xfrm>
           <a:prstGeom prst="rect">
             <a:avLst/>
@@ -9129,7 +10121,7 @@
         </p:spPr>
         <p:txBody>
           <a:bodyPr wrap="none">
-            <a:spAutoFit/>
+            <a:noAutofit/>
           </a:bodyPr>
           <a:lstStyle/>
           <a:p>
@@ -9142,8 +10134,16 @@
               </a:defRPr>
             </a:pPr>
             <a:r>
+              <a:rPr sz="1800">
+                <a:latin typeface="方正北魏楷书简体" panose="03000509000000000000" charset="-122"/>
+                <a:ea typeface="方正北魏楷书简体" panose="03000509000000000000" charset="-122"/>
+              </a:rPr>
               <a:t>Clean Acc</a:t>
             </a:r>
+            <a:endParaRPr sz="1800">
+              <a:latin typeface="方正北魏楷书简体" panose="03000509000000000000" charset="-122"/>
+              <a:ea typeface="方正北魏楷书简体" panose="03000509000000000000" charset="-122"/>
+            </a:endParaRPr>
           </a:p>
         </p:txBody>
       </p:sp>
@@ -9151,12 +10151,16 @@
         <p:nvSpPr>
           <p:cNvPr id="6" name="TextBox 5"/>
           <p:cNvSpPr txBox="1"/>
-          <p:nvPr/>
-        </p:nvSpPr>
-        <p:spPr>
-          <a:xfrm>
-            <a:off x="909320" y="2052320"/>
-            <a:ext cx="2204720" cy="457200"/>
+          <p:nvPr>
+            <p:custDataLst>
+              <p:tags r:id="rId3"/>
+            </p:custDataLst>
+          </p:nvPr>
+        </p:nvSpPr>
+        <p:spPr>
+          <a:xfrm>
+            <a:off x="1537970" y="2169160"/>
+            <a:ext cx="3013710" cy="661670"/>
           </a:xfrm>
           <a:prstGeom prst="rect">
             <a:avLst/>
@@ -9165,7 +10169,7 @@
         </p:spPr>
         <p:txBody>
           <a:bodyPr wrap="none">
-            <a:spAutoFit/>
+            <a:noAutofit/>
           </a:bodyPr>
           <a:lstStyle/>
           <a:p>
@@ -9178,8 +10182,16 @@
               </a:defRPr>
             </a:pPr>
             <a:r>
+              <a:rPr>
+                <a:latin typeface="方正北魏楷书简体" panose="03000509000000000000" charset="-122"/>
+                <a:ea typeface="方正北魏楷书简体" panose="03000509000000000000" charset="-122"/>
+              </a:rPr>
               <a:t>92.84%</a:t>
             </a:r>
+            <a:endParaRPr>
+              <a:latin typeface="方正北魏楷书简体" panose="03000509000000000000" charset="-122"/>
+              <a:ea typeface="方正北魏楷书简体" panose="03000509000000000000" charset="-122"/>
+            </a:endParaRPr>
           </a:p>
         </p:txBody>
       </p:sp>
@@ -9187,12 +10199,16 @@
         <p:nvSpPr>
           <p:cNvPr id="7" name="TextBox 6"/>
           <p:cNvSpPr txBox="1"/>
-          <p:nvPr/>
-        </p:nvSpPr>
-        <p:spPr>
-          <a:xfrm>
-            <a:off x="909320" y="2672080"/>
-            <a:ext cx="2204720" cy="203200"/>
+          <p:nvPr>
+            <p:custDataLst>
+              <p:tags r:id="rId4"/>
+            </p:custDataLst>
+          </p:nvPr>
+        </p:nvSpPr>
+        <p:spPr>
+          <a:xfrm>
+            <a:off x="2294890" y="2724150"/>
+            <a:ext cx="1651000" cy="443230"/>
           </a:xfrm>
           <a:prstGeom prst="rect">
             <a:avLst/>
@@ -9201,7 +10217,7 @@
         </p:spPr>
         <p:txBody>
           <a:bodyPr wrap="none">
-            <a:spAutoFit/>
+            <a:noAutofit/>
           </a:bodyPr>
           <a:lstStyle/>
           <a:p>
@@ -9214,8 +10230,18 @@
               </a:defRPr>
             </a:pPr>
             <a:r>
+              <a:rPr sz="1600">
+                <a:latin typeface="方正北魏楷书简体" panose="03000509000000000000" charset="-122"/>
+                <a:ea typeface="方正北魏楷书简体" panose="03000509000000000000" charset="-122"/>
+                <a:cs typeface="方正北魏楷书简体" panose="03000509000000000000" charset="-122"/>
+              </a:rPr>
               <a:t>论文 94.15%</a:t>
             </a:r>
+            <a:endParaRPr sz="1600">
+              <a:latin typeface="方正北魏楷书简体" panose="03000509000000000000" charset="-122"/>
+              <a:ea typeface="方正北魏楷书简体" panose="03000509000000000000" charset="-122"/>
+              <a:cs typeface="方正北魏楷书简体" panose="03000509000000000000" charset="-122"/>
+            </a:endParaRPr>
           </a:p>
         </p:txBody>
       </p:sp>
@@ -9223,12 +10249,16 @@
         <p:nvSpPr>
           <p:cNvPr id="8" name="Rounded Rectangle 7"/>
           <p:cNvSpPr/>
-          <p:nvPr/>
-        </p:nvSpPr>
-        <p:spPr>
-          <a:xfrm>
-            <a:off x="3566160" y="1645920"/>
-            <a:ext cx="2560320" cy="1280160"/>
+          <p:nvPr>
+            <p:custDataLst>
+              <p:tags r:id="rId5"/>
+            </p:custDataLst>
+          </p:nvPr>
+        </p:nvSpPr>
+        <p:spPr>
+          <a:xfrm>
+            <a:off x="4334510" y="1393190"/>
+            <a:ext cx="3500755" cy="1854200"/>
           </a:xfrm>
           <a:prstGeom prst="roundRect">
             <a:avLst/>
@@ -9261,6 +10291,10 @@
           <a:lstStyle/>
           <a:p>
             <a:pPr algn="ctr"/>
+            <a:endParaRPr>
+              <a:latin typeface="方正北魏楷书简体" panose="03000509000000000000" charset="-122"/>
+              <a:ea typeface="方正北魏楷书简体" panose="03000509000000000000" charset="-122"/>
+            </a:endParaRPr>
           </a:p>
         </p:txBody>
       </p:sp>
@@ -9268,12 +10302,16 @@
         <p:nvSpPr>
           <p:cNvPr id="9" name="TextBox 8"/>
           <p:cNvSpPr txBox="1"/>
-          <p:nvPr/>
-        </p:nvSpPr>
-        <p:spPr>
-          <a:xfrm>
-            <a:off x="3743960" y="1772920"/>
-            <a:ext cx="2204720" cy="254000"/>
+          <p:nvPr>
+            <p:custDataLst>
+              <p:tags r:id="rId6"/>
+            </p:custDataLst>
+          </p:nvPr>
+        </p:nvSpPr>
+        <p:spPr>
+          <a:xfrm>
+            <a:off x="5306060" y="1734185"/>
+            <a:ext cx="786765" cy="487680"/>
           </a:xfrm>
           <a:prstGeom prst="rect">
             <a:avLst/>
@@ -9282,7 +10320,7 @@
         </p:spPr>
         <p:txBody>
           <a:bodyPr wrap="none">
-            <a:spAutoFit/>
+            <a:noAutofit/>
           </a:bodyPr>
           <a:lstStyle/>
           <a:p>
@@ -9295,8 +10333,16 @@
               </a:defRPr>
             </a:pPr>
             <a:r>
+              <a:rPr sz="1800">
+                <a:latin typeface="方正北魏楷书简体" panose="03000509000000000000" charset="-122"/>
+                <a:ea typeface="方正北魏楷书简体" panose="03000509000000000000" charset="-122"/>
+              </a:rPr>
               <a:t>ASR</a:t>
             </a:r>
+            <a:endParaRPr sz="1800">
+              <a:latin typeface="方正北魏楷书简体" panose="03000509000000000000" charset="-122"/>
+              <a:ea typeface="方正北魏楷书简体" panose="03000509000000000000" charset="-122"/>
+            </a:endParaRPr>
           </a:p>
         </p:txBody>
       </p:sp>
@@ -9304,12 +10350,16 @@
         <p:nvSpPr>
           <p:cNvPr id="10" name="TextBox 9"/>
           <p:cNvSpPr txBox="1"/>
-          <p:nvPr/>
-        </p:nvSpPr>
-        <p:spPr>
-          <a:xfrm>
-            <a:off x="3743960" y="2052320"/>
-            <a:ext cx="2204720" cy="457200"/>
+          <p:nvPr>
+            <p:custDataLst>
+              <p:tags r:id="rId7"/>
+            </p:custDataLst>
+          </p:nvPr>
+        </p:nvSpPr>
+        <p:spPr>
+          <a:xfrm>
+            <a:off x="4372610" y="2155190"/>
+            <a:ext cx="3013710" cy="661670"/>
           </a:xfrm>
           <a:prstGeom prst="rect">
             <a:avLst/>
@@ -9318,7 +10368,7 @@
         </p:spPr>
         <p:txBody>
           <a:bodyPr wrap="none">
-            <a:spAutoFit/>
+            <a:noAutofit/>
           </a:bodyPr>
           <a:lstStyle/>
           <a:p>
@@ -9331,8 +10381,16 @@
               </a:defRPr>
             </a:pPr>
             <a:r>
+              <a:rPr>
+                <a:latin typeface="方正北魏楷书简体" panose="03000509000000000000" charset="-122"/>
+                <a:ea typeface="方正北魏楷书简体" panose="03000509000000000000" charset="-122"/>
+              </a:rPr>
               <a:t>99.15%</a:t>
             </a:r>
+            <a:endParaRPr>
+              <a:latin typeface="方正北魏楷书简体" panose="03000509000000000000" charset="-122"/>
+              <a:ea typeface="方正北魏楷书简体" panose="03000509000000000000" charset="-122"/>
+            </a:endParaRPr>
           </a:p>
         </p:txBody>
       </p:sp>
@@ -9340,12 +10398,16 @@
         <p:nvSpPr>
           <p:cNvPr id="11" name="TextBox 10"/>
           <p:cNvSpPr txBox="1"/>
-          <p:nvPr/>
-        </p:nvSpPr>
-        <p:spPr>
-          <a:xfrm>
-            <a:off x="3743960" y="2672080"/>
-            <a:ext cx="2204720" cy="203200"/>
+          <p:nvPr>
+            <p:custDataLst>
+              <p:tags r:id="rId8"/>
+            </p:custDataLst>
+          </p:nvPr>
+        </p:nvSpPr>
+        <p:spPr>
+          <a:xfrm>
+            <a:off x="5129530" y="2724150"/>
+            <a:ext cx="1651000" cy="443230"/>
           </a:xfrm>
           <a:prstGeom prst="rect">
             <a:avLst/>
@@ -9354,7 +10416,7 @@
         </p:spPr>
         <p:txBody>
           <a:bodyPr wrap="none">
-            <a:spAutoFit/>
+            <a:noAutofit/>
           </a:bodyPr>
           <a:lstStyle/>
           <a:p>
@@ -9367,8 +10429,18 @@
               </a:defRPr>
             </a:pPr>
             <a:r>
+              <a:rPr sz="1600">
+                <a:latin typeface="方正北魏楷书简体" panose="03000509000000000000" charset="-122"/>
+                <a:ea typeface="方正北魏楷书简体" panose="03000509000000000000" charset="-122"/>
+                <a:cs typeface="方正北魏楷书简体" panose="03000509000000000000" charset="-122"/>
+              </a:rPr>
               <a:t>论文 99.55%</a:t>
             </a:r>
+            <a:endParaRPr sz="1600">
+              <a:latin typeface="方正北魏楷书简体" panose="03000509000000000000" charset="-122"/>
+              <a:ea typeface="方正北魏楷书简体" panose="03000509000000000000" charset="-122"/>
+              <a:cs typeface="方正北魏楷书简体" panose="03000509000000000000" charset="-122"/>
+            </a:endParaRPr>
           </a:p>
         </p:txBody>
       </p:sp>
@@ -9376,12 +10448,16 @@
         <p:nvSpPr>
           <p:cNvPr id="12" name="Rounded Rectangle 11"/>
           <p:cNvSpPr/>
-          <p:nvPr/>
-        </p:nvSpPr>
-        <p:spPr>
-          <a:xfrm>
-            <a:off x="6400800" y="1645920"/>
-            <a:ext cx="2560320" cy="1280160"/>
+          <p:nvPr>
+            <p:custDataLst>
+              <p:tags r:id="rId9"/>
+            </p:custDataLst>
+          </p:nvPr>
+        </p:nvSpPr>
+        <p:spPr>
+          <a:xfrm>
+            <a:off x="7169150" y="1393190"/>
+            <a:ext cx="3500755" cy="1854200"/>
           </a:xfrm>
           <a:prstGeom prst="roundRect">
             <a:avLst/>
@@ -9414,6 +10490,10 @@
           <a:lstStyle/>
           <a:p>
             <a:pPr algn="ctr"/>
+            <a:endParaRPr>
+              <a:latin typeface="方正北魏楷书简体" panose="03000509000000000000" charset="-122"/>
+              <a:ea typeface="方正北魏楷书简体" panose="03000509000000000000" charset="-122"/>
+            </a:endParaRPr>
           </a:p>
         </p:txBody>
       </p:sp>
@@ -9421,12 +10501,16 @@
         <p:nvSpPr>
           <p:cNvPr id="13" name="TextBox 12"/>
           <p:cNvSpPr txBox="1"/>
-          <p:nvPr/>
-        </p:nvSpPr>
-        <p:spPr>
-          <a:xfrm>
-            <a:off x="6578600" y="1772920"/>
-            <a:ext cx="2204720" cy="254000"/>
+          <p:nvPr>
+            <p:custDataLst>
+              <p:tags r:id="rId10"/>
+            </p:custDataLst>
+          </p:nvPr>
+        </p:nvSpPr>
+        <p:spPr>
+          <a:xfrm>
+            <a:off x="7947025" y="1734185"/>
+            <a:ext cx="1525905" cy="487680"/>
           </a:xfrm>
           <a:prstGeom prst="rect">
             <a:avLst/>
@@ -9435,7 +10519,7 @@
         </p:spPr>
         <p:txBody>
           <a:bodyPr wrap="none">
-            <a:spAutoFit/>
+            <a:noAutofit/>
           </a:bodyPr>
           <a:lstStyle/>
           <a:p>
@@ -9448,8 +10532,16 @@
               </a:defRPr>
             </a:pPr>
             <a:r>
+              <a:rPr sz="1800">
+                <a:latin typeface="方正北魏楷书简体" panose="03000509000000000000" charset="-122"/>
+                <a:ea typeface="方正北魏楷书简体" panose="03000509000000000000" charset="-122"/>
+              </a:rPr>
               <a:t>Cross Acc</a:t>
             </a:r>
+            <a:endParaRPr sz="1800">
+              <a:latin typeface="方正北魏楷书简体" panose="03000509000000000000" charset="-122"/>
+              <a:ea typeface="方正北魏楷书简体" panose="03000509000000000000" charset="-122"/>
+            </a:endParaRPr>
           </a:p>
         </p:txBody>
       </p:sp>
@@ -9457,12 +10549,16 @@
         <p:nvSpPr>
           <p:cNvPr id="14" name="TextBox 13"/>
           <p:cNvSpPr txBox="1"/>
-          <p:nvPr/>
-        </p:nvSpPr>
-        <p:spPr>
-          <a:xfrm>
-            <a:off x="6578600" y="2052320"/>
-            <a:ext cx="2204720" cy="457200"/>
+          <p:nvPr>
+            <p:custDataLst>
+              <p:tags r:id="rId11"/>
+            </p:custDataLst>
+          </p:nvPr>
+        </p:nvSpPr>
+        <p:spPr>
+          <a:xfrm>
+            <a:off x="7207250" y="2155190"/>
+            <a:ext cx="3013710" cy="661670"/>
           </a:xfrm>
           <a:prstGeom prst="rect">
             <a:avLst/>
@@ -9471,7 +10567,7 @@
         </p:spPr>
         <p:txBody>
           <a:bodyPr wrap="none">
-            <a:spAutoFit/>
+            <a:noAutofit/>
           </a:bodyPr>
           <a:lstStyle/>
           <a:p>
@@ -9484,8 +10580,16 @@
               </a:defRPr>
             </a:pPr>
             <a:r>
+              <a:rPr>
+                <a:latin typeface="方正北魏楷书简体" panose="03000509000000000000" charset="-122"/>
+                <a:ea typeface="方正北魏楷书简体" panose="03000509000000000000" charset="-122"/>
+              </a:rPr>
               <a:t>89.71%</a:t>
             </a:r>
+            <a:endParaRPr>
+              <a:latin typeface="方正北魏楷书简体" panose="03000509000000000000" charset="-122"/>
+              <a:ea typeface="方正北魏楷书简体" panose="03000509000000000000" charset="-122"/>
+            </a:endParaRPr>
           </a:p>
         </p:txBody>
       </p:sp>
@@ -9493,12 +10597,16 @@
         <p:nvSpPr>
           <p:cNvPr id="15" name="TextBox 14"/>
           <p:cNvSpPr txBox="1"/>
-          <p:nvPr/>
-        </p:nvSpPr>
-        <p:spPr>
-          <a:xfrm>
-            <a:off x="6578600" y="2672080"/>
-            <a:ext cx="2204720" cy="203200"/>
+          <p:nvPr>
+            <p:custDataLst>
+              <p:tags r:id="rId12"/>
+            </p:custDataLst>
+          </p:nvPr>
+        </p:nvSpPr>
+        <p:spPr>
+          <a:xfrm>
+            <a:off x="7964170" y="2724150"/>
+            <a:ext cx="1651000" cy="443230"/>
           </a:xfrm>
           <a:prstGeom prst="rect">
             <a:avLst/>
@@ -9507,7 +10615,7 @@
         </p:spPr>
         <p:txBody>
           <a:bodyPr wrap="none">
-            <a:spAutoFit/>
+            <a:noAutofit/>
           </a:bodyPr>
           <a:lstStyle/>
           <a:p>
@@ -9520,161 +10628,18 @@
               </a:defRPr>
             </a:pPr>
             <a:r>
+              <a:rPr sz="1600">
+                <a:latin typeface="方正北魏楷书简体" panose="03000509000000000000" charset="-122"/>
+                <a:ea typeface="方正北魏楷书简体" panose="03000509000000000000" charset="-122"/>
+                <a:cs typeface="方正北魏楷书简体" panose="03000509000000000000" charset="-122"/>
+              </a:rPr>
               <a:t>论文 93.55%</a:t>
             </a:r>
-          </a:p>
-        </p:txBody>
-      </p:sp>
-      <p:sp>
-        <p:nvSpPr>
-          <p:cNvPr id="16" name="Rounded Rectangle 15"/>
-          <p:cNvSpPr/>
-          <p:nvPr/>
-        </p:nvSpPr>
-        <p:spPr>
-          <a:xfrm>
-            <a:off x="9235440" y="1645920"/>
-            <a:ext cx="2560320" cy="1280160"/>
-          </a:xfrm>
-          <a:prstGeom prst="roundRect">
-            <a:avLst/>
-          </a:prstGeom>
-          <a:solidFill>
-            <a:srgbClr val="FFFFFF"/>
-          </a:solidFill>
-          <a:ln w="12700">
-            <a:solidFill>
-              <a:srgbClr val="E8E3DD"/>
-            </a:solidFill>
-          </a:ln>
-        </p:spPr>
-        <p:style>
-          <a:lnRef idx="1">
-            <a:schemeClr val="accent1"/>
-          </a:lnRef>
-          <a:fillRef idx="3">
-            <a:schemeClr val="accent1"/>
-          </a:fillRef>
-          <a:effectRef idx="2">
-            <a:schemeClr val="accent1"/>
-          </a:effectRef>
-          <a:fontRef idx="minor">
-            <a:schemeClr val="lt1"/>
-          </a:fontRef>
-        </p:style>
-        <p:txBody>
-          <a:bodyPr rtlCol="0" anchor="ctr"/>
-          <a:lstStyle/>
-          <a:p>
-            <a:pPr algn="ctr"/>
-          </a:p>
-        </p:txBody>
-      </p:sp>
-      <p:sp>
-        <p:nvSpPr>
-          <p:cNvPr id="17" name="TextBox 16"/>
-          <p:cNvSpPr txBox="1"/>
-          <p:nvPr/>
-        </p:nvSpPr>
-        <p:spPr>
-          <a:xfrm>
-            <a:off x="9413240" y="1772920"/>
-            <a:ext cx="2204720" cy="254000"/>
-          </a:xfrm>
-          <a:prstGeom prst="rect">
-            <a:avLst/>
-          </a:prstGeom>
-          <a:noFill/>
-        </p:spPr>
-        <p:txBody>
-          <a:bodyPr wrap="none">
-            <a:spAutoFit/>
-          </a:bodyPr>
-          <a:lstStyle/>
-          <a:p>
-            <a:pPr algn="ctr">
-              <a:defRPr sz="1100" b="0">
-                <a:solidFill>
-                  <a:srgbClr val="8C8C8C"/>
-                </a:solidFill>
-                <a:latin typeface="微软雅黑" panose="020B0503020204020204" charset="-122"/>
-              </a:defRPr>
-            </a:pPr>
-            <a:r>
-              <a:t>Cross(无Noise)</a:t>
-            </a:r>
-          </a:p>
-        </p:txBody>
-      </p:sp>
-      <p:sp>
-        <p:nvSpPr>
-          <p:cNvPr id="18" name="TextBox 17"/>
-          <p:cNvSpPr txBox="1"/>
-          <p:nvPr/>
-        </p:nvSpPr>
-        <p:spPr>
-          <a:xfrm>
-            <a:off x="9413240" y="2052320"/>
-            <a:ext cx="2204720" cy="457200"/>
-          </a:xfrm>
-          <a:prstGeom prst="rect">
-            <a:avLst/>
-          </a:prstGeom>
-          <a:noFill/>
-        </p:spPr>
-        <p:txBody>
-          <a:bodyPr wrap="none">
-            <a:spAutoFit/>
-          </a:bodyPr>
-          <a:lstStyle/>
-          <a:p>
-            <a:pPr algn="ctr">
-              <a:defRPr sz="2600" b="1">
-                <a:solidFill>
-                  <a:srgbClr val="D4847A"/>
-                </a:solidFill>
-                <a:latin typeface="微软雅黑" panose="020B0503020204020204" charset="-122"/>
-              </a:defRPr>
-            </a:pPr>
-            <a:r>
-              <a:t>0.00%</a:t>
-            </a:r>
-          </a:p>
-        </p:txBody>
-      </p:sp>
-      <p:sp>
-        <p:nvSpPr>
-          <p:cNvPr id="19" name="TextBox 18"/>
-          <p:cNvSpPr txBox="1"/>
-          <p:nvPr/>
-        </p:nvSpPr>
-        <p:spPr>
-          <a:xfrm>
-            <a:off x="9413240" y="2672080"/>
-            <a:ext cx="2204720" cy="203200"/>
-          </a:xfrm>
-          <a:prstGeom prst="rect">
-            <a:avLst/>
-          </a:prstGeom>
-          <a:noFill/>
-        </p:spPr>
-        <p:txBody>
-          <a:bodyPr wrap="none">
-            <a:spAutoFit/>
-          </a:bodyPr>
-          <a:lstStyle/>
-          <a:p>
-            <a:pPr algn="ctr">
-              <a:defRPr sz="900" b="0">
-                <a:solidFill>
-                  <a:srgbClr val="8C8C8C"/>
-                </a:solidFill>
-                <a:latin typeface="微软雅黑" panose="020B0503020204020204" charset="-122"/>
-              </a:defRPr>
-            </a:pPr>
-            <a:r>
-              <a:t>关键发现</a:t>
-            </a:r>
+            <a:endParaRPr sz="1600">
+              <a:latin typeface="方正北魏楷书简体" panose="03000509000000000000" charset="-122"/>
+              <a:ea typeface="方正北魏楷书简体" panose="03000509000000000000" charset="-122"/>
+              <a:cs typeface="方正北魏楷书简体" panose="03000509000000000000" charset="-122"/>
+            </a:endParaRPr>
           </a:p>
         </p:txBody>
       </p:sp>
@@ -9686,8 +10651,8 @@
         </p:nvSpPr>
         <p:spPr>
           <a:xfrm>
-            <a:off x="731520" y="3474720"/>
-            <a:ext cx="5029200" cy="2286000"/>
+            <a:off x="1541780" y="3740150"/>
+            <a:ext cx="9627870" cy="1899285"/>
           </a:xfrm>
           <a:prstGeom prst="rect">
             <a:avLst/>
@@ -9712,8 +10677,18 @@
               </a:defRPr>
             </a:pPr>
             <a:r>
+              <a:rPr sz="2000">
+                <a:latin typeface="方正北魏楷书简体" panose="03000509000000000000" charset="-122"/>
+                <a:ea typeface="方正北魏楷书简体" panose="03000509000000000000" charset="-122"/>
+                <a:cs typeface="方正北魏楷书简体" panose="03000509000000000000" charset="-122"/>
+              </a:rPr>
               <a:t>防御验证:</a:t>
             </a:r>
+            <a:endParaRPr sz="2000">
+              <a:latin typeface="方正北魏楷书简体" panose="03000509000000000000" charset="-122"/>
+              <a:ea typeface="方正北魏楷书简体" panose="03000509000000000000" charset="-122"/>
+              <a:cs typeface="方正北魏楷书简体" panose="03000509000000000000" charset="-122"/>
+            </a:endParaRPr>
           </a:p>
           <a:p>
             <a:pPr>
@@ -9728,8 +10703,18 @@
               </a:defRPr>
             </a:pPr>
             <a:r>
+              <a:rPr sz="2000">
+                <a:latin typeface="方正北魏楷书简体" panose="03000509000000000000" charset="-122"/>
+                <a:ea typeface="方正北魏楷书简体" panose="03000509000000000000" charset="-122"/>
+                <a:cs typeface="方正北魏楷书简体" panose="03000509000000000000" charset="-122"/>
+              </a:rPr>
               <a:t>STRIP: Entropy分布无法区分 -&gt; 检测失败</a:t>
             </a:r>
+            <a:endParaRPr sz="2000">
+              <a:latin typeface="方正北魏楷书简体" panose="03000509000000000000" charset="-122"/>
+              <a:ea typeface="方正北魏楷书简体" panose="03000509000000000000" charset="-122"/>
+              <a:cs typeface="方正北魏楷书简体" panose="03000509000000000000" charset="-122"/>
+            </a:endParaRPr>
           </a:p>
           <a:p>
             <a:pPr>
@@ -9744,8 +10729,34 @@
               </a:defRPr>
             </a:pPr>
             <a:r>
-              <a:t>Fine-Pruning: 剪枝后ASR仍&gt;90% -&gt; 无法消除</a:t>
-            </a:r>
+              <a:rPr sz="2000">
+                <a:latin typeface="方正北魏楷书简体" panose="03000509000000000000" charset="-122"/>
+                <a:ea typeface="方正北魏楷书简体" panose="03000509000000000000" charset="-122"/>
+                <a:cs typeface="方正北魏楷书简体" panose="03000509000000000000" charset="-122"/>
+              </a:rPr>
+              <a:t>Fine-Pruning</a:t>
+            </a:r>
+            <a:r>
+              <a:rPr lang="zh-CN" sz="2000">
+                <a:latin typeface="方正北魏楷书简体" panose="03000509000000000000" charset="-122"/>
+                <a:ea typeface="方正北魏楷书简体" panose="03000509000000000000" charset="-122"/>
+                <a:cs typeface="方正北魏楷书简体" panose="03000509000000000000" charset="-122"/>
+              </a:rPr>
+              <a:t>：</a:t>
+            </a:r>
+            <a:r>
+              <a:rPr sz="2000">
+                <a:latin typeface="方正北魏楷书简体" panose="03000509000000000000" charset="-122"/>
+                <a:ea typeface="方正北魏楷书简体" panose="03000509000000000000" charset="-122"/>
+                <a:cs typeface="方正北魏楷书简体" panose="03000509000000000000" charset="-122"/>
+              </a:rPr>
+              <a:t>剪枝后ASR仍&gt;90% -&gt; 无法消除</a:t>
+            </a:r>
+            <a:endParaRPr sz="2000">
+              <a:latin typeface="方正北魏楷书简体" panose="03000509000000000000" charset="-122"/>
+              <a:ea typeface="方正北魏楷书简体" panose="03000509000000000000" charset="-122"/>
+              <a:cs typeface="方正北魏楷书简体" panose="03000509000000000000" charset="-122"/>
+            </a:endParaRPr>
           </a:p>
           <a:p>
             <a:pPr>
@@ -9760,8 +10771,34 @@
               </a:defRPr>
             </a:pPr>
             <a:r>
-              <a:t>Neural Cleanse: Anomaly Index&lt;2 -&gt; 检测不到</a:t>
-            </a:r>
+              <a:rPr sz="2000">
+                <a:latin typeface="方正北魏楷书简体" panose="03000509000000000000" charset="-122"/>
+                <a:ea typeface="方正北魏楷书简体" panose="03000509000000000000" charset="-122"/>
+                <a:cs typeface="方正北魏楷书简体" panose="03000509000000000000" charset="-122"/>
+              </a:rPr>
+              <a:t>Neural Cleanse</a:t>
+            </a:r>
+            <a:r>
+              <a:rPr lang="zh-CN" sz="2000">
+                <a:latin typeface="方正北魏楷书简体" panose="03000509000000000000" charset="-122"/>
+                <a:ea typeface="方正北魏楷书简体" panose="03000509000000000000" charset="-122"/>
+                <a:cs typeface="方正北魏楷书简体" panose="03000509000000000000" charset="-122"/>
+              </a:rPr>
+              <a:t>：</a:t>
+            </a:r>
+            <a:r>
+              <a:rPr sz="2000">
+                <a:latin typeface="方正北魏楷书简体" panose="03000509000000000000" charset="-122"/>
+                <a:ea typeface="方正北魏楷书简体" panose="03000509000000000000" charset="-122"/>
+                <a:cs typeface="方正北魏楷书简体" panose="03000509000000000000" charset="-122"/>
+              </a:rPr>
+              <a:t>Anomaly Index&lt;2 -&gt; 检测不到</a:t>
+            </a:r>
+            <a:endParaRPr sz="2000">
+              <a:latin typeface="方正北魏楷书简体" panose="03000509000000000000" charset="-122"/>
+              <a:ea typeface="方正北魏楷书简体" panose="03000509000000000000" charset="-122"/>
+              <a:cs typeface="方正北魏楷书简体" panose="03000509000000000000" charset="-122"/>
+            </a:endParaRPr>
           </a:p>
           <a:p>
             <a:pPr>
@@ -9776,8 +10813,18 @@
               </a:defRPr>
             </a:pPr>
             <a:r>
+              <a:rPr sz="2000">
+                <a:latin typeface="方正北魏楷书简体" panose="03000509000000000000" charset="-122"/>
+                <a:ea typeface="方正北魏楷书简体" panose="03000509000000000000" charset="-122"/>
+                <a:cs typeface="方正北魏楷书简体" panose="03000509000000000000" charset="-122"/>
+              </a:rPr>
               <a:t>结论: WaNet确实能绕过所有三种现有防御</a:t>
             </a:r>
+            <a:endParaRPr sz="2000">
+              <a:latin typeface="方正北魏楷书简体" panose="03000509000000000000" charset="-122"/>
+              <a:ea typeface="方正北魏楷书简体" panose="03000509000000000000" charset="-122"/>
+              <a:cs typeface="方正北魏楷书简体" panose="03000509000000000000" charset="-122"/>
+            </a:endParaRPr>
           </a:p>
         </p:txBody>
       </p:sp>
@@ -9815,8 +10862,8 @@
         </p:nvSpPr>
         <p:spPr>
           <a:xfrm>
-            <a:off x="731520" y="457200"/>
-            <a:ext cx="6400800" cy="457200"/>
+            <a:off x="731520" y="373380"/>
+            <a:ext cx="5922010" cy="553085"/>
           </a:xfrm>
           <a:prstGeom prst="rect">
             <a:avLst/>
@@ -9838,8 +10885,34 @@
               </a:defRPr>
             </a:pPr>
             <a:r>
-              <a:t>消融实验: Noise Mode的关键作用</a:t>
-            </a:r>
+              <a:rPr>
+                <a:latin typeface="方正北魏楷书简体" panose="03000509000000000000" charset="-122"/>
+                <a:ea typeface="方正北魏楷书简体" panose="03000509000000000000" charset="-122"/>
+                <a:cs typeface="方正北魏楷书简体" panose="03000509000000000000" charset="-122"/>
+              </a:rPr>
+              <a:t>消融实验</a:t>
+            </a:r>
+            <a:r>
+              <a:rPr lang="zh-CN">
+                <a:latin typeface="方正北魏楷书简体" panose="03000509000000000000" charset="-122"/>
+                <a:ea typeface="方正北魏楷书简体" panose="03000509000000000000" charset="-122"/>
+                <a:cs typeface="方正北魏楷书简体" panose="03000509000000000000" charset="-122"/>
+              </a:rPr>
+              <a:t>：</a:t>
+            </a:r>
+            <a:r>
+              <a:rPr>
+                <a:latin typeface="方正北魏楷书简体" panose="03000509000000000000" charset="-122"/>
+                <a:ea typeface="方正北魏楷书简体" panose="03000509000000000000" charset="-122"/>
+                <a:cs typeface="方正北魏楷书简体" panose="03000509000000000000" charset="-122"/>
+              </a:rPr>
+              <a:t>Noise Mode的关键作用</a:t>
+            </a:r>
+            <a:endParaRPr>
+              <a:latin typeface="方正北魏楷书简体" panose="03000509000000000000" charset="-122"/>
+              <a:ea typeface="方正北魏楷书简体" panose="03000509000000000000" charset="-122"/>
+              <a:cs typeface="方正北魏楷书简体" panose="03000509000000000000" charset="-122"/>
+            </a:endParaRPr>
           </a:p>
         </p:txBody>
       </p:sp>
@@ -9883,6 +10956,10 @@
           <a:lstStyle/>
           <a:p>
             <a:pPr algn="ctr"/>
+            <a:endParaRPr>
+              <a:latin typeface="方正北魏楷书简体" panose="03000509000000000000" charset="-122"/>
+              <a:ea typeface="方正北魏楷书简体" panose="03000509000000000000" charset="-122"/>
+            </a:endParaRPr>
           </a:p>
         </p:txBody>
       </p:sp>
@@ -9890,12 +10967,16 @@
         <p:nvSpPr>
           <p:cNvPr id="4" name="Rounded Rectangle 3"/>
           <p:cNvSpPr/>
-          <p:nvPr/>
-        </p:nvSpPr>
-        <p:spPr>
-          <a:xfrm>
-            <a:off x="731520" y="1828800"/>
-            <a:ext cx="5029200" cy="2011680"/>
+          <p:nvPr>
+            <p:custDataLst>
+              <p:tags r:id="rId1"/>
+            </p:custDataLst>
+          </p:nvPr>
+        </p:nvSpPr>
+        <p:spPr>
+          <a:xfrm>
+            <a:off x="1098550" y="1828800"/>
+            <a:ext cx="4690745" cy="2011680"/>
           </a:xfrm>
           <a:prstGeom prst="roundRect">
             <a:avLst/>
@@ -9928,6 +11009,10 @@
           <a:lstStyle/>
           <a:p>
             <a:pPr algn="ctr"/>
+            <a:endParaRPr>
+              <a:latin typeface="方正北魏楷书简体" panose="03000509000000000000" charset="-122"/>
+              <a:ea typeface="方正北魏楷书简体" panose="03000509000000000000" charset="-122"/>
+            </a:endParaRPr>
           </a:p>
         </p:txBody>
       </p:sp>
@@ -9935,12 +11020,16 @@
         <p:nvSpPr>
           <p:cNvPr id="5" name="TextBox 4"/>
           <p:cNvSpPr txBox="1"/>
-          <p:nvPr/>
-        </p:nvSpPr>
-        <p:spPr>
-          <a:xfrm>
-            <a:off x="909320" y="1955800"/>
-            <a:ext cx="4673600" cy="254000"/>
+          <p:nvPr>
+            <p:custDataLst>
+              <p:tags r:id="rId2"/>
+            </p:custDataLst>
+          </p:nvPr>
+        </p:nvSpPr>
+        <p:spPr>
+          <a:xfrm>
+            <a:off x="2500630" y="2046605"/>
+            <a:ext cx="1896110" cy="337185"/>
           </a:xfrm>
           <a:prstGeom prst="rect">
             <a:avLst/>
@@ -9962,8 +11051,16 @@
               </a:defRPr>
             </a:pPr>
             <a:r>
+              <a:rPr sz="1600">
+                <a:latin typeface="方正北魏楷书简体" panose="03000509000000000000" charset="-122"/>
+                <a:ea typeface="方正北魏楷书简体" panose="03000509000000000000" charset="-122"/>
+              </a:rPr>
               <a:t>With Noise Mode</a:t>
             </a:r>
+            <a:endParaRPr sz="1600">
+              <a:latin typeface="方正北魏楷书简体" panose="03000509000000000000" charset="-122"/>
+              <a:ea typeface="方正北魏楷书简体" panose="03000509000000000000" charset="-122"/>
+            </a:endParaRPr>
           </a:p>
         </p:txBody>
       </p:sp>
@@ -9971,11 +11068,15 @@
         <p:nvSpPr>
           <p:cNvPr id="6" name="TextBox 5"/>
           <p:cNvSpPr txBox="1"/>
-          <p:nvPr/>
-        </p:nvSpPr>
-        <p:spPr>
-          <a:xfrm>
-            <a:off x="909320" y="2235200"/>
+          <p:nvPr>
+            <p:custDataLst>
+              <p:tags r:id="rId3"/>
+            </p:custDataLst>
+          </p:nvPr>
+        </p:nvSpPr>
+        <p:spPr>
+          <a:xfrm>
+            <a:off x="1111885" y="2514600"/>
             <a:ext cx="4673600" cy="457200"/>
           </a:xfrm>
           <a:prstGeom prst="rect">
@@ -9998,8 +11099,16 @@
               </a:defRPr>
             </a:pPr>
             <a:r>
+              <a:rPr>
+                <a:latin typeface="方正北魏楷书简体" panose="03000509000000000000" charset="-122"/>
+                <a:ea typeface="方正北魏楷书简体" panose="03000509000000000000" charset="-122"/>
+              </a:rPr>
               <a:t>Cross Acc = 89.71%</a:t>
             </a:r>
+            <a:endParaRPr>
+              <a:latin typeface="方正北魏楷书简体" panose="03000509000000000000" charset="-122"/>
+              <a:ea typeface="方正北魏楷书简体" panose="03000509000000000000" charset="-122"/>
+            </a:endParaRPr>
           </a:p>
         </p:txBody>
       </p:sp>
@@ -10007,12 +11116,16 @@
         <p:nvSpPr>
           <p:cNvPr id="7" name="TextBox 6"/>
           <p:cNvSpPr txBox="1"/>
-          <p:nvPr/>
-        </p:nvSpPr>
-        <p:spPr>
-          <a:xfrm>
-            <a:off x="909320" y="3586480"/>
-            <a:ext cx="4673600" cy="203200"/>
+          <p:nvPr>
+            <p:custDataLst>
+              <p:tags r:id="rId4"/>
+            </p:custDataLst>
+          </p:nvPr>
+        </p:nvSpPr>
+        <p:spPr>
+          <a:xfrm>
+            <a:off x="2043430" y="3286125"/>
+            <a:ext cx="2810510" cy="368300"/>
           </a:xfrm>
           <a:prstGeom prst="rect">
             <a:avLst/>
@@ -10034,8 +11147,18 @@
               </a:defRPr>
             </a:pPr>
             <a:r>
+              <a:rPr sz="1800">
+                <a:latin typeface="方正北魏楷书简体" panose="03000509000000000000" charset="-122"/>
+                <a:ea typeface="方正北魏楷书简体" panose="03000509000000000000" charset="-122"/>
+                <a:cs typeface="方正北魏楷书简体" panose="03000509000000000000" charset="-122"/>
+              </a:rPr>
               <a:t>Neural Cleanse 检测不到</a:t>
             </a:r>
+            <a:endParaRPr sz="1800">
+              <a:latin typeface="方正北魏楷书简体" panose="03000509000000000000" charset="-122"/>
+              <a:ea typeface="方正北魏楷书简体" panose="03000509000000000000" charset="-122"/>
+              <a:cs typeface="方正北魏楷书简体" panose="03000509000000000000" charset="-122"/>
+            </a:endParaRPr>
           </a:p>
         </p:txBody>
       </p:sp>
@@ -10043,12 +11166,16 @@
         <p:nvSpPr>
           <p:cNvPr id="8" name="Rounded Rectangle 7"/>
           <p:cNvSpPr/>
-          <p:nvPr/>
-        </p:nvSpPr>
-        <p:spPr>
-          <a:xfrm>
-            <a:off x="6217920" y="1828800"/>
-            <a:ext cx="5029200" cy="2011680"/>
+          <p:nvPr>
+            <p:custDataLst>
+              <p:tags r:id="rId5"/>
+            </p:custDataLst>
+          </p:nvPr>
+        </p:nvSpPr>
+        <p:spPr>
+          <a:xfrm>
+            <a:off x="6199505" y="1828800"/>
+            <a:ext cx="4676140" cy="2011680"/>
           </a:xfrm>
           <a:prstGeom prst="roundRect">
             <a:avLst/>
@@ -10081,6 +11208,10 @@
           <a:lstStyle/>
           <a:p>
             <a:pPr algn="ctr"/>
+            <a:endParaRPr>
+              <a:latin typeface="方正北魏楷书简体" panose="03000509000000000000" charset="-122"/>
+              <a:ea typeface="方正北魏楷书简体" panose="03000509000000000000" charset="-122"/>
+            </a:endParaRPr>
           </a:p>
         </p:txBody>
       </p:sp>
@@ -10088,12 +11219,16 @@
         <p:nvSpPr>
           <p:cNvPr id="9" name="TextBox 8"/>
           <p:cNvSpPr txBox="1"/>
-          <p:nvPr/>
-        </p:nvSpPr>
-        <p:spPr>
-          <a:xfrm>
-            <a:off x="6395720" y="1955800"/>
-            <a:ext cx="4673600" cy="254000"/>
+          <p:nvPr>
+            <p:custDataLst>
+              <p:tags r:id="rId6"/>
+            </p:custDataLst>
+          </p:nvPr>
+        </p:nvSpPr>
+        <p:spPr>
+          <a:xfrm>
+            <a:off x="7472998" y="2046605"/>
+            <a:ext cx="2225675" cy="337185"/>
           </a:xfrm>
           <a:prstGeom prst="rect">
             <a:avLst/>
@@ -10115,8 +11250,16 @@
               </a:defRPr>
             </a:pPr>
             <a:r>
+              <a:rPr sz="1600">
+                <a:latin typeface="方正北魏楷书简体" panose="03000509000000000000" charset="-122"/>
+                <a:ea typeface="方正北魏楷书简体" panose="03000509000000000000" charset="-122"/>
+              </a:rPr>
               <a:t>Without Noise Mode</a:t>
             </a:r>
+            <a:endParaRPr sz="1600">
+              <a:latin typeface="方正北魏楷书简体" panose="03000509000000000000" charset="-122"/>
+              <a:ea typeface="方正北魏楷书简体" panose="03000509000000000000" charset="-122"/>
+            </a:endParaRPr>
           </a:p>
         </p:txBody>
       </p:sp>
@@ -10124,11 +11267,15 @@
         <p:nvSpPr>
           <p:cNvPr id="10" name="TextBox 9"/>
           <p:cNvSpPr txBox="1"/>
-          <p:nvPr/>
-        </p:nvSpPr>
-        <p:spPr>
-          <a:xfrm>
-            <a:off x="6395720" y="2235200"/>
+          <p:nvPr>
+            <p:custDataLst>
+              <p:tags r:id="rId7"/>
+            </p:custDataLst>
+          </p:nvPr>
+        </p:nvSpPr>
+        <p:spPr>
+          <a:xfrm>
+            <a:off x="6249035" y="2500630"/>
             <a:ext cx="4673600" cy="457200"/>
           </a:xfrm>
           <a:prstGeom prst="rect">
@@ -10151,8 +11298,16 @@
               </a:defRPr>
             </a:pPr>
             <a:r>
+              <a:rPr>
+                <a:latin typeface="方正北魏楷书简体" panose="03000509000000000000" charset="-122"/>
+                <a:ea typeface="方正北魏楷书简体" panose="03000509000000000000" charset="-122"/>
+              </a:rPr>
               <a:t>Cross Acc = 0.00%</a:t>
             </a:r>
+            <a:endParaRPr>
+              <a:latin typeface="方正北魏楷书简体" panose="03000509000000000000" charset="-122"/>
+              <a:ea typeface="方正北魏楷书简体" panose="03000509000000000000" charset="-122"/>
+            </a:endParaRPr>
           </a:p>
         </p:txBody>
       </p:sp>
@@ -10160,12 +11315,16 @@
         <p:nvSpPr>
           <p:cNvPr id="11" name="TextBox 10"/>
           <p:cNvSpPr txBox="1"/>
-          <p:nvPr/>
-        </p:nvSpPr>
-        <p:spPr>
-          <a:xfrm>
-            <a:off x="6395720" y="3586480"/>
-            <a:ext cx="4673600" cy="203200"/>
+          <p:nvPr>
+            <p:custDataLst>
+              <p:tags r:id="rId8"/>
+            </p:custDataLst>
+          </p:nvPr>
+        </p:nvSpPr>
+        <p:spPr>
+          <a:xfrm>
+            <a:off x="7180580" y="3286125"/>
+            <a:ext cx="2810510" cy="368300"/>
           </a:xfrm>
           <a:prstGeom prst="rect">
             <a:avLst/>
@@ -10187,8 +11346,18 @@
               </a:defRPr>
             </a:pPr>
             <a:r>
+              <a:rPr sz="1800">
+                <a:latin typeface="方正北魏楷书简体" panose="03000509000000000000" charset="-122"/>
+                <a:ea typeface="方正北魏楷书简体" panose="03000509000000000000" charset="-122"/>
+                <a:cs typeface="方正北魏楷书简体" panose="03000509000000000000" charset="-122"/>
+              </a:rPr>
               <a:t>Neural Cleanse 能检测到</a:t>
             </a:r>
+            <a:endParaRPr sz="1800">
+              <a:latin typeface="方正北魏楷书简体" panose="03000509000000000000" charset="-122"/>
+              <a:ea typeface="方正北魏楷书简体" panose="03000509000000000000" charset="-122"/>
+              <a:cs typeface="方正北魏楷书简体" panose="03000509000000000000" charset="-122"/>
+            </a:endParaRPr>
           </a:p>
         </p:txBody>
       </p:sp>
@@ -10200,8 +11369,8 @@
         </p:nvSpPr>
         <p:spPr>
           <a:xfrm>
-            <a:off x="731520" y="4572000"/>
-            <a:ext cx="10698480" cy="1097280"/>
+            <a:off x="1223963" y="4339590"/>
+            <a:ext cx="5986145" cy="1291590"/>
           </a:xfrm>
           <a:prstGeom prst="rect">
             <a:avLst/>
@@ -10214,7 +11383,10 @@
           </a:bodyPr>
           <a:lstStyle/>
           <a:p>
-            <a:pPr algn="ctr">
+            <a:pPr algn="l">
+              <a:lnSpc>
+                <a:spcPct val="130000"/>
+              </a:lnSpc>
               <a:defRPr sz="1600" b="0">
                 <a:solidFill>
                   <a:srgbClr val="3D3D3D"/>
@@ -10223,12 +11395,91 @@
               </a:defRPr>
             </a:pPr>
             <a:r>
+              <a:rPr sz="2000">
+                <a:latin typeface="方正北魏楷书简体" panose="03000509000000000000" charset="-122"/>
+                <a:ea typeface="方正北魏楷书简体" panose="03000509000000000000" charset="-122"/>
+                <a:cs typeface="方正北魏楷书简体" panose="03000509000000000000" charset="-122"/>
+              </a:rPr>
               <a:t>Noise Mode是WaNet绕过防御的决定性因素。</a:t>
             </a:r>
-            <a:br/>
-            <a:r>
-              <a:t>无Noise: 模型学到像素捷径-&gt;被NC发现。有Noise: 模型被迫学习真正的warping-&gt;防御失效。</a:t>
-            </a:r>
+            <a:br>
+              <a:rPr sz="2000">
+                <a:latin typeface="方正北魏楷书简体" panose="03000509000000000000" charset="-122"/>
+                <a:ea typeface="方正北魏楷书简体" panose="03000509000000000000" charset="-122"/>
+                <a:cs typeface="方正北魏楷书简体" panose="03000509000000000000" charset="-122"/>
+              </a:rPr>
+            </a:br>
+            <a:r>
+              <a:rPr sz="2000">
+                <a:latin typeface="方正北魏楷书简体" panose="03000509000000000000" charset="-122"/>
+                <a:ea typeface="方正北魏楷书简体" panose="03000509000000000000" charset="-122"/>
+                <a:cs typeface="方正北魏楷书简体" panose="03000509000000000000" charset="-122"/>
+              </a:rPr>
+              <a:t>无Noise</a:t>
+            </a:r>
+            <a:r>
+              <a:rPr lang="zh-CN" sz="2000">
+                <a:latin typeface="方正北魏楷书简体" panose="03000509000000000000" charset="-122"/>
+                <a:ea typeface="方正北魏楷书简体" panose="03000509000000000000" charset="-122"/>
+                <a:cs typeface="方正北魏楷书简体" panose="03000509000000000000" charset="-122"/>
+              </a:rPr>
+              <a:t>：</a:t>
+            </a:r>
+            <a:r>
+              <a:rPr sz="2000">
+                <a:latin typeface="方正北魏楷书简体" panose="03000509000000000000" charset="-122"/>
+                <a:ea typeface="方正北魏楷书简体" panose="03000509000000000000" charset="-122"/>
+                <a:cs typeface="方正北魏楷书简体" panose="03000509000000000000" charset="-122"/>
+              </a:rPr>
+              <a:t>模型学到像素捷径-&gt;被NC发现。</a:t>
+            </a:r>
+            <a:endParaRPr sz="2000">
+              <a:latin typeface="方正北魏楷书简体" panose="03000509000000000000" charset="-122"/>
+              <a:ea typeface="方正北魏楷书简体" panose="03000509000000000000" charset="-122"/>
+              <a:cs typeface="方正北魏楷书简体" panose="03000509000000000000" charset="-122"/>
+            </a:endParaRPr>
+          </a:p>
+          <a:p>
+            <a:pPr algn="l">
+              <a:lnSpc>
+                <a:spcPct val="130000"/>
+              </a:lnSpc>
+              <a:defRPr sz="1600" b="0">
+                <a:solidFill>
+                  <a:srgbClr val="3D3D3D"/>
+                </a:solidFill>
+                <a:latin typeface="微软雅黑" panose="020B0503020204020204" charset="-122"/>
+              </a:defRPr>
+            </a:pPr>
+            <a:r>
+              <a:rPr sz="2000">
+                <a:latin typeface="方正北魏楷书简体" panose="03000509000000000000" charset="-122"/>
+                <a:ea typeface="方正北魏楷书简体" panose="03000509000000000000" charset="-122"/>
+                <a:cs typeface="方正北魏楷书简体" panose="03000509000000000000" charset="-122"/>
+              </a:rPr>
+              <a:t>有Noise</a:t>
+            </a:r>
+            <a:r>
+              <a:rPr lang="zh-CN" sz="2000">
+                <a:latin typeface="方正北魏楷书简体" panose="03000509000000000000" charset="-122"/>
+                <a:ea typeface="方正北魏楷书简体" panose="03000509000000000000" charset="-122"/>
+                <a:cs typeface="方正北魏楷书简体" panose="03000509000000000000" charset="-122"/>
+              </a:rPr>
+              <a:t>：</a:t>
+            </a:r>
+            <a:r>
+              <a:rPr sz="2000">
+                <a:latin typeface="方正北魏楷书简体" panose="03000509000000000000" charset="-122"/>
+                <a:ea typeface="方正北魏楷书简体" panose="03000509000000000000" charset="-122"/>
+                <a:cs typeface="方正北魏楷书简体" panose="03000509000000000000" charset="-122"/>
+              </a:rPr>
+              <a:t>模型被迫学习真正的warping-&gt;防御失效。</a:t>
+            </a:r>
+            <a:endParaRPr sz="2000">
+              <a:latin typeface="方正北魏楷书简体" panose="03000509000000000000" charset="-122"/>
+              <a:ea typeface="方正北魏楷书简体" panose="03000509000000000000" charset="-122"/>
+              <a:cs typeface="方正北魏楷书简体" panose="03000509000000000000" charset="-122"/>
+            </a:endParaRPr>
           </a:p>
         </p:txBody>
       </p:sp>
@@ -10267,7 +11518,7 @@
         <p:spPr>
           <a:xfrm>
             <a:off x="731520" y="457200"/>
-            <a:ext cx="6400800" cy="457200"/>
+            <a:ext cx="5346065" cy="553085"/>
           </a:xfrm>
           <a:prstGeom prst="rect">
             <a:avLst/>
@@ -10289,8 +11540,34 @@
               </a:defRPr>
             </a:pPr>
             <a:r>
-              <a:t>消融实验: Warping参数敏感性</a:t>
-            </a:r>
+              <a:rPr>
+                <a:latin typeface="方正北魏楷书简体" panose="03000509000000000000" charset="-122"/>
+                <a:ea typeface="方正北魏楷书简体" panose="03000509000000000000" charset="-122"/>
+                <a:cs typeface="方正北魏楷书简体" panose="03000509000000000000" charset="-122"/>
+              </a:rPr>
+              <a:t>消融实验</a:t>
+            </a:r>
+            <a:r>
+              <a:rPr lang="zh-CN">
+                <a:latin typeface="方正北魏楷书简体" panose="03000509000000000000" charset="-122"/>
+                <a:ea typeface="方正北魏楷书简体" panose="03000509000000000000" charset="-122"/>
+                <a:cs typeface="方正北魏楷书简体" panose="03000509000000000000" charset="-122"/>
+              </a:rPr>
+              <a:t>：</a:t>
+            </a:r>
+            <a:r>
+              <a:rPr>
+                <a:latin typeface="方正北魏楷书简体" panose="03000509000000000000" charset="-122"/>
+                <a:ea typeface="方正北魏楷书简体" panose="03000509000000000000" charset="-122"/>
+                <a:cs typeface="方正北魏楷书简体" panose="03000509000000000000" charset="-122"/>
+              </a:rPr>
+              <a:t>Warping参数敏感性</a:t>
+            </a:r>
+            <a:endParaRPr>
+              <a:latin typeface="方正北魏楷书简体" panose="03000509000000000000" charset="-122"/>
+              <a:ea typeface="方正北魏楷书简体" panose="03000509000000000000" charset="-122"/>
+              <a:cs typeface="方正北魏楷书简体" panose="03000509000000000000" charset="-122"/>
+            </a:endParaRPr>
           </a:p>
         </p:txBody>
       </p:sp>
@@ -10302,7 +11579,7 @@
         </p:nvSpPr>
         <p:spPr>
           <a:xfrm>
-            <a:off x="731520" y="1005840"/>
+            <a:off x="731520" y="1145540"/>
             <a:ext cx="1371600" cy="12700"/>
           </a:xfrm>
           <a:prstGeom prst="rect">
@@ -10334,6 +11611,10 @@
           <a:lstStyle/>
           <a:p>
             <a:pPr algn="ctr"/>
+            <a:endParaRPr>
+              <a:latin typeface="方正北魏楷书简体" panose="03000509000000000000" charset="-122"/>
+              <a:ea typeface="方正北魏楷书简体" panose="03000509000000000000" charset="-122"/>
+            </a:endParaRPr>
           </a:p>
         </p:txBody>
       </p:sp>
@@ -10341,11 +11622,15 @@
         <p:nvSpPr>
           <p:cNvPr id="4" name="TextBox 3"/>
           <p:cNvSpPr txBox="1"/>
-          <p:nvPr/>
-        </p:nvSpPr>
-        <p:spPr>
-          <a:xfrm>
-            <a:off x="731520" y="1463040"/>
+          <p:nvPr>
+            <p:custDataLst>
+              <p:tags r:id="rId1"/>
+            </p:custDataLst>
+          </p:nvPr>
+        </p:nvSpPr>
+        <p:spPr>
+          <a:xfrm>
+            <a:off x="975995" y="1616710"/>
             <a:ext cx="4572000" cy="365760"/>
           </a:xfrm>
           <a:prstGeom prst="rect">
@@ -10368,8 +11653,18 @@
               </a:defRPr>
             </a:pPr>
             <a:r>
+              <a:rPr>
+                <a:latin typeface="方正北魏楷书简体" panose="03000509000000000000" charset="-122"/>
+                <a:ea typeface="方正北魏楷书简体" panose="03000509000000000000" charset="-122"/>
+                <a:cs typeface="方正北魏楷书简体" panose="03000509000000000000" charset="-122"/>
+              </a:rPr>
               <a:t>Warping强度 s</a:t>
             </a:r>
+            <a:endParaRPr>
+              <a:latin typeface="方正北魏楷书简体" panose="03000509000000000000" charset="-122"/>
+              <a:ea typeface="方正北魏楷书简体" panose="03000509000000000000" charset="-122"/>
+              <a:cs typeface="方正北魏楷书简体" panose="03000509000000000000" charset="-122"/>
+            </a:endParaRPr>
           </a:p>
         </p:txBody>
       </p:sp>
@@ -10377,11 +11672,15 @@
         <p:nvSpPr>
           <p:cNvPr id="5" name="Rounded Rectangle 4"/>
           <p:cNvSpPr/>
-          <p:nvPr/>
-        </p:nvSpPr>
-        <p:spPr>
-          <a:xfrm>
-            <a:off x="731520" y="2011680"/>
+          <p:nvPr>
+            <p:custDataLst>
+              <p:tags r:id="rId2"/>
+            </p:custDataLst>
+          </p:nvPr>
+        </p:nvSpPr>
+        <p:spPr>
+          <a:xfrm>
+            <a:off x="975995" y="2165350"/>
             <a:ext cx="2377440" cy="1280160"/>
           </a:xfrm>
           <a:prstGeom prst="roundRect">
@@ -10415,6 +11714,10 @@
           <a:lstStyle/>
           <a:p>
             <a:pPr algn="ctr"/>
+            <a:endParaRPr>
+              <a:latin typeface="方正北魏楷书简体" panose="03000509000000000000" charset="-122"/>
+              <a:ea typeface="方正北魏楷书简体" panose="03000509000000000000" charset="-122"/>
+            </a:endParaRPr>
           </a:p>
         </p:txBody>
       </p:sp>
@@ -10422,12 +11725,16 @@
         <p:nvSpPr>
           <p:cNvPr id="6" name="TextBox 5"/>
           <p:cNvSpPr txBox="1"/>
-          <p:nvPr/>
-        </p:nvSpPr>
-        <p:spPr>
-          <a:xfrm>
-            <a:off x="909320" y="2138680"/>
-            <a:ext cx="2021840" cy="254000"/>
+          <p:nvPr>
+            <p:custDataLst>
+              <p:tags r:id="rId3"/>
+            </p:custDataLst>
+          </p:nvPr>
+        </p:nvSpPr>
+        <p:spPr>
+          <a:xfrm>
+            <a:off x="1744663" y="2292350"/>
+            <a:ext cx="840105" cy="337185"/>
           </a:xfrm>
           <a:prstGeom prst="rect">
             <a:avLst/>
@@ -10449,8 +11756,16 @@
               </a:defRPr>
             </a:pPr>
             <a:r>
+              <a:rPr sz="1600">
+                <a:latin typeface="方正北魏楷书简体" panose="03000509000000000000" charset="-122"/>
+                <a:ea typeface="方正北魏楷书简体" panose="03000509000000000000" charset="-122"/>
+              </a:rPr>
               <a:t>s = 0.25</a:t>
             </a:r>
+            <a:endParaRPr sz="1600">
+              <a:latin typeface="方正北魏楷书简体" panose="03000509000000000000" charset="-122"/>
+              <a:ea typeface="方正北魏楷书简体" panose="03000509000000000000" charset="-122"/>
+            </a:endParaRPr>
           </a:p>
         </p:txBody>
       </p:sp>
@@ -10458,12 +11773,16 @@
         <p:nvSpPr>
           <p:cNvPr id="7" name="TextBox 6"/>
           <p:cNvSpPr txBox="1"/>
-          <p:nvPr/>
-        </p:nvSpPr>
-        <p:spPr>
-          <a:xfrm>
-            <a:off x="909320" y="2418080"/>
-            <a:ext cx="2021840" cy="457200"/>
+          <p:nvPr>
+            <p:custDataLst>
+              <p:tags r:id="rId4"/>
+            </p:custDataLst>
+          </p:nvPr>
+        </p:nvSpPr>
+        <p:spPr>
+          <a:xfrm>
+            <a:off x="1499870" y="2599690"/>
+            <a:ext cx="1329690" cy="398780"/>
           </a:xfrm>
           <a:prstGeom prst="rect">
             <a:avLst/>
@@ -10485,8 +11804,16 @@
               </a:defRPr>
             </a:pPr>
             <a:r>
+              <a:rPr sz="2000">
+                <a:latin typeface="方正北魏楷书简体" panose="03000509000000000000" charset="-122"/>
+                <a:ea typeface="方正北魏楷书简体" panose="03000509000000000000" charset="-122"/>
+              </a:rPr>
               <a:t>ASR 74%</a:t>
             </a:r>
+            <a:endParaRPr sz="2000">
+              <a:latin typeface="方正北魏楷书简体" panose="03000509000000000000" charset="-122"/>
+              <a:ea typeface="方正北魏楷书简体" panose="03000509000000000000" charset="-122"/>
+            </a:endParaRPr>
           </a:p>
         </p:txBody>
       </p:sp>
@@ -10494,12 +11821,16 @@
         <p:nvSpPr>
           <p:cNvPr id="8" name="TextBox 7"/>
           <p:cNvSpPr txBox="1"/>
-          <p:nvPr/>
-        </p:nvSpPr>
-        <p:spPr>
-          <a:xfrm>
-            <a:off x="909320" y="3037840"/>
-            <a:ext cx="2021840" cy="203200"/>
+          <p:nvPr>
+            <p:custDataLst>
+              <p:tags r:id="rId5"/>
+            </p:custDataLst>
+          </p:nvPr>
+        </p:nvSpPr>
+        <p:spPr>
+          <a:xfrm>
+            <a:off x="1613218" y="3037840"/>
+            <a:ext cx="1102995" cy="306705"/>
           </a:xfrm>
           <a:prstGeom prst="rect">
             <a:avLst/>
@@ -10521,8 +11852,18 @@
               </a:defRPr>
             </a:pPr>
             <a:r>
+              <a:rPr sz="1400">
+                <a:latin typeface="方正北魏楷书简体" panose="03000509000000000000" charset="-122"/>
+                <a:ea typeface="方正北魏楷书简体" panose="03000509000000000000" charset="-122"/>
+                <a:cs typeface="方正北魏楷书简体" panose="03000509000000000000" charset="-122"/>
+              </a:rPr>
               <a:t>太弱-&gt;失效</a:t>
             </a:r>
+            <a:endParaRPr sz="1400">
+              <a:latin typeface="方正北魏楷书简体" panose="03000509000000000000" charset="-122"/>
+              <a:ea typeface="方正北魏楷书简体" panose="03000509000000000000" charset="-122"/>
+              <a:cs typeface="方正北魏楷书简体" panose="03000509000000000000" charset="-122"/>
+            </a:endParaRPr>
           </a:p>
         </p:txBody>
       </p:sp>
@@ -10530,11 +11871,15 @@
         <p:nvSpPr>
           <p:cNvPr id="9" name="Rounded Rectangle 8"/>
           <p:cNvSpPr/>
-          <p:nvPr/>
-        </p:nvSpPr>
-        <p:spPr>
-          <a:xfrm>
-            <a:off x="3383280" y="2011680"/>
+          <p:nvPr>
+            <p:custDataLst>
+              <p:tags r:id="rId6"/>
+            </p:custDataLst>
+          </p:nvPr>
+        </p:nvSpPr>
+        <p:spPr>
+          <a:xfrm>
+            <a:off x="3627755" y="2165350"/>
             <a:ext cx="2377440" cy="1280160"/>
           </a:xfrm>
           <a:prstGeom prst="roundRect">
@@ -10568,6 +11913,10 @@
           <a:lstStyle/>
           <a:p>
             <a:pPr algn="ctr"/>
+            <a:endParaRPr>
+              <a:latin typeface="方正北魏楷书简体" panose="03000509000000000000" charset="-122"/>
+              <a:ea typeface="方正北魏楷书简体" panose="03000509000000000000" charset="-122"/>
+            </a:endParaRPr>
           </a:p>
         </p:txBody>
       </p:sp>
@@ -10575,12 +11924,16 @@
         <p:nvSpPr>
           <p:cNvPr id="10" name="TextBox 9"/>
           <p:cNvSpPr txBox="1"/>
-          <p:nvPr/>
-        </p:nvSpPr>
-        <p:spPr>
-          <a:xfrm>
-            <a:off x="3561080" y="2138680"/>
-            <a:ext cx="2021840" cy="254000"/>
+          <p:nvPr>
+            <p:custDataLst>
+              <p:tags r:id="rId7"/>
+            </p:custDataLst>
+          </p:nvPr>
+        </p:nvSpPr>
+        <p:spPr>
+          <a:xfrm>
+            <a:off x="4396423" y="2292350"/>
+            <a:ext cx="840105" cy="337185"/>
           </a:xfrm>
           <a:prstGeom prst="rect">
             <a:avLst/>
@@ -10602,8 +11955,16 @@
               </a:defRPr>
             </a:pPr>
             <a:r>
+              <a:rPr sz="1600">
+                <a:latin typeface="方正北魏楷书简体" panose="03000509000000000000" charset="-122"/>
+                <a:ea typeface="方正北魏楷书简体" panose="03000509000000000000" charset="-122"/>
+              </a:rPr>
               <a:t>s = 0.50</a:t>
             </a:r>
+            <a:endParaRPr sz="1600">
+              <a:latin typeface="方正北魏楷书简体" panose="03000509000000000000" charset="-122"/>
+              <a:ea typeface="方正北魏楷书简体" panose="03000509000000000000" charset="-122"/>
+            </a:endParaRPr>
           </a:p>
         </p:txBody>
       </p:sp>
@@ -10611,12 +11972,16 @@
         <p:nvSpPr>
           <p:cNvPr id="11" name="TextBox 10"/>
           <p:cNvSpPr txBox="1"/>
-          <p:nvPr/>
-        </p:nvSpPr>
-        <p:spPr>
-          <a:xfrm>
-            <a:off x="3561080" y="2418080"/>
-            <a:ext cx="2021840" cy="457200"/>
+          <p:nvPr>
+            <p:custDataLst>
+              <p:tags r:id="rId8"/>
+            </p:custDataLst>
+          </p:nvPr>
+        </p:nvSpPr>
+        <p:spPr>
+          <a:xfrm>
+            <a:off x="3958590" y="2599690"/>
+            <a:ext cx="1715770" cy="398780"/>
           </a:xfrm>
           <a:prstGeom prst="rect">
             <a:avLst/>
@@ -10638,8 +12003,16 @@
               </a:defRPr>
             </a:pPr>
             <a:r>
+              <a:rPr sz="2000">
+                <a:latin typeface="方正北魏楷书简体" panose="03000509000000000000" charset="-122"/>
+                <a:ea typeface="方正北魏楷书简体" panose="03000509000000000000" charset="-122"/>
+              </a:rPr>
               <a:t>ASR 99.59%</a:t>
             </a:r>
+            <a:endParaRPr sz="2000">
+              <a:latin typeface="方正北魏楷书简体" panose="03000509000000000000" charset="-122"/>
+              <a:ea typeface="方正北魏楷书简体" panose="03000509000000000000" charset="-122"/>
+            </a:endParaRPr>
           </a:p>
         </p:txBody>
       </p:sp>
@@ -10647,12 +12020,16 @@
         <p:nvSpPr>
           <p:cNvPr id="12" name="TextBox 11"/>
           <p:cNvSpPr txBox="1"/>
-          <p:nvPr/>
-        </p:nvSpPr>
-        <p:spPr>
-          <a:xfrm>
-            <a:off x="3561080" y="3037840"/>
-            <a:ext cx="2021840" cy="203200"/>
+          <p:nvPr>
+            <p:custDataLst>
+              <p:tags r:id="rId9"/>
+            </p:custDataLst>
+          </p:nvPr>
+        </p:nvSpPr>
+        <p:spPr>
+          <a:xfrm>
+            <a:off x="4547235" y="3037840"/>
+            <a:ext cx="538480" cy="306705"/>
           </a:xfrm>
           <a:prstGeom prst="rect">
             <a:avLst/>
@@ -10674,8 +12051,16 @@
               </a:defRPr>
             </a:pPr>
             <a:r>
+              <a:rPr sz="1400">
+                <a:latin typeface="方正北魏楷书简体" panose="03000509000000000000" charset="-122"/>
+                <a:ea typeface="方正北魏楷书简体" panose="03000509000000000000" charset="-122"/>
+              </a:rPr>
               <a:t>最优</a:t>
             </a:r>
+            <a:endParaRPr sz="1400">
+              <a:latin typeface="方正北魏楷书简体" panose="03000509000000000000" charset="-122"/>
+              <a:ea typeface="方正北魏楷书简体" panose="03000509000000000000" charset="-122"/>
+            </a:endParaRPr>
           </a:p>
         </p:txBody>
       </p:sp>
@@ -10683,11 +12068,15 @@
         <p:nvSpPr>
           <p:cNvPr id="13" name="Rounded Rectangle 12"/>
           <p:cNvSpPr/>
-          <p:nvPr/>
-        </p:nvSpPr>
-        <p:spPr>
-          <a:xfrm>
-            <a:off x="6035040" y="2011680"/>
+          <p:nvPr>
+            <p:custDataLst>
+              <p:tags r:id="rId10"/>
+            </p:custDataLst>
+          </p:nvPr>
+        </p:nvSpPr>
+        <p:spPr>
+          <a:xfrm>
+            <a:off x="6279515" y="2165350"/>
             <a:ext cx="2377440" cy="1280160"/>
           </a:xfrm>
           <a:prstGeom prst="roundRect">
@@ -10721,6 +12110,10 @@
           <a:lstStyle/>
           <a:p>
             <a:pPr algn="ctr"/>
+            <a:endParaRPr>
+              <a:latin typeface="方正北魏楷书简体" panose="03000509000000000000" charset="-122"/>
+              <a:ea typeface="方正北魏楷书简体" panose="03000509000000000000" charset="-122"/>
+            </a:endParaRPr>
           </a:p>
         </p:txBody>
       </p:sp>
@@ -10728,12 +12121,16 @@
         <p:nvSpPr>
           <p:cNvPr id="14" name="TextBox 13"/>
           <p:cNvSpPr txBox="1"/>
-          <p:nvPr/>
-        </p:nvSpPr>
-        <p:spPr>
-          <a:xfrm>
-            <a:off x="6212840" y="2138680"/>
-            <a:ext cx="2021840" cy="254000"/>
+          <p:nvPr>
+            <p:custDataLst>
+              <p:tags r:id="rId11"/>
+            </p:custDataLst>
+          </p:nvPr>
+        </p:nvSpPr>
+        <p:spPr>
+          <a:xfrm>
+            <a:off x="7048183" y="2292350"/>
+            <a:ext cx="840105" cy="337185"/>
           </a:xfrm>
           <a:prstGeom prst="rect">
             <a:avLst/>
@@ -10755,8 +12152,16 @@
               </a:defRPr>
             </a:pPr>
             <a:r>
+              <a:rPr sz="1600">
+                <a:latin typeface="方正北魏楷书简体" panose="03000509000000000000" charset="-122"/>
+                <a:ea typeface="方正北魏楷书简体" panose="03000509000000000000" charset="-122"/>
+              </a:rPr>
               <a:t>s = 1.00</a:t>
             </a:r>
+            <a:endParaRPr sz="1600">
+              <a:latin typeface="方正北魏楷书简体" panose="03000509000000000000" charset="-122"/>
+              <a:ea typeface="方正北魏楷书简体" panose="03000509000000000000" charset="-122"/>
+            </a:endParaRPr>
           </a:p>
         </p:txBody>
       </p:sp>
@@ -10764,12 +12169,16 @@
         <p:nvSpPr>
           <p:cNvPr id="15" name="TextBox 14"/>
           <p:cNvSpPr txBox="1"/>
-          <p:nvPr/>
-        </p:nvSpPr>
-        <p:spPr>
-          <a:xfrm>
-            <a:off x="6212840" y="2418080"/>
-            <a:ext cx="2021840" cy="457200"/>
+          <p:nvPr>
+            <p:custDataLst>
+              <p:tags r:id="rId12"/>
+            </p:custDataLst>
+          </p:nvPr>
+        </p:nvSpPr>
+        <p:spPr>
+          <a:xfrm>
+            <a:off x="6610350" y="2599690"/>
+            <a:ext cx="1715770" cy="398780"/>
           </a:xfrm>
           <a:prstGeom prst="rect">
             <a:avLst/>
@@ -10791,8 +12200,16 @@
               </a:defRPr>
             </a:pPr>
             <a:r>
+              <a:rPr sz="2000">
+                <a:latin typeface="方正北魏楷书简体" panose="03000509000000000000" charset="-122"/>
+                <a:ea typeface="方正北魏楷书简体" panose="03000509000000000000" charset="-122"/>
+              </a:rPr>
               <a:t>ASR 98.29%</a:t>
             </a:r>
+            <a:endParaRPr sz="2000">
+              <a:latin typeface="方正北魏楷书简体" panose="03000509000000000000" charset="-122"/>
+              <a:ea typeface="方正北魏楷书简体" panose="03000509000000000000" charset="-122"/>
+            </a:endParaRPr>
           </a:p>
         </p:txBody>
       </p:sp>
@@ -10800,12 +12217,16 @@
         <p:nvSpPr>
           <p:cNvPr id="16" name="TextBox 15"/>
           <p:cNvSpPr txBox="1"/>
-          <p:nvPr/>
-        </p:nvSpPr>
-        <p:spPr>
-          <a:xfrm>
-            <a:off x="6212840" y="3037840"/>
-            <a:ext cx="2021840" cy="203200"/>
+          <p:nvPr>
+            <p:custDataLst>
+              <p:tags r:id="rId13"/>
+            </p:custDataLst>
+          </p:nvPr>
+        </p:nvSpPr>
+        <p:spPr>
+          <a:xfrm>
+            <a:off x="7198995" y="3037840"/>
+            <a:ext cx="538480" cy="306705"/>
           </a:xfrm>
           <a:prstGeom prst="rect">
             <a:avLst/>
@@ -10827,8 +12248,16 @@
               </a:defRPr>
             </a:pPr>
             <a:r>
+              <a:rPr sz="1400">
+                <a:latin typeface="方正北魏楷书简体" panose="03000509000000000000" charset="-122"/>
+                <a:ea typeface="方正北魏楷书简体" panose="03000509000000000000" charset="-122"/>
+              </a:rPr>
               <a:t>饱和</a:t>
             </a:r>
+            <a:endParaRPr sz="1400">
+              <a:latin typeface="方正北魏楷书简体" panose="03000509000000000000" charset="-122"/>
+              <a:ea typeface="方正北魏楷书简体" panose="03000509000000000000" charset="-122"/>
+            </a:endParaRPr>
           </a:p>
         </p:txBody>
       </p:sp>
@@ -10836,11 +12265,15 @@
         <p:nvSpPr>
           <p:cNvPr id="17" name="TextBox 16"/>
           <p:cNvSpPr txBox="1"/>
-          <p:nvPr/>
-        </p:nvSpPr>
-        <p:spPr>
-          <a:xfrm>
-            <a:off x="731520" y="3657600"/>
+          <p:nvPr>
+            <p:custDataLst>
+              <p:tags r:id="rId14"/>
+            </p:custDataLst>
+          </p:nvPr>
+        </p:nvSpPr>
+        <p:spPr>
+          <a:xfrm>
+            <a:off x="975995" y="3811270"/>
             <a:ext cx="4572000" cy="365760"/>
           </a:xfrm>
           <a:prstGeom prst="rect">
@@ -10863,8 +12296,18 @@
               </a:defRPr>
             </a:pPr>
             <a:r>
+              <a:rPr>
+                <a:latin typeface="方正北魏楷书简体" panose="03000509000000000000" charset="-122"/>
+                <a:ea typeface="方正北魏楷书简体" panose="03000509000000000000" charset="-122"/>
+                <a:cs typeface="方正北魏楷书简体" panose="03000509000000000000" charset="-122"/>
+              </a:rPr>
               <a:t>网格大小 k</a:t>
             </a:r>
+            <a:endParaRPr>
+              <a:latin typeface="方正北魏楷书简体" panose="03000509000000000000" charset="-122"/>
+              <a:ea typeface="方正北魏楷书简体" panose="03000509000000000000" charset="-122"/>
+              <a:cs typeface="方正北魏楷书简体" panose="03000509000000000000" charset="-122"/>
+            </a:endParaRPr>
           </a:p>
         </p:txBody>
       </p:sp>
@@ -10872,11 +12315,15 @@
         <p:nvSpPr>
           <p:cNvPr id="18" name="Rounded Rectangle 17"/>
           <p:cNvSpPr/>
-          <p:nvPr/>
-        </p:nvSpPr>
-        <p:spPr>
-          <a:xfrm>
-            <a:off x="731520" y="4206240"/>
+          <p:nvPr>
+            <p:custDataLst>
+              <p:tags r:id="rId15"/>
+            </p:custDataLst>
+          </p:nvPr>
+        </p:nvSpPr>
+        <p:spPr>
+          <a:xfrm>
+            <a:off x="975995" y="4359910"/>
             <a:ext cx="2377440" cy="1280160"/>
           </a:xfrm>
           <a:prstGeom prst="roundRect">
@@ -10910,6 +12357,10 @@
           <a:lstStyle/>
           <a:p>
             <a:pPr algn="ctr"/>
+            <a:endParaRPr>
+              <a:latin typeface="方正北魏楷书简体" panose="03000509000000000000" charset="-122"/>
+              <a:ea typeface="方正北魏楷书简体" panose="03000509000000000000" charset="-122"/>
+            </a:endParaRPr>
           </a:p>
         </p:txBody>
       </p:sp>
@@ -10917,12 +12368,16 @@
         <p:nvSpPr>
           <p:cNvPr id="19" name="TextBox 18"/>
           <p:cNvSpPr txBox="1"/>
-          <p:nvPr/>
-        </p:nvSpPr>
-        <p:spPr>
-          <a:xfrm>
-            <a:off x="909320" y="4333240"/>
-            <a:ext cx="2021840" cy="254000"/>
+          <p:nvPr>
+            <p:custDataLst>
+              <p:tags r:id="rId16"/>
+            </p:custDataLst>
+          </p:nvPr>
+        </p:nvSpPr>
+        <p:spPr>
+          <a:xfrm>
+            <a:off x="1849120" y="4486910"/>
+            <a:ext cx="631190" cy="337185"/>
           </a:xfrm>
           <a:prstGeom prst="rect">
             <a:avLst/>
@@ -10944,8 +12399,16 @@
               </a:defRPr>
             </a:pPr>
             <a:r>
+              <a:rPr sz="1600">
+                <a:latin typeface="方正北魏楷书简体" panose="03000509000000000000" charset="-122"/>
+                <a:ea typeface="方正北魏楷书简体" panose="03000509000000000000" charset="-122"/>
+              </a:rPr>
               <a:t>k = 2</a:t>
             </a:r>
+            <a:endParaRPr sz="1600">
+              <a:latin typeface="方正北魏楷书简体" panose="03000509000000000000" charset="-122"/>
+              <a:ea typeface="方正北魏楷书简体" panose="03000509000000000000" charset="-122"/>
+            </a:endParaRPr>
           </a:p>
         </p:txBody>
       </p:sp>
@@ -10953,12 +12416,16 @@
         <p:nvSpPr>
           <p:cNvPr id="20" name="TextBox 19"/>
           <p:cNvSpPr txBox="1"/>
-          <p:nvPr/>
-        </p:nvSpPr>
-        <p:spPr>
-          <a:xfrm>
-            <a:off x="909320" y="4612640"/>
-            <a:ext cx="2021840" cy="457200"/>
+          <p:nvPr>
+            <p:custDataLst>
+              <p:tags r:id="rId17"/>
+            </p:custDataLst>
+          </p:nvPr>
+        </p:nvSpPr>
+        <p:spPr>
+          <a:xfrm>
+            <a:off x="1306830" y="4787265"/>
+            <a:ext cx="1715770" cy="398780"/>
           </a:xfrm>
           <a:prstGeom prst="rect">
             <a:avLst/>
@@ -10980,8 +12447,16 @@
               </a:defRPr>
             </a:pPr>
             <a:r>
+              <a:rPr sz="2000">
+                <a:latin typeface="方正北魏楷书简体" panose="03000509000000000000" charset="-122"/>
+                <a:ea typeface="方正北魏楷书简体" panose="03000509000000000000" charset="-122"/>
+              </a:rPr>
               <a:t>ASR 92.82%</a:t>
             </a:r>
+            <a:endParaRPr sz="2000">
+              <a:latin typeface="方正北魏楷书简体" panose="03000509000000000000" charset="-122"/>
+              <a:ea typeface="方正北魏楷书简体" panose="03000509000000000000" charset="-122"/>
+            </a:endParaRPr>
           </a:p>
         </p:txBody>
       </p:sp>
@@ -10989,12 +12464,16 @@
         <p:nvSpPr>
           <p:cNvPr id="21" name="TextBox 20"/>
           <p:cNvSpPr txBox="1"/>
-          <p:nvPr/>
-        </p:nvSpPr>
-        <p:spPr>
-          <a:xfrm>
-            <a:off x="909320" y="5232400"/>
-            <a:ext cx="2021840" cy="203200"/>
+          <p:nvPr>
+            <p:custDataLst>
+              <p:tags r:id="rId18"/>
+            </p:custDataLst>
+          </p:nvPr>
+        </p:nvSpPr>
+        <p:spPr>
+          <a:xfrm>
+            <a:off x="1435418" y="5225415"/>
+            <a:ext cx="1458595" cy="306705"/>
           </a:xfrm>
           <a:prstGeom prst="rect">
             <a:avLst/>
@@ -11016,8 +12495,18 @@
               </a:defRPr>
             </a:pPr>
             <a:r>
+              <a:rPr sz="1400">
+                <a:latin typeface="方正北魏楷书简体" panose="03000509000000000000" charset="-122"/>
+                <a:ea typeface="方正北魏楷书简体" panose="03000509000000000000" charset="-122"/>
+                <a:cs typeface="方正北魏楷书简体" panose="03000509000000000000" charset="-122"/>
+              </a:rPr>
               <a:t>太粗-&gt;被当噪声</a:t>
             </a:r>
+            <a:endParaRPr sz="1400">
+              <a:latin typeface="方正北魏楷书简体" panose="03000509000000000000" charset="-122"/>
+              <a:ea typeface="方正北魏楷书简体" panose="03000509000000000000" charset="-122"/>
+              <a:cs typeface="方正北魏楷书简体" panose="03000509000000000000" charset="-122"/>
+            </a:endParaRPr>
           </a:p>
         </p:txBody>
       </p:sp>
@@ -11025,11 +12514,15 @@
         <p:nvSpPr>
           <p:cNvPr id="22" name="Rounded Rectangle 21"/>
           <p:cNvSpPr/>
-          <p:nvPr/>
-        </p:nvSpPr>
-        <p:spPr>
-          <a:xfrm>
-            <a:off x="3383280" y="4206240"/>
+          <p:nvPr>
+            <p:custDataLst>
+              <p:tags r:id="rId19"/>
+            </p:custDataLst>
+          </p:nvPr>
+        </p:nvSpPr>
+        <p:spPr>
+          <a:xfrm>
+            <a:off x="3627755" y="4359910"/>
             <a:ext cx="2377440" cy="1280160"/>
           </a:xfrm>
           <a:prstGeom prst="roundRect">
@@ -11063,6 +12556,10 @@
           <a:lstStyle/>
           <a:p>
             <a:pPr algn="ctr"/>
+            <a:endParaRPr>
+              <a:latin typeface="方正北魏楷书简体" panose="03000509000000000000" charset="-122"/>
+              <a:ea typeface="方正北魏楷书简体" panose="03000509000000000000" charset="-122"/>
+            </a:endParaRPr>
           </a:p>
         </p:txBody>
       </p:sp>
@@ -11070,12 +12567,16 @@
         <p:nvSpPr>
           <p:cNvPr id="23" name="TextBox 22"/>
           <p:cNvSpPr txBox="1"/>
-          <p:nvPr/>
-        </p:nvSpPr>
-        <p:spPr>
-          <a:xfrm>
-            <a:off x="3561080" y="4333240"/>
-            <a:ext cx="2021840" cy="254000"/>
+          <p:nvPr>
+            <p:custDataLst>
+              <p:tags r:id="rId20"/>
+            </p:custDataLst>
+          </p:nvPr>
+        </p:nvSpPr>
+        <p:spPr>
+          <a:xfrm>
+            <a:off x="4500880" y="4486910"/>
+            <a:ext cx="631190" cy="337185"/>
           </a:xfrm>
           <a:prstGeom prst="rect">
             <a:avLst/>
@@ -11097,8 +12598,16 @@
               </a:defRPr>
             </a:pPr>
             <a:r>
+              <a:rPr sz="1600">
+                <a:latin typeface="方正北魏楷书简体" panose="03000509000000000000" charset="-122"/>
+                <a:ea typeface="方正北魏楷书简体" panose="03000509000000000000" charset="-122"/>
+              </a:rPr>
               <a:t>k = 4</a:t>
             </a:r>
+            <a:endParaRPr sz="1600">
+              <a:latin typeface="方正北魏楷书简体" panose="03000509000000000000" charset="-122"/>
+              <a:ea typeface="方正北魏楷书简体" panose="03000509000000000000" charset="-122"/>
+            </a:endParaRPr>
           </a:p>
         </p:txBody>
       </p:sp>
@@ -11106,12 +12615,16 @@
         <p:nvSpPr>
           <p:cNvPr id="24" name="TextBox 23"/>
           <p:cNvSpPr txBox="1"/>
-          <p:nvPr/>
-        </p:nvSpPr>
-        <p:spPr>
-          <a:xfrm>
-            <a:off x="3561080" y="4612640"/>
-            <a:ext cx="2021840" cy="457200"/>
+          <p:nvPr>
+            <p:custDataLst>
+              <p:tags r:id="rId21"/>
+            </p:custDataLst>
+          </p:nvPr>
+        </p:nvSpPr>
+        <p:spPr>
+          <a:xfrm>
+            <a:off x="3958590" y="4787265"/>
+            <a:ext cx="1715770" cy="398780"/>
           </a:xfrm>
           <a:prstGeom prst="rect">
             <a:avLst/>
@@ -11133,8 +12646,16 @@
               </a:defRPr>
             </a:pPr>
             <a:r>
+              <a:rPr sz="2000">
+                <a:latin typeface="方正北魏楷书简体" panose="03000509000000000000" charset="-122"/>
+                <a:ea typeface="方正北魏楷书简体" panose="03000509000000000000" charset="-122"/>
+              </a:rPr>
               <a:t>ASR 99.15%</a:t>
             </a:r>
+            <a:endParaRPr sz="2000">
+              <a:latin typeface="方正北魏楷书简体" panose="03000509000000000000" charset="-122"/>
+              <a:ea typeface="方正北魏楷书简体" panose="03000509000000000000" charset="-122"/>
+            </a:endParaRPr>
           </a:p>
         </p:txBody>
       </p:sp>
@@ -11142,12 +12663,16 @@
         <p:nvSpPr>
           <p:cNvPr id="25" name="TextBox 24"/>
           <p:cNvSpPr txBox="1"/>
-          <p:nvPr/>
-        </p:nvSpPr>
-        <p:spPr>
-          <a:xfrm>
-            <a:off x="3561080" y="5232400"/>
-            <a:ext cx="2021840" cy="203200"/>
+          <p:nvPr>
+            <p:custDataLst>
+              <p:tags r:id="rId22"/>
+            </p:custDataLst>
+          </p:nvPr>
+        </p:nvSpPr>
+        <p:spPr>
+          <a:xfrm>
+            <a:off x="4547235" y="5225415"/>
+            <a:ext cx="538480" cy="306705"/>
           </a:xfrm>
           <a:prstGeom prst="rect">
             <a:avLst/>
@@ -11169,8 +12694,16 @@
               </a:defRPr>
             </a:pPr>
             <a:r>
+              <a:rPr sz="1400">
+                <a:latin typeface="方正北魏楷书简体" panose="03000509000000000000" charset="-122"/>
+                <a:ea typeface="方正北魏楷书简体" panose="03000509000000000000" charset="-122"/>
+              </a:rPr>
               <a:t>最优</a:t>
             </a:r>
+            <a:endParaRPr sz="1400">
+              <a:latin typeface="方正北魏楷书简体" panose="03000509000000000000" charset="-122"/>
+              <a:ea typeface="方正北魏楷书简体" panose="03000509000000000000" charset="-122"/>
+            </a:endParaRPr>
           </a:p>
         </p:txBody>
       </p:sp>
@@ -11178,11 +12711,15 @@
         <p:nvSpPr>
           <p:cNvPr id="26" name="Rounded Rectangle 25"/>
           <p:cNvSpPr/>
-          <p:nvPr/>
-        </p:nvSpPr>
-        <p:spPr>
-          <a:xfrm>
-            <a:off x="6035040" y="4206240"/>
+          <p:nvPr>
+            <p:custDataLst>
+              <p:tags r:id="rId23"/>
+            </p:custDataLst>
+          </p:nvPr>
+        </p:nvSpPr>
+        <p:spPr>
+          <a:xfrm>
+            <a:off x="6279515" y="4359910"/>
             <a:ext cx="2377440" cy="1280160"/>
           </a:xfrm>
           <a:prstGeom prst="roundRect">
@@ -11216,6 +12753,10 @@
           <a:lstStyle/>
           <a:p>
             <a:pPr algn="ctr"/>
+            <a:endParaRPr>
+              <a:latin typeface="方正北魏楷书简体" panose="03000509000000000000" charset="-122"/>
+              <a:ea typeface="方正北魏楷书简体" panose="03000509000000000000" charset="-122"/>
+            </a:endParaRPr>
           </a:p>
         </p:txBody>
       </p:sp>
@@ -11223,12 +12764,16 @@
         <p:nvSpPr>
           <p:cNvPr id="27" name="TextBox 26"/>
           <p:cNvSpPr txBox="1"/>
-          <p:nvPr/>
-        </p:nvSpPr>
-        <p:spPr>
-          <a:xfrm>
-            <a:off x="6212840" y="4333240"/>
-            <a:ext cx="2021840" cy="254000"/>
+          <p:nvPr>
+            <p:custDataLst>
+              <p:tags r:id="rId24"/>
+            </p:custDataLst>
+          </p:nvPr>
+        </p:nvSpPr>
+        <p:spPr>
+          <a:xfrm>
+            <a:off x="7152640" y="4486910"/>
+            <a:ext cx="631190" cy="337185"/>
           </a:xfrm>
           <a:prstGeom prst="rect">
             <a:avLst/>
@@ -11250,8 +12795,16 @@
               </a:defRPr>
             </a:pPr>
             <a:r>
+              <a:rPr sz="1600">
+                <a:latin typeface="方正北魏楷书简体" panose="03000509000000000000" charset="-122"/>
+                <a:ea typeface="方正北魏楷书简体" panose="03000509000000000000" charset="-122"/>
+              </a:rPr>
               <a:t>k = 8</a:t>
             </a:r>
+            <a:endParaRPr sz="1600">
+              <a:latin typeface="方正北魏楷书简体" panose="03000509000000000000" charset="-122"/>
+              <a:ea typeface="方正北魏楷书简体" panose="03000509000000000000" charset="-122"/>
+            </a:endParaRPr>
           </a:p>
         </p:txBody>
       </p:sp>
@@ -11259,12 +12812,16 @@
         <p:nvSpPr>
           <p:cNvPr id="28" name="TextBox 27"/>
           <p:cNvSpPr txBox="1"/>
-          <p:nvPr/>
-        </p:nvSpPr>
-        <p:spPr>
-          <a:xfrm>
-            <a:off x="6212840" y="4612640"/>
-            <a:ext cx="2021840" cy="457200"/>
+          <p:nvPr>
+            <p:custDataLst>
+              <p:tags r:id="rId25"/>
+            </p:custDataLst>
+          </p:nvPr>
+        </p:nvSpPr>
+        <p:spPr>
+          <a:xfrm>
+            <a:off x="6610350" y="4787265"/>
+            <a:ext cx="1715770" cy="398780"/>
           </a:xfrm>
           <a:prstGeom prst="rect">
             <a:avLst/>
@@ -11286,8 +12843,16 @@
               </a:defRPr>
             </a:pPr>
             <a:r>
+              <a:rPr sz="2000">
+                <a:latin typeface="方正北魏楷书简体" panose="03000509000000000000" charset="-122"/>
+                <a:ea typeface="方正北魏楷书简体" panose="03000509000000000000" charset="-122"/>
+              </a:rPr>
               <a:t>ASR 97.55%</a:t>
             </a:r>
+            <a:endParaRPr sz="2000">
+              <a:latin typeface="方正北魏楷书简体" panose="03000509000000000000" charset="-122"/>
+              <a:ea typeface="方正北魏楷书简体" panose="03000509000000000000" charset="-122"/>
+            </a:endParaRPr>
           </a:p>
         </p:txBody>
       </p:sp>
@@ -11295,12 +12860,16 @@
         <p:nvSpPr>
           <p:cNvPr id="29" name="TextBox 28"/>
           <p:cNvSpPr txBox="1"/>
-          <p:nvPr/>
-        </p:nvSpPr>
-        <p:spPr>
-          <a:xfrm>
-            <a:off x="6212840" y="5232400"/>
-            <a:ext cx="2021840" cy="203200"/>
+          <p:nvPr>
+            <p:custDataLst>
+              <p:tags r:id="rId26"/>
+            </p:custDataLst>
+          </p:nvPr>
+        </p:nvSpPr>
+        <p:spPr>
+          <a:xfrm>
+            <a:off x="7198995" y="5225415"/>
+            <a:ext cx="538480" cy="306705"/>
           </a:xfrm>
           <a:prstGeom prst="rect">
             <a:avLst/>
@@ -11322,8 +12891,16 @@
               </a:defRPr>
             </a:pPr>
             <a:r>
+              <a:rPr sz="1400">
+                <a:latin typeface="方正北魏楷书简体" panose="03000509000000000000" charset="-122"/>
+                <a:ea typeface="方正北魏楷书简体" panose="03000509000000000000" charset="-122"/>
+              </a:rPr>
               <a:t>饱和</a:t>
             </a:r>
+            <a:endParaRPr sz="1400">
+              <a:latin typeface="方正北魏楷书简体" panose="03000509000000000000" charset="-122"/>
+              <a:ea typeface="方正北魏楷书简体" panose="03000509000000000000" charset="-122"/>
+            </a:endParaRPr>
           </a:p>
         </p:txBody>
       </p:sp>
@@ -11335,8 +12912,8 @@
         </p:nvSpPr>
         <p:spPr>
           <a:xfrm>
-            <a:off x="9144000" y="1645920"/>
-            <a:ext cx="2560320" cy="3840480"/>
+            <a:off x="9507855" y="1785620"/>
+            <a:ext cx="1832610" cy="3169285"/>
           </a:xfrm>
           <a:prstGeom prst="rect">
             <a:avLst/>
@@ -11358,35 +12935,129 @@
               </a:defRPr>
             </a:pPr>
             <a:r>
-              <a:t>关键发现</a:t>
-            </a:r>
-            <a:br/>
-            <a:br/>
-            <a:r>
+              <a:rPr sz="2000">
+                <a:latin typeface="方正北魏楷书简体" panose="03000509000000000000" charset="-122"/>
+                <a:ea typeface="方正北魏楷书简体" panose="03000509000000000000" charset="-122"/>
+                <a:cs typeface="方正北魏楷书简体" panose="03000509000000000000" charset="-122"/>
+              </a:rPr>
+              <a:t>发现</a:t>
+            </a:r>
+            <a:br>
+              <a:rPr sz="2000">
+                <a:latin typeface="方正北魏楷书简体" panose="03000509000000000000" charset="-122"/>
+                <a:ea typeface="方正北魏楷书简体" panose="03000509000000000000" charset="-122"/>
+                <a:cs typeface="方正北魏楷书简体" panose="03000509000000000000" charset="-122"/>
+              </a:rPr>
+            </a:br>
+            <a:br>
+              <a:rPr sz="2000">
+                <a:latin typeface="方正北魏楷书简体" panose="03000509000000000000" charset="-122"/>
+                <a:ea typeface="方正北魏楷书简体" panose="03000509000000000000" charset="-122"/>
+                <a:cs typeface="方正北魏楷书简体" panose="03000509000000000000" charset="-122"/>
+              </a:rPr>
+            </a:br>
+            <a:r>
+              <a:rPr sz="2000">
+                <a:latin typeface="方正北魏楷书简体" panose="03000509000000000000" charset="-122"/>
+                <a:ea typeface="方正北魏楷书简体" panose="03000509000000000000" charset="-122"/>
+                <a:cs typeface="方正北魏楷书简体" panose="03000509000000000000" charset="-122"/>
+              </a:rPr>
               <a:t>WaNet对参数</a:t>
             </a:r>
-            <a:br/>
-            <a:r>
+            <a:br>
+              <a:rPr sz="2000">
+                <a:latin typeface="方正北魏楷书简体" panose="03000509000000000000" charset="-122"/>
+                <a:ea typeface="方正北魏楷书简体" panose="03000509000000000000" charset="-122"/>
+                <a:cs typeface="方正北魏楷书简体" panose="03000509000000000000" charset="-122"/>
+              </a:rPr>
+            </a:br>
+            <a:r>
+              <a:rPr sz="2000">
+                <a:latin typeface="方正北魏楷书简体" panose="03000509000000000000" charset="-122"/>
+                <a:ea typeface="方正北魏楷书简体" panose="03000509000000000000" charset="-122"/>
+                <a:cs typeface="方正北魏楷书简体" panose="03000509000000000000" charset="-122"/>
+              </a:rPr>
               <a:t>高度敏感</a:t>
             </a:r>
-            <a:br/>
-            <a:br/>
-            <a:r>
+            <a:br>
+              <a:rPr sz="2000">
+                <a:latin typeface="方正北魏楷书简体" panose="03000509000000000000" charset="-122"/>
+                <a:ea typeface="方正北魏楷书简体" panose="03000509000000000000" charset="-122"/>
+                <a:cs typeface="方正北魏楷书简体" panose="03000509000000000000" charset="-122"/>
+              </a:rPr>
+            </a:br>
+            <a:br>
+              <a:rPr sz="2000">
+                <a:latin typeface="方正北魏楷书简体" panose="03000509000000000000" charset="-122"/>
+                <a:ea typeface="方正北魏楷书简体" panose="03000509000000000000" charset="-122"/>
+                <a:cs typeface="方正北魏楷书简体" panose="03000509000000000000" charset="-122"/>
+              </a:rPr>
+            </a:br>
+            <a:r>
+              <a:rPr sz="2000">
+                <a:latin typeface="方正北魏楷书简体" panose="03000509000000000000" charset="-122"/>
+                <a:ea typeface="方正北魏楷书简体" panose="03000509000000000000" charset="-122"/>
+                <a:cs typeface="方正北魏楷书简体" panose="03000509000000000000" charset="-122"/>
+              </a:rPr>
               <a:t>s&lt;0.5或k&lt;4时</a:t>
             </a:r>
-            <a:br/>
-            <a:r>
+            <a:br>
+              <a:rPr sz="2000">
+                <a:latin typeface="方正北魏楷书简体" panose="03000509000000000000" charset="-122"/>
+                <a:ea typeface="方正北魏楷书简体" panose="03000509000000000000" charset="-122"/>
+                <a:cs typeface="方正北魏楷书简体" panose="03000509000000000000" charset="-122"/>
+              </a:rPr>
+            </a:br>
+            <a:r>
+              <a:rPr sz="2000">
+                <a:latin typeface="方正北魏楷书简体" panose="03000509000000000000" charset="-122"/>
+                <a:ea typeface="方正北魏楷书简体" panose="03000509000000000000" charset="-122"/>
+                <a:cs typeface="方正北魏楷书简体" panose="03000509000000000000" charset="-122"/>
+              </a:rPr>
               <a:t>攻击大幅下降</a:t>
             </a:r>
-            <a:br/>
-            <a:br/>
-            <a:r>
+            <a:br>
+              <a:rPr sz="2000">
+                <a:latin typeface="方正北魏楷书简体" panose="03000509000000000000" charset="-122"/>
+                <a:ea typeface="方正北魏楷书简体" panose="03000509000000000000" charset="-122"/>
+                <a:cs typeface="方正北魏楷书简体" panose="03000509000000000000" charset="-122"/>
+              </a:rPr>
+            </a:br>
+            <a:br>
+              <a:rPr sz="2000">
+                <a:latin typeface="方正北魏楷书简体" panose="03000509000000000000" charset="-122"/>
+                <a:ea typeface="方正北魏楷书简体" panose="03000509000000000000" charset="-122"/>
+                <a:cs typeface="方正北魏楷书简体" panose="03000509000000000000" charset="-122"/>
+              </a:rPr>
+            </a:br>
+            <a:r>
+              <a:rPr sz="2000">
+                <a:latin typeface="方正北魏楷书简体" panose="03000509000000000000" charset="-122"/>
+                <a:ea typeface="方正北魏楷书简体" panose="03000509000000000000" charset="-122"/>
+                <a:cs typeface="方正北魏楷书简体" panose="03000509000000000000" charset="-122"/>
+              </a:rPr>
               <a:t>存在狭窄的</a:t>
             </a:r>
-            <a:br/>
-            <a:r>
+            <a:br>
+              <a:rPr sz="2000">
+                <a:latin typeface="方正北魏楷书简体" panose="03000509000000000000" charset="-122"/>
+                <a:ea typeface="方正北魏楷书简体" panose="03000509000000000000" charset="-122"/>
+                <a:cs typeface="方正北魏楷书简体" panose="03000509000000000000" charset="-122"/>
+              </a:rPr>
+            </a:br>
+            <a:r>
+              <a:rPr sz="2000">
+                <a:latin typeface="方正北魏楷书简体" panose="03000509000000000000" charset="-122"/>
+                <a:ea typeface="方正北魏楷书简体" panose="03000509000000000000" charset="-122"/>
+                <a:cs typeface="方正北魏楷书简体" panose="03000509000000000000" charset="-122"/>
+              </a:rPr>
               <a:t>有效参数区间</a:t>
             </a:r>
+            <a:endParaRPr sz="2000">
+              <a:latin typeface="方正北魏楷书简体" panose="03000509000000000000" charset="-122"/>
+              <a:ea typeface="方正北魏楷书简体" panose="03000509000000000000" charset="-122"/>
+              <a:cs typeface="方正北魏楷书简体" panose="03000509000000000000" charset="-122"/>
+            </a:endParaRPr>
           </a:p>
         </p:txBody>
       </p:sp>
@@ -11425,7 +13096,7 @@
         <p:spPr>
           <a:xfrm>
             <a:off x="731520" y="457200"/>
-            <a:ext cx="6400800" cy="457200"/>
+            <a:ext cx="5346065" cy="553085"/>
           </a:xfrm>
           <a:prstGeom prst="rect">
             <a:avLst/>
@@ -11447,8 +13118,26 @@
               </a:defRPr>
             </a:pPr>
             <a:r>
-              <a:t>核心洞察: Warping在频域留下痕迹</a:t>
-            </a:r>
+              <a:rPr lang="zh-CN">
+                <a:latin typeface="方正北魏楷书简体" panose="03000509000000000000" charset="-122"/>
+                <a:ea typeface="方正北魏楷书简体" panose="03000509000000000000" charset="-122"/>
+                <a:cs typeface="方正北魏楷书简体" panose="03000509000000000000" charset="-122"/>
+              </a:rPr>
+              <a:t>发现：</a:t>
+            </a:r>
+            <a:r>
+              <a:rPr>
+                <a:latin typeface="方正北魏楷书简体" panose="03000509000000000000" charset="-122"/>
+                <a:ea typeface="方正北魏楷书简体" panose="03000509000000000000" charset="-122"/>
+                <a:cs typeface="方正北魏楷书简体" panose="03000509000000000000" charset="-122"/>
+              </a:rPr>
+              <a:t>Warping在频域留下痕迹</a:t>
+            </a:r>
+            <a:endParaRPr>
+              <a:latin typeface="方正北魏楷书简体" panose="03000509000000000000" charset="-122"/>
+              <a:ea typeface="方正北魏楷书简体" panose="03000509000000000000" charset="-122"/>
+              <a:cs typeface="方正北魏楷书简体" panose="03000509000000000000" charset="-122"/>
+            </a:endParaRPr>
           </a:p>
         </p:txBody>
       </p:sp>
@@ -11492,6 +13181,10 @@
           <a:lstStyle/>
           <a:p>
             <a:pPr algn="ctr"/>
+            <a:endParaRPr>
+              <a:latin typeface="方正北魏楷书简体" panose="03000509000000000000" charset="-122"/>
+              <a:ea typeface="方正北魏楷书简体" panose="03000509000000000000" charset="-122"/>
+            </a:endParaRPr>
           </a:p>
         </p:txBody>
       </p:sp>
@@ -11503,8 +13196,8 @@
         </p:nvSpPr>
         <p:spPr>
           <a:xfrm>
-            <a:off x="731520" y="1463040"/>
-            <a:ext cx="5029200" cy="2743200"/>
+            <a:off x="969010" y="1463040"/>
+            <a:ext cx="5029200" cy="3993515"/>
           </a:xfrm>
           <a:prstGeom prst="rect">
             <a:avLst/>
@@ -11529,8 +13222,18 @@
               </a:defRPr>
             </a:pPr>
             <a:r>
+              <a:rPr>
+                <a:latin typeface="方正北魏楷书简体" panose="03000509000000000000" charset="-122"/>
+                <a:ea typeface="方正北魏楷书简体" panose="03000509000000000000" charset="-122"/>
+                <a:cs typeface="方正北魏楷书简体" panose="03000509000000000000" charset="-122"/>
+              </a:rPr>
               <a:t>消融实验揭示了一个重要线索:</a:t>
             </a:r>
+            <a:endParaRPr>
+              <a:latin typeface="方正北魏楷书简体" panose="03000509000000000000" charset="-122"/>
+              <a:ea typeface="方正北魏楷书简体" panose="03000509000000000000" charset="-122"/>
+              <a:cs typeface="方正北魏楷书简体" panose="03000509000000000000" charset="-122"/>
+            </a:endParaRPr>
           </a:p>
           <a:p>
             <a:pPr>
@@ -11545,8 +13248,18 @@
               </a:defRPr>
             </a:pPr>
             <a:r>
+              <a:rPr>
+                <a:latin typeface="方正北魏楷书简体" panose="03000509000000000000" charset="-122"/>
+                <a:ea typeface="方正北魏楷书简体" panose="03000509000000000000" charset="-122"/>
+                <a:cs typeface="方正北魏楷书简体" panose="03000509000000000000" charset="-122"/>
+              </a:rPr>
               <a:t>WaNet 的 warping 到底是怎么实现的？</a:t>
             </a:r>
+            <a:endParaRPr>
+              <a:latin typeface="方正北魏楷书简体" panose="03000509000000000000" charset="-122"/>
+              <a:ea typeface="方正北魏楷书简体" panose="03000509000000000000" charset="-122"/>
+              <a:cs typeface="方正北魏楷书简体" panose="03000509000000000000" charset="-122"/>
+            </a:endParaRPr>
           </a:p>
           <a:p>
             <a:pPr>
@@ -11561,8 +13274,18 @@
               </a:defRPr>
             </a:pPr>
             <a:r>
+              <a:rPr>
+                <a:latin typeface="方正北魏楷书简体" panose="03000509000000000000" charset="-122"/>
+                <a:ea typeface="方正北魏楷书简体" panose="03000509000000000000" charset="-122"/>
+                <a:cs typeface="方正北魏楷书简体" panose="03000509000000000000" charset="-122"/>
+              </a:rPr>
               <a:t>它调用的是 PyTorch 的 grid_sample 函数 + 双线性插值 (bilinear interpolation)</a:t>
             </a:r>
+            <a:endParaRPr>
+              <a:latin typeface="方正北魏楷书简体" panose="03000509000000000000" charset="-122"/>
+              <a:ea typeface="方正北魏楷书简体" panose="03000509000000000000" charset="-122"/>
+              <a:cs typeface="方正北魏楷书简体" panose="03000509000000000000" charset="-122"/>
+            </a:endParaRPr>
           </a:p>
           <a:p>
             <a:pPr>
@@ -11576,6 +13299,11 @@
                 <a:latin typeface="微软雅黑" panose="020B0503020204020204" charset="-122"/>
               </a:defRPr>
             </a:pPr>
+            <a:endParaRPr>
+              <a:latin typeface="方正北魏楷书简体" panose="03000509000000000000" charset="-122"/>
+              <a:ea typeface="方正北魏楷书简体" panose="03000509000000000000" charset="-122"/>
+              <a:cs typeface="方正北魏楷书简体" panose="03000509000000000000" charset="-122"/>
+            </a:endParaRPr>
           </a:p>
           <a:p>
             <a:pPr>
@@ -11590,8 +13318,18 @@
               </a:defRPr>
             </a:pPr>
             <a:r>
+              <a:rPr>
+                <a:latin typeface="方正北魏楷书简体" panose="03000509000000000000" charset="-122"/>
+                <a:ea typeface="方正北魏楷书简体" panose="03000509000000000000" charset="-122"/>
+                <a:cs typeface="方正北魏楷书简体" panose="03000509000000000000" charset="-122"/>
+              </a:rPr>
               <a:t>而插值运算本质上是一种信号处理操作 ——</a:t>
             </a:r>
+            <a:endParaRPr>
+              <a:latin typeface="方正北魏楷书简体" panose="03000509000000000000" charset="-122"/>
+              <a:ea typeface="方正北魏楷书简体" panose="03000509000000000000" charset="-122"/>
+              <a:cs typeface="方正北魏楷书简体" panose="03000509000000000000" charset="-122"/>
+            </a:endParaRPr>
           </a:p>
           <a:p>
             <a:pPr>
@@ -11606,8 +13344,44 @@
               </a:defRPr>
             </a:pPr>
             <a:r>
-              <a:t>每个新像素 = 周围像素的加权平均 -&gt; 必然在频域留下痕迹!</a:t>
-            </a:r>
+              <a:rPr>
+                <a:latin typeface="方正北魏楷书简体" panose="03000509000000000000" charset="-122"/>
+                <a:ea typeface="方正北魏楷书简体" panose="03000509000000000000" charset="-122"/>
+                <a:cs typeface="方正北魏楷书简体" panose="03000509000000000000" charset="-122"/>
+              </a:rPr>
+              <a:t>每个新像素 = 周围像素的加权平均 </a:t>
+            </a:r>
+            <a:endParaRPr>
+              <a:latin typeface="方正北魏楷书简体" panose="03000509000000000000" charset="-122"/>
+              <a:ea typeface="方正北魏楷书简体" panose="03000509000000000000" charset="-122"/>
+              <a:cs typeface="方正北魏楷书简体" panose="03000509000000000000" charset="-122"/>
+            </a:endParaRPr>
+          </a:p>
+          <a:p>
+            <a:pPr>
+              <a:spcAft>
+                <a:spcPts val="595"/>
+              </a:spcAft>
+              <a:defRPr sz="1700" b="1">
+                <a:solidFill>
+                  <a:srgbClr val="3D3D3D"/>
+                </a:solidFill>
+                <a:latin typeface="微软雅黑" panose="020B0503020204020204" charset="-122"/>
+              </a:defRPr>
+            </a:pPr>
+            <a:r>
+              <a:rPr>
+                <a:latin typeface="方正北魏楷书简体" panose="03000509000000000000" charset="-122"/>
+                <a:ea typeface="方正北魏楷书简体" panose="03000509000000000000" charset="-122"/>
+                <a:cs typeface="方正北魏楷书简体" panose="03000509000000000000" charset="-122"/>
+              </a:rPr>
+              <a:t>-&gt; 必然在频域留下痕迹!</a:t>
+            </a:r>
+            <a:endParaRPr>
+              <a:latin typeface="方正北魏楷书简体" panose="03000509000000000000" charset="-122"/>
+              <a:ea typeface="方正北魏楷书简体" panose="03000509000000000000" charset="-122"/>
+              <a:cs typeface="方正北魏楷书简体" panose="03000509000000000000" charset="-122"/>
+            </a:endParaRPr>
           </a:p>
           <a:p>
             <a:pPr>
@@ -11621,6 +13395,11 @@
                 <a:latin typeface="微软雅黑" panose="020B0503020204020204" charset="-122"/>
               </a:defRPr>
             </a:pPr>
+            <a:endParaRPr>
+              <a:latin typeface="方正北魏楷书简体" panose="03000509000000000000" charset="-122"/>
+              <a:ea typeface="方正北魏楷书简体" panose="03000509000000000000" charset="-122"/>
+              <a:cs typeface="方正北魏楷书简体" panose="03000509000000000000" charset="-122"/>
+            </a:endParaRPr>
           </a:p>
           <a:p>
             <a:pPr>
@@ -11635,8 +13414,18 @@
               </a:defRPr>
             </a:pPr>
             <a:r>
+              <a:rPr>
+                <a:latin typeface="方正北魏楷书简体" panose="03000509000000000000" charset="-122"/>
+                <a:ea typeface="方正北魏楷书简体" panose="03000509000000000000" charset="-122"/>
+                <a:cs typeface="方正北魏楷书简体" panose="03000509000000000000" charset="-122"/>
+              </a:rPr>
               <a:t>全新检测思路:</a:t>
             </a:r>
+            <a:endParaRPr>
+              <a:latin typeface="方正北魏楷书简体" panose="03000509000000000000" charset="-122"/>
+              <a:ea typeface="方正北魏楷书简体" panose="03000509000000000000" charset="-122"/>
+              <a:cs typeface="方正北魏楷书简体" panose="03000509000000000000" charset="-122"/>
+            </a:endParaRPr>
           </a:p>
           <a:p>
             <a:pPr>
@@ -11651,8 +13440,34 @@
               </a:defRPr>
             </a:pPr>
             <a:r>
-              <a:t>现有防御: 看模型输出 -&gt; 检测不到WaNet</a:t>
-            </a:r>
+              <a:rPr>
+                <a:latin typeface="方正北魏楷书简体" panose="03000509000000000000" charset="-122"/>
+                <a:ea typeface="方正北魏楷书简体" panose="03000509000000000000" charset="-122"/>
+                <a:cs typeface="方正北魏楷书简体" panose="03000509000000000000" charset="-122"/>
+              </a:rPr>
+              <a:t>现有防御</a:t>
+            </a:r>
+            <a:r>
+              <a:rPr lang="zh-CN">
+                <a:latin typeface="方正北魏楷书简体" panose="03000509000000000000" charset="-122"/>
+                <a:ea typeface="方正北魏楷书简体" panose="03000509000000000000" charset="-122"/>
+                <a:cs typeface="方正北魏楷书简体" panose="03000509000000000000" charset="-122"/>
+              </a:rPr>
+              <a:t>：</a:t>
+            </a:r>
+            <a:r>
+              <a:rPr>
+                <a:latin typeface="方正北魏楷书简体" panose="03000509000000000000" charset="-122"/>
+                <a:ea typeface="方正北魏楷书简体" panose="03000509000000000000" charset="-122"/>
+                <a:cs typeface="方正北魏楷书简体" panose="03000509000000000000" charset="-122"/>
+              </a:rPr>
+              <a:t>看模型输出 -&gt; 检测不到WaNet</a:t>
+            </a:r>
+            <a:endParaRPr>
+              <a:latin typeface="方正北魏楷书简体" panose="03000509000000000000" charset="-122"/>
+              <a:ea typeface="方正北魏楷书简体" panose="03000509000000000000" charset="-122"/>
+              <a:cs typeface="方正北魏楷书简体" panose="03000509000000000000" charset="-122"/>
+            </a:endParaRPr>
           </a:p>
           <a:p>
             <a:pPr>
@@ -11667,8 +13482,34 @@
               </a:defRPr>
             </a:pPr>
             <a:r>
-              <a:t>我们的方法: 看图像频域(FFT) -&gt; 能检测到!</a:t>
-            </a:r>
+              <a:rPr>
+                <a:latin typeface="方正北魏楷书简体" panose="03000509000000000000" charset="-122"/>
+                <a:ea typeface="方正北魏楷书简体" panose="03000509000000000000" charset="-122"/>
+                <a:cs typeface="方正北魏楷书简体" panose="03000509000000000000" charset="-122"/>
+              </a:rPr>
+              <a:t>我们的方法</a:t>
+            </a:r>
+            <a:r>
+              <a:rPr lang="zh-CN">
+                <a:latin typeface="方正北魏楷书简体" panose="03000509000000000000" charset="-122"/>
+                <a:ea typeface="方正北魏楷书简体" panose="03000509000000000000" charset="-122"/>
+                <a:cs typeface="方正北魏楷书简体" panose="03000509000000000000" charset="-122"/>
+              </a:rPr>
+              <a:t>：</a:t>
+            </a:r>
+            <a:r>
+              <a:rPr>
+                <a:latin typeface="方正北魏楷书简体" panose="03000509000000000000" charset="-122"/>
+                <a:ea typeface="方正北魏楷书简体" panose="03000509000000000000" charset="-122"/>
+                <a:cs typeface="方正北魏楷书简体" panose="03000509000000000000" charset="-122"/>
+              </a:rPr>
+              <a:t>看图像频域(FFT) -&gt; 能检测到!</a:t>
+            </a:r>
+            <a:endParaRPr>
+              <a:latin typeface="方正北魏楷书简体" panose="03000509000000000000" charset="-122"/>
+              <a:ea typeface="方正北魏楷书简体" panose="03000509000000000000" charset="-122"/>
+              <a:cs typeface="方正北魏楷书简体" panose="03000509000000000000" charset="-122"/>
+            </a:endParaRPr>
           </a:p>
         </p:txBody>
       </p:sp>
@@ -11680,8 +13521,8 @@
         </p:nvSpPr>
         <p:spPr>
           <a:xfrm>
-            <a:off x="6858000" y="1828800"/>
-            <a:ext cx="4572000" cy="2743200"/>
+            <a:off x="7815263" y="1828800"/>
+            <a:ext cx="2657475" cy="2861310"/>
           </a:xfrm>
           <a:prstGeom prst="rect">
             <a:avLst/>
@@ -11703,31 +13544,114 @@
               </a:defRPr>
             </a:pPr>
             <a:r>
+              <a:rPr sz="2000">
+                <a:latin typeface="方正北魏楷书简体" panose="03000509000000000000" charset="-122"/>
+                <a:ea typeface="方正北魏楷书简体" panose="03000509000000000000" charset="-122"/>
+                <a:cs typeface="方正北魏楷书简体" panose="03000509000000000000" charset="-122"/>
+              </a:rPr>
               <a:t>Warping的本质</a:t>
             </a:r>
-            <a:br/>
-            <a:br/>
-            <a:r>
+            <a:br>
+              <a:rPr sz="2000">
+                <a:latin typeface="方正北魏楷书简体" panose="03000509000000000000" charset="-122"/>
+                <a:ea typeface="方正北魏楷书简体" panose="03000509000000000000" charset="-122"/>
+                <a:cs typeface="方正北魏楷书简体" panose="03000509000000000000" charset="-122"/>
+              </a:rPr>
+            </a:br>
+            <a:br>
+              <a:rPr sz="2000">
+                <a:latin typeface="方正北魏楷书简体" panose="03000509000000000000" charset="-122"/>
+                <a:ea typeface="方正北魏楷书简体" panose="03000509000000000000" charset="-122"/>
+                <a:cs typeface="方正北魏楷书简体" panose="03000509000000000000" charset="-122"/>
+              </a:rPr>
+            </a:br>
+            <a:r>
+              <a:rPr sz="2000">
+                <a:latin typeface="方正北魏楷书简体" panose="03000509000000000000" charset="-122"/>
+                <a:ea typeface="方正北魏楷书简体" panose="03000509000000000000" charset="-122"/>
+                <a:cs typeface="方正北魏楷书简体" panose="03000509000000000000" charset="-122"/>
+              </a:rPr>
               <a:t>grid_sample对图像</a:t>
             </a:r>
-            <a:br/>
-            <a:r>
+            <a:br>
+              <a:rPr sz="2000">
+                <a:latin typeface="方正北魏楷书简体" panose="03000509000000000000" charset="-122"/>
+                <a:ea typeface="方正北魏楷书简体" panose="03000509000000000000" charset="-122"/>
+                <a:cs typeface="方正北魏楷书简体" panose="03000509000000000000" charset="-122"/>
+              </a:rPr>
+            </a:br>
+            <a:r>
+              <a:rPr sz="2000">
+                <a:latin typeface="方正北魏楷书简体" panose="03000509000000000000" charset="-122"/>
+                <a:ea typeface="方正北魏楷书简体" panose="03000509000000000000" charset="-122"/>
+                <a:cs typeface="方正北魏楷书简体" panose="03000509000000000000" charset="-122"/>
+              </a:rPr>
               <a:t>做双线性插值</a:t>
             </a:r>
-            <a:br/>
-            <a:br/>
-            <a:r>
+            <a:br>
+              <a:rPr sz="2000">
+                <a:latin typeface="方正北魏楷书简体" panose="03000509000000000000" charset="-122"/>
+                <a:ea typeface="方正北魏楷书简体" panose="03000509000000000000" charset="-122"/>
+                <a:cs typeface="方正北魏楷书简体" panose="03000509000000000000" charset="-122"/>
+              </a:rPr>
+            </a:br>
+            <a:br>
+              <a:rPr sz="2000">
+                <a:latin typeface="方正北魏楷书简体" panose="03000509000000000000" charset="-122"/>
+                <a:ea typeface="方正北魏楷书简体" panose="03000509000000000000" charset="-122"/>
+                <a:cs typeface="方正北魏楷书简体" panose="03000509000000000000" charset="-122"/>
+              </a:rPr>
+            </a:br>
+            <a:r>
+              <a:rPr sz="2000">
+                <a:latin typeface="方正北魏楷书简体" panose="03000509000000000000" charset="-122"/>
+                <a:ea typeface="方正北魏楷书简体" panose="03000509000000000000" charset="-122"/>
+                <a:cs typeface="方正北魏楷书简体" panose="03000509000000000000" charset="-122"/>
+              </a:rPr>
               <a:t>每个插值点=周围像素</a:t>
             </a:r>
-            <a:br/>
-            <a:r>
+            <a:br>
+              <a:rPr sz="2000">
+                <a:latin typeface="方正北魏楷书简体" panose="03000509000000000000" charset="-122"/>
+                <a:ea typeface="方正北魏楷书简体" panose="03000509000000000000" charset="-122"/>
+                <a:cs typeface="方正北魏楷书简体" panose="03000509000000000000" charset="-122"/>
+              </a:rPr>
+            </a:br>
+            <a:r>
+              <a:rPr sz="2000">
+                <a:latin typeface="方正北魏楷书简体" panose="03000509000000000000" charset="-122"/>
+                <a:ea typeface="方正北魏楷书简体" panose="03000509000000000000" charset="-122"/>
+                <a:cs typeface="方正北魏楷书简体" panose="03000509000000000000" charset="-122"/>
+              </a:rPr>
               <a:t>的加权平均</a:t>
             </a:r>
-            <a:br/>
-            <a:br/>
-            <a:r>
+            <a:br>
+              <a:rPr sz="2000">
+                <a:latin typeface="方正北魏楷书简体" panose="03000509000000000000" charset="-122"/>
+                <a:ea typeface="方正北魏楷书简体" panose="03000509000000000000" charset="-122"/>
+                <a:cs typeface="方正北魏楷书简体" panose="03000509000000000000" charset="-122"/>
+              </a:rPr>
+            </a:br>
+            <a:br>
+              <a:rPr sz="2000">
+                <a:latin typeface="方正北魏楷书简体" panose="03000509000000000000" charset="-122"/>
+                <a:ea typeface="方正北魏楷书简体" panose="03000509000000000000" charset="-122"/>
+                <a:cs typeface="方正北魏楷书简体" panose="03000509000000000000" charset="-122"/>
+              </a:rPr>
+            </a:br>
+            <a:r>
+              <a:rPr sz="2000">
+                <a:latin typeface="方正北魏楷书简体" panose="03000509000000000000" charset="-122"/>
+                <a:ea typeface="方正北魏楷书简体" panose="03000509000000000000" charset="-122"/>
+                <a:cs typeface="方正北魏楷书简体" panose="03000509000000000000" charset="-122"/>
+              </a:rPr>
               <a:t>-&gt; 频域高频分量异常</a:t>
             </a:r>
+            <a:endParaRPr sz="2000">
+              <a:latin typeface="方正北魏楷书简体" panose="03000509000000000000" charset="-122"/>
+              <a:ea typeface="方正北魏楷书简体" panose="03000509000000000000" charset="-122"/>
+              <a:cs typeface="方正北魏楷书简体" panose="03000509000000000000" charset="-122"/>
+            </a:endParaRPr>
           </a:p>
         </p:txBody>
       </p:sp>
@@ -11771,6 +13695,10 @@
           <a:lstStyle/>
           <a:p>
             <a:pPr algn="ctr"/>
+            <a:endParaRPr>
+              <a:latin typeface="方正北魏楷书简体" panose="03000509000000000000" charset="-122"/>
+              <a:ea typeface="方正北魏楷书简体" panose="03000509000000000000" charset="-122"/>
+            </a:endParaRPr>
           </a:p>
         </p:txBody>
       </p:sp>
@@ -11782,8 +13710,8 @@
         </p:nvSpPr>
         <p:spPr>
           <a:xfrm>
-            <a:off x="731520" y="5303520"/>
-            <a:ext cx="10698480" cy="457200"/>
+            <a:off x="6847840" y="5380990"/>
+            <a:ext cx="2411730" cy="368300"/>
           </a:xfrm>
           <a:prstGeom prst="rect">
             <a:avLst/>
@@ -11805,8 +13733,18 @@
               </a:defRPr>
             </a:pPr>
             <a:r>
-              <a:t>这是论文从未探讨过的维度: 不可感知 != 不可检测</a:t>
-            </a:r>
+              <a:rPr>
+                <a:latin typeface="方正北魏楷书简体" panose="03000509000000000000" charset="-122"/>
+                <a:ea typeface="方正北魏楷书简体" panose="03000509000000000000" charset="-122"/>
+                <a:cs typeface="方正北魏楷书简体" panose="03000509000000000000" charset="-122"/>
+              </a:rPr>
+              <a:t>不可感知 != 不可检测</a:t>
+            </a:r>
+            <a:endParaRPr>
+              <a:latin typeface="方正北魏楷书简体" panose="03000509000000000000" charset="-122"/>
+              <a:ea typeface="方正北魏楷书简体" panose="03000509000000000000" charset="-122"/>
+              <a:cs typeface="方正北魏楷书简体" panose="03000509000000000000" charset="-122"/>
+            </a:endParaRPr>
           </a:p>
         </p:txBody>
       </p:sp>
@@ -11845,7 +13783,7 @@
         <p:spPr>
           <a:xfrm>
             <a:off x="731520" y="457200"/>
-            <a:ext cx="6400800" cy="457200"/>
+            <a:ext cx="3431540" cy="553085"/>
           </a:xfrm>
           <a:prstGeom prst="rect">
             <a:avLst/>
@@ -11867,8 +13805,18 @@
               </a:defRPr>
             </a:pPr>
             <a:r>
+              <a:rPr>
+                <a:latin typeface="方正北魏楷书简体" panose="03000509000000000000" charset="-122"/>
+                <a:ea typeface="方正北魏楷书简体" panose="03000509000000000000" charset="-122"/>
+                <a:cs typeface="方正北魏楷书简体" panose="03000509000000000000" charset="-122"/>
+              </a:rPr>
               <a:t>频域Warping检测器</a:t>
             </a:r>
+            <a:endParaRPr>
+              <a:latin typeface="方正北魏楷书简体" panose="03000509000000000000" charset="-122"/>
+              <a:ea typeface="方正北魏楷书简体" panose="03000509000000000000" charset="-122"/>
+              <a:cs typeface="方正北魏楷书简体" panose="03000509000000000000" charset="-122"/>
+            </a:endParaRPr>
           </a:p>
         </p:txBody>
       </p:sp>
@@ -11912,6 +13860,10 @@
           <a:lstStyle/>
           <a:p>
             <a:pPr algn="ctr"/>
+            <a:endParaRPr>
+              <a:latin typeface="方正北魏楷书简体" panose="03000509000000000000" charset="-122"/>
+              <a:ea typeface="方正北魏楷书简体" panose="03000509000000000000" charset="-122"/>
+            </a:endParaRPr>
           </a:p>
         </p:txBody>
       </p:sp>
@@ -11919,12 +13871,16 @@
         <p:nvSpPr>
           <p:cNvPr id="4" name="Rounded Rectangle 3"/>
           <p:cNvSpPr/>
-          <p:nvPr/>
+          <p:nvPr>
+            <p:custDataLst>
+              <p:tags r:id="rId1"/>
+            </p:custDataLst>
+          </p:nvPr>
         </p:nvSpPr>
         <p:spPr>
           <a:xfrm>
             <a:off x="731520" y="1828800"/>
-            <a:ext cx="2011680" cy="1828800"/>
+            <a:ext cx="1955165" cy="1828800"/>
           </a:xfrm>
           <a:prstGeom prst="roundRect">
             <a:avLst/>
@@ -11957,6 +13913,10 @@
           <a:lstStyle/>
           <a:p>
             <a:pPr algn="ctr"/>
+            <a:endParaRPr>
+              <a:latin typeface="方正北魏楷书简体" panose="03000509000000000000" charset="-122"/>
+              <a:ea typeface="方正北魏楷书简体" panose="03000509000000000000" charset="-122"/>
+            </a:endParaRPr>
           </a:p>
         </p:txBody>
       </p:sp>
@@ -11964,12 +13924,16 @@
         <p:nvSpPr>
           <p:cNvPr id="5" name="TextBox 4"/>
           <p:cNvSpPr txBox="1"/>
-          <p:nvPr/>
-        </p:nvSpPr>
-        <p:spPr>
-          <a:xfrm>
-            <a:off x="909320" y="1955800"/>
-            <a:ext cx="1656080" cy="254000"/>
+          <p:nvPr>
+            <p:custDataLst>
+              <p:tags r:id="rId2"/>
+            </p:custDataLst>
+          </p:nvPr>
+        </p:nvSpPr>
+        <p:spPr>
+          <a:xfrm>
+            <a:off x="1073785" y="1990725"/>
+            <a:ext cx="1327150" cy="306705"/>
           </a:xfrm>
           <a:prstGeom prst="rect">
             <a:avLst/>
@@ -11991,8 +13955,18 @@
               </a:defRPr>
             </a:pPr>
             <a:r>
+              <a:rPr sz="1400">
+                <a:latin typeface="方正北魏楷书简体" panose="03000509000000000000" charset="-122"/>
+                <a:ea typeface="方正北魏楷书简体" panose="03000509000000000000" charset="-122"/>
+                <a:cs typeface="方正北魏楷书简体" panose="03000509000000000000" charset="-122"/>
+              </a:rPr>
               <a:t>STEP1: 图像对</a:t>
             </a:r>
+            <a:endParaRPr sz="1400">
+              <a:latin typeface="方正北魏楷书简体" panose="03000509000000000000" charset="-122"/>
+              <a:ea typeface="方正北魏楷书简体" panose="03000509000000000000" charset="-122"/>
+              <a:cs typeface="方正北魏楷书简体" panose="03000509000000000000" charset="-122"/>
+            </a:endParaRPr>
           </a:p>
         </p:txBody>
       </p:sp>
@@ -12000,12 +13974,16 @@
         <p:nvSpPr>
           <p:cNvPr id="6" name="TextBox 5"/>
           <p:cNvSpPr txBox="1"/>
-          <p:nvPr/>
-        </p:nvSpPr>
-        <p:spPr>
-          <a:xfrm>
-            <a:off x="909320" y="2235200"/>
-            <a:ext cx="1656080" cy="457200"/>
+          <p:nvPr>
+            <p:custDataLst>
+              <p:tags r:id="rId3"/>
+            </p:custDataLst>
+          </p:nvPr>
+        </p:nvSpPr>
+        <p:spPr>
+          <a:xfrm>
+            <a:off x="695643" y="2409825"/>
+            <a:ext cx="2083435" cy="706755"/>
           </a:xfrm>
           <a:prstGeom prst="rect">
             <a:avLst/>
@@ -12027,12 +14005,45 @@
               </a:defRPr>
             </a:pPr>
             <a:r>
+              <a:rPr sz="2000">
+                <a:solidFill>
+                  <a:srgbClr val="C2A497"/>
+                </a:solidFill>
+                <a:latin typeface="方正北魏楷书简体" panose="03000509000000000000" charset="-122"/>
+                <a:ea typeface="方正北魏楷书简体" panose="03000509000000000000" charset="-122"/>
+                <a:cs typeface="方正北魏楷书简体" panose="03000509000000000000" charset="-122"/>
+              </a:rPr>
               <a:t>Clean+Warped</a:t>
             </a:r>
-            <a:br/>
-            <a:r>
+            <a:br>
+              <a:rPr sz="2000">
+                <a:solidFill>
+                  <a:srgbClr val="C2A497"/>
+                </a:solidFill>
+                <a:latin typeface="方正北魏楷书简体" panose="03000509000000000000" charset="-122"/>
+                <a:ea typeface="方正北魏楷书简体" panose="03000509000000000000" charset="-122"/>
+                <a:cs typeface="方正北魏楷书简体" panose="03000509000000000000" charset="-122"/>
+              </a:rPr>
+            </a:br>
+            <a:r>
+              <a:rPr sz="2000">
+                <a:solidFill>
+                  <a:srgbClr val="C2A497"/>
+                </a:solidFill>
+                <a:latin typeface="方正北魏楷书简体" panose="03000509000000000000" charset="-122"/>
+                <a:ea typeface="方正北魏楷书简体" panose="03000509000000000000" charset="-122"/>
+                <a:cs typeface="方正北魏楷书简体" panose="03000509000000000000" charset="-122"/>
+              </a:rPr>
               <a:t>各500张</a:t>
             </a:r>
+            <a:endParaRPr sz="2000">
+              <a:solidFill>
+                <a:srgbClr val="C2A497"/>
+              </a:solidFill>
+              <a:latin typeface="方正北魏楷书简体" panose="03000509000000000000" charset="-122"/>
+              <a:ea typeface="方正北魏楷书简体" panose="03000509000000000000" charset="-122"/>
+              <a:cs typeface="方正北魏楷书简体" panose="03000509000000000000" charset="-122"/>
+            </a:endParaRPr>
           </a:p>
         </p:txBody>
       </p:sp>
@@ -12040,11 +14051,15 @@
         <p:nvSpPr>
           <p:cNvPr id="7" name="TextBox 6"/>
           <p:cNvSpPr txBox="1"/>
-          <p:nvPr/>
-        </p:nvSpPr>
-        <p:spPr>
-          <a:xfrm>
-            <a:off x="2834639" y="2560320"/>
+          <p:nvPr>
+            <p:custDataLst>
+              <p:tags r:id="rId4"/>
+            </p:custDataLst>
+          </p:nvPr>
+        </p:nvSpPr>
+        <p:spPr>
+          <a:xfrm>
+            <a:off x="2729864" y="2560320"/>
             <a:ext cx="274320" cy="274320"/>
           </a:xfrm>
           <a:prstGeom prst="rect">
@@ -12067,8 +14082,16 @@
               </a:defRPr>
             </a:pPr>
             <a:r>
+              <a:rPr>
+                <a:latin typeface="方正北魏楷书简体" panose="03000509000000000000" charset="-122"/>
+                <a:ea typeface="方正北魏楷书简体" panose="03000509000000000000" charset="-122"/>
+              </a:rPr>
               <a:t>-&gt;</a:t>
             </a:r>
+            <a:endParaRPr>
+              <a:latin typeface="方正北魏楷书简体" panose="03000509000000000000" charset="-122"/>
+              <a:ea typeface="方正北魏楷书简体" panose="03000509000000000000" charset="-122"/>
+            </a:endParaRPr>
           </a:p>
         </p:txBody>
       </p:sp>
@@ -12076,12 +14099,16 @@
         <p:nvSpPr>
           <p:cNvPr id="8" name="Rounded Rectangle 7"/>
           <p:cNvSpPr/>
-          <p:nvPr/>
-        </p:nvSpPr>
-        <p:spPr>
-          <a:xfrm>
-            <a:off x="3017520" y="1828800"/>
-            <a:ext cx="2011680" cy="1828800"/>
+          <p:nvPr>
+            <p:custDataLst>
+              <p:tags r:id="rId5"/>
+            </p:custDataLst>
+          </p:nvPr>
+        </p:nvSpPr>
+        <p:spPr>
+          <a:xfrm>
+            <a:off x="3031490" y="1828800"/>
+            <a:ext cx="1948815" cy="1828800"/>
           </a:xfrm>
           <a:prstGeom prst="roundRect">
             <a:avLst/>
@@ -12114,6 +14141,10 @@
           <a:lstStyle/>
           <a:p>
             <a:pPr algn="ctr"/>
+            <a:endParaRPr>
+              <a:latin typeface="方正北魏楷书简体" panose="03000509000000000000" charset="-122"/>
+              <a:ea typeface="方正北魏楷书简体" panose="03000509000000000000" charset="-122"/>
+            </a:endParaRPr>
           </a:p>
         </p:txBody>
       </p:sp>
@@ -12121,12 +14152,16 @@
         <p:nvSpPr>
           <p:cNvPr id="9" name="TextBox 8"/>
           <p:cNvSpPr txBox="1"/>
-          <p:nvPr/>
-        </p:nvSpPr>
-        <p:spPr>
-          <a:xfrm>
-            <a:off x="3195320" y="1955800"/>
-            <a:ext cx="1656080" cy="254000"/>
+          <p:nvPr>
+            <p:custDataLst>
+              <p:tags r:id="rId6"/>
+            </p:custDataLst>
+          </p:nvPr>
+        </p:nvSpPr>
+        <p:spPr>
+          <a:xfrm>
+            <a:off x="3480118" y="1990725"/>
+            <a:ext cx="1086485" cy="306705"/>
           </a:xfrm>
           <a:prstGeom prst="rect">
             <a:avLst/>
@@ -12148,8 +14183,16 @@
               </a:defRPr>
             </a:pPr>
             <a:r>
+              <a:rPr sz="1400">
+                <a:latin typeface="方正北魏楷书简体" panose="03000509000000000000" charset="-122"/>
+                <a:ea typeface="方正北魏楷书简体" panose="03000509000000000000" charset="-122"/>
+              </a:rPr>
               <a:t>STEP2: FFT</a:t>
             </a:r>
+            <a:endParaRPr sz="1400">
+              <a:latin typeface="方正北魏楷书简体" panose="03000509000000000000" charset="-122"/>
+              <a:ea typeface="方正北魏楷书简体" panose="03000509000000000000" charset="-122"/>
+            </a:endParaRPr>
           </a:p>
         </p:txBody>
       </p:sp>
@@ -12157,12 +14200,16 @@
         <p:nvSpPr>
           <p:cNvPr id="10" name="TextBox 9"/>
           <p:cNvSpPr txBox="1"/>
-          <p:nvPr/>
-        </p:nvSpPr>
-        <p:spPr>
-          <a:xfrm>
-            <a:off x="3195320" y="2235200"/>
-            <a:ext cx="1656080" cy="457200"/>
+          <p:nvPr>
+            <p:custDataLst>
+              <p:tags r:id="rId7"/>
+            </p:custDataLst>
+          </p:nvPr>
+        </p:nvSpPr>
+        <p:spPr>
+          <a:xfrm>
+            <a:off x="3293745" y="2409825"/>
+            <a:ext cx="1459230" cy="706755"/>
           </a:xfrm>
           <a:prstGeom prst="rect">
             <a:avLst/>
@@ -12184,12 +14231,45 @@
               </a:defRPr>
             </a:pPr>
             <a:r>
+              <a:rPr sz="2000">
+                <a:solidFill>
+                  <a:srgbClr val="C2A497"/>
+                </a:solidFill>
+                <a:latin typeface="方正北魏楷书简体" panose="03000509000000000000" charset="-122"/>
+                <a:ea typeface="方正北魏楷书简体" panose="03000509000000000000" charset="-122"/>
+                <a:cs typeface="方正北魏楷书简体" panose="03000509000000000000" charset="-122"/>
+              </a:rPr>
               <a:t>傅里叶变换</a:t>
             </a:r>
-            <a:br/>
-            <a:r>
+            <a:br>
+              <a:rPr sz="2000">
+                <a:solidFill>
+                  <a:srgbClr val="C2A497"/>
+                </a:solidFill>
+                <a:latin typeface="方正北魏楷书简体" panose="03000509000000000000" charset="-122"/>
+                <a:ea typeface="方正北魏楷书简体" panose="03000509000000000000" charset="-122"/>
+                <a:cs typeface="方正北魏楷书简体" panose="03000509000000000000" charset="-122"/>
+              </a:rPr>
+            </a:br>
+            <a:r>
+              <a:rPr sz="2000">
+                <a:solidFill>
+                  <a:srgbClr val="C2A497"/>
+                </a:solidFill>
+                <a:latin typeface="方正北魏楷书简体" panose="03000509000000000000" charset="-122"/>
+                <a:ea typeface="方正北魏楷书简体" panose="03000509000000000000" charset="-122"/>
+                <a:cs typeface="方正北魏楷书简体" panose="03000509000000000000" charset="-122"/>
+              </a:rPr>
               <a:t>频谱图</a:t>
             </a:r>
+            <a:endParaRPr sz="2000">
+              <a:solidFill>
+                <a:srgbClr val="C2A497"/>
+              </a:solidFill>
+              <a:latin typeface="方正北魏楷书简体" panose="03000509000000000000" charset="-122"/>
+              <a:ea typeface="方正北魏楷书简体" panose="03000509000000000000" charset="-122"/>
+              <a:cs typeface="方正北魏楷书简体" panose="03000509000000000000" charset="-122"/>
+            </a:endParaRPr>
           </a:p>
         </p:txBody>
       </p:sp>
@@ -12197,11 +14277,15 @@
         <p:nvSpPr>
           <p:cNvPr id="11" name="TextBox 10"/>
           <p:cNvSpPr txBox="1"/>
-          <p:nvPr/>
-        </p:nvSpPr>
-        <p:spPr>
-          <a:xfrm>
-            <a:off x="5120640" y="2560320"/>
+          <p:nvPr>
+            <p:custDataLst>
+              <p:tags r:id="rId8"/>
+            </p:custDataLst>
+          </p:nvPr>
+        </p:nvSpPr>
+        <p:spPr>
+          <a:xfrm>
+            <a:off x="5015865" y="2560320"/>
             <a:ext cx="274320" cy="274320"/>
           </a:xfrm>
           <a:prstGeom prst="rect">
@@ -12224,8 +14308,16 @@
               </a:defRPr>
             </a:pPr>
             <a:r>
+              <a:rPr>
+                <a:latin typeface="方正北魏楷书简体" panose="03000509000000000000" charset="-122"/>
+                <a:ea typeface="方正北魏楷书简体" panose="03000509000000000000" charset="-122"/>
+              </a:rPr>
               <a:t>-&gt;</a:t>
             </a:r>
+            <a:endParaRPr>
+              <a:latin typeface="方正北魏楷书简体" panose="03000509000000000000" charset="-122"/>
+              <a:ea typeface="方正北魏楷书简体" panose="03000509000000000000" charset="-122"/>
+            </a:endParaRPr>
           </a:p>
         </p:txBody>
       </p:sp>
@@ -12233,12 +14325,16 @@
         <p:nvSpPr>
           <p:cNvPr id="12" name="Rounded Rectangle 11"/>
           <p:cNvSpPr/>
-          <p:nvPr/>
-        </p:nvSpPr>
-        <p:spPr>
-          <a:xfrm>
-            <a:off x="5303520" y="1828800"/>
-            <a:ext cx="2011680" cy="1828800"/>
+          <p:nvPr>
+            <p:custDataLst>
+              <p:tags r:id="rId9"/>
+            </p:custDataLst>
+          </p:nvPr>
+        </p:nvSpPr>
+        <p:spPr>
+          <a:xfrm>
+            <a:off x="5353050" y="1828800"/>
+            <a:ext cx="1936115" cy="1828800"/>
           </a:xfrm>
           <a:prstGeom prst="roundRect">
             <a:avLst/>
@@ -12271,6 +14367,10 @@
           <a:lstStyle/>
           <a:p>
             <a:pPr algn="ctr"/>
+            <a:endParaRPr>
+              <a:latin typeface="方正北魏楷书简体" panose="03000509000000000000" charset="-122"/>
+              <a:ea typeface="方正北魏楷书简体" panose="03000509000000000000" charset="-122"/>
+            </a:endParaRPr>
           </a:p>
         </p:txBody>
       </p:sp>
@@ -12278,12 +14378,16 @@
         <p:nvSpPr>
           <p:cNvPr id="13" name="TextBox 12"/>
           <p:cNvSpPr txBox="1"/>
-          <p:nvPr/>
-        </p:nvSpPr>
-        <p:spPr>
-          <a:xfrm>
-            <a:off x="5481320" y="1955800"/>
-            <a:ext cx="1656080" cy="254000"/>
+          <p:nvPr>
+            <p:custDataLst>
+              <p:tags r:id="rId10"/>
+            </p:custDataLst>
+          </p:nvPr>
+        </p:nvSpPr>
+        <p:spPr>
+          <a:xfrm>
+            <a:off x="5734685" y="1990725"/>
+            <a:ext cx="1149350" cy="306705"/>
           </a:xfrm>
           <a:prstGeom prst="rect">
             <a:avLst/>
@@ -12305,8 +14409,18 @@
               </a:defRPr>
             </a:pPr>
             <a:r>
+              <a:rPr sz="1400">
+                <a:latin typeface="方正北魏楷书简体" panose="03000509000000000000" charset="-122"/>
+                <a:ea typeface="方正北魏楷书简体" panose="03000509000000000000" charset="-122"/>
+                <a:cs typeface="方正北魏楷书简体" panose="03000509000000000000" charset="-122"/>
+              </a:rPr>
               <a:t>STEP3: 特征</a:t>
             </a:r>
+            <a:endParaRPr sz="1400">
+              <a:latin typeface="方正北魏楷书简体" panose="03000509000000000000" charset="-122"/>
+              <a:ea typeface="方正北魏楷书简体" panose="03000509000000000000" charset="-122"/>
+              <a:cs typeface="方正北魏楷书简体" panose="03000509000000000000" charset="-122"/>
+            </a:endParaRPr>
           </a:p>
         </p:txBody>
       </p:sp>
@@ -12314,12 +14428,16 @@
         <p:nvSpPr>
           <p:cNvPr id="14" name="TextBox 13"/>
           <p:cNvSpPr txBox="1"/>
-          <p:nvPr/>
-        </p:nvSpPr>
-        <p:spPr>
-          <a:xfrm>
-            <a:off x="5481320" y="2235200"/>
-            <a:ext cx="1656080" cy="457200"/>
+          <p:nvPr>
+            <p:custDataLst>
+              <p:tags r:id="rId11"/>
+            </p:custDataLst>
+          </p:nvPr>
+        </p:nvSpPr>
+        <p:spPr>
+          <a:xfrm>
+            <a:off x="5501323" y="2409825"/>
+            <a:ext cx="1616075" cy="706755"/>
           </a:xfrm>
           <a:prstGeom prst="rect">
             <a:avLst/>
@@ -12341,12 +14459,45 @@
               </a:defRPr>
             </a:pPr>
             <a:r>
+              <a:rPr sz="2000">
+                <a:solidFill>
+                  <a:srgbClr val="C2A497"/>
+                </a:solidFill>
+                <a:latin typeface="方正北魏楷书简体" panose="03000509000000000000" charset="-122"/>
+                <a:ea typeface="方正北魏楷书简体" panose="03000509000000000000" charset="-122"/>
+                <a:cs typeface="方正北魏楷书简体" panose="03000509000000000000" charset="-122"/>
+              </a:rPr>
               <a:t>高频能量比</a:t>
             </a:r>
-            <a:br/>
-            <a:r>
+            <a:br>
+              <a:rPr sz="2000">
+                <a:solidFill>
+                  <a:srgbClr val="C2A497"/>
+                </a:solidFill>
+                <a:latin typeface="方正北魏楷书简体" panose="03000509000000000000" charset="-122"/>
+                <a:ea typeface="方正北魏楷书简体" panose="03000509000000000000" charset="-122"/>
+                <a:cs typeface="方正北魏楷书简体" panose="03000509000000000000" charset="-122"/>
+              </a:rPr>
+            </a:br>
+            <a:r>
+              <a:rPr sz="2000">
+                <a:solidFill>
+                  <a:srgbClr val="C2A497"/>
+                </a:solidFill>
+                <a:latin typeface="方正北魏楷书简体" panose="03000509000000000000" charset="-122"/>
+                <a:ea typeface="方正北魏楷书简体" panose="03000509000000000000" charset="-122"/>
+                <a:cs typeface="方正北魏楷书简体" panose="03000509000000000000" charset="-122"/>
+              </a:rPr>
               <a:t>频谱熵等6维</a:t>
             </a:r>
+            <a:endParaRPr sz="2000">
+              <a:solidFill>
+                <a:srgbClr val="C2A497"/>
+              </a:solidFill>
+              <a:latin typeface="方正北魏楷书简体" panose="03000509000000000000" charset="-122"/>
+              <a:ea typeface="方正北魏楷书简体" panose="03000509000000000000" charset="-122"/>
+              <a:cs typeface="方正北魏楷书简体" panose="03000509000000000000" charset="-122"/>
+            </a:endParaRPr>
           </a:p>
         </p:txBody>
       </p:sp>
@@ -12354,11 +14505,15 @@
         <p:nvSpPr>
           <p:cNvPr id="15" name="TextBox 14"/>
           <p:cNvSpPr txBox="1"/>
-          <p:nvPr/>
-        </p:nvSpPr>
-        <p:spPr>
-          <a:xfrm>
-            <a:off x="7406640" y="2560320"/>
+          <p:nvPr>
+            <p:custDataLst>
+              <p:tags r:id="rId12"/>
+            </p:custDataLst>
+          </p:nvPr>
+        </p:nvSpPr>
+        <p:spPr>
+          <a:xfrm>
+            <a:off x="7308850" y="2560320"/>
             <a:ext cx="274320" cy="274320"/>
           </a:xfrm>
           <a:prstGeom prst="rect">
@@ -12381,8 +14536,16 @@
               </a:defRPr>
             </a:pPr>
             <a:r>
+              <a:rPr>
+                <a:latin typeface="方正北魏楷书简体" panose="03000509000000000000" charset="-122"/>
+                <a:ea typeface="方正北魏楷书简体" panose="03000509000000000000" charset="-122"/>
+              </a:rPr>
               <a:t>-&gt;</a:t>
             </a:r>
+            <a:endParaRPr>
+              <a:latin typeface="方正北魏楷书简体" panose="03000509000000000000" charset="-122"/>
+              <a:ea typeface="方正北魏楷书简体" panose="03000509000000000000" charset="-122"/>
+            </a:endParaRPr>
           </a:p>
         </p:txBody>
       </p:sp>
@@ -12390,12 +14553,16 @@
         <p:nvSpPr>
           <p:cNvPr id="16" name="Rounded Rectangle 15"/>
           <p:cNvSpPr/>
-          <p:nvPr/>
-        </p:nvSpPr>
-        <p:spPr>
-          <a:xfrm>
-            <a:off x="7589520" y="1828800"/>
-            <a:ext cx="2011680" cy="1828800"/>
+          <p:nvPr>
+            <p:custDataLst>
+              <p:tags r:id="rId13"/>
+            </p:custDataLst>
+          </p:nvPr>
+        </p:nvSpPr>
+        <p:spPr>
+          <a:xfrm>
+            <a:off x="7615555" y="1828800"/>
+            <a:ext cx="1943100" cy="1828800"/>
           </a:xfrm>
           <a:prstGeom prst="roundRect">
             <a:avLst/>
@@ -12428,6 +14595,10 @@
           <a:lstStyle/>
           <a:p>
             <a:pPr algn="ctr"/>
+            <a:endParaRPr>
+              <a:latin typeface="方正北魏楷书简体" panose="03000509000000000000" charset="-122"/>
+              <a:ea typeface="方正北魏楷书简体" panose="03000509000000000000" charset="-122"/>
+            </a:endParaRPr>
           </a:p>
         </p:txBody>
       </p:sp>
@@ -12435,12 +14606,16 @@
         <p:nvSpPr>
           <p:cNvPr id="17" name="TextBox 16"/>
           <p:cNvSpPr txBox="1"/>
-          <p:nvPr/>
-        </p:nvSpPr>
-        <p:spPr>
-          <a:xfrm>
-            <a:off x="7767320" y="1955800"/>
-            <a:ext cx="1656080" cy="254000"/>
+          <p:nvPr>
+            <p:custDataLst>
+              <p:tags r:id="rId14"/>
+            </p:custDataLst>
+          </p:nvPr>
+        </p:nvSpPr>
+        <p:spPr>
+          <a:xfrm>
+            <a:off x="8000048" y="1990725"/>
+            <a:ext cx="1190625" cy="306705"/>
           </a:xfrm>
           <a:prstGeom prst="rect">
             <a:avLst/>
@@ -12462,8 +14637,16 @@
               </a:defRPr>
             </a:pPr>
             <a:r>
+              <a:rPr sz="1400">
+                <a:latin typeface="方正北魏楷书简体" panose="03000509000000000000" charset="-122"/>
+                <a:ea typeface="方正北魏楷书简体" panose="03000509000000000000" charset="-122"/>
+              </a:rPr>
               <a:t>STEP4: SVM</a:t>
             </a:r>
+            <a:endParaRPr sz="1400">
+              <a:latin typeface="方正北魏楷书简体" panose="03000509000000000000" charset="-122"/>
+              <a:ea typeface="方正北魏楷书简体" panose="03000509000000000000" charset="-122"/>
+            </a:endParaRPr>
           </a:p>
         </p:txBody>
       </p:sp>
@@ -12471,12 +14654,16 @@
         <p:nvSpPr>
           <p:cNvPr id="18" name="TextBox 17"/>
           <p:cNvSpPr txBox="1"/>
-          <p:nvPr/>
-        </p:nvSpPr>
-        <p:spPr>
-          <a:xfrm>
-            <a:off x="7767320" y="2235200"/>
-            <a:ext cx="1656080" cy="457200"/>
+          <p:nvPr>
+            <p:custDataLst>
+              <p:tags r:id="rId15"/>
+            </p:custDataLst>
+          </p:nvPr>
+        </p:nvSpPr>
+        <p:spPr>
+          <a:xfrm>
+            <a:off x="7832408" y="2409825"/>
+            <a:ext cx="1525905" cy="706755"/>
           </a:xfrm>
           <a:prstGeom prst="rect">
             <a:avLst/>
@@ -12498,12 +14685,45 @@
               </a:defRPr>
             </a:pPr>
             <a:r>
+              <a:rPr sz="2000">
+                <a:solidFill>
+                  <a:srgbClr val="C2A497"/>
+                </a:solidFill>
+                <a:latin typeface="方正北魏楷书简体" panose="03000509000000000000" charset="-122"/>
+                <a:ea typeface="方正北魏楷书简体" panose="03000509000000000000" charset="-122"/>
+                <a:cs typeface="方正北魏楷书简体" panose="03000509000000000000" charset="-122"/>
+              </a:rPr>
               <a:t>RBF核SVM</a:t>
             </a:r>
-            <a:br/>
-            <a:r>
+            <a:br>
+              <a:rPr sz="2000">
+                <a:solidFill>
+                  <a:srgbClr val="C2A497"/>
+                </a:solidFill>
+                <a:latin typeface="方正北魏楷书简体" panose="03000509000000000000" charset="-122"/>
+                <a:ea typeface="方正北魏楷书简体" panose="03000509000000000000" charset="-122"/>
+                <a:cs typeface="方正北魏楷书简体" panose="03000509000000000000" charset="-122"/>
+              </a:rPr>
+            </a:br>
+            <a:r>
+              <a:rPr sz="2000">
+                <a:solidFill>
+                  <a:srgbClr val="C2A497"/>
+                </a:solidFill>
+                <a:latin typeface="方正北魏楷书简体" panose="03000509000000000000" charset="-122"/>
+                <a:ea typeface="方正北魏楷书简体" panose="03000509000000000000" charset="-122"/>
+                <a:cs typeface="方正北魏楷书简体" panose="03000509000000000000" charset="-122"/>
+              </a:rPr>
               <a:t>30%测试</a:t>
             </a:r>
+            <a:endParaRPr sz="2000">
+              <a:solidFill>
+                <a:srgbClr val="C2A497"/>
+              </a:solidFill>
+              <a:latin typeface="方正北魏楷书简体" panose="03000509000000000000" charset="-122"/>
+              <a:ea typeface="方正北魏楷书简体" panose="03000509000000000000" charset="-122"/>
+              <a:cs typeface="方正北魏楷书简体" panose="03000509000000000000" charset="-122"/>
+            </a:endParaRPr>
           </a:p>
         </p:txBody>
       </p:sp>
@@ -12511,11 +14731,15 @@
         <p:nvSpPr>
           <p:cNvPr id="19" name="TextBox 18"/>
           <p:cNvSpPr txBox="1"/>
-          <p:nvPr/>
-        </p:nvSpPr>
-        <p:spPr>
-          <a:xfrm>
-            <a:off x="9692640" y="2560320"/>
+          <p:nvPr>
+            <p:custDataLst>
+              <p:tags r:id="rId16"/>
+            </p:custDataLst>
+          </p:nvPr>
+        </p:nvSpPr>
+        <p:spPr>
+          <a:xfrm>
+            <a:off x="9587865" y="2560320"/>
             <a:ext cx="274320" cy="274320"/>
           </a:xfrm>
           <a:prstGeom prst="rect">
@@ -12538,8 +14762,16 @@
               </a:defRPr>
             </a:pPr>
             <a:r>
+              <a:rPr>
+                <a:latin typeface="方正北魏楷书简体" panose="03000509000000000000" charset="-122"/>
+                <a:ea typeface="方正北魏楷书简体" panose="03000509000000000000" charset="-122"/>
+              </a:rPr>
               <a:t>-&gt;</a:t>
             </a:r>
+            <a:endParaRPr>
+              <a:latin typeface="方正北魏楷书简体" panose="03000509000000000000" charset="-122"/>
+              <a:ea typeface="方正北魏楷书简体" panose="03000509000000000000" charset="-122"/>
+            </a:endParaRPr>
           </a:p>
         </p:txBody>
       </p:sp>
@@ -12551,8 +14783,8 @@
         </p:nvSpPr>
         <p:spPr>
           <a:xfrm>
-            <a:off x="9875520" y="1828800"/>
-            <a:ext cx="2011680" cy="1828800"/>
+            <a:off x="9896475" y="1828800"/>
+            <a:ext cx="1990725" cy="1828800"/>
           </a:xfrm>
           <a:prstGeom prst="roundRect">
             <a:avLst/>
@@ -12585,6 +14817,10 @@
           <a:lstStyle/>
           <a:p>
             <a:pPr algn="ctr"/>
+            <a:endParaRPr>
+              <a:latin typeface="方正北魏楷书简体" panose="03000509000000000000" charset="-122"/>
+              <a:ea typeface="方正北魏楷书简体" panose="03000509000000000000" charset="-122"/>
+            </a:endParaRPr>
           </a:p>
         </p:txBody>
       </p:sp>
@@ -12596,8 +14832,8 @@
         </p:nvSpPr>
         <p:spPr>
           <a:xfrm>
-            <a:off x="10053320" y="1955800"/>
-            <a:ext cx="1656080" cy="254000"/>
+            <a:off x="10306685" y="1990725"/>
+            <a:ext cx="1149350" cy="306705"/>
           </a:xfrm>
           <a:prstGeom prst="rect">
             <a:avLst/>
@@ -12619,8 +14855,18 @@
               </a:defRPr>
             </a:pPr>
             <a:r>
+              <a:rPr sz="1400">
+                <a:latin typeface="方正北魏楷书简体" panose="03000509000000000000" charset="-122"/>
+                <a:ea typeface="方正北魏楷书简体" panose="03000509000000000000" charset="-122"/>
+                <a:cs typeface="方正北魏楷书简体" panose="03000509000000000000" charset="-122"/>
+              </a:rPr>
               <a:t>STEP5: 评估</a:t>
             </a:r>
+            <a:endParaRPr sz="1400">
+              <a:latin typeface="方正北魏楷书简体" panose="03000509000000000000" charset="-122"/>
+              <a:ea typeface="方正北魏楷书简体" panose="03000509000000000000" charset="-122"/>
+              <a:cs typeface="方正北魏楷书简体" panose="03000509000000000000" charset="-122"/>
+            </a:endParaRPr>
           </a:p>
         </p:txBody>
       </p:sp>
@@ -12632,8 +14878,8 @@
         </p:nvSpPr>
         <p:spPr>
           <a:xfrm>
-            <a:off x="10053320" y="2235200"/>
-            <a:ext cx="1656080" cy="457200"/>
+            <a:off x="9931718" y="2409825"/>
+            <a:ext cx="1899285" cy="706755"/>
           </a:xfrm>
           <a:prstGeom prst="rect">
             <a:avLst/>
@@ -12655,12 +14901,41 @@
               </a:defRPr>
             </a:pPr>
             <a:r>
+              <a:rPr sz="2000">
+                <a:solidFill>
+                  <a:srgbClr val="C2A497"/>
+                </a:solidFill>
+                <a:latin typeface="方正北魏楷书简体" panose="03000509000000000000" charset="-122"/>
+                <a:ea typeface="方正北魏楷书简体" panose="03000509000000000000" charset="-122"/>
+              </a:rPr>
               <a:t>ROC vs STRIP</a:t>
             </a:r>
-            <a:br/>
-            <a:r>
+            <a:br>
+              <a:rPr sz="2000">
+                <a:solidFill>
+                  <a:srgbClr val="C2A497"/>
+                </a:solidFill>
+                <a:latin typeface="方正北魏楷书简体" panose="03000509000000000000" charset="-122"/>
+                <a:ea typeface="方正北魏楷书简体" panose="03000509000000000000" charset="-122"/>
+              </a:rPr>
+            </a:br>
+            <a:r>
+              <a:rPr sz="2000">
+                <a:solidFill>
+                  <a:srgbClr val="C2A497"/>
+                </a:solidFill>
+                <a:latin typeface="方正北魏楷书简体" panose="03000509000000000000" charset="-122"/>
+                <a:ea typeface="方正北魏楷书简体" panose="03000509000000000000" charset="-122"/>
+              </a:rPr>
               <a:t>AUC 0.735</a:t>
             </a:r>
+            <a:endParaRPr sz="2000">
+              <a:solidFill>
+                <a:srgbClr val="C2A497"/>
+              </a:solidFill>
+              <a:latin typeface="方正北魏楷书简体" panose="03000509000000000000" charset="-122"/>
+              <a:ea typeface="方正北魏楷书简体" panose="03000509000000000000" charset="-122"/>
+            </a:endParaRPr>
           </a:p>
         </p:txBody>
       </p:sp>
@@ -12672,7 +14947,7 @@
         </p:nvSpPr>
         <p:spPr>
           <a:xfrm>
-            <a:off x="731520" y="4114800"/>
+            <a:off x="885190" y="4114800"/>
             <a:ext cx="5029200" cy="1371600"/>
           </a:xfrm>
           <a:prstGeom prst="roundRect">
@@ -12706,6 +14981,10 @@
           <a:lstStyle/>
           <a:p>
             <a:pPr algn="ctr"/>
+            <a:endParaRPr>
+              <a:latin typeface="方正北魏楷书简体" panose="03000509000000000000" charset="-122"/>
+              <a:ea typeface="方正北魏楷书简体" panose="03000509000000000000" charset="-122"/>
+            </a:endParaRPr>
           </a:p>
         </p:txBody>
       </p:sp>
@@ -12717,8 +14996,8 @@
         </p:nvSpPr>
         <p:spPr>
           <a:xfrm>
-            <a:off x="909320" y="4241800"/>
-            <a:ext cx="4673600" cy="254000"/>
+            <a:off x="2740660" y="4241800"/>
+            <a:ext cx="1318260" cy="337185"/>
           </a:xfrm>
           <a:prstGeom prst="rect">
             <a:avLst/>
@@ -12740,8 +15019,18 @@
               </a:defRPr>
             </a:pPr>
             <a:r>
+              <a:rPr sz="1600">
+                <a:latin typeface="方正北魏楷书简体" panose="03000509000000000000" charset="-122"/>
+                <a:ea typeface="方正北魏楷书简体" panose="03000509000000000000" charset="-122"/>
+                <a:cs typeface="方正北魏楷书简体" panose="03000509000000000000" charset="-122"/>
+              </a:rPr>
               <a:t>6维频域特征</a:t>
             </a:r>
+            <a:endParaRPr sz="1600">
+              <a:latin typeface="方正北魏楷书简体" panose="03000509000000000000" charset="-122"/>
+              <a:ea typeface="方正北魏楷书简体" panose="03000509000000000000" charset="-122"/>
+              <a:cs typeface="方正北魏楷书简体" panose="03000509000000000000" charset="-122"/>
+            </a:endParaRPr>
           </a:p>
         </p:txBody>
       </p:sp>
@@ -12753,8 +15042,8 @@
         </p:nvSpPr>
         <p:spPr>
           <a:xfrm>
-            <a:off x="909320" y="4521200"/>
-            <a:ext cx="4673600" cy="457200"/>
+            <a:off x="1660525" y="4605020"/>
+            <a:ext cx="3478530" cy="583565"/>
           </a:xfrm>
           <a:prstGeom prst="rect">
             <a:avLst/>
@@ -12776,8 +15065,41 @@
               </a:defRPr>
             </a:pPr>
             <a:r>
-              <a:t>高频能量比 / 频谱熵 / 均值频率 / 方差频率 / 低频能量比 / 中频能量比</a:t>
-            </a:r>
+              <a:rPr sz="1600">
+                <a:latin typeface="方正北魏楷书简体" panose="03000509000000000000" charset="-122"/>
+                <a:ea typeface="方正北魏楷书简体" panose="03000509000000000000" charset="-122"/>
+                <a:cs typeface="方正北魏楷书简体" panose="03000509000000000000" charset="-122"/>
+              </a:rPr>
+              <a:t>高频能量比 / 频谱熵 / 均值频率 </a:t>
+            </a:r>
+            <a:endParaRPr sz="1600">
+              <a:latin typeface="方正北魏楷书简体" panose="03000509000000000000" charset="-122"/>
+              <a:ea typeface="方正北魏楷书简体" panose="03000509000000000000" charset="-122"/>
+              <a:cs typeface="方正北魏楷书简体" panose="03000509000000000000" charset="-122"/>
+            </a:endParaRPr>
+          </a:p>
+          <a:p>
+            <a:pPr algn="ctr">
+              <a:defRPr sz="2600" b="1">
+                <a:solidFill>
+                  <a:srgbClr val="9B9EC0"/>
+                </a:solidFill>
+                <a:latin typeface="微软雅黑" panose="020B0503020204020204" charset="-122"/>
+              </a:defRPr>
+            </a:pPr>
+            <a:r>
+              <a:rPr sz="1600">
+                <a:latin typeface="方正北魏楷书简体" panose="03000509000000000000" charset="-122"/>
+                <a:ea typeface="方正北魏楷书简体" panose="03000509000000000000" charset="-122"/>
+                <a:cs typeface="方正北魏楷书简体" panose="03000509000000000000" charset="-122"/>
+              </a:rPr>
+              <a:t>方差频率 / 低频能量比 / 中频能量比</a:t>
+            </a:r>
+            <a:endParaRPr sz="1600">
+              <a:latin typeface="方正北魏楷书简体" panose="03000509000000000000" charset="-122"/>
+              <a:ea typeface="方正北魏楷书简体" panose="03000509000000000000" charset="-122"/>
+              <a:cs typeface="方正北魏楷书简体" panose="03000509000000000000" charset="-122"/>
+            </a:endParaRPr>
           </a:p>
         </p:txBody>
       </p:sp>
@@ -12789,7 +15111,7 @@
         </p:nvSpPr>
         <p:spPr>
           <a:xfrm>
-            <a:off x="6217920" y="4114800"/>
+            <a:off x="6231890" y="4114800"/>
             <a:ext cx="5029200" cy="1371600"/>
           </a:xfrm>
           <a:prstGeom prst="roundRect">
@@ -12823,6 +15145,10 @@
           <a:lstStyle/>
           <a:p>
             <a:pPr algn="ctr"/>
+            <a:endParaRPr>
+              <a:latin typeface="方正北魏楷书简体" panose="03000509000000000000" charset="-122"/>
+              <a:ea typeface="方正北魏楷书简体" panose="03000509000000000000" charset="-122"/>
+            </a:endParaRPr>
           </a:p>
         </p:txBody>
       </p:sp>
@@ -12834,8 +15160,8 @@
         </p:nvSpPr>
         <p:spPr>
           <a:xfrm>
-            <a:off x="6395720" y="4241800"/>
-            <a:ext cx="4673600" cy="254000"/>
+            <a:off x="8248650" y="4241800"/>
+            <a:ext cx="995680" cy="337185"/>
           </a:xfrm>
           <a:prstGeom prst="rect">
             <a:avLst/>
@@ -12857,8 +15183,16 @@
               </a:defRPr>
             </a:pPr>
             <a:r>
+              <a:rPr sz="1600">
+                <a:latin typeface="方正北魏楷书简体" panose="03000509000000000000" charset="-122"/>
+                <a:ea typeface="方正北魏楷书简体" panose="03000509000000000000" charset="-122"/>
+              </a:rPr>
               <a:t>检测结果</a:t>
             </a:r>
+            <a:endParaRPr sz="1600">
+              <a:latin typeface="方正北魏楷书简体" panose="03000509000000000000" charset="-122"/>
+              <a:ea typeface="方正北魏楷书简体" panose="03000509000000000000" charset="-122"/>
+            </a:endParaRPr>
           </a:p>
         </p:txBody>
       </p:sp>
@@ -12870,8 +15204,8 @@
         </p:nvSpPr>
         <p:spPr>
           <a:xfrm>
-            <a:off x="6395720" y="4521200"/>
-            <a:ext cx="4673600" cy="457200"/>
+            <a:off x="6291898" y="4765675"/>
+            <a:ext cx="4909185" cy="337185"/>
           </a:xfrm>
           <a:prstGeom prst="rect">
             <a:avLst/>
@@ -12893,8 +15227,16 @@
               </a:defRPr>
             </a:pPr>
             <a:r>
+              <a:rPr sz="1600">
+                <a:latin typeface="方正北魏楷书简体" panose="03000509000000000000" charset="-122"/>
+                <a:ea typeface="方正北魏楷书简体" panose="03000509000000000000" charset="-122"/>
+              </a:rPr>
               <a:t>Acc=67.33%  |  AUC=0.735  |  STRIP AUC=0.50</a:t>
             </a:r>
+            <a:endParaRPr sz="1600">
+              <a:latin typeface="方正北魏楷书简体" panose="03000509000000000000" charset="-122"/>
+              <a:ea typeface="方正北魏楷书简体" panose="03000509000000000000" charset="-122"/>
+            </a:endParaRPr>
           </a:p>
         </p:txBody>
       </p:sp>
@@ -12908,91 +15250,697 @@
 
 <file path=ppt/tags/tag1.xml><?xml version="1.0" encoding="utf-8"?>
 <p:tagLst xmlns:p="http://schemas.openxmlformats.org/presentationml/2006/main">
-  <p:tag name="KSO_WM_DIAGRAM_VIRTUALLY_FRAME" val="{&quot;height&quot;:180,&quot;left&quot;:57.6,&quot;top&quot;:129.6,&quot;width&quot;:842.4}"/>
+  <p:tag name="KSO_WM_DIAGRAM_VIRTUALLY_FRAME" val="{&quot;height&quot;:256.15,&quot;left&quot;:544.95,&quot;top&quot;:224.05,&quot;width&quot;:360}"/>
 </p:tagLst>
 </file>
 
 <file path=ppt/tags/tag10.xml><?xml version="1.0" encoding="utf-8"?>
 <p:tagLst xmlns:p="http://schemas.openxmlformats.org/presentationml/2006/main">
-  <p:tag name="KSO_WM_DIAGRAM_VIRTUALLY_FRAME" val="{&quot;height&quot;:180,&quot;left&quot;:57.6,&quot;top&quot;:129.6,&quot;width&quot;:842.4}"/>
+  <p:tag name="KSO_WM_DIAGRAM_VIRTUALLY_FRAME" val="{&quot;height&quot;:310.5,&quot;left&quot;:45.05,&quot;top&quot;:129.6,&quot;width&quot;:870.1}"/>
+</p:tagLst>
+</file>
+
+<file path=ppt/tags/tag100.xml><?xml version="1.0" encoding="utf-8"?>
+<p:tagLst xmlns:p="http://schemas.openxmlformats.org/presentationml/2006/main">
+  <p:tag name="KSO_WM_DIAGRAM_VIRTUALLY_FRAME" val="{&quot;height&quot;:292.95,&quot;left&quot;:144,&quot;top&quot;:147.6,&quot;width&quot;:489.85}"/>
+</p:tagLst>
+</file>
+
+<file path=ppt/tags/tag101.xml><?xml version="1.0" encoding="utf-8"?>
+<p:tagLst xmlns:p="http://schemas.openxmlformats.org/presentationml/2006/main">
+  <p:tag name="KSO_WM_DIAGRAM_VIRTUALLY_FRAME" val="{&quot;height&quot;:292.95,&quot;left&quot;:144,&quot;top&quot;:147.6,&quot;width&quot;:489.85}"/>
+</p:tagLst>
+</file>
+
+<file path=ppt/tags/tag102.xml><?xml version="1.0" encoding="utf-8"?>
+<p:tagLst xmlns:p="http://schemas.openxmlformats.org/presentationml/2006/main">
+  <p:tag name="KSO_WM_DIAGRAM_VIRTUALLY_FRAME" val="{&quot;height&quot;:292.95,&quot;left&quot;:144,&quot;top&quot;:147.6,&quot;width&quot;:489.85}"/>
+</p:tagLst>
+</file>
+
+<file path=ppt/tags/tag103.xml><?xml version="1.0" encoding="utf-8"?>
+<p:tagLst xmlns:p="http://schemas.openxmlformats.org/presentationml/2006/main">
+  <p:tag name="KSO_WM_DIAGRAM_VIRTUALLY_FRAME" val="{&quot;height&quot;:292.95,&quot;left&quot;:144,&quot;top&quot;:147.6,&quot;width&quot;:489.85}"/>
+</p:tagLst>
+</file>
+
+<file path=ppt/tags/tag104.xml><?xml version="1.0" encoding="utf-8"?>
+<p:tagLst xmlns:p="http://schemas.openxmlformats.org/presentationml/2006/main">
+  <p:tag name="KSO_WM_DIAGRAM_VIRTUALLY_FRAME" val="{&quot;height&quot;:292.95,&quot;left&quot;:144,&quot;top&quot;:147.6,&quot;width&quot;:489.85}"/>
+</p:tagLst>
+</file>
+
+<file path=ppt/tags/tag105.xml><?xml version="1.0" encoding="utf-8"?>
+<p:tagLst xmlns:p="http://schemas.openxmlformats.org/presentationml/2006/main">
+  <p:tag name="KSO_WM_DIAGRAM_VIRTUALLY_FRAME" val="{&quot;height&quot;:292.95,&quot;left&quot;:144,&quot;top&quot;:147.6,&quot;width&quot;:489.85}"/>
+</p:tagLst>
+</file>
+
+<file path=ppt/tags/tag106.xml><?xml version="1.0" encoding="utf-8"?>
+<p:tagLst xmlns:p="http://schemas.openxmlformats.org/presentationml/2006/main">
+  <p:tag name="KSO_WM_DIAGRAM_VIRTUALLY_FRAME" val="{&quot;height&quot;:292.95,&quot;left&quot;:144,&quot;top&quot;:147.6,&quot;width&quot;:489.85}"/>
+</p:tagLst>
+</file>
+
+<file path=ppt/tags/tag107.xml><?xml version="1.0" encoding="utf-8"?>
+<p:tagLst xmlns:p="http://schemas.openxmlformats.org/presentationml/2006/main">
+  <p:tag name="KSO_WM_DIAGRAM_VIRTUALLY_FRAME" val="{&quot;height&quot;:292.95,&quot;left&quot;:144,&quot;top&quot;:147.6,&quot;width&quot;:489.85}"/>
+</p:tagLst>
+</file>
+
+<file path=ppt/tags/tag108.xml><?xml version="1.0" encoding="utf-8"?>
+<p:tagLst xmlns:p="http://schemas.openxmlformats.org/presentationml/2006/main">
+  <p:tag name="KSO_WM_DIAGRAM_VIRTUALLY_FRAME" val="{&quot;height&quot;:292.95,&quot;left&quot;:144,&quot;top&quot;:147.6,&quot;width&quot;:489.85}"/>
+</p:tagLst>
+</file>
+
+<file path=ppt/tags/tag109.xml><?xml version="1.0" encoding="utf-8"?>
+<p:tagLst xmlns:p="http://schemas.openxmlformats.org/presentationml/2006/main">
+  <p:tag name="KSO_WM_DIAGRAM_VIRTUALLY_FRAME" val="{&quot;height&quot;:262.05,&quot;left&quot;:126.9,&quot;top&quot;:170.35,&quot;width&quot;:708.4}"/>
 </p:tagLst>
 </file>
 
 <file path=ppt/tags/tag11.xml><?xml version="1.0" encoding="utf-8"?>
 <p:tagLst xmlns:p="http://schemas.openxmlformats.org/presentationml/2006/main">
-  <p:tag name="KSO_WM_DIAGRAM_VIRTUALLY_FRAME" val="{&quot;height&quot;:180,&quot;left&quot;:57.6,&quot;top&quot;:129.6,&quot;width&quot;:842.4}"/>
+  <p:tag name="KSO_WM_DIAGRAM_VIRTUALLY_FRAME" val="{&quot;height&quot;:310.5,&quot;left&quot;:45.05,&quot;top&quot;:129.6,&quot;width&quot;:870.1}"/>
+</p:tagLst>
+</file>
+
+<file path=ppt/tags/tag110.xml><?xml version="1.0" encoding="utf-8"?>
+<p:tagLst xmlns:p="http://schemas.openxmlformats.org/presentationml/2006/main">
+  <p:tag name="KSO_WM_DIAGRAM_VIRTUALLY_FRAME" val="{&quot;height&quot;:262.05,&quot;left&quot;:126.9,&quot;top&quot;:170.35,&quot;width&quot;:708.4}"/>
+</p:tagLst>
+</file>
+
+<file path=ppt/tags/tag111.xml><?xml version="1.0" encoding="utf-8"?>
+<p:tagLst xmlns:p="http://schemas.openxmlformats.org/presentationml/2006/main">
+  <p:tag name="KSO_WM_DIAGRAM_VIRTUALLY_FRAME" val="{&quot;height&quot;:262.05,&quot;left&quot;:126.9,&quot;top&quot;:170.35,&quot;width&quot;:708.4}"/>
+</p:tagLst>
+</file>
+
+<file path=ppt/tags/tag112.xml><?xml version="1.0" encoding="utf-8"?>
+<p:tagLst xmlns:p="http://schemas.openxmlformats.org/presentationml/2006/main">
+  <p:tag name="KSO_WM_DIAGRAM_VIRTUALLY_FRAME" val="{&quot;height&quot;:262.05,&quot;left&quot;:126.9,&quot;top&quot;:170.35,&quot;width&quot;:708.4}"/>
+</p:tagLst>
+</file>
+
+<file path=ppt/tags/tag113.xml><?xml version="1.0" encoding="utf-8"?>
+<p:tagLst xmlns:p="http://schemas.openxmlformats.org/presentationml/2006/main">
+  <p:tag name="KSO_WM_DIAGRAM_VIRTUALLY_FRAME" val="{&quot;height&quot;:262.05,&quot;left&quot;:126.9,&quot;top&quot;:170.35,&quot;width&quot;:708.4}"/>
+</p:tagLst>
+</file>
+
+<file path=ppt/tags/tag114.xml><?xml version="1.0" encoding="utf-8"?>
+<p:tagLst xmlns:p="http://schemas.openxmlformats.org/presentationml/2006/main">
+  <p:tag name="KSO_WM_DIAGRAM_VIRTUALLY_FRAME" val="{&quot;height&quot;:262.05,&quot;left&quot;:126.9,&quot;top&quot;:170.35,&quot;width&quot;:708.4}"/>
+</p:tagLst>
+</file>
+
+<file path=ppt/tags/tag115.xml><?xml version="1.0" encoding="utf-8"?>
+<p:tagLst xmlns:p="http://schemas.openxmlformats.org/presentationml/2006/main">
+  <p:tag name="KSO_WM_DIAGRAM_VIRTUALLY_FRAME" val="{&quot;height&quot;:262.05,&quot;left&quot;:126.9,&quot;top&quot;:170.35,&quot;width&quot;:708.4}"/>
+</p:tagLst>
+</file>
+
+<file path=ppt/tags/tag116.xml><?xml version="1.0" encoding="utf-8"?>
+<p:tagLst xmlns:p="http://schemas.openxmlformats.org/presentationml/2006/main">
+  <p:tag name="KSO_WM_DIAGRAM_VIRTUALLY_FRAME" val="{&quot;height&quot;:262.05,&quot;left&quot;:126.9,&quot;top&quot;:170.35,&quot;width&quot;:708.4}"/>
 </p:tagLst>
 </file>
 
 <file path=ppt/tags/tag12.xml><?xml version="1.0" encoding="utf-8"?>
 <p:tagLst xmlns:p="http://schemas.openxmlformats.org/presentationml/2006/main">
-  <p:tag name="KSO_WM_DIAGRAM_VIRTUALLY_FRAME" val="{&quot;height&quot;:180,&quot;left&quot;:57.6,&quot;top&quot;:129.6,&quot;width&quot;:842.4}"/>
+  <p:tag name="KSO_WM_DIAGRAM_VIRTUALLY_FRAME" val="{&quot;height&quot;:310.5,&quot;left&quot;:45.05,&quot;top&quot;:129.6,&quot;width&quot;:870.1}"/>
 </p:tagLst>
 </file>
 
 <file path=ppt/tags/tag13.xml><?xml version="1.0" encoding="utf-8"?>
 <p:tagLst xmlns:p="http://schemas.openxmlformats.org/presentationml/2006/main">
-  <p:tag name="KSO_WM_DIAGRAM_VIRTUALLY_FRAME" val="{&quot;height&quot;:180,&quot;left&quot;:57.6,&quot;top&quot;:129.6,&quot;width&quot;:842.4}"/>
+  <p:tag name="KSO_WM_DIAGRAM_VIRTUALLY_FRAME" val="{&quot;height&quot;:310.5,&quot;left&quot;:45.05,&quot;top&quot;:129.6,&quot;width&quot;:870.1}"/>
 </p:tagLst>
 </file>
 
 <file path=ppt/tags/tag14.xml><?xml version="1.0" encoding="utf-8"?>
 <p:tagLst xmlns:p="http://schemas.openxmlformats.org/presentationml/2006/main">
-  <p:tag name="KSO_WM_DIAGRAM_VIRTUALLY_FRAME" val="{&quot;height&quot;:180,&quot;left&quot;:57.6,&quot;top&quot;:129.6,&quot;width&quot;:842.4}"/>
+  <p:tag name="KSO_WM_DIAGRAM_VIRTUALLY_FRAME" val="{&quot;height&quot;:310.5,&quot;left&quot;:45.05,&quot;top&quot;:129.6,&quot;width&quot;:870.1}"/>
 </p:tagLst>
 </file>
 
 <file path=ppt/tags/tag15.xml><?xml version="1.0" encoding="utf-8"?>
 <p:tagLst xmlns:p="http://schemas.openxmlformats.org/presentationml/2006/main">
-  <p:tag name="KSO_WM_DIAGRAM_VIRTUALLY_FRAME" val="{&quot;height&quot;:180,&quot;left&quot;:57.6,&quot;top&quot;:129.6,&quot;width&quot;:842.4}"/>
+  <p:tag name="KSO_WM_DIAGRAM_VIRTUALLY_FRAME" val="{&quot;height&quot;:310.5,&quot;left&quot;:45.05,&quot;top&quot;:129.6,&quot;width&quot;:870.1}"/>
+</p:tagLst>
+</file>
+
+<file path=ppt/tags/tag16.xml><?xml version="1.0" encoding="utf-8"?>
+<p:tagLst xmlns:p="http://schemas.openxmlformats.org/presentationml/2006/main">
+  <p:tag name="KSO_WM_DIAGRAM_VIRTUALLY_FRAME" val="{&quot;height&quot;:310.5,&quot;left&quot;:45.05,&quot;top&quot;:129.6,&quot;width&quot;:870.1}"/>
+</p:tagLst>
+</file>
+
+<file path=ppt/tags/tag17.xml><?xml version="1.0" encoding="utf-8"?>
+<p:tagLst xmlns:p="http://schemas.openxmlformats.org/presentationml/2006/main">
+  <p:tag name="KSO_WM_DIAGRAM_VIRTUALLY_FRAME" val="{&quot;height&quot;:310.5,&quot;left&quot;:45.05,&quot;top&quot;:129.6,&quot;width&quot;:870.1}"/>
+</p:tagLst>
+</file>
+
+<file path=ppt/tags/tag18.xml><?xml version="1.0" encoding="utf-8"?>
+<p:tagLst xmlns:p="http://schemas.openxmlformats.org/presentationml/2006/main">
+  <p:tag name="KSO_WM_DIAGRAM_VIRTUALLY_FRAME" val="{&quot;height&quot;:310.5,&quot;left&quot;:45.05,&quot;top&quot;:129.6,&quot;width&quot;:870.1}"/>
+</p:tagLst>
+</file>
+
+<file path=ppt/tags/tag19.xml><?xml version="1.0" encoding="utf-8"?>
+<p:tagLst xmlns:p="http://schemas.openxmlformats.org/presentationml/2006/main">
+  <p:tag name="KSO_WM_DIAGRAM_VIRTUALLY_FRAME" val="{&quot;height&quot;:310.5,&quot;left&quot;:45.05,&quot;top&quot;:129.6,&quot;width&quot;:870.1}"/>
 </p:tagLst>
 </file>
 
 <file path=ppt/tags/tag2.xml><?xml version="1.0" encoding="utf-8"?>
 <p:tagLst xmlns:p="http://schemas.openxmlformats.org/presentationml/2006/main">
-  <p:tag name="KSO_WM_DIAGRAM_VIRTUALLY_FRAME" val="{&quot;height&quot;:180,&quot;left&quot;:57.6,&quot;top&quot;:129.6,&quot;width&quot;:842.4}"/>
+  <p:tag name="KSO_WM_DIAGRAM_VIRTUALLY_FRAME" val="{&quot;height&quot;:256.15,&quot;left&quot;:544.95,&quot;top&quot;:224.05,&quot;width&quot;:360}"/>
+</p:tagLst>
+</file>
+
+<file path=ppt/tags/tag20.xml><?xml version="1.0" encoding="utf-8"?>
+<p:tagLst xmlns:p="http://schemas.openxmlformats.org/presentationml/2006/main">
+  <p:tag name="KSO_WM_DIAGRAM_VIRTUALLY_FRAME" val="{&quot;height&quot;:310.5,&quot;left&quot;:45.05,&quot;top&quot;:129.6,&quot;width&quot;:870.1}"/>
+</p:tagLst>
+</file>
+
+<file path=ppt/tags/tag21.xml><?xml version="1.0" encoding="utf-8"?>
+<p:tagLst xmlns:p="http://schemas.openxmlformats.org/presentationml/2006/main">
+  <p:tag name="KSO_WM_DIAGRAM_VIRTUALLY_FRAME" val="{&quot;height&quot;:310.5,&quot;left&quot;:45.05,&quot;top&quot;:129.6,&quot;width&quot;:870.1}"/>
+</p:tagLst>
+</file>
+
+<file path=ppt/tags/tag22.xml><?xml version="1.0" encoding="utf-8"?>
+<p:tagLst xmlns:p="http://schemas.openxmlformats.org/presentationml/2006/main">
+  <p:tag name="KSO_WM_DIAGRAM_VIRTUALLY_FRAME" val="{&quot;height&quot;:310.5,&quot;left&quot;:45.05,&quot;top&quot;:129.6,&quot;width&quot;:870.1}"/>
+</p:tagLst>
+</file>
+
+<file path=ppt/tags/tag23.xml><?xml version="1.0" encoding="utf-8"?>
+<p:tagLst xmlns:p="http://schemas.openxmlformats.org/presentationml/2006/main">
+  <p:tag name="KSO_WM_DIAGRAM_VIRTUALLY_FRAME" val="{&quot;height&quot;:310.5,&quot;left&quot;:45.05,&quot;top&quot;:129.6,&quot;width&quot;:870.1}"/>
+</p:tagLst>
+</file>
+
+<file path=ppt/tags/tag24.xml><?xml version="1.0" encoding="utf-8"?>
+<p:tagLst xmlns:p="http://schemas.openxmlformats.org/presentationml/2006/main">
+  <p:tag name="KSO_WM_DIAGRAM_VIRTUALLY_FRAME" val="{&quot;height&quot;:146,&quot;left&quot;:57.6,&quot;top&quot;:109.7,&quot;width&quot;:871.2}"/>
+</p:tagLst>
+</file>
+
+<file path=ppt/tags/tag25.xml><?xml version="1.0" encoding="utf-8"?>
+<p:tagLst xmlns:p="http://schemas.openxmlformats.org/presentationml/2006/main">
+  <p:tag name="KSO_WM_DIAGRAM_VIRTUALLY_FRAME" val="{&quot;height&quot;:146,&quot;left&quot;:57.6,&quot;top&quot;:109.7,&quot;width&quot;:871.2}"/>
+</p:tagLst>
+</file>
+
+<file path=ppt/tags/tag26.xml><?xml version="1.0" encoding="utf-8"?>
+<p:tagLst xmlns:p="http://schemas.openxmlformats.org/presentationml/2006/main">
+  <p:tag name="KSO_WM_DIAGRAM_VIRTUALLY_FRAME" val="{&quot;height&quot;:146,&quot;left&quot;:57.6,&quot;top&quot;:109.7,&quot;width&quot;:871.2}"/>
+</p:tagLst>
+</file>
+
+<file path=ppt/tags/tag27.xml><?xml version="1.0" encoding="utf-8"?>
+<p:tagLst xmlns:p="http://schemas.openxmlformats.org/presentationml/2006/main">
+  <p:tag name="KSO_WM_DIAGRAM_VIRTUALLY_FRAME" val="{&quot;height&quot;:146,&quot;left&quot;:57.6,&quot;top&quot;:109.7,&quot;width&quot;:871.2}"/>
+</p:tagLst>
+</file>
+
+<file path=ppt/tags/tag28.xml><?xml version="1.0" encoding="utf-8"?>
+<p:tagLst xmlns:p="http://schemas.openxmlformats.org/presentationml/2006/main">
+  <p:tag name="KSO_WM_DIAGRAM_VIRTUALLY_FRAME" val="{&quot;height&quot;:146,&quot;left&quot;:57.6,&quot;top&quot;:109.7,&quot;width&quot;:871.2}"/>
+</p:tagLst>
+</file>
+
+<file path=ppt/tags/tag29.xml><?xml version="1.0" encoding="utf-8"?>
+<p:tagLst xmlns:p="http://schemas.openxmlformats.org/presentationml/2006/main">
+  <p:tag name="KSO_WM_DIAGRAM_VIRTUALLY_FRAME" val="{&quot;height&quot;:146,&quot;left&quot;:57.6,&quot;top&quot;:109.7,&quot;width&quot;:871.2}"/>
 </p:tagLst>
 </file>
 
 <file path=ppt/tags/tag3.xml><?xml version="1.0" encoding="utf-8"?>
 <p:tagLst xmlns:p="http://schemas.openxmlformats.org/presentationml/2006/main">
-  <p:tag name="KSO_WM_DIAGRAM_VIRTUALLY_FRAME" val="{&quot;height&quot;:180,&quot;left&quot;:57.6,&quot;top&quot;:129.6,&quot;width&quot;:842.4}"/>
+  <p:tag name="KSO_WM_DIAGRAM_VIRTUALLY_FRAME" val="{&quot;height&quot;:256.15,&quot;left&quot;:544.95,&quot;top&quot;:224.05,&quot;width&quot;:360}"/>
+</p:tagLst>
+</file>
+
+<file path=ppt/tags/tag30.xml><?xml version="1.0" encoding="utf-8"?>
+<p:tagLst xmlns:p="http://schemas.openxmlformats.org/presentationml/2006/main">
+  <p:tag name="KSO_WM_DIAGRAM_VIRTUALLY_FRAME" val="{&quot;height&quot;:146,&quot;left&quot;:57.6,&quot;top&quot;:109.7,&quot;width&quot;:871.2}"/>
+</p:tagLst>
+</file>
+
+<file path=ppt/tags/tag31.xml><?xml version="1.0" encoding="utf-8"?>
+<p:tagLst xmlns:p="http://schemas.openxmlformats.org/presentationml/2006/main">
+  <p:tag name="KSO_WM_DIAGRAM_VIRTUALLY_FRAME" val="{&quot;height&quot;:146,&quot;left&quot;:57.6,&quot;top&quot;:109.7,&quot;width&quot;:871.2}"/>
+</p:tagLst>
+</file>
+
+<file path=ppt/tags/tag32.xml><?xml version="1.0" encoding="utf-8"?>
+<p:tagLst xmlns:p="http://schemas.openxmlformats.org/presentationml/2006/main">
+  <p:tag name="KSO_WM_DIAGRAM_VIRTUALLY_FRAME" val="{&quot;height&quot;:146,&quot;left&quot;:57.6,&quot;top&quot;:109.7,&quot;width&quot;:871.2}"/>
+</p:tagLst>
+</file>
+
+<file path=ppt/tags/tag33.xml><?xml version="1.0" encoding="utf-8"?>
+<p:tagLst xmlns:p="http://schemas.openxmlformats.org/presentationml/2006/main">
+  <p:tag name="KSO_WM_DIAGRAM_VIRTUALLY_FRAME" val="{&quot;height&quot;:146,&quot;left&quot;:57.6,&quot;top&quot;:109.7,&quot;width&quot;:871.2}"/>
+</p:tagLst>
+</file>
+
+<file path=ppt/tags/tag34.xml><?xml version="1.0" encoding="utf-8"?>
+<p:tagLst xmlns:p="http://schemas.openxmlformats.org/presentationml/2006/main">
+  <p:tag name="KSO_WM_DIAGRAM_VIRTUALLY_FRAME" val="{&quot;height&quot;:146,&quot;left&quot;:57.6,&quot;top&quot;:109.7,&quot;width&quot;:871.2}"/>
+</p:tagLst>
+</file>
+
+<file path=ppt/tags/tag35.xml><?xml version="1.0" encoding="utf-8"?>
+<p:tagLst xmlns:p="http://schemas.openxmlformats.org/presentationml/2006/main">
+  <p:tag name="KSO_WM_DIAGRAM_VIRTUALLY_FRAME" val="{&quot;height&quot;:146,&quot;left&quot;:57.6,&quot;top&quot;:109.7,&quot;width&quot;:871.2}"/>
+</p:tagLst>
+</file>
+
+<file path=ppt/tags/tag36.xml><?xml version="1.0" encoding="utf-8"?>
+<p:tagLst xmlns:p="http://schemas.openxmlformats.org/presentationml/2006/main">
+  <p:tag name="KSO_WM_DIAGRAM_VIRTUALLY_FRAME" val="{&quot;height&quot;:167.95,&quot;left&quot;:57.6,&quot;top&quot;:144,&quot;width&quot;:828}"/>
+</p:tagLst>
+</file>
+
+<file path=ppt/tags/tag37.xml><?xml version="1.0" encoding="utf-8"?>
+<p:tagLst xmlns:p="http://schemas.openxmlformats.org/presentationml/2006/main">
+  <p:tag name="KSO_WM_DIAGRAM_VIRTUALLY_FRAME" val="{&quot;height&quot;:167.95,&quot;left&quot;:57.6,&quot;top&quot;:144,&quot;width&quot;:828}"/>
+</p:tagLst>
+</file>
+
+<file path=ppt/tags/tag38.xml><?xml version="1.0" encoding="utf-8"?>
+<p:tagLst xmlns:p="http://schemas.openxmlformats.org/presentationml/2006/main">
+  <p:tag name="KSO_WM_DIAGRAM_VIRTUALLY_FRAME" val="{&quot;height&quot;:167.95,&quot;left&quot;:57.6,&quot;top&quot;:144,&quot;width&quot;:828}"/>
+</p:tagLst>
+</file>
+
+<file path=ppt/tags/tag39.xml><?xml version="1.0" encoding="utf-8"?>
+<p:tagLst xmlns:p="http://schemas.openxmlformats.org/presentationml/2006/main">
+  <p:tag name="KSO_WM_DIAGRAM_VIRTUALLY_FRAME" val="{&quot;height&quot;:167.95,&quot;left&quot;:57.6,&quot;top&quot;:144,&quot;width&quot;:828}"/>
 </p:tagLst>
 </file>
 
 <file path=ppt/tags/tag4.xml><?xml version="1.0" encoding="utf-8"?>
 <p:tagLst xmlns:p="http://schemas.openxmlformats.org/presentationml/2006/main">
-  <p:tag name="KSO_WM_DIAGRAM_VIRTUALLY_FRAME" val="{&quot;height&quot;:180,&quot;left&quot;:57.6,&quot;top&quot;:129.6,&quot;width&quot;:842.4}"/>
+  <p:tag name="KSO_WM_DIAGRAM_VIRTUALLY_FRAME" val="{&quot;height&quot;:256.15,&quot;left&quot;:544.95,&quot;top&quot;:224.05,&quot;width&quot;:360}"/>
+</p:tagLst>
+</file>
+
+<file path=ppt/tags/tag40.xml><?xml version="1.0" encoding="utf-8"?>
+<p:tagLst xmlns:p="http://schemas.openxmlformats.org/presentationml/2006/main">
+  <p:tag name="KSO_WM_DIAGRAM_VIRTUALLY_FRAME" val="{&quot;height&quot;:167.95,&quot;left&quot;:57.6,&quot;top&quot;:144,&quot;width&quot;:828}"/>
+</p:tagLst>
+</file>
+
+<file path=ppt/tags/tag41.xml><?xml version="1.0" encoding="utf-8"?>
+<p:tagLst xmlns:p="http://schemas.openxmlformats.org/presentationml/2006/main">
+  <p:tag name="KSO_WM_DIAGRAM_VIRTUALLY_FRAME" val="{&quot;height&quot;:167.95,&quot;left&quot;:57.6,&quot;top&quot;:144,&quot;width&quot;:828}"/>
+</p:tagLst>
+</file>
+
+<file path=ppt/tags/tag42.xml><?xml version="1.0" encoding="utf-8"?>
+<p:tagLst xmlns:p="http://schemas.openxmlformats.org/presentationml/2006/main">
+  <p:tag name="KSO_WM_DIAGRAM_VIRTUALLY_FRAME" val="{&quot;height&quot;:167.95,&quot;left&quot;:57.6,&quot;top&quot;:144,&quot;width&quot;:828}"/>
+</p:tagLst>
+</file>
+
+<file path=ppt/tags/tag43.xml><?xml version="1.0" encoding="utf-8"?>
+<p:tagLst xmlns:p="http://schemas.openxmlformats.org/presentationml/2006/main">
+  <p:tag name="KSO_WM_DIAGRAM_VIRTUALLY_FRAME" val="{&quot;height&quot;:167.95,&quot;left&quot;:57.6,&quot;top&quot;:144,&quot;width&quot;:828}"/>
+</p:tagLst>
+</file>
+
+<file path=ppt/tags/tag44.xml><?xml version="1.0" encoding="utf-8"?>
+<p:tagLst xmlns:p="http://schemas.openxmlformats.org/presentationml/2006/main">
+  <p:tag name="KSO_WM_DIAGRAM_VIRTUALLY_FRAME" val="{&quot;height&quot;:316.8,&quot;left&quot;:57.6,&quot;top&quot;:115.2,&quot;width&quot;:604.8}"/>
+</p:tagLst>
+</file>
+
+<file path=ppt/tags/tag45.xml><?xml version="1.0" encoding="utf-8"?>
+<p:tagLst xmlns:p="http://schemas.openxmlformats.org/presentationml/2006/main">
+  <p:tag name="KSO_WM_DIAGRAM_VIRTUALLY_FRAME" val="{&quot;height&quot;:316.8,&quot;left&quot;:57.6,&quot;top&quot;:115.2,&quot;width&quot;:604.8}"/>
+</p:tagLst>
+</file>
+
+<file path=ppt/tags/tag46.xml><?xml version="1.0" encoding="utf-8"?>
+<p:tagLst xmlns:p="http://schemas.openxmlformats.org/presentationml/2006/main">
+  <p:tag name="KSO_WM_DIAGRAM_VIRTUALLY_FRAME" val="{&quot;height&quot;:316.8,&quot;left&quot;:57.6,&quot;top&quot;:115.2,&quot;width&quot;:604.8}"/>
+</p:tagLst>
+</file>
+
+<file path=ppt/tags/tag47.xml><?xml version="1.0" encoding="utf-8"?>
+<p:tagLst xmlns:p="http://schemas.openxmlformats.org/presentationml/2006/main">
+  <p:tag name="KSO_WM_DIAGRAM_VIRTUALLY_FRAME" val="{&quot;height&quot;:316.8,&quot;left&quot;:57.6,&quot;top&quot;:115.2,&quot;width&quot;:604.8}"/>
+</p:tagLst>
+</file>
+
+<file path=ppt/tags/tag48.xml><?xml version="1.0" encoding="utf-8"?>
+<p:tagLst xmlns:p="http://schemas.openxmlformats.org/presentationml/2006/main">
+  <p:tag name="KSO_WM_DIAGRAM_VIRTUALLY_FRAME" val="{&quot;height&quot;:316.8,&quot;left&quot;:57.6,&quot;top&quot;:115.2,&quot;width&quot;:604.8}"/>
+</p:tagLst>
+</file>
+
+<file path=ppt/tags/tag49.xml><?xml version="1.0" encoding="utf-8"?>
+<p:tagLst xmlns:p="http://schemas.openxmlformats.org/presentationml/2006/main">
+  <p:tag name="KSO_WM_DIAGRAM_VIRTUALLY_FRAME" val="{&quot;height&quot;:316.8,&quot;left&quot;:57.6,&quot;top&quot;:115.2,&quot;width&quot;:604.8}"/>
 </p:tagLst>
 </file>
 
 <file path=ppt/tags/tag5.xml><?xml version="1.0" encoding="utf-8"?>
 <p:tagLst xmlns:p="http://schemas.openxmlformats.org/presentationml/2006/main">
-  <p:tag name="KSO_WM_DIAGRAM_VIRTUALLY_FRAME" val="{&quot;height&quot;:180,&quot;left&quot;:57.6,&quot;top&quot;:129.6,&quot;width&quot;:842.4}"/>
+  <p:tag name="KSO_WM_DIAGRAM_VIRTUALLY_FRAME" val="{&quot;height&quot;:256.15,&quot;left&quot;:544.95,&quot;top&quot;:224.05,&quot;width&quot;:360}"/>
+</p:tagLst>
+</file>
+
+<file path=ppt/tags/tag50.xml><?xml version="1.0" encoding="utf-8"?>
+<p:tagLst xmlns:p="http://schemas.openxmlformats.org/presentationml/2006/main">
+  <p:tag name="KSO_WM_DIAGRAM_VIRTUALLY_FRAME" val="{&quot;height&quot;:316.8,&quot;left&quot;:57.6,&quot;top&quot;:115.2,&quot;width&quot;:604.8}"/>
+</p:tagLst>
+</file>
+
+<file path=ppt/tags/tag51.xml><?xml version="1.0" encoding="utf-8"?>
+<p:tagLst xmlns:p="http://schemas.openxmlformats.org/presentationml/2006/main">
+  <p:tag name="KSO_WM_DIAGRAM_VIRTUALLY_FRAME" val="{&quot;height&quot;:316.8,&quot;left&quot;:57.6,&quot;top&quot;:115.2,&quot;width&quot;:604.8}"/>
+</p:tagLst>
+</file>
+
+<file path=ppt/tags/tag52.xml><?xml version="1.0" encoding="utf-8"?>
+<p:tagLst xmlns:p="http://schemas.openxmlformats.org/presentationml/2006/main">
+  <p:tag name="KSO_WM_DIAGRAM_VIRTUALLY_FRAME" val="{&quot;height&quot;:316.8,&quot;left&quot;:57.6,&quot;top&quot;:115.2,&quot;width&quot;:604.8}"/>
+</p:tagLst>
+</file>
+
+<file path=ppt/tags/tag53.xml><?xml version="1.0" encoding="utf-8"?>
+<p:tagLst xmlns:p="http://schemas.openxmlformats.org/presentationml/2006/main">
+  <p:tag name="KSO_WM_DIAGRAM_VIRTUALLY_FRAME" val="{&quot;height&quot;:316.8,&quot;left&quot;:57.6,&quot;top&quot;:115.2,&quot;width&quot;:604.8}"/>
+</p:tagLst>
+</file>
+
+<file path=ppt/tags/tag54.xml><?xml version="1.0" encoding="utf-8"?>
+<p:tagLst xmlns:p="http://schemas.openxmlformats.org/presentationml/2006/main">
+  <p:tag name="KSO_WM_DIAGRAM_VIRTUALLY_FRAME" val="{&quot;height&quot;:316.8,&quot;left&quot;:57.6,&quot;top&quot;:115.2,&quot;width&quot;:604.8}"/>
+</p:tagLst>
+</file>
+
+<file path=ppt/tags/tag55.xml><?xml version="1.0" encoding="utf-8"?>
+<p:tagLst xmlns:p="http://schemas.openxmlformats.org/presentationml/2006/main">
+  <p:tag name="KSO_WM_DIAGRAM_VIRTUALLY_FRAME" val="{&quot;height&quot;:316.8,&quot;left&quot;:57.6,&quot;top&quot;:115.2,&quot;width&quot;:604.8}"/>
+</p:tagLst>
+</file>
+
+<file path=ppt/tags/tag56.xml><?xml version="1.0" encoding="utf-8"?>
+<p:tagLst xmlns:p="http://schemas.openxmlformats.org/presentationml/2006/main">
+  <p:tag name="KSO_WM_DIAGRAM_VIRTUALLY_FRAME" val="{&quot;height&quot;:316.8,&quot;left&quot;:57.6,&quot;top&quot;:115.2,&quot;width&quot;:604.8}"/>
+</p:tagLst>
+</file>
+
+<file path=ppt/tags/tag57.xml><?xml version="1.0" encoding="utf-8"?>
+<p:tagLst xmlns:p="http://schemas.openxmlformats.org/presentationml/2006/main">
+  <p:tag name="KSO_WM_DIAGRAM_VIRTUALLY_FRAME" val="{&quot;height&quot;:316.8,&quot;left&quot;:57.6,&quot;top&quot;:115.2,&quot;width&quot;:604.8}"/>
+</p:tagLst>
+</file>
+
+<file path=ppt/tags/tag58.xml><?xml version="1.0" encoding="utf-8"?>
+<p:tagLst xmlns:p="http://schemas.openxmlformats.org/presentationml/2006/main">
+  <p:tag name="KSO_WM_DIAGRAM_VIRTUALLY_FRAME" val="{&quot;height&quot;:316.8,&quot;left&quot;:57.6,&quot;top&quot;:115.2,&quot;width&quot;:604.8}"/>
+</p:tagLst>
+</file>
+
+<file path=ppt/tags/tag59.xml><?xml version="1.0" encoding="utf-8"?>
+<p:tagLst xmlns:p="http://schemas.openxmlformats.org/presentationml/2006/main">
+  <p:tag name="KSO_WM_DIAGRAM_VIRTUALLY_FRAME" val="{&quot;height&quot;:316.8,&quot;left&quot;:57.6,&quot;top&quot;:115.2,&quot;width&quot;:604.8}"/>
 </p:tagLst>
 </file>
 
 <file path=ppt/tags/tag6.xml><?xml version="1.0" encoding="utf-8"?>
 <p:tagLst xmlns:p="http://schemas.openxmlformats.org/presentationml/2006/main">
-  <p:tag name="KSO_WM_DIAGRAM_VIRTUALLY_FRAME" val="{&quot;height&quot;:180,&quot;left&quot;:57.6,&quot;top&quot;:129.6,&quot;width&quot;:842.4}"/>
+  <p:tag name="KSO_WM_DIAGRAM_VIRTUALLY_FRAME" val="{&quot;height&quot;:256.15,&quot;left&quot;:544.95,&quot;top&quot;:224.05,&quot;width&quot;:360}"/>
+</p:tagLst>
+</file>
+
+<file path=ppt/tags/tag60.xml><?xml version="1.0" encoding="utf-8"?>
+<p:tagLst xmlns:p="http://schemas.openxmlformats.org/presentationml/2006/main">
+  <p:tag name="KSO_WM_DIAGRAM_VIRTUALLY_FRAME" val="{&quot;height&quot;:316.8,&quot;left&quot;:57.6,&quot;top&quot;:115.2,&quot;width&quot;:604.8}"/>
+</p:tagLst>
+</file>
+
+<file path=ppt/tags/tag61.xml><?xml version="1.0" encoding="utf-8"?>
+<p:tagLst xmlns:p="http://schemas.openxmlformats.org/presentationml/2006/main">
+  <p:tag name="KSO_WM_DIAGRAM_VIRTUALLY_FRAME" val="{&quot;height&quot;:316.8,&quot;left&quot;:57.6,&quot;top&quot;:115.2,&quot;width&quot;:604.8}"/>
+</p:tagLst>
+</file>
+
+<file path=ppt/tags/tag62.xml><?xml version="1.0" encoding="utf-8"?>
+<p:tagLst xmlns:p="http://schemas.openxmlformats.org/presentationml/2006/main">
+  <p:tag name="KSO_WM_DIAGRAM_VIRTUALLY_FRAME" val="{&quot;height&quot;:316.8,&quot;left&quot;:57.6,&quot;top&quot;:115.2,&quot;width&quot;:604.8}"/>
+</p:tagLst>
+</file>
+
+<file path=ppt/tags/tag63.xml><?xml version="1.0" encoding="utf-8"?>
+<p:tagLst xmlns:p="http://schemas.openxmlformats.org/presentationml/2006/main">
+  <p:tag name="KSO_WM_DIAGRAM_VIRTUALLY_FRAME" val="{&quot;height&quot;:316.8,&quot;left&quot;:57.6,&quot;top&quot;:115.2,&quot;width&quot;:604.8}"/>
+</p:tagLst>
+</file>
+
+<file path=ppt/tags/tag64.xml><?xml version="1.0" encoding="utf-8"?>
+<p:tagLst xmlns:p="http://schemas.openxmlformats.org/presentationml/2006/main">
+  <p:tag name="KSO_WM_DIAGRAM_VIRTUALLY_FRAME" val="{&quot;height&quot;:316.8,&quot;left&quot;:57.6,&quot;top&quot;:115.2,&quot;width&quot;:604.8}"/>
+</p:tagLst>
+</file>
+
+<file path=ppt/tags/tag65.xml><?xml version="1.0" encoding="utf-8"?>
+<p:tagLst xmlns:p="http://schemas.openxmlformats.org/presentationml/2006/main">
+  <p:tag name="KSO_WM_DIAGRAM_VIRTUALLY_FRAME" val="{&quot;height&quot;:316.8,&quot;left&quot;:57.6,&quot;top&quot;:115.2,&quot;width&quot;:604.8}"/>
+</p:tagLst>
+</file>
+
+<file path=ppt/tags/tag66.xml><?xml version="1.0" encoding="utf-8"?>
+<p:tagLst xmlns:p="http://schemas.openxmlformats.org/presentationml/2006/main">
+  <p:tag name="KSO_WM_DIAGRAM_VIRTUALLY_FRAME" val="{&quot;height&quot;:316.8,&quot;left&quot;:57.6,&quot;top&quot;:115.2,&quot;width&quot;:604.8}"/>
+</p:tagLst>
+</file>
+
+<file path=ppt/tags/tag67.xml><?xml version="1.0" encoding="utf-8"?>
+<p:tagLst xmlns:p="http://schemas.openxmlformats.org/presentationml/2006/main">
+  <p:tag name="KSO_WM_DIAGRAM_VIRTUALLY_FRAME" val="{&quot;height&quot;:316.8,&quot;left&quot;:57.6,&quot;top&quot;:115.2,&quot;width&quot;:604.8}"/>
+</p:tagLst>
+</file>
+
+<file path=ppt/tags/tag68.xml><?xml version="1.0" encoding="utf-8"?>
+<p:tagLst xmlns:p="http://schemas.openxmlformats.org/presentationml/2006/main">
+  <p:tag name="KSO_WM_DIAGRAM_VIRTUALLY_FRAME" val="{&quot;height&quot;:316.8,&quot;left&quot;:57.6,&quot;top&quot;:115.2,&quot;width&quot;:604.8}"/>
+</p:tagLst>
+</file>
+
+<file path=ppt/tags/tag69.xml><?xml version="1.0" encoding="utf-8"?>
+<p:tagLst xmlns:p="http://schemas.openxmlformats.org/presentationml/2006/main">
+  <p:tag name="KSO_WM_DIAGRAM_VIRTUALLY_FRAME" val="{&quot;height&quot;:316.8,&quot;left&quot;:57.6,&quot;top&quot;:115.2,&quot;width&quot;:604.8}"/>
 </p:tagLst>
 </file>
 
 <file path=ppt/tags/tag7.xml><?xml version="1.0" encoding="utf-8"?>
 <p:tagLst xmlns:p="http://schemas.openxmlformats.org/presentationml/2006/main">
-  <p:tag name="KSO_WM_DIAGRAM_VIRTUALLY_FRAME" val="{&quot;height&quot;:180,&quot;left&quot;:57.6,&quot;top&quot;:129.6,&quot;width&quot;:842.4}"/>
+  <p:tag name="KSO_WM_DIAGRAM_VIRTUALLY_FRAME" val="{&quot;height&quot;:256.15,&quot;left&quot;:544.95,&quot;top&quot;:224.05,&quot;width&quot;:360}"/>
+</p:tagLst>
+</file>
+
+<file path=ppt/tags/tag70.xml><?xml version="1.0" encoding="utf-8"?>
+<p:tagLst xmlns:p="http://schemas.openxmlformats.org/presentationml/2006/main">
+  <p:tag name="KSO_WM_DIAGRAM_VIRTUALLY_FRAME" val="{&quot;height&quot;:144,&quot;left&quot;:54.775039370078744,&quot;top&quot;:144,&quot;width&quot;:721.7749606299212}"/>
+</p:tagLst>
+</file>
+
+<file path=ppt/tags/tag71.xml><?xml version="1.0" encoding="utf-8"?>
+<p:tagLst xmlns:p="http://schemas.openxmlformats.org/presentationml/2006/main">
+  <p:tag name="KSO_WM_DIAGRAM_VIRTUALLY_FRAME" val="{&quot;height&quot;:144,&quot;left&quot;:54.775039370078744,&quot;top&quot;:144,&quot;width&quot;:721.7749606299212}"/>
+</p:tagLst>
+</file>
+
+<file path=ppt/tags/tag72.xml><?xml version="1.0" encoding="utf-8"?>
+<p:tagLst xmlns:p="http://schemas.openxmlformats.org/presentationml/2006/main">
+  <p:tag name="KSO_WM_DIAGRAM_VIRTUALLY_FRAME" val="{&quot;height&quot;:144,&quot;left&quot;:54.775039370078744,&quot;top&quot;:144,&quot;width&quot;:721.7749606299212}"/>
+</p:tagLst>
+</file>
+
+<file path=ppt/tags/tag73.xml><?xml version="1.0" encoding="utf-8"?>
+<p:tagLst xmlns:p="http://schemas.openxmlformats.org/presentationml/2006/main">
+  <p:tag name="KSO_WM_DIAGRAM_VIRTUALLY_FRAME" val="{&quot;height&quot;:144,&quot;left&quot;:54.775039370078744,&quot;top&quot;:144,&quot;width&quot;:721.7749606299212}"/>
+</p:tagLst>
+</file>
+
+<file path=ppt/tags/tag74.xml><?xml version="1.0" encoding="utf-8"?>
+<p:tagLst xmlns:p="http://schemas.openxmlformats.org/presentationml/2006/main">
+  <p:tag name="KSO_WM_DIAGRAM_VIRTUALLY_FRAME" val="{&quot;height&quot;:144,&quot;left&quot;:54.775039370078744,&quot;top&quot;:144,&quot;width&quot;:721.7749606299212}"/>
+</p:tagLst>
+</file>
+
+<file path=ppt/tags/tag75.xml><?xml version="1.0" encoding="utf-8"?>
+<p:tagLst xmlns:p="http://schemas.openxmlformats.org/presentationml/2006/main">
+  <p:tag name="KSO_WM_DIAGRAM_VIRTUALLY_FRAME" val="{&quot;height&quot;:144,&quot;left&quot;:54.775039370078744,&quot;top&quot;:144,&quot;width&quot;:721.7749606299212}"/>
+</p:tagLst>
+</file>
+
+<file path=ppt/tags/tag76.xml><?xml version="1.0" encoding="utf-8"?>
+<p:tagLst xmlns:p="http://schemas.openxmlformats.org/presentationml/2006/main">
+  <p:tag name="KSO_WM_DIAGRAM_VIRTUALLY_FRAME" val="{&quot;height&quot;:144,&quot;left&quot;:54.775039370078744,&quot;top&quot;:144,&quot;width&quot;:721.7749606299212}"/>
+</p:tagLst>
+</file>
+
+<file path=ppt/tags/tag77.xml><?xml version="1.0" encoding="utf-8"?>
+<p:tagLst xmlns:p="http://schemas.openxmlformats.org/presentationml/2006/main">
+  <p:tag name="KSO_WM_DIAGRAM_VIRTUALLY_FRAME" val="{&quot;height&quot;:144,&quot;left&quot;:54.775039370078744,&quot;top&quot;:144,&quot;width&quot;:721.7749606299212}"/>
+</p:tagLst>
+</file>
+
+<file path=ppt/tags/tag78.xml><?xml version="1.0" encoding="utf-8"?>
+<p:tagLst xmlns:p="http://schemas.openxmlformats.org/presentationml/2006/main">
+  <p:tag name="KSO_WM_DIAGRAM_VIRTUALLY_FRAME" val="{&quot;height&quot;:144,&quot;left&quot;:54.775039370078744,&quot;top&quot;:144,&quot;width&quot;:721.7749606299212}"/>
+</p:tagLst>
+</file>
+
+<file path=ppt/tags/tag79.xml><?xml version="1.0" encoding="utf-8"?>
+<p:tagLst xmlns:p="http://schemas.openxmlformats.org/presentationml/2006/main">
+  <p:tag name="KSO_WM_DIAGRAM_VIRTUALLY_FRAME" val="{&quot;height&quot;:144,&quot;left&quot;:54.775039370078744,&quot;top&quot;:144,&quot;width&quot;:721.7749606299212}"/>
 </p:tagLst>
 </file>
 
 <file path=ppt/tags/tag8.xml><?xml version="1.0" encoding="utf-8"?>
 <p:tagLst xmlns:p="http://schemas.openxmlformats.org/presentationml/2006/main">
-  <p:tag name="KSO_WM_DIAGRAM_VIRTUALLY_FRAME" val="{&quot;height&quot;:180,&quot;left&quot;:57.6,&quot;top&quot;:129.6,&quot;width&quot;:842.4}"/>
+  <p:tag name="KSO_WM_DIAGRAM_VIRTUALLY_FRAME" val="{&quot;height&quot;:256.15,&quot;left&quot;:544.95,&quot;top&quot;:224.05,&quot;width&quot;:360}"/>
+</p:tagLst>
+</file>
+
+<file path=ppt/tags/tag80.xml><?xml version="1.0" encoding="utf-8"?>
+<p:tagLst xmlns:p="http://schemas.openxmlformats.org/presentationml/2006/main">
+  <p:tag name="KSO_WM_DIAGRAM_VIRTUALLY_FRAME" val="{&quot;height&quot;:144,&quot;left&quot;:54.775039370078744,&quot;top&quot;:144,&quot;width&quot;:721.7749606299212}"/>
+</p:tagLst>
+</file>
+
+<file path=ppt/tags/tag81.xml><?xml version="1.0" encoding="utf-8"?>
+<p:tagLst xmlns:p="http://schemas.openxmlformats.org/presentationml/2006/main">
+  <p:tag name="KSO_WM_DIAGRAM_VIRTUALLY_FRAME" val="{&quot;height&quot;:144,&quot;left&quot;:54.775039370078744,&quot;top&quot;:144,&quot;width&quot;:721.7749606299212}"/>
+</p:tagLst>
+</file>
+
+<file path=ppt/tags/tag82.xml><?xml version="1.0" encoding="utf-8"?>
+<p:tagLst xmlns:p="http://schemas.openxmlformats.org/presentationml/2006/main">
+  <p:tag name="KSO_WM_DIAGRAM_VIRTUALLY_FRAME" val="{&quot;height&quot;:144,&quot;left&quot;:54.775039370078744,&quot;top&quot;:144,&quot;width&quot;:721.7749606299212}"/>
+</p:tagLst>
+</file>
+
+<file path=ppt/tags/tag83.xml><?xml version="1.0" encoding="utf-8"?>
+<p:tagLst xmlns:p="http://schemas.openxmlformats.org/presentationml/2006/main">
+  <p:tag name="KSO_WM_DIAGRAM_VIRTUALLY_FRAME" val="{&quot;height&quot;:144,&quot;left&quot;:54.775039370078744,&quot;top&quot;:144,&quot;width&quot;:721.7749606299212}"/>
+</p:tagLst>
+</file>
+
+<file path=ppt/tags/tag84.xml><?xml version="1.0" encoding="utf-8"?>
+<p:tagLst xmlns:p="http://schemas.openxmlformats.org/presentationml/2006/main">
+  <p:tag name="KSO_WM_DIAGRAM_VIRTUALLY_FRAME" val="{&quot;height&quot;:144,&quot;left&quot;:54.775039370078744,&quot;top&quot;:144,&quot;width&quot;:721.7749606299212}"/>
+</p:tagLst>
+</file>
+
+<file path=ppt/tags/tag85.xml><?xml version="1.0" encoding="utf-8"?>
+<p:tagLst xmlns:p="http://schemas.openxmlformats.org/presentationml/2006/main">
+  <p:tag name="KSO_WM_DIAGRAM_VIRTUALLY_FRAME" val="{&quot;height&quot;:144,&quot;left&quot;:54.775039370078744,&quot;top&quot;:144,&quot;width&quot;:721.7749606299212}"/>
+</p:tagLst>
+</file>
+
+<file path=ppt/tags/tag86.xml><?xml version="1.0" encoding="utf-8"?>
+<p:tagLst xmlns:p="http://schemas.openxmlformats.org/presentationml/2006/main">
+  <p:tag name="KSO_WM_DIAGRAM_VIRTUALLY_FRAME" val="{&quot;height&quot;:431.9,&quot;left&quot;:57.6,&quot;top&quot;:107.15,&quot;width&quot;:856.8}"/>
+</p:tagLst>
+</file>
+
+<file path=ppt/tags/tag87.xml><?xml version="1.0" encoding="utf-8"?>
+<p:tagLst xmlns:p="http://schemas.openxmlformats.org/presentationml/2006/main">
+  <p:tag name="KSO_WM_DIAGRAM_VIRTUALLY_FRAME" val="{&quot;height&quot;:431.9,&quot;left&quot;:57.6,&quot;top&quot;:107.15,&quot;width&quot;:856.8}"/>
+</p:tagLst>
+</file>
+
+<file path=ppt/tags/tag88.xml><?xml version="1.0" encoding="utf-8"?>
+<p:tagLst xmlns:p="http://schemas.openxmlformats.org/presentationml/2006/main">
+  <p:tag name="KSO_WM_DIAGRAM_VIRTUALLY_FRAME" val="{&quot;height&quot;:431.9,&quot;left&quot;:57.6,&quot;top&quot;:107.15,&quot;width&quot;:856.8}"/>
+</p:tagLst>
+</file>
+
+<file path=ppt/tags/tag89.xml><?xml version="1.0" encoding="utf-8"?>
+<p:tagLst xmlns:p="http://schemas.openxmlformats.org/presentationml/2006/main">
+  <p:tag name="KSO_WM_DIAGRAM_VIRTUALLY_FRAME" val="{&quot;height&quot;:431.9,&quot;left&quot;:57.6,&quot;top&quot;:107.15,&quot;width&quot;:856.8}"/>
 </p:tagLst>
 </file>
 
 <file path=ppt/tags/tag9.xml><?xml version="1.0" encoding="utf-8"?>
 <p:tagLst xmlns:p="http://schemas.openxmlformats.org/presentationml/2006/main">
-  <p:tag name="KSO_WM_DIAGRAM_VIRTUALLY_FRAME" val="{&quot;height&quot;:180,&quot;left&quot;:57.6,&quot;top&quot;:129.6,&quot;width&quot;:842.4}"/>
+  <p:tag name="KSO_WM_DIAGRAM_VIRTUALLY_FRAME" val="{&quot;height&quot;:310.5,&quot;left&quot;:45.05,&quot;top&quot;:129.6,&quot;width&quot;:870.1}"/>
+</p:tagLst>
+</file>
+
+<file path=ppt/tags/tag90.xml><?xml version="1.0" encoding="utf-8"?>
+<p:tagLst xmlns:p="http://schemas.openxmlformats.org/presentationml/2006/main">
+  <p:tag name="KSO_WM_DIAGRAM_VIRTUALLY_FRAME" val="{&quot;height&quot;:431.9,&quot;left&quot;:57.6,&quot;top&quot;:107.15,&quot;width&quot;:856.8}"/>
+</p:tagLst>
+</file>
+
+<file path=ppt/tags/tag91.xml><?xml version="1.0" encoding="utf-8"?>
+<p:tagLst xmlns:p="http://schemas.openxmlformats.org/presentationml/2006/main">
+  <p:tag name="KSO_WM_DIAGRAM_VIRTUALLY_FRAME" val="{&quot;height&quot;:431.9,&quot;left&quot;:57.6,&quot;top&quot;:107.15,&quot;width&quot;:856.8}"/>
+</p:tagLst>
+</file>
+
+<file path=ppt/tags/tag92.xml><?xml version="1.0" encoding="utf-8"?>
+<p:tagLst xmlns:p="http://schemas.openxmlformats.org/presentationml/2006/main">
+  <p:tag name="KSO_WM_DIAGRAM_VIRTUALLY_FRAME" val="{&quot;height&quot;:431.9,&quot;left&quot;:57.6,&quot;top&quot;:107.15,&quot;width&quot;:856.8}"/>
+</p:tagLst>
+</file>
+
+<file path=ppt/tags/tag93.xml><?xml version="1.0" encoding="utf-8"?>
+<p:tagLst xmlns:p="http://schemas.openxmlformats.org/presentationml/2006/main">
+  <p:tag name="KSO_WM_DIAGRAM_VIRTUALLY_FRAME" val="{&quot;height&quot;:431.9,&quot;left&quot;:57.6,&quot;top&quot;:107.15,&quot;width&quot;:856.8}"/>
+</p:tagLst>
+</file>
+
+<file path=ppt/tags/tag94.xml><?xml version="1.0" encoding="utf-8"?>
+<p:tagLst xmlns:p="http://schemas.openxmlformats.org/presentationml/2006/main">
+  <p:tag name="KSO_WM_DIAGRAM_VIRTUALLY_FRAME" val="{&quot;height&quot;:431.9,&quot;left&quot;:57.6,&quot;top&quot;:107.15,&quot;width&quot;:856.8}"/>
+</p:tagLst>
+</file>
+
+<file path=ppt/tags/tag95.xml><?xml version="1.0" encoding="utf-8"?>
+<p:tagLst xmlns:p="http://schemas.openxmlformats.org/presentationml/2006/main">
+  <p:tag name="KSO_WM_DIAGRAM_VIRTUALLY_FRAME" val="{&quot;height&quot;:431.9,&quot;left&quot;:57.6,&quot;top&quot;:107.15,&quot;width&quot;:856.8}"/>
+</p:tagLst>
+</file>
+
+<file path=ppt/tags/tag96.xml><?xml version="1.0" encoding="utf-8"?>
+<p:tagLst xmlns:p="http://schemas.openxmlformats.org/presentationml/2006/main">
+  <p:tag name="KSO_WM_DIAGRAM_VIRTUALLY_FRAME" val="{&quot;height&quot;:431.9,&quot;left&quot;:57.6,&quot;top&quot;:107.15,&quot;width&quot;:856.8}"/>
+</p:tagLst>
+</file>
+
+<file path=ppt/tags/tag97.xml><?xml version="1.0" encoding="utf-8"?>
+<p:tagLst xmlns:p="http://schemas.openxmlformats.org/presentationml/2006/main">
+  <p:tag name="KSO_WM_DIAGRAM_VIRTUALLY_FRAME" val="{&quot;height&quot;:292.95,&quot;left&quot;:144,&quot;top&quot;:147.6,&quot;width&quot;:489.85}"/>
+</p:tagLst>
+</file>
+
+<file path=ppt/tags/tag98.xml><?xml version="1.0" encoding="utf-8"?>
+<p:tagLst xmlns:p="http://schemas.openxmlformats.org/presentationml/2006/main">
+  <p:tag name="KSO_WM_DIAGRAM_VIRTUALLY_FRAME" val="{&quot;height&quot;:292.95,&quot;left&quot;:144,&quot;top&quot;:147.6,&quot;width&quot;:489.85}"/>
+</p:tagLst>
+</file>
+
+<file path=ppt/tags/tag99.xml><?xml version="1.0" encoding="utf-8"?>
+<p:tagLst xmlns:p="http://schemas.openxmlformats.org/presentationml/2006/main">
+  <p:tag name="KSO_WM_DIAGRAM_VIRTUALLY_FRAME" val="{&quot;height&quot;:292.95,&quot;left&quot;:144,&quot;top&quot;:147.6,&quot;width&quot;:489.85}"/>
 </p:tagLst>
 </file>
 
